--- a/learn_nextjs/1_React-Foundation/React_Foundations.pptx
+++ b/learn_nextjs/1_React-Foundation/React_Foundations.pptx
@@ -5,24 +5,25 @@
     <p:sldMasterId id="2147483648" r:id="rId4"/>
   </p:sldMasterIdLst>
   <p:notesMasterIdLst>
-    <p:notesMasterId r:id="rId17"/>
+    <p:notesMasterId r:id="rId18"/>
   </p:notesMasterIdLst>
   <p:handoutMasterIdLst>
-    <p:handoutMasterId r:id="rId18"/>
+    <p:handoutMasterId r:id="rId19"/>
   </p:handoutMasterIdLst>
   <p:sldIdLst>
     <p:sldId id="256" r:id="rId5"/>
     <p:sldId id="257" r:id="rId6"/>
     <p:sldId id="258" r:id="rId7"/>
     <p:sldId id="259" r:id="rId8"/>
-    <p:sldId id="260" r:id="rId9"/>
-    <p:sldId id="261" r:id="rId10"/>
-    <p:sldId id="262" r:id="rId11"/>
-    <p:sldId id="263" r:id="rId12"/>
-    <p:sldId id="264" r:id="rId13"/>
-    <p:sldId id="265" r:id="rId14"/>
-    <p:sldId id="266" r:id="rId15"/>
-    <p:sldId id="267" r:id="rId16"/>
+    <p:sldId id="268" r:id="rId9"/>
+    <p:sldId id="269" r:id="rId10"/>
+    <p:sldId id="261" r:id="rId11"/>
+    <p:sldId id="262" r:id="rId12"/>
+    <p:sldId id="263" r:id="rId13"/>
+    <p:sldId id="264" r:id="rId14"/>
+    <p:sldId id="265" r:id="rId15"/>
+    <p:sldId id="266" r:id="rId16"/>
+    <p:sldId id="267" r:id="rId17"/>
   </p:sldIdLst>
   <p:sldSz cx="12192000" cy="6858000"/>
   <p:notesSz cx="6858000" cy="9144000"/>
@@ -3371,6 +3372,114 @@
         <p:cNvPr id="1" name="">
           <a:extLst>
             <a:ext uri="{FF2B5EF4-FFF2-40B4-BE49-F238E27FC236}">
+              <a16:creationId xmlns:a16="http://schemas.microsoft.com/office/drawing/2014/main" id="{902F9C6C-B079-7AB8-CEAA-E4BF73F9CA7C}"/>
+            </a:ext>
+          </a:extLst>
+        </p:cNvPr>
+        <p:cNvGrpSpPr/>
+        <p:nvPr/>
+      </p:nvGrpSpPr>
+      <p:grpSpPr>
+        <a:xfrm>
+          <a:off x="0" y="0"/>
+          <a:ext cx="0" cy="0"/>
+          <a:chOff x="0" y="0"/>
+          <a:chExt cx="0" cy="0"/>
+        </a:xfrm>
+      </p:grpSpPr>
+      <p:sp>
+        <p:nvSpPr>
+          <p:cNvPr id="2" name="Slide Image Placeholder 1">
+            <a:extLst>
+              <a:ext uri="{FF2B5EF4-FFF2-40B4-BE49-F238E27FC236}">
+                <a16:creationId xmlns:a16="http://schemas.microsoft.com/office/drawing/2014/main" id="{FAA0B5A4-C7A5-8D27-EB5F-CF1407F291D1}"/>
+              </a:ext>
+            </a:extLst>
+          </p:cNvPr>
+          <p:cNvSpPr>
+            <a:spLocks noGrp="1" noRot="1" noChangeAspect="1"/>
+          </p:cNvSpPr>
+          <p:nvPr>
+            <p:ph type="sldImg"/>
+          </p:nvPr>
+        </p:nvSpPr>
+        <p:spPr/>
+      </p:sp>
+      <p:sp>
+        <p:nvSpPr>
+          <p:cNvPr id="3" name="Notes Placeholder 2">
+            <a:extLst>
+              <a:ext uri="{FF2B5EF4-FFF2-40B4-BE49-F238E27FC236}">
+                <a16:creationId xmlns:a16="http://schemas.microsoft.com/office/drawing/2014/main" id="{0A87F1F4-B884-0095-0C7F-8DECAE7F4CA8}"/>
+              </a:ext>
+            </a:extLst>
+          </p:cNvPr>
+          <p:cNvSpPr>
+            <a:spLocks noGrp="1"/>
+          </p:cNvSpPr>
+          <p:nvPr>
+            <p:ph type="body" idx="1"/>
+          </p:nvPr>
+        </p:nvSpPr>
+        <p:spPr/>
+        <p:txBody>
+          <a:bodyPr/>
+          <a:lstStyle/>
+          <a:p>
+            <a:endParaRPr lang="en-US" dirty="0"/>
+          </a:p>
+        </p:txBody>
+      </p:sp>
+      <p:sp>
+        <p:nvSpPr>
+          <p:cNvPr id="4" name="Slide Number Placeholder 3">
+            <a:extLst>
+              <a:ext uri="{FF2B5EF4-FFF2-40B4-BE49-F238E27FC236}">
+                <a16:creationId xmlns:a16="http://schemas.microsoft.com/office/drawing/2014/main" id="{907408E4-78E4-9D72-6CF6-B5FE68160B6F}"/>
+              </a:ext>
+            </a:extLst>
+          </p:cNvPr>
+          <p:cNvSpPr>
+            <a:spLocks noGrp="1"/>
+          </p:cNvSpPr>
+          <p:nvPr>
+            <p:ph type="sldNum" sz="quarter" idx="5"/>
+          </p:nvPr>
+        </p:nvSpPr>
+        <p:spPr/>
+        <p:txBody>
+          <a:bodyPr/>
+          <a:lstStyle/>
+          <a:p>
+            <a:fld id="{EE000EEB-8338-48D7-8EE8-EE0082EF7602}" type="slidenum">
+              <a:rPr lang="en-US" smtClean="0"/>
+              <a:t>10</a:t>
+            </a:fld>
+            <a:endParaRPr lang="en-US" dirty="0"/>
+          </a:p>
+        </p:txBody>
+      </p:sp>
+    </p:spTree>
+    <p:extLst>
+      <p:ext uri="{BB962C8B-B14F-4D97-AF65-F5344CB8AC3E}">
+        <p14:creationId xmlns:p14="http://schemas.microsoft.com/office/powerpoint/2010/main" val="4218423121"/>
+      </p:ext>
+    </p:extLst>
+  </p:cSld>
+  <p:clrMapOvr>
+    <a:masterClrMapping/>
+  </p:clrMapOvr>
+</p:notes>
+</file>
+
+<file path=ppt/notesSlides/notesSlide11.xml><?xml version="1.0" encoding="utf-8"?>
+<p:notes xmlns:a="http://schemas.openxmlformats.org/drawingml/2006/main" xmlns:r="http://schemas.openxmlformats.org/officeDocument/2006/relationships" xmlns:p="http://schemas.openxmlformats.org/presentationml/2006/main">
+  <p:cSld>
+    <p:spTree>
+      <p:nvGrpSpPr>
+        <p:cNvPr id="1" name="">
+          <a:extLst>
+            <a:ext uri="{FF2B5EF4-FFF2-40B4-BE49-F238E27FC236}">
               <a16:creationId xmlns:a16="http://schemas.microsoft.com/office/drawing/2014/main" id="{9832F325-B241-BB6F-3D43-87548EBA570A}"/>
             </a:ext>
           </a:extLst>
@@ -3452,7 +3561,7 @@
           <a:p>
             <a:fld id="{EE000EEB-8338-48D7-8EE8-EE0082EF7602}" type="slidenum">
               <a:rPr lang="en-US" smtClean="0"/>
-              <a:t>10</a:t>
+              <a:t>11</a:t>
             </a:fld>
             <a:endParaRPr lang="en-US" dirty="0"/>
           </a:p>
@@ -3471,7 +3580,7 @@
 </p:notes>
 </file>
 
-<file path=ppt/notesSlides/notesSlide11.xml><?xml version="1.0" encoding="utf-8"?>
+<file path=ppt/notesSlides/notesSlide12.xml><?xml version="1.0" encoding="utf-8"?>
 <p:notes xmlns:a="http://schemas.openxmlformats.org/drawingml/2006/main" xmlns:r="http://schemas.openxmlformats.org/officeDocument/2006/relationships" xmlns:p="http://schemas.openxmlformats.org/presentationml/2006/main">
   <p:cSld>
     <p:spTree>
@@ -3560,7 +3669,7 @@
           <a:p>
             <a:fld id="{EE000EEB-8338-48D7-8EE8-EE0082EF7602}" type="slidenum">
               <a:rPr lang="en-US" smtClean="0"/>
-              <a:t>11</a:t>
+              <a:t>12</a:t>
             </a:fld>
             <a:endParaRPr lang="en-US" dirty="0"/>
           </a:p>
@@ -3579,7 +3688,7 @@
 </p:notes>
 </file>
 
-<file path=ppt/notesSlides/notesSlide12.xml><?xml version="1.0" encoding="utf-8"?>
+<file path=ppt/notesSlides/notesSlide13.xml><?xml version="1.0" encoding="utf-8"?>
 <p:notes xmlns:a="http://schemas.openxmlformats.org/drawingml/2006/main" xmlns:r="http://schemas.openxmlformats.org/officeDocument/2006/relationships" xmlns:p="http://schemas.openxmlformats.org/presentationml/2006/main">
   <p:cSld>
     <p:spTree>
@@ -3668,7 +3777,7 @@
           <a:p>
             <a:fld id="{EE000EEB-8338-48D7-8EE8-EE0082EF7602}" type="slidenum">
               <a:rPr lang="en-US" smtClean="0"/>
-              <a:t>12</a:t>
+              <a:t>13</a:t>
             </a:fld>
             <a:endParaRPr lang="en-US" dirty="0"/>
           </a:p>
@@ -4019,7 +4128,7 @@
         <p:cNvPr id="1" name="">
           <a:extLst>
             <a:ext uri="{FF2B5EF4-FFF2-40B4-BE49-F238E27FC236}">
-              <a16:creationId xmlns:a16="http://schemas.microsoft.com/office/drawing/2014/main" id="{2D509FAC-89CB-E70B-1744-6080A0235E1A}"/>
+              <a16:creationId xmlns:a16="http://schemas.microsoft.com/office/drawing/2014/main" id="{D2797703-FEC9-435B-3756-B47C0C7EC64D}"/>
             </a:ext>
           </a:extLst>
         </p:cNvPr>
@@ -4039,7 +4148,7 @@
           <p:cNvPr id="2" name="Slide Image Placeholder 1">
             <a:extLst>
               <a:ext uri="{FF2B5EF4-FFF2-40B4-BE49-F238E27FC236}">
-                <a16:creationId xmlns:a16="http://schemas.microsoft.com/office/drawing/2014/main" id="{7E2A55DF-18C7-E62B-D0CD-253A3B69AF4D}"/>
+                <a16:creationId xmlns:a16="http://schemas.microsoft.com/office/drawing/2014/main" id="{6803AB88-E10A-C9B3-9A1C-F9E8E6C6F123}"/>
               </a:ext>
             </a:extLst>
           </p:cNvPr>
@@ -4057,7 +4166,7 @@
           <p:cNvPr id="3" name="Notes Placeholder 2">
             <a:extLst>
               <a:ext uri="{FF2B5EF4-FFF2-40B4-BE49-F238E27FC236}">
-                <a16:creationId xmlns:a16="http://schemas.microsoft.com/office/drawing/2014/main" id="{A7734E14-2E1C-42D7-3652-6EDBDA02DA09}"/>
+                <a16:creationId xmlns:a16="http://schemas.microsoft.com/office/drawing/2014/main" id="{86E8342F-2EE7-8B83-7850-85A2B6CB2E8E}"/>
               </a:ext>
             </a:extLst>
           </p:cNvPr>
@@ -4082,7 +4191,7 @@
           <p:cNvPr id="4" name="Slide Number Placeholder 3">
             <a:extLst>
               <a:ext uri="{FF2B5EF4-FFF2-40B4-BE49-F238E27FC236}">
-                <a16:creationId xmlns:a16="http://schemas.microsoft.com/office/drawing/2014/main" id="{6D6D67A8-366B-9440-80AA-534803B07030}"/>
+                <a16:creationId xmlns:a16="http://schemas.microsoft.com/office/drawing/2014/main" id="{5B4410D0-1BE7-5F59-763C-73ED808105C5}"/>
               </a:ext>
             </a:extLst>
           </p:cNvPr>
@@ -4109,7 +4218,7 @@
     </p:spTree>
     <p:extLst>
       <p:ext uri="{BB962C8B-B14F-4D97-AF65-F5344CB8AC3E}">
-        <p14:creationId xmlns:p14="http://schemas.microsoft.com/office/powerpoint/2010/main" val="3018161664"/>
+        <p14:creationId xmlns:p14="http://schemas.microsoft.com/office/powerpoint/2010/main" val="3165685792"/>
       </p:ext>
     </p:extLst>
   </p:cSld>
@@ -4120,6 +4229,114 @@
 </file>
 
 <file path=ppt/notesSlides/notesSlide6.xml><?xml version="1.0" encoding="utf-8"?>
+<p:notes xmlns:a="http://schemas.openxmlformats.org/drawingml/2006/main" xmlns:r="http://schemas.openxmlformats.org/officeDocument/2006/relationships" xmlns:p="http://schemas.openxmlformats.org/presentationml/2006/main">
+  <p:cSld>
+    <p:spTree>
+      <p:nvGrpSpPr>
+        <p:cNvPr id="1" name="">
+          <a:extLst>
+            <a:ext uri="{FF2B5EF4-FFF2-40B4-BE49-F238E27FC236}">
+              <a16:creationId xmlns:a16="http://schemas.microsoft.com/office/drawing/2014/main" id="{B7CE024E-BFF6-04D0-B6DD-6BCA3D9A68F3}"/>
+            </a:ext>
+          </a:extLst>
+        </p:cNvPr>
+        <p:cNvGrpSpPr/>
+        <p:nvPr/>
+      </p:nvGrpSpPr>
+      <p:grpSpPr>
+        <a:xfrm>
+          <a:off x="0" y="0"/>
+          <a:ext cx="0" cy="0"/>
+          <a:chOff x="0" y="0"/>
+          <a:chExt cx="0" cy="0"/>
+        </a:xfrm>
+      </p:grpSpPr>
+      <p:sp>
+        <p:nvSpPr>
+          <p:cNvPr id="2" name="Slide Image Placeholder 1">
+            <a:extLst>
+              <a:ext uri="{FF2B5EF4-FFF2-40B4-BE49-F238E27FC236}">
+                <a16:creationId xmlns:a16="http://schemas.microsoft.com/office/drawing/2014/main" id="{784EAE64-B780-AF64-3E01-2B71C4EECA95}"/>
+              </a:ext>
+            </a:extLst>
+          </p:cNvPr>
+          <p:cNvSpPr>
+            <a:spLocks noGrp="1" noRot="1" noChangeAspect="1"/>
+          </p:cNvSpPr>
+          <p:nvPr>
+            <p:ph type="sldImg"/>
+          </p:nvPr>
+        </p:nvSpPr>
+        <p:spPr/>
+      </p:sp>
+      <p:sp>
+        <p:nvSpPr>
+          <p:cNvPr id="3" name="Notes Placeholder 2">
+            <a:extLst>
+              <a:ext uri="{FF2B5EF4-FFF2-40B4-BE49-F238E27FC236}">
+                <a16:creationId xmlns:a16="http://schemas.microsoft.com/office/drawing/2014/main" id="{ACF3185D-96F4-8DA7-5A61-966748847525}"/>
+              </a:ext>
+            </a:extLst>
+          </p:cNvPr>
+          <p:cNvSpPr>
+            <a:spLocks noGrp="1"/>
+          </p:cNvSpPr>
+          <p:nvPr>
+            <p:ph type="body" idx="1"/>
+          </p:nvPr>
+        </p:nvSpPr>
+        <p:spPr/>
+        <p:txBody>
+          <a:bodyPr/>
+          <a:lstStyle/>
+          <a:p>
+            <a:endParaRPr lang="en-US" dirty="0"/>
+          </a:p>
+        </p:txBody>
+      </p:sp>
+      <p:sp>
+        <p:nvSpPr>
+          <p:cNvPr id="4" name="Slide Number Placeholder 3">
+            <a:extLst>
+              <a:ext uri="{FF2B5EF4-FFF2-40B4-BE49-F238E27FC236}">
+                <a16:creationId xmlns:a16="http://schemas.microsoft.com/office/drawing/2014/main" id="{99B32405-1018-0243-C2EB-FA963B0E871D}"/>
+              </a:ext>
+            </a:extLst>
+          </p:cNvPr>
+          <p:cNvSpPr>
+            <a:spLocks noGrp="1"/>
+          </p:cNvSpPr>
+          <p:nvPr>
+            <p:ph type="sldNum" sz="quarter" idx="5"/>
+          </p:nvPr>
+        </p:nvSpPr>
+        <p:spPr/>
+        <p:txBody>
+          <a:bodyPr/>
+          <a:lstStyle/>
+          <a:p>
+            <a:fld id="{EE000EEB-8338-48D7-8EE8-EE0082EF7602}" type="slidenum">
+              <a:rPr lang="en-US" smtClean="0"/>
+              <a:t>6</a:t>
+            </a:fld>
+            <a:endParaRPr lang="en-US" dirty="0"/>
+          </a:p>
+        </p:txBody>
+      </p:sp>
+    </p:spTree>
+    <p:extLst>
+      <p:ext uri="{BB962C8B-B14F-4D97-AF65-F5344CB8AC3E}">
+        <p14:creationId xmlns:p14="http://schemas.microsoft.com/office/powerpoint/2010/main" val="567098286"/>
+      </p:ext>
+    </p:extLst>
+  </p:cSld>
+  <p:clrMapOvr>
+    <a:masterClrMapping/>
+  </p:clrMapOvr>
+</p:notes>
+</file>
+
+<file path=ppt/notesSlides/notesSlide7.xml><?xml version="1.0" encoding="utf-8"?>
 <p:notes xmlns:a="http://schemas.openxmlformats.org/drawingml/2006/main" xmlns:r="http://schemas.openxmlformats.org/officeDocument/2006/relationships" xmlns:p="http://schemas.openxmlformats.org/presentationml/2006/main">
   <p:cSld>
     <p:spTree>
@@ -4208,7 +4425,7 @@
           <a:p>
             <a:fld id="{EE000EEB-8338-48D7-8EE8-EE0082EF7602}" type="slidenum">
               <a:rPr lang="en-US" smtClean="0"/>
-              <a:t>6</a:t>
+              <a:t>7</a:t>
             </a:fld>
             <a:endParaRPr lang="en-US" dirty="0"/>
           </a:p>
@@ -4227,7 +4444,7 @@
 </p:notes>
 </file>
 
-<file path=ppt/notesSlides/notesSlide7.xml><?xml version="1.0" encoding="utf-8"?>
+<file path=ppt/notesSlides/notesSlide8.xml><?xml version="1.0" encoding="utf-8"?>
 <p:notes xmlns:a="http://schemas.openxmlformats.org/drawingml/2006/main" xmlns:r="http://schemas.openxmlformats.org/officeDocument/2006/relationships" xmlns:p="http://schemas.openxmlformats.org/presentationml/2006/main">
   <p:cSld>
     <p:spTree>
@@ -4316,7 +4533,7 @@
           <a:p>
             <a:fld id="{EE000EEB-8338-48D7-8EE8-EE0082EF7602}" type="slidenum">
               <a:rPr lang="en-US" smtClean="0"/>
-              <a:t>7</a:t>
+              <a:t>8</a:t>
             </a:fld>
             <a:endParaRPr lang="en-US" dirty="0"/>
           </a:p>
@@ -4335,7 +4552,7 @@
 </p:notes>
 </file>
 
-<file path=ppt/notesSlides/notesSlide8.xml><?xml version="1.0" encoding="utf-8"?>
+<file path=ppt/notesSlides/notesSlide9.xml><?xml version="1.0" encoding="utf-8"?>
 <p:notes xmlns:a="http://schemas.openxmlformats.org/drawingml/2006/main" xmlns:r="http://schemas.openxmlformats.org/officeDocument/2006/relationships" xmlns:p="http://schemas.openxmlformats.org/presentationml/2006/main">
   <p:cSld>
     <p:spTree>
@@ -4424,7 +4641,7 @@
           <a:p>
             <a:fld id="{EE000EEB-8338-48D7-8EE8-EE0082EF7602}" type="slidenum">
               <a:rPr lang="en-US" smtClean="0"/>
-              <a:t>8</a:t>
+              <a:t>9</a:t>
             </a:fld>
             <a:endParaRPr lang="en-US" dirty="0"/>
           </a:p>
@@ -4434,114 +4651,6 @@
     <p:extLst>
       <p:ext uri="{BB962C8B-B14F-4D97-AF65-F5344CB8AC3E}">
         <p14:creationId xmlns:p14="http://schemas.microsoft.com/office/powerpoint/2010/main" val="4294787381"/>
-      </p:ext>
-    </p:extLst>
-  </p:cSld>
-  <p:clrMapOvr>
-    <a:masterClrMapping/>
-  </p:clrMapOvr>
-</p:notes>
-</file>
-
-<file path=ppt/notesSlides/notesSlide9.xml><?xml version="1.0" encoding="utf-8"?>
-<p:notes xmlns:a="http://schemas.openxmlformats.org/drawingml/2006/main" xmlns:r="http://schemas.openxmlformats.org/officeDocument/2006/relationships" xmlns:p="http://schemas.openxmlformats.org/presentationml/2006/main">
-  <p:cSld>
-    <p:spTree>
-      <p:nvGrpSpPr>
-        <p:cNvPr id="1" name="">
-          <a:extLst>
-            <a:ext uri="{FF2B5EF4-FFF2-40B4-BE49-F238E27FC236}">
-              <a16:creationId xmlns:a16="http://schemas.microsoft.com/office/drawing/2014/main" id="{902F9C6C-B079-7AB8-CEAA-E4BF73F9CA7C}"/>
-            </a:ext>
-          </a:extLst>
-        </p:cNvPr>
-        <p:cNvGrpSpPr/>
-        <p:nvPr/>
-      </p:nvGrpSpPr>
-      <p:grpSpPr>
-        <a:xfrm>
-          <a:off x="0" y="0"/>
-          <a:ext cx="0" cy="0"/>
-          <a:chOff x="0" y="0"/>
-          <a:chExt cx="0" cy="0"/>
-        </a:xfrm>
-      </p:grpSpPr>
-      <p:sp>
-        <p:nvSpPr>
-          <p:cNvPr id="2" name="Slide Image Placeholder 1">
-            <a:extLst>
-              <a:ext uri="{FF2B5EF4-FFF2-40B4-BE49-F238E27FC236}">
-                <a16:creationId xmlns:a16="http://schemas.microsoft.com/office/drawing/2014/main" id="{FAA0B5A4-C7A5-8D27-EB5F-CF1407F291D1}"/>
-              </a:ext>
-            </a:extLst>
-          </p:cNvPr>
-          <p:cNvSpPr>
-            <a:spLocks noGrp="1" noRot="1" noChangeAspect="1"/>
-          </p:cNvSpPr>
-          <p:nvPr>
-            <p:ph type="sldImg"/>
-          </p:nvPr>
-        </p:nvSpPr>
-        <p:spPr/>
-      </p:sp>
-      <p:sp>
-        <p:nvSpPr>
-          <p:cNvPr id="3" name="Notes Placeholder 2">
-            <a:extLst>
-              <a:ext uri="{FF2B5EF4-FFF2-40B4-BE49-F238E27FC236}">
-                <a16:creationId xmlns:a16="http://schemas.microsoft.com/office/drawing/2014/main" id="{0A87F1F4-B884-0095-0C7F-8DECAE7F4CA8}"/>
-              </a:ext>
-            </a:extLst>
-          </p:cNvPr>
-          <p:cNvSpPr>
-            <a:spLocks noGrp="1"/>
-          </p:cNvSpPr>
-          <p:nvPr>
-            <p:ph type="body" idx="1"/>
-          </p:nvPr>
-        </p:nvSpPr>
-        <p:spPr/>
-        <p:txBody>
-          <a:bodyPr/>
-          <a:lstStyle/>
-          <a:p>
-            <a:endParaRPr lang="en-US" dirty="0"/>
-          </a:p>
-        </p:txBody>
-      </p:sp>
-      <p:sp>
-        <p:nvSpPr>
-          <p:cNvPr id="4" name="Slide Number Placeholder 3">
-            <a:extLst>
-              <a:ext uri="{FF2B5EF4-FFF2-40B4-BE49-F238E27FC236}">
-                <a16:creationId xmlns:a16="http://schemas.microsoft.com/office/drawing/2014/main" id="{907408E4-78E4-9D72-6CF6-B5FE68160B6F}"/>
-              </a:ext>
-            </a:extLst>
-          </p:cNvPr>
-          <p:cNvSpPr>
-            <a:spLocks noGrp="1"/>
-          </p:cNvSpPr>
-          <p:nvPr>
-            <p:ph type="sldNum" sz="quarter" idx="5"/>
-          </p:nvPr>
-        </p:nvSpPr>
-        <p:spPr/>
-        <p:txBody>
-          <a:bodyPr/>
-          <a:lstStyle/>
-          <a:p>
-            <a:fld id="{EE000EEB-8338-48D7-8EE8-EE0082EF7602}" type="slidenum">
-              <a:rPr lang="en-US" smtClean="0"/>
-              <a:t>9</a:t>
-            </a:fld>
-            <a:endParaRPr lang="en-US" dirty="0"/>
-          </a:p>
-        </p:txBody>
-      </p:sp>
-    </p:spTree>
-    <p:extLst>
-      <p:ext uri="{BB962C8B-B14F-4D97-AF65-F5344CB8AC3E}">
-        <p14:creationId xmlns:p14="http://schemas.microsoft.com/office/powerpoint/2010/main" val="4218423121"/>
       </p:ext>
     </p:extLst>
   </p:cSld>
@@ -11186,6 +11295,550 @@
         <p:cNvPr id="1" name="">
           <a:extLst>
             <a:ext uri="{FF2B5EF4-FFF2-40B4-BE49-F238E27FC236}">
+              <a16:creationId xmlns:a16="http://schemas.microsoft.com/office/drawing/2014/main" id="{25084D4A-2E2A-5A2B-55E3-DF125F64AB2F}"/>
+            </a:ext>
+          </a:extLst>
+        </p:cNvPr>
+        <p:cNvGrpSpPr/>
+        <p:nvPr/>
+      </p:nvGrpSpPr>
+      <p:grpSpPr>
+        <a:xfrm>
+          <a:off x="0" y="0"/>
+          <a:ext cx="0" cy="0"/>
+          <a:chOff x="0" y="0"/>
+          <a:chExt cx="0" cy="0"/>
+        </a:xfrm>
+      </p:grpSpPr>
+      <p:pic>
+        <p:nvPicPr>
+          <p:cNvPr id="5" name="Picture 4" descr="chain links">
+            <a:extLst>
+              <a:ext uri="{FF2B5EF4-FFF2-40B4-BE49-F238E27FC236}">
+                <a16:creationId xmlns:a16="http://schemas.microsoft.com/office/drawing/2014/main" id="{9EF105C0-8B22-F8B0-B41E-8CFD85EACE0A}"/>
+              </a:ext>
+            </a:extLst>
+          </p:cNvPr>
+          <p:cNvPicPr>
+            <a:picLocks noChangeAspect="1"/>
+          </p:cNvPicPr>
+          <p:nvPr/>
+        </p:nvPicPr>
+        <p:blipFill rotWithShape="1">
+          <a:blip r:embed="rId3">
+            <a:duotone>
+              <a:prstClr val="black"/>
+              <a:schemeClr val="accent5">
+                <a:tint val="45000"/>
+                <a:satMod val="400000"/>
+              </a:schemeClr>
+            </a:duotone>
+            <a:alphaModFix amt="25000"/>
+          </a:blip>
+          <a:srcRect t="23391" r="9091"/>
+          <a:stretch/>
+        </p:blipFill>
+        <p:spPr>
+          <a:xfrm>
+            <a:off x="0" y="10"/>
+            <a:ext cx="12191980" cy="6857990"/>
+          </a:xfrm>
+          <a:prstGeom prst="rect">
+            <a:avLst/>
+          </a:prstGeom>
+        </p:spPr>
+      </p:pic>
+      <p:sp>
+        <p:nvSpPr>
+          <p:cNvPr id="2" name="Title 1">
+            <a:extLst>
+              <a:ext uri="{FF2B5EF4-FFF2-40B4-BE49-F238E27FC236}">
+                <a16:creationId xmlns:a16="http://schemas.microsoft.com/office/drawing/2014/main" id="{0D68510A-545D-E612-33C8-92615E563448}"/>
+              </a:ext>
+            </a:extLst>
+          </p:cNvPr>
+          <p:cNvSpPr>
+            <a:spLocks noGrp="1"/>
+          </p:cNvSpPr>
+          <p:nvPr>
+            <p:ph type="ctrTitle"/>
+          </p:nvPr>
+        </p:nvSpPr>
+        <p:spPr>
+          <a:xfrm>
+            <a:off x="4474323" y="961696"/>
+            <a:ext cx="7602064" cy="1266497"/>
+          </a:xfrm>
+        </p:spPr>
+        <p:txBody>
+          <a:bodyPr anchor="ctr">
+            <a:normAutofit/>
+          </a:bodyPr>
+          <a:lstStyle/>
+          <a:p>
+            <a:r>
+              <a:rPr lang="en-US" sz="6000" b="1" dirty="0"/>
+              <a:t>REACT Foundations</a:t>
+            </a:r>
+            <a:endParaRPr lang="ru-RU" sz="6000" b="1" dirty="0"/>
+          </a:p>
+        </p:txBody>
+      </p:sp>
+      <p:sp>
+        <p:nvSpPr>
+          <p:cNvPr id="3" name="Subtitle 2">
+            <a:extLst>
+              <a:ext uri="{FF2B5EF4-FFF2-40B4-BE49-F238E27FC236}">
+                <a16:creationId xmlns:a16="http://schemas.microsoft.com/office/drawing/2014/main" id="{493941F4-35C0-C181-B474-9FE4B36D75D3}"/>
+              </a:ext>
+            </a:extLst>
+          </p:cNvPr>
+          <p:cNvSpPr>
+            <a:spLocks noGrp="1"/>
+          </p:cNvSpPr>
+          <p:nvPr>
+            <p:ph type="subTitle" idx="1"/>
+          </p:nvPr>
+        </p:nvSpPr>
+        <p:spPr>
+          <a:xfrm>
+            <a:off x="6698088" y="3909848"/>
+            <a:ext cx="5207153" cy="1266497"/>
+          </a:xfrm>
+        </p:spPr>
+        <p:txBody>
+          <a:bodyPr>
+            <a:normAutofit fontScale="92500" lnSpcReduction="10000"/>
+          </a:bodyPr>
+          <a:lstStyle/>
+          <a:p>
+            <a:r>
+              <a:rPr lang="en-US" altLang="zh-CN" sz="4400" b="1" dirty="0"/>
+              <a:t>From React to Next.js</a:t>
+            </a:r>
+            <a:endParaRPr lang="en-US" sz="4400" b="1" dirty="0"/>
+          </a:p>
+        </p:txBody>
+      </p:sp>
+      <p:pic>
+        <p:nvPicPr>
+          <p:cNvPr id="6" name="Picture 5" descr="A group of cubes with a symbol in center&#10;&#10;AI-generated content may be incorrect.">
+            <a:extLst>
+              <a:ext uri="{FF2B5EF4-FFF2-40B4-BE49-F238E27FC236}">
+                <a16:creationId xmlns:a16="http://schemas.microsoft.com/office/drawing/2014/main" id="{54A9F52E-2D4E-D3AE-3F2C-5B18C8D5C9B7}"/>
+              </a:ext>
+            </a:extLst>
+          </p:cNvPr>
+          <p:cNvPicPr>
+            <a:picLocks noChangeAspect="1"/>
+          </p:cNvPicPr>
+          <p:nvPr/>
+        </p:nvPicPr>
+        <p:blipFill>
+          <a:blip r:embed="rId4"/>
+          <a:stretch>
+            <a:fillRect/>
+          </a:stretch>
+        </p:blipFill>
+        <p:spPr>
+          <a:xfrm>
+            <a:off x="115614" y="126986"/>
+            <a:ext cx="3965294" cy="3520104"/>
+          </a:xfrm>
+          <a:prstGeom prst="roundRect">
+            <a:avLst>
+              <a:gd name="adj" fmla="val 8594"/>
+            </a:avLst>
+          </a:prstGeom>
+          <a:solidFill>
+            <a:srgbClr val="FFFFFF">
+              <a:shade val="85000"/>
+            </a:srgbClr>
+          </a:solidFill>
+          <a:ln>
+            <a:noFill/>
+          </a:ln>
+          <a:effectLst>
+            <a:reflection blurRad="12700" stA="38000" endPos="28000" dist="5000" dir="5400000" sy="-100000" algn="bl" rotWithShape="0"/>
+          </a:effectLst>
+        </p:spPr>
+      </p:pic>
+      <p:sp>
+        <p:nvSpPr>
+          <p:cNvPr id="7" name="Subtitle 2">
+            <a:extLst>
+              <a:ext uri="{FF2B5EF4-FFF2-40B4-BE49-F238E27FC236}">
+                <a16:creationId xmlns:a16="http://schemas.microsoft.com/office/drawing/2014/main" id="{A2795653-27D9-0C54-8DDB-8A02B950E9B3}"/>
+              </a:ext>
+            </a:extLst>
+          </p:cNvPr>
+          <p:cNvSpPr txBox="1">
+            <a:spLocks/>
+          </p:cNvSpPr>
+          <p:nvPr/>
+        </p:nvSpPr>
+        <p:spPr>
+          <a:xfrm>
+            <a:off x="6755257" y="2199289"/>
+            <a:ext cx="2102069" cy="1447801"/>
+          </a:xfrm>
+          <a:prstGeom prst="rect">
+            <a:avLst/>
+          </a:prstGeom>
+        </p:spPr>
+        <p:txBody>
+          <a:bodyPr vert="horz" lIns="91440" tIns="45720" rIns="91440" bIns="45720" rtlCol="0" anchor="ctr">
+            <a:normAutofit fontScale="92500" lnSpcReduction="20000"/>
+          </a:bodyPr>
+          <a:lstStyle>
+            <a:lvl1pPr marL="0" indent="0" algn="l" defTabSz="457200" rtl="0" eaLnBrk="1" latinLnBrk="0" hangingPunct="1">
+              <a:spcBef>
+                <a:spcPts val="1000"/>
+              </a:spcBef>
+              <a:spcAft>
+                <a:spcPts val="0"/>
+              </a:spcAft>
+              <a:buClr>
+                <a:schemeClr val="accent1"/>
+              </a:buClr>
+              <a:buSzPct val="80000"/>
+              <a:buFont typeface="Wingdings 3" charset="2"/>
+              <a:buNone/>
+              <a:defRPr sz="2000" b="0" i="0" kern="1200" cap="all">
+                <a:solidFill>
+                  <a:schemeClr val="accent1"/>
+                </a:solidFill>
+                <a:latin typeface="+mj-lt"/>
+                <a:ea typeface="+mj-ea"/>
+                <a:cs typeface="+mj-cs"/>
+              </a:defRPr>
+            </a:lvl1pPr>
+            <a:lvl2pPr marL="457200" indent="0" algn="ctr" defTabSz="457200" rtl="0" eaLnBrk="1" latinLnBrk="0" hangingPunct="1">
+              <a:spcBef>
+                <a:spcPts val="1000"/>
+              </a:spcBef>
+              <a:spcAft>
+                <a:spcPts val="0"/>
+              </a:spcAft>
+              <a:buClr>
+                <a:schemeClr val="accent1"/>
+              </a:buClr>
+              <a:buSzPct val="80000"/>
+              <a:buFont typeface="Wingdings 3" charset="2"/>
+              <a:buNone/>
+              <a:defRPr sz="1800" b="0" i="0" kern="1200">
+                <a:solidFill>
+                  <a:schemeClr val="tx1">
+                    <a:tint val="75000"/>
+                  </a:schemeClr>
+                </a:solidFill>
+                <a:latin typeface="+mj-lt"/>
+                <a:ea typeface="+mj-ea"/>
+                <a:cs typeface="+mj-cs"/>
+              </a:defRPr>
+            </a:lvl2pPr>
+            <a:lvl3pPr marL="914400" indent="0" algn="ctr" defTabSz="457200" rtl="0" eaLnBrk="1" latinLnBrk="0" hangingPunct="1">
+              <a:spcBef>
+                <a:spcPts val="1000"/>
+              </a:spcBef>
+              <a:spcAft>
+                <a:spcPts val="0"/>
+              </a:spcAft>
+              <a:buClr>
+                <a:schemeClr val="accent1"/>
+              </a:buClr>
+              <a:buSzPct val="80000"/>
+              <a:buFont typeface="Wingdings 3" charset="2"/>
+              <a:buNone/>
+              <a:defRPr sz="1600" b="0" i="0" kern="1200">
+                <a:solidFill>
+                  <a:schemeClr val="tx1">
+                    <a:tint val="75000"/>
+                  </a:schemeClr>
+                </a:solidFill>
+                <a:latin typeface="+mj-lt"/>
+                <a:ea typeface="+mj-ea"/>
+                <a:cs typeface="+mj-cs"/>
+              </a:defRPr>
+            </a:lvl3pPr>
+            <a:lvl4pPr marL="1371600" indent="0" algn="ctr" defTabSz="457200" rtl="0" eaLnBrk="1" latinLnBrk="0" hangingPunct="1">
+              <a:spcBef>
+                <a:spcPts val="1000"/>
+              </a:spcBef>
+              <a:spcAft>
+                <a:spcPts val="0"/>
+              </a:spcAft>
+              <a:buClr>
+                <a:schemeClr val="accent1"/>
+              </a:buClr>
+              <a:buSzPct val="80000"/>
+              <a:buFont typeface="Wingdings 3" charset="2"/>
+              <a:buNone/>
+              <a:defRPr sz="1400" b="0" i="0" kern="1200">
+                <a:solidFill>
+                  <a:schemeClr val="tx1">
+                    <a:tint val="75000"/>
+                  </a:schemeClr>
+                </a:solidFill>
+                <a:latin typeface="+mj-lt"/>
+                <a:ea typeface="+mj-ea"/>
+                <a:cs typeface="+mj-cs"/>
+              </a:defRPr>
+            </a:lvl4pPr>
+            <a:lvl5pPr marL="1828800" indent="0" algn="ctr" defTabSz="457200" rtl="0" eaLnBrk="1" latinLnBrk="0" hangingPunct="1">
+              <a:spcBef>
+                <a:spcPts val="1000"/>
+              </a:spcBef>
+              <a:spcAft>
+                <a:spcPts val="0"/>
+              </a:spcAft>
+              <a:buClr>
+                <a:schemeClr val="accent1"/>
+              </a:buClr>
+              <a:buSzPct val="80000"/>
+              <a:buFont typeface="Wingdings 3" charset="2"/>
+              <a:buNone/>
+              <a:defRPr sz="1400" b="0" i="0" kern="1200">
+                <a:solidFill>
+                  <a:schemeClr val="tx1">
+                    <a:tint val="75000"/>
+                  </a:schemeClr>
+                </a:solidFill>
+                <a:latin typeface="+mj-lt"/>
+                <a:ea typeface="+mj-ea"/>
+                <a:cs typeface="+mj-cs"/>
+              </a:defRPr>
+            </a:lvl5pPr>
+            <a:lvl6pPr marL="2286000" indent="0" algn="ctr" defTabSz="457200" rtl="0" eaLnBrk="1" latinLnBrk="0" hangingPunct="1">
+              <a:spcBef>
+                <a:spcPts val="1000"/>
+              </a:spcBef>
+              <a:spcAft>
+                <a:spcPts val="0"/>
+              </a:spcAft>
+              <a:buClr>
+                <a:schemeClr val="accent1"/>
+              </a:buClr>
+              <a:buSzPct val="80000"/>
+              <a:buFont typeface="Wingdings 3" charset="2"/>
+              <a:buNone/>
+              <a:defRPr sz="1400" b="0" i="0" kern="1200">
+                <a:solidFill>
+                  <a:schemeClr val="tx1">
+                    <a:tint val="75000"/>
+                  </a:schemeClr>
+                </a:solidFill>
+                <a:latin typeface="+mj-lt"/>
+                <a:ea typeface="+mj-ea"/>
+                <a:cs typeface="+mj-cs"/>
+              </a:defRPr>
+            </a:lvl6pPr>
+            <a:lvl7pPr marL="2743200" indent="0" algn="ctr" defTabSz="457200" rtl="0" eaLnBrk="1" latinLnBrk="0" hangingPunct="1">
+              <a:spcBef>
+                <a:spcPts val="1000"/>
+              </a:spcBef>
+              <a:spcAft>
+                <a:spcPts val="0"/>
+              </a:spcAft>
+              <a:buClr>
+                <a:schemeClr val="accent1"/>
+              </a:buClr>
+              <a:buSzPct val="80000"/>
+              <a:buFont typeface="Wingdings 3" charset="2"/>
+              <a:buNone/>
+              <a:defRPr sz="1400" b="0" i="0" kern="1200">
+                <a:solidFill>
+                  <a:schemeClr val="tx1">
+                    <a:tint val="75000"/>
+                  </a:schemeClr>
+                </a:solidFill>
+                <a:latin typeface="+mj-lt"/>
+                <a:ea typeface="+mj-ea"/>
+                <a:cs typeface="+mj-cs"/>
+              </a:defRPr>
+            </a:lvl7pPr>
+            <a:lvl8pPr marL="3200400" indent="0" algn="ctr" defTabSz="457200" rtl="0" eaLnBrk="1" latinLnBrk="0" hangingPunct="1">
+              <a:spcBef>
+                <a:spcPts val="1000"/>
+              </a:spcBef>
+              <a:spcAft>
+                <a:spcPts val="0"/>
+              </a:spcAft>
+              <a:buClr>
+                <a:schemeClr val="accent1"/>
+              </a:buClr>
+              <a:buSzPct val="80000"/>
+              <a:buFont typeface="Wingdings 3" charset="2"/>
+              <a:buNone/>
+              <a:defRPr sz="1400" b="0" i="0" kern="1200">
+                <a:solidFill>
+                  <a:schemeClr val="tx1">
+                    <a:tint val="75000"/>
+                  </a:schemeClr>
+                </a:solidFill>
+                <a:latin typeface="+mj-lt"/>
+                <a:ea typeface="+mj-ea"/>
+                <a:cs typeface="+mj-cs"/>
+              </a:defRPr>
+            </a:lvl8pPr>
+            <a:lvl9pPr marL="3657600" indent="0" algn="ctr" defTabSz="457200" rtl="0" eaLnBrk="1" latinLnBrk="0" hangingPunct="1">
+              <a:spcBef>
+                <a:spcPts val="1000"/>
+              </a:spcBef>
+              <a:spcAft>
+                <a:spcPts val="0"/>
+              </a:spcAft>
+              <a:buClr>
+                <a:schemeClr val="accent1"/>
+              </a:buClr>
+              <a:buSzPct val="80000"/>
+              <a:buFont typeface="Wingdings 3" charset="2"/>
+              <a:buNone/>
+              <a:defRPr sz="1400" b="0" i="0" kern="1200">
+                <a:solidFill>
+                  <a:schemeClr val="tx1">
+                    <a:tint val="75000"/>
+                  </a:schemeClr>
+                </a:solidFill>
+                <a:latin typeface="+mj-lt"/>
+                <a:ea typeface="+mj-ea"/>
+                <a:cs typeface="+mj-cs"/>
+              </a:defRPr>
+            </a:lvl9pPr>
+          </a:lstStyle>
+          <a:p>
+            <a:pPr algn="ctr"/>
+            <a:r>
+              <a:rPr lang="en-US" sz="11500" b="1" dirty="0"/>
+              <a:t>09</a:t>
+            </a:r>
+          </a:p>
+        </p:txBody>
+      </p:sp>
+      <p:pic>
+        <p:nvPicPr>
+          <p:cNvPr id="9" name="Picture 8" descr="A blue and orange text box&#10;&#10;AI-generated content may be incorrect.">
+            <a:extLst>
+              <a:ext uri="{FF2B5EF4-FFF2-40B4-BE49-F238E27FC236}">
+                <a16:creationId xmlns:a16="http://schemas.microsoft.com/office/drawing/2014/main" id="{A9FD003E-1AE5-E57B-E128-D714911240FD}"/>
+              </a:ext>
+            </a:extLst>
+          </p:cNvPr>
+          <p:cNvPicPr>
+            <a:picLocks noChangeAspect="1"/>
+          </p:cNvPicPr>
+          <p:nvPr/>
+        </p:nvPicPr>
+        <p:blipFill>
+          <a:blip r:embed="rId5"/>
+          <a:stretch>
+            <a:fillRect/>
+          </a:stretch>
+        </p:blipFill>
+        <p:spPr>
+          <a:xfrm>
+            <a:off x="419926" y="1615493"/>
+            <a:ext cx="6118201" cy="5021613"/>
+          </a:xfrm>
+          <a:prstGeom prst="roundRect">
+            <a:avLst>
+              <a:gd name="adj" fmla="val 16667"/>
+            </a:avLst>
+          </a:prstGeom>
+          <a:ln>
+            <a:noFill/>
+          </a:ln>
+          <a:effectLst>
+            <a:outerShdw blurRad="152400" dist="12000" dir="900000" sy="98000" kx="110000" ky="200000" algn="tl" rotWithShape="0">
+              <a:srgbClr val="000000">
+                <a:alpha val="30000"/>
+              </a:srgbClr>
+            </a:outerShdw>
+          </a:effectLst>
+          <a:scene3d>
+            <a:camera prst="perspectiveRelaxed">
+              <a:rot lat="19800000" lon="1200000" rev="20820000"/>
+            </a:camera>
+            <a:lightRig rig="threePt" dir="t"/>
+          </a:scene3d>
+          <a:sp3d contourW="6350" prstMaterial="matte">
+            <a:bevelT w="101600" h="101600"/>
+            <a:contourClr>
+              <a:srgbClr val="969696"/>
+            </a:contourClr>
+          </a:sp3d>
+        </p:spPr>
+      </p:pic>
+      <p:sp>
+        <p:nvSpPr>
+          <p:cNvPr id="10" name="TextBox 9">
+            <a:extLst>
+              <a:ext uri="{FF2B5EF4-FFF2-40B4-BE49-F238E27FC236}">
+                <a16:creationId xmlns:a16="http://schemas.microsoft.com/office/drawing/2014/main" id="{F465D237-450C-1EF9-9598-2835DA2F261C}"/>
+              </a:ext>
+            </a:extLst>
+          </p:cNvPr>
+          <p:cNvSpPr txBox="1"/>
+          <p:nvPr/>
+        </p:nvSpPr>
+        <p:spPr>
+          <a:xfrm>
+            <a:off x="123014" y="6189114"/>
+            <a:ext cx="2706045" cy="523220"/>
+          </a:xfrm>
+          <a:prstGeom prst="rect">
+            <a:avLst/>
+          </a:prstGeom>
+        </p:spPr>
+        <p:style>
+          <a:lnRef idx="0">
+            <a:schemeClr val="accent4"/>
+          </a:lnRef>
+          <a:fillRef idx="3">
+            <a:schemeClr val="accent4"/>
+          </a:fillRef>
+          <a:effectRef idx="3">
+            <a:schemeClr val="accent4"/>
+          </a:effectRef>
+          <a:fontRef idx="minor">
+            <a:schemeClr val="lt1"/>
+          </a:fontRef>
+        </p:style>
+        <p:txBody>
+          <a:bodyPr wrap="square" rtlCol="0" anchor="ctr">
+            <a:spAutoFit/>
+          </a:bodyPr>
+          <a:lstStyle/>
+          <a:p>
+            <a:pPr algn="ctr"/>
+            <a:r>
+              <a:rPr lang="en-US" sz="2800" dirty="0"/>
+              <a:t>Learn Next.js</a:t>
+            </a:r>
+          </a:p>
+        </p:txBody>
+      </p:sp>
+    </p:spTree>
+    <p:extLst>
+      <p:ext uri="{BB962C8B-B14F-4D97-AF65-F5344CB8AC3E}">
+        <p14:creationId xmlns:p14="http://schemas.microsoft.com/office/powerpoint/2010/main" val="675432217"/>
+      </p:ext>
+    </p:extLst>
+  </p:cSld>
+  <p:clrMapOvr>
+    <a:masterClrMapping/>
+  </p:clrMapOvr>
+</p:sld>
+</file>
+
+<file path=ppt/slides/slide11.xml><?xml version="1.0" encoding="utf-8"?>
+<p:sld xmlns:a="http://schemas.openxmlformats.org/drawingml/2006/main" xmlns:r="http://schemas.openxmlformats.org/officeDocument/2006/relationships" xmlns:p="http://schemas.openxmlformats.org/presentationml/2006/main">
+  <p:cSld>
+    <p:spTree>
+      <p:nvGrpSpPr>
+        <p:cNvPr id="1" name="">
+          <a:extLst>
+            <a:ext uri="{FF2B5EF4-FFF2-40B4-BE49-F238E27FC236}">
               <a16:creationId xmlns:a16="http://schemas.microsoft.com/office/drawing/2014/main" id="{5A1D1CBE-C79C-1ACD-6B90-06B9F547978F}"/>
             </a:ext>
           </a:extLst>
@@ -11601,7 +12254,7 @@
             <a:pPr algn="ctr"/>
             <a:r>
               <a:rPr lang="en-US" sz="11500" b="1" dirty="0"/>
-              <a:t>09</a:t>
+              <a:t>10</a:t>
             </a:r>
           </a:p>
         </p:txBody>
@@ -11722,7 +12375,7 @@
 </p:sld>
 </file>
 
-<file path=ppt/slides/slide11.xml><?xml version="1.0" encoding="utf-8"?>
+<file path=ppt/slides/slide12.xml><?xml version="1.0" encoding="utf-8"?>
 <p:sld xmlns:a="http://schemas.openxmlformats.org/drawingml/2006/main" xmlns:r="http://schemas.openxmlformats.org/officeDocument/2006/relationships" xmlns:p="http://schemas.openxmlformats.org/presentationml/2006/main">
   <p:cSld>
     <p:spTree>
@@ -12145,7 +12798,7 @@
             <a:pPr algn="ctr"/>
             <a:r>
               <a:rPr lang="en-US" sz="11500" b="1" dirty="0"/>
-              <a:t>10</a:t>
+              <a:t>11</a:t>
             </a:r>
           </a:p>
         </p:txBody>
@@ -12266,7 +12919,7 @@
 </p:sld>
 </file>
 
-<file path=ppt/slides/slide12.xml><?xml version="1.0" encoding="utf-8"?>
+<file path=ppt/slides/slide13.xml><?xml version="1.0" encoding="utf-8"?>
 <p:sld xmlns:a="http://schemas.openxmlformats.org/drawingml/2006/main" xmlns:r="http://schemas.openxmlformats.org/officeDocument/2006/relationships" xmlns:p="http://schemas.openxmlformats.org/presentationml/2006/main">
   <p:cSld>
     <p:spTree>
@@ -14128,7 +14781,7 @@
         <p:cNvPr id="1" name="">
           <a:extLst>
             <a:ext uri="{FF2B5EF4-FFF2-40B4-BE49-F238E27FC236}">
-              <a16:creationId xmlns:a16="http://schemas.microsoft.com/office/drawing/2014/main" id="{EA44089E-FCCB-38A9-27D7-F5D54F9DFDC2}"/>
+              <a16:creationId xmlns:a16="http://schemas.microsoft.com/office/drawing/2014/main" id="{C3323FA7-2D6F-2950-1520-2A6693B3ABDB}"/>
             </a:ext>
           </a:extLst>
         </p:cNvPr>
@@ -14148,7 +14801,7 @@
           <p:cNvPr id="5" name="Picture 4" descr="chain links">
             <a:extLst>
               <a:ext uri="{FF2B5EF4-FFF2-40B4-BE49-F238E27FC236}">
-                <a16:creationId xmlns:a16="http://schemas.microsoft.com/office/drawing/2014/main" id="{0BB27D41-69A7-5A63-2888-270368649F64}"/>
+                <a16:creationId xmlns:a16="http://schemas.microsoft.com/office/drawing/2014/main" id="{898F9AF7-E6D9-1852-B180-2317194E202D}"/>
               </a:ext>
             </a:extLst>
           </p:cNvPr>
@@ -14186,7 +14839,7 @@
           <p:cNvPr id="2" name="Title 1">
             <a:extLst>
               <a:ext uri="{FF2B5EF4-FFF2-40B4-BE49-F238E27FC236}">
-                <a16:creationId xmlns:a16="http://schemas.microsoft.com/office/drawing/2014/main" id="{C0135341-F766-D039-08F9-C1C74798B624}"/>
+                <a16:creationId xmlns:a16="http://schemas.microsoft.com/office/drawing/2014/main" id="{71E6355D-8D8E-5249-4F20-F78C87D3188A}"/>
               </a:ext>
             </a:extLst>
           </p:cNvPr>
@@ -14217,48 +14870,12 @@
           </a:p>
         </p:txBody>
       </p:sp>
-      <p:sp>
-        <p:nvSpPr>
-          <p:cNvPr id="3" name="Subtitle 2">
-            <a:extLst>
-              <a:ext uri="{FF2B5EF4-FFF2-40B4-BE49-F238E27FC236}">
-                <a16:creationId xmlns:a16="http://schemas.microsoft.com/office/drawing/2014/main" id="{23EDC558-4C9D-B732-AC11-A98F8FD88C2E}"/>
-              </a:ext>
-            </a:extLst>
-          </p:cNvPr>
-          <p:cNvSpPr>
-            <a:spLocks noGrp="1"/>
-          </p:cNvSpPr>
-          <p:nvPr>
-            <p:ph type="subTitle" idx="1"/>
-          </p:nvPr>
-        </p:nvSpPr>
-        <p:spPr>
-          <a:xfrm>
-            <a:off x="6698088" y="3909848"/>
-            <a:ext cx="5207153" cy="1266497"/>
-          </a:xfrm>
-        </p:spPr>
-        <p:txBody>
-          <a:bodyPr>
-            <a:normAutofit fontScale="92500" lnSpcReduction="10000"/>
-          </a:bodyPr>
-          <a:lstStyle/>
-          <a:p>
-            <a:r>
-              <a:rPr lang="en-US" altLang="zh-CN" sz="4400" b="1" dirty="0"/>
-              <a:t>Getting Started with React</a:t>
-            </a:r>
-            <a:endParaRPr lang="en-US" sz="4400" b="1" dirty="0"/>
-          </a:p>
-        </p:txBody>
-      </p:sp>
       <p:pic>
         <p:nvPicPr>
           <p:cNvPr id="6" name="Picture 5" descr="A group of cubes with a symbol in center&#10;&#10;AI-generated content may be incorrect.">
             <a:extLst>
               <a:ext uri="{FF2B5EF4-FFF2-40B4-BE49-F238E27FC236}">
-                <a16:creationId xmlns:a16="http://schemas.microsoft.com/office/drawing/2014/main" id="{9D362F45-4A09-AB9F-3993-C7833F6A7B62}"/>
+                <a16:creationId xmlns:a16="http://schemas.microsoft.com/office/drawing/2014/main" id="{C7EEDD90-C655-7673-363F-436D670CD276}"/>
               </a:ext>
             </a:extLst>
           </p:cNvPr>
@@ -14298,262 +14915,59 @@
       </p:pic>
       <p:sp>
         <p:nvSpPr>
-          <p:cNvPr id="7" name="Subtitle 2">
+          <p:cNvPr id="10" name="TextBox 9">
             <a:extLst>
               <a:ext uri="{FF2B5EF4-FFF2-40B4-BE49-F238E27FC236}">
-                <a16:creationId xmlns:a16="http://schemas.microsoft.com/office/drawing/2014/main" id="{6F181EF5-ABDC-F778-87E3-6E65D7A73C38}"/>
+                <a16:creationId xmlns:a16="http://schemas.microsoft.com/office/drawing/2014/main" id="{9CE5C4CB-D2E7-6654-A4F4-BDAF61944FFD}"/>
               </a:ext>
             </a:extLst>
           </p:cNvPr>
-          <p:cNvSpPr txBox="1">
-            <a:spLocks/>
-          </p:cNvSpPr>
+          <p:cNvSpPr txBox="1"/>
           <p:nvPr/>
         </p:nvSpPr>
         <p:spPr>
           <a:xfrm>
-            <a:off x="6755257" y="2199289"/>
-            <a:ext cx="2102069" cy="1447801"/>
+            <a:off x="123014" y="6189114"/>
+            <a:ext cx="2706045" cy="523220"/>
           </a:xfrm>
           <a:prstGeom prst="rect">
             <a:avLst/>
           </a:prstGeom>
         </p:spPr>
-        <p:txBody>
-          <a:bodyPr vert="horz" lIns="91440" tIns="45720" rIns="91440" bIns="45720" rtlCol="0" anchor="ctr">
-            <a:normAutofit fontScale="92500" lnSpcReduction="20000"/>
+        <p:style>
+          <a:lnRef idx="0">
+            <a:schemeClr val="accent4"/>
+          </a:lnRef>
+          <a:fillRef idx="3">
+            <a:schemeClr val="accent4"/>
+          </a:fillRef>
+          <a:effectRef idx="3">
+            <a:schemeClr val="accent4"/>
+          </a:effectRef>
+          <a:fontRef idx="minor">
+            <a:schemeClr val="lt1"/>
+          </a:fontRef>
+        </p:style>
+        <p:txBody>
+          <a:bodyPr wrap="square" rtlCol="0" anchor="ctr">
+            <a:spAutoFit/>
           </a:bodyPr>
-          <a:lstStyle>
-            <a:lvl1pPr marL="0" indent="0" algn="l" defTabSz="457200" rtl="0" eaLnBrk="1" latinLnBrk="0" hangingPunct="1">
-              <a:spcBef>
-                <a:spcPts val="1000"/>
-              </a:spcBef>
-              <a:spcAft>
-                <a:spcPts val="0"/>
-              </a:spcAft>
-              <a:buClr>
-                <a:schemeClr val="accent1"/>
-              </a:buClr>
-              <a:buSzPct val="80000"/>
-              <a:buFont typeface="Wingdings 3" charset="2"/>
-              <a:buNone/>
-              <a:defRPr sz="2000" b="0" i="0" kern="1200" cap="all">
-                <a:solidFill>
-                  <a:schemeClr val="accent1"/>
-                </a:solidFill>
-                <a:latin typeface="+mj-lt"/>
-                <a:ea typeface="+mj-ea"/>
-                <a:cs typeface="+mj-cs"/>
-              </a:defRPr>
-            </a:lvl1pPr>
-            <a:lvl2pPr marL="457200" indent="0" algn="ctr" defTabSz="457200" rtl="0" eaLnBrk="1" latinLnBrk="0" hangingPunct="1">
-              <a:spcBef>
-                <a:spcPts val="1000"/>
-              </a:spcBef>
-              <a:spcAft>
-                <a:spcPts val="0"/>
-              </a:spcAft>
-              <a:buClr>
-                <a:schemeClr val="accent1"/>
-              </a:buClr>
-              <a:buSzPct val="80000"/>
-              <a:buFont typeface="Wingdings 3" charset="2"/>
-              <a:buNone/>
-              <a:defRPr sz="1800" b="0" i="0" kern="1200">
-                <a:solidFill>
-                  <a:schemeClr val="tx1">
-                    <a:tint val="75000"/>
-                  </a:schemeClr>
-                </a:solidFill>
-                <a:latin typeface="+mj-lt"/>
-                <a:ea typeface="+mj-ea"/>
-                <a:cs typeface="+mj-cs"/>
-              </a:defRPr>
-            </a:lvl2pPr>
-            <a:lvl3pPr marL="914400" indent="0" algn="ctr" defTabSz="457200" rtl="0" eaLnBrk="1" latinLnBrk="0" hangingPunct="1">
-              <a:spcBef>
-                <a:spcPts val="1000"/>
-              </a:spcBef>
-              <a:spcAft>
-                <a:spcPts val="0"/>
-              </a:spcAft>
-              <a:buClr>
-                <a:schemeClr val="accent1"/>
-              </a:buClr>
-              <a:buSzPct val="80000"/>
-              <a:buFont typeface="Wingdings 3" charset="2"/>
-              <a:buNone/>
-              <a:defRPr sz="1600" b="0" i="0" kern="1200">
-                <a:solidFill>
-                  <a:schemeClr val="tx1">
-                    <a:tint val="75000"/>
-                  </a:schemeClr>
-                </a:solidFill>
-                <a:latin typeface="+mj-lt"/>
-                <a:ea typeface="+mj-ea"/>
-                <a:cs typeface="+mj-cs"/>
-              </a:defRPr>
-            </a:lvl3pPr>
-            <a:lvl4pPr marL="1371600" indent="0" algn="ctr" defTabSz="457200" rtl="0" eaLnBrk="1" latinLnBrk="0" hangingPunct="1">
-              <a:spcBef>
-                <a:spcPts val="1000"/>
-              </a:spcBef>
-              <a:spcAft>
-                <a:spcPts val="0"/>
-              </a:spcAft>
-              <a:buClr>
-                <a:schemeClr val="accent1"/>
-              </a:buClr>
-              <a:buSzPct val="80000"/>
-              <a:buFont typeface="Wingdings 3" charset="2"/>
-              <a:buNone/>
-              <a:defRPr sz="1400" b="0" i="0" kern="1200">
-                <a:solidFill>
-                  <a:schemeClr val="tx1">
-                    <a:tint val="75000"/>
-                  </a:schemeClr>
-                </a:solidFill>
-                <a:latin typeface="+mj-lt"/>
-                <a:ea typeface="+mj-ea"/>
-                <a:cs typeface="+mj-cs"/>
-              </a:defRPr>
-            </a:lvl4pPr>
-            <a:lvl5pPr marL="1828800" indent="0" algn="ctr" defTabSz="457200" rtl="0" eaLnBrk="1" latinLnBrk="0" hangingPunct="1">
-              <a:spcBef>
-                <a:spcPts val="1000"/>
-              </a:spcBef>
-              <a:spcAft>
-                <a:spcPts val="0"/>
-              </a:spcAft>
-              <a:buClr>
-                <a:schemeClr val="accent1"/>
-              </a:buClr>
-              <a:buSzPct val="80000"/>
-              <a:buFont typeface="Wingdings 3" charset="2"/>
-              <a:buNone/>
-              <a:defRPr sz="1400" b="0" i="0" kern="1200">
-                <a:solidFill>
-                  <a:schemeClr val="tx1">
-                    <a:tint val="75000"/>
-                  </a:schemeClr>
-                </a:solidFill>
-                <a:latin typeface="+mj-lt"/>
-                <a:ea typeface="+mj-ea"/>
-                <a:cs typeface="+mj-cs"/>
-              </a:defRPr>
-            </a:lvl5pPr>
-            <a:lvl6pPr marL="2286000" indent="0" algn="ctr" defTabSz="457200" rtl="0" eaLnBrk="1" latinLnBrk="0" hangingPunct="1">
-              <a:spcBef>
-                <a:spcPts val="1000"/>
-              </a:spcBef>
-              <a:spcAft>
-                <a:spcPts val="0"/>
-              </a:spcAft>
-              <a:buClr>
-                <a:schemeClr val="accent1"/>
-              </a:buClr>
-              <a:buSzPct val="80000"/>
-              <a:buFont typeface="Wingdings 3" charset="2"/>
-              <a:buNone/>
-              <a:defRPr sz="1400" b="0" i="0" kern="1200">
-                <a:solidFill>
-                  <a:schemeClr val="tx1">
-                    <a:tint val="75000"/>
-                  </a:schemeClr>
-                </a:solidFill>
-                <a:latin typeface="+mj-lt"/>
-                <a:ea typeface="+mj-ea"/>
-                <a:cs typeface="+mj-cs"/>
-              </a:defRPr>
-            </a:lvl6pPr>
-            <a:lvl7pPr marL="2743200" indent="0" algn="ctr" defTabSz="457200" rtl="0" eaLnBrk="1" latinLnBrk="0" hangingPunct="1">
-              <a:spcBef>
-                <a:spcPts val="1000"/>
-              </a:spcBef>
-              <a:spcAft>
-                <a:spcPts val="0"/>
-              </a:spcAft>
-              <a:buClr>
-                <a:schemeClr val="accent1"/>
-              </a:buClr>
-              <a:buSzPct val="80000"/>
-              <a:buFont typeface="Wingdings 3" charset="2"/>
-              <a:buNone/>
-              <a:defRPr sz="1400" b="0" i="0" kern="1200">
-                <a:solidFill>
-                  <a:schemeClr val="tx1">
-                    <a:tint val="75000"/>
-                  </a:schemeClr>
-                </a:solidFill>
-                <a:latin typeface="+mj-lt"/>
-                <a:ea typeface="+mj-ea"/>
-                <a:cs typeface="+mj-cs"/>
-              </a:defRPr>
-            </a:lvl7pPr>
-            <a:lvl8pPr marL="3200400" indent="0" algn="ctr" defTabSz="457200" rtl="0" eaLnBrk="1" latinLnBrk="0" hangingPunct="1">
-              <a:spcBef>
-                <a:spcPts val="1000"/>
-              </a:spcBef>
-              <a:spcAft>
-                <a:spcPts val="0"/>
-              </a:spcAft>
-              <a:buClr>
-                <a:schemeClr val="accent1"/>
-              </a:buClr>
-              <a:buSzPct val="80000"/>
-              <a:buFont typeface="Wingdings 3" charset="2"/>
-              <a:buNone/>
-              <a:defRPr sz="1400" b="0" i="0" kern="1200">
-                <a:solidFill>
-                  <a:schemeClr val="tx1">
-                    <a:tint val="75000"/>
-                  </a:schemeClr>
-                </a:solidFill>
-                <a:latin typeface="+mj-lt"/>
-                <a:ea typeface="+mj-ea"/>
-                <a:cs typeface="+mj-cs"/>
-              </a:defRPr>
-            </a:lvl8pPr>
-            <a:lvl9pPr marL="3657600" indent="0" algn="ctr" defTabSz="457200" rtl="0" eaLnBrk="1" latinLnBrk="0" hangingPunct="1">
-              <a:spcBef>
-                <a:spcPts val="1000"/>
-              </a:spcBef>
-              <a:spcAft>
-                <a:spcPts val="0"/>
-              </a:spcAft>
-              <a:buClr>
-                <a:schemeClr val="accent1"/>
-              </a:buClr>
-              <a:buSzPct val="80000"/>
-              <a:buFont typeface="Wingdings 3" charset="2"/>
-              <a:buNone/>
-              <a:defRPr sz="1400" b="0" i="0" kern="1200">
-                <a:solidFill>
-                  <a:schemeClr val="tx1">
-                    <a:tint val="75000"/>
-                  </a:schemeClr>
-                </a:solidFill>
-                <a:latin typeface="+mj-lt"/>
-                <a:ea typeface="+mj-ea"/>
-                <a:cs typeface="+mj-cs"/>
-              </a:defRPr>
-            </a:lvl9pPr>
-          </a:lstStyle>
+          <a:lstStyle/>
           <a:p>
             <a:pPr algn="ctr"/>
             <a:r>
-              <a:rPr lang="en-US" sz="11500" b="1" dirty="0"/>
-              <a:t>04</a:t>
+              <a:rPr lang="en-US" sz="2800" dirty="0"/>
+              <a:t>Learn Next.js</a:t>
             </a:r>
           </a:p>
         </p:txBody>
       </p:sp>
       <p:pic>
         <p:nvPicPr>
-          <p:cNvPr id="9" name="Picture 8" descr="A diagram of a program&#10;&#10;AI-generated content may be incorrect.">
+          <p:cNvPr id="8" name="Picture 7" descr="A diagram of a program&#10;&#10;AI-generated content may be incorrect.">
             <a:extLst>
               <a:ext uri="{FF2B5EF4-FFF2-40B4-BE49-F238E27FC236}">
-                <a16:creationId xmlns:a16="http://schemas.microsoft.com/office/drawing/2014/main" id="{624A06F4-7C91-2F47-9C04-044DAFE5264C}"/>
+                <a16:creationId xmlns:a16="http://schemas.microsoft.com/office/drawing/2014/main" id="{B9129520-6448-031D-E95F-ADEB9206A623}"/>
               </a:ext>
             </a:extLst>
           </p:cNvPr>
@@ -14570,8 +14984,8 @@
         </p:blipFill>
         <p:spPr>
           <a:xfrm>
-            <a:off x="298291" y="1573923"/>
-            <a:ext cx="6063551" cy="4987159"/>
+            <a:off x="115614" y="1510917"/>
+            <a:ext cx="7402970" cy="4619427"/>
           </a:xfrm>
           <a:prstGeom prst="roundRect">
             <a:avLst>
@@ -14604,10 +15018,472 @@
       </p:pic>
       <p:sp>
         <p:nvSpPr>
+          <p:cNvPr id="3" name="Subtitle 2">
+            <a:extLst>
+              <a:ext uri="{FF2B5EF4-FFF2-40B4-BE49-F238E27FC236}">
+                <a16:creationId xmlns:a16="http://schemas.microsoft.com/office/drawing/2014/main" id="{18CDF6BB-848E-C9B7-3515-849222BB0F81}"/>
+              </a:ext>
+            </a:extLst>
+          </p:cNvPr>
+          <p:cNvSpPr>
+            <a:spLocks noGrp="1"/>
+          </p:cNvSpPr>
+          <p:nvPr>
+            <p:ph type="subTitle" idx="1"/>
+          </p:nvPr>
+        </p:nvSpPr>
+        <p:spPr>
+          <a:xfrm>
+            <a:off x="5198772" y="3953814"/>
+            <a:ext cx="6706470" cy="1674253"/>
+          </a:xfrm>
+        </p:spPr>
+        <p:txBody>
+          <a:bodyPr>
+            <a:normAutofit fontScale="85000" lnSpcReduction="20000"/>
+          </a:bodyPr>
+          <a:lstStyle/>
+          <a:p>
+            <a:r>
+              <a:rPr lang="en-US" altLang="zh-CN" sz="4400" b="1" dirty="0">
+                <a:effectLst>
+                  <a:outerShdw blurRad="38100" dist="38100" dir="2700000" algn="tl">
+                    <a:srgbClr val="000000">
+                      <a:alpha val="43137"/>
+                    </a:srgbClr>
+                  </a:outerShdw>
+                </a:effectLst>
+              </a:rPr>
+              <a:t>Getting Started with React</a:t>
+            </a:r>
+          </a:p>
+          <a:p>
+            <a:r>
+              <a:rPr lang="en-US" sz="4100" b="1" dirty="0">
+                <a:effectLst>
+                  <a:outerShdw blurRad="38100" dist="38100" dir="2700000" algn="tl">
+                    <a:srgbClr val="000000">
+                      <a:alpha val="43137"/>
+                    </a:srgbClr>
+                  </a:outerShdw>
+                </a:effectLst>
+              </a:rPr>
+              <a:t>4.1 Transform with React</a:t>
+            </a:r>
+          </a:p>
+        </p:txBody>
+      </p:sp>
+      <p:sp>
+        <p:nvSpPr>
+          <p:cNvPr id="7" name="Subtitle 2">
+            <a:extLst>
+              <a:ext uri="{FF2B5EF4-FFF2-40B4-BE49-F238E27FC236}">
+                <a16:creationId xmlns:a16="http://schemas.microsoft.com/office/drawing/2014/main" id="{CC80D503-F3E7-98DD-A918-C3605D27D738}"/>
+              </a:ext>
+            </a:extLst>
+          </p:cNvPr>
+          <p:cNvSpPr txBox="1">
+            <a:spLocks/>
+          </p:cNvSpPr>
+          <p:nvPr/>
+        </p:nvSpPr>
+        <p:spPr>
+          <a:xfrm>
+            <a:off x="6755257" y="2199289"/>
+            <a:ext cx="2102069" cy="1447801"/>
+          </a:xfrm>
+          <a:prstGeom prst="rect">
+            <a:avLst/>
+          </a:prstGeom>
+        </p:spPr>
+        <p:txBody>
+          <a:bodyPr vert="horz" lIns="91440" tIns="45720" rIns="91440" bIns="45720" rtlCol="0" anchor="ctr">
+            <a:normAutofit fontScale="92500" lnSpcReduction="20000"/>
+          </a:bodyPr>
+          <a:lstStyle>
+            <a:lvl1pPr marL="0" indent="0" algn="l" defTabSz="457200" rtl="0" eaLnBrk="1" latinLnBrk="0" hangingPunct="1">
+              <a:spcBef>
+                <a:spcPts val="1000"/>
+              </a:spcBef>
+              <a:spcAft>
+                <a:spcPts val="0"/>
+              </a:spcAft>
+              <a:buClr>
+                <a:schemeClr val="accent1"/>
+              </a:buClr>
+              <a:buSzPct val="80000"/>
+              <a:buFont typeface="Wingdings 3" charset="2"/>
+              <a:buNone/>
+              <a:defRPr sz="2000" b="0" i="0" kern="1200" cap="all">
+                <a:solidFill>
+                  <a:schemeClr val="accent1"/>
+                </a:solidFill>
+                <a:latin typeface="+mj-lt"/>
+                <a:ea typeface="+mj-ea"/>
+                <a:cs typeface="+mj-cs"/>
+              </a:defRPr>
+            </a:lvl1pPr>
+            <a:lvl2pPr marL="457200" indent="0" algn="ctr" defTabSz="457200" rtl="0" eaLnBrk="1" latinLnBrk="0" hangingPunct="1">
+              <a:spcBef>
+                <a:spcPts val="1000"/>
+              </a:spcBef>
+              <a:spcAft>
+                <a:spcPts val="0"/>
+              </a:spcAft>
+              <a:buClr>
+                <a:schemeClr val="accent1"/>
+              </a:buClr>
+              <a:buSzPct val="80000"/>
+              <a:buFont typeface="Wingdings 3" charset="2"/>
+              <a:buNone/>
+              <a:defRPr sz="1800" b="0" i="0" kern="1200">
+                <a:solidFill>
+                  <a:schemeClr val="tx1">
+                    <a:tint val="75000"/>
+                  </a:schemeClr>
+                </a:solidFill>
+                <a:latin typeface="+mj-lt"/>
+                <a:ea typeface="+mj-ea"/>
+                <a:cs typeface="+mj-cs"/>
+              </a:defRPr>
+            </a:lvl2pPr>
+            <a:lvl3pPr marL="914400" indent="0" algn="ctr" defTabSz="457200" rtl="0" eaLnBrk="1" latinLnBrk="0" hangingPunct="1">
+              <a:spcBef>
+                <a:spcPts val="1000"/>
+              </a:spcBef>
+              <a:spcAft>
+                <a:spcPts val="0"/>
+              </a:spcAft>
+              <a:buClr>
+                <a:schemeClr val="accent1"/>
+              </a:buClr>
+              <a:buSzPct val="80000"/>
+              <a:buFont typeface="Wingdings 3" charset="2"/>
+              <a:buNone/>
+              <a:defRPr sz="1600" b="0" i="0" kern="1200">
+                <a:solidFill>
+                  <a:schemeClr val="tx1">
+                    <a:tint val="75000"/>
+                  </a:schemeClr>
+                </a:solidFill>
+                <a:latin typeface="+mj-lt"/>
+                <a:ea typeface="+mj-ea"/>
+                <a:cs typeface="+mj-cs"/>
+              </a:defRPr>
+            </a:lvl3pPr>
+            <a:lvl4pPr marL="1371600" indent="0" algn="ctr" defTabSz="457200" rtl="0" eaLnBrk="1" latinLnBrk="0" hangingPunct="1">
+              <a:spcBef>
+                <a:spcPts val="1000"/>
+              </a:spcBef>
+              <a:spcAft>
+                <a:spcPts val="0"/>
+              </a:spcAft>
+              <a:buClr>
+                <a:schemeClr val="accent1"/>
+              </a:buClr>
+              <a:buSzPct val="80000"/>
+              <a:buFont typeface="Wingdings 3" charset="2"/>
+              <a:buNone/>
+              <a:defRPr sz="1400" b="0" i="0" kern="1200">
+                <a:solidFill>
+                  <a:schemeClr val="tx1">
+                    <a:tint val="75000"/>
+                  </a:schemeClr>
+                </a:solidFill>
+                <a:latin typeface="+mj-lt"/>
+                <a:ea typeface="+mj-ea"/>
+                <a:cs typeface="+mj-cs"/>
+              </a:defRPr>
+            </a:lvl4pPr>
+            <a:lvl5pPr marL="1828800" indent="0" algn="ctr" defTabSz="457200" rtl="0" eaLnBrk="1" latinLnBrk="0" hangingPunct="1">
+              <a:spcBef>
+                <a:spcPts val="1000"/>
+              </a:spcBef>
+              <a:spcAft>
+                <a:spcPts val="0"/>
+              </a:spcAft>
+              <a:buClr>
+                <a:schemeClr val="accent1"/>
+              </a:buClr>
+              <a:buSzPct val="80000"/>
+              <a:buFont typeface="Wingdings 3" charset="2"/>
+              <a:buNone/>
+              <a:defRPr sz="1400" b="0" i="0" kern="1200">
+                <a:solidFill>
+                  <a:schemeClr val="tx1">
+                    <a:tint val="75000"/>
+                  </a:schemeClr>
+                </a:solidFill>
+                <a:latin typeface="+mj-lt"/>
+                <a:ea typeface="+mj-ea"/>
+                <a:cs typeface="+mj-cs"/>
+              </a:defRPr>
+            </a:lvl5pPr>
+            <a:lvl6pPr marL="2286000" indent="0" algn="ctr" defTabSz="457200" rtl="0" eaLnBrk="1" latinLnBrk="0" hangingPunct="1">
+              <a:spcBef>
+                <a:spcPts val="1000"/>
+              </a:spcBef>
+              <a:spcAft>
+                <a:spcPts val="0"/>
+              </a:spcAft>
+              <a:buClr>
+                <a:schemeClr val="accent1"/>
+              </a:buClr>
+              <a:buSzPct val="80000"/>
+              <a:buFont typeface="Wingdings 3" charset="2"/>
+              <a:buNone/>
+              <a:defRPr sz="1400" b="0" i="0" kern="1200">
+                <a:solidFill>
+                  <a:schemeClr val="tx1">
+                    <a:tint val="75000"/>
+                  </a:schemeClr>
+                </a:solidFill>
+                <a:latin typeface="+mj-lt"/>
+                <a:ea typeface="+mj-ea"/>
+                <a:cs typeface="+mj-cs"/>
+              </a:defRPr>
+            </a:lvl6pPr>
+            <a:lvl7pPr marL="2743200" indent="0" algn="ctr" defTabSz="457200" rtl="0" eaLnBrk="1" latinLnBrk="0" hangingPunct="1">
+              <a:spcBef>
+                <a:spcPts val="1000"/>
+              </a:spcBef>
+              <a:spcAft>
+                <a:spcPts val="0"/>
+              </a:spcAft>
+              <a:buClr>
+                <a:schemeClr val="accent1"/>
+              </a:buClr>
+              <a:buSzPct val="80000"/>
+              <a:buFont typeface="Wingdings 3" charset="2"/>
+              <a:buNone/>
+              <a:defRPr sz="1400" b="0" i="0" kern="1200">
+                <a:solidFill>
+                  <a:schemeClr val="tx1">
+                    <a:tint val="75000"/>
+                  </a:schemeClr>
+                </a:solidFill>
+                <a:latin typeface="+mj-lt"/>
+                <a:ea typeface="+mj-ea"/>
+                <a:cs typeface="+mj-cs"/>
+              </a:defRPr>
+            </a:lvl7pPr>
+            <a:lvl8pPr marL="3200400" indent="0" algn="ctr" defTabSz="457200" rtl="0" eaLnBrk="1" latinLnBrk="0" hangingPunct="1">
+              <a:spcBef>
+                <a:spcPts val="1000"/>
+              </a:spcBef>
+              <a:spcAft>
+                <a:spcPts val="0"/>
+              </a:spcAft>
+              <a:buClr>
+                <a:schemeClr val="accent1"/>
+              </a:buClr>
+              <a:buSzPct val="80000"/>
+              <a:buFont typeface="Wingdings 3" charset="2"/>
+              <a:buNone/>
+              <a:defRPr sz="1400" b="0" i="0" kern="1200">
+                <a:solidFill>
+                  <a:schemeClr val="tx1">
+                    <a:tint val="75000"/>
+                  </a:schemeClr>
+                </a:solidFill>
+                <a:latin typeface="+mj-lt"/>
+                <a:ea typeface="+mj-ea"/>
+                <a:cs typeface="+mj-cs"/>
+              </a:defRPr>
+            </a:lvl8pPr>
+            <a:lvl9pPr marL="3657600" indent="0" algn="ctr" defTabSz="457200" rtl="0" eaLnBrk="1" latinLnBrk="0" hangingPunct="1">
+              <a:spcBef>
+                <a:spcPts val="1000"/>
+              </a:spcBef>
+              <a:spcAft>
+                <a:spcPts val="0"/>
+              </a:spcAft>
+              <a:buClr>
+                <a:schemeClr val="accent1"/>
+              </a:buClr>
+              <a:buSzPct val="80000"/>
+              <a:buFont typeface="Wingdings 3" charset="2"/>
+              <a:buNone/>
+              <a:defRPr sz="1400" b="0" i="0" kern="1200">
+                <a:solidFill>
+                  <a:schemeClr val="tx1">
+                    <a:tint val="75000"/>
+                  </a:schemeClr>
+                </a:solidFill>
+                <a:latin typeface="+mj-lt"/>
+                <a:ea typeface="+mj-ea"/>
+                <a:cs typeface="+mj-cs"/>
+              </a:defRPr>
+            </a:lvl9pPr>
+          </a:lstStyle>
+          <a:p>
+            <a:pPr algn="ctr"/>
+            <a:r>
+              <a:rPr lang="en-US" sz="11500" b="1" dirty="0"/>
+              <a:t>04</a:t>
+            </a:r>
+          </a:p>
+        </p:txBody>
+      </p:sp>
+    </p:spTree>
+    <p:extLst>
+      <p:ext uri="{BB962C8B-B14F-4D97-AF65-F5344CB8AC3E}">
+        <p14:creationId xmlns:p14="http://schemas.microsoft.com/office/powerpoint/2010/main" val="3449422029"/>
+      </p:ext>
+    </p:extLst>
+  </p:cSld>
+  <p:clrMapOvr>
+    <a:masterClrMapping/>
+  </p:clrMapOvr>
+</p:sld>
+</file>
+
+<file path=ppt/slides/slide6.xml><?xml version="1.0" encoding="utf-8"?>
+<p:sld xmlns:a="http://schemas.openxmlformats.org/drawingml/2006/main" xmlns:r="http://schemas.openxmlformats.org/officeDocument/2006/relationships" xmlns:p="http://schemas.openxmlformats.org/presentationml/2006/main">
+  <p:cSld>
+    <p:spTree>
+      <p:nvGrpSpPr>
+        <p:cNvPr id="1" name="">
+          <a:extLst>
+            <a:ext uri="{FF2B5EF4-FFF2-40B4-BE49-F238E27FC236}">
+              <a16:creationId xmlns:a16="http://schemas.microsoft.com/office/drawing/2014/main" id="{3C69782B-FF5F-B0C0-D22A-EDC9516672CF}"/>
+            </a:ext>
+          </a:extLst>
+        </p:cNvPr>
+        <p:cNvGrpSpPr/>
+        <p:nvPr/>
+      </p:nvGrpSpPr>
+      <p:grpSpPr>
+        <a:xfrm>
+          <a:off x="0" y="0"/>
+          <a:ext cx="0" cy="0"/>
+          <a:chOff x="0" y="0"/>
+          <a:chExt cx="0" cy="0"/>
+        </a:xfrm>
+      </p:grpSpPr>
+      <p:pic>
+        <p:nvPicPr>
+          <p:cNvPr id="5" name="Picture 4" descr="chain links">
+            <a:extLst>
+              <a:ext uri="{FF2B5EF4-FFF2-40B4-BE49-F238E27FC236}">
+                <a16:creationId xmlns:a16="http://schemas.microsoft.com/office/drawing/2014/main" id="{2778B1B7-FEB5-4EC4-1E88-964F7F99F455}"/>
+              </a:ext>
+            </a:extLst>
+          </p:cNvPr>
+          <p:cNvPicPr>
+            <a:picLocks noChangeAspect="1"/>
+          </p:cNvPicPr>
+          <p:nvPr/>
+        </p:nvPicPr>
+        <p:blipFill rotWithShape="1">
+          <a:blip r:embed="rId3">
+            <a:duotone>
+              <a:prstClr val="black"/>
+              <a:schemeClr val="accent5">
+                <a:tint val="45000"/>
+                <a:satMod val="400000"/>
+              </a:schemeClr>
+            </a:duotone>
+            <a:alphaModFix amt="25000"/>
+          </a:blip>
+          <a:srcRect t="23391" r="9091"/>
+          <a:stretch/>
+        </p:blipFill>
+        <p:spPr>
+          <a:xfrm>
+            <a:off x="0" y="10"/>
+            <a:ext cx="12191980" cy="6857990"/>
+          </a:xfrm>
+          <a:prstGeom prst="rect">
+            <a:avLst/>
+          </a:prstGeom>
+        </p:spPr>
+      </p:pic>
+      <p:sp>
+        <p:nvSpPr>
+          <p:cNvPr id="2" name="Title 1">
+            <a:extLst>
+              <a:ext uri="{FF2B5EF4-FFF2-40B4-BE49-F238E27FC236}">
+                <a16:creationId xmlns:a16="http://schemas.microsoft.com/office/drawing/2014/main" id="{0C581E64-803E-3686-14F8-C6C66DE7242B}"/>
+              </a:ext>
+            </a:extLst>
+          </p:cNvPr>
+          <p:cNvSpPr>
+            <a:spLocks noGrp="1"/>
+          </p:cNvSpPr>
+          <p:nvPr>
+            <p:ph type="ctrTitle"/>
+          </p:nvPr>
+        </p:nvSpPr>
+        <p:spPr>
+          <a:xfrm>
+            <a:off x="4474323" y="961696"/>
+            <a:ext cx="7602064" cy="1266497"/>
+          </a:xfrm>
+        </p:spPr>
+        <p:txBody>
+          <a:bodyPr anchor="ctr">
+            <a:normAutofit/>
+          </a:bodyPr>
+          <a:lstStyle/>
+          <a:p>
+            <a:r>
+              <a:rPr lang="en-US" sz="6000" b="1" dirty="0"/>
+              <a:t>REACT Foundations</a:t>
+            </a:r>
+            <a:endParaRPr lang="ru-RU" sz="6000" b="1" dirty="0"/>
+          </a:p>
+        </p:txBody>
+      </p:sp>
+      <p:pic>
+        <p:nvPicPr>
+          <p:cNvPr id="6" name="Picture 5" descr="A group of cubes with a symbol in center&#10;&#10;AI-generated content may be incorrect.">
+            <a:extLst>
+              <a:ext uri="{FF2B5EF4-FFF2-40B4-BE49-F238E27FC236}">
+                <a16:creationId xmlns:a16="http://schemas.microsoft.com/office/drawing/2014/main" id="{E6AAC1A7-BEC7-5315-BBD2-B7A051CE5496}"/>
+              </a:ext>
+            </a:extLst>
+          </p:cNvPr>
+          <p:cNvPicPr>
+            <a:picLocks noChangeAspect="1"/>
+          </p:cNvPicPr>
+          <p:nvPr/>
+        </p:nvPicPr>
+        <p:blipFill>
+          <a:blip r:embed="rId4"/>
+          <a:stretch>
+            <a:fillRect/>
+          </a:stretch>
+        </p:blipFill>
+        <p:spPr>
+          <a:xfrm>
+            <a:off x="115614" y="126986"/>
+            <a:ext cx="3965294" cy="3520104"/>
+          </a:xfrm>
+          <a:prstGeom prst="roundRect">
+            <a:avLst>
+              <a:gd name="adj" fmla="val 8594"/>
+            </a:avLst>
+          </a:prstGeom>
+          <a:solidFill>
+            <a:srgbClr val="FFFFFF">
+              <a:shade val="85000"/>
+            </a:srgbClr>
+          </a:solidFill>
+          <a:ln>
+            <a:noFill/>
+          </a:ln>
+          <a:effectLst>
+            <a:reflection blurRad="12700" stA="38000" endPos="28000" dist="5000" dir="5400000" sy="-100000" algn="bl" rotWithShape="0"/>
+          </a:effectLst>
+        </p:spPr>
+      </p:pic>
+      <p:sp>
+        <p:nvSpPr>
           <p:cNvPr id="10" name="TextBox 9">
             <a:extLst>
               <a:ext uri="{FF2B5EF4-FFF2-40B4-BE49-F238E27FC236}">
-                <a16:creationId xmlns:a16="http://schemas.microsoft.com/office/drawing/2014/main" id="{FE6FB756-D081-3D2C-F511-0B88A3F5098A}"/>
+                <a16:creationId xmlns:a16="http://schemas.microsoft.com/office/drawing/2014/main" id="{F435E9C3-CC1E-F686-858A-5BD703374BCB}"/>
               </a:ext>
             </a:extLst>
           </p:cNvPr>
@@ -14651,10 +15527,373 @@
           </a:p>
         </p:txBody>
       </p:sp>
+      <p:pic>
+        <p:nvPicPr>
+          <p:cNvPr id="9" name="Picture 8" descr="A diagram of a software development process&#10;&#10;AI-generated content may be incorrect.">
+            <a:extLst>
+              <a:ext uri="{FF2B5EF4-FFF2-40B4-BE49-F238E27FC236}">
+                <a16:creationId xmlns:a16="http://schemas.microsoft.com/office/drawing/2014/main" id="{BD0A6D63-726C-C27A-A4AF-8A93226BC8DA}"/>
+              </a:ext>
+            </a:extLst>
+          </p:cNvPr>
+          <p:cNvPicPr>
+            <a:picLocks noChangeAspect="1"/>
+          </p:cNvPicPr>
+          <p:nvPr/>
+        </p:nvPicPr>
+        <p:blipFill>
+          <a:blip r:embed="rId5"/>
+          <a:stretch>
+            <a:fillRect/>
+          </a:stretch>
+        </p:blipFill>
+        <p:spPr>
+          <a:xfrm>
+            <a:off x="79823" y="1594944"/>
+            <a:ext cx="7647501" cy="4713152"/>
+          </a:xfrm>
+          <a:prstGeom prst="roundRect">
+            <a:avLst>
+              <a:gd name="adj" fmla="val 16667"/>
+            </a:avLst>
+          </a:prstGeom>
+          <a:ln>
+            <a:noFill/>
+          </a:ln>
+          <a:effectLst>
+            <a:outerShdw blurRad="152400" dist="12000" dir="900000" sy="98000" kx="110000" ky="200000" algn="tl" rotWithShape="0">
+              <a:srgbClr val="000000">
+                <a:alpha val="30000"/>
+              </a:srgbClr>
+            </a:outerShdw>
+          </a:effectLst>
+          <a:scene3d>
+            <a:camera prst="perspectiveRelaxed">
+              <a:rot lat="19800000" lon="1200000" rev="20820000"/>
+            </a:camera>
+            <a:lightRig rig="threePt" dir="t"/>
+          </a:scene3d>
+          <a:sp3d contourW="6350" prstMaterial="matte">
+            <a:bevelT w="101600" h="101600"/>
+            <a:contourClr>
+              <a:srgbClr val="969696"/>
+            </a:contourClr>
+          </a:sp3d>
+        </p:spPr>
+      </p:pic>
+      <p:sp>
+        <p:nvSpPr>
+          <p:cNvPr id="3" name="Subtitle 2">
+            <a:extLst>
+              <a:ext uri="{FF2B5EF4-FFF2-40B4-BE49-F238E27FC236}">
+                <a16:creationId xmlns:a16="http://schemas.microsoft.com/office/drawing/2014/main" id="{EDBB65E7-AAFD-1F0D-84A1-35ED013B9DC9}"/>
+              </a:ext>
+            </a:extLst>
+          </p:cNvPr>
+          <p:cNvSpPr>
+            <a:spLocks noGrp="1"/>
+          </p:cNvSpPr>
+          <p:nvPr>
+            <p:ph type="subTitle" idx="1"/>
+          </p:nvPr>
+        </p:nvSpPr>
+        <p:spPr>
+          <a:xfrm>
+            <a:off x="5988676" y="4047556"/>
+            <a:ext cx="5916566" cy="1674253"/>
+          </a:xfrm>
+        </p:spPr>
+        <p:txBody>
+          <a:bodyPr>
+            <a:normAutofit fontScale="85000" lnSpcReduction="20000"/>
+          </a:bodyPr>
+          <a:lstStyle/>
+          <a:p>
+            <a:r>
+              <a:rPr lang="en-US" altLang="zh-CN" sz="4400" b="1" dirty="0">
+                <a:effectLst>
+                  <a:outerShdw blurRad="38100" dist="38100" dir="2700000" algn="tl">
+                    <a:srgbClr val="000000">
+                      <a:alpha val="43137"/>
+                    </a:srgbClr>
+                  </a:outerShdw>
+                </a:effectLst>
+              </a:rPr>
+              <a:t>Getting Started with React</a:t>
+            </a:r>
+          </a:p>
+          <a:p>
+            <a:r>
+              <a:rPr lang="en-US" sz="4100" b="1" dirty="0">
+                <a:effectLst>
+                  <a:outerShdw blurRad="38100" dist="38100" dir="2700000" algn="tl">
+                    <a:srgbClr val="000000">
+                      <a:alpha val="43137"/>
+                    </a:srgbClr>
+                  </a:outerShdw>
+                </a:effectLst>
+              </a:rPr>
+              <a:t>4.2 Handling JSX</a:t>
+            </a:r>
+          </a:p>
+        </p:txBody>
+      </p:sp>
+      <p:sp>
+        <p:nvSpPr>
+          <p:cNvPr id="7" name="Subtitle 2">
+            <a:extLst>
+              <a:ext uri="{FF2B5EF4-FFF2-40B4-BE49-F238E27FC236}">
+                <a16:creationId xmlns:a16="http://schemas.microsoft.com/office/drawing/2014/main" id="{959C108C-09E9-0380-CC70-93BCA38A190E}"/>
+              </a:ext>
+            </a:extLst>
+          </p:cNvPr>
+          <p:cNvSpPr txBox="1">
+            <a:spLocks/>
+          </p:cNvSpPr>
+          <p:nvPr/>
+        </p:nvSpPr>
+        <p:spPr>
+          <a:xfrm>
+            <a:off x="6755257" y="2199289"/>
+            <a:ext cx="2102069" cy="1447801"/>
+          </a:xfrm>
+          <a:prstGeom prst="rect">
+            <a:avLst/>
+          </a:prstGeom>
+        </p:spPr>
+        <p:txBody>
+          <a:bodyPr vert="horz" lIns="91440" tIns="45720" rIns="91440" bIns="45720" rtlCol="0" anchor="ctr">
+            <a:normAutofit fontScale="92500" lnSpcReduction="20000"/>
+          </a:bodyPr>
+          <a:lstStyle>
+            <a:lvl1pPr marL="0" indent="0" algn="l" defTabSz="457200" rtl="0" eaLnBrk="1" latinLnBrk="0" hangingPunct="1">
+              <a:spcBef>
+                <a:spcPts val="1000"/>
+              </a:spcBef>
+              <a:spcAft>
+                <a:spcPts val="0"/>
+              </a:spcAft>
+              <a:buClr>
+                <a:schemeClr val="accent1"/>
+              </a:buClr>
+              <a:buSzPct val="80000"/>
+              <a:buFont typeface="Wingdings 3" charset="2"/>
+              <a:buNone/>
+              <a:defRPr sz="2000" b="0" i="0" kern="1200" cap="all">
+                <a:solidFill>
+                  <a:schemeClr val="accent1"/>
+                </a:solidFill>
+                <a:latin typeface="+mj-lt"/>
+                <a:ea typeface="+mj-ea"/>
+                <a:cs typeface="+mj-cs"/>
+              </a:defRPr>
+            </a:lvl1pPr>
+            <a:lvl2pPr marL="457200" indent="0" algn="ctr" defTabSz="457200" rtl="0" eaLnBrk="1" latinLnBrk="0" hangingPunct="1">
+              <a:spcBef>
+                <a:spcPts val="1000"/>
+              </a:spcBef>
+              <a:spcAft>
+                <a:spcPts val="0"/>
+              </a:spcAft>
+              <a:buClr>
+                <a:schemeClr val="accent1"/>
+              </a:buClr>
+              <a:buSzPct val="80000"/>
+              <a:buFont typeface="Wingdings 3" charset="2"/>
+              <a:buNone/>
+              <a:defRPr sz="1800" b="0" i="0" kern="1200">
+                <a:solidFill>
+                  <a:schemeClr val="tx1">
+                    <a:tint val="75000"/>
+                  </a:schemeClr>
+                </a:solidFill>
+                <a:latin typeface="+mj-lt"/>
+                <a:ea typeface="+mj-ea"/>
+                <a:cs typeface="+mj-cs"/>
+              </a:defRPr>
+            </a:lvl2pPr>
+            <a:lvl3pPr marL="914400" indent="0" algn="ctr" defTabSz="457200" rtl="0" eaLnBrk="1" latinLnBrk="0" hangingPunct="1">
+              <a:spcBef>
+                <a:spcPts val="1000"/>
+              </a:spcBef>
+              <a:spcAft>
+                <a:spcPts val="0"/>
+              </a:spcAft>
+              <a:buClr>
+                <a:schemeClr val="accent1"/>
+              </a:buClr>
+              <a:buSzPct val="80000"/>
+              <a:buFont typeface="Wingdings 3" charset="2"/>
+              <a:buNone/>
+              <a:defRPr sz="1600" b="0" i="0" kern="1200">
+                <a:solidFill>
+                  <a:schemeClr val="tx1">
+                    <a:tint val="75000"/>
+                  </a:schemeClr>
+                </a:solidFill>
+                <a:latin typeface="+mj-lt"/>
+                <a:ea typeface="+mj-ea"/>
+                <a:cs typeface="+mj-cs"/>
+              </a:defRPr>
+            </a:lvl3pPr>
+            <a:lvl4pPr marL="1371600" indent="0" algn="ctr" defTabSz="457200" rtl="0" eaLnBrk="1" latinLnBrk="0" hangingPunct="1">
+              <a:spcBef>
+                <a:spcPts val="1000"/>
+              </a:spcBef>
+              <a:spcAft>
+                <a:spcPts val="0"/>
+              </a:spcAft>
+              <a:buClr>
+                <a:schemeClr val="accent1"/>
+              </a:buClr>
+              <a:buSzPct val="80000"/>
+              <a:buFont typeface="Wingdings 3" charset="2"/>
+              <a:buNone/>
+              <a:defRPr sz="1400" b="0" i="0" kern="1200">
+                <a:solidFill>
+                  <a:schemeClr val="tx1">
+                    <a:tint val="75000"/>
+                  </a:schemeClr>
+                </a:solidFill>
+                <a:latin typeface="+mj-lt"/>
+                <a:ea typeface="+mj-ea"/>
+                <a:cs typeface="+mj-cs"/>
+              </a:defRPr>
+            </a:lvl4pPr>
+            <a:lvl5pPr marL="1828800" indent="0" algn="ctr" defTabSz="457200" rtl="0" eaLnBrk="1" latinLnBrk="0" hangingPunct="1">
+              <a:spcBef>
+                <a:spcPts val="1000"/>
+              </a:spcBef>
+              <a:spcAft>
+                <a:spcPts val="0"/>
+              </a:spcAft>
+              <a:buClr>
+                <a:schemeClr val="accent1"/>
+              </a:buClr>
+              <a:buSzPct val="80000"/>
+              <a:buFont typeface="Wingdings 3" charset="2"/>
+              <a:buNone/>
+              <a:defRPr sz="1400" b="0" i="0" kern="1200">
+                <a:solidFill>
+                  <a:schemeClr val="tx1">
+                    <a:tint val="75000"/>
+                  </a:schemeClr>
+                </a:solidFill>
+                <a:latin typeface="+mj-lt"/>
+                <a:ea typeface="+mj-ea"/>
+                <a:cs typeface="+mj-cs"/>
+              </a:defRPr>
+            </a:lvl5pPr>
+            <a:lvl6pPr marL="2286000" indent="0" algn="ctr" defTabSz="457200" rtl="0" eaLnBrk="1" latinLnBrk="0" hangingPunct="1">
+              <a:spcBef>
+                <a:spcPts val="1000"/>
+              </a:spcBef>
+              <a:spcAft>
+                <a:spcPts val="0"/>
+              </a:spcAft>
+              <a:buClr>
+                <a:schemeClr val="accent1"/>
+              </a:buClr>
+              <a:buSzPct val="80000"/>
+              <a:buFont typeface="Wingdings 3" charset="2"/>
+              <a:buNone/>
+              <a:defRPr sz="1400" b="0" i="0" kern="1200">
+                <a:solidFill>
+                  <a:schemeClr val="tx1">
+                    <a:tint val="75000"/>
+                  </a:schemeClr>
+                </a:solidFill>
+                <a:latin typeface="+mj-lt"/>
+                <a:ea typeface="+mj-ea"/>
+                <a:cs typeface="+mj-cs"/>
+              </a:defRPr>
+            </a:lvl6pPr>
+            <a:lvl7pPr marL="2743200" indent="0" algn="ctr" defTabSz="457200" rtl="0" eaLnBrk="1" latinLnBrk="0" hangingPunct="1">
+              <a:spcBef>
+                <a:spcPts val="1000"/>
+              </a:spcBef>
+              <a:spcAft>
+                <a:spcPts val="0"/>
+              </a:spcAft>
+              <a:buClr>
+                <a:schemeClr val="accent1"/>
+              </a:buClr>
+              <a:buSzPct val="80000"/>
+              <a:buFont typeface="Wingdings 3" charset="2"/>
+              <a:buNone/>
+              <a:defRPr sz="1400" b="0" i="0" kern="1200">
+                <a:solidFill>
+                  <a:schemeClr val="tx1">
+                    <a:tint val="75000"/>
+                  </a:schemeClr>
+                </a:solidFill>
+                <a:latin typeface="+mj-lt"/>
+                <a:ea typeface="+mj-ea"/>
+                <a:cs typeface="+mj-cs"/>
+              </a:defRPr>
+            </a:lvl7pPr>
+            <a:lvl8pPr marL="3200400" indent="0" algn="ctr" defTabSz="457200" rtl="0" eaLnBrk="1" latinLnBrk="0" hangingPunct="1">
+              <a:spcBef>
+                <a:spcPts val="1000"/>
+              </a:spcBef>
+              <a:spcAft>
+                <a:spcPts val="0"/>
+              </a:spcAft>
+              <a:buClr>
+                <a:schemeClr val="accent1"/>
+              </a:buClr>
+              <a:buSzPct val="80000"/>
+              <a:buFont typeface="Wingdings 3" charset="2"/>
+              <a:buNone/>
+              <a:defRPr sz="1400" b="0" i="0" kern="1200">
+                <a:solidFill>
+                  <a:schemeClr val="tx1">
+                    <a:tint val="75000"/>
+                  </a:schemeClr>
+                </a:solidFill>
+                <a:latin typeface="+mj-lt"/>
+                <a:ea typeface="+mj-ea"/>
+                <a:cs typeface="+mj-cs"/>
+              </a:defRPr>
+            </a:lvl8pPr>
+            <a:lvl9pPr marL="3657600" indent="0" algn="ctr" defTabSz="457200" rtl="0" eaLnBrk="1" latinLnBrk="0" hangingPunct="1">
+              <a:spcBef>
+                <a:spcPts val="1000"/>
+              </a:spcBef>
+              <a:spcAft>
+                <a:spcPts val="0"/>
+              </a:spcAft>
+              <a:buClr>
+                <a:schemeClr val="accent1"/>
+              </a:buClr>
+              <a:buSzPct val="80000"/>
+              <a:buFont typeface="Wingdings 3" charset="2"/>
+              <a:buNone/>
+              <a:defRPr sz="1400" b="0" i="0" kern="1200">
+                <a:solidFill>
+                  <a:schemeClr val="tx1">
+                    <a:tint val="75000"/>
+                  </a:schemeClr>
+                </a:solidFill>
+                <a:latin typeface="+mj-lt"/>
+                <a:ea typeface="+mj-ea"/>
+                <a:cs typeface="+mj-cs"/>
+              </a:defRPr>
+            </a:lvl9pPr>
+          </a:lstStyle>
+          <a:p>
+            <a:pPr algn="ctr"/>
+            <a:r>
+              <a:rPr lang="en-US" sz="11500" b="1" dirty="0"/>
+              <a:t>05</a:t>
+            </a:r>
+          </a:p>
+        </p:txBody>
+      </p:sp>
     </p:spTree>
     <p:extLst>
       <p:ext uri="{BB962C8B-B14F-4D97-AF65-F5344CB8AC3E}">
-        <p14:creationId xmlns:p14="http://schemas.microsoft.com/office/powerpoint/2010/main" val="2851232936"/>
+        <p14:creationId xmlns:p14="http://schemas.microsoft.com/office/powerpoint/2010/main" val="4285170686"/>
       </p:ext>
     </p:extLst>
   </p:cSld>
@@ -14664,7 +15903,7 @@
 </p:sld>
 </file>
 
-<file path=ppt/slides/slide6.xml><?xml version="1.0" encoding="utf-8"?>
+<file path=ppt/slides/slide7.xml><?xml version="1.0" encoding="utf-8"?>
 <p:sld xmlns:a="http://schemas.openxmlformats.org/drawingml/2006/main" xmlns:r="http://schemas.openxmlformats.org/officeDocument/2006/relationships" xmlns:p="http://schemas.openxmlformats.org/presentationml/2006/main">
   <p:cSld>
     <p:spTree>
@@ -15087,7 +16326,7 @@
             <a:pPr algn="ctr"/>
             <a:r>
               <a:rPr lang="en-US" sz="11500" b="1" dirty="0"/>
-              <a:t>05</a:t>
+              <a:t>06</a:t>
             </a:r>
           </a:p>
         </p:txBody>
@@ -15208,7 +16447,7 @@
 </p:sld>
 </file>
 
-<file path=ppt/slides/slide7.xml><?xml version="1.0" encoding="utf-8"?>
+<file path=ppt/slides/slide8.xml><?xml version="1.0" encoding="utf-8"?>
 <p:sld xmlns:a="http://schemas.openxmlformats.org/drawingml/2006/main" xmlns:r="http://schemas.openxmlformats.org/officeDocument/2006/relationships" xmlns:p="http://schemas.openxmlformats.org/presentationml/2006/main">
   <p:cSld>
     <p:spTree>
@@ -15631,7 +16870,7 @@
             <a:pPr algn="ctr"/>
             <a:r>
               <a:rPr lang="en-US" sz="11500" b="1" dirty="0"/>
-              <a:t>06</a:t>
+              <a:t>07</a:t>
             </a:r>
           </a:p>
         </p:txBody>
@@ -15752,7 +16991,7 @@
 </p:sld>
 </file>
 
-<file path=ppt/slides/slide8.xml><?xml version="1.0" encoding="utf-8"?>
+<file path=ppt/slides/slide9.xml><?xml version="1.0" encoding="utf-8"?>
 <p:sld xmlns:a="http://schemas.openxmlformats.org/drawingml/2006/main" xmlns:r="http://schemas.openxmlformats.org/officeDocument/2006/relationships" xmlns:p="http://schemas.openxmlformats.org/presentationml/2006/main">
   <p:cSld>
     <p:spTree>
@@ -16175,7 +17414,7 @@
             <a:pPr algn="ctr"/>
             <a:r>
               <a:rPr lang="en-US" sz="11500" b="1" dirty="0"/>
-              <a:t>07</a:t>
+              <a:t>08</a:t>
             </a:r>
           </a:p>
         </p:txBody>
@@ -16287,550 +17526,6 @@
     <p:extLst>
       <p:ext uri="{BB962C8B-B14F-4D97-AF65-F5344CB8AC3E}">
         <p14:creationId xmlns:p14="http://schemas.microsoft.com/office/powerpoint/2010/main" val="1691132564"/>
-      </p:ext>
-    </p:extLst>
-  </p:cSld>
-  <p:clrMapOvr>
-    <a:masterClrMapping/>
-  </p:clrMapOvr>
-</p:sld>
-</file>
-
-<file path=ppt/slides/slide9.xml><?xml version="1.0" encoding="utf-8"?>
-<p:sld xmlns:a="http://schemas.openxmlformats.org/drawingml/2006/main" xmlns:r="http://schemas.openxmlformats.org/officeDocument/2006/relationships" xmlns:p="http://schemas.openxmlformats.org/presentationml/2006/main">
-  <p:cSld>
-    <p:spTree>
-      <p:nvGrpSpPr>
-        <p:cNvPr id="1" name="">
-          <a:extLst>
-            <a:ext uri="{FF2B5EF4-FFF2-40B4-BE49-F238E27FC236}">
-              <a16:creationId xmlns:a16="http://schemas.microsoft.com/office/drawing/2014/main" id="{25084D4A-2E2A-5A2B-55E3-DF125F64AB2F}"/>
-            </a:ext>
-          </a:extLst>
-        </p:cNvPr>
-        <p:cNvGrpSpPr/>
-        <p:nvPr/>
-      </p:nvGrpSpPr>
-      <p:grpSpPr>
-        <a:xfrm>
-          <a:off x="0" y="0"/>
-          <a:ext cx="0" cy="0"/>
-          <a:chOff x="0" y="0"/>
-          <a:chExt cx="0" cy="0"/>
-        </a:xfrm>
-      </p:grpSpPr>
-      <p:pic>
-        <p:nvPicPr>
-          <p:cNvPr id="5" name="Picture 4" descr="chain links">
-            <a:extLst>
-              <a:ext uri="{FF2B5EF4-FFF2-40B4-BE49-F238E27FC236}">
-                <a16:creationId xmlns:a16="http://schemas.microsoft.com/office/drawing/2014/main" id="{9EF105C0-8B22-F8B0-B41E-8CFD85EACE0A}"/>
-              </a:ext>
-            </a:extLst>
-          </p:cNvPr>
-          <p:cNvPicPr>
-            <a:picLocks noChangeAspect="1"/>
-          </p:cNvPicPr>
-          <p:nvPr/>
-        </p:nvPicPr>
-        <p:blipFill rotWithShape="1">
-          <a:blip r:embed="rId3">
-            <a:duotone>
-              <a:prstClr val="black"/>
-              <a:schemeClr val="accent5">
-                <a:tint val="45000"/>
-                <a:satMod val="400000"/>
-              </a:schemeClr>
-            </a:duotone>
-            <a:alphaModFix amt="25000"/>
-          </a:blip>
-          <a:srcRect t="23391" r="9091"/>
-          <a:stretch/>
-        </p:blipFill>
-        <p:spPr>
-          <a:xfrm>
-            <a:off x="0" y="10"/>
-            <a:ext cx="12191980" cy="6857990"/>
-          </a:xfrm>
-          <a:prstGeom prst="rect">
-            <a:avLst/>
-          </a:prstGeom>
-        </p:spPr>
-      </p:pic>
-      <p:sp>
-        <p:nvSpPr>
-          <p:cNvPr id="2" name="Title 1">
-            <a:extLst>
-              <a:ext uri="{FF2B5EF4-FFF2-40B4-BE49-F238E27FC236}">
-                <a16:creationId xmlns:a16="http://schemas.microsoft.com/office/drawing/2014/main" id="{0D68510A-545D-E612-33C8-92615E563448}"/>
-              </a:ext>
-            </a:extLst>
-          </p:cNvPr>
-          <p:cNvSpPr>
-            <a:spLocks noGrp="1"/>
-          </p:cNvSpPr>
-          <p:nvPr>
-            <p:ph type="ctrTitle"/>
-          </p:nvPr>
-        </p:nvSpPr>
-        <p:spPr>
-          <a:xfrm>
-            <a:off x="4474323" y="961696"/>
-            <a:ext cx="7602064" cy="1266497"/>
-          </a:xfrm>
-        </p:spPr>
-        <p:txBody>
-          <a:bodyPr anchor="ctr">
-            <a:normAutofit/>
-          </a:bodyPr>
-          <a:lstStyle/>
-          <a:p>
-            <a:r>
-              <a:rPr lang="en-US" sz="6000" b="1" dirty="0"/>
-              <a:t>REACT Foundations</a:t>
-            </a:r>
-            <a:endParaRPr lang="ru-RU" sz="6000" b="1" dirty="0"/>
-          </a:p>
-        </p:txBody>
-      </p:sp>
-      <p:sp>
-        <p:nvSpPr>
-          <p:cNvPr id="3" name="Subtitle 2">
-            <a:extLst>
-              <a:ext uri="{FF2B5EF4-FFF2-40B4-BE49-F238E27FC236}">
-                <a16:creationId xmlns:a16="http://schemas.microsoft.com/office/drawing/2014/main" id="{493941F4-35C0-C181-B474-9FE4B36D75D3}"/>
-              </a:ext>
-            </a:extLst>
-          </p:cNvPr>
-          <p:cNvSpPr>
-            <a:spLocks noGrp="1"/>
-          </p:cNvSpPr>
-          <p:nvPr>
-            <p:ph type="subTitle" idx="1"/>
-          </p:nvPr>
-        </p:nvSpPr>
-        <p:spPr>
-          <a:xfrm>
-            <a:off x="6698088" y="3909848"/>
-            <a:ext cx="5207153" cy="1266497"/>
-          </a:xfrm>
-        </p:spPr>
-        <p:txBody>
-          <a:bodyPr>
-            <a:normAutofit fontScale="92500" lnSpcReduction="10000"/>
-          </a:bodyPr>
-          <a:lstStyle/>
-          <a:p>
-            <a:r>
-              <a:rPr lang="en-US" altLang="zh-CN" sz="4400" b="1" dirty="0"/>
-              <a:t>From React to Next.js</a:t>
-            </a:r>
-            <a:endParaRPr lang="en-US" sz="4400" b="1" dirty="0"/>
-          </a:p>
-        </p:txBody>
-      </p:sp>
-      <p:pic>
-        <p:nvPicPr>
-          <p:cNvPr id="6" name="Picture 5" descr="A group of cubes with a symbol in center&#10;&#10;AI-generated content may be incorrect.">
-            <a:extLst>
-              <a:ext uri="{FF2B5EF4-FFF2-40B4-BE49-F238E27FC236}">
-                <a16:creationId xmlns:a16="http://schemas.microsoft.com/office/drawing/2014/main" id="{54A9F52E-2D4E-D3AE-3F2C-5B18C8D5C9B7}"/>
-              </a:ext>
-            </a:extLst>
-          </p:cNvPr>
-          <p:cNvPicPr>
-            <a:picLocks noChangeAspect="1"/>
-          </p:cNvPicPr>
-          <p:nvPr/>
-        </p:nvPicPr>
-        <p:blipFill>
-          <a:blip r:embed="rId4"/>
-          <a:stretch>
-            <a:fillRect/>
-          </a:stretch>
-        </p:blipFill>
-        <p:spPr>
-          <a:xfrm>
-            <a:off x="115614" y="126986"/>
-            <a:ext cx="3965294" cy="3520104"/>
-          </a:xfrm>
-          <a:prstGeom prst="roundRect">
-            <a:avLst>
-              <a:gd name="adj" fmla="val 8594"/>
-            </a:avLst>
-          </a:prstGeom>
-          <a:solidFill>
-            <a:srgbClr val="FFFFFF">
-              <a:shade val="85000"/>
-            </a:srgbClr>
-          </a:solidFill>
-          <a:ln>
-            <a:noFill/>
-          </a:ln>
-          <a:effectLst>
-            <a:reflection blurRad="12700" stA="38000" endPos="28000" dist="5000" dir="5400000" sy="-100000" algn="bl" rotWithShape="0"/>
-          </a:effectLst>
-        </p:spPr>
-      </p:pic>
-      <p:sp>
-        <p:nvSpPr>
-          <p:cNvPr id="7" name="Subtitle 2">
-            <a:extLst>
-              <a:ext uri="{FF2B5EF4-FFF2-40B4-BE49-F238E27FC236}">
-                <a16:creationId xmlns:a16="http://schemas.microsoft.com/office/drawing/2014/main" id="{A2795653-27D9-0C54-8DDB-8A02B950E9B3}"/>
-              </a:ext>
-            </a:extLst>
-          </p:cNvPr>
-          <p:cNvSpPr txBox="1">
-            <a:spLocks/>
-          </p:cNvSpPr>
-          <p:nvPr/>
-        </p:nvSpPr>
-        <p:spPr>
-          <a:xfrm>
-            <a:off x="6755257" y="2199289"/>
-            <a:ext cx="2102069" cy="1447801"/>
-          </a:xfrm>
-          <a:prstGeom prst="rect">
-            <a:avLst/>
-          </a:prstGeom>
-        </p:spPr>
-        <p:txBody>
-          <a:bodyPr vert="horz" lIns="91440" tIns="45720" rIns="91440" bIns="45720" rtlCol="0" anchor="ctr">
-            <a:normAutofit fontScale="92500" lnSpcReduction="20000"/>
-          </a:bodyPr>
-          <a:lstStyle>
-            <a:lvl1pPr marL="0" indent="0" algn="l" defTabSz="457200" rtl="0" eaLnBrk="1" latinLnBrk="0" hangingPunct="1">
-              <a:spcBef>
-                <a:spcPts val="1000"/>
-              </a:spcBef>
-              <a:spcAft>
-                <a:spcPts val="0"/>
-              </a:spcAft>
-              <a:buClr>
-                <a:schemeClr val="accent1"/>
-              </a:buClr>
-              <a:buSzPct val="80000"/>
-              <a:buFont typeface="Wingdings 3" charset="2"/>
-              <a:buNone/>
-              <a:defRPr sz="2000" b="0" i="0" kern="1200" cap="all">
-                <a:solidFill>
-                  <a:schemeClr val="accent1"/>
-                </a:solidFill>
-                <a:latin typeface="+mj-lt"/>
-                <a:ea typeface="+mj-ea"/>
-                <a:cs typeface="+mj-cs"/>
-              </a:defRPr>
-            </a:lvl1pPr>
-            <a:lvl2pPr marL="457200" indent="0" algn="ctr" defTabSz="457200" rtl="0" eaLnBrk="1" latinLnBrk="0" hangingPunct="1">
-              <a:spcBef>
-                <a:spcPts val="1000"/>
-              </a:spcBef>
-              <a:spcAft>
-                <a:spcPts val="0"/>
-              </a:spcAft>
-              <a:buClr>
-                <a:schemeClr val="accent1"/>
-              </a:buClr>
-              <a:buSzPct val="80000"/>
-              <a:buFont typeface="Wingdings 3" charset="2"/>
-              <a:buNone/>
-              <a:defRPr sz="1800" b="0" i="0" kern="1200">
-                <a:solidFill>
-                  <a:schemeClr val="tx1">
-                    <a:tint val="75000"/>
-                  </a:schemeClr>
-                </a:solidFill>
-                <a:latin typeface="+mj-lt"/>
-                <a:ea typeface="+mj-ea"/>
-                <a:cs typeface="+mj-cs"/>
-              </a:defRPr>
-            </a:lvl2pPr>
-            <a:lvl3pPr marL="914400" indent="0" algn="ctr" defTabSz="457200" rtl="0" eaLnBrk="1" latinLnBrk="0" hangingPunct="1">
-              <a:spcBef>
-                <a:spcPts val="1000"/>
-              </a:spcBef>
-              <a:spcAft>
-                <a:spcPts val="0"/>
-              </a:spcAft>
-              <a:buClr>
-                <a:schemeClr val="accent1"/>
-              </a:buClr>
-              <a:buSzPct val="80000"/>
-              <a:buFont typeface="Wingdings 3" charset="2"/>
-              <a:buNone/>
-              <a:defRPr sz="1600" b="0" i="0" kern="1200">
-                <a:solidFill>
-                  <a:schemeClr val="tx1">
-                    <a:tint val="75000"/>
-                  </a:schemeClr>
-                </a:solidFill>
-                <a:latin typeface="+mj-lt"/>
-                <a:ea typeface="+mj-ea"/>
-                <a:cs typeface="+mj-cs"/>
-              </a:defRPr>
-            </a:lvl3pPr>
-            <a:lvl4pPr marL="1371600" indent="0" algn="ctr" defTabSz="457200" rtl="0" eaLnBrk="1" latinLnBrk="0" hangingPunct="1">
-              <a:spcBef>
-                <a:spcPts val="1000"/>
-              </a:spcBef>
-              <a:spcAft>
-                <a:spcPts val="0"/>
-              </a:spcAft>
-              <a:buClr>
-                <a:schemeClr val="accent1"/>
-              </a:buClr>
-              <a:buSzPct val="80000"/>
-              <a:buFont typeface="Wingdings 3" charset="2"/>
-              <a:buNone/>
-              <a:defRPr sz="1400" b="0" i="0" kern="1200">
-                <a:solidFill>
-                  <a:schemeClr val="tx1">
-                    <a:tint val="75000"/>
-                  </a:schemeClr>
-                </a:solidFill>
-                <a:latin typeface="+mj-lt"/>
-                <a:ea typeface="+mj-ea"/>
-                <a:cs typeface="+mj-cs"/>
-              </a:defRPr>
-            </a:lvl4pPr>
-            <a:lvl5pPr marL="1828800" indent="0" algn="ctr" defTabSz="457200" rtl="0" eaLnBrk="1" latinLnBrk="0" hangingPunct="1">
-              <a:spcBef>
-                <a:spcPts val="1000"/>
-              </a:spcBef>
-              <a:spcAft>
-                <a:spcPts val="0"/>
-              </a:spcAft>
-              <a:buClr>
-                <a:schemeClr val="accent1"/>
-              </a:buClr>
-              <a:buSzPct val="80000"/>
-              <a:buFont typeface="Wingdings 3" charset="2"/>
-              <a:buNone/>
-              <a:defRPr sz="1400" b="0" i="0" kern="1200">
-                <a:solidFill>
-                  <a:schemeClr val="tx1">
-                    <a:tint val="75000"/>
-                  </a:schemeClr>
-                </a:solidFill>
-                <a:latin typeface="+mj-lt"/>
-                <a:ea typeface="+mj-ea"/>
-                <a:cs typeface="+mj-cs"/>
-              </a:defRPr>
-            </a:lvl5pPr>
-            <a:lvl6pPr marL="2286000" indent="0" algn="ctr" defTabSz="457200" rtl="0" eaLnBrk="1" latinLnBrk="0" hangingPunct="1">
-              <a:spcBef>
-                <a:spcPts val="1000"/>
-              </a:spcBef>
-              <a:spcAft>
-                <a:spcPts val="0"/>
-              </a:spcAft>
-              <a:buClr>
-                <a:schemeClr val="accent1"/>
-              </a:buClr>
-              <a:buSzPct val="80000"/>
-              <a:buFont typeface="Wingdings 3" charset="2"/>
-              <a:buNone/>
-              <a:defRPr sz="1400" b="0" i="0" kern="1200">
-                <a:solidFill>
-                  <a:schemeClr val="tx1">
-                    <a:tint val="75000"/>
-                  </a:schemeClr>
-                </a:solidFill>
-                <a:latin typeface="+mj-lt"/>
-                <a:ea typeface="+mj-ea"/>
-                <a:cs typeface="+mj-cs"/>
-              </a:defRPr>
-            </a:lvl6pPr>
-            <a:lvl7pPr marL="2743200" indent="0" algn="ctr" defTabSz="457200" rtl="0" eaLnBrk="1" latinLnBrk="0" hangingPunct="1">
-              <a:spcBef>
-                <a:spcPts val="1000"/>
-              </a:spcBef>
-              <a:spcAft>
-                <a:spcPts val="0"/>
-              </a:spcAft>
-              <a:buClr>
-                <a:schemeClr val="accent1"/>
-              </a:buClr>
-              <a:buSzPct val="80000"/>
-              <a:buFont typeface="Wingdings 3" charset="2"/>
-              <a:buNone/>
-              <a:defRPr sz="1400" b="0" i="0" kern="1200">
-                <a:solidFill>
-                  <a:schemeClr val="tx1">
-                    <a:tint val="75000"/>
-                  </a:schemeClr>
-                </a:solidFill>
-                <a:latin typeface="+mj-lt"/>
-                <a:ea typeface="+mj-ea"/>
-                <a:cs typeface="+mj-cs"/>
-              </a:defRPr>
-            </a:lvl7pPr>
-            <a:lvl8pPr marL="3200400" indent="0" algn="ctr" defTabSz="457200" rtl="0" eaLnBrk="1" latinLnBrk="0" hangingPunct="1">
-              <a:spcBef>
-                <a:spcPts val="1000"/>
-              </a:spcBef>
-              <a:spcAft>
-                <a:spcPts val="0"/>
-              </a:spcAft>
-              <a:buClr>
-                <a:schemeClr val="accent1"/>
-              </a:buClr>
-              <a:buSzPct val="80000"/>
-              <a:buFont typeface="Wingdings 3" charset="2"/>
-              <a:buNone/>
-              <a:defRPr sz="1400" b="0" i="0" kern="1200">
-                <a:solidFill>
-                  <a:schemeClr val="tx1">
-                    <a:tint val="75000"/>
-                  </a:schemeClr>
-                </a:solidFill>
-                <a:latin typeface="+mj-lt"/>
-                <a:ea typeface="+mj-ea"/>
-                <a:cs typeface="+mj-cs"/>
-              </a:defRPr>
-            </a:lvl8pPr>
-            <a:lvl9pPr marL="3657600" indent="0" algn="ctr" defTabSz="457200" rtl="0" eaLnBrk="1" latinLnBrk="0" hangingPunct="1">
-              <a:spcBef>
-                <a:spcPts val="1000"/>
-              </a:spcBef>
-              <a:spcAft>
-                <a:spcPts val="0"/>
-              </a:spcAft>
-              <a:buClr>
-                <a:schemeClr val="accent1"/>
-              </a:buClr>
-              <a:buSzPct val="80000"/>
-              <a:buFont typeface="Wingdings 3" charset="2"/>
-              <a:buNone/>
-              <a:defRPr sz="1400" b="0" i="0" kern="1200">
-                <a:solidFill>
-                  <a:schemeClr val="tx1">
-                    <a:tint val="75000"/>
-                  </a:schemeClr>
-                </a:solidFill>
-                <a:latin typeface="+mj-lt"/>
-                <a:ea typeface="+mj-ea"/>
-                <a:cs typeface="+mj-cs"/>
-              </a:defRPr>
-            </a:lvl9pPr>
-          </a:lstStyle>
-          <a:p>
-            <a:pPr algn="ctr"/>
-            <a:r>
-              <a:rPr lang="en-US" sz="11500" b="1" dirty="0"/>
-              <a:t>08</a:t>
-            </a:r>
-          </a:p>
-        </p:txBody>
-      </p:sp>
-      <p:pic>
-        <p:nvPicPr>
-          <p:cNvPr id="9" name="Picture 8" descr="A blue and orange text box&#10;&#10;AI-generated content may be incorrect.">
-            <a:extLst>
-              <a:ext uri="{FF2B5EF4-FFF2-40B4-BE49-F238E27FC236}">
-                <a16:creationId xmlns:a16="http://schemas.microsoft.com/office/drawing/2014/main" id="{A9FD003E-1AE5-E57B-E128-D714911240FD}"/>
-              </a:ext>
-            </a:extLst>
-          </p:cNvPr>
-          <p:cNvPicPr>
-            <a:picLocks noChangeAspect="1"/>
-          </p:cNvPicPr>
-          <p:nvPr/>
-        </p:nvPicPr>
-        <p:blipFill>
-          <a:blip r:embed="rId5"/>
-          <a:stretch>
-            <a:fillRect/>
-          </a:stretch>
-        </p:blipFill>
-        <p:spPr>
-          <a:xfrm>
-            <a:off x="419926" y="1615493"/>
-            <a:ext cx="6118201" cy="5021613"/>
-          </a:xfrm>
-          <a:prstGeom prst="roundRect">
-            <a:avLst>
-              <a:gd name="adj" fmla="val 16667"/>
-            </a:avLst>
-          </a:prstGeom>
-          <a:ln>
-            <a:noFill/>
-          </a:ln>
-          <a:effectLst>
-            <a:outerShdw blurRad="152400" dist="12000" dir="900000" sy="98000" kx="110000" ky="200000" algn="tl" rotWithShape="0">
-              <a:srgbClr val="000000">
-                <a:alpha val="30000"/>
-              </a:srgbClr>
-            </a:outerShdw>
-          </a:effectLst>
-          <a:scene3d>
-            <a:camera prst="perspectiveRelaxed">
-              <a:rot lat="19800000" lon="1200000" rev="20820000"/>
-            </a:camera>
-            <a:lightRig rig="threePt" dir="t"/>
-          </a:scene3d>
-          <a:sp3d contourW="6350" prstMaterial="matte">
-            <a:bevelT w="101600" h="101600"/>
-            <a:contourClr>
-              <a:srgbClr val="969696"/>
-            </a:contourClr>
-          </a:sp3d>
-        </p:spPr>
-      </p:pic>
-      <p:sp>
-        <p:nvSpPr>
-          <p:cNvPr id="10" name="TextBox 9">
-            <a:extLst>
-              <a:ext uri="{FF2B5EF4-FFF2-40B4-BE49-F238E27FC236}">
-                <a16:creationId xmlns:a16="http://schemas.microsoft.com/office/drawing/2014/main" id="{F465D237-450C-1EF9-9598-2835DA2F261C}"/>
-              </a:ext>
-            </a:extLst>
-          </p:cNvPr>
-          <p:cNvSpPr txBox="1"/>
-          <p:nvPr/>
-        </p:nvSpPr>
-        <p:spPr>
-          <a:xfrm>
-            <a:off x="123014" y="6189114"/>
-            <a:ext cx="2706045" cy="523220"/>
-          </a:xfrm>
-          <a:prstGeom prst="rect">
-            <a:avLst/>
-          </a:prstGeom>
-        </p:spPr>
-        <p:style>
-          <a:lnRef idx="0">
-            <a:schemeClr val="accent4"/>
-          </a:lnRef>
-          <a:fillRef idx="3">
-            <a:schemeClr val="accent4"/>
-          </a:fillRef>
-          <a:effectRef idx="3">
-            <a:schemeClr val="accent4"/>
-          </a:effectRef>
-          <a:fontRef idx="minor">
-            <a:schemeClr val="lt1"/>
-          </a:fontRef>
-        </p:style>
-        <p:txBody>
-          <a:bodyPr wrap="square" rtlCol="0" anchor="ctr">
-            <a:spAutoFit/>
-          </a:bodyPr>
-          <a:lstStyle/>
-          <a:p>
-            <a:pPr algn="ctr"/>
-            <a:r>
-              <a:rPr lang="en-US" sz="2800" dirty="0"/>
-              <a:t>Learn Next.js</a:t>
-            </a:r>
-          </a:p>
-        </p:txBody>
-      </p:sp>
-    </p:spTree>
-    <p:extLst>
-      <p:ext uri="{BB962C8B-B14F-4D97-AF65-F5344CB8AC3E}">
-        <p14:creationId xmlns:p14="http://schemas.microsoft.com/office/powerpoint/2010/main" val="675432217"/>
       </p:ext>
     </p:extLst>
   </p:cSld>
@@ -17696,24 +18391,6 @@
 </file>
 
 <file path=customXml/item1.xml><?xml version="1.0" encoding="utf-8"?>
-<p:properties xmlns:p="http://schemas.microsoft.com/office/2006/metadata/properties" xmlns:xsi="http://www.w3.org/2001/XMLSchema-instance" xmlns:pc="http://schemas.microsoft.com/office/infopath/2007/PartnerControls">
-  <documentManagement>
-    <Status xmlns="71af3243-3dd4-4a8d-8c0d-dd76da1f02a5">Not started</Status>
-    <MediaServiceKeyPoints xmlns="71af3243-3dd4-4a8d-8c0d-dd76da1f02a5" xsi:nil="true"/>
-  </documentManagement>
-</p:properties>
-</file>
-
-<file path=customXml/item2.xml><?xml version="1.0" encoding="utf-8"?>
-<?mso-contentType ?>
-<FormTemplates xmlns="http://schemas.microsoft.com/sharepoint/v3/contenttype/forms">
-  <Display>DocumentLibraryForm</Display>
-  <Edit>DocumentLibraryForm</Edit>
-  <New>DocumentLibraryForm</New>
-</FormTemplates>
-</file>
-
-<file path=customXml/item3.xml><?xml version="1.0" encoding="utf-8"?>
 <ct:contentTypeSchema xmlns:ct="http://schemas.microsoft.com/office/2006/metadata/contentType" xmlns:ma="http://schemas.microsoft.com/office/2006/metadata/properties/metaAttributes" ct:_="" ma:_="" ma:contentTypeName="Document" ma:contentTypeID="0x01010079F111ED35F8CC479449609E8A0923A6" ma:contentTypeVersion="12" ma:contentTypeDescription="Create a new document." ma:contentTypeScope="" ma:versionID="93813dd7ca6ad654711aa0ab317e03a3">
   <xsd:schema xmlns:xsd="http://www.w3.org/2001/XMLSchema" xmlns:xs="http://www.w3.org/2001/XMLSchema" xmlns:p="http://schemas.microsoft.com/office/2006/metadata/properties" xmlns:ns2="71af3243-3dd4-4a8d-8c0d-dd76da1f02a5" xmlns:ns3="16c05727-aa75-4e4a-9b5f-8a80a1165891" targetNamespace="http://schemas.microsoft.com/office/2006/metadata/properties" ma:root="true" ma:fieldsID="f11dc0ce689dd3925e84e4e35398c6e7" ns2:_="" ns3:_="">
     <xsd:import namespace="71af3243-3dd4-4a8d-8c0d-dd76da1f02a5"/>
@@ -17934,25 +18611,25 @@
 </ct:contentTypeSchema>
 </file>
 
-<file path=customXml/itemProps1.xml><?xml version="1.0" encoding="utf-8"?>
-<ds:datastoreItem xmlns:ds="http://schemas.openxmlformats.org/officeDocument/2006/customXml" ds:itemID="{048C88F1-1664-415F-AFCE-F6CF45809817}">
-  <ds:schemaRefs>
-    <ds:schemaRef ds:uri="http://schemas.microsoft.com/office/2006/metadata/properties"/>
-    <ds:schemaRef ds:uri="http://schemas.microsoft.com/office/infopath/2007/PartnerControls"/>
-    <ds:schemaRef ds:uri="71af3243-3dd4-4a8d-8c0d-dd76da1f02a5"/>
-  </ds:schemaRefs>
-</ds:datastoreItem>
+<file path=customXml/item2.xml><?xml version="1.0" encoding="utf-8"?>
+<?mso-contentType ?>
+<FormTemplates xmlns="http://schemas.microsoft.com/sharepoint/v3/contenttype/forms">
+  <Display>DocumentLibraryForm</Display>
+  <Edit>DocumentLibraryForm</Edit>
+  <New>DocumentLibraryForm</New>
+</FormTemplates>
 </file>
 
-<file path=customXml/itemProps2.xml><?xml version="1.0" encoding="utf-8"?>
-<ds:datastoreItem xmlns:ds="http://schemas.openxmlformats.org/officeDocument/2006/customXml" ds:itemID="{0D16958A-754B-4396-9457-FD7A427A37DD}">
-  <ds:schemaRefs>
-    <ds:schemaRef ds:uri="http://schemas.microsoft.com/sharepoint/v3/contenttype/forms"/>
-  </ds:schemaRefs>
-</ds:datastoreItem>
+<file path=customXml/item3.xml><?xml version="1.0" encoding="utf-8"?>
+<p:properties xmlns:p="http://schemas.microsoft.com/office/2006/metadata/properties" xmlns:xsi="http://www.w3.org/2001/XMLSchema-instance" xmlns:pc="http://schemas.microsoft.com/office/infopath/2007/PartnerControls">
+  <documentManagement>
+    <Status xmlns="71af3243-3dd4-4a8d-8c0d-dd76da1f02a5">Not started</Status>
+    <MediaServiceKeyPoints xmlns="71af3243-3dd4-4a8d-8c0d-dd76da1f02a5" xsi:nil="true"/>
+  </documentManagement>
+</p:properties>
 </file>
 
-<file path=customXml/itemProps3.xml><?xml version="1.0" encoding="utf-8"?>
+<file path=customXml/itemProps1.xml><?xml version="1.0" encoding="utf-8"?>
 <ds:datastoreItem xmlns:ds="http://schemas.openxmlformats.org/officeDocument/2006/customXml" ds:itemID="{CC30393A-FEC6-4A44-9E4A-6EA49F1F7DC0}">
   <ds:schemaRefs>
     <ds:schemaRef ds:uri="http://schemas.microsoft.com/office/2006/metadata/contentType"/>
@@ -17969,4 +18646,22 @@
     <ds:schemaRef ds:uri="http://schemas.microsoft.com/internal/obd"/>
   </ds:schemaRefs>
 </ds:datastoreItem>
+</file>
+
+<file path=customXml/itemProps2.xml><?xml version="1.0" encoding="utf-8"?>
+<ds:datastoreItem xmlns:ds="http://schemas.openxmlformats.org/officeDocument/2006/customXml" ds:itemID="{0D16958A-754B-4396-9457-FD7A427A37DD}">
+  <ds:schemaRefs>
+    <ds:schemaRef ds:uri="http://schemas.microsoft.com/sharepoint/v3/contenttype/forms"/>
+  </ds:schemaRefs>
+</ds:datastoreItem>
+</file>
+
+<file path=customXml/itemProps3.xml><?xml version="1.0" encoding="utf-8"?>
+<ds:datastoreItem xmlns:ds="http://schemas.openxmlformats.org/officeDocument/2006/customXml" ds:itemID="{048C88F1-1664-415F-AFCE-F6CF45809817}">
+  <ds:schemaRefs>
+    <ds:schemaRef ds:uri="http://schemas.microsoft.com/office/2006/metadata/properties"/>
+    <ds:schemaRef ds:uri="http://schemas.microsoft.com/office/infopath/2007/PartnerControls"/>
+    <ds:schemaRef ds:uri="71af3243-3dd4-4a8d-8c0d-dd76da1f02a5"/>
+  </ds:schemaRefs>
+</ds:datastoreItem>
 </file>
--- a/learn_nextjs/1_React-Foundation/React_Foundations.pptx
+++ b/learn_nextjs/1_React-Foundation/React_Foundations.pptx
@@ -5,10 +5,10 @@
     <p:sldMasterId id="2147483648" r:id="rId4"/>
   </p:sldMasterIdLst>
   <p:notesMasterIdLst>
-    <p:notesMasterId r:id="rId18"/>
+    <p:notesMasterId r:id="rId19"/>
   </p:notesMasterIdLst>
   <p:handoutMasterIdLst>
-    <p:handoutMasterId r:id="rId19"/>
+    <p:handoutMasterId r:id="rId20"/>
   </p:handoutMasterIdLst>
   <p:sldIdLst>
     <p:sldId id="256" r:id="rId5"/>
@@ -24,6 +24,7 @@
     <p:sldId id="265" r:id="rId15"/>
     <p:sldId id="266" r:id="rId16"/>
     <p:sldId id="267" r:id="rId17"/>
+    <p:sldId id="270" r:id="rId18"/>
   </p:sldIdLst>
   <p:sldSz cx="12192000" cy="6858000"/>
   <p:notesSz cx="6858000" cy="9144000"/>
@@ -145,6 +146,753 @@
 </file>
 
 <file path=ppt/diagrams/colors1.xml><?xml version="1.0" encoding="utf-8"?>
+<dgm:colorsDef xmlns:dgm="http://schemas.openxmlformats.org/drawingml/2006/diagram" xmlns:a="http://schemas.openxmlformats.org/drawingml/2006/main" uniqueId="urn:microsoft.com/office/officeart/2005/8/colors/accent1_2">
+  <dgm:title val=""/>
+  <dgm:desc val=""/>
+  <dgm:catLst>
+    <dgm:cat type="accent1" pri="11200"/>
+  </dgm:catLst>
+  <dgm:styleLbl name="node0">
+    <dgm:fillClrLst meth="repeat">
+      <a:schemeClr val="accent1"/>
+    </dgm:fillClrLst>
+    <dgm:linClrLst meth="repeat">
+      <a:schemeClr val="lt1"/>
+    </dgm:linClrLst>
+    <dgm:effectClrLst/>
+    <dgm:txLinClrLst/>
+    <dgm:txFillClrLst/>
+    <dgm:txEffectClrLst/>
+  </dgm:styleLbl>
+  <dgm:styleLbl name="alignNode1">
+    <dgm:fillClrLst meth="repeat">
+      <a:schemeClr val="accent1"/>
+    </dgm:fillClrLst>
+    <dgm:linClrLst meth="repeat">
+      <a:schemeClr val="accent1"/>
+    </dgm:linClrLst>
+    <dgm:effectClrLst/>
+    <dgm:txLinClrLst/>
+    <dgm:txFillClrLst/>
+    <dgm:txEffectClrLst/>
+  </dgm:styleLbl>
+  <dgm:styleLbl name="node1">
+    <dgm:fillClrLst meth="repeat">
+      <a:schemeClr val="accent1"/>
+    </dgm:fillClrLst>
+    <dgm:linClrLst meth="repeat">
+      <a:schemeClr val="lt1"/>
+    </dgm:linClrLst>
+    <dgm:effectClrLst/>
+    <dgm:txLinClrLst/>
+    <dgm:txFillClrLst/>
+    <dgm:txEffectClrLst/>
+  </dgm:styleLbl>
+  <dgm:styleLbl name="lnNode1">
+    <dgm:fillClrLst meth="repeat">
+      <a:schemeClr val="accent1"/>
+    </dgm:fillClrLst>
+    <dgm:linClrLst meth="repeat">
+      <a:schemeClr val="lt1"/>
+    </dgm:linClrLst>
+    <dgm:effectClrLst/>
+    <dgm:txLinClrLst/>
+    <dgm:txFillClrLst/>
+    <dgm:txEffectClrLst/>
+  </dgm:styleLbl>
+  <dgm:styleLbl name="vennNode1">
+    <dgm:fillClrLst meth="repeat">
+      <a:schemeClr val="accent1">
+        <a:alpha val="50000"/>
+      </a:schemeClr>
+    </dgm:fillClrLst>
+    <dgm:linClrLst meth="repeat">
+      <a:schemeClr val="lt1"/>
+    </dgm:linClrLst>
+    <dgm:effectClrLst/>
+    <dgm:txLinClrLst/>
+    <dgm:txFillClrLst/>
+    <dgm:txEffectClrLst/>
+  </dgm:styleLbl>
+  <dgm:styleLbl name="node2">
+    <dgm:fillClrLst meth="repeat">
+      <a:schemeClr val="accent1"/>
+    </dgm:fillClrLst>
+    <dgm:linClrLst meth="repeat">
+      <a:schemeClr val="lt1"/>
+    </dgm:linClrLst>
+    <dgm:effectClrLst/>
+    <dgm:txLinClrLst/>
+    <dgm:txFillClrLst/>
+    <dgm:txEffectClrLst/>
+  </dgm:styleLbl>
+  <dgm:styleLbl name="node3">
+    <dgm:fillClrLst meth="repeat">
+      <a:schemeClr val="accent1"/>
+    </dgm:fillClrLst>
+    <dgm:linClrLst meth="repeat">
+      <a:schemeClr val="lt1"/>
+    </dgm:linClrLst>
+    <dgm:effectClrLst/>
+    <dgm:txLinClrLst/>
+    <dgm:txFillClrLst/>
+    <dgm:txEffectClrLst/>
+  </dgm:styleLbl>
+  <dgm:styleLbl name="node4">
+    <dgm:fillClrLst meth="repeat">
+      <a:schemeClr val="accent1"/>
+    </dgm:fillClrLst>
+    <dgm:linClrLst meth="repeat">
+      <a:schemeClr val="lt1"/>
+    </dgm:linClrLst>
+    <dgm:effectClrLst/>
+    <dgm:txLinClrLst/>
+    <dgm:txFillClrLst/>
+    <dgm:txEffectClrLst/>
+  </dgm:styleLbl>
+  <dgm:styleLbl name="fgImgPlace1">
+    <dgm:fillClrLst meth="repeat">
+      <a:schemeClr val="accent1">
+        <a:tint val="50000"/>
+      </a:schemeClr>
+    </dgm:fillClrLst>
+    <dgm:linClrLst meth="repeat">
+      <a:schemeClr val="lt1"/>
+    </dgm:linClrLst>
+    <dgm:effectClrLst/>
+    <dgm:txLinClrLst/>
+    <dgm:txFillClrLst meth="repeat">
+      <a:schemeClr val="lt1"/>
+    </dgm:txFillClrLst>
+    <dgm:txEffectClrLst/>
+  </dgm:styleLbl>
+  <dgm:styleLbl name="alignImgPlace1">
+    <dgm:fillClrLst meth="repeat">
+      <a:schemeClr val="accent1">
+        <a:tint val="50000"/>
+      </a:schemeClr>
+    </dgm:fillClrLst>
+    <dgm:linClrLst meth="repeat">
+      <a:schemeClr val="lt1"/>
+    </dgm:linClrLst>
+    <dgm:effectClrLst/>
+    <dgm:txLinClrLst/>
+    <dgm:txFillClrLst meth="repeat">
+      <a:schemeClr val="lt1"/>
+    </dgm:txFillClrLst>
+    <dgm:txEffectClrLst/>
+  </dgm:styleLbl>
+  <dgm:styleLbl name="bgImgPlace1">
+    <dgm:fillClrLst meth="repeat">
+      <a:schemeClr val="accent1">
+        <a:tint val="50000"/>
+      </a:schemeClr>
+    </dgm:fillClrLst>
+    <dgm:linClrLst meth="repeat">
+      <a:schemeClr val="lt1"/>
+    </dgm:linClrLst>
+    <dgm:effectClrLst/>
+    <dgm:txLinClrLst/>
+    <dgm:txFillClrLst meth="repeat">
+      <a:schemeClr val="lt1"/>
+    </dgm:txFillClrLst>
+    <dgm:txEffectClrLst/>
+  </dgm:styleLbl>
+  <dgm:styleLbl name="sibTrans2D1">
+    <dgm:fillClrLst meth="repeat">
+      <a:schemeClr val="accent1">
+        <a:tint val="60000"/>
+      </a:schemeClr>
+    </dgm:fillClrLst>
+    <dgm:linClrLst meth="repeat">
+      <a:schemeClr val="accent1">
+        <a:tint val="60000"/>
+      </a:schemeClr>
+    </dgm:linClrLst>
+    <dgm:effectClrLst/>
+    <dgm:txLinClrLst/>
+    <dgm:txFillClrLst/>
+    <dgm:txEffectClrLst/>
+  </dgm:styleLbl>
+  <dgm:styleLbl name="fgSibTrans2D1">
+    <dgm:fillClrLst meth="repeat">
+      <a:schemeClr val="accent1">
+        <a:tint val="60000"/>
+      </a:schemeClr>
+    </dgm:fillClrLst>
+    <dgm:linClrLst meth="repeat">
+      <a:schemeClr val="accent1">
+        <a:tint val="60000"/>
+      </a:schemeClr>
+    </dgm:linClrLst>
+    <dgm:effectClrLst/>
+    <dgm:txLinClrLst/>
+    <dgm:txFillClrLst/>
+    <dgm:txEffectClrLst/>
+  </dgm:styleLbl>
+  <dgm:styleLbl name="bgSibTrans2D1">
+    <dgm:fillClrLst meth="repeat">
+      <a:schemeClr val="accent1">
+        <a:tint val="60000"/>
+      </a:schemeClr>
+    </dgm:fillClrLst>
+    <dgm:linClrLst meth="repeat">
+      <a:schemeClr val="accent1">
+        <a:tint val="60000"/>
+      </a:schemeClr>
+    </dgm:linClrLst>
+    <dgm:effectClrLst/>
+    <dgm:txLinClrLst/>
+    <dgm:txFillClrLst/>
+    <dgm:txEffectClrLst/>
+  </dgm:styleLbl>
+  <dgm:styleLbl name="sibTrans1D1">
+    <dgm:fillClrLst meth="repeat">
+      <a:schemeClr val="accent1"/>
+    </dgm:fillClrLst>
+    <dgm:linClrLst meth="repeat">
+      <a:schemeClr val="accent1"/>
+    </dgm:linClrLst>
+    <dgm:effectClrLst/>
+    <dgm:txLinClrLst/>
+    <dgm:txFillClrLst meth="repeat">
+      <a:schemeClr val="tx1"/>
+    </dgm:txFillClrLst>
+    <dgm:txEffectClrLst/>
+  </dgm:styleLbl>
+  <dgm:styleLbl name="callout">
+    <dgm:fillClrLst meth="repeat">
+      <a:schemeClr val="accent1"/>
+    </dgm:fillClrLst>
+    <dgm:linClrLst meth="repeat">
+      <a:schemeClr val="accent1">
+        <a:tint val="50000"/>
+      </a:schemeClr>
+    </dgm:linClrLst>
+    <dgm:effectClrLst/>
+    <dgm:txLinClrLst/>
+    <dgm:txFillClrLst meth="repeat">
+      <a:schemeClr val="tx1"/>
+    </dgm:txFillClrLst>
+    <dgm:txEffectClrLst/>
+  </dgm:styleLbl>
+  <dgm:styleLbl name="asst0">
+    <dgm:fillClrLst meth="repeat">
+      <a:schemeClr val="accent1"/>
+    </dgm:fillClrLst>
+    <dgm:linClrLst meth="repeat">
+      <a:schemeClr val="lt1"/>
+    </dgm:linClrLst>
+    <dgm:effectClrLst/>
+    <dgm:txLinClrLst/>
+    <dgm:txFillClrLst/>
+    <dgm:txEffectClrLst/>
+  </dgm:styleLbl>
+  <dgm:styleLbl name="asst1">
+    <dgm:fillClrLst meth="repeat">
+      <a:schemeClr val="accent1"/>
+    </dgm:fillClrLst>
+    <dgm:linClrLst meth="repeat">
+      <a:schemeClr val="lt1"/>
+    </dgm:linClrLst>
+    <dgm:effectClrLst/>
+    <dgm:txLinClrLst/>
+    <dgm:txFillClrLst/>
+    <dgm:txEffectClrLst/>
+  </dgm:styleLbl>
+  <dgm:styleLbl name="asst2">
+    <dgm:fillClrLst meth="repeat">
+      <a:schemeClr val="accent1"/>
+    </dgm:fillClrLst>
+    <dgm:linClrLst meth="repeat">
+      <a:schemeClr val="lt1"/>
+    </dgm:linClrLst>
+    <dgm:effectClrLst/>
+    <dgm:txLinClrLst/>
+    <dgm:txFillClrLst/>
+    <dgm:txEffectClrLst/>
+  </dgm:styleLbl>
+  <dgm:styleLbl name="asst3">
+    <dgm:fillClrLst meth="repeat">
+      <a:schemeClr val="accent1"/>
+    </dgm:fillClrLst>
+    <dgm:linClrLst meth="repeat">
+      <a:schemeClr val="lt1"/>
+    </dgm:linClrLst>
+    <dgm:effectClrLst/>
+    <dgm:txLinClrLst/>
+    <dgm:txFillClrLst/>
+    <dgm:txEffectClrLst/>
+  </dgm:styleLbl>
+  <dgm:styleLbl name="asst4">
+    <dgm:fillClrLst meth="repeat">
+      <a:schemeClr val="accent1"/>
+    </dgm:fillClrLst>
+    <dgm:linClrLst meth="repeat">
+      <a:schemeClr val="lt1"/>
+    </dgm:linClrLst>
+    <dgm:effectClrLst/>
+    <dgm:txLinClrLst/>
+    <dgm:txFillClrLst/>
+    <dgm:txEffectClrLst/>
+  </dgm:styleLbl>
+  <dgm:styleLbl name="parChTrans2D1">
+    <dgm:fillClrLst meth="repeat">
+      <a:schemeClr val="accent1">
+        <a:tint val="60000"/>
+      </a:schemeClr>
+    </dgm:fillClrLst>
+    <dgm:linClrLst meth="repeat">
+      <a:schemeClr val="accent1">
+        <a:tint val="60000"/>
+      </a:schemeClr>
+    </dgm:linClrLst>
+    <dgm:effectClrLst/>
+    <dgm:txLinClrLst/>
+    <dgm:txFillClrLst meth="repeat">
+      <a:schemeClr val="lt1"/>
+    </dgm:txFillClrLst>
+    <dgm:txEffectClrLst/>
+  </dgm:styleLbl>
+  <dgm:styleLbl name="parChTrans2D2">
+    <dgm:fillClrLst meth="repeat">
+      <a:schemeClr val="accent1"/>
+    </dgm:fillClrLst>
+    <dgm:linClrLst meth="repeat">
+      <a:schemeClr val="accent1"/>
+    </dgm:linClrLst>
+    <dgm:effectClrLst/>
+    <dgm:txLinClrLst/>
+    <dgm:txFillClrLst meth="repeat">
+      <a:schemeClr val="lt1"/>
+    </dgm:txFillClrLst>
+    <dgm:txEffectClrLst/>
+  </dgm:styleLbl>
+  <dgm:styleLbl name="parChTrans2D3">
+    <dgm:fillClrLst meth="repeat">
+      <a:schemeClr val="accent1"/>
+    </dgm:fillClrLst>
+    <dgm:linClrLst meth="repeat">
+      <a:schemeClr val="accent1"/>
+    </dgm:linClrLst>
+    <dgm:effectClrLst/>
+    <dgm:txLinClrLst/>
+    <dgm:txFillClrLst meth="repeat">
+      <a:schemeClr val="lt1"/>
+    </dgm:txFillClrLst>
+    <dgm:txEffectClrLst/>
+  </dgm:styleLbl>
+  <dgm:styleLbl name="parChTrans2D4">
+    <dgm:fillClrLst meth="repeat">
+      <a:schemeClr val="accent1"/>
+    </dgm:fillClrLst>
+    <dgm:linClrLst meth="repeat">
+      <a:schemeClr val="accent1"/>
+    </dgm:linClrLst>
+    <dgm:effectClrLst/>
+    <dgm:txLinClrLst/>
+    <dgm:txFillClrLst meth="repeat">
+      <a:schemeClr val="lt1"/>
+    </dgm:txFillClrLst>
+    <dgm:txEffectClrLst/>
+  </dgm:styleLbl>
+  <dgm:styleLbl name="parChTrans1D1">
+    <dgm:fillClrLst meth="repeat">
+      <a:schemeClr val="accent1"/>
+    </dgm:fillClrLst>
+    <dgm:linClrLst meth="repeat">
+      <a:schemeClr val="accent1">
+        <a:shade val="60000"/>
+      </a:schemeClr>
+    </dgm:linClrLst>
+    <dgm:effectClrLst/>
+    <dgm:txLinClrLst/>
+    <dgm:txFillClrLst meth="repeat">
+      <a:schemeClr val="tx1"/>
+    </dgm:txFillClrLst>
+    <dgm:txEffectClrLst/>
+  </dgm:styleLbl>
+  <dgm:styleLbl name="parChTrans1D2">
+    <dgm:fillClrLst meth="repeat">
+      <a:schemeClr val="accent1"/>
+    </dgm:fillClrLst>
+    <dgm:linClrLst meth="repeat">
+      <a:schemeClr val="accent1">
+        <a:shade val="60000"/>
+      </a:schemeClr>
+    </dgm:linClrLst>
+    <dgm:effectClrLst/>
+    <dgm:txLinClrLst/>
+    <dgm:txFillClrLst meth="repeat">
+      <a:schemeClr val="tx1"/>
+    </dgm:txFillClrLst>
+    <dgm:txEffectClrLst/>
+  </dgm:styleLbl>
+  <dgm:styleLbl name="parChTrans1D3">
+    <dgm:fillClrLst meth="repeat">
+      <a:schemeClr val="accent1"/>
+    </dgm:fillClrLst>
+    <dgm:linClrLst meth="repeat">
+      <a:schemeClr val="accent1">
+        <a:shade val="80000"/>
+      </a:schemeClr>
+    </dgm:linClrLst>
+    <dgm:effectClrLst/>
+    <dgm:txLinClrLst/>
+    <dgm:txFillClrLst meth="repeat">
+      <a:schemeClr val="tx1"/>
+    </dgm:txFillClrLst>
+    <dgm:txEffectClrLst/>
+  </dgm:styleLbl>
+  <dgm:styleLbl name="parChTrans1D4">
+    <dgm:fillClrLst meth="repeat">
+      <a:schemeClr val="accent1"/>
+    </dgm:fillClrLst>
+    <dgm:linClrLst meth="repeat">
+      <a:schemeClr val="accent1">
+        <a:shade val="80000"/>
+      </a:schemeClr>
+    </dgm:linClrLst>
+    <dgm:effectClrLst/>
+    <dgm:txLinClrLst/>
+    <dgm:txFillClrLst meth="repeat">
+      <a:schemeClr val="tx1"/>
+    </dgm:txFillClrLst>
+    <dgm:txEffectClrLst/>
+  </dgm:styleLbl>
+  <dgm:styleLbl name="fgAcc1">
+    <dgm:fillClrLst meth="repeat">
+      <a:schemeClr val="lt1">
+        <a:alpha val="90000"/>
+      </a:schemeClr>
+    </dgm:fillClrLst>
+    <dgm:linClrLst meth="repeat">
+      <a:schemeClr val="accent1"/>
+    </dgm:linClrLst>
+    <dgm:effectClrLst/>
+    <dgm:txLinClrLst/>
+    <dgm:txFillClrLst meth="repeat">
+      <a:schemeClr val="dk1"/>
+    </dgm:txFillClrLst>
+    <dgm:txEffectClrLst/>
+  </dgm:styleLbl>
+  <dgm:styleLbl name="conFgAcc1">
+    <dgm:fillClrLst meth="repeat">
+      <a:schemeClr val="lt1">
+        <a:alpha val="90000"/>
+      </a:schemeClr>
+    </dgm:fillClrLst>
+    <dgm:linClrLst meth="repeat">
+      <a:schemeClr val="accent1"/>
+    </dgm:linClrLst>
+    <dgm:effectClrLst/>
+    <dgm:txLinClrLst/>
+    <dgm:txFillClrLst meth="repeat">
+      <a:schemeClr val="dk1"/>
+    </dgm:txFillClrLst>
+    <dgm:txEffectClrLst/>
+  </dgm:styleLbl>
+  <dgm:styleLbl name="alignAcc1">
+    <dgm:fillClrLst meth="repeat">
+      <a:schemeClr val="lt1">
+        <a:alpha val="90000"/>
+      </a:schemeClr>
+    </dgm:fillClrLst>
+    <dgm:linClrLst meth="repeat">
+      <a:schemeClr val="accent1"/>
+    </dgm:linClrLst>
+    <dgm:effectClrLst/>
+    <dgm:txLinClrLst/>
+    <dgm:txFillClrLst meth="repeat">
+      <a:schemeClr val="dk1"/>
+    </dgm:txFillClrLst>
+    <dgm:txEffectClrLst/>
+  </dgm:styleLbl>
+  <dgm:styleLbl name="trAlignAcc1">
+    <dgm:fillClrLst meth="repeat">
+      <a:schemeClr val="lt1">
+        <a:alpha val="40000"/>
+      </a:schemeClr>
+    </dgm:fillClrLst>
+    <dgm:linClrLst meth="repeat">
+      <a:schemeClr val="accent1"/>
+    </dgm:linClrLst>
+    <dgm:effectClrLst/>
+    <dgm:txLinClrLst/>
+    <dgm:txFillClrLst meth="repeat">
+      <a:schemeClr val="dk1"/>
+    </dgm:txFillClrLst>
+    <dgm:txEffectClrLst/>
+  </dgm:styleLbl>
+  <dgm:styleLbl name="bgAcc1">
+    <dgm:fillClrLst meth="repeat">
+      <a:schemeClr val="lt1">
+        <a:alpha val="90000"/>
+      </a:schemeClr>
+    </dgm:fillClrLst>
+    <dgm:linClrLst meth="repeat">
+      <a:schemeClr val="accent1"/>
+    </dgm:linClrLst>
+    <dgm:effectClrLst/>
+    <dgm:txLinClrLst/>
+    <dgm:txFillClrLst meth="repeat">
+      <a:schemeClr val="dk1"/>
+    </dgm:txFillClrLst>
+    <dgm:txEffectClrLst/>
+  </dgm:styleLbl>
+  <dgm:styleLbl name="solidFgAcc1">
+    <dgm:fillClrLst meth="repeat">
+      <a:schemeClr val="lt1"/>
+    </dgm:fillClrLst>
+    <dgm:linClrLst meth="repeat">
+      <a:schemeClr val="accent1"/>
+    </dgm:linClrLst>
+    <dgm:effectClrLst/>
+    <dgm:txLinClrLst/>
+    <dgm:txFillClrLst meth="repeat">
+      <a:schemeClr val="dk1"/>
+    </dgm:txFillClrLst>
+    <dgm:txEffectClrLst/>
+  </dgm:styleLbl>
+  <dgm:styleLbl name="solidAlignAcc1">
+    <dgm:fillClrLst meth="repeat">
+      <a:schemeClr val="lt1"/>
+    </dgm:fillClrLst>
+    <dgm:linClrLst meth="repeat">
+      <a:schemeClr val="accent1"/>
+    </dgm:linClrLst>
+    <dgm:effectClrLst/>
+    <dgm:txLinClrLst/>
+    <dgm:txFillClrLst meth="repeat">
+      <a:schemeClr val="dk1"/>
+    </dgm:txFillClrLst>
+    <dgm:txEffectClrLst/>
+  </dgm:styleLbl>
+  <dgm:styleLbl name="solidBgAcc1">
+    <dgm:fillClrLst meth="repeat">
+      <a:schemeClr val="lt1"/>
+    </dgm:fillClrLst>
+    <dgm:linClrLst meth="repeat">
+      <a:schemeClr val="accent1"/>
+    </dgm:linClrLst>
+    <dgm:effectClrLst/>
+    <dgm:txLinClrLst/>
+    <dgm:txFillClrLst meth="repeat">
+      <a:schemeClr val="dk1"/>
+    </dgm:txFillClrLst>
+    <dgm:txEffectClrLst/>
+  </dgm:styleLbl>
+  <dgm:styleLbl name="fgAccFollowNode1">
+    <dgm:fillClrLst meth="repeat">
+      <a:schemeClr val="accent1">
+        <a:alpha val="90000"/>
+        <a:tint val="40000"/>
+      </a:schemeClr>
+    </dgm:fillClrLst>
+    <dgm:linClrLst meth="repeat">
+      <a:schemeClr val="accent1">
+        <a:alpha val="90000"/>
+        <a:tint val="40000"/>
+      </a:schemeClr>
+    </dgm:linClrLst>
+    <dgm:effectClrLst/>
+    <dgm:txLinClrLst/>
+    <dgm:txFillClrLst meth="repeat">
+      <a:schemeClr val="dk1"/>
+    </dgm:txFillClrLst>
+    <dgm:txEffectClrLst/>
+  </dgm:styleLbl>
+  <dgm:styleLbl name="alignAccFollowNode1">
+    <dgm:fillClrLst meth="repeat">
+      <a:schemeClr val="accent1">
+        <a:alpha val="90000"/>
+        <a:tint val="40000"/>
+      </a:schemeClr>
+    </dgm:fillClrLst>
+    <dgm:linClrLst meth="repeat">
+      <a:schemeClr val="accent1">
+        <a:alpha val="90000"/>
+        <a:tint val="40000"/>
+      </a:schemeClr>
+    </dgm:linClrLst>
+    <dgm:effectClrLst/>
+    <dgm:txLinClrLst/>
+    <dgm:txFillClrLst meth="repeat">
+      <a:schemeClr val="dk1"/>
+    </dgm:txFillClrLst>
+    <dgm:txEffectClrLst/>
+  </dgm:styleLbl>
+  <dgm:styleLbl name="bgAccFollowNode1">
+    <dgm:fillClrLst meth="repeat">
+      <a:schemeClr val="accent1">
+        <a:alpha val="90000"/>
+        <a:tint val="40000"/>
+      </a:schemeClr>
+    </dgm:fillClrLst>
+    <dgm:linClrLst meth="repeat">
+      <a:schemeClr val="accent1">
+        <a:alpha val="90000"/>
+        <a:tint val="40000"/>
+      </a:schemeClr>
+    </dgm:linClrLst>
+    <dgm:effectClrLst/>
+    <dgm:txLinClrLst/>
+    <dgm:txFillClrLst meth="repeat">
+      <a:schemeClr val="dk1"/>
+    </dgm:txFillClrLst>
+    <dgm:txEffectClrLst/>
+  </dgm:styleLbl>
+  <dgm:styleLbl name="fgAcc0">
+    <dgm:fillClrLst meth="repeat">
+      <a:schemeClr val="lt1">
+        <a:alpha val="90000"/>
+      </a:schemeClr>
+    </dgm:fillClrLst>
+    <dgm:linClrLst meth="repeat">
+      <a:schemeClr val="accent1"/>
+    </dgm:linClrLst>
+    <dgm:effectClrLst/>
+    <dgm:txLinClrLst/>
+    <dgm:txFillClrLst meth="repeat">
+      <a:schemeClr val="dk1"/>
+    </dgm:txFillClrLst>
+    <dgm:txEffectClrLst/>
+  </dgm:styleLbl>
+  <dgm:styleLbl name="fgAcc2">
+    <dgm:fillClrLst meth="repeat">
+      <a:schemeClr val="lt1">
+        <a:alpha val="90000"/>
+      </a:schemeClr>
+    </dgm:fillClrLst>
+    <dgm:linClrLst meth="repeat">
+      <a:schemeClr val="accent1"/>
+    </dgm:linClrLst>
+    <dgm:effectClrLst/>
+    <dgm:txLinClrLst/>
+    <dgm:txFillClrLst meth="repeat">
+      <a:schemeClr val="dk1"/>
+    </dgm:txFillClrLst>
+    <dgm:txEffectClrLst/>
+  </dgm:styleLbl>
+  <dgm:styleLbl name="fgAcc3">
+    <dgm:fillClrLst meth="repeat">
+      <a:schemeClr val="lt1">
+        <a:alpha val="90000"/>
+      </a:schemeClr>
+    </dgm:fillClrLst>
+    <dgm:linClrLst meth="repeat">
+      <a:schemeClr val="accent1"/>
+    </dgm:linClrLst>
+    <dgm:effectClrLst/>
+    <dgm:txLinClrLst/>
+    <dgm:txFillClrLst meth="repeat">
+      <a:schemeClr val="dk1"/>
+    </dgm:txFillClrLst>
+    <dgm:txEffectClrLst/>
+  </dgm:styleLbl>
+  <dgm:styleLbl name="fgAcc4">
+    <dgm:fillClrLst meth="repeat">
+      <a:schemeClr val="lt1">
+        <a:alpha val="90000"/>
+      </a:schemeClr>
+    </dgm:fillClrLst>
+    <dgm:linClrLst meth="repeat">
+      <a:schemeClr val="accent1"/>
+    </dgm:linClrLst>
+    <dgm:effectClrLst/>
+    <dgm:txLinClrLst/>
+    <dgm:txFillClrLst meth="repeat">
+      <a:schemeClr val="dk1"/>
+    </dgm:txFillClrLst>
+    <dgm:txEffectClrLst/>
+  </dgm:styleLbl>
+  <dgm:styleLbl name="bgShp">
+    <dgm:fillClrLst meth="repeat">
+      <a:schemeClr val="accent1">
+        <a:tint val="40000"/>
+      </a:schemeClr>
+    </dgm:fillClrLst>
+    <dgm:linClrLst meth="repeat">
+      <a:schemeClr val="accent1"/>
+    </dgm:linClrLst>
+    <dgm:effectClrLst/>
+    <dgm:txLinClrLst/>
+    <dgm:txFillClrLst meth="repeat">
+      <a:schemeClr val="dk1"/>
+    </dgm:txFillClrLst>
+    <dgm:txEffectClrLst/>
+  </dgm:styleLbl>
+  <dgm:styleLbl name="dkBgShp">
+    <dgm:fillClrLst meth="repeat">
+      <a:schemeClr val="accent1">
+        <a:shade val="80000"/>
+      </a:schemeClr>
+    </dgm:fillClrLst>
+    <dgm:linClrLst meth="repeat">
+      <a:schemeClr val="accent1"/>
+    </dgm:linClrLst>
+    <dgm:effectClrLst/>
+    <dgm:txLinClrLst/>
+    <dgm:txFillClrLst meth="repeat">
+      <a:schemeClr val="lt1"/>
+    </dgm:txFillClrLst>
+    <dgm:txEffectClrLst/>
+  </dgm:styleLbl>
+  <dgm:styleLbl name="trBgShp">
+    <dgm:fillClrLst meth="repeat">
+      <a:schemeClr val="accent1">
+        <a:tint val="50000"/>
+        <a:alpha val="40000"/>
+      </a:schemeClr>
+    </dgm:fillClrLst>
+    <dgm:linClrLst meth="repeat">
+      <a:schemeClr val="accent1"/>
+    </dgm:linClrLst>
+    <dgm:effectClrLst/>
+    <dgm:txLinClrLst/>
+    <dgm:txFillClrLst meth="repeat">
+      <a:schemeClr val="lt1"/>
+    </dgm:txFillClrLst>
+    <dgm:txEffectClrLst/>
+  </dgm:styleLbl>
+  <dgm:styleLbl name="fgShp">
+    <dgm:fillClrLst meth="repeat">
+      <a:schemeClr val="accent1">
+        <a:tint val="60000"/>
+      </a:schemeClr>
+    </dgm:fillClrLst>
+    <dgm:linClrLst meth="repeat">
+      <a:schemeClr val="lt1"/>
+    </dgm:linClrLst>
+    <dgm:effectClrLst/>
+    <dgm:txLinClrLst/>
+    <dgm:txFillClrLst meth="repeat">
+      <a:schemeClr val="dk1"/>
+    </dgm:txFillClrLst>
+    <dgm:txEffectClrLst/>
+  </dgm:styleLbl>
+  <dgm:styleLbl name="revTx">
+    <dgm:fillClrLst meth="repeat">
+      <a:schemeClr val="lt1">
+        <a:alpha val="0"/>
+      </a:schemeClr>
+    </dgm:fillClrLst>
+    <dgm:linClrLst meth="repeat">
+      <a:schemeClr val="dk1">
+        <a:alpha val="0"/>
+      </a:schemeClr>
+    </dgm:linClrLst>
+    <dgm:effectClrLst/>
+    <dgm:txLinClrLst/>
+    <dgm:txFillClrLst meth="repeat">
+      <a:schemeClr val="tx1"/>
+    </dgm:txFillClrLst>
+    <dgm:txEffectClrLst/>
+  </dgm:styleLbl>
+</dgm:colorsDef>
+</file>
+
+<file path=ppt/diagrams/colors2.xml><?xml version="1.0" encoding="utf-8"?>
 <dgm:colorsDef xmlns:dgm="http://schemas.openxmlformats.org/drawingml/2006/diagram" xmlns:a="http://schemas.openxmlformats.org/drawingml/2006/main" uniqueId="urn:microsoft.com/office/officeart/2005/8/colors/accent1_2">
   <dgm:title val=""/>
   <dgm:desc val=""/>
@@ -1137,6 +1885,277 @@
 </dgm:dataModel>
 </file>
 
+<file path=ppt/diagrams/data2.xml><?xml version="1.0" encoding="utf-8"?>
+<dgm:dataModel xmlns:dgm="http://schemas.openxmlformats.org/drawingml/2006/diagram" xmlns:a="http://schemas.openxmlformats.org/drawingml/2006/main">
+  <dgm:ptLst>
+    <dgm:pt modelId="{1BAF38FA-668C-42FF-833B-8125D0660C5A}" type="doc">
+      <dgm:prSet loTypeId="urn:microsoft.com/office/officeart/2005/8/layout/hChevron3" loCatId="process" qsTypeId="urn:microsoft.com/office/officeart/2005/8/quickstyle/simple1" qsCatId="simple" csTypeId="urn:microsoft.com/office/officeart/2005/8/colors/accent1_2" csCatId="accent1" phldr="1"/>
+      <dgm:spPr/>
+      <dgm:t>
+        <a:bodyPr/>
+        <a:lstStyle/>
+        <a:p>
+          <a:endParaRPr lang="en-US"/>
+        </a:p>
+      </dgm:t>
+    </dgm:pt>
+    <dgm:pt modelId="{02F2DEB5-04B2-43B0-AE1F-484092092F8C}">
+      <dgm:prSet phldrT="[Text]" phldr="0"/>
+      <dgm:spPr>
+        <a:ln>
+          <a:solidFill>
+            <a:schemeClr val="accent1"/>
+          </a:solidFill>
+        </a:ln>
+      </dgm:spPr>
+      <dgm:t>
+        <a:bodyPr/>
+        <a:lstStyle/>
+        <a:p>
+          <a:endParaRPr lang="en-US"/>
+        </a:p>
+      </dgm:t>
+    </dgm:pt>
+    <dgm:pt modelId="{086CFFA7-5016-4BB1-BF31-ADB78F91B03E}" type="parTrans" cxnId="{CFE9B22D-431F-42D5-A9DD-A34070B50E6D}">
+      <dgm:prSet/>
+      <dgm:spPr/>
+      <dgm:t>
+        <a:bodyPr/>
+        <a:lstStyle/>
+        <a:p>
+          <a:endParaRPr lang="en-US"/>
+        </a:p>
+      </dgm:t>
+    </dgm:pt>
+    <dgm:pt modelId="{98B402DD-A062-43D3-B135-4A9AE401840E}" type="sibTrans" cxnId="{CFE9B22D-431F-42D5-A9DD-A34070B50E6D}">
+      <dgm:prSet/>
+      <dgm:spPr/>
+      <dgm:t>
+        <a:bodyPr/>
+        <a:lstStyle/>
+        <a:p>
+          <a:endParaRPr lang="en-US"/>
+        </a:p>
+      </dgm:t>
+    </dgm:pt>
+    <dgm:pt modelId="{3F8A6D25-EC33-4E79-9F36-36771A974919}">
+      <dgm:prSet phldrT="[Text]" phldr="0"/>
+      <dgm:spPr>
+        <a:solidFill>
+          <a:schemeClr val="tx1">
+            <a:lumMod val="95000"/>
+          </a:schemeClr>
+        </a:solidFill>
+        <a:ln>
+          <a:solidFill>
+            <a:schemeClr val="accent1"/>
+          </a:solidFill>
+        </a:ln>
+      </dgm:spPr>
+      <dgm:t>
+        <a:bodyPr/>
+        <a:lstStyle/>
+        <a:p>
+          <a:endParaRPr lang="en-US" dirty="0"/>
+        </a:p>
+      </dgm:t>
+    </dgm:pt>
+    <dgm:pt modelId="{2214299D-707F-429C-A23D-9EE2F39CF74A}" type="parTrans" cxnId="{0C42CAF2-971C-4068-B645-A373CE11E869}">
+      <dgm:prSet/>
+      <dgm:spPr/>
+      <dgm:t>
+        <a:bodyPr/>
+        <a:lstStyle/>
+        <a:p>
+          <a:endParaRPr lang="en-US"/>
+        </a:p>
+      </dgm:t>
+    </dgm:pt>
+    <dgm:pt modelId="{F5C31149-F876-40A6-9FD4-9FC1A73D7103}" type="sibTrans" cxnId="{0C42CAF2-971C-4068-B645-A373CE11E869}">
+      <dgm:prSet/>
+      <dgm:spPr/>
+      <dgm:t>
+        <a:bodyPr/>
+        <a:lstStyle/>
+        <a:p>
+          <a:endParaRPr lang="en-US"/>
+        </a:p>
+      </dgm:t>
+    </dgm:pt>
+    <dgm:pt modelId="{2A8D39A9-50C8-4D4F-B033-79DECE006E66}">
+      <dgm:prSet phldrT="[Text]" phldr="0"/>
+      <dgm:spPr>
+        <a:solidFill>
+          <a:schemeClr val="tx1">
+            <a:lumMod val="95000"/>
+          </a:schemeClr>
+        </a:solidFill>
+        <a:ln>
+          <a:solidFill>
+            <a:schemeClr val="accent1"/>
+          </a:solidFill>
+        </a:ln>
+      </dgm:spPr>
+      <dgm:t>
+        <a:bodyPr/>
+        <a:lstStyle/>
+        <a:p>
+          <a:endParaRPr lang="en-US" dirty="0"/>
+        </a:p>
+      </dgm:t>
+    </dgm:pt>
+    <dgm:pt modelId="{315C08A7-84C9-4B75-B41E-C170BAF53261}" type="parTrans" cxnId="{2667F885-9801-44B0-94AB-28C9292F3E74}">
+      <dgm:prSet/>
+      <dgm:spPr/>
+      <dgm:t>
+        <a:bodyPr/>
+        <a:lstStyle/>
+        <a:p>
+          <a:endParaRPr lang="en-US"/>
+        </a:p>
+      </dgm:t>
+    </dgm:pt>
+    <dgm:pt modelId="{55984B9E-0D3F-4FAD-8385-14CE83ECD63D}" type="sibTrans" cxnId="{2667F885-9801-44B0-94AB-28C9292F3E74}">
+      <dgm:prSet/>
+      <dgm:spPr/>
+      <dgm:t>
+        <a:bodyPr/>
+        <a:lstStyle/>
+        <a:p>
+          <a:endParaRPr lang="en-US"/>
+        </a:p>
+      </dgm:t>
+    </dgm:pt>
+    <dgm:pt modelId="{6D71B52B-3920-4F69-82CF-D2F6B276680D}">
+      <dgm:prSet phldrT="[Text]" phldr="0"/>
+      <dgm:spPr>
+        <a:solidFill>
+          <a:schemeClr val="tx1">
+            <a:lumMod val="95000"/>
+          </a:schemeClr>
+        </a:solidFill>
+        <a:ln>
+          <a:solidFill>
+            <a:schemeClr val="accent1"/>
+          </a:solidFill>
+        </a:ln>
+      </dgm:spPr>
+      <dgm:t>
+        <a:bodyPr/>
+        <a:lstStyle/>
+        <a:p>
+          <a:endParaRPr lang="en-US" dirty="0"/>
+        </a:p>
+      </dgm:t>
+    </dgm:pt>
+    <dgm:pt modelId="{D523D338-016A-4C79-9BD8-F4C65FDC3E4A}" type="parTrans" cxnId="{92E5502B-D54D-4966-9E24-506A6D560BD2}">
+      <dgm:prSet/>
+      <dgm:spPr/>
+      <dgm:t>
+        <a:bodyPr/>
+        <a:lstStyle/>
+        <a:p>
+          <a:endParaRPr lang="en-US"/>
+        </a:p>
+      </dgm:t>
+    </dgm:pt>
+    <dgm:pt modelId="{CD4D0C60-FE61-48F8-A8F6-566EF2190D5C}" type="sibTrans" cxnId="{92E5502B-D54D-4966-9E24-506A6D560BD2}">
+      <dgm:prSet/>
+      <dgm:spPr/>
+      <dgm:t>
+        <a:bodyPr/>
+        <a:lstStyle/>
+        <a:p>
+          <a:endParaRPr lang="en-US"/>
+        </a:p>
+      </dgm:t>
+    </dgm:pt>
+    <dgm:pt modelId="{CDD65885-70A5-408A-AD16-60B5296FD84F}" type="pres">
+      <dgm:prSet presAssocID="{1BAF38FA-668C-42FF-833B-8125D0660C5A}" presName="Name0" presStyleCnt="0">
+        <dgm:presLayoutVars>
+          <dgm:dir/>
+          <dgm:resizeHandles val="exact"/>
+        </dgm:presLayoutVars>
+      </dgm:prSet>
+      <dgm:spPr/>
+    </dgm:pt>
+    <dgm:pt modelId="{3B3B9CF9-ACCC-4AAF-B159-A5ECCE9F91FA}" type="pres">
+      <dgm:prSet presAssocID="{02F2DEB5-04B2-43B0-AE1F-484092092F8C}" presName="parTxOnly" presStyleLbl="node1" presStyleIdx="0" presStyleCnt="4">
+        <dgm:presLayoutVars>
+          <dgm:bulletEnabled val="1"/>
+        </dgm:presLayoutVars>
+      </dgm:prSet>
+      <dgm:spPr/>
+    </dgm:pt>
+    <dgm:pt modelId="{5EA737B2-FAEA-4E29-B7AB-D4AF56C6722A}" type="pres">
+      <dgm:prSet presAssocID="{98B402DD-A062-43D3-B135-4A9AE401840E}" presName="parSpace" presStyleCnt="0"/>
+      <dgm:spPr/>
+    </dgm:pt>
+    <dgm:pt modelId="{927287C2-A3D7-40DA-9CC5-879018D16C6C}" type="pres">
+      <dgm:prSet presAssocID="{3F8A6D25-EC33-4E79-9F36-36771A974919}" presName="parTxOnly" presStyleLbl="node1" presStyleIdx="1" presStyleCnt="4">
+        <dgm:presLayoutVars>
+          <dgm:bulletEnabled val="1"/>
+        </dgm:presLayoutVars>
+      </dgm:prSet>
+      <dgm:spPr/>
+    </dgm:pt>
+    <dgm:pt modelId="{D7399875-5945-4082-A56B-0967B2FF1CAA}" type="pres">
+      <dgm:prSet presAssocID="{F5C31149-F876-40A6-9FD4-9FC1A73D7103}" presName="parSpace" presStyleCnt="0"/>
+      <dgm:spPr/>
+    </dgm:pt>
+    <dgm:pt modelId="{0FFC9F85-D342-4563-A0C2-89C6B83FD375}" type="pres">
+      <dgm:prSet presAssocID="{2A8D39A9-50C8-4D4F-B033-79DECE006E66}" presName="parTxOnly" presStyleLbl="node1" presStyleIdx="2" presStyleCnt="4">
+        <dgm:presLayoutVars>
+          <dgm:bulletEnabled val="1"/>
+        </dgm:presLayoutVars>
+      </dgm:prSet>
+      <dgm:spPr/>
+    </dgm:pt>
+    <dgm:pt modelId="{00AD2CC1-E211-4CFF-A9B2-67FC64D14459}" type="pres">
+      <dgm:prSet presAssocID="{55984B9E-0D3F-4FAD-8385-14CE83ECD63D}" presName="parSpace" presStyleCnt="0"/>
+      <dgm:spPr/>
+    </dgm:pt>
+    <dgm:pt modelId="{903FC15E-8A12-4ACF-90BF-441209C11D87}" type="pres">
+      <dgm:prSet presAssocID="{6D71B52B-3920-4F69-82CF-D2F6B276680D}" presName="parTxOnly" presStyleLbl="node1" presStyleIdx="3" presStyleCnt="4">
+        <dgm:presLayoutVars>
+          <dgm:bulletEnabled val="1"/>
+        </dgm:presLayoutVars>
+      </dgm:prSet>
+      <dgm:spPr/>
+    </dgm:pt>
+  </dgm:ptLst>
+  <dgm:cxnLst>
+    <dgm:cxn modelId="{347BB41C-FC86-4550-A2CB-D58B80B9751F}" type="presOf" srcId="{2A8D39A9-50C8-4D4F-B033-79DECE006E66}" destId="{0FFC9F85-D342-4563-A0C2-89C6B83FD375}" srcOrd="0" destOrd="0" presId="urn:microsoft.com/office/officeart/2005/8/layout/hChevron3"/>
+    <dgm:cxn modelId="{92E5502B-D54D-4966-9E24-506A6D560BD2}" srcId="{1BAF38FA-668C-42FF-833B-8125D0660C5A}" destId="{6D71B52B-3920-4F69-82CF-D2F6B276680D}" srcOrd="3" destOrd="0" parTransId="{D523D338-016A-4C79-9BD8-F4C65FDC3E4A}" sibTransId="{CD4D0C60-FE61-48F8-A8F6-566EF2190D5C}"/>
+    <dgm:cxn modelId="{CFE9B22D-431F-42D5-A9DD-A34070B50E6D}" srcId="{1BAF38FA-668C-42FF-833B-8125D0660C5A}" destId="{02F2DEB5-04B2-43B0-AE1F-484092092F8C}" srcOrd="0" destOrd="0" parTransId="{086CFFA7-5016-4BB1-BF31-ADB78F91B03E}" sibTransId="{98B402DD-A062-43D3-B135-4A9AE401840E}"/>
+    <dgm:cxn modelId="{7E7A1337-859F-4F61-9A78-82F7E8764017}" type="presOf" srcId="{3F8A6D25-EC33-4E79-9F36-36771A974919}" destId="{927287C2-A3D7-40DA-9CC5-879018D16C6C}" srcOrd="0" destOrd="0" presId="urn:microsoft.com/office/officeart/2005/8/layout/hChevron3"/>
+    <dgm:cxn modelId="{C8B7E64E-D047-4A1C-842A-C4653D06E0DB}" type="presOf" srcId="{1BAF38FA-668C-42FF-833B-8125D0660C5A}" destId="{CDD65885-70A5-408A-AD16-60B5296FD84F}" srcOrd="0" destOrd="0" presId="urn:microsoft.com/office/officeart/2005/8/layout/hChevron3"/>
+    <dgm:cxn modelId="{69FDE357-9944-440F-9DEB-FDD0AD8A9BFE}" type="presOf" srcId="{6D71B52B-3920-4F69-82CF-D2F6B276680D}" destId="{903FC15E-8A12-4ACF-90BF-441209C11D87}" srcOrd="0" destOrd="0" presId="urn:microsoft.com/office/officeart/2005/8/layout/hChevron3"/>
+    <dgm:cxn modelId="{2667F885-9801-44B0-94AB-28C9292F3E74}" srcId="{1BAF38FA-668C-42FF-833B-8125D0660C5A}" destId="{2A8D39A9-50C8-4D4F-B033-79DECE006E66}" srcOrd="2" destOrd="0" parTransId="{315C08A7-84C9-4B75-B41E-C170BAF53261}" sibTransId="{55984B9E-0D3F-4FAD-8385-14CE83ECD63D}"/>
+    <dgm:cxn modelId="{0C42CAF2-971C-4068-B645-A373CE11E869}" srcId="{1BAF38FA-668C-42FF-833B-8125D0660C5A}" destId="{3F8A6D25-EC33-4E79-9F36-36771A974919}" srcOrd="1" destOrd="0" parTransId="{2214299D-707F-429C-A23D-9EE2F39CF74A}" sibTransId="{F5C31149-F876-40A6-9FD4-9FC1A73D7103}"/>
+    <dgm:cxn modelId="{3020AFFF-29FB-4253-9067-BC7D344E83A9}" type="presOf" srcId="{02F2DEB5-04B2-43B0-AE1F-484092092F8C}" destId="{3B3B9CF9-ACCC-4AAF-B159-A5ECCE9F91FA}" srcOrd="0" destOrd="0" presId="urn:microsoft.com/office/officeart/2005/8/layout/hChevron3"/>
+    <dgm:cxn modelId="{E191ADB3-48DE-4471-9D7B-B06436C72291}" type="presParOf" srcId="{CDD65885-70A5-408A-AD16-60B5296FD84F}" destId="{3B3B9CF9-ACCC-4AAF-B159-A5ECCE9F91FA}" srcOrd="0" destOrd="0" presId="urn:microsoft.com/office/officeart/2005/8/layout/hChevron3"/>
+    <dgm:cxn modelId="{F6ECF3E2-766C-40B1-9FEF-D2B9A3751F52}" type="presParOf" srcId="{CDD65885-70A5-408A-AD16-60B5296FD84F}" destId="{5EA737B2-FAEA-4E29-B7AB-D4AF56C6722A}" srcOrd="1" destOrd="0" presId="urn:microsoft.com/office/officeart/2005/8/layout/hChevron3"/>
+    <dgm:cxn modelId="{5F4A39DD-EE71-415A-B0B3-627A8BABEDC4}" type="presParOf" srcId="{CDD65885-70A5-408A-AD16-60B5296FD84F}" destId="{927287C2-A3D7-40DA-9CC5-879018D16C6C}" srcOrd="2" destOrd="0" presId="urn:microsoft.com/office/officeart/2005/8/layout/hChevron3"/>
+    <dgm:cxn modelId="{4E7C4957-7013-4E83-83C2-B10253353E78}" type="presParOf" srcId="{CDD65885-70A5-408A-AD16-60B5296FD84F}" destId="{D7399875-5945-4082-A56B-0967B2FF1CAA}" srcOrd="3" destOrd="0" presId="urn:microsoft.com/office/officeart/2005/8/layout/hChevron3"/>
+    <dgm:cxn modelId="{FB86EB6A-5434-47EA-AB12-3A0CDAB33EE4}" type="presParOf" srcId="{CDD65885-70A5-408A-AD16-60B5296FD84F}" destId="{0FFC9F85-D342-4563-A0C2-89C6B83FD375}" srcOrd="4" destOrd="0" presId="urn:microsoft.com/office/officeart/2005/8/layout/hChevron3"/>
+    <dgm:cxn modelId="{78C80DD3-464A-4A52-99A1-54586C54E2F3}" type="presParOf" srcId="{CDD65885-70A5-408A-AD16-60B5296FD84F}" destId="{00AD2CC1-E211-4CFF-A9B2-67FC64D14459}" srcOrd="5" destOrd="0" presId="urn:microsoft.com/office/officeart/2005/8/layout/hChevron3"/>
+    <dgm:cxn modelId="{6ACBF150-7D73-4DED-A989-4E37B02A320F}" type="presParOf" srcId="{CDD65885-70A5-408A-AD16-60B5296FD84F}" destId="{903FC15E-8A12-4ACF-90BF-441209C11D87}" srcOrd="6" destOrd="0" presId="urn:microsoft.com/office/officeart/2005/8/layout/hChevron3"/>
+  </dgm:cxnLst>
+  <dgm:bg/>
+  <dgm:whole>
+    <a:ln>
+      <a:noFill/>
+    </a:ln>
+  </dgm:whole>
+  <dgm:extLst>
+    <a:ext uri="http://schemas.microsoft.com/office/drawing/2008/diagram">
+      <dsp:dataModelExt xmlns:dsp="http://schemas.microsoft.com/office/drawing/2008/diagram" relId="rId9" minVer="http://schemas.openxmlformats.org/drawingml/2006/diagram"/>
+    </a:ext>
+  </dgm:extLst>
+</dgm:dataModel>
+</file>
+
 <file path=ppt/diagrams/drawing1.xml><?xml version="1.0" encoding="utf-8"?>
 <dsp:drawing xmlns:dgm="http://schemas.openxmlformats.org/drawingml/2006/diagram" xmlns:dsp="http://schemas.microsoft.com/office/drawing/2008/diagram" xmlns:a="http://schemas.openxmlformats.org/drawingml/2006/main">
   <dsp:spTree>
@@ -1387,6 +2406,285 @@
               <a:lumOff val="0"/>
               <a:alphaOff val="0"/>
             </a:schemeClr>
+          </a:solidFill>
+          <a:prstDash val="solid"/>
+        </a:ln>
+        <a:effectLst/>
+      </dsp:spPr>
+      <dsp:style>
+        <a:lnRef idx="2">
+          <a:scrgbClr r="0" g="0" b="0"/>
+        </a:lnRef>
+        <a:fillRef idx="1">
+          <a:scrgbClr r="0" g="0" b="0"/>
+        </a:fillRef>
+        <a:effectRef idx="0">
+          <a:scrgbClr r="0" g="0" b="0"/>
+        </a:effectRef>
+        <a:fontRef idx="minor">
+          <a:schemeClr val="lt1"/>
+        </a:fontRef>
+      </dsp:style>
+      <dsp:txBody>
+        <a:bodyPr spcFirstLastPara="0" vert="horz" wrap="square" lIns="196025" tIns="130683" rIns="65342" bIns="130683" numCol="1" spcCol="1270" anchor="ctr" anchorCtr="0">
+          <a:noAutofit/>
+        </a:bodyPr>
+        <a:lstStyle/>
+        <a:p>
+          <a:pPr marL="0" lvl="0" indent="0" algn="ctr" defTabSz="2178050">
+            <a:lnSpc>
+              <a:spcPct val="90000"/>
+            </a:lnSpc>
+            <a:spcBef>
+              <a:spcPct val="0"/>
+            </a:spcBef>
+            <a:spcAft>
+              <a:spcPct val="35000"/>
+            </a:spcAft>
+            <a:buNone/>
+          </a:pPr>
+          <a:endParaRPr lang="en-US" sz="4900" kern="1200" dirty="0"/>
+        </a:p>
+      </dsp:txBody>
+      <dsp:txXfrm>
+        <a:off x="6214269" y="226207"/>
+        <a:ext cx="1433512" cy="955675"/>
+      </dsp:txXfrm>
+    </dsp:sp>
+  </dsp:spTree>
+</dsp:drawing>
+</file>
+
+<file path=ppt/diagrams/drawing2.xml><?xml version="1.0" encoding="utf-8"?>
+<dsp:drawing xmlns:dgm="http://schemas.openxmlformats.org/drawingml/2006/diagram" xmlns:dsp="http://schemas.microsoft.com/office/drawing/2008/diagram" xmlns:a="http://schemas.openxmlformats.org/drawingml/2006/main">
+  <dsp:spTree>
+    <dsp:nvGrpSpPr>
+      <dsp:cNvPr id="0" name=""/>
+      <dsp:cNvGrpSpPr/>
+    </dsp:nvGrpSpPr>
+    <dsp:grpSpPr/>
+    <dsp:sp modelId="{3B3B9CF9-ACCC-4AAF-B159-A5ECCE9F91FA}">
+      <dsp:nvSpPr>
+        <dsp:cNvPr id="0" name=""/>
+        <dsp:cNvSpPr/>
+      </dsp:nvSpPr>
+      <dsp:spPr>
+        <a:xfrm>
+          <a:off x="2381" y="226207"/>
+          <a:ext cx="2389187" cy="955675"/>
+        </a:xfrm>
+        <a:prstGeom prst="homePlate">
+          <a:avLst/>
+        </a:prstGeom>
+        <a:solidFill>
+          <a:schemeClr val="accent1">
+            <a:hueOff val="0"/>
+            <a:satOff val="0"/>
+            <a:lumOff val="0"/>
+            <a:alphaOff val="0"/>
+          </a:schemeClr>
+        </a:solidFill>
+        <a:ln w="19050" cap="rnd" cmpd="sng" algn="ctr">
+          <a:solidFill>
+            <a:schemeClr val="accent1"/>
+          </a:solidFill>
+          <a:prstDash val="solid"/>
+        </a:ln>
+        <a:effectLst/>
+      </dsp:spPr>
+      <dsp:style>
+        <a:lnRef idx="2">
+          <a:scrgbClr r="0" g="0" b="0"/>
+        </a:lnRef>
+        <a:fillRef idx="1">
+          <a:scrgbClr r="0" g="0" b="0"/>
+        </a:fillRef>
+        <a:effectRef idx="0">
+          <a:scrgbClr r="0" g="0" b="0"/>
+        </a:effectRef>
+        <a:fontRef idx="minor">
+          <a:schemeClr val="lt1"/>
+        </a:fontRef>
+      </dsp:style>
+      <dsp:txBody>
+        <a:bodyPr spcFirstLastPara="0" vert="horz" wrap="square" lIns="261366" tIns="130683" rIns="65342" bIns="130683" numCol="1" spcCol="1270" anchor="ctr" anchorCtr="0">
+          <a:noAutofit/>
+        </a:bodyPr>
+        <a:lstStyle/>
+        <a:p>
+          <a:pPr marL="0" lvl="0" indent="0" algn="ctr" defTabSz="2178050">
+            <a:lnSpc>
+              <a:spcPct val="90000"/>
+            </a:lnSpc>
+            <a:spcBef>
+              <a:spcPct val="0"/>
+            </a:spcBef>
+            <a:spcAft>
+              <a:spcPct val="35000"/>
+            </a:spcAft>
+            <a:buNone/>
+          </a:pPr>
+          <a:endParaRPr lang="en-US" sz="4900" kern="1200"/>
+        </a:p>
+      </dsp:txBody>
+      <dsp:txXfrm>
+        <a:off x="2381" y="226207"/>
+        <a:ext cx="2150268" cy="955675"/>
+      </dsp:txXfrm>
+    </dsp:sp>
+    <dsp:sp modelId="{927287C2-A3D7-40DA-9CC5-879018D16C6C}">
+      <dsp:nvSpPr>
+        <dsp:cNvPr id="0" name=""/>
+        <dsp:cNvSpPr/>
+      </dsp:nvSpPr>
+      <dsp:spPr>
+        <a:xfrm>
+          <a:off x="1913731" y="226207"/>
+          <a:ext cx="2389187" cy="955675"/>
+        </a:xfrm>
+        <a:prstGeom prst="chevron">
+          <a:avLst/>
+        </a:prstGeom>
+        <a:solidFill>
+          <a:schemeClr val="tx1">
+            <a:lumMod val="95000"/>
+          </a:schemeClr>
+        </a:solidFill>
+        <a:ln w="19050" cap="rnd" cmpd="sng" algn="ctr">
+          <a:solidFill>
+            <a:schemeClr val="accent1"/>
+          </a:solidFill>
+          <a:prstDash val="solid"/>
+        </a:ln>
+        <a:effectLst/>
+      </dsp:spPr>
+      <dsp:style>
+        <a:lnRef idx="2">
+          <a:scrgbClr r="0" g="0" b="0"/>
+        </a:lnRef>
+        <a:fillRef idx="1">
+          <a:scrgbClr r="0" g="0" b="0"/>
+        </a:fillRef>
+        <a:effectRef idx="0">
+          <a:scrgbClr r="0" g="0" b="0"/>
+        </a:effectRef>
+        <a:fontRef idx="minor">
+          <a:schemeClr val="lt1"/>
+        </a:fontRef>
+      </dsp:style>
+      <dsp:txBody>
+        <a:bodyPr spcFirstLastPara="0" vert="horz" wrap="square" lIns="196025" tIns="130683" rIns="65342" bIns="130683" numCol="1" spcCol="1270" anchor="ctr" anchorCtr="0">
+          <a:noAutofit/>
+        </a:bodyPr>
+        <a:lstStyle/>
+        <a:p>
+          <a:pPr marL="0" lvl="0" indent="0" algn="ctr" defTabSz="2178050">
+            <a:lnSpc>
+              <a:spcPct val="90000"/>
+            </a:lnSpc>
+            <a:spcBef>
+              <a:spcPct val="0"/>
+            </a:spcBef>
+            <a:spcAft>
+              <a:spcPct val="35000"/>
+            </a:spcAft>
+            <a:buNone/>
+          </a:pPr>
+          <a:endParaRPr lang="en-US" sz="4900" kern="1200" dirty="0"/>
+        </a:p>
+      </dsp:txBody>
+      <dsp:txXfrm>
+        <a:off x="2391569" y="226207"/>
+        <a:ext cx="1433512" cy="955675"/>
+      </dsp:txXfrm>
+    </dsp:sp>
+    <dsp:sp modelId="{0FFC9F85-D342-4563-A0C2-89C6B83FD375}">
+      <dsp:nvSpPr>
+        <dsp:cNvPr id="0" name=""/>
+        <dsp:cNvSpPr/>
+      </dsp:nvSpPr>
+      <dsp:spPr>
+        <a:xfrm>
+          <a:off x="3825081" y="226207"/>
+          <a:ext cx="2389187" cy="955675"/>
+        </a:xfrm>
+        <a:prstGeom prst="chevron">
+          <a:avLst/>
+        </a:prstGeom>
+        <a:solidFill>
+          <a:schemeClr val="tx1">
+            <a:lumMod val="95000"/>
+          </a:schemeClr>
+        </a:solidFill>
+        <a:ln w="19050" cap="rnd" cmpd="sng" algn="ctr">
+          <a:solidFill>
+            <a:schemeClr val="accent1"/>
+          </a:solidFill>
+          <a:prstDash val="solid"/>
+        </a:ln>
+        <a:effectLst/>
+      </dsp:spPr>
+      <dsp:style>
+        <a:lnRef idx="2">
+          <a:scrgbClr r="0" g="0" b="0"/>
+        </a:lnRef>
+        <a:fillRef idx="1">
+          <a:scrgbClr r="0" g="0" b="0"/>
+        </a:fillRef>
+        <a:effectRef idx="0">
+          <a:scrgbClr r="0" g="0" b="0"/>
+        </a:effectRef>
+        <a:fontRef idx="minor">
+          <a:schemeClr val="lt1"/>
+        </a:fontRef>
+      </dsp:style>
+      <dsp:txBody>
+        <a:bodyPr spcFirstLastPara="0" vert="horz" wrap="square" lIns="196025" tIns="130683" rIns="65342" bIns="130683" numCol="1" spcCol="1270" anchor="ctr" anchorCtr="0">
+          <a:noAutofit/>
+        </a:bodyPr>
+        <a:lstStyle/>
+        <a:p>
+          <a:pPr marL="0" lvl="0" indent="0" algn="ctr" defTabSz="2178050">
+            <a:lnSpc>
+              <a:spcPct val="90000"/>
+            </a:lnSpc>
+            <a:spcBef>
+              <a:spcPct val="0"/>
+            </a:spcBef>
+            <a:spcAft>
+              <a:spcPct val="35000"/>
+            </a:spcAft>
+            <a:buNone/>
+          </a:pPr>
+          <a:endParaRPr lang="en-US" sz="4900" kern="1200" dirty="0"/>
+        </a:p>
+      </dsp:txBody>
+      <dsp:txXfrm>
+        <a:off x="4302919" y="226207"/>
+        <a:ext cx="1433512" cy="955675"/>
+      </dsp:txXfrm>
+    </dsp:sp>
+    <dsp:sp modelId="{903FC15E-8A12-4ACF-90BF-441209C11D87}">
+      <dsp:nvSpPr>
+        <dsp:cNvPr id="0" name=""/>
+        <dsp:cNvSpPr/>
+      </dsp:nvSpPr>
+      <dsp:spPr>
+        <a:xfrm>
+          <a:off x="5736431" y="226207"/>
+          <a:ext cx="2389187" cy="955675"/>
+        </a:xfrm>
+        <a:prstGeom prst="chevron">
+          <a:avLst/>
+        </a:prstGeom>
+        <a:solidFill>
+          <a:schemeClr val="tx1">
+            <a:lumMod val="95000"/>
+          </a:schemeClr>
+        </a:solidFill>
+        <a:ln w="19050" cap="rnd" cmpd="sng" algn="ctr">
+          <a:solidFill>
+            <a:schemeClr val="accent1"/>
           </a:solidFill>
           <a:prstDash val="solid"/>
         </a:ln>
@@ -1708,7 +3006,1313 @@
 </dgm:layoutDef>
 </file>
 
+<file path=ppt/diagrams/layout2.xml><?xml version="1.0" encoding="utf-8"?>
+<dgm:layoutDef xmlns:dgm="http://schemas.openxmlformats.org/drawingml/2006/diagram" xmlns:a="http://schemas.openxmlformats.org/drawingml/2006/main" uniqueId="urn:microsoft.com/office/officeart/2005/8/layout/hChevron3">
+  <dgm:title val=""/>
+  <dgm:desc val=""/>
+  <dgm:catLst>
+    <dgm:cat type="process" pri="10000"/>
+  </dgm:catLst>
+  <dgm:sampData useDef="1">
+    <dgm:dataModel>
+      <dgm:ptLst/>
+      <dgm:bg/>
+      <dgm:whole/>
+    </dgm:dataModel>
+  </dgm:sampData>
+  <dgm:styleData>
+    <dgm:dataModel>
+      <dgm:ptLst>
+        <dgm:pt modelId="0" type="doc"/>
+        <dgm:pt modelId="1"/>
+        <dgm:pt modelId="2"/>
+      </dgm:ptLst>
+      <dgm:cxnLst>
+        <dgm:cxn modelId="3" srcId="0" destId="1" srcOrd="0" destOrd="0"/>
+        <dgm:cxn modelId="4" srcId="0" destId="2" srcOrd="1" destOrd="0"/>
+      </dgm:cxnLst>
+      <dgm:bg/>
+      <dgm:whole/>
+    </dgm:dataModel>
+  </dgm:styleData>
+  <dgm:clrData>
+    <dgm:dataModel>
+      <dgm:ptLst>
+        <dgm:pt modelId="0" type="doc"/>
+        <dgm:pt modelId="1"/>
+        <dgm:pt modelId="2"/>
+        <dgm:pt modelId="3"/>
+        <dgm:pt modelId="4"/>
+      </dgm:ptLst>
+      <dgm:cxnLst>
+        <dgm:cxn modelId="5" srcId="0" destId="1" srcOrd="0" destOrd="0"/>
+        <dgm:cxn modelId="6" srcId="0" destId="2" srcOrd="1" destOrd="0"/>
+        <dgm:cxn modelId="7" srcId="0" destId="3" srcOrd="2" destOrd="0"/>
+        <dgm:cxn modelId="8" srcId="0" destId="4" srcOrd="3" destOrd="0"/>
+      </dgm:cxnLst>
+      <dgm:bg/>
+      <dgm:whole/>
+    </dgm:dataModel>
+  </dgm:clrData>
+  <dgm:layoutNode name="Name0">
+    <dgm:varLst>
+      <dgm:dir/>
+      <dgm:resizeHandles val="exact"/>
+    </dgm:varLst>
+    <dgm:choose name="Name1">
+      <dgm:if name="Name2" func="var" arg="dir" op="equ" val="norm">
+        <dgm:alg type="lin"/>
+      </dgm:if>
+      <dgm:else name="Name3">
+        <dgm:alg type="lin">
+          <dgm:param type="linDir" val="fromR"/>
+        </dgm:alg>
+      </dgm:else>
+    </dgm:choose>
+    <dgm:shape xmlns:r="http://schemas.openxmlformats.org/officeDocument/2006/relationships" r:blip="">
+      <dgm:adjLst/>
+    </dgm:shape>
+    <dgm:presOf/>
+    <dgm:choose name="Name4">
+      <dgm:if name="Name5" axis="root des" func="maxDepth" op="gte" val="2">
+        <dgm:constrLst>
+          <dgm:constr type="w" for="ch" forName="parAndChTx" refType="w"/>
+          <dgm:constr type="primFontSz" for="ch" ptType="node" op="equ"/>
+          <dgm:constr type="w" for="ch" forName="parAndChSpace" refType="w" refFor="ch" refForName="parAndChTx" fact="-0.2"/>
+          <dgm:constr type="w" for="ch" ptType="sibTrans" op="equ"/>
+        </dgm:constrLst>
+        <dgm:ruleLst/>
+        <dgm:forEach name="Name6" axis="ch" ptType="node">
+          <dgm:layoutNode name="parAndChTx">
+            <dgm:varLst>
+              <dgm:bulletEnabled val="1"/>
+            </dgm:varLst>
+            <dgm:alg type="tx"/>
+            <dgm:choose name="Name7">
+              <dgm:if name="Name8" func="var" arg="dir" op="equ" val="norm">
+                <dgm:choose name="Name9">
+                  <dgm:if name="Name10" axis="self" ptType="node" func="pos" op="equ" val="1">
+                    <dgm:shape xmlns:r="http://schemas.openxmlformats.org/officeDocument/2006/relationships" type="homePlate" r:blip="">
+                      <dgm:adjLst>
+                        <dgm:adj idx="1" val="0.25"/>
+                      </dgm:adjLst>
+                    </dgm:shape>
+                    <dgm:presOf axis="desOrSelf" ptType="node"/>
+                    <dgm:constrLst>
+                      <dgm:constr type="h" refType="w" op="equ" fact="0.8"/>
+                      <dgm:constr type="primFontSz" val="65"/>
+                      <dgm:constr type="tMarg" refType="primFontSz" fact="0.2"/>
+                      <dgm:constr type="bMarg" refType="primFontSz" fact="0.2"/>
+                      <dgm:constr type="lMarg" refType="w" fact="0.1"/>
+                      <dgm:constr type="rMarg" refType="w" fact="0.4"/>
+                    </dgm:constrLst>
+                  </dgm:if>
+                  <dgm:else name="Name11">
+                    <dgm:shape xmlns:r="http://schemas.openxmlformats.org/officeDocument/2006/relationships" type="chevron" r:blip="">
+                      <dgm:adjLst>
+                        <dgm:adj idx="1" val="0.25"/>
+                      </dgm:adjLst>
+                    </dgm:shape>
+                    <dgm:presOf axis="desOrSelf" ptType="node"/>
+                    <dgm:constrLst>
+                      <dgm:constr type="h" refType="w" op="equ" fact="0.8"/>
+                      <dgm:constr type="primFontSz" val="65"/>
+                      <dgm:constr type="tMarg" refType="primFontSz" fact="0.2"/>
+                      <dgm:constr type="bMarg" refType="primFontSz" fact="0.2"/>
+                      <dgm:constr type="lMarg" refType="w" fact="0.1"/>
+                      <dgm:constr type="rMarg" refType="w" fact="0.1"/>
+                    </dgm:constrLst>
+                  </dgm:else>
+                </dgm:choose>
+              </dgm:if>
+              <dgm:else name="Name12">
+                <dgm:choose name="Name13">
+                  <dgm:if name="Name14" axis="self" ptType="node" func="pos" op="equ" val="1">
+                    <dgm:shape xmlns:r="http://schemas.openxmlformats.org/officeDocument/2006/relationships" rot="180" type="homePlate" r:blip="">
+                      <dgm:adjLst>
+                        <dgm:adj idx="1" val="0.25"/>
+                      </dgm:adjLst>
+                    </dgm:shape>
+                    <dgm:presOf axis="desOrSelf" ptType="node"/>
+                    <dgm:constrLst>
+                      <dgm:constr type="h" refType="w" op="equ" fact="0.8"/>
+                      <dgm:constr type="primFontSz" val="65"/>
+                      <dgm:constr type="tMarg" refType="primFontSz" fact="0.2"/>
+                      <dgm:constr type="bMarg" refType="primFontSz" fact="0.2"/>
+                      <dgm:constr type="lMarg" refType="w" fact="0.4"/>
+                      <dgm:constr type="rMarg" refType="w" fact="0.1"/>
+                    </dgm:constrLst>
+                  </dgm:if>
+                  <dgm:else name="Name15">
+                    <dgm:shape xmlns:r="http://schemas.openxmlformats.org/officeDocument/2006/relationships" rot="180" type="chevron" r:blip="">
+                      <dgm:adjLst>
+                        <dgm:adj idx="1" val="0.25"/>
+                      </dgm:adjLst>
+                    </dgm:shape>
+                    <dgm:presOf axis="desOrSelf" ptType="node"/>
+                    <dgm:constrLst>
+                      <dgm:constr type="h" refType="w" op="equ" fact="0.8"/>
+                      <dgm:constr type="primFontSz" val="65"/>
+                      <dgm:constr type="tMarg" refType="primFontSz" fact="0.2"/>
+                      <dgm:constr type="bMarg" refType="primFontSz" fact="0.2"/>
+                      <dgm:constr type="lMarg" refType="w" fact="0.1"/>
+                      <dgm:constr type="rMarg" refType="w" fact="0.1"/>
+                    </dgm:constrLst>
+                  </dgm:else>
+                </dgm:choose>
+              </dgm:else>
+            </dgm:choose>
+            <dgm:ruleLst>
+              <dgm:rule type="primFontSz" val="5" fact="NaN" max="NaN"/>
+            </dgm:ruleLst>
+          </dgm:layoutNode>
+          <dgm:forEach name="Name16" axis="followSib" ptType="sibTrans" cnt="1">
+            <dgm:layoutNode name="parAndChSpace">
+              <dgm:alg type="sp"/>
+              <dgm:shape xmlns:r="http://schemas.openxmlformats.org/officeDocument/2006/relationships" r:blip="">
+                <dgm:adjLst/>
+              </dgm:shape>
+              <dgm:presOf/>
+              <dgm:constrLst/>
+              <dgm:ruleLst/>
+            </dgm:layoutNode>
+          </dgm:forEach>
+        </dgm:forEach>
+      </dgm:if>
+      <dgm:else name="Name17">
+        <dgm:constrLst>
+          <dgm:constr type="w" for="ch" forName="parTxOnly" refType="w"/>
+          <dgm:constr type="primFontSz" for="ch" ptType="node" op="equ"/>
+          <dgm:constr type="w" for="ch" forName="parSpace" refType="w" refFor="ch" refForName="parTxOnly" fact="-0.2"/>
+          <dgm:constr type="w" for="ch" ptType="sibTrans" op="equ"/>
+        </dgm:constrLst>
+        <dgm:ruleLst/>
+        <dgm:forEach name="Name18" axis="ch" ptType="node">
+          <dgm:layoutNode name="parTxOnly">
+            <dgm:varLst>
+              <dgm:bulletEnabled val="1"/>
+            </dgm:varLst>
+            <dgm:alg type="tx"/>
+            <dgm:presOf axis="desOrSelf" ptType="node"/>
+            <dgm:choose name="Name19">
+              <dgm:if name="Name20" func="var" arg="dir" op="equ" val="norm">
+                <dgm:choose name="Name21">
+                  <dgm:if name="Name22" axis="self" ptType="node" func="pos" op="equ" val="1">
+                    <dgm:shape xmlns:r="http://schemas.openxmlformats.org/officeDocument/2006/relationships" type="homePlate" r:blip="">
+                      <dgm:adjLst/>
+                    </dgm:shape>
+                    <dgm:constrLst>
+                      <dgm:constr type="h" refType="w" op="equ" fact="0.4"/>
+                      <dgm:constr type="primFontSz" val="65"/>
+                      <dgm:constr type="tMarg" refType="primFontSz" fact="0.21"/>
+                      <dgm:constr type="bMarg" refType="primFontSz" fact="0.21"/>
+                      <dgm:constr type="lMarg" refType="primFontSz" fact="0.42"/>
+                      <dgm:constr type="rMarg" refType="primFontSz" fact="0.105"/>
+                    </dgm:constrLst>
+                  </dgm:if>
+                  <dgm:else name="Name23">
+                    <dgm:shape xmlns:r="http://schemas.openxmlformats.org/officeDocument/2006/relationships" type="chevron" r:blip="">
+                      <dgm:adjLst/>
+                    </dgm:shape>
+                    <dgm:constrLst>
+                      <dgm:constr type="h" refType="w" op="equ" fact="0.4"/>
+                      <dgm:constr type="primFontSz" val="65"/>
+                      <dgm:constr type="tMarg" refType="primFontSz" fact="0.21"/>
+                      <dgm:constr type="bMarg" refType="primFontSz" fact="0.21"/>
+                      <dgm:constr type="lMarg" refType="primFontSz" fact="0.315"/>
+                      <dgm:constr type="rMarg" refType="primFontSz" fact="0.105"/>
+                    </dgm:constrLst>
+                  </dgm:else>
+                </dgm:choose>
+              </dgm:if>
+              <dgm:else name="Name24">
+                <dgm:choose name="Name25">
+                  <dgm:if name="Name26" axis="self" ptType="node" func="pos" op="equ" val="1">
+                    <dgm:shape xmlns:r="http://schemas.openxmlformats.org/officeDocument/2006/relationships" rot="180" type="homePlate" r:blip="">
+                      <dgm:adjLst/>
+                    </dgm:shape>
+                    <dgm:constrLst>
+                      <dgm:constr type="h" refType="w" op="equ" fact="0.4"/>
+                      <dgm:constr type="primFontSz" val="65"/>
+                      <dgm:constr type="tMarg" refType="primFontSz" fact="0.21"/>
+                      <dgm:constr type="bMarg" refType="primFontSz" fact="0.21"/>
+                      <dgm:constr type="lMarg" refType="primFontSz" fact="0.105"/>
+                      <dgm:constr type="rMarg" refType="primFontSz" fact="0.42"/>
+                    </dgm:constrLst>
+                  </dgm:if>
+                  <dgm:else name="Name27">
+                    <dgm:shape xmlns:r="http://schemas.openxmlformats.org/officeDocument/2006/relationships" rot="180" type="chevron" r:blip="">
+                      <dgm:adjLst/>
+                    </dgm:shape>
+                    <dgm:constrLst>
+                      <dgm:constr type="h" refType="w" op="equ" fact="0.4"/>
+                      <dgm:constr type="primFontSz" val="65"/>
+                      <dgm:constr type="tMarg" refType="primFontSz" fact="0.21"/>
+                      <dgm:constr type="bMarg" refType="primFontSz" fact="0.21"/>
+                      <dgm:constr type="lMarg" refType="primFontSz" fact="0.105"/>
+                      <dgm:constr type="rMarg" refType="primFontSz" fact="0.315"/>
+                    </dgm:constrLst>
+                  </dgm:else>
+                </dgm:choose>
+              </dgm:else>
+            </dgm:choose>
+            <dgm:ruleLst>
+              <dgm:rule type="primFontSz" val="5" fact="NaN" max="NaN"/>
+            </dgm:ruleLst>
+          </dgm:layoutNode>
+          <dgm:forEach name="Name28" axis="followSib" ptType="sibTrans" cnt="1">
+            <dgm:layoutNode name="parSpace">
+              <dgm:alg type="sp"/>
+              <dgm:shape xmlns:r="http://schemas.openxmlformats.org/officeDocument/2006/relationships" r:blip="">
+                <dgm:adjLst/>
+              </dgm:shape>
+              <dgm:presOf/>
+              <dgm:constrLst/>
+              <dgm:ruleLst/>
+            </dgm:layoutNode>
+          </dgm:forEach>
+        </dgm:forEach>
+      </dgm:else>
+    </dgm:choose>
+  </dgm:layoutNode>
+</dgm:layoutDef>
+</file>
+
 <file path=ppt/diagrams/quickStyle1.xml><?xml version="1.0" encoding="utf-8"?>
+<dgm:styleDef xmlns:dgm="http://schemas.openxmlformats.org/drawingml/2006/diagram" xmlns:a="http://schemas.openxmlformats.org/drawingml/2006/main" uniqueId="urn:microsoft.com/office/officeart/2005/8/quickstyle/simple1">
+  <dgm:title val=""/>
+  <dgm:desc val=""/>
+  <dgm:catLst>
+    <dgm:cat type="simple" pri="10100"/>
+  </dgm:catLst>
+  <dgm:scene3d>
+    <a:camera prst="orthographicFront"/>
+    <a:lightRig rig="threePt" dir="t"/>
+  </dgm:scene3d>
+  <dgm:styleLbl name="node0">
+    <dgm:scene3d>
+      <a:camera prst="orthographicFront"/>
+      <a:lightRig rig="threePt" dir="t"/>
+    </dgm:scene3d>
+    <dgm:sp3d/>
+    <dgm:txPr/>
+    <dgm:style>
+      <a:lnRef idx="2">
+        <a:scrgbClr r="0" g="0" b="0"/>
+      </a:lnRef>
+      <a:fillRef idx="1">
+        <a:scrgbClr r="0" g="0" b="0"/>
+      </a:fillRef>
+      <a:effectRef idx="0">
+        <a:scrgbClr r="0" g="0" b="0"/>
+      </a:effectRef>
+      <a:fontRef idx="minor">
+        <a:schemeClr val="lt1"/>
+      </a:fontRef>
+    </dgm:style>
+  </dgm:styleLbl>
+  <dgm:styleLbl name="lnNode1">
+    <dgm:scene3d>
+      <a:camera prst="orthographicFront"/>
+      <a:lightRig rig="threePt" dir="t"/>
+    </dgm:scene3d>
+    <dgm:sp3d/>
+    <dgm:txPr/>
+    <dgm:style>
+      <a:lnRef idx="2">
+        <a:scrgbClr r="0" g="0" b="0"/>
+      </a:lnRef>
+      <a:fillRef idx="1">
+        <a:scrgbClr r="0" g="0" b="0"/>
+      </a:fillRef>
+      <a:effectRef idx="0">
+        <a:scrgbClr r="0" g="0" b="0"/>
+      </a:effectRef>
+      <a:fontRef idx="minor">
+        <a:schemeClr val="lt1"/>
+      </a:fontRef>
+    </dgm:style>
+  </dgm:styleLbl>
+  <dgm:styleLbl name="vennNode1">
+    <dgm:scene3d>
+      <a:camera prst="orthographicFront"/>
+      <a:lightRig rig="threePt" dir="t"/>
+    </dgm:scene3d>
+    <dgm:sp3d/>
+    <dgm:txPr/>
+    <dgm:style>
+      <a:lnRef idx="2">
+        <a:scrgbClr r="0" g="0" b="0"/>
+      </a:lnRef>
+      <a:fillRef idx="1">
+        <a:scrgbClr r="0" g="0" b="0"/>
+      </a:fillRef>
+      <a:effectRef idx="0">
+        <a:scrgbClr r="0" g="0" b="0"/>
+      </a:effectRef>
+      <a:fontRef idx="minor">
+        <a:schemeClr val="tx1"/>
+      </a:fontRef>
+    </dgm:style>
+  </dgm:styleLbl>
+  <dgm:styleLbl name="alignNode1">
+    <dgm:scene3d>
+      <a:camera prst="orthographicFront"/>
+      <a:lightRig rig="threePt" dir="t"/>
+    </dgm:scene3d>
+    <dgm:sp3d/>
+    <dgm:txPr/>
+    <dgm:style>
+      <a:lnRef idx="2">
+        <a:scrgbClr r="0" g="0" b="0"/>
+      </a:lnRef>
+      <a:fillRef idx="1">
+        <a:scrgbClr r="0" g="0" b="0"/>
+      </a:fillRef>
+      <a:effectRef idx="0">
+        <a:scrgbClr r="0" g="0" b="0"/>
+      </a:effectRef>
+      <a:fontRef idx="minor">
+        <a:schemeClr val="lt1"/>
+      </a:fontRef>
+    </dgm:style>
+  </dgm:styleLbl>
+  <dgm:styleLbl name="node1">
+    <dgm:scene3d>
+      <a:camera prst="orthographicFront"/>
+      <a:lightRig rig="threePt" dir="t"/>
+    </dgm:scene3d>
+    <dgm:sp3d/>
+    <dgm:txPr/>
+    <dgm:style>
+      <a:lnRef idx="2">
+        <a:scrgbClr r="0" g="0" b="0"/>
+      </a:lnRef>
+      <a:fillRef idx="1">
+        <a:scrgbClr r="0" g="0" b="0"/>
+      </a:fillRef>
+      <a:effectRef idx="0">
+        <a:scrgbClr r="0" g="0" b="0"/>
+      </a:effectRef>
+      <a:fontRef idx="minor">
+        <a:schemeClr val="lt1"/>
+      </a:fontRef>
+    </dgm:style>
+  </dgm:styleLbl>
+  <dgm:styleLbl name="node2">
+    <dgm:scene3d>
+      <a:camera prst="orthographicFront"/>
+      <a:lightRig rig="threePt" dir="t"/>
+    </dgm:scene3d>
+    <dgm:sp3d/>
+    <dgm:txPr/>
+    <dgm:style>
+      <a:lnRef idx="2">
+        <a:scrgbClr r="0" g="0" b="0"/>
+      </a:lnRef>
+      <a:fillRef idx="1">
+        <a:scrgbClr r="0" g="0" b="0"/>
+      </a:fillRef>
+      <a:effectRef idx="0">
+        <a:scrgbClr r="0" g="0" b="0"/>
+      </a:effectRef>
+      <a:fontRef idx="minor">
+        <a:schemeClr val="lt1"/>
+      </a:fontRef>
+    </dgm:style>
+  </dgm:styleLbl>
+  <dgm:styleLbl name="node3">
+    <dgm:scene3d>
+      <a:camera prst="orthographicFront"/>
+      <a:lightRig rig="threePt" dir="t"/>
+    </dgm:scene3d>
+    <dgm:sp3d/>
+    <dgm:txPr/>
+    <dgm:style>
+      <a:lnRef idx="2">
+        <a:scrgbClr r="0" g="0" b="0"/>
+      </a:lnRef>
+      <a:fillRef idx="1">
+        <a:scrgbClr r="0" g="0" b="0"/>
+      </a:fillRef>
+      <a:effectRef idx="0">
+        <a:scrgbClr r="0" g="0" b="0"/>
+      </a:effectRef>
+      <a:fontRef idx="minor">
+        <a:schemeClr val="lt1"/>
+      </a:fontRef>
+    </dgm:style>
+  </dgm:styleLbl>
+  <dgm:styleLbl name="node4">
+    <dgm:scene3d>
+      <a:camera prst="orthographicFront"/>
+      <a:lightRig rig="threePt" dir="t"/>
+    </dgm:scene3d>
+    <dgm:sp3d/>
+    <dgm:txPr/>
+    <dgm:style>
+      <a:lnRef idx="2">
+        <a:scrgbClr r="0" g="0" b="0"/>
+      </a:lnRef>
+      <a:fillRef idx="1">
+        <a:scrgbClr r="0" g="0" b="0"/>
+      </a:fillRef>
+      <a:effectRef idx="0">
+        <a:scrgbClr r="0" g="0" b="0"/>
+      </a:effectRef>
+      <a:fontRef idx="minor">
+        <a:schemeClr val="lt1"/>
+      </a:fontRef>
+    </dgm:style>
+  </dgm:styleLbl>
+  <dgm:styleLbl name="fgImgPlace1">
+    <dgm:scene3d>
+      <a:camera prst="orthographicFront"/>
+      <a:lightRig rig="threePt" dir="t"/>
+    </dgm:scene3d>
+    <dgm:sp3d/>
+    <dgm:txPr/>
+    <dgm:style>
+      <a:lnRef idx="2">
+        <a:scrgbClr r="0" g="0" b="0"/>
+      </a:lnRef>
+      <a:fillRef idx="1">
+        <a:scrgbClr r="0" g="0" b="0"/>
+      </a:fillRef>
+      <a:effectRef idx="0">
+        <a:scrgbClr r="0" g="0" b="0"/>
+      </a:effectRef>
+      <a:fontRef idx="minor"/>
+    </dgm:style>
+  </dgm:styleLbl>
+  <dgm:styleLbl name="alignImgPlace1">
+    <dgm:scene3d>
+      <a:camera prst="orthographicFront"/>
+      <a:lightRig rig="threePt" dir="t"/>
+    </dgm:scene3d>
+    <dgm:sp3d/>
+    <dgm:txPr/>
+    <dgm:style>
+      <a:lnRef idx="2">
+        <a:scrgbClr r="0" g="0" b="0"/>
+      </a:lnRef>
+      <a:fillRef idx="1">
+        <a:scrgbClr r="0" g="0" b="0"/>
+      </a:fillRef>
+      <a:effectRef idx="0">
+        <a:scrgbClr r="0" g="0" b="0"/>
+      </a:effectRef>
+      <a:fontRef idx="minor"/>
+    </dgm:style>
+  </dgm:styleLbl>
+  <dgm:styleLbl name="bgImgPlace1">
+    <dgm:scene3d>
+      <a:camera prst="orthographicFront"/>
+      <a:lightRig rig="threePt" dir="t"/>
+    </dgm:scene3d>
+    <dgm:sp3d/>
+    <dgm:txPr/>
+    <dgm:style>
+      <a:lnRef idx="2">
+        <a:scrgbClr r="0" g="0" b="0"/>
+      </a:lnRef>
+      <a:fillRef idx="1">
+        <a:scrgbClr r="0" g="0" b="0"/>
+      </a:fillRef>
+      <a:effectRef idx="0">
+        <a:scrgbClr r="0" g="0" b="0"/>
+      </a:effectRef>
+      <a:fontRef idx="minor"/>
+    </dgm:style>
+  </dgm:styleLbl>
+  <dgm:styleLbl name="sibTrans2D1">
+    <dgm:scene3d>
+      <a:camera prst="orthographicFront"/>
+      <a:lightRig rig="threePt" dir="t"/>
+    </dgm:scene3d>
+    <dgm:sp3d/>
+    <dgm:txPr/>
+    <dgm:style>
+      <a:lnRef idx="0">
+        <a:scrgbClr r="0" g="0" b="0"/>
+      </a:lnRef>
+      <a:fillRef idx="1">
+        <a:scrgbClr r="0" g="0" b="0"/>
+      </a:fillRef>
+      <a:effectRef idx="0">
+        <a:scrgbClr r="0" g="0" b="0"/>
+      </a:effectRef>
+      <a:fontRef idx="minor">
+        <a:schemeClr val="lt1"/>
+      </a:fontRef>
+    </dgm:style>
+  </dgm:styleLbl>
+  <dgm:styleLbl name="fgSibTrans2D1">
+    <dgm:scene3d>
+      <a:camera prst="orthographicFront"/>
+      <a:lightRig rig="threePt" dir="t"/>
+    </dgm:scene3d>
+    <dgm:sp3d/>
+    <dgm:txPr/>
+    <dgm:style>
+      <a:lnRef idx="0">
+        <a:scrgbClr r="0" g="0" b="0"/>
+      </a:lnRef>
+      <a:fillRef idx="1">
+        <a:scrgbClr r="0" g="0" b="0"/>
+      </a:fillRef>
+      <a:effectRef idx="0">
+        <a:scrgbClr r="0" g="0" b="0"/>
+      </a:effectRef>
+      <a:fontRef idx="minor">
+        <a:schemeClr val="lt1"/>
+      </a:fontRef>
+    </dgm:style>
+  </dgm:styleLbl>
+  <dgm:styleLbl name="bgSibTrans2D1">
+    <dgm:scene3d>
+      <a:camera prst="orthographicFront"/>
+      <a:lightRig rig="threePt" dir="t"/>
+    </dgm:scene3d>
+    <dgm:sp3d/>
+    <dgm:txPr/>
+    <dgm:style>
+      <a:lnRef idx="0">
+        <a:scrgbClr r="0" g="0" b="0"/>
+      </a:lnRef>
+      <a:fillRef idx="1">
+        <a:scrgbClr r="0" g="0" b="0"/>
+      </a:fillRef>
+      <a:effectRef idx="0">
+        <a:scrgbClr r="0" g="0" b="0"/>
+      </a:effectRef>
+      <a:fontRef idx="minor">
+        <a:schemeClr val="lt1"/>
+      </a:fontRef>
+    </dgm:style>
+  </dgm:styleLbl>
+  <dgm:styleLbl name="sibTrans1D1">
+    <dgm:scene3d>
+      <a:camera prst="orthographicFront"/>
+      <a:lightRig rig="threePt" dir="t"/>
+    </dgm:scene3d>
+    <dgm:sp3d/>
+    <dgm:txPr/>
+    <dgm:style>
+      <a:lnRef idx="1">
+        <a:scrgbClr r="0" g="0" b="0"/>
+      </a:lnRef>
+      <a:fillRef idx="0">
+        <a:scrgbClr r="0" g="0" b="0"/>
+      </a:fillRef>
+      <a:effectRef idx="0">
+        <a:scrgbClr r="0" g="0" b="0"/>
+      </a:effectRef>
+      <a:fontRef idx="minor"/>
+    </dgm:style>
+  </dgm:styleLbl>
+  <dgm:styleLbl name="callout">
+    <dgm:scene3d>
+      <a:camera prst="orthographicFront"/>
+      <a:lightRig rig="threePt" dir="t"/>
+    </dgm:scene3d>
+    <dgm:sp3d/>
+    <dgm:txPr/>
+    <dgm:style>
+      <a:lnRef idx="2">
+        <a:scrgbClr r="0" g="0" b="0"/>
+      </a:lnRef>
+      <a:fillRef idx="1">
+        <a:scrgbClr r="0" g="0" b="0"/>
+      </a:fillRef>
+      <a:effectRef idx="0">
+        <a:scrgbClr r="0" g="0" b="0"/>
+      </a:effectRef>
+      <a:fontRef idx="minor"/>
+    </dgm:style>
+  </dgm:styleLbl>
+  <dgm:styleLbl name="asst0">
+    <dgm:scene3d>
+      <a:camera prst="orthographicFront"/>
+      <a:lightRig rig="threePt" dir="t"/>
+    </dgm:scene3d>
+    <dgm:sp3d/>
+    <dgm:txPr/>
+    <dgm:style>
+      <a:lnRef idx="2">
+        <a:scrgbClr r="0" g="0" b="0"/>
+      </a:lnRef>
+      <a:fillRef idx="1">
+        <a:scrgbClr r="0" g="0" b="0"/>
+      </a:fillRef>
+      <a:effectRef idx="0">
+        <a:scrgbClr r="0" g="0" b="0"/>
+      </a:effectRef>
+      <a:fontRef idx="minor">
+        <a:schemeClr val="lt1"/>
+      </a:fontRef>
+    </dgm:style>
+  </dgm:styleLbl>
+  <dgm:styleLbl name="asst1">
+    <dgm:scene3d>
+      <a:camera prst="orthographicFront"/>
+      <a:lightRig rig="threePt" dir="t"/>
+    </dgm:scene3d>
+    <dgm:sp3d/>
+    <dgm:txPr/>
+    <dgm:style>
+      <a:lnRef idx="2">
+        <a:scrgbClr r="0" g="0" b="0"/>
+      </a:lnRef>
+      <a:fillRef idx="1">
+        <a:scrgbClr r="0" g="0" b="0"/>
+      </a:fillRef>
+      <a:effectRef idx="0">
+        <a:scrgbClr r="0" g="0" b="0"/>
+      </a:effectRef>
+      <a:fontRef idx="minor">
+        <a:schemeClr val="lt1"/>
+      </a:fontRef>
+    </dgm:style>
+  </dgm:styleLbl>
+  <dgm:styleLbl name="asst2">
+    <dgm:scene3d>
+      <a:camera prst="orthographicFront"/>
+      <a:lightRig rig="threePt" dir="t"/>
+    </dgm:scene3d>
+    <dgm:sp3d/>
+    <dgm:txPr/>
+    <dgm:style>
+      <a:lnRef idx="2">
+        <a:scrgbClr r="0" g="0" b="0"/>
+      </a:lnRef>
+      <a:fillRef idx="1">
+        <a:scrgbClr r="0" g="0" b="0"/>
+      </a:fillRef>
+      <a:effectRef idx="0">
+        <a:scrgbClr r="0" g="0" b="0"/>
+      </a:effectRef>
+      <a:fontRef idx="minor">
+        <a:schemeClr val="lt1"/>
+      </a:fontRef>
+    </dgm:style>
+  </dgm:styleLbl>
+  <dgm:styleLbl name="asst3">
+    <dgm:scene3d>
+      <a:camera prst="orthographicFront"/>
+      <a:lightRig rig="threePt" dir="t"/>
+    </dgm:scene3d>
+    <dgm:sp3d/>
+    <dgm:txPr/>
+    <dgm:style>
+      <a:lnRef idx="2">
+        <a:scrgbClr r="0" g="0" b="0"/>
+      </a:lnRef>
+      <a:fillRef idx="1">
+        <a:scrgbClr r="0" g="0" b="0"/>
+      </a:fillRef>
+      <a:effectRef idx="0">
+        <a:scrgbClr r="0" g="0" b="0"/>
+      </a:effectRef>
+      <a:fontRef idx="minor">
+        <a:schemeClr val="lt1"/>
+      </a:fontRef>
+    </dgm:style>
+  </dgm:styleLbl>
+  <dgm:styleLbl name="asst4">
+    <dgm:scene3d>
+      <a:camera prst="orthographicFront"/>
+      <a:lightRig rig="threePt" dir="t"/>
+    </dgm:scene3d>
+    <dgm:sp3d/>
+    <dgm:txPr/>
+    <dgm:style>
+      <a:lnRef idx="2">
+        <a:scrgbClr r="0" g="0" b="0"/>
+      </a:lnRef>
+      <a:fillRef idx="1">
+        <a:scrgbClr r="0" g="0" b="0"/>
+      </a:fillRef>
+      <a:effectRef idx="0">
+        <a:scrgbClr r="0" g="0" b="0"/>
+      </a:effectRef>
+      <a:fontRef idx="minor">
+        <a:schemeClr val="lt1"/>
+      </a:fontRef>
+    </dgm:style>
+  </dgm:styleLbl>
+  <dgm:styleLbl name="parChTrans2D1">
+    <dgm:scene3d>
+      <a:camera prst="orthographicFront"/>
+      <a:lightRig rig="threePt" dir="t"/>
+    </dgm:scene3d>
+    <dgm:sp3d/>
+    <dgm:txPr/>
+    <dgm:style>
+      <a:lnRef idx="2">
+        <a:scrgbClr r="0" g="0" b="0"/>
+      </a:lnRef>
+      <a:fillRef idx="1">
+        <a:scrgbClr r="0" g="0" b="0"/>
+      </a:fillRef>
+      <a:effectRef idx="0">
+        <a:scrgbClr r="0" g="0" b="0"/>
+      </a:effectRef>
+      <a:fontRef idx="minor">
+        <a:schemeClr val="lt1"/>
+      </a:fontRef>
+    </dgm:style>
+  </dgm:styleLbl>
+  <dgm:styleLbl name="parChTrans2D2">
+    <dgm:scene3d>
+      <a:camera prst="orthographicFront"/>
+      <a:lightRig rig="threePt" dir="t"/>
+    </dgm:scene3d>
+    <dgm:sp3d/>
+    <dgm:txPr/>
+    <dgm:style>
+      <a:lnRef idx="2">
+        <a:scrgbClr r="0" g="0" b="0"/>
+      </a:lnRef>
+      <a:fillRef idx="1">
+        <a:scrgbClr r="0" g="0" b="0"/>
+      </a:fillRef>
+      <a:effectRef idx="0">
+        <a:scrgbClr r="0" g="0" b="0"/>
+      </a:effectRef>
+      <a:fontRef idx="minor">
+        <a:schemeClr val="lt1"/>
+      </a:fontRef>
+    </dgm:style>
+  </dgm:styleLbl>
+  <dgm:styleLbl name="parChTrans2D3">
+    <dgm:scene3d>
+      <a:camera prst="orthographicFront"/>
+      <a:lightRig rig="threePt" dir="t"/>
+    </dgm:scene3d>
+    <dgm:sp3d/>
+    <dgm:txPr/>
+    <dgm:style>
+      <a:lnRef idx="2">
+        <a:scrgbClr r="0" g="0" b="0"/>
+      </a:lnRef>
+      <a:fillRef idx="1">
+        <a:scrgbClr r="0" g="0" b="0"/>
+      </a:fillRef>
+      <a:effectRef idx="0">
+        <a:scrgbClr r="0" g="0" b="0"/>
+      </a:effectRef>
+      <a:fontRef idx="minor">
+        <a:schemeClr val="lt1"/>
+      </a:fontRef>
+    </dgm:style>
+  </dgm:styleLbl>
+  <dgm:styleLbl name="parChTrans2D4">
+    <dgm:scene3d>
+      <a:camera prst="orthographicFront"/>
+      <a:lightRig rig="threePt" dir="t"/>
+    </dgm:scene3d>
+    <dgm:sp3d/>
+    <dgm:txPr/>
+    <dgm:style>
+      <a:lnRef idx="2">
+        <a:scrgbClr r="0" g="0" b="0"/>
+      </a:lnRef>
+      <a:fillRef idx="1">
+        <a:scrgbClr r="0" g="0" b="0"/>
+      </a:fillRef>
+      <a:effectRef idx="0">
+        <a:scrgbClr r="0" g="0" b="0"/>
+      </a:effectRef>
+      <a:fontRef idx="minor">
+        <a:schemeClr val="lt1"/>
+      </a:fontRef>
+    </dgm:style>
+  </dgm:styleLbl>
+  <dgm:styleLbl name="parChTrans1D1">
+    <dgm:scene3d>
+      <a:camera prst="orthographicFront"/>
+      <a:lightRig rig="threePt" dir="t"/>
+    </dgm:scene3d>
+    <dgm:sp3d/>
+    <dgm:txPr/>
+    <dgm:style>
+      <a:lnRef idx="2">
+        <a:scrgbClr r="0" g="0" b="0"/>
+      </a:lnRef>
+      <a:fillRef idx="0">
+        <a:scrgbClr r="0" g="0" b="0"/>
+      </a:fillRef>
+      <a:effectRef idx="0">
+        <a:scrgbClr r="0" g="0" b="0"/>
+      </a:effectRef>
+      <a:fontRef idx="minor"/>
+    </dgm:style>
+  </dgm:styleLbl>
+  <dgm:styleLbl name="parChTrans1D2">
+    <dgm:scene3d>
+      <a:camera prst="orthographicFront"/>
+      <a:lightRig rig="threePt" dir="t"/>
+    </dgm:scene3d>
+    <dgm:sp3d/>
+    <dgm:txPr/>
+    <dgm:style>
+      <a:lnRef idx="2">
+        <a:scrgbClr r="0" g="0" b="0"/>
+      </a:lnRef>
+      <a:fillRef idx="0">
+        <a:scrgbClr r="0" g="0" b="0"/>
+      </a:fillRef>
+      <a:effectRef idx="0">
+        <a:scrgbClr r="0" g="0" b="0"/>
+      </a:effectRef>
+      <a:fontRef idx="minor"/>
+    </dgm:style>
+  </dgm:styleLbl>
+  <dgm:styleLbl name="parChTrans1D3">
+    <dgm:scene3d>
+      <a:camera prst="orthographicFront"/>
+      <a:lightRig rig="threePt" dir="t"/>
+    </dgm:scene3d>
+    <dgm:sp3d/>
+    <dgm:txPr/>
+    <dgm:style>
+      <a:lnRef idx="2">
+        <a:scrgbClr r="0" g="0" b="0"/>
+      </a:lnRef>
+      <a:fillRef idx="0">
+        <a:scrgbClr r="0" g="0" b="0"/>
+      </a:fillRef>
+      <a:effectRef idx="0">
+        <a:scrgbClr r="0" g="0" b="0"/>
+      </a:effectRef>
+      <a:fontRef idx="minor"/>
+    </dgm:style>
+  </dgm:styleLbl>
+  <dgm:styleLbl name="parChTrans1D4">
+    <dgm:scene3d>
+      <a:camera prst="orthographicFront"/>
+      <a:lightRig rig="threePt" dir="t"/>
+    </dgm:scene3d>
+    <dgm:sp3d/>
+    <dgm:txPr/>
+    <dgm:style>
+      <a:lnRef idx="2">
+        <a:scrgbClr r="0" g="0" b="0"/>
+      </a:lnRef>
+      <a:fillRef idx="0">
+        <a:scrgbClr r="0" g="0" b="0"/>
+      </a:fillRef>
+      <a:effectRef idx="0">
+        <a:scrgbClr r="0" g="0" b="0"/>
+      </a:effectRef>
+      <a:fontRef idx="minor"/>
+    </dgm:style>
+  </dgm:styleLbl>
+  <dgm:styleLbl name="fgAcc1">
+    <dgm:scene3d>
+      <a:camera prst="orthographicFront"/>
+      <a:lightRig rig="threePt" dir="t"/>
+    </dgm:scene3d>
+    <dgm:sp3d/>
+    <dgm:txPr/>
+    <dgm:style>
+      <a:lnRef idx="2">
+        <a:scrgbClr r="0" g="0" b="0"/>
+      </a:lnRef>
+      <a:fillRef idx="1">
+        <a:scrgbClr r="0" g="0" b="0"/>
+      </a:fillRef>
+      <a:effectRef idx="0">
+        <a:scrgbClr r="0" g="0" b="0"/>
+      </a:effectRef>
+      <a:fontRef idx="minor"/>
+    </dgm:style>
+  </dgm:styleLbl>
+  <dgm:styleLbl name="conFgAcc1">
+    <dgm:scene3d>
+      <a:camera prst="orthographicFront"/>
+      <a:lightRig rig="threePt" dir="t"/>
+    </dgm:scene3d>
+    <dgm:sp3d/>
+    <dgm:txPr/>
+    <dgm:style>
+      <a:lnRef idx="2">
+        <a:scrgbClr r="0" g="0" b="0"/>
+      </a:lnRef>
+      <a:fillRef idx="1">
+        <a:scrgbClr r="0" g="0" b="0"/>
+      </a:fillRef>
+      <a:effectRef idx="0">
+        <a:scrgbClr r="0" g="0" b="0"/>
+      </a:effectRef>
+      <a:fontRef idx="minor"/>
+    </dgm:style>
+  </dgm:styleLbl>
+  <dgm:styleLbl name="alignAcc1">
+    <dgm:scene3d>
+      <a:camera prst="orthographicFront"/>
+      <a:lightRig rig="threePt" dir="t"/>
+    </dgm:scene3d>
+    <dgm:sp3d/>
+    <dgm:txPr/>
+    <dgm:style>
+      <a:lnRef idx="2">
+        <a:scrgbClr r="0" g="0" b="0"/>
+      </a:lnRef>
+      <a:fillRef idx="1">
+        <a:scrgbClr r="0" g="0" b="0"/>
+      </a:fillRef>
+      <a:effectRef idx="0">
+        <a:scrgbClr r="0" g="0" b="0"/>
+      </a:effectRef>
+      <a:fontRef idx="minor"/>
+    </dgm:style>
+  </dgm:styleLbl>
+  <dgm:styleLbl name="trAlignAcc1">
+    <dgm:scene3d>
+      <a:camera prst="orthographicFront"/>
+      <a:lightRig rig="threePt" dir="t"/>
+    </dgm:scene3d>
+    <dgm:sp3d/>
+    <dgm:txPr/>
+    <dgm:style>
+      <a:lnRef idx="1">
+        <a:scrgbClr r="0" g="0" b="0"/>
+      </a:lnRef>
+      <a:fillRef idx="1">
+        <a:scrgbClr r="0" g="0" b="0"/>
+      </a:fillRef>
+      <a:effectRef idx="0">
+        <a:scrgbClr r="0" g="0" b="0"/>
+      </a:effectRef>
+      <a:fontRef idx="minor"/>
+    </dgm:style>
+  </dgm:styleLbl>
+  <dgm:styleLbl name="bgAcc1">
+    <dgm:scene3d>
+      <a:camera prst="orthographicFront"/>
+      <a:lightRig rig="threePt" dir="t"/>
+    </dgm:scene3d>
+    <dgm:sp3d/>
+    <dgm:txPr/>
+    <dgm:style>
+      <a:lnRef idx="2">
+        <a:scrgbClr r="0" g="0" b="0"/>
+      </a:lnRef>
+      <a:fillRef idx="1">
+        <a:scrgbClr r="0" g="0" b="0"/>
+      </a:fillRef>
+      <a:effectRef idx="0">
+        <a:scrgbClr r="0" g="0" b="0"/>
+      </a:effectRef>
+      <a:fontRef idx="minor"/>
+    </dgm:style>
+  </dgm:styleLbl>
+  <dgm:styleLbl name="solidFgAcc1">
+    <dgm:scene3d>
+      <a:camera prst="orthographicFront"/>
+      <a:lightRig rig="threePt" dir="t"/>
+    </dgm:scene3d>
+    <dgm:sp3d/>
+    <dgm:txPr/>
+    <dgm:style>
+      <a:lnRef idx="2">
+        <a:scrgbClr r="0" g="0" b="0"/>
+      </a:lnRef>
+      <a:fillRef idx="1">
+        <a:scrgbClr r="0" g="0" b="0"/>
+      </a:fillRef>
+      <a:effectRef idx="0">
+        <a:scrgbClr r="0" g="0" b="0"/>
+      </a:effectRef>
+      <a:fontRef idx="minor"/>
+    </dgm:style>
+  </dgm:styleLbl>
+  <dgm:styleLbl name="solidAlignAcc1">
+    <dgm:scene3d>
+      <a:camera prst="orthographicFront"/>
+      <a:lightRig rig="threePt" dir="t"/>
+    </dgm:scene3d>
+    <dgm:sp3d/>
+    <dgm:txPr/>
+    <dgm:style>
+      <a:lnRef idx="2">
+        <a:scrgbClr r="0" g="0" b="0"/>
+      </a:lnRef>
+      <a:fillRef idx="1">
+        <a:scrgbClr r="0" g="0" b="0"/>
+      </a:fillRef>
+      <a:effectRef idx="0">
+        <a:scrgbClr r="0" g="0" b="0"/>
+      </a:effectRef>
+      <a:fontRef idx="minor"/>
+    </dgm:style>
+  </dgm:styleLbl>
+  <dgm:styleLbl name="solidBgAcc1">
+    <dgm:scene3d>
+      <a:camera prst="orthographicFront"/>
+      <a:lightRig rig="threePt" dir="t"/>
+    </dgm:scene3d>
+    <dgm:sp3d/>
+    <dgm:txPr/>
+    <dgm:style>
+      <a:lnRef idx="2">
+        <a:scrgbClr r="0" g="0" b="0"/>
+      </a:lnRef>
+      <a:fillRef idx="1">
+        <a:scrgbClr r="0" g="0" b="0"/>
+      </a:fillRef>
+      <a:effectRef idx="0">
+        <a:scrgbClr r="0" g="0" b="0"/>
+      </a:effectRef>
+      <a:fontRef idx="minor"/>
+    </dgm:style>
+  </dgm:styleLbl>
+  <dgm:styleLbl name="fgAccFollowNode1">
+    <dgm:scene3d>
+      <a:camera prst="orthographicFront"/>
+      <a:lightRig rig="threePt" dir="t"/>
+    </dgm:scene3d>
+    <dgm:sp3d/>
+    <dgm:txPr/>
+    <dgm:style>
+      <a:lnRef idx="2">
+        <a:scrgbClr r="0" g="0" b="0"/>
+      </a:lnRef>
+      <a:fillRef idx="1">
+        <a:scrgbClr r="0" g="0" b="0"/>
+      </a:fillRef>
+      <a:effectRef idx="0">
+        <a:scrgbClr r="0" g="0" b="0"/>
+      </a:effectRef>
+      <a:fontRef idx="minor"/>
+    </dgm:style>
+  </dgm:styleLbl>
+  <dgm:styleLbl name="alignAccFollowNode1">
+    <dgm:scene3d>
+      <a:camera prst="orthographicFront"/>
+      <a:lightRig rig="threePt" dir="t"/>
+    </dgm:scene3d>
+    <dgm:sp3d/>
+    <dgm:txPr/>
+    <dgm:style>
+      <a:lnRef idx="2">
+        <a:scrgbClr r="0" g="0" b="0"/>
+      </a:lnRef>
+      <a:fillRef idx="1">
+        <a:scrgbClr r="0" g="0" b="0"/>
+      </a:fillRef>
+      <a:effectRef idx="0">
+        <a:scrgbClr r="0" g="0" b="0"/>
+      </a:effectRef>
+      <a:fontRef idx="minor"/>
+    </dgm:style>
+  </dgm:styleLbl>
+  <dgm:styleLbl name="bgAccFollowNode1">
+    <dgm:scene3d>
+      <a:camera prst="orthographicFront"/>
+      <a:lightRig rig="threePt" dir="t"/>
+    </dgm:scene3d>
+    <dgm:sp3d/>
+    <dgm:txPr/>
+    <dgm:style>
+      <a:lnRef idx="2">
+        <a:scrgbClr r="0" g="0" b="0"/>
+      </a:lnRef>
+      <a:fillRef idx="1">
+        <a:scrgbClr r="0" g="0" b="0"/>
+      </a:fillRef>
+      <a:effectRef idx="0">
+        <a:scrgbClr r="0" g="0" b="0"/>
+      </a:effectRef>
+      <a:fontRef idx="minor"/>
+    </dgm:style>
+  </dgm:styleLbl>
+  <dgm:styleLbl name="fgAcc0">
+    <dgm:scene3d>
+      <a:camera prst="orthographicFront"/>
+      <a:lightRig rig="threePt" dir="t"/>
+    </dgm:scene3d>
+    <dgm:sp3d/>
+    <dgm:txPr/>
+    <dgm:style>
+      <a:lnRef idx="2">
+        <a:scrgbClr r="0" g="0" b="0"/>
+      </a:lnRef>
+      <a:fillRef idx="1">
+        <a:scrgbClr r="0" g="0" b="0"/>
+      </a:fillRef>
+      <a:effectRef idx="0">
+        <a:scrgbClr r="0" g="0" b="0"/>
+      </a:effectRef>
+      <a:fontRef idx="minor"/>
+    </dgm:style>
+  </dgm:styleLbl>
+  <dgm:styleLbl name="fgAcc2">
+    <dgm:scene3d>
+      <a:camera prst="orthographicFront"/>
+      <a:lightRig rig="threePt" dir="t"/>
+    </dgm:scene3d>
+    <dgm:sp3d/>
+    <dgm:txPr/>
+    <dgm:style>
+      <a:lnRef idx="2">
+        <a:scrgbClr r="0" g="0" b="0"/>
+      </a:lnRef>
+      <a:fillRef idx="1">
+        <a:scrgbClr r="0" g="0" b="0"/>
+      </a:fillRef>
+      <a:effectRef idx="0">
+        <a:scrgbClr r="0" g="0" b="0"/>
+      </a:effectRef>
+      <a:fontRef idx="minor"/>
+    </dgm:style>
+  </dgm:styleLbl>
+  <dgm:styleLbl name="fgAcc3">
+    <dgm:scene3d>
+      <a:camera prst="orthographicFront"/>
+      <a:lightRig rig="threePt" dir="t"/>
+    </dgm:scene3d>
+    <dgm:sp3d/>
+    <dgm:txPr/>
+    <dgm:style>
+      <a:lnRef idx="2">
+        <a:scrgbClr r="0" g="0" b="0"/>
+      </a:lnRef>
+      <a:fillRef idx="1">
+        <a:scrgbClr r="0" g="0" b="0"/>
+      </a:fillRef>
+      <a:effectRef idx="0">
+        <a:scrgbClr r="0" g="0" b="0"/>
+      </a:effectRef>
+      <a:fontRef idx="minor"/>
+    </dgm:style>
+  </dgm:styleLbl>
+  <dgm:styleLbl name="fgAcc4">
+    <dgm:scene3d>
+      <a:camera prst="orthographicFront"/>
+      <a:lightRig rig="threePt" dir="t"/>
+    </dgm:scene3d>
+    <dgm:sp3d/>
+    <dgm:txPr/>
+    <dgm:style>
+      <a:lnRef idx="2">
+        <a:scrgbClr r="0" g="0" b="0"/>
+      </a:lnRef>
+      <a:fillRef idx="1">
+        <a:scrgbClr r="0" g="0" b="0"/>
+      </a:fillRef>
+      <a:effectRef idx="0">
+        <a:scrgbClr r="0" g="0" b="0"/>
+      </a:effectRef>
+      <a:fontRef idx="minor"/>
+    </dgm:style>
+  </dgm:styleLbl>
+  <dgm:styleLbl name="bgShp">
+    <dgm:scene3d>
+      <a:camera prst="orthographicFront"/>
+      <a:lightRig rig="threePt" dir="t"/>
+    </dgm:scene3d>
+    <dgm:sp3d/>
+    <dgm:txPr/>
+    <dgm:style>
+      <a:lnRef idx="0">
+        <a:scrgbClr r="0" g="0" b="0"/>
+      </a:lnRef>
+      <a:fillRef idx="1">
+        <a:scrgbClr r="0" g="0" b="0"/>
+      </a:fillRef>
+      <a:effectRef idx="0">
+        <a:scrgbClr r="0" g="0" b="0"/>
+      </a:effectRef>
+      <a:fontRef idx="minor"/>
+    </dgm:style>
+  </dgm:styleLbl>
+  <dgm:styleLbl name="dkBgShp">
+    <dgm:scene3d>
+      <a:camera prst="orthographicFront"/>
+      <a:lightRig rig="threePt" dir="t"/>
+    </dgm:scene3d>
+    <dgm:sp3d/>
+    <dgm:txPr/>
+    <dgm:style>
+      <a:lnRef idx="0">
+        <a:scrgbClr r="0" g="0" b="0"/>
+      </a:lnRef>
+      <a:fillRef idx="1">
+        <a:scrgbClr r="0" g="0" b="0"/>
+      </a:fillRef>
+      <a:effectRef idx="0">
+        <a:scrgbClr r="0" g="0" b="0"/>
+      </a:effectRef>
+      <a:fontRef idx="minor"/>
+    </dgm:style>
+  </dgm:styleLbl>
+  <dgm:styleLbl name="trBgShp">
+    <dgm:scene3d>
+      <a:camera prst="orthographicFront"/>
+      <a:lightRig rig="threePt" dir="t"/>
+    </dgm:scene3d>
+    <dgm:sp3d/>
+    <dgm:txPr/>
+    <dgm:style>
+      <a:lnRef idx="0">
+        <a:scrgbClr r="0" g="0" b="0"/>
+      </a:lnRef>
+      <a:fillRef idx="1">
+        <a:scrgbClr r="0" g="0" b="0"/>
+      </a:fillRef>
+      <a:effectRef idx="0">
+        <a:scrgbClr r="0" g="0" b="0"/>
+      </a:effectRef>
+      <a:fontRef idx="minor"/>
+    </dgm:style>
+  </dgm:styleLbl>
+  <dgm:styleLbl name="fgShp">
+    <dgm:scene3d>
+      <a:camera prst="orthographicFront"/>
+      <a:lightRig rig="threePt" dir="t"/>
+    </dgm:scene3d>
+    <dgm:sp3d/>
+    <dgm:txPr/>
+    <dgm:style>
+      <a:lnRef idx="2">
+        <a:scrgbClr r="0" g="0" b="0"/>
+      </a:lnRef>
+      <a:fillRef idx="1">
+        <a:scrgbClr r="0" g="0" b="0"/>
+      </a:fillRef>
+      <a:effectRef idx="0">
+        <a:scrgbClr r="0" g="0" b="0"/>
+      </a:effectRef>
+      <a:fontRef idx="minor"/>
+    </dgm:style>
+  </dgm:styleLbl>
+  <dgm:styleLbl name="revTx">
+    <dgm:scene3d>
+      <a:camera prst="orthographicFront"/>
+      <a:lightRig rig="threePt" dir="t"/>
+    </dgm:scene3d>
+    <dgm:sp3d/>
+    <dgm:txPr/>
+    <dgm:style>
+      <a:lnRef idx="0">
+        <a:scrgbClr r="0" g="0" b="0"/>
+      </a:lnRef>
+      <a:fillRef idx="0">
+        <a:scrgbClr r="0" g="0" b="0"/>
+      </a:fillRef>
+      <a:effectRef idx="0">
+        <a:scrgbClr r="0" g="0" b="0"/>
+      </a:effectRef>
+      <a:fontRef idx="minor"/>
+    </dgm:style>
+  </dgm:styleLbl>
+</dgm:styleDef>
+</file>
+
+<file path=ppt/diagrams/quickStyle2.xml><?xml version="1.0" encoding="utf-8"?>
 <dgm:styleDef xmlns:dgm="http://schemas.openxmlformats.org/drawingml/2006/diagram" xmlns:a="http://schemas.openxmlformats.org/drawingml/2006/main" uniqueId="urn:microsoft.com/office/officeart/2005/8/quickstyle/simple1">
   <dgm:title val=""/>
   <dgm:desc val=""/>
@@ -3787,6 +6391,114 @@
     <p:extLst>
       <p:ext uri="{BB962C8B-B14F-4D97-AF65-F5344CB8AC3E}">
         <p14:creationId xmlns:p14="http://schemas.microsoft.com/office/powerpoint/2010/main" val="1894597885"/>
+      </p:ext>
+    </p:extLst>
+  </p:cSld>
+  <p:clrMapOvr>
+    <a:masterClrMapping/>
+  </p:clrMapOvr>
+</p:notes>
+</file>
+
+<file path=ppt/notesSlides/notesSlide14.xml><?xml version="1.0" encoding="utf-8"?>
+<p:notes xmlns:a="http://schemas.openxmlformats.org/drawingml/2006/main" xmlns:r="http://schemas.openxmlformats.org/officeDocument/2006/relationships" xmlns:p="http://schemas.openxmlformats.org/presentationml/2006/main">
+  <p:cSld>
+    <p:spTree>
+      <p:nvGrpSpPr>
+        <p:cNvPr id="1" name="">
+          <a:extLst>
+            <a:ext uri="{FF2B5EF4-FFF2-40B4-BE49-F238E27FC236}">
+              <a16:creationId xmlns:a16="http://schemas.microsoft.com/office/drawing/2014/main" id="{451F58EE-9F16-565C-5074-55CD7D9CF36C}"/>
+            </a:ext>
+          </a:extLst>
+        </p:cNvPr>
+        <p:cNvGrpSpPr/>
+        <p:nvPr/>
+      </p:nvGrpSpPr>
+      <p:grpSpPr>
+        <a:xfrm>
+          <a:off x="0" y="0"/>
+          <a:ext cx="0" cy="0"/>
+          <a:chOff x="0" y="0"/>
+          <a:chExt cx="0" cy="0"/>
+        </a:xfrm>
+      </p:grpSpPr>
+      <p:sp>
+        <p:nvSpPr>
+          <p:cNvPr id="2" name="Slide Image Placeholder 1">
+            <a:extLst>
+              <a:ext uri="{FF2B5EF4-FFF2-40B4-BE49-F238E27FC236}">
+                <a16:creationId xmlns:a16="http://schemas.microsoft.com/office/drawing/2014/main" id="{A984ED33-2BA9-6CC1-6F71-B1599E260BEE}"/>
+              </a:ext>
+            </a:extLst>
+          </p:cNvPr>
+          <p:cNvSpPr>
+            <a:spLocks noGrp="1" noRot="1" noChangeAspect="1"/>
+          </p:cNvSpPr>
+          <p:nvPr>
+            <p:ph type="sldImg"/>
+          </p:nvPr>
+        </p:nvSpPr>
+        <p:spPr/>
+      </p:sp>
+      <p:sp>
+        <p:nvSpPr>
+          <p:cNvPr id="3" name="Notes Placeholder 2">
+            <a:extLst>
+              <a:ext uri="{FF2B5EF4-FFF2-40B4-BE49-F238E27FC236}">
+                <a16:creationId xmlns:a16="http://schemas.microsoft.com/office/drawing/2014/main" id="{0FF23E64-76D7-AACB-7684-CF099B8CE35E}"/>
+              </a:ext>
+            </a:extLst>
+          </p:cNvPr>
+          <p:cNvSpPr>
+            <a:spLocks noGrp="1"/>
+          </p:cNvSpPr>
+          <p:nvPr>
+            <p:ph type="body" idx="1"/>
+          </p:nvPr>
+        </p:nvSpPr>
+        <p:spPr/>
+        <p:txBody>
+          <a:bodyPr/>
+          <a:lstStyle/>
+          <a:p>
+            <a:endParaRPr lang="en-US" dirty="0"/>
+          </a:p>
+        </p:txBody>
+      </p:sp>
+      <p:sp>
+        <p:nvSpPr>
+          <p:cNvPr id="4" name="Slide Number Placeholder 3">
+            <a:extLst>
+              <a:ext uri="{FF2B5EF4-FFF2-40B4-BE49-F238E27FC236}">
+                <a16:creationId xmlns:a16="http://schemas.microsoft.com/office/drawing/2014/main" id="{BF5A1AE1-5887-CCE4-C29A-7D236991820C}"/>
+              </a:ext>
+            </a:extLst>
+          </p:cNvPr>
+          <p:cNvSpPr>
+            <a:spLocks noGrp="1"/>
+          </p:cNvSpPr>
+          <p:nvPr>
+            <p:ph type="sldNum" sz="quarter" idx="5"/>
+          </p:nvPr>
+        </p:nvSpPr>
+        <p:spPr/>
+        <p:txBody>
+          <a:bodyPr/>
+          <a:lstStyle/>
+          <a:p>
+            <a:fld id="{EE000EEB-8338-48D7-8EE8-EE0082EF7602}" type="slidenum">
+              <a:rPr lang="en-US" smtClean="0"/>
+              <a:t>14</a:t>
+            </a:fld>
+            <a:endParaRPr lang="en-US" dirty="0"/>
+          </a:p>
+        </p:txBody>
+      </p:sp>
+    </p:spTree>
+    <p:extLst>
+      <p:ext uri="{BB962C8B-B14F-4D97-AF65-F5344CB8AC3E}">
+        <p14:creationId xmlns:p14="http://schemas.microsoft.com/office/powerpoint/2010/main" val="2206855608"/>
       </p:ext>
     </p:extLst>
   </p:cSld>
@@ -13132,6 +15844,228 @@
     <p:extLst>
       <p:ext uri="{BB962C8B-B14F-4D97-AF65-F5344CB8AC3E}">
         <p14:creationId xmlns:p14="http://schemas.microsoft.com/office/powerpoint/2010/main" val="64341790"/>
+      </p:ext>
+    </p:extLst>
+  </p:cSld>
+  <p:clrMapOvr>
+    <a:masterClrMapping/>
+  </p:clrMapOvr>
+</p:sld>
+</file>
+
+<file path=ppt/slides/slide14.xml><?xml version="1.0" encoding="utf-8"?>
+<p:sld xmlns:a="http://schemas.openxmlformats.org/drawingml/2006/main" xmlns:r="http://schemas.openxmlformats.org/officeDocument/2006/relationships" xmlns:p="http://schemas.openxmlformats.org/presentationml/2006/main">
+  <p:cSld>
+    <p:spTree>
+      <p:nvGrpSpPr>
+        <p:cNvPr id="1" name="">
+          <a:extLst>
+            <a:ext uri="{FF2B5EF4-FFF2-40B4-BE49-F238E27FC236}">
+              <a16:creationId xmlns:a16="http://schemas.microsoft.com/office/drawing/2014/main" id="{92F165AF-FB62-51DB-6D92-389FDFF88DA7}"/>
+            </a:ext>
+          </a:extLst>
+        </p:cNvPr>
+        <p:cNvGrpSpPr/>
+        <p:nvPr/>
+      </p:nvGrpSpPr>
+      <p:grpSpPr>
+        <a:xfrm>
+          <a:off x="0" y="0"/>
+          <a:ext cx="0" cy="0"/>
+          <a:chOff x="0" y="0"/>
+          <a:chExt cx="0" cy="0"/>
+        </a:xfrm>
+      </p:grpSpPr>
+      <p:pic>
+        <p:nvPicPr>
+          <p:cNvPr id="5" name="Picture 4" descr="chain links">
+            <a:extLst>
+              <a:ext uri="{FF2B5EF4-FFF2-40B4-BE49-F238E27FC236}">
+                <a16:creationId xmlns:a16="http://schemas.microsoft.com/office/drawing/2014/main" id="{50C3019B-9A59-E401-0A90-6F64498924F6}"/>
+              </a:ext>
+            </a:extLst>
+          </p:cNvPr>
+          <p:cNvPicPr>
+            <a:picLocks noChangeAspect="1"/>
+          </p:cNvPicPr>
+          <p:nvPr/>
+        </p:nvPicPr>
+        <p:blipFill rotWithShape="1">
+          <a:blip r:embed="rId3">
+            <a:duotone>
+              <a:prstClr val="black"/>
+              <a:schemeClr val="accent5">
+                <a:tint val="45000"/>
+                <a:satMod val="400000"/>
+              </a:schemeClr>
+            </a:duotone>
+            <a:alphaModFix amt="25000"/>
+          </a:blip>
+          <a:srcRect t="23391" r="9091"/>
+          <a:stretch/>
+        </p:blipFill>
+        <p:spPr>
+          <a:xfrm>
+            <a:off x="0" y="10"/>
+            <a:ext cx="12191980" cy="6857990"/>
+          </a:xfrm>
+          <a:prstGeom prst="rect">
+            <a:avLst/>
+          </a:prstGeom>
+        </p:spPr>
+      </p:pic>
+      <p:pic>
+        <p:nvPicPr>
+          <p:cNvPr id="14" name="Picture 13" descr="A group of cubes with a symbol and a blue light&#10;&#10;AI-generated content may be incorrect.">
+            <a:extLst>
+              <a:ext uri="{FF2B5EF4-FFF2-40B4-BE49-F238E27FC236}">
+                <a16:creationId xmlns:a16="http://schemas.microsoft.com/office/drawing/2014/main" id="{9EA4EC37-781B-0F3A-7A2C-3F764A65F378}"/>
+              </a:ext>
+            </a:extLst>
+          </p:cNvPr>
+          <p:cNvPicPr>
+            <a:picLocks noChangeAspect="1"/>
+          </p:cNvPicPr>
+          <p:nvPr/>
+        </p:nvPicPr>
+        <p:blipFill>
+          <a:blip r:embed="rId4"/>
+          <a:stretch>
+            <a:fillRect/>
+          </a:stretch>
+        </p:blipFill>
+        <p:spPr>
+          <a:xfrm>
+            <a:off x="765928" y="0"/>
+            <a:ext cx="10660144" cy="6858000"/>
+          </a:xfrm>
+          <a:prstGeom prst="rect">
+            <a:avLst/>
+          </a:prstGeom>
+        </p:spPr>
+      </p:pic>
+      <p:graphicFrame>
+        <p:nvGraphicFramePr>
+          <p:cNvPr id="17" name="Diagram 16">
+            <a:extLst>
+              <a:ext uri="{FF2B5EF4-FFF2-40B4-BE49-F238E27FC236}">
+                <a16:creationId xmlns:a16="http://schemas.microsoft.com/office/drawing/2014/main" id="{250F498F-D597-91DE-4C9A-E03DE2BFD6D1}"/>
+              </a:ext>
+            </a:extLst>
+          </p:cNvPr>
+          <p:cNvGraphicFramePr/>
+          <p:nvPr>
+            <p:extLst>
+              <p:ext uri="{D42A27DB-BD31-4B8C-83A1-F6EECF244321}">
+                <p14:modId xmlns:p14="http://schemas.microsoft.com/office/powerpoint/2010/main" val="967940008"/>
+              </p:ext>
+            </p:extLst>
+          </p:nvPr>
+        </p:nvGraphicFramePr>
+        <p:xfrm>
+          <a:off x="2220891" y="4632111"/>
+          <a:ext cx="8128000" cy="1408090"/>
+        </p:xfrm>
+        <a:graphic>
+          <a:graphicData uri="http://schemas.openxmlformats.org/drawingml/2006/diagram">
+            <dgm:relIds xmlns:dgm="http://schemas.openxmlformats.org/drawingml/2006/diagram" xmlns:r="http://schemas.openxmlformats.org/officeDocument/2006/relationships" r:dm="rId5" r:lo="rId6" r:qs="rId7" r:cs="rId8"/>
+          </a:graphicData>
+        </a:graphic>
+      </p:graphicFrame>
+      <p:pic>
+        <p:nvPicPr>
+          <p:cNvPr id="19" name="Picture 18" descr="A blue circle with a black background&#10;&#10;AI-generated content may be incorrect.">
+            <a:extLst>
+              <a:ext uri="{FF2B5EF4-FFF2-40B4-BE49-F238E27FC236}">
+                <a16:creationId xmlns:a16="http://schemas.microsoft.com/office/drawing/2014/main" id="{A6B6E7A8-3E48-E4C9-3A9A-A0EFB6D831CB}"/>
+              </a:ext>
+            </a:extLst>
+          </p:cNvPr>
+          <p:cNvPicPr>
+            <a:picLocks noChangeAspect="1"/>
+          </p:cNvPicPr>
+          <p:nvPr/>
+        </p:nvPicPr>
+        <p:blipFill>
+          <a:blip r:embed="rId10"/>
+          <a:stretch>
+            <a:fillRect/>
+          </a:stretch>
+        </p:blipFill>
+        <p:spPr>
+          <a:xfrm>
+            <a:off x="2769171" y="4926207"/>
+            <a:ext cx="858165" cy="776435"/>
+          </a:xfrm>
+          <a:prstGeom prst="roundRect">
+            <a:avLst>
+              <a:gd name="adj" fmla="val 16667"/>
+            </a:avLst>
+          </a:prstGeom>
+          <a:ln>
+            <a:noFill/>
+          </a:ln>
+          <a:effectLst>
+            <a:outerShdw blurRad="152400" dist="12000" dir="900000" sy="98000" kx="110000" ky="200000" algn="tl" rotWithShape="0">
+              <a:srgbClr val="000000">
+                <a:alpha val="30000"/>
+              </a:srgbClr>
+            </a:outerShdw>
+          </a:effectLst>
+          <a:scene3d>
+            <a:camera prst="perspectiveRelaxed">
+              <a:rot lat="19800000" lon="1200000" rev="20820000"/>
+            </a:camera>
+            <a:lightRig rig="threePt" dir="t"/>
+          </a:scene3d>
+          <a:sp3d contourW="6350" prstMaterial="matte">
+            <a:bevelT w="101600" h="101600"/>
+            <a:contourClr>
+              <a:srgbClr val="969696"/>
+            </a:contourClr>
+          </a:sp3d>
+        </p:spPr>
+      </p:pic>
+      <p:pic>
+        <p:nvPicPr>
+          <p:cNvPr id="3" name="Picture 2" descr="A white circle with a blue circle with a blue circle with a blue circle with a white circle with a blue circle with a blue circle with a white circle with a blue circle with a blue circle&#10;&#10;AI-generated content may be incorrect.">
+            <a:extLst>
+              <a:ext uri="{FF2B5EF4-FFF2-40B4-BE49-F238E27FC236}">
+                <a16:creationId xmlns:a16="http://schemas.microsoft.com/office/drawing/2014/main" id="{BDF53D22-B47B-92BE-1E15-906174A828D6}"/>
+              </a:ext>
+            </a:extLst>
+          </p:cNvPr>
+          <p:cNvPicPr>
+            <a:picLocks noChangeAspect="1"/>
+          </p:cNvPicPr>
+          <p:nvPr/>
+        </p:nvPicPr>
+        <p:blipFill>
+          <a:blip r:embed="rId11"/>
+          <a:stretch>
+            <a:fillRect/>
+          </a:stretch>
+        </p:blipFill>
+        <p:spPr>
+          <a:xfrm>
+            <a:off x="2827177" y="270455"/>
+            <a:ext cx="6915427" cy="4172765"/>
+          </a:xfrm>
+          <a:prstGeom prst="rect">
+            <a:avLst/>
+          </a:prstGeom>
+          <a:ln>
+            <a:noFill/>
+          </a:ln>
+          <a:effectLst>
+            <a:softEdge rad="112500"/>
+          </a:effectLst>
+        </p:spPr>
+      </p:pic>
+    </p:spTree>
+    <p:extLst>
+      <p:ext uri="{BB962C8B-B14F-4D97-AF65-F5344CB8AC3E}">
+        <p14:creationId xmlns:p14="http://schemas.microsoft.com/office/powerpoint/2010/main" val="2895230973"/>
       </p:ext>
     </p:extLst>
   </p:cSld>

--- a/learn_nextjs/1_React-Foundation/React_Foundations.pptx
+++ b/learn_nextjs/1_React-Foundation/React_Foundations.pptx
@@ -5,10 +5,10 @@
     <p:sldMasterId id="2147483648" r:id="rId4"/>
   </p:sldMasterIdLst>
   <p:notesMasterIdLst>
-    <p:notesMasterId r:id="rId22"/>
+    <p:notesMasterId r:id="rId23"/>
   </p:notesMasterIdLst>
   <p:handoutMasterIdLst>
-    <p:handoutMasterId r:id="rId23"/>
+    <p:handoutMasterId r:id="rId24"/>
   </p:handoutMasterIdLst>
   <p:sldIdLst>
     <p:sldId id="256" r:id="rId5"/>
@@ -23,11 +23,12 @@
     <p:sldId id="272" r:id="rId14"/>
     <p:sldId id="273" r:id="rId15"/>
     <p:sldId id="263" r:id="rId16"/>
-    <p:sldId id="264" r:id="rId17"/>
-    <p:sldId id="265" r:id="rId18"/>
-    <p:sldId id="266" r:id="rId19"/>
-    <p:sldId id="267" r:id="rId20"/>
-    <p:sldId id="270" r:id="rId21"/>
+    <p:sldId id="274" r:id="rId17"/>
+    <p:sldId id="264" r:id="rId18"/>
+    <p:sldId id="265" r:id="rId19"/>
+    <p:sldId id="266" r:id="rId20"/>
+    <p:sldId id="267" r:id="rId21"/>
+    <p:sldId id="270" r:id="rId22"/>
   </p:sldIdLst>
   <p:sldSz cx="12192000" cy="6858000"/>
   <p:notesSz cx="6858000" cy="9144000"/>
@@ -4059,6 +4060,1570 @@
 </file>
 
 <file path=ppt/diagrams/colors6.xml><?xml version="1.0" encoding="utf-8"?>
+<dgm:colorsDef xmlns:dgm="http://schemas.openxmlformats.org/drawingml/2006/diagram" xmlns:a="http://schemas.openxmlformats.org/drawingml/2006/main" uniqueId="urn:microsoft.com/office/officeart/2005/8/colors/colorful3">
+  <dgm:title val=""/>
+  <dgm:desc val=""/>
+  <dgm:catLst>
+    <dgm:cat type="colorful" pri="10300"/>
+  </dgm:catLst>
+  <dgm:styleLbl name="node0">
+    <dgm:fillClrLst meth="repeat">
+      <a:schemeClr val="accent2"/>
+    </dgm:fillClrLst>
+    <dgm:linClrLst meth="repeat">
+      <a:schemeClr val="lt1"/>
+    </dgm:linClrLst>
+    <dgm:effectClrLst/>
+    <dgm:txLinClrLst/>
+    <dgm:txFillClrLst/>
+    <dgm:txEffectClrLst/>
+  </dgm:styleLbl>
+  <dgm:styleLbl name="node1">
+    <dgm:fillClrLst>
+      <a:schemeClr val="accent3"/>
+      <a:schemeClr val="accent4"/>
+    </dgm:fillClrLst>
+    <dgm:linClrLst meth="repeat">
+      <a:schemeClr val="lt1"/>
+    </dgm:linClrLst>
+    <dgm:effectClrLst/>
+    <dgm:txLinClrLst/>
+    <dgm:txFillClrLst/>
+    <dgm:txEffectClrLst/>
+  </dgm:styleLbl>
+  <dgm:styleLbl name="alignNode1">
+    <dgm:fillClrLst>
+      <a:schemeClr val="accent3"/>
+      <a:schemeClr val="accent4"/>
+    </dgm:fillClrLst>
+    <dgm:linClrLst>
+      <a:schemeClr val="accent3"/>
+      <a:schemeClr val="accent4"/>
+    </dgm:linClrLst>
+    <dgm:effectClrLst/>
+    <dgm:txLinClrLst/>
+    <dgm:txFillClrLst/>
+    <dgm:txEffectClrLst/>
+  </dgm:styleLbl>
+  <dgm:styleLbl name="lnNode1">
+    <dgm:fillClrLst>
+      <a:schemeClr val="accent3"/>
+      <a:schemeClr val="accent4"/>
+    </dgm:fillClrLst>
+    <dgm:linClrLst meth="repeat">
+      <a:schemeClr val="lt1"/>
+    </dgm:linClrLst>
+    <dgm:effectClrLst/>
+    <dgm:txLinClrLst/>
+    <dgm:txFillClrLst/>
+    <dgm:txEffectClrLst/>
+  </dgm:styleLbl>
+  <dgm:styleLbl name="vennNode1">
+    <dgm:fillClrLst>
+      <a:schemeClr val="accent3">
+        <a:alpha val="50000"/>
+      </a:schemeClr>
+      <a:schemeClr val="accent4">
+        <a:alpha val="50000"/>
+      </a:schemeClr>
+    </dgm:fillClrLst>
+    <dgm:linClrLst meth="repeat">
+      <a:schemeClr val="lt1"/>
+    </dgm:linClrLst>
+    <dgm:effectClrLst/>
+    <dgm:txLinClrLst/>
+    <dgm:txFillClrLst/>
+    <dgm:txEffectClrLst/>
+  </dgm:styleLbl>
+  <dgm:styleLbl name="node2">
+    <dgm:fillClrLst>
+      <a:schemeClr val="accent4"/>
+    </dgm:fillClrLst>
+    <dgm:linClrLst meth="repeat">
+      <a:schemeClr val="lt1"/>
+    </dgm:linClrLst>
+    <dgm:effectClrLst/>
+    <dgm:txLinClrLst/>
+    <dgm:txFillClrLst/>
+    <dgm:txEffectClrLst/>
+  </dgm:styleLbl>
+  <dgm:styleLbl name="node3">
+    <dgm:fillClrLst>
+      <a:schemeClr val="accent5"/>
+    </dgm:fillClrLst>
+    <dgm:linClrLst meth="repeat">
+      <a:schemeClr val="lt1"/>
+    </dgm:linClrLst>
+    <dgm:effectClrLst/>
+    <dgm:txLinClrLst/>
+    <dgm:txFillClrLst/>
+    <dgm:txEffectClrLst/>
+  </dgm:styleLbl>
+  <dgm:styleLbl name="node4">
+    <dgm:fillClrLst>
+      <a:schemeClr val="accent6"/>
+    </dgm:fillClrLst>
+    <dgm:linClrLst meth="repeat">
+      <a:schemeClr val="lt1"/>
+    </dgm:linClrLst>
+    <dgm:effectClrLst/>
+    <dgm:txLinClrLst/>
+    <dgm:txFillClrLst/>
+    <dgm:txEffectClrLst/>
+  </dgm:styleLbl>
+  <dgm:styleLbl name="fgImgPlace1">
+    <dgm:fillClrLst>
+      <a:schemeClr val="accent3">
+        <a:tint val="50000"/>
+      </a:schemeClr>
+      <a:schemeClr val="accent4">
+        <a:tint val="50000"/>
+      </a:schemeClr>
+    </dgm:fillClrLst>
+    <dgm:linClrLst meth="repeat">
+      <a:schemeClr val="lt1"/>
+    </dgm:linClrLst>
+    <dgm:effectClrLst/>
+    <dgm:txLinClrLst/>
+    <dgm:txFillClrLst meth="repeat">
+      <a:schemeClr val="lt1"/>
+    </dgm:txFillClrLst>
+    <dgm:txEffectClrLst/>
+  </dgm:styleLbl>
+  <dgm:styleLbl name="alignImgPlace1">
+    <dgm:fillClrLst>
+      <a:schemeClr val="accent3">
+        <a:tint val="50000"/>
+      </a:schemeClr>
+      <a:schemeClr val="accent4">
+        <a:tint val="20000"/>
+      </a:schemeClr>
+    </dgm:fillClrLst>
+    <dgm:linClrLst meth="repeat">
+      <a:schemeClr val="lt1"/>
+    </dgm:linClrLst>
+    <dgm:effectClrLst/>
+    <dgm:txLinClrLst/>
+    <dgm:txFillClrLst meth="repeat">
+      <a:schemeClr val="lt1"/>
+    </dgm:txFillClrLst>
+    <dgm:txEffectClrLst/>
+  </dgm:styleLbl>
+  <dgm:styleLbl name="bgImgPlace1">
+    <dgm:fillClrLst>
+      <a:schemeClr val="accent3">
+        <a:tint val="50000"/>
+      </a:schemeClr>
+      <a:schemeClr val="accent4">
+        <a:tint val="20000"/>
+      </a:schemeClr>
+    </dgm:fillClrLst>
+    <dgm:linClrLst meth="repeat">
+      <a:schemeClr val="lt1"/>
+    </dgm:linClrLst>
+    <dgm:effectClrLst/>
+    <dgm:txLinClrLst/>
+    <dgm:txFillClrLst meth="repeat">
+      <a:schemeClr val="lt1"/>
+    </dgm:txFillClrLst>
+    <dgm:txEffectClrLst/>
+  </dgm:styleLbl>
+  <dgm:styleLbl name="sibTrans2D1">
+    <dgm:fillClrLst>
+      <a:schemeClr val="accent3"/>
+      <a:schemeClr val="accent4"/>
+    </dgm:fillClrLst>
+    <dgm:linClrLst meth="repeat">
+      <a:schemeClr val="lt1"/>
+    </dgm:linClrLst>
+    <dgm:effectClrLst/>
+    <dgm:txLinClrLst/>
+    <dgm:txFillClrLst/>
+    <dgm:txEffectClrLst/>
+  </dgm:styleLbl>
+  <dgm:styleLbl name="fgSibTrans2D1">
+    <dgm:fillClrLst>
+      <a:schemeClr val="accent3"/>
+      <a:schemeClr val="accent4"/>
+    </dgm:fillClrLst>
+    <dgm:linClrLst meth="repeat">
+      <a:schemeClr val="lt1"/>
+    </dgm:linClrLst>
+    <dgm:effectClrLst/>
+    <dgm:txLinClrLst/>
+    <dgm:txFillClrLst meth="repeat">
+      <a:schemeClr val="lt1"/>
+    </dgm:txFillClrLst>
+    <dgm:txEffectClrLst/>
+  </dgm:styleLbl>
+  <dgm:styleLbl name="bgSibTrans2D1">
+    <dgm:fillClrLst>
+      <a:schemeClr val="accent3"/>
+      <a:schemeClr val="accent4"/>
+    </dgm:fillClrLst>
+    <dgm:linClrLst meth="repeat">
+      <a:schemeClr val="lt1"/>
+    </dgm:linClrLst>
+    <dgm:effectClrLst/>
+    <dgm:txLinClrLst/>
+    <dgm:txFillClrLst meth="repeat">
+      <a:schemeClr val="lt1"/>
+    </dgm:txFillClrLst>
+    <dgm:txEffectClrLst/>
+  </dgm:styleLbl>
+  <dgm:styleLbl name="sibTrans1D1">
+    <dgm:fillClrLst/>
+    <dgm:linClrLst>
+      <a:schemeClr val="accent3"/>
+      <a:schemeClr val="accent4"/>
+    </dgm:linClrLst>
+    <dgm:effectClrLst/>
+    <dgm:txLinClrLst/>
+    <dgm:txFillClrLst meth="repeat">
+      <a:schemeClr val="tx1"/>
+    </dgm:txFillClrLst>
+    <dgm:txEffectClrLst/>
+  </dgm:styleLbl>
+  <dgm:styleLbl name="callout">
+    <dgm:fillClrLst meth="repeat">
+      <a:schemeClr val="accent3"/>
+    </dgm:fillClrLst>
+    <dgm:linClrLst meth="repeat">
+      <a:schemeClr val="accent3">
+        <a:tint val="50000"/>
+      </a:schemeClr>
+    </dgm:linClrLst>
+    <dgm:effectClrLst/>
+    <dgm:txLinClrLst/>
+    <dgm:txFillClrLst meth="repeat">
+      <a:schemeClr val="tx1"/>
+    </dgm:txFillClrLst>
+    <dgm:txEffectClrLst/>
+  </dgm:styleLbl>
+  <dgm:styleLbl name="asst0">
+    <dgm:fillClrLst meth="repeat">
+      <a:schemeClr val="accent3"/>
+    </dgm:fillClrLst>
+    <dgm:linClrLst meth="repeat">
+      <a:schemeClr val="lt1">
+        <a:shade val="80000"/>
+      </a:schemeClr>
+    </dgm:linClrLst>
+    <dgm:effectClrLst/>
+    <dgm:txLinClrLst/>
+    <dgm:txFillClrLst/>
+    <dgm:txEffectClrLst/>
+  </dgm:styleLbl>
+  <dgm:styleLbl name="asst1">
+    <dgm:fillClrLst meth="repeat">
+      <a:schemeClr val="accent4"/>
+    </dgm:fillClrLst>
+    <dgm:linClrLst meth="repeat">
+      <a:schemeClr val="lt1">
+        <a:shade val="80000"/>
+      </a:schemeClr>
+    </dgm:linClrLst>
+    <dgm:effectClrLst/>
+    <dgm:txLinClrLst/>
+    <dgm:txFillClrLst/>
+    <dgm:txEffectClrLst/>
+  </dgm:styleLbl>
+  <dgm:styleLbl name="asst2">
+    <dgm:fillClrLst>
+      <a:schemeClr val="accent5"/>
+    </dgm:fillClrLst>
+    <dgm:linClrLst meth="repeat">
+      <a:schemeClr val="lt1"/>
+    </dgm:linClrLst>
+    <dgm:effectClrLst/>
+    <dgm:txLinClrLst/>
+    <dgm:txFillClrLst/>
+    <dgm:txEffectClrLst/>
+  </dgm:styleLbl>
+  <dgm:styleLbl name="asst3">
+    <dgm:fillClrLst>
+      <a:schemeClr val="accent6"/>
+    </dgm:fillClrLst>
+    <dgm:linClrLst meth="repeat">
+      <a:schemeClr val="lt1"/>
+    </dgm:linClrLst>
+    <dgm:effectClrLst/>
+    <dgm:txLinClrLst/>
+    <dgm:txFillClrLst/>
+    <dgm:txEffectClrLst/>
+  </dgm:styleLbl>
+  <dgm:styleLbl name="asst4">
+    <dgm:fillClrLst>
+      <a:schemeClr val="accent1"/>
+    </dgm:fillClrLst>
+    <dgm:linClrLst meth="repeat">
+      <a:schemeClr val="lt1"/>
+    </dgm:linClrLst>
+    <dgm:effectClrLst/>
+    <dgm:txLinClrLst/>
+    <dgm:txFillClrLst/>
+    <dgm:txEffectClrLst/>
+  </dgm:styleLbl>
+  <dgm:styleLbl name="parChTrans2D1">
+    <dgm:fillClrLst meth="repeat">
+      <a:schemeClr val="accent2"/>
+    </dgm:fillClrLst>
+    <dgm:linClrLst meth="repeat">
+      <a:schemeClr val="lt1"/>
+    </dgm:linClrLst>
+    <dgm:effectClrLst/>
+    <dgm:txLinClrLst/>
+    <dgm:txFillClrLst meth="repeat">
+      <a:schemeClr val="lt1"/>
+    </dgm:txFillClrLst>
+    <dgm:txEffectClrLst/>
+  </dgm:styleLbl>
+  <dgm:styleLbl name="parChTrans2D2">
+    <dgm:fillClrLst meth="repeat">
+      <a:schemeClr val="accent3"/>
+    </dgm:fillClrLst>
+    <dgm:linClrLst meth="repeat">
+      <a:schemeClr val="lt1"/>
+    </dgm:linClrLst>
+    <dgm:effectClrLst/>
+    <dgm:txLinClrLst/>
+    <dgm:txFillClrLst/>
+    <dgm:txEffectClrLst/>
+  </dgm:styleLbl>
+  <dgm:styleLbl name="parChTrans2D3">
+    <dgm:fillClrLst meth="repeat">
+      <a:schemeClr val="accent4"/>
+    </dgm:fillClrLst>
+    <dgm:linClrLst meth="repeat">
+      <a:schemeClr val="lt1"/>
+    </dgm:linClrLst>
+    <dgm:effectClrLst/>
+    <dgm:txLinClrLst/>
+    <dgm:txFillClrLst/>
+    <dgm:txEffectClrLst/>
+  </dgm:styleLbl>
+  <dgm:styleLbl name="parChTrans2D4">
+    <dgm:fillClrLst meth="repeat">
+      <a:schemeClr val="accent5"/>
+    </dgm:fillClrLst>
+    <dgm:linClrLst meth="repeat">
+      <a:schemeClr val="lt1"/>
+    </dgm:linClrLst>
+    <dgm:effectClrLst/>
+    <dgm:txLinClrLst/>
+    <dgm:txFillClrLst meth="repeat">
+      <a:schemeClr val="lt1"/>
+    </dgm:txFillClrLst>
+    <dgm:txEffectClrLst/>
+  </dgm:styleLbl>
+  <dgm:styleLbl name="parChTrans1D1">
+    <dgm:fillClrLst meth="repeat">
+      <a:schemeClr val="accent3"/>
+    </dgm:fillClrLst>
+    <dgm:linClrLst meth="repeat">
+      <a:schemeClr val="accent3"/>
+    </dgm:linClrLst>
+    <dgm:effectClrLst/>
+    <dgm:txLinClrLst/>
+    <dgm:txFillClrLst meth="repeat">
+      <a:schemeClr val="tx1"/>
+    </dgm:txFillClrLst>
+    <dgm:txEffectClrLst/>
+  </dgm:styleLbl>
+  <dgm:styleLbl name="parChTrans1D2">
+    <dgm:fillClrLst meth="repeat">
+      <a:schemeClr val="accent2">
+        <a:tint val="90000"/>
+      </a:schemeClr>
+    </dgm:fillClrLst>
+    <dgm:linClrLst meth="repeat">
+      <a:schemeClr val="accent4"/>
+    </dgm:linClrLst>
+    <dgm:effectClrLst/>
+    <dgm:txLinClrLst/>
+    <dgm:txFillClrLst meth="repeat">
+      <a:schemeClr val="tx1"/>
+    </dgm:txFillClrLst>
+    <dgm:txEffectClrLst/>
+  </dgm:styleLbl>
+  <dgm:styleLbl name="parChTrans1D3">
+    <dgm:fillClrLst meth="repeat">
+      <a:schemeClr val="accent2">
+        <a:tint val="70000"/>
+      </a:schemeClr>
+    </dgm:fillClrLst>
+    <dgm:linClrLst meth="repeat">
+      <a:schemeClr val="accent5"/>
+    </dgm:linClrLst>
+    <dgm:effectClrLst/>
+    <dgm:txLinClrLst/>
+    <dgm:txFillClrLst meth="repeat">
+      <a:schemeClr val="tx1"/>
+    </dgm:txFillClrLst>
+    <dgm:txEffectClrLst/>
+  </dgm:styleLbl>
+  <dgm:styleLbl name="parChTrans1D4">
+    <dgm:fillClrLst meth="repeat">
+      <a:schemeClr val="accent6">
+        <a:tint val="50000"/>
+      </a:schemeClr>
+    </dgm:fillClrLst>
+    <dgm:linClrLst meth="repeat">
+      <a:schemeClr val="accent6"/>
+    </dgm:linClrLst>
+    <dgm:effectClrLst/>
+    <dgm:txLinClrLst/>
+    <dgm:txFillClrLst meth="repeat">
+      <a:schemeClr val="tx1"/>
+    </dgm:txFillClrLst>
+    <dgm:txEffectClrLst/>
+  </dgm:styleLbl>
+  <dgm:styleLbl name="fgAcc1">
+    <dgm:fillClrLst meth="repeat">
+      <a:schemeClr val="lt1">
+        <a:alpha val="90000"/>
+      </a:schemeClr>
+    </dgm:fillClrLst>
+    <dgm:linClrLst>
+      <a:schemeClr val="accent3"/>
+      <a:schemeClr val="accent4"/>
+    </dgm:linClrLst>
+    <dgm:effectClrLst/>
+    <dgm:txLinClrLst/>
+    <dgm:txFillClrLst meth="repeat">
+      <a:schemeClr val="dk1"/>
+    </dgm:txFillClrLst>
+    <dgm:txEffectClrLst/>
+  </dgm:styleLbl>
+  <dgm:styleLbl name="conFgAcc1">
+    <dgm:fillClrLst meth="repeat">
+      <a:schemeClr val="lt1">
+        <a:alpha val="90000"/>
+      </a:schemeClr>
+    </dgm:fillClrLst>
+    <dgm:linClrLst>
+      <a:schemeClr val="accent3"/>
+      <a:schemeClr val="accent4"/>
+    </dgm:linClrLst>
+    <dgm:effectClrLst/>
+    <dgm:txLinClrLst/>
+    <dgm:txFillClrLst meth="repeat">
+      <a:schemeClr val="dk1"/>
+    </dgm:txFillClrLst>
+    <dgm:txEffectClrLst/>
+  </dgm:styleLbl>
+  <dgm:styleLbl name="alignAcc1">
+    <dgm:fillClrLst meth="repeat">
+      <a:schemeClr val="lt1">
+        <a:alpha val="90000"/>
+      </a:schemeClr>
+    </dgm:fillClrLst>
+    <dgm:linClrLst>
+      <a:schemeClr val="accent3"/>
+      <a:schemeClr val="accent4"/>
+    </dgm:linClrLst>
+    <dgm:effectClrLst/>
+    <dgm:txLinClrLst/>
+    <dgm:txFillClrLst meth="repeat">
+      <a:schemeClr val="dk1"/>
+    </dgm:txFillClrLst>
+    <dgm:txEffectClrLst/>
+  </dgm:styleLbl>
+  <dgm:styleLbl name="trAlignAcc1">
+    <dgm:fillClrLst meth="repeat">
+      <a:schemeClr val="lt1">
+        <a:alpha val="40000"/>
+      </a:schemeClr>
+    </dgm:fillClrLst>
+    <dgm:linClrLst meth="repeat">
+      <a:schemeClr val="accent2"/>
+    </dgm:linClrLst>
+    <dgm:effectClrLst/>
+    <dgm:txLinClrLst/>
+    <dgm:txFillClrLst meth="repeat">
+      <a:schemeClr val="dk1"/>
+    </dgm:txFillClrLst>
+    <dgm:txEffectClrLst/>
+  </dgm:styleLbl>
+  <dgm:styleLbl name="bgAcc1">
+    <dgm:fillClrLst meth="repeat">
+      <a:schemeClr val="lt1">
+        <a:alpha val="90000"/>
+      </a:schemeClr>
+    </dgm:fillClrLst>
+    <dgm:linClrLst>
+      <a:schemeClr val="accent3"/>
+      <a:schemeClr val="accent4"/>
+    </dgm:linClrLst>
+    <dgm:effectClrLst/>
+    <dgm:txLinClrLst/>
+    <dgm:txFillClrLst meth="repeat">
+      <a:schemeClr val="dk1"/>
+    </dgm:txFillClrLst>
+    <dgm:txEffectClrLst/>
+  </dgm:styleLbl>
+  <dgm:styleLbl name="solidFgAcc1">
+    <dgm:fillClrLst meth="repeat">
+      <a:schemeClr val="lt1"/>
+    </dgm:fillClrLst>
+    <dgm:linClrLst>
+      <a:schemeClr val="accent3"/>
+      <a:schemeClr val="accent4"/>
+    </dgm:linClrLst>
+    <dgm:effectClrLst/>
+    <dgm:txLinClrLst/>
+    <dgm:txFillClrLst meth="repeat">
+      <a:schemeClr val="dk1"/>
+    </dgm:txFillClrLst>
+    <dgm:txEffectClrLst/>
+  </dgm:styleLbl>
+  <dgm:styleLbl name="solidAlignAcc1">
+    <dgm:fillClrLst meth="repeat">
+      <a:schemeClr val="lt1"/>
+    </dgm:fillClrLst>
+    <dgm:linClrLst>
+      <a:schemeClr val="accent3"/>
+      <a:schemeClr val="accent4"/>
+    </dgm:linClrLst>
+    <dgm:effectClrLst/>
+    <dgm:txLinClrLst/>
+    <dgm:txFillClrLst meth="repeat">
+      <a:schemeClr val="dk1"/>
+    </dgm:txFillClrLst>
+    <dgm:txEffectClrLst/>
+  </dgm:styleLbl>
+  <dgm:styleLbl name="solidBgAcc1">
+    <dgm:fillClrLst meth="repeat">
+      <a:schemeClr val="lt1"/>
+    </dgm:fillClrLst>
+    <dgm:linClrLst>
+      <a:schemeClr val="accent3"/>
+      <a:schemeClr val="accent4"/>
+    </dgm:linClrLst>
+    <dgm:effectClrLst/>
+    <dgm:txLinClrLst/>
+    <dgm:txFillClrLst meth="repeat">
+      <a:schemeClr val="dk1"/>
+    </dgm:txFillClrLst>
+    <dgm:txEffectClrLst/>
+  </dgm:styleLbl>
+  <dgm:styleLbl name="fgAccFollowNode1">
+    <dgm:fillClrLst>
+      <a:schemeClr val="accent3">
+        <a:tint val="40000"/>
+        <a:alpha val="90000"/>
+      </a:schemeClr>
+      <a:schemeClr val="accent4">
+        <a:tint val="40000"/>
+        <a:alpha val="90000"/>
+      </a:schemeClr>
+    </dgm:fillClrLst>
+    <dgm:linClrLst>
+      <a:schemeClr val="accent3">
+        <a:tint val="40000"/>
+        <a:alpha val="90000"/>
+      </a:schemeClr>
+      <a:schemeClr val="accent4">
+        <a:tint val="40000"/>
+        <a:alpha val="90000"/>
+      </a:schemeClr>
+    </dgm:linClrLst>
+    <dgm:effectClrLst/>
+    <dgm:txLinClrLst/>
+    <dgm:txFillClrLst meth="repeat">
+      <a:schemeClr val="dk1"/>
+    </dgm:txFillClrLst>
+    <dgm:txEffectClrLst/>
+  </dgm:styleLbl>
+  <dgm:styleLbl name="alignAccFollowNode1">
+    <dgm:fillClrLst>
+      <a:schemeClr val="accent3">
+        <a:tint val="40000"/>
+        <a:alpha val="90000"/>
+      </a:schemeClr>
+      <a:schemeClr val="accent4">
+        <a:tint val="40000"/>
+        <a:alpha val="90000"/>
+      </a:schemeClr>
+    </dgm:fillClrLst>
+    <dgm:linClrLst>
+      <a:schemeClr val="accent3">
+        <a:tint val="40000"/>
+        <a:alpha val="90000"/>
+      </a:schemeClr>
+      <a:schemeClr val="accent4">
+        <a:tint val="40000"/>
+        <a:alpha val="90000"/>
+      </a:schemeClr>
+    </dgm:linClrLst>
+    <dgm:effectClrLst/>
+    <dgm:txLinClrLst/>
+    <dgm:txFillClrLst meth="repeat">
+      <a:schemeClr val="dk1"/>
+    </dgm:txFillClrLst>
+    <dgm:txEffectClrLst/>
+  </dgm:styleLbl>
+  <dgm:styleLbl name="bgAccFollowNode1">
+    <dgm:fillClrLst>
+      <a:schemeClr val="accent3">
+        <a:tint val="40000"/>
+        <a:alpha val="90000"/>
+      </a:schemeClr>
+      <a:schemeClr val="accent4">
+        <a:tint val="40000"/>
+        <a:alpha val="90000"/>
+      </a:schemeClr>
+    </dgm:fillClrLst>
+    <dgm:linClrLst>
+      <a:schemeClr val="accent3">
+        <a:tint val="40000"/>
+        <a:alpha val="90000"/>
+      </a:schemeClr>
+      <a:schemeClr val="accent4">
+        <a:tint val="40000"/>
+        <a:alpha val="90000"/>
+      </a:schemeClr>
+    </dgm:linClrLst>
+    <dgm:effectClrLst/>
+    <dgm:txLinClrLst/>
+    <dgm:txFillClrLst meth="repeat">
+      <a:schemeClr val="dk1"/>
+    </dgm:txFillClrLst>
+    <dgm:txEffectClrLst/>
+  </dgm:styleLbl>
+  <dgm:styleLbl name="fgAcc0">
+    <dgm:fillClrLst meth="repeat">
+      <a:schemeClr val="lt1">
+        <a:alpha val="90000"/>
+      </a:schemeClr>
+    </dgm:fillClrLst>
+    <dgm:linClrLst>
+      <a:schemeClr val="accent2"/>
+    </dgm:linClrLst>
+    <dgm:effectClrLst/>
+    <dgm:txLinClrLst/>
+    <dgm:txFillClrLst meth="repeat">
+      <a:schemeClr val="dk1"/>
+    </dgm:txFillClrLst>
+    <dgm:txEffectClrLst/>
+  </dgm:styleLbl>
+  <dgm:styleLbl name="fgAcc2">
+    <dgm:fillClrLst meth="repeat">
+      <a:schemeClr val="lt1">
+        <a:alpha val="90000"/>
+      </a:schemeClr>
+    </dgm:fillClrLst>
+    <dgm:linClrLst>
+      <a:schemeClr val="accent4"/>
+    </dgm:linClrLst>
+    <dgm:effectClrLst/>
+    <dgm:txLinClrLst/>
+    <dgm:txFillClrLst meth="repeat">
+      <a:schemeClr val="dk1"/>
+    </dgm:txFillClrLst>
+    <dgm:txEffectClrLst/>
+  </dgm:styleLbl>
+  <dgm:styleLbl name="fgAcc3">
+    <dgm:fillClrLst meth="repeat">
+      <a:schemeClr val="lt1">
+        <a:alpha val="90000"/>
+      </a:schemeClr>
+    </dgm:fillClrLst>
+    <dgm:linClrLst>
+      <a:schemeClr val="accent5"/>
+    </dgm:linClrLst>
+    <dgm:effectClrLst/>
+    <dgm:txLinClrLst/>
+    <dgm:txFillClrLst meth="repeat">
+      <a:schemeClr val="dk1"/>
+    </dgm:txFillClrLst>
+    <dgm:txEffectClrLst/>
+  </dgm:styleLbl>
+  <dgm:styleLbl name="fgAcc4">
+    <dgm:fillClrLst meth="repeat">
+      <a:schemeClr val="lt1">
+        <a:alpha val="90000"/>
+      </a:schemeClr>
+    </dgm:fillClrLst>
+    <dgm:linClrLst>
+      <a:schemeClr val="accent6"/>
+    </dgm:linClrLst>
+    <dgm:effectClrLst/>
+    <dgm:txLinClrLst/>
+    <dgm:txFillClrLst meth="repeat">
+      <a:schemeClr val="dk1"/>
+    </dgm:txFillClrLst>
+    <dgm:txEffectClrLst/>
+  </dgm:styleLbl>
+  <dgm:styleLbl name="bgShp">
+    <dgm:fillClrLst meth="repeat">
+      <a:schemeClr val="accent3">
+        <a:tint val="40000"/>
+      </a:schemeClr>
+    </dgm:fillClrLst>
+    <dgm:linClrLst meth="repeat">
+      <a:schemeClr val="dk1"/>
+    </dgm:linClrLst>
+    <dgm:effectClrLst/>
+    <dgm:txLinClrLst/>
+    <dgm:txFillClrLst meth="repeat">
+      <a:schemeClr val="dk1"/>
+    </dgm:txFillClrLst>
+    <dgm:txEffectClrLst/>
+  </dgm:styleLbl>
+  <dgm:styleLbl name="dkBgShp">
+    <dgm:fillClrLst meth="repeat">
+      <a:schemeClr val="accent3">
+        <a:shade val="90000"/>
+      </a:schemeClr>
+    </dgm:fillClrLst>
+    <dgm:linClrLst meth="repeat">
+      <a:schemeClr val="dk1"/>
+    </dgm:linClrLst>
+    <dgm:effectClrLst/>
+    <dgm:txLinClrLst/>
+    <dgm:txFillClrLst meth="repeat">
+      <a:schemeClr val="lt1"/>
+    </dgm:txFillClrLst>
+    <dgm:txEffectClrLst/>
+  </dgm:styleLbl>
+  <dgm:styleLbl name="trBgShp">
+    <dgm:fillClrLst meth="repeat">
+      <a:schemeClr val="accent2">
+        <a:tint val="50000"/>
+        <a:alpha val="40000"/>
+      </a:schemeClr>
+    </dgm:fillClrLst>
+    <dgm:linClrLst meth="repeat">
+      <a:schemeClr val="accent3"/>
+    </dgm:linClrLst>
+    <dgm:effectClrLst/>
+    <dgm:txLinClrLst/>
+    <dgm:txFillClrLst meth="repeat">
+      <a:schemeClr val="lt1"/>
+    </dgm:txFillClrLst>
+    <dgm:txEffectClrLst/>
+  </dgm:styleLbl>
+  <dgm:styleLbl name="fgShp">
+    <dgm:fillClrLst meth="repeat">
+      <a:schemeClr val="accent3">
+        <a:tint val="40000"/>
+      </a:schemeClr>
+    </dgm:fillClrLst>
+    <dgm:linClrLst meth="repeat">
+      <a:schemeClr val="lt1"/>
+    </dgm:linClrLst>
+    <dgm:effectClrLst/>
+    <dgm:txLinClrLst/>
+    <dgm:txFillClrLst meth="repeat">
+      <a:schemeClr val="dk1"/>
+    </dgm:txFillClrLst>
+    <dgm:txEffectClrLst/>
+  </dgm:styleLbl>
+  <dgm:styleLbl name="revTx">
+    <dgm:fillClrLst meth="repeat">
+      <a:schemeClr val="lt1">
+        <a:alpha val="0"/>
+      </a:schemeClr>
+    </dgm:fillClrLst>
+    <dgm:linClrLst meth="repeat">
+      <a:schemeClr val="dk1">
+        <a:alpha val="0"/>
+      </a:schemeClr>
+    </dgm:linClrLst>
+    <dgm:effectClrLst/>
+    <dgm:txLinClrLst/>
+    <dgm:txFillClrLst meth="repeat">
+      <a:schemeClr val="tx1"/>
+    </dgm:txFillClrLst>
+    <dgm:txEffectClrLst/>
+  </dgm:styleLbl>
+</dgm:colorsDef>
+</file>
+
+<file path=ppt/diagrams/colors7.xml><?xml version="1.0" encoding="utf-8"?>
+<dgm:colorsDef xmlns:dgm="http://schemas.openxmlformats.org/drawingml/2006/diagram" xmlns:a="http://schemas.openxmlformats.org/drawingml/2006/main" uniqueId="urn:microsoft.com/office/officeart/2005/8/colors/colorful3">
+  <dgm:title val=""/>
+  <dgm:desc val=""/>
+  <dgm:catLst>
+    <dgm:cat type="colorful" pri="10300"/>
+  </dgm:catLst>
+  <dgm:styleLbl name="node0">
+    <dgm:fillClrLst meth="repeat">
+      <a:schemeClr val="accent2"/>
+    </dgm:fillClrLst>
+    <dgm:linClrLst meth="repeat">
+      <a:schemeClr val="lt1"/>
+    </dgm:linClrLst>
+    <dgm:effectClrLst/>
+    <dgm:txLinClrLst/>
+    <dgm:txFillClrLst/>
+    <dgm:txEffectClrLst/>
+  </dgm:styleLbl>
+  <dgm:styleLbl name="node1">
+    <dgm:fillClrLst>
+      <a:schemeClr val="accent3"/>
+      <a:schemeClr val="accent4"/>
+    </dgm:fillClrLst>
+    <dgm:linClrLst meth="repeat">
+      <a:schemeClr val="lt1"/>
+    </dgm:linClrLst>
+    <dgm:effectClrLst/>
+    <dgm:txLinClrLst/>
+    <dgm:txFillClrLst/>
+    <dgm:txEffectClrLst/>
+  </dgm:styleLbl>
+  <dgm:styleLbl name="alignNode1">
+    <dgm:fillClrLst>
+      <a:schemeClr val="accent3"/>
+      <a:schemeClr val="accent4"/>
+    </dgm:fillClrLst>
+    <dgm:linClrLst>
+      <a:schemeClr val="accent3"/>
+      <a:schemeClr val="accent4"/>
+    </dgm:linClrLst>
+    <dgm:effectClrLst/>
+    <dgm:txLinClrLst/>
+    <dgm:txFillClrLst/>
+    <dgm:txEffectClrLst/>
+  </dgm:styleLbl>
+  <dgm:styleLbl name="lnNode1">
+    <dgm:fillClrLst>
+      <a:schemeClr val="accent3"/>
+      <a:schemeClr val="accent4"/>
+    </dgm:fillClrLst>
+    <dgm:linClrLst meth="repeat">
+      <a:schemeClr val="lt1"/>
+    </dgm:linClrLst>
+    <dgm:effectClrLst/>
+    <dgm:txLinClrLst/>
+    <dgm:txFillClrLst/>
+    <dgm:txEffectClrLst/>
+  </dgm:styleLbl>
+  <dgm:styleLbl name="vennNode1">
+    <dgm:fillClrLst>
+      <a:schemeClr val="accent3">
+        <a:alpha val="50000"/>
+      </a:schemeClr>
+      <a:schemeClr val="accent4">
+        <a:alpha val="50000"/>
+      </a:schemeClr>
+    </dgm:fillClrLst>
+    <dgm:linClrLst meth="repeat">
+      <a:schemeClr val="lt1"/>
+    </dgm:linClrLst>
+    <dgm:effectClrLst/>
+    <dgm:txLinClrLst/>
+    <dgm:txFillClrLst/>
+    <dgm:txEffectClrLst/>
+  </dgm:styleLbl>
+  <dgm:styleLbl name="node2">
+    <dgm:fillClrLst>
+      <a:schemeClr val="accent4"/>
+    </dgm:fillClrLst>
+    <dgm:linClrLst meth="repeat">
+      <a:schemeClr val="lt1"/>
+    </dgm:linClrLst>
+    <dgm:effectClrLst/>
+    <dgm:txLinClrLst/>
+    <dgm:txFillClrLst/>
+    <dgm:txEffectClrLst/>
+  </dgm:styleLbl>
+  <dgm:styleLbl name="node3">
+    <dgm:fillClrLst>
+      <a:schemeClr val="accent5"/>
+    </dgm:fillClrLst>
+    <dgm:linClrLst meth="repeat">
+      <a:schemeClr val="lt1"/>
+    </dgm:linClrLst>
+    <dgm:effectClrLst/>
+    <dgm:txLinClrLst/>
+    <dgm:txFillClrLst/>
+    <dgm:txEffectClrLst/>
+  </dgm:styleLbl>
+  <dgm:styleLbl name="node4">
+    <dgm:fillClrLst>
+      <a:schemeClr val="accent6"/>
+    </dgm:fillClrLst>
+    <dgm:linClrLst meth="repeat">
+      <a:schemeClr val="lt1"/>
+    </dgm:linClrLst>
+    <dgm:effectClrLst/>
+    <dgm:txLinClrLst/>
+    <dgm:txFillClrLst/>
+    <dgm:txEffectClrLst/>
+  </dgm:styleLbl>
+  <dgm:styleLbl name="fgImgPlace1">
+    <dgm:fillClrLst>
+      <a:schemeClr val="accent3">
+        <a:tint val="50000"/>
+      </a:schemeClr>
+      <a:schemeClr val="accent4">
+        <a:tint val="50000"/>
+      </a:schemeClr>
+    </dgm:fillClrLst>
+    <dgm:linClrLst meth="repeat">
+      <a:schemeClr val="lt1"/>
+    </dgm:linClrLst>
+    <dgm:effectClrLst/>
+    <dgm:txLinClrLst/>
+    <dgm:txFillClrLst meth="repeat">
+      <a:schemeClr val="lt1"/>
+    </dgm:txFillClrLst>
+    <dgm:txEffectClrLst/>
+  </dgm:styleLbl>
+  <dgm:styleLbl name="alignImgPlace1">
+    <dgm:fillClrLst>
+      <a:schemeClr val="accent3">
+        <a:tint val="50000"/>
+      </a:schemeClr>
+      <a:schemeClr val="accent4">
+        <a:tint val="20000"/>
+      </a:schemeClr>
+    </dgm:fillClrLst>
+    <dgm:linClrLst meth="repeat">
+      <a:schemeClr val="lt1"/>
+    </dgm:linClrLst>
+    <dgm:effectClrLst/>
+    <dgm:txLinClrLst/>
+    <dgm:txFillClrLst meth="repeat">
+      <a:schemeClr val="lt1"/>
+    </dgm:txFillClrLst>
+    <dgm:txEffectClrLst/>
+  </dgm:styleLbl>
+  <dgm:styleLbl name="bgImgPlace1">
+    <dgm:fillClrLst>
+      <a:schemeClr val="accent3">
+        <a:tint val="50000"/>
+      </a:schemeClr>
+      <a:schemeClr val="accent4">
+        <a:tint val="20000"/>
+      </a:schemeClr>
+    </dgm:fillClrLst>
+    <dgm:linClrLst meth="repeat">
+      <a:schemeClr val="lt1"/>
+    </dgm:linClrLst>
+    <dgm:effectClrLst/>
+    <dgm:txLinClrLst/>
+    <dgm:txFillClrLst meth="repeat">
+      <a:schemeClr val="lt1"/>
+    </dgm:txFillClrLst>
+    <dgm:txEffectClrLst/>
+  </dgm:styleLbl>
+  <dgm:styleLbl name="sibTrans2D1">
+    <dgm:fillClrLst>
+      <a:schemeClr val="accent3"/>
+      <a:schemeClr val="accent4"/>
+    </dgm:fillClrLst>
+    <dgm:linClrLst meth="repeat">
+      <a:schemeClr val="lt1"/>
+    </dgm:linClrLst>
+    <dgm:effectClrLst/>
+    <dgm:txLinClrLst/>
+    <dgm:txFillClrLst/>
+    <dgm:txEffectClrLst/>
+  </dgm:styleLbl>
+  <dgm:styleLbl name="fgSibTrans2D1">
+    <dgm:fillClrLst>
+      <a:schemeClr val="accent3"/>
+      <a:schemeClr val="accent4"/>
+    </dgm:fillClrLst>
+    <dgm:linClrLst meth="repeat">
+      <a:schemeClr val="lt1"/>
+    </dgm:linClrLst>
+    <dgm:effectClrLst/>
+    <dgm:txLinClrLst/>
+    <dgm:txFillClrLst meth="repeat">
+      <a:schemeClr val="lt1"/>
+    </dgm:txFillClrLst>
+    <dgm:txEffectClrLst/>
+  </dgm:styleLbl>
+  <dgm:styleLbl name="bgSibTrans2D1">
+    <dgm:fillClrLst>
+      <a:schemeClr val="accent3"/>
+      <a:schemeClr val="accent4"/>
+    </dgm:fillClrLst>
+    <dgm:linClrLst meth="repeat">
+      <a:schemeClr val="lt1"/>
+    </dgm:linClrLst>
+    <dgm:effectClrLst/>
+    <dgm:txLinClrLst/>
+    <dgm:txFillClrLst meth="repeat">
+      <a:schemeClr val="lt1"/>
+    </dgm:txFillClrLst>
+    <dgm:txEffectClrLst/>
+  </dgm:styleLbl>
+  <dgm:styleLbl name="sibTrans1D1">
+    <dgm:fillClrLst/>
+    <dgm:linClrLst>
+      <a:schemeClr val="accent3"/>
+      <a:schemeClr val="accent4"/>
+    </dgm:linClrLst>
+    <dgm:effectClrLst/>
+    <dgm:txLinClrLst/>
+    <dgm:txFillClrLst meth="repeat">
+      <a:schemeClr val="tx1"/>
+    </dgm:txFillClrLst>
+    <dgm:txEffectClrLst/>
+  </dgm:styleLbl>
+  <dgm:styleLbl name="callout">
+    <dgm:fillClrLst meth="repeat">
+      <a:schemeClr val="accent3"/>
+    </dgm:fillClrLst>
+    <dgm:linClrLst meth="repeat">
+      <a:schemeClr val="accent3">
+        <a:tint val="50000"/>
+      </a:schemeClr>
+    </dgm:linClrLst>
+    <dgm:effectClrLst/>
+    <dgm:txLinClrLst/>
+    <dgm:txFillClrLst meth="repeat">
+      <a:schemeClr val="tx1"/>
+    </dgm:txFillClrLst>
+    <dgm:txEffectClrLst/>
+  </dgm:styleLbl>
+  <dgm:styleLbl name="asst0">
+    <dgm:fillClrLst meth="repeat">
+      <a:schemeClr val="accent3"/>
+    </dgm:fillClrLst>
+    <dgm:linClrLst meth="repeat">
+      <a:schemeClr val="lt1">
+        <a:shade val="80000"/>
+      </a:schemeClr>
+    </dgm:linClrLst>
+    <dgm:effectClrLst/>
+    <dgm:txLinClrLst/>
+    <dgm:txFillClrLst/>
+    <dgm:txEffectClrLst/>
+  </dgm:styleLbl>
+  <dgm:styleLbl name="asst1">
+    <dgm:fillClrLst meth="repeat">
+      <a:schemeClr val="accent4"/>
+    </dgm:fillClrLst>
+    <dgm:linClrLst meth="repeat">
+      <a:schemeClr val="lt1">
+        <a:shade val="80000"/>
+      </a:schemeClr>
+    </dgm:linClrLst>
+    <dgm:effectClrLst/>
+    <dgm:txLinClrLst/>
+    <dgm:txFillClrLst/>
+    <dgm:txEffectClrLst/>
+  </dgm:styleLbl>
+  <dgm:styleLbl name="asst2">
+    <dgm:fillClrLst>
+      <a:schemeClr val="accent5"/>
+    </dgm:fillClrLst>
+    <dgm:linClrLst meth="repeat">
+      <a:schemeClr val="lt1"/>
+    </dgm:linClrLst>
+    <dgm:effectClrLst/>
+    <dgm:txLinClrLst/>
+    <dgm:txFillClrLst/>
+    <dgm:txEffectClrLst/>
+  </dgm:styleLbl>
+  <dgm:styleLbl name="asst3">
+    <dgm:fillClrLst>
+      <a:schemeClr val="accent6"/>
+    </dgm:fillClrLst>
+    <dgm:linClrLst meth="repeat">
+      <a:schemeClr val="lt1"/>
+    </dgm:linClrLst>
+    <dgm:effectClrLst/>
+    <dgm:txLinClrLst/>
+    <dgm:txFillClrLst/>
+    <dgm:txEffectClrLst/>
+  </dgm:styleLbl>
+  <dgm:styleLbl name="asst4">
+    <dgm:fillClrLst>
+      <a:schemeClr val="accent1"/>
+    </dgm:fillClrLst>
+    <dgm:linClrLst meth="repeat">
+      <a:schemeClr val="lt1"/>
+    </dgm:linClrLst>
+    <dgm:effectClrLst/>
+    <dgm:txLinClrLst/>
+    <dgm:txFillClrLst/>
+    <dgm:txEffectClrLst/>
+  </dgm:styleLbl>
+  <dgm:styleLbl name="parChTrans2D1">
+    <dgm:fillClrLst meth="repeat">
+      <a:schemeClr val="accent2"/>
+    </dgm:fillClrLst>
+    <dgm:linClrLst meth="repeat">
+      <a:schemeClr val="lt1"/>
+    </dgm:linClrLst>
+    <dgm:effectClrLst/>
+    <dgm:txLinClrLst/>
+    <dgm:txFillClrLst meth="repeat">
+      <a:schemeClr val="lt1"/>
+    </dgm:txFillClrLst>
+    <dgm:txEffectClrLst/>
+  </dgm:styleLbl>
+  <dgm:styleLbl name="parChTrans2D2">
+    <dgm:fillClrLst meth="repeat">
+      <a:schemeClr val="accent3"/>
+    </dgm:fillClrLst>
+    <dgm:linClrLst meth="repeat">
+      <a:schemeClr val="lt1"/>
+    </dgm:linClrLst>
+    <dgm:effectClrLst/>
+    <dgm:txLinClrLst/>
+    <dgm:txFillClrLst/>
+    <dgm:txEffectClrLst/>
+  </dgm:styleLbl>
+  <dgm:styleLbl name="parChTrans2D3">
+    <dgm:fillClrLst meth="repeat">
+      <a:schemeClr val="accent4"/>
+    </dgm:fillClrLst>
+    <dgm:linClrLst meth="repeat">
+      <a:schemeClr val="lt1"/>
+    </dgm:linClrLst>
+    <dgm:effectClrLst/>
+    <dgm:txLinClrLst/>
+    <dgm:txFillClrLst/>
+    <dgm:txEffectClrLst/>
+  </dgm:styleLbl>
+  <dgm:styleLbl name="parChTrans2D4">
+    <dgm:fillClrLst meth="repeat">
+      <a:schemeClr val="accent5"/>
+    </dgm:fillClrLst>
+    <dgm:linClrLst meth="repeat">
+      <a:schemeClr val="lt1"/>
+    </dgm:linClrLst>
+    <dgm:effectClrLst/>
+    <dgm:txLinClrLst/>
+    <dgm:txFillClrLst meth="repeat">
+      <a:schemeClr val="lt1"/>
+    </dgm:txFillClrLst>
+    <dgm:txEffectClrLst/>
+  </dgm:styleLbl>
+  <dgm:styleLbl name="parChTrans1D1">
+    <dgm:fillClrLst meth="repeat">
+      <a:schemeClr val="accent3"/>
+    </dgm:fillClrLst>
+    <dgm:linClrLst meth="repeat">
+      <a:schemeClr val="accent3"/>
+    </dgm:linClrLst>
+    <dgm:effectClrLst/>
+    <dgm:txLinClrLst/>
+    <dgm:txFillClrLst meth="repeat">
+      <a:schemeClr val="tx1"/>
+    </dgm:txFillClrLst>
+    <dgm:txEffectClrLst/>
+  </dgm:styleLbl>
+  <dgm:styleLbl name="parChTrans1D2">
+    <dgm:fillClrLst meth="repeat">
+      <a:schemeClr val="accent2">
+        <a:tint val="90000"/>
+      </a:schemeClr>
+    </dgm:fillClrLst>
+    <dgm:linClrLst meth="repeat">
+      <a:schemeClr val="accent4"/>
+    </dgm:linClrLst>
+    <dgm:effectClrLst/>
+    <dgm:txLinClrLst/>
+    <dgm:txFillClrLst meth="repeat">
+      <a:schemeClr val="tx1"/>
+    </dgm:txFillClrLst>
+    <dgm:txEffectClrLst/>
+  </dgm:styleLbl>
+  <dgm:styleLbl name="parChTrans1D3">
+    <dgm:fillClrLst meth="repeat">
+      <a:schemeClr val="accent2">
+        <a:tint val="70000"/>
+      </a:schemeClr>
+    </dgm:fillClrLst>
+    <dgm:linClrLst meth="repeat">
+      <a:schemeClr val="accent5"/>
+    </dgm:linClrLst>
+    <dgm:effectClrLst/>
+    <dgm:txLinClrLst/>
+    <dgm:txFillClrLst meth="repeat">
+      <a:schemeClr val="tx1"/>
+    </dgm:txFillClrLst>
+    <dgm:txEffectClrLst/>
+  </dgm:styleLbl>
+  <dgm:styleLbl name="parChTrans1D4">
+    <dgm:fillClrLst meth="repeat">
+      <a:schemeClr val="accent6">
+        <a:tint val="50000"/>
+      </a:schemeClr>
+    </dgm:fillClrLst>
+    <dgm:linClrLst meth="repeat">
+      <a:schemeClr val="accent6"/>
+    </dgm:linClrLst>
+    <dgm:effectClrLst/>
+    <dgm:txLinClrLst/>
+    <dgm:txFillClrLst meth="repeat">
+      <a:schemeClr val="tx1"/>
+    </dgm:txFillClrLst>
+    <dgm:txEffectClrLst/>
+  </dgm:styleLbl>
+  <dgm:styleLbl name="fgAcc1">
+    <dgm:fillClrLst meth="repeat">
+      <a:schemeClr val="lt1">
+        <a:alpha val="90000"/>
+      </a:schemeClr>
+    </dgm:fillClrLst>
+    <dgm:linClrLst>
+      <a:schemeClr val="accent3"/>
+      <a:schemeClr val="accent4"/>
+    </dgm:linClrLst>
+    <dgm:effectClrLst/>
+    <dgm:txLinClrLst/>
+    <dgm:txFillClrLst meth="repeat">
+      <a:schemeClr val="dk1"/>
+    </dgm:txFillClrLst>
+    <dgm:txEffectClrLst/>
+  </dgm:styleLbl>
+  <dgm:styleLbl name="conFgAcc1">
+    <dgm:fillClrLst meth="repeat">
+      <a:schemeClr val="lt1">
+        <a:alpha val="90000"/>
+      </a:schemeClr>
+    </dgm:fillClrLst>
+    <dgm:linClrLst>
+      <a:schemeClr val="accent3"/>
+      <a:schemeClr val="accent4"/>
+    </dgm:linClrLst>
+    <dgm:effectClrLst/>
+    <dgm:txLinClrLst/>
+    <dgm:txFillClrLst meth="repeat">
+      <a:schemeClr val="dk1"/>
+    </dgm:txFillClrLst>
+    <dgm:txEffectClrLst/>
+  </dgm:styleLbl>
+  <dgm:styleLbl name="alignAcc1">
+    <dgm:fillClrLst meth="repeat">
+      <a:schemeClr val="lt1">
+        <a:alpha val="90000"/>
+      </a:schemeClr>
+    </dgm:fillClrLst>
+    <dgm:linClrLst>
+      <a:schemeClr val="accent3"/>
+      <a:schemeClr val="accent4"/>
+    </dgm:linClrLst>
+    <dgm:effectClrLst/>
+    <dgm:txLinClrLst/>
+    <dgm:txFillClrLst meth="repeat">
+      <a:schemeClr val="dk1"/>
+    </dgm:txFillClrLst>
+    <dgm:txEffectClrLst/>
+  </dgm:styleLbl>
+  <dgm:styleLbl name="trAlignAcc1">
+    <dgm:fillClrLst meth="repeat">
+      <a:schemeClr val="lt1">
+        <a:alpha val="40000"/>
+      </a:schemeClr>
+    </dgm:fillClrLst>
+    <dgm:linClrLst meth="repeat">
+      <a:schemeClr val="accent2"/>
+    </dgm:linClrLst>
+    <dgm:effectClrLst/>
+    <dgm:txLinClrLst/>
+    <dgm:txFillClrLst meth="repeat">
+      <a:schemeClr val="dk1"/>
+    </dgm:txFillClrLst>
+    <dgm:txEffectClrLst/>
+  </dgm:styleLbl>
+  <dgm:styleLbl name="bgAcc1">
+    <dgm:fillClrLst meth="repeat">
+      <a:schemeClr val="lt1">
+        <a:alpha val="90000"/>
+      </a:schemeClr>
+    </dgm:fillClrLst>
+    <dgm:linClrLst>
+      <a:schemeClr val="accent3"/>
+      <a:schemeClr val="accent4"/>
+    </dgm:linClrLst>
+    <dgm:effectClrLst/>
+    <dgm:txLinClrLst/>
+    <dgm:txFillClrLst meth="repeat">
+      <a:schemeClr val="dk1"/>
+    </dgm:txFillClrLst>
+    <dgm:txEffectClrLst/>
+  </dgm:styleLbl>
+  <dgm:styleLbl name="solidFgAcc1">
+    <dgm:fillClrLst meth="repeat">
+      <a:schemeClr val="lt1"/>
+    </dgm:fillClrLst>
+    <dgm:linClrLst>
+      <a:schemeClr val="accent3"/>
+      <a:schemeClr val="accent4"/>
+    </dgm:linClrLst>
+    <dgm:effectClrLst/>
+    <dgm:txLinClrLst/>
+    <dgm:txFillClrLst meth="repeat">
+      <a:schemeClr val="dk1"/>
+    </dgm:txFillClrLst>
+    <dgm:txEffectClrLst/>
+  </dgm:styleLbl>
+  <dgm:styleLbl name="solidAlignAcc1">
+    <dgm:fillClrLst meth="repeat">
+      <a:schemeClr val="lt1"/>
+    </dgm:fillClrLst>
+    <dgm:linClrLst>
+      <a:schemeClr val="accent3"/>
+      <a:schemeClr val="accent4"/>
+    </dgm:linClrLst>
+    <dgm:effectClrLst/>
+    <dgm:txLinClrLst/>
+    <dgm:txFillClrLst meth="repeat">
+      <a:schemeClr val="dk1"/>
+    </dgm:txFillClrLst>
+    <dgm:txEffectClrLst/>
+  </dgm:styleLbl>
+  <dgm:styleLbl name="solidBgAcc1">
+    <dgm:fillClrLst meth="repeat">
+      <a:schemeClr val="lt1"/>
+    </dgm:fillClrLst>
+    <dgm:linClrLst>
+      <a:schemeClr val="accent3"/>
+      <a:schemeClr val="accent4"/>
+    </dgm:linClrLst>
+    <dgm:effectClrLst/>
+    <dgm:txLinClrLst/>
+    <dgm:txFillClrLst meth="repeat">
+      <a:schemeClr val="dk1"/>
+    </dgm:txFillClrLst>
+    <dgm:txEffectClrLst/>
+  </dgm:styleLbl>
+  <dgm:styleLbl name="fgAccFollowNode1">
+    <dgm:fillClrLst>
+      <a:schemeClr val="accent3">
+        <a:tint val="40000"/>
+        <a:alpha val="90000"/>
+      </a:schemeClr>
+      <a:schemeClr val="accent4">
+        <a:tint val="40000"/>
+        <a:alpha val="90000"/>
+      </a:schemeClr>
+    </dgm:fillClrLst>
+    <dgm:linClrLst>
+      <a:schemeClr val="accent3">
+        <a:tint val="40000"/>
+        <a:alpha val="90000"/>
+      </a:schemeClr>
+      <a:schemeClr val="accent4">
+        <a:tint val="40000"/>
+        <a:alpha val="90000"/>
+      </a:schemeClr>
+    </dgm:linClrLst>
+    <dgm:effectClrLst/>
+    <dgm:txLinClrLst/>
+    <dgm:txFillClrLst meth="repeat">
+      <a:schemeClr val="dk1"/>
+    </dgm:txFillClrLst>
+    <dgm:txEffectClrLst/>
+  </dgm:styleLbl>
+  <dgm:styleLbl name="alignAccFollowNode1">
+    <dgm:fillClrLst>
+      <a:schemeClr val="accent3">
+        <a:tint val="40000"/>
+        <a:alpha val="90000"/>
+      </a:schemeClr>
+      <a:schemeClr val="accent4">
+        <a:tint val="40000"/>
+        <a:alpha val="90000"/>
+      </a:schemeClr>
+    </dgm:fillClrLst>
+    <dgm:linClrLst>
+      <a:schemeClr val="accent3">
+        <a:tint val="40000"/>
+        <a:alpha val="90000"/>
+      </a:schemeClr>
+      <a:schemeClr val="accent4">
+        <a:tint val="40000"/>
+        <a:alpha val="90000"/>
+      </a:schemeClr>
+    </dgm:linClrLst>
+    <dgm:effectClrLst/>
+    <dgm:txLinClrLst/>
+    <dgm:txFillClrLst meth="repeat">
+      <a:schemeClr val="dk1"/>
+    </dgm:txFillClrLst>
+    <dgm:txEffectClrLst/>
+  </dgm:styleLbl>
+  <dgm:styleLbl name="bgAccFollowNode1">
+    <dgm:fillClrLst>
+      <a:schemeClr val="accent3">
+        <a:tint val="40000"/>
+        <a:alpha val="90000"/>
+      </a:schemeClr>
+      <a:schemeClr val="accent4">
+        <a:tint val="40000"/>
+        <a:alpha val="90000"/>
+      </a:schemeClr>
+    </dgm:fillClrLst>
+    <dgm:linClrLst>
+      <a:schemeClr val="accent3">
+        <a:tint val="40000"/>
+        <a:alpha val="90000"/>
+      </a:schemeClr>
+      <a:schemeClr val="accent4">
+        <a:tint val="40000"/>
+        <a:alpha val="90000"/>
+      </a:schemeClr>
+    </dgm:linClrLst>
+    <dgm:effectClrLst/>
+    <dgm:txLinClrLst/>
+    <dgm:txFillClrLst meth="repeat">
+      <a:schemeClr val="dk1"/>
+    </dgm:txFillClrLst>
+    <dgm:txEffectClrLst/>
+  </dgm:styleLbl>
+  <dgm:styleLbl name="fgAcc0">
+    <dgm:fillClrLst meth="repeat">
+      <a:schemeClr val="lt1">
+        <a:alpha val="90000"/>
+      </a:schemeClr>
+    </dgm:fillClrLst>
+    <dgm:linClrLst>
+      <a:schemeClr val="accent2"/>
+    </dgm:linClrLst>
+    <dgm:effectClrLst/>
+    <dgm:txLinClrLst/>
+    <dgm:txFillClrLst meth="repeat">
+      <a:schemeClr val="dk1"/>
+    </dgm:txFillClrLst>
+    <dgm:txEffectClrLst/>
+  </dgm:styleLbl>
+  <dgm:styleLbl name="fgAcc2">
+    <dgm:fillClrLst meth="repeat">
+      <a:schemeClr val="lt1">
+        <a:alpha val="90000"/>
+      </a:schemeClr>
+    </dgm:fillClrLst>
+    <dgm:linClrLst>
+      <a:schemeClr val="accent4"/>
+    </dgm:linClrLst>
+    <dgm:effectClrLst/>
+    <dgm:txLinClrLst/>
+    <dgm:txFillClrLst meth="repeat">
+      <a:schemeClr val="dk1"/>
+    </dgm:txFillClrLst>
+    <dgm:txEffectClrLst/>
+  </dgm:styleLbl>
+  <dgm:styleLbl name="fgAcc3">
+    <dgm:fillClrLst meth="repeat">
+      <a:schemeClr val="lt1">
+        <a:alpha val="90000"/>
+      </a:schemeClr>
+    </dgm:fillClrLst>
+    <dgm:linClrLst>
+      <a:schemeClr val="accent5"/>
+    </dgm:linClrLst>
+    <dgm:effectClrLst/>
+    <dgm:txLinClrLst/>
+    <dgm:txFillClrLst meth="repeat">
+      <a:schemeClr val="dk1"/>
+    </dgm:txFillClrLst>
+    <dgm:txEffectClrLst/>
+  </dgm:styleLbl>
+  <dgm:styleLbl name="fgAcc4">
+    <dgm:fillClrLst meth="repeat">
+      <a:schemeClr val="lt1">
+        <a:alpha val="90000"/>
+      </a:schemeClr>
+    </dgm:fillClrLst>
+    <dgm:linClrLst>
+      <a:schemeClr val="accent6"/>
+    </dgm:linClrLst>
+    <dgm:effectClrLst/>
+    <dgm:txLinClrLst/>
+    <dgm:txFillClrLst meth="repeat">
+      <a:schemeClr val="dk1"/>
+    </dgm:txFillClrLst>
+    <dgm:txEffectClrLst/>
+  </dgm:styleLbl>
+  <dgm:styleLbl name="bgShp">
+    <dgm:fillClrLst meth="repeat">
+      <a:schemeClr val="accent3">
+        <a:tint val="40000"/>
+      </a:schemeClr>
+    </dgm:fillClrLst>
+    <dgm:linClrLst meth="repeat">
+      <a:schemeClr val="dk1"/>
+    </dgm:linClrLst>
+    <dgm:effectClrLst/>
+    <dgm:txLinClrLst/>
+    <dgm:txFillClrLst meth="repeat">
+      <a:schemeClr val="dk1"/>
+    </dgm:txFillClrLst>
+    <dgm:txEffectClrLst/>
+  </dgm:styleLbl>
+  <dgm:styleLbl name="dkBgShp">
+    <dgm:fillClrLst meth="repeat">
+      <a:schemeClr val="accent3">
+        <a:shade val="90000"/>
+      </a:schemeClr>
+    </dgm:fillClrLst>
+    <dgm:linClrLst meth="repeat">
+      <a:schemeClr val="dk1"/>
+    </dgm:linClrLst>
+    <dgm:effectClrLst/>
+    <dgm:txLinClrLst/>
+    <dgm:txFillClrLst meth="repeat">
+      <a:schemeClr val="lt1"/>
+    </dgm:txFillClrLst>
+    <dgm:txEffectClrLst/>
+  </dgm:styleLbl>
+  <dgm:styleLbl name="trBgShp">
+    <dgm:fillClrLst meth="repeat">
+      <a:schemeClr val="accent2">
+        <a:tint val="50000"/>
+        <a:alpha val="40000"/>
+      </a:schemeClr>
+    </dgm:fillClrLst>
+    <dgm:linClrLst meth="repeat">
+      <a:schemeClr val="accent3"/>
+    </dgm:linClrLst>
+    <dgm:effectClrLst/>
+    <dgm:txLinClrLst/>
+    <dgm:txFillClrLst meth="repeat">
+      <a:schemeClr val="lt1"/>
+    </dgm:txFillClrLst>
+    <dgm:txEffectClrLst/>
+  </dgm:styleLbl>
+  <dgm:styleLbl name="fgShp">
+    <dgm:fillClrLst meth="repeat">
+      <a:schemeClr val="accent3">
+        <a:tint val="40000"/>
+      </a:schemeClr>
+    </dgm:fillClrLst>
+    <dgm:linClrLst meth="repeat">
+      <a:schemeClr val="lt1"/>
+    </dgm:linClrLst>
+    <dgm:effectClrLst/>
+    <dgm:txLinClrLst/>
+    <dgm:txFillClrLst meth="repeat">
+      <a:schemeClr val="dk1"/>
+    </dgm:txFillClrLst>
+    <dgm:txEffectClrLst/>
+  </dgm:styleLbl>
+  <dgm:styleLbl name="revTx">
+    <dgm:fillClrLst meth="repeat">
+      <a:schemeClr val="lt1">
+        <a:alpha val="0"/>
+      </a:schemeClr>
+    </dgm:fillClrLst>
+    <dgm:linClrLst meth="repeat">
+      <a:schemeClr val="dk1">
+        <a:alpha val="0"/>
+      </a:schemeClr>
+    </dgm:linClrLst>
+    <dgm:effectClrLst/>
+    <dgm:txLinClrLst/>
+    <dgm:txFillClrLst meth="repeat">
+      <a:schemeClr val="tx1"/>
+    </dgm:txFillClrLst>
+    <dgm:txEffectClrLst/>
+  </dgm:styleLbl>
+</dgm:colorsDef>
+</file>
+
+<file path=ppt/diagrams/colors8.xml><?xml version="1.0" encoding="utf-8"?>
 <dgm:colorsDef xmlns:dgm="http://schemas.openxmlformats.org/drawingml/2006/diagram" xmlns:a="http://schemas.openxmlformats.org/drawingml/2006/main" uniqueId="urn:microsoft.com/office/officeart/2005/8/colors/accent1_2">
   <dgm:title val=""/>
   <dgm:desc val=""/>
@@ -4805,7 +6370,7 @@
 </dgm:colorsDef>
 </file>
 
-<file path=ppt/diagrams/colors7.xml><?xml version="1.0" encoding="utf-8"?>
+<file path=ppt/diagrams/colors9.xml><?xml version="1.0" encoding="utf-8"?>
 <dgm:colorsDef xmlns:dgm="http://schemas.openxmlformats.org/drawingml/2006/diagram" xmlns:a="http://schemas.openxmlformats.org/drawingml/2006/main" uniqueId="urn:microsoft.com/office/officeart/2005/8/colors/accent1_2">
   <dgm:title val=""/>
   <dgm:desc val=""/>
@@ -6575,6 +8140,417 @@
 <file path=ppt/diagrams/data6.xml><?xml version="1.0" encoding="utf-8"?>
 <dgm:dataModel xmlns:dgm="http://schemas.openxmlformats.org/drawingml/2006/diagram" xmlns:a="http://schemas.openxmlformats.org/drawingml/2006/main">
   <dgm:ptLst>
+    <dgm:pt modelId="{CCFFC167-186E-4EBB-B1DC-7C342342DAC9}" type="doc">
+      <dgm:prSet loTypeId="urn:microsoft.com/office/officeart/2005/8/layout/chart3" loCatId="cycle" qsTypeId="urn:microsoft.com/office/officeart/2005/8/quickstyle/3d1" qsCatId="3D" csTypeId="urn:microsoft.com/office/officeart/2005/8/colors/colorful3" csCatId="colorful" phldr="1"/>
+      <dgm:spPr/>
+      <dgm:t>
+        <a:bodyPr/>
+        <a:lstStyle/>
+        <a:p>
+          <a:endParaRPr lang="en-US"/>
+        </a:p>
+      </dgm:t>
+    </dgm:pt>
+    <dgm:pt modelId="{FB7CD5A8-C825-410E-9089-07DA496D4277}">
+      <dgm:prSet phldrT="[Text]" custT="1"/>
+      <dgm:spPr/>
+      <dgm:t>
+        <a:bodyPr/>
+        <a:lstStyle/>
+        <a:p>
+          <a:r>
+            <a:rPr lang="en-US" sz="2400" b="1" dirty="0"/>
+            <a:t>State</a:t>
+          </a:r>
+        </a:p>
+      </dgm:t>
+    </dgm:pt>
+    <dgm:pt modelId="{B4727966-4152-4338-85E4-E8C0499EC9CD}" type="parTrans" cxnId="{0989BD3D-A903-4B79-982B-928F1C1648D9}">
+      <dgm:prSet/>
+      <dgm:spPr/>
+      <dgm:t>
+        <a:bodyPr/>
+        <a:lstStyle/>
+        <a:p>
+          <a:endParaRPr lang="en-US" sz="1200" b="1"/>
+        </a:p>
+      </dgm:t>
+    </dgm:pt>
+    <dgm:pt modelId="{B9BDC118-A140-4066-BA44-FCD054B10920}" type="sibTrans" cxnId="{0989BD3D-A903-4B79-982B-928F1C1648D9}">
+      <dgm:prSet/>
+      <dgm:spPr/>
+      <dgm:t>
+        <a:bodyPr/>
+        <a:lstStyle/>
+        <a:p>
+          <a:endParaRPr lang="en-US" sz="1200" b="1"/>
+        </a:p>
+      </dgm:t>
+    </dgm:pt>
+    <dgm:pt modelId="{64E0BD8A-CE07-4DEE-96E6-2DEAB38E1B99}">
+      <dgm:prSet phldrT="[Text]" custT="1"/>
+      <dgm:spPr/>
+      <dgm:t>
+        <a:bodyPr/>
+        <a:lstStyle/>
+        <a:p>
+          <a:r>
+            <a:rPr lang="en-US" altLang="zh-CN" sz="900" b="1" dirty="0"/>
+            <a:t>Components</a:t>
+          </a:r>
+          <a:endParaRPr lang="en-US" sz="900" b="1" dirty="0"/>
+        </a:p>
+      </dgm:t>
+    </dgm:pt>
+    <dgm:pt modelId="{0A09C7E8-9F1C-4069-9361-04AA77E0518D}" type="parTrans" cxnId="{FFDCF8B6-D00C-4275-ACF8-C30F6CB67B39}">
+      <dgm:prSet/>
+      <dgm:spPr/>
+      <dgm:t>
+        <a:bodyPr/>
+        <a:lstStyle/>
+        <a:p>
+          <a:endParaRPr lang="en-US"/>
+        </a:p>
+      </dgm:t>
+    </dgm:pt>
+    <dgm:pt modelId="{7E5E908C-BF0E-47A4-A909-920CE5BD9AE3}" type="sibTrans" cxnId="{FFDCF8B6-D00C-4275-ACF8-C30F6CB67B39}">
+      <dgm:prSet/>
+      <dgm:spPr/>
+      <dgm:t>
+        <a:bodyPr/>
+        <a:lstStyle/>
+        <a:p>
+          <a:endParaRPr lang="en-US"/>
+        </a:p>
+      </dgm:t>
+    </dgm:pt>
+    <dgm:pt modelId="{34C3400E-F26B-4390-8192-9DBC0788EE2A}">
+      <dgm:prSet phldrT="[Text]" custT="1"/>
+      <dgm:spPr/>
+      <dgm:t>
+        <a:bodyPr/>
+        <a:lstStyle/>
+        <a:p>
+          <a:r>
+            <a:rPr lang="en-US" sz="1600" b="1" dirty="0"/>
+            <a:t>Props</a:t>
+          </a:r>
+          <a:endParaRPr lang="en-US" sz="2000" b="1" dirty="0"/>
+        </a:p>
+      </dgm:t>
+    </dgm:pt>
+    <dgm:pt modelId="{0FD3D59F-10C8-45F3-BBC3-E107EB7DE048}" type="parTrans" cxnId="{C9F45266-92C0-4374-A336-80FF0AE46A94}">
+      <dgm:prSet/>
+      <dgm:spPr/>
+      <dgm:t>
+        <a:bodyPr/>
+        <a:lstStyle/>
+        <a:p>
+          <a:endParaRPr lang="en-US"/>
+        </a:p>
+      </dgm:t>
+    </dgm:pt>
+    <dgm:pt modelId="{81983DED-75F9-4013-9AC8-1DC5234FD360}" type="sibTrans" cxnId="{C9F45266-92C0-4374-A336-80FF0AE46A94}">
+      <dgm:prSet/>
+      <dgm:spPr/>
+      <dgm:t>
+        <a:bodyPr/>
+        <a:lstStyle/>
+        <a:p>
+          <a:endParaRPr lang="en-US"/>
+        </a:p>
+      </dgm:t>
+    </dgm:pt>
+    <dgm:pt modelId="{6677FE96-FCA3-443F-9855-42DB3F0A3A69}" type="pres">
+      <dgm:prSet presAssocID="{CCFFC167-186E-4EBB-B1DC-7C342342DAC9}" presName="compositeShape" presStyleCnt="0">
+        <dgm:presLayoutVars>
+          <dgm:chMax val="7"/>
+          <dgm:dir/>
+          <dgm:resizeHandles val="exact"/>
+        </dgm:presLayoutVars>
+      </dgm:prSet>
+      <dgm:spPr/>
+    </dgm:pt>
+    <dgm:pt modelId="{F6764BA0-4A3A-4CFA-A276-4E1170A66073}" type="pres">
+      <dgm:prSet presAssocID="{CCFFC167-186E-4EBB-B1DC-7C342342DAC9}" presName="wedge1" presStyleLbl="node1" presStyleIdx="0" presStyleCnt="3"/>
+      <dgm:spPr/>
+    </dgm:pt>
+    <dgm:pt modelId="{40C1B324-E246-489E-96EC-F7AA342EA97E}" type="pres">
+      <dgm:prSet presAssocID="{CCFFC167-186E-4EBB-B1DC-7C342342DAC9}" presName="wedge1Tx" presStyleLbl="node1" presStyleIdx="0" presStyleCnt="3">
+        <dgm:presLayoutVars>
+          <dgm:chMax val="0"/>
+          <dgm:chPref val="0"/>
+          <dgm:bulletEnabled val="1"/>
+        </dgm:presLayoutVars>
+      </dgm:prSet>
+      <dgm:spPr/>
+    </dgm:pt>
+    <dgm:pt modelId="{E38BEA43-6901-44EC-A624-A428C4B10F43}" type="pres">
+      <dgm:prSet presAssocID="{CCFFC167-186E-4EBB-B1DC-7C342342DAC9}" presName="wedge2" presStyleLbl="node1" presStyleIdx="1" presStyleCnt="3"/>
+      <dgm:spPr/>
+    </dgm:pt>
+    <dgm:pt modelId="{DAB88AA6-0C19-472A-9C21-1F1CCD3FBF56}" type="pres">
+      <dgm:prSet presAssocID="{CCFFC167-186E-4EBB-B1DC-7C342342DAC9}" presName="wedge2Tx" presStyleLbl="node1" presStyleIdx="1" presStyleCnt="3">
+        <dgm:presLayoutVars>
+          <dgm:chMax val="0"/>
+          <dgm:chPref val="0"/>
+          <dgm:bulletEnabled val="1"/>
+        </dgm:presLayoutVars>
+      </dgm:prSet>
+      <dgm:spPr/>
+    </dgm:pt>
+    <dgm:pt modelId="{95E789F6-D633-4BE2-AD34-3426A571AAD5}" type="pres">
+      <dgm:prSet presAssocID="{CCFFC167-186E-4EBB-B1DC-7C342342DAC9}" presName="wedge3" presStyleLbl="node1" presStyleIdx="2" presStyleCnt="3"/>
+      <dgm:spPr/>
+    </dgm:pt>
+    <dgm:pt modelId="{38730307-46C4-4DF6-8ED9-0376DB73AF72}" type="pres">
+      <dgm:prSet presAssocID="{CCFFC167-186E-4EBB-B1DC-7C342342DAC9}" presName="wedge3Tx" presStyleLbl="node1" presStyleIdx="2" presStyleCnt="3">
+        <dgm:presLayoutVars>
+          <dgm:chMax val="0"/>
+          <dgm:chPref val="0"/>
+          <dgm:bulletEnabled val="1"/>
+        </dgm:presLayoutVars>
+      </dgm:prSet>
+      <dgm:spPr/>
+    </dgm:pt>
+  </dgm:ptLst>
+  <dgm:cxnLst>
+    <dgm:cxn modelId="{0989BD3D-A903-4B79-982B-928F1C1648D9}" srcId="{CCFFC167-186E-4EBB-B1DC-7C342342DAC9}" destId="{FB7CD5A8-C825-410E-9089-07DA496D4277}" srcOrd="0" destOrd="0" parTransId="{B4727966-4152-4338-85E4-E8C0499EC9CD}" sibTransId="{B9BDC118-A140-4066-BA44-FCD054B10920}"/>
+    <dgm:cxn modelId="{12E09040-A181-4670-89CF-A8773A84BA95}" type="presOf" srcId="{34C3400E-F26B-4390-8192-9DBC0788EE2A}" destId="{DAB88AA6-0C19-472A-9C21-1F1CCD3FBF56}" srcOrd="1" destOrd="0" presId="urn:microsoft.com/office/officeart/2005/8/layout/chart3"/>
+    <dgm:cxn modelId="{59058360-B2C6-4364-8D90-1379B3AC71F3}" type="presOf" srcId="{64E0BD8A-CE07-4DEE-96E6-2DEAB38E1B99}" destId="{95E789F6-D633-4BE2-AD34-3426A571AAD5}" srcOrd="0" destOrd="0" presId="urn:microsoft.com/office/officeart/2005/8/layout/chart3"/>
+    <dgm:cxn modelId="{C9F45266-92C0-4374-A336-80FF0AE46A94}" srcId="{CCFFC167-186E-4EBB-B1DC-7C342342DAC9}" destId="{34C3400E-F26B-4390-8192-9DBC0788EE2A}" srcOrd="1" destOrd="0" parTransId="{0FD3D59F-10C8-45F3-BBC3-E107EB7DE048}" sibTransId="{81983DED-75F9-4013-9AC8-1DC5234FD360}"/>
+    <dgm:cxn modelId="{5AB8A499-B43C-43FA-860B-F8222E9C554D}" type="presOf" srcId="{CCFFC167-186E-4EBB-B1DC-7C342342DAC9}" destId="{6677FE96-FCA3-443F-9855-42DB3F0A3A69}" srcOrd="0" destOrd="0" presId="urn:microsoft.com/office/officeart/2005/8/layout/chart3"/>
+    <dgm:cxn modelId="{FFDCF8B6-D00C-4275-ACF8-C30F6CB67B39}" srcId="{CCFFC167-186E-4EBB-B1DC-7C342342DAC9}" destId="{64E0BD8A-CE07-4DEE-96E6-2DEAB38E1B99}" srcOrd="2" destOrd="0" parTransId="{0A09C7E8-9F1C-4069-9361-04AA77E0518D}" sibTransId="{7E5E908C-BF0E-47A4-A909-920CE5BD9AE3}"/>
+    <dgm:cxn modelId="{363EC5C2-3680-440A-9591-D43720A6AF3D}" type="presOf" srcId="{34C3400E-F26B-4390-8192-9DBC0788EE2A}" destId="{E38BEA43-6901-44EC-A624-A428C4B10F43}" srcOrd="0" destOrd="0" presId="urn:microsoft.com/office/officeart/2005/8/layout/chart3"/>
+    <dgm:cxn modelId="{13D042D1-FEC1-4D7B-A584-E5F83102CFCC}" type="presOf" srcId="{FB7CD5A8-C825-410E-9089-07DA496D4277}" destId="{40C1B324-E246-489E-96EC-F7AA342EA97E}" srcOrd="1" destOrd="0" presId="urn:microsoft.com/office/officeart/2005/8/layout/chart3"/>
+    <dgm:cxn modelId="{FBCE3FED-4871-4308-B3A6-33B6A7572B77}" type="presOf" srcId="{64E0BD8A-CE07-4DEE-96E6-2DEAB38E1B99}" destId="{38730307-46C4-4DF6-8ED9-0376DB73AF72}" srcOrd="1" destOrd="0" presId="urn:microsoft.com/office/officeart/2005/8/layout/chart3"/>
+    <dgm:cxn modelId="{450E25F4-7872-4944-82E8-E16C13FA2E93}" type="presOf" srcId="{FB7CD5A8-C825-410E-9089-07DA496D4277}" destId="{F6764BA0-4A3A-4CFA-A276-4E1170A66073}" srcOrd="0" destOrd="0" presId="urn:microsoft.com/office/officeart/2005/8/layout/chart3"/>
+    <dgm:cxn modelId="{E76D188F-21A4-42E0-B68C-421CE47DE403}" type="presParOf" srcId="{6677FE96-FCA3-443F-9855-42DB3F0A3A69}" destId="{F6764BA0-4A3A-4CFA-A276-4E1170A66073}" srcOrd="0" destOrd="0" presId="urn:microsoft.com/office/officeart/2005/8/layout/chart3"/>
+    <dgm:cxn modelId="{0454F2D6-D632-4369-A336-664611FEF02A}" type="presParOf" srcId="{6677FE96-FCA3-443F-9855-42DB3F0A3A69}" destId="{40C1B324-E246-489E-96EC-F7AA342EA97E}" srcOrd="1" destOrd="0" presId="urn:microsoft.com/office/officeart/2005/8/layout/chart3"/>
+    <dgm:cxn modelId="{6226714A-68A0-43B3-8A62-C3309F348DB9}" type="presParOf" srcId="{6677FE96-FCA3-443F-9855-42DB3F0A3A69}" destId="{E38BEA43-6901-44EC-A624-A428C4B10F43}" srcOrd="2" destOrd="0" presId="urn:microsoft.com/office/officeart/2005/8/layout/chart3"/>
+    <dgm:cxn modelId="{D9719094-3822-48F0-A685-8D2D3170D4F4}" type="presParOf" srcId="{6677FE96-FCA3-443F-9855-42DB3F0A3A69}" destId="{DAB88AA6-0C19-472A-9C21-1F1CCD3FBF56}" srcOrd="3" destOrd="0" presId="urn:microsoft.com/office/officeart/2005/8/layout/chart3"/>
+    <dgm:cxn modelId="{57C7CBE9-B6A5-455D-B521-95ACD5BE5F3A}" type="presParOf" srcId="{6677FE96-FCA3-443F-9855-42DB3F0A3A69}" destId="{95E789F6-D633-4BE2-AD34-3426A571AAD5}" srcOrd="4" destOrd="0" presId="urn:microsoft.com/office/officeart/2005/8/layout/chart3"/>
+    <dgm:cxn modelId="{258ED3E8-C4C7-431D-821A-4E2A4093C5AD}" type="presParOf" srcId="{6677FE96-FCA3-443F-9855-42DB3F0A3A69}" destId="{38730307-46C4-4DF6-8ED9-0376DB73AF72}" srcOrd="5" destOrd="0" presId="urn:microsoft.com/office/officeart/2005/8/layout/chart3"/>
+  </dgm:cxnLst>
+  <dgm:bg/>
+  <dgm:whole/>
+  <dgm:extLst>
+    <a:ext uri="http://schemas.microsoft.com/office/drawing/2008/diagram">
+      <dsp:dataModelExt xmlns:dsp="http://schemas.microsoft.com/office/drawing/2008/diagram" relId="rId10" minVer="http://schemas.openxmlformats.org/drawingml/2006/diagram"/>
+    </a:ext>
+  </dgm:extLst>
+</dgm:dataModel>
+</file>
+
+<file path=ppt/diagrams/data7.xml><?xml version="1.0" encoding="utf-8"?>
+<dgm:dataModel xmlns:dgm="http://schemas.openxmlformats.org/drawingml/2006/diagram" xmlns:a="http://schemas.openxmlformats.org/drawingml/2006/main">
+  <dgm:ptLst>
+    <dgm:pt modelId="{CCFFC167-186E-4EBB-B1DC-7C342342DAC9}" type="doc">
+      <dgm:prSet loTypeId="urn:microsoft.com/office/officeart/2005/8/layout/chart3" loCatId="cycle" qsTypeId="urn:microsoft.com/office/officeart/2005/8/quickstyle/3d1" qsCatId="3D" csTypeId="urn:microsoft.com/office/officeart/2005/8/colors/colorful3" csCatId="colorful" phldr="1"/>
+      <dgm:spPr/>
+      <dgm:t>
+        <a:bodyPr/>
+        <a:lstStyle/>
+        <a:p>
+          <a:endParaRPr lang="en-US"/>
+        </a:p>
+      </dgm:t>
+    </dgm:pt>
+    <dgm:pt modelId="{FB7CD5A8-C825-410E-9089-07DA496D4277}">
+      <dgm:prSet phldrT="[Text]" custT="1"/>
+      <dgm:spPr/>
+      <dgm:t>
+        <a:bodyPr/>
+        <a:lstStyle/>
+        <a:p>
+          <a:r>
+            <a:rPr lang="en-US" sz="2400" b="1"/>
+            <a:t>State</a:t>
+          </a:r>
+          <a:endParaRPr lang="en-US" sz="2400" b="1" dirty="0"/>
+        </a:p>
+      </dgm:t>
+    </dgm:pt>
+    <dgm:pt modelId="{B4727966-4152-4338-85E4-E8C0499EC9CD}" type="parTrans" cxnId="{0989BD3D-A903-4B79-982B-928F1C1648D9}">
+      <dgm:prSet/>
+      <dgm:spPr/>
+      <dgm:t>
+        <a:bodyPr/>
+        <a:lstStyle/>
+        <a:p>
+          <a:endParaRPr lang="en-US" sz="1200" b="1"/>
+        </a:p>
+      </dgm:t>
+    </dgm:pt>
+    <dgm:pt modelId="{B9BDC118-A140-4066-BA44-FCD054B10920}" type="sibTrans" cxnId="{0989BD3D-A903-4B79-982B-928F1C1648D9}">
+      <dgm:prSet/>
+      <dgm:spPr/>
+      <dgm:t>
+        <a:bodyPr/>
+        <a:lstStyle/>
+        <a:p>
+          <a:endParaRPr lang="en-US" sz="1200" b="1"/>
+        </a:p>
+      </dgm:t>
+    </dgm:pt>
+    <dgm:pt modelId="{64E0BD8A-CE07-4DEE-96E6-2DEAB38E1B99}">
+      <dgm:prSet phldrT="[Text]" custT="1"/>
+      <dgm:spPr/>
+      <dgm:t>
+        <a:bodyPr/>
+        <a:lstStyle/>
+        <a:p>
+          <a:r>
+            <a:rPr lang="en-US" altLang="zh-CN" sz="900" b="1" dirty="0"/>
+            <a:t>Components</a:t>
+          </a:r>
+          <a:endParaRPr lang="en-US" sz="900" b="1" dirty="0"/>
+        </a:p>
+      </dgm:t>
+    </dgm:pt>
+    <dgm:pt modelId="{0A09C7E8-9F1C-4069-9361-04AA77E0518D}" type="parTrans" cxnId="{FFDCF8B6-D00C-4275-ACF8-C30F6CB67B39}">
+      <dgm:prSet/>
+      <dgm:spPr/>
+      <dgm:t>
+        <a:bodyPr/>
+        <a:lstStyle/>
+        <a:p>
+          <a:endParaRPr lang="en-US"/>
+        </a:p>
+      </dgm:t>
+    </dgm:pt>
+    <dgm:pt modelId="{7E5E908C-BF0E-47A4-A909-920CE5BD9AE3}" type="sibTrans" cxnId="{FFDCF8B6-D00C-4275-ACF8-C30F6CB67B39}">
+      <dgm:prSet/>
+      <dgm:spPr/>
+      <dgm:t>
+        <a:bodyPr/>
+        <a:lstStyle/>
+        <a:p>
+          <a:endParaRPr lang="en-US"/>
+        </a:p>
+      </dgm:t>
+    </dgm:pt>
+    <dgm:pt modelId="{34C3400E-F26B-4390-8192-9DBC0788EE2A}">
+      <dgm:prSet phldrT="[Text]" custT="1"/>
+      <dgm:spPr/>
+      <dgm:t>
+        <a:bodyPr/>
+        <a:lstStyle/>
+        <a:p>
+          <a:r>
+            <a:rPr lang="en-US" sz="1600" b="1" dirty="0"/>
+            <a:t>Props</a:t>
+          </a:r>
+          <a:endParaRPr lang="en-US" sz="2000" b="1" dirty="0"/>
+        </a:p>
+      </dgm:t>
+    </dgm:pt>
+    <dgm:pt modelId="{0FD3D59F-10C8-45F3-BBC3-E107EB7DE048}" type="parTrans" cxnId="{C9F45266-92C0-4374-A336-80FF0AE46A94}">
+      <dgm:prSet/>
+      <dgm:spPr/>
+      <dgm:t>
+        <a:bodyPr/>
+        <a:lstStyle/>
+        <a:p>
+          <a:endParaRPr lang="en-US"/>
+        </a:p>
+      </dgm:t>
+    </dgm:pt>
+    <dgm:pt modelId="{81983DED-75F9-4013-9AC8-1DC5234FD360}" type="sibTrans" cxnId="{C9F45266-92C0-4374-A336-80FF0AE46A94}">
+      <dgm:prSet/>
+      <dgm:spPr/>
+      <dgm:t>
+        <a:bodyPr/>
+        <a:lstStyle/>
+        <a:p>
+          <a:endParaRPr lang="en-US"/>
+        </a:p>
+      </dgm:t>
+    </dgm:pt>
+    <dgm:pt modelId="{6677FE96-FCA3-443F-9855-42DB3F0A3A69}" type="pres">
+      <dgm:prSet presAssocID="{CCFFC167-186E-4EBB-B1DC-7C342342DAC9}" presName="compositeShape" presStyleCnt="0">
+        <dgm:presLayoutVars>
+          <dgm:chMax val="7"/>
+          <dgm:dir/>
+          <dgm:resizeHandles val="exact"/>
+        </dgm:presLayoutVars>
+      </dgm:prSet>
+      <dgm:spPr/>
+    </dgm:pt>
+    <dgm:pt modelId="{F6764BA0-4A3A-4CFA-A276-4E1170A66073}" type="pres">
+      <dgm:prSet presAssocID="{CCFFC167-186E-4EBB-B1DC-7C342342DAC9}" presName="wedge1" presStyleLbl="node1" presStyleIdx="0" presStyleCnt="3"/>
+      <dgm:spPr/>
+    </dgm:pt>
+    <dgm:pt modelId="{40C1B324-E246-489E-96EC-F7AA342EA97E}" type="pres">
+      <dgm:prSet presAssocID="{CCFFC167-186E-4EBB-B1DC-7C342342DAC9}" presName="wedge1Tx" presStyleLbl="node1" presStyleIdx="0" presStyleCnt="3">
+        <dgm:presLayoutVars>
+          <dgm:chMax val="0"/>
+          <dgm:chPref val="0"/>
+          <dgm:bulletEnabled val="1"/>
+        </dgm:presLayoutVars>
+      </dgm:prSet>
+      <dgm:spPr/>
+    </dgm:pt>
+    <dgm:pt modelId="{E38BEA43-6901-44EC-A624-A428C4B10F43}" type="pres">
+      <dgm:prSet presAssocID="{CCFFC167-186E-4EBB-B1DC-7C342342DAC9}" presName="wedge2" presStyleLbl="node1" presStyleIdx="1" presStyleCnt="3"/>
+      <dgm:spPr/>
+    </dgm:pt>
+    <dgm:pt modelId="{DAB88AA6-0C19-472A-9C21-1F1CCD3FBF56}" type="pres">
+      <dgm:prSet presAssocID="{CCFFC167-186E-4EBB-B1DC-7C342342DAC9}" presName="wedge2Tx" presStyleLbl="node1" presStyleIdx="1" presStyleCnt="3">
+        <dgm:presLayoutVars>
+          <dgm:chMax val="0"/>
+          <dgm:chPref val="0"/>
+          <dgm:bulletEnabled val="1"/>
+        </dgm:presLayoutVars>
+      </dgm:prSet>
+      <dgm:spPr/>
+    </dgm:pt>
+    <dgm:pt modelId="{95E789F6-D633-4BE2-AD34-3426A571AAD5}" type="pres">
+      <dgm:prSet presAssocID="{CCFFC167-186E-4EBB-B1DC-7C342342DAC9}" presName="wedge3" presStyleLbl="node1" presStyleIdx="2" presStyleCnt="3"/>
+      <dgm:spPr/>
+    </dgm:pt>
+    <dgm:pt modelId="{38730307-46C4-4DF6-8ED9-0376DB73AF72}" type="pres">
+      <dgm:prSet presAssocID="{CCFFC167-186E-4EBB-B1DC-7C342342DAC9}" presName="wedge3Tx" presStyleLbl="node1" presStyleIdx="2" presStyleCnt="3">
+        <dgm:presLayoutVars>
+          <dgm:chMax val="0"/>
+          <dgm:chPref val="0"/>
+          <dgm:bulletEnabled val="1"/>
+        </dgm:presLayoutVars>
+      </dgm:prSet>
+      <dgm:spPr/>
+    </dgm:pt>
+  </dgm:ptLst>
+  <dgm:cxnLst>
+    <dgm:cxn modelId="{0989BD3D-A903-4B79-982B-928F1C1648D9}" srcId="{CCFFC167-186E-4EBB-B1DC-7C342342DAC9}" destId="{FB7CD5A8-C825-410E-9089-07DA496D4277}" srcOrd="0" destOrd="0" parTransId="{B4727966-4152-4338-85E4-E8C0499EC9CD}" sibTransId="{B9BDC118-A140-4066-BA44-FCD054B10920}"/>
+    <dgm:cxn modelId="{12E09040-A181-4670-89CF-A8773A84BA95}" type="presOf" srcId="{34C3400E-F26B-4390-8192-9DBC0788EE2A}" destId="{DAB88AA6-0C19-472A-9C21-1F1CCD3FBF56}" srcOrd="1" destOrd="0" presId="urn:microsoft.com/office/officeart/2005/8/layout/chart3"/>
+    <dgm:cxn modelId="{59058360-B2C6-4364-8D90-1379B3AC71F3}" type="presOf" srcId="{64E0BD8A-CE07-4DEE-96E6-2DEAB38E1B99}" destId="{95E789F6-D633-4BE2-AD34-3426A571AAD5}" srcOrd="0" destOrd="0" presId="urn:microsoft.com/office/officeart/2005/8/layout/chart3"/>
+    <dgm:cxn modelId="{C9F45266-92C0-4374-A336-80FF0AE46A94}" srcId="{CCFFC167-186E-4EBB-B1DC-7C342342DAC9}" destId="{34C3400E-F26B-4390-8192-9DBC0788EE2A}" srcOrd="1" destOrd="0" parTransId="{0FD3D59F-10C8-45F3-BBC3-E107EB7DE048}" sibTransId="{81983DED-75F9-4013-9AC8-1DC5234FD360}"/>
+    <dgm:cxn modelId="{5AB8A499-B43C-43FA-860B-F8222E9C554D}" type="presOf" srcId="{CCFFC167-186E-4EBB-B1DC-7C342342DAC9}" destId="{6677FE96-FCA3-443F-9855-42DB3F0A3A69}" srcOrd="0" destOrd="0" presId="urn:microsoft.com/office/officeart/2005/8/layout/chart3"/>
+    <dgm:cxn modelId="{FFDCF8B6-D00C-4275-ACF8-C30F6CB67B39}" srcId="{CCFFC167-186E-4EBB-B1DC-7C342342DAC9}" destId="{64E0BD8A-CE07-4DEE-96E6-2DEAB38E1B99}" srcOrd="2" destOrd="0" parTransId="{0A09C7E8-9F1C-4069-9361-04AA77E0518D}" sibTransId="{7E5E908C-BF0E-47A4-A909-920CE5BD9AE3}"/>
+    <dgm:cxn modelId="{363EC5C2-3680-440A-9591-D43720A6AF3D}" type="presOf" srcId="{34C3400E-F26B-4390-8192-9DBC0788EE2A}" destId="{E38BEA43-6901-44EC-A624-A428C4B10F43}" srcOrd="0" destOrd="0" presId="urn:microsoft.com/office/officeart/2005/8/layout/chart3"/>
+    <dgm:cxn modelId="{13D042D1-FEC1-4D7B-A584-E5F83102CFCC}" type="presOf" srcId="{FB7CD5A8-C825-410E-9089-07DA496D4277}" destId="{40C1B324-E246-489E-96EC-F7AA342EA97E}" srcOrd="1" destOrd="0" presId="urn:microsoft.com/office/officeart/2005/8/layout/chart3"/>
+    <dgm:cxn modelId="{FBCE3FED-4871-4308-B3A6-33B6A7572B77}" type="presOf" srcId="{64E0BD8A-CE07-4DEE-96E6-2DEAB38E1B99}" destId="{38730307-46C4-4DF6-8ED9-0376DB73AF72}" srcOrd="1" destOrd="0" presId="urn:microsoft.com/office/officeart/2005/8/layout/chart3"/>
+    <dgm:cxn modelId="{450E25F4-7872-4944-82E8-E16C13FA2E93}" type="presOf" srcId="{FB7CD5A8-C825-410E-9089-07DA496D4277}" destId="{F6764BA0-4A3A-4CFA-A276-4E1170A66073}" srcOrd="0" destOrd="0" presId="urn:microsoft.com/office/officeart/2005/8/layout/chart3"/>
+    <dgm:cxn modelId="{E76D188F-21A4-42E0-B68C-421CE47DE403}" type="presParOf" srcId="{6677FE96-FCA3-443F-9855-42DB3F0A3A69}" destId="{F6764BA0-4A3A-4CFA-A276-4E1170A66073}" srcOrd="0" destOrd="0" presId="urn:microsoft.com/office/officeart/2005/8/layout/chart3"/>
+    <dgm:cxn modelId="{0454F2D6-D632-4369-A336-664611FEF02A}" type="presParOf" srcId="{6677FE96-FCA3-443F-9855-42DB3F0A3A69}" destId="{40C1B324-E246-489E-96EC-F7AA342EA97E}" srcOrd="1" destOrd="0" presId="urn:microsoft.com/office/officeart/2005/8/layout/chart3"/>
+    <dgm:cxn modelId="{6226714A-68A0-43B3-8A62-C3309F348DB9}" type="presParOf" srcId="{6677FE96-FCA3-443F-9855-42DB3F0A3A69}" destId="{E38BEA43-6901-44EC-A624-A428C4B10F43}" srcOrd="2" destOrd="0" presId="urn:microsoft.com/office/officeart/2005/8/layout/chart3"/>
+    <dgm:cxn modelId="{D9719094-3822-48F0-A685-8D2D3170D4F4}" type="presParOf" srcId="{6677FE96-FCA3-443F-9855-42DB3F0A3A69}" destId="{DAB88AA6-0C19-472A-9C21-1F1CCD3FBF56}" srcOrd="3" destOrd="0" presId="urn:microsoft.com/office/officeart/2005/8/layout/chart3"/>
+    <dgm:cxn modelId="{57C7CBE9-B6A5-455D-B521-95ACD5BE5F3A}" type="presParOf" srcId="{6677FE96-FCA3-443F-9855-42DB3F0A3A69}" destId="{95E789F6-D633-4BE2-AD34-3426A571AAD5}" srcOrd="4" destOrd="0" presId="urn:microsoft.com/office/officeart/2005/8/layout/chart3"/>
+    <dgm:cxn modelId="{258ED3E8-C4C7-431D-821A-4E2A4093C5AD}" type="presParOf" srcId="{6677FE96-FCA3-443F-9855-42DB3F0A3A69}" destId="{38730307-46C4-4DF6-8ED9-0376DB73AF72}" srcOrd="5" destOrd="0" presId="urn:microsoft.com/office/officeart/2005/8/layout/chart3"/>
+  </dgm:cxnLst>
+  <dgm:bg/>
+  <dgm:whole/>
+  <dgm:extLst>
+    <a:ext uri="http://schemas.microsoft.com/office/drawing/2008/diagram">
+      <dsp:dataModelExt xmlns:dsp="http://schemas.microsoft.com/office/drawing/2008/diagram" relId="rId9" minVer="http://schemas.openxmlformats.org/drawingml/2006/diagram"/>
+    </a:ext>
+  </dgm:extLst>
+</dgm:dataModel>
+</file>
+
+<file path=ppt/diagrams/data8.xml><?xml version="1.0" encoding="utf-8"?>
+<dgm:dataModel xmlns:dgm="http://schemas.openxmlformats.org/drawingml/2006/diagram" xmlns:a="http://schemas.openxmlformats.org/drawingml/2006/main">
+  <dgm:ptLst>
     <dgm:pt modelId="{1BAF38FA-668C-42FF-833B-8125D0660C5A}" type="doc">
       <dgm:prSet loTypeId="urn:microsoft.com/office/officeart/2005/8/layout/hChevron3" loCatId="process" qsTypeId="urn:microsoft.com/office/officeart/2005/8/quickstyle/simple1" qsCatId="simple" csTypeId="urn:microsoft.com/office/officeart/2005/8/colors/accent1_2" csCatId="accent1" phldr="1"/>
       <dgm:spPr/>
@@ -6818,7 +8794,7 @@
 </dgm:dataModel>
 </file>
 
-<file path=ppt/diagrams/data7.xml><?xml version="1.0" encoding="utf-8"?>
+<file path=ppt/diagrams/data9.xml><?xml version="1.0" encoding="utf-8"?>
 <dgm:dataModel xmlns:dgm="http://schemas.openxmlformats.org/drawingml/2006/diagram" xmlns:a="http://schemas.openxmlformats.org/drawingml/2006/main">
   <dgm:ptLst>
     <dgm:pt modelId="{1BAF38FA-668C-42FF-833B-8125D0660C5A}" type="doc">
@@ -8707,6 +10683,653 @@
       <dsp:cNvGrpSpPr/>
     </dsp:nvGrpSpPr>
     <dsp:grpSpPr/>
+    <dsp:sp modelId="{F6764BA0-4A3A-4CFA-A276-4E1170A66073}">
+      <dsp:nvSpPr>
+        <dsp:cNvPr id="0" name=""/>
+        <dsp:cNvSpPr/>
+      </dsp:nvSpPr>
+      <dsp:spPr>
+        <a:xfrm>
+          <a:off x="614086" y="190772"/>
+          <a:ext cx="2374060" cy="2374060"/>
+        </a:xfrm>
+        <a:prstGeom prst="pie">
+          <a:avLst>
+            <a:gd name="adj1" fmla="val 16200000"/>
+            <a:gd name="adj2" fmla="val 1800000"/>
+          </a:avLst>
+        </a:prstGeom>
+        <a:gradFill rotWithShape="0">
+          <a:gsLst>
+            <a:gs pos="0">
+              <a:schemeClr val="accent3">
+                <a:hueOff val="0"/>
+                <a:satOff val="0"/>
+                <a:lumOff val="0"/>
+                <a:alphaOff val="0"/>
+                <a:tint val="98000"/>
+                <a:lumMod val="114000"/>
+              </a:schemeClr>
+            </a:gs>
+            <a:gs pos="100000">
+              <a:schemeClr val="accent3">
+                <a:hueOff val="0"/>
+                <a:satOff val="0"/>
+                <a:lumOff val="0"/>
+                <a:alphaOff val="0"/>
+                <a:shade val="90000"/>
+                <a:lumMod val="84000"/>
+              </a:schemeClr>
+            </a:gs>
+          </a:gsLst>
+          <a:lin ang="5400000" scaled="0"/>
+        </a:gradFill>
+        <a:ln>
+          <a:noFill/>
+        </a:ln>
+        <a:effectLst>
+          <a:outerShdw blurRad="38100" dist="25400" dir="5400000" rotWithShape="0">
+            <a:srgbClr val="000000">
+              <a:alpha val="45000"/>
+            </a:srgbClr>
+          </a:outerShdw>
+        </a:effectLst>
+        <a:scene3d>
+          <a:camera prst="orthographicFront"/>
+          <a:lightRig rig="flat" dir="t"/>
+        </a:scene3d>
+        <a:sp3d prstMaterial="plastic">
+          <a:bevelT w="120900" h="88900"/>
+          <a:bevelB w="88900" h="31750" prst="angle"/>
+        </a:sp3d>
+      </dsp:spPr>
+      <dsp:style>
+        <a:lnRef idx="0">
+          <a:scrgbClr r="0" g="0" b="0"/>
+        </a:lnRef>
+        <a:fillRef idx="3">
+          <a:scrgbClr r="0" g="0" b="0"/>
+        </a:fillRef>
+        <a:effectRef idx="2">
+          <a:scrgbClr r="0" g="0" b="0"/>
+        </a:effectRef>
+        <a:fontRef idx="minor">
+          <a:schemeClr val="lt1"/>
+        </a:fontRef>
+      </dsp:style>
+      <dsp:txBody>
+        <a:bodyPr spcFirstLastPara="0" vert="horz" wrap="square" lIns="30480" tIns="30480" rIns="30480" bIns="30480" numCol="1" spcCol="1270" anchor="ctr" anchorCtr="0">
+          <a:noAutofit/>
+        </a:bodyPr>
+        <a:lstStyle/>
+        <a:p>
+          <a:pPr marL="0" lvl="0" indent="0" algn="ctr" defTabSz="1066800">
+            <a:lnSpc>
+              <a:spcPct val="90000"/>
+            </a:lnSpc>
+            <a:spcBef>
+              <a:spcPct val="0"/>
+            </a:spcBef>
+            <a:spcAft>
+              <a:spcPct val="35000"/>
+            </a:spcAft>
+            <a:buNone/>
+          </a:pPr>
+          <a:r>
+            <a:rPr lang="en-US" sz="2400" b="1" kern="1200" dirty="0"/>
+            <a:t>State</a:t>
+          </a:r>
+        </a:p>
+      </dsp:txBody>
+      <dsp:txXfrm>
+        <a:off x="1904839" y="628843"/>
+        <a:ext cx="805484" cy="791353"/>
+      </dsp:txXfrm>
+    </dsp:sp>
+    <dsp:sp modelId="{E38BEA43-6901-44EC-A624-A428C4B10F43}">
+      <dsp:nvSpPr>
+        <dsp:cNvPr id="0" name=""/>
+        <dsp:cNvSpPr/>
+      </dsp:nvSpPr>
+      <dsp:spPr>
+        <a:xfrm>
+          <a:off x="491708" y="261429"/>
+          <a:ext cx="2374060" cy="2374060"/>
+        </a:xfrm>
+        <a:prstGeom prst="pie">
+          <a:avLst>
+            <a:gd name="adj1" fmla="val 1800000"/>
+            <a:gd name="adj2" fmla="val 9000000"/>
+          </a:avLst>
+        </a:prstGeom>
+        <a:gradFill rotWithShape="0">
+          <a:gsLst>
+            <a:gs pos="0">
+              <a:schemeClr val="accent3">
+                <a:hueOff val="5624522"/>
+                <a:satOff val="1095"/>
+                <a:lumOff val="5882"/>
+                <a:alphaOff val="0"/>
+                <a:tint val="98000"/>
+                <a:lumMod val="114000"/>
+              </a:schemeClr>
+            </a:gs>
+            <a:gs pos="100000">
+              <a:schemeClr val="accent3">
+                <a:hueOff val="5624522"/>
+                <a:satOff val="1095"/>
+                <a:lumOff val="5882"/>
+                <a:alphaOff val="0"/>
+                <a:shade val="90000"/>
+                <a:lumMod val="84000"/>
+              </a:schemeClr>
+            </a:gs>
+          </a:gsLst>
+          <a:lin ang="5400000" scaled="0"/>
+        </a:gradFill>
+        <a:ln>
+          <a:noFill/>
+        </a:ln>
+        <a:effectLst>
+          <a:outerShdw blurRad="38100" dist="25400" dir="5400000" rotWithShape="0">
+            <a:srgbClr val="000000">
+              <a:alpha val="45000"/>
+            </a:srgbClr>
+          </a:outerShdw>
+        </a:effectLst>
+        <a:scene3d>
+          <a:camera prst="orthographicFront"/>
+          <a:lightRig rig="flat" dir="t"/>
+        </a:scene3d>
+        <a:sp3d prstMaterial="plastic">
+          <a:bevelT w="120900" h="88900"/>
+          <a:bevelB w="88900" h="31750" prst="angle"/>
+        </a:sp3d>
+      </dsp:spPr>
+      <dsp:style>
+        <a:lnRef idx="0">
+          <a:scrgbClr r="0" g="0" b="0"/>
+        </a:lnRef>
+        <a:fillRef idx="3">
+          <a:scrgbClr r="0" g="0" b="0"/>
+        </a:fillRef>
+        <a:effectRef idx="2">
+          <a:scrgbClr r="0" g="0" b="0"/>
+        </a:effectRef>
+        <a:fontRef idx="minor">
+          <a:schemeClr val="lt1"/>
+        </a:fontRef>
+      </dsp:style>
+      <dsp:txBody>
+        <a:bodyPr spcFirstLastPara="0" vert="horz" wrap="square" lIns="20320" tIns="20320" rIns="20320" bIns="20320" numCol="1" spcCol="1270" anchor="ctr" anchorCtr="0">
+          <a:noAutofit/>
+        </a:bodyPr>
+        <a:lstStyle/>
+        <a:p>
+          <a:pPr marL="0" lvl="0" indent="0" algn="ctr" defTabSz="711200">
+            <a:lnSpc>
+              <a:spcPct val="90000"/>
+            </a:lnSpc>
+            <a:spcBef>
+              <a:spcPct val="0"/>
+            </a:spcBef>
+            <a:spcAft>
+              <a:spcPct val="35000"/>
+            </a:spcAft>
+            <a:buNone/>
+          </a:pPr>
+          <a:r>
+            <a:rPr lang="en-US" sz="1600" b="1" kern="1200" dirty="0"/>
+            <a:t>Props</a:t>
+          </a:r>
+          <a:endParaRPr lang="en-US" sz="2000" b="1" kern="1200" dirty="0"/>
+        </a:p>
+      </dsp:txBody>
+      <dsp:txXfrm>
+        <a:off x="1141749" y="1759348"/>
+        <a:ext cx="1073979" cy="734828"/>
+      </dsp:txXfrm>
+    </dsp:sp>
+    <dsp:sp modelId="{95E789F6-D633-4BE2-AD34-3426A571AAD5}">
+      <dsp:nvSpPr>
+        <dsp:cNvPr id="0" name=""/>
+        <dsp:cNvSpPr/>
+      </dsp:nvSpPr>
+      <dsp:spPr>
+        <a:xfrm>
+          <a:off x="491708" y="261429"/>
+          <a:ext cx="2374060" cy="2374060"/>
+        </a:xfrm>
+        <a:prstGeom prst="pie">
+          <a:avLst>
+            <a:gd name="adj1" fmla="val 9000000"/>
+            <a:gd name="adj2" fmla="val 16200000"/>
+          </a:avLst>
+        </a:prstGeom>
+        <a:gradFill rotWithShape="0">
+          <a:gsLst>
+            <a:gs pos="0">
+              <a:schemeClr val="accent3">
+                <a:hueOff val="11249043"/>
+                <a:satOff val="2189"/>
+                <a:lumOff val="11765"/>
+                <a:alphaOff val="0"/>
+                <a:tint val="98000"/>
+                <a:lumMod val="114000"/>
+              </a:schemeClr>
+            </a:gs>
+            <a:gs pos="100000">
+              <a:schemeClr val="accent3">
+                <a:hueOff val="11249043"/>
+                <a:satOff val="2189"/>
+                <a:lumOff val="11765"/>
+                <a:alphaOff val="0"/>
+                <a:shade val="90000"/>
+                <a:lumMod val="84000"/>
+              </a:schemeClr>
+            </a:gs>
+          </a:gsLst>
+          <a:lin ang="5400000" scaled="0"/>
+        </a:gradFill>
+        <a:ln>
+          <a:noFill/>
+        </a:ln>
+        <a:effectLst>
+          <a:outerShdw blurRad="38100" dist="25400" dir="5400000" rotWithShape="0">
+            <a:srgbClr val="000000">
+              <a:alpha val="45000"/>
+            </a:srgbClr>
+          </a:outerShdw>
+        </a:effectLst>
+        <a:scene3d>
+          <a:camera prst="orthographicFront"/>
+          <a:lightRig rig="flat" dir="t"/>
+        </a:scene3d>
+        <a:sp3d prstMaterial="plastic">
+          <a:bevelT w="120900" h="88900"/>
+          <a:bevelB w="88900" h="31750" prst="angle"/>
+        </a:sp3d>
+      </dsp:spPr>
+      <dsp:style>
+        <a:lnRef idx="0">
+          <a:scrgbClr r="0" g="0" b="0"/>
+        </a:lnRef>
+        <a:fillRef idx="3">
+          <a:scrgbClr r="0" g="0" b="0"/>
+        </a:fillRef>
+        <a:effectRef idx="2">
+          <a:scrgbClr r="0" g="0" b="0"/>
+        </a:effectRef>
+        <a:fontRef idx="minor">
+          <a:schemeClr val="lt1"/>
+        </a:fontRef>
+      </dsp:style>
+      <dsp:txBody>
+        <a:bodyPr spcFirstLastPara="0" vert="horz" wrap="square" lIns="11430" tIns="11430" rIns="11430" bIns="11430" numCol="1" spcCol="1270" anchor="ctr" anchorCtr="0">
+          <a:noAutofit/>
+        </a:bodyPr>
+        <a:lstStyle/>
+        <a:p>
+          <a:pPr marL="0" lvl="0" indent="0" algn="ctr" defTabSz="400050">
+            <a:lnSpc>
+              <a:spcPct val="90000"/>
+            </a:lnSpc>
+            <a:spcBef>
+              <a:spcPct val="0"/>
+            </a:spcBef>
+            <a:spcAft>
+              <a:spcPct val="35000"/>
+            </a:spcAft>
+            <a:buNone/>
+          </a:pPr>
+          <a:r>
+            <a:rPr lang="en-US" altLang="zh-CN" sz="900" b="1" kern="1200" dirty="0"/>
+            <a:t>Components</a:t>
+          </a:r>
+          <a:endParaRPr lang="en-US" sz="900" b="1" kern="1200" dirty="0"/>
+        </a:p>
+      </dsp:txBody>
+      <dsp:txXfrm>
+        <a:off x="746072" y="727762"/>
+        <a:ext cx="805484" cy="791353"/>
+      </dsp:txXfrm>
+    </dsp:sp>
+  </dsp:spTree>
+</dsp:drawing>
+</file>
+
+<file path=ppt/diagrams/drawing7.xml><?xml version="1.0" encoding="utf-8"?>
+<dsp:drawing xmlns:dgm="http://schemas.openxmlformats.org/drawingml/2006/diagram" xmlns:dsp="http://schemas.microsoft.com/office/drawing/2008/diagram" xmlns:a="http://schemas.openxmlformats.org/drawingml/2006/main">
+  <dsp:spTree>
+    <dsp:nvGrpSpPr>
+      <dsp:cNvPr id="0" name=""/>
+      <dsp:cNvGrpSpPr/>
+    </dsp:nvGrpSpPr>
+    <dsp:grpSpPr/>
+    <dsp:sp modelId="{F6764BA0-4A3A-4CFA-A276-4E1170A66073}">
+      <dsp:nvSpPr>
+        <dsp:cNvPr id="0" name=""/>
+        <dsp:cNvSpPr/>
+      </dsp:nvSpPr>
+      <dsp:spPr>
+        <a:xfrm>
+          <a:off x="614086" y="190772"/>
+          <a:ext cx="2374060" cy="2374060"/>
+        </a:xfrm>
+        <a:prstGeom prst="pie">
+          <a:avLst>
+            <a:gd name="adj1" fmla="val 16200000"/>
+            <a:gd name="adj2" fmla="val 1800000"/>
+          </a:avLst>
+        </a:prstGeom>
+        <a:gradFill rotWithShape="0">
+          <a:gsLst>
+            <a:gs pos="0">
+              <a:schemeClr val="accent3">
+                <a:hueOff val="0"/>
+                <a:satOff val="0"/>
+                <a:lumOff val="0"/>
+                <a:alphaOff val="0"/>
+                <a:tint val="98000"/>
+                <a:lumMod val="114000"/>
+              </a:schemeClr>
+            </a:gs>
+            <a:gs pos="100000">
+              <a:schemeClr val="accent3">
+                <a:hueOff val="0"/>
+                <a:satOff val="0"/>
+                <a:lumOff val="0"/>
+                <a:alphaOff val="0"/>
+                <a:shade val="90000"/>
+                <a:lumMod val="84000"/>
+              </a:schemeClr>
+            </a:gs>
+          </a:gsLst>
+          <a:lin ang="5400000" scaled="0"/>
+        </a:gradFill>
+        <a:ln>
+          <a:noFill/>
+        </a:ln>
+        <a:effectLst>
+          <a:outerShdw blurRad="38100" dist="25400" dir="5400000" rotWithShape="0">
+            <a:srgbClr val="000000">
+              <a:alpha val="45000"/>
+            </a:srgbClr>
+          </a:outerShdw>
+        </a:effectLst>
+        <a:scene3d>
+          <a:camera prst="orthographicFront"/>
+          <a:lightRig rig="flat" dir="t"/>
+        </a:scene3d>
+        <a:sp3d prstMaterial="plastic">
+          <a:bevelT w="120900" h="88900"/>
+          <a:bevelB w="88900" h="31750" prst="angle"/>
+        </a:sp3d>
+      </dsp:spPr>
+      <dsp:style>
+        <a:lnRef idx="0">
+          <a:scrgbClr r="0" g="0" b="0"/>
+        </a:lnRef>
+        <a:fillRef idx="3">
+          <a:scrgbClr r="0" g="0" b="0"/>
+        </a:fillRef>
+        <a:effectRef idx="2">
+          <a:scrgbClr r="0" g="0" b="0"/>
+        </a:effectRef>
+        <a:fontRef idx="minor">
+          <a:schemeClr val="lt1"/>
+        </a:fontRef>
+      </dsp:style>
+      <dsp:txBody>
+        <a:bodyPr spcFirstLastPara="0" vert="horz" wrap="square" lIns="30480" tIns="30480" rIns="30480" bIns="30480" numCol="1" spcCol="1270" anchor="ctr" anchorCtr="0">
+          <a:noAutofit/>
+        </a:bodyPr>
+        <a:lstStyle/>
+        <a:p>
+          <a:pPr marL="0" lvl="0" indent="0" algn="ctr" defTabSz="1066800">
+            <a:lnSpc>
+              <a:spcPct val="90000"/>
+            </a:lnSpc>
+            <a:spcBef>
+              <a:spcPct val="0"/>
+            </a:spcBef>
+            <a:spcAft>
+              <a:spcPct val="35000"/>
+            </a:spcAft>
+            <a:buNone/>
+          </a:pPr>
+          <a:r>
+            <a:rPr lang="en-US" sz="2400" b="1" kern="1200"/>
+            <a:t>State</a:t>
+          </a:r>
+          <a:endParaRPr lang="en-US" sz="2400" b="1" kern="1200" dirty="0"/>
+        </a:p>
+      </dsp:txBody>
+      <dsp:txXfrm>
+        <a:off x="1904839" y="628843"/>
+        <a:ext cx="805484" cy="791353"/>
+      </dsp:txXfrm>
+    </dsp:sp>
+    <dsp:sp modelId="{E38BEA43-6901-44EC-A624-A428C4B10F43}">
+      <dsp:nvSpPr>
+        <dsp:cNvPr id="0" name=""/>
+        <dsp:cNvSpPr/>
+      </dsp:nvSpPr>
+      <dsp:spPr>
+        <a:xfrm>
+          <a:off x="491708" y="261429"/>
+          <a:ext cx="2374060" cy="2374060"/>
+        </a:xfrm>
+        <a:prstGeom prst="pie">
+          <a:avLst>
+            <a:gd name="adj1" fmla="val 1800000"/>
+            <a:gd name="adj2" fmla="val 9000000"/>
+          </a:avLst>
+        </a:prstGeom>
+        <a:gradFill rotWithShape="0">
+          <a:gsLst>
+            <a:gs pos="0">
+              <a:schemeClr val="accent3">
+                <a:hueOff val="5624522"/>
+                <a:satOff val="1095"/>
+                <a:lumOff val="5882"/>
+                <a:alphaOff val="0"/>
+                <a:tint val="98000"/>
+                <a:lumMod val="114000"/>
+              </a:schemeClr>
+            </a:gs>
+            <a:gs pos="100000">
+              <a:schemeClr val="accent3">
+                <a:hueOff val="5624522"/>
+                <a:satOff val="1095"/>
+                <a:lumOff val="5882"/>
+                <a:alphaOff val="0"/>
+                <a:shade val="90000"/>
+                <a:lumMod val="84000"/>
+              </a:schemeClr>
+            </a:gs>
+          </a:gsLst>
+          <a:lin ang="5400000" scaled="0"/>
+        </a:gradFill>
+        <a:ln>
+          <a:noFill/>
+        </a:ln>
+        <a:effectLst>
+          <a:outerShdw blurRad="38100" dist="25400" dir="5400000" rotWithShape="0">
+            <a:srgbClr val="000000">
+              <a:alpha val="45000"/>
+            </a:srgbClr>
+          </a:outerShdw>
+        </a:effectLst>
+        <a:scene3d>
+          <a:camera prst="orthographicFront"/>
+          <a:lightRig rig="flat" dir="t"/>
+        </a:scene3d>
+        <a:sp3d prstMaterial="plastic">
+          <a:bevelT w="120900" h="88900"/>
+          <a:bevelB w="88900" h="31750" prst="angle"/>
+        </a:sp3d>
+      </dsp:spPr>
+      <dsp:style>
+        <a:lnRef idx="0">
+          <a:scrgbClr r="0" g="0" b="0"/>
+        </a:lnRef>
+        <a:fillRef idx="3">
+          <a:scrgbClr r="0" g="0" b="0"/>
+        </a:fillRef>
+        <a:effectRef idx="2">
+          <a:scrgbClr r="0" g="0" b="0"/>
+        </a:effectRef>
+        <a:fontRef idx="minor">
+          <a:schemeClr val="lt1"/>
+        </a:fontRef>
+      </dsp:style>
+      <dsp:txBody>
+        <a:bodyPr spcFirstLastPara="0" vert="horz" wrap="square" lIns="20320" tIns="20320" rIns="20320" bIns="20320" numCol="1" spcCol="1270" anchor="ctr" anchorCtr="0">
+          <a:noAutofit/>
+        </a:bodyPr>
+        <a:lstStyle/>
+        <a:p>
+          <a:pPr marL="0" lvl="0" indent="0" algn="ctr" defTabSz="711200">
+            <a:lnSpc>
+              <a:spcPct val="90000"/>
+            </a:lnSpc>
+            <a:spcBef>
+              <a:spcPct val="0"/>
+            </a:spcBef>
+            <a:spcAft>
+              <a:spcPct val="35000"/>
+            </a:spcAft>
+            <a:buNone/>
+          </a:pPr>
+          <a:r>
+            <a:rPr lang="en-US" sz="1600" b="1" kern="1200" dirty="0"/>
+            <a:t>Props</a:t>
+          </a:r>
+          <a:endParaRPr lang="en-US" sz="2000" b="1" kern="1200" dirty="0"/>
+        </a:p>
+      </dsp:txBody>
+      <dsp:txXfrm>
+        <a:off x="1141749" y="1759348"/>
+        <a:ext cx="1073979" cy="734828"/>
+      </dsp:txXfrm>
+    </dsp:sp>
+    <dsp:sp modelId="{95E789F6-D633-4BE2-AD34-3426A571AAD5}">
+      <dsp:nvSpPr>
+        <dsp:cNvPr id="0" name=""/>
+        <dsp:cNvSpPr/>
+      </dsp:nvSpPr>
+      <dsp:spPr>
+        <a:xfrm>
+          <a:off x="491708" y="261429"/>
+          <a:ext cx="2374060" cy="2374060"/>
+        </a:xfrm>
+        <a:prstGeom prst="pie">
+          <a:avLst>
+            <a:gd name="adj1" fmla="val 9000000"/>
+            <a:gd name="adj2" fmla="val 16200000"/>
+          </a:avLst>
+        </a:prstGeom>
+        <a:gradFill rotWithShape="0">
+          <a:gsLst>
+            <a:gs pos="0">
+              <a:schemeClr val="accent3">
+                <a:hueOff val="11249043"/>
+                <a:satOff val="2189"/>
+                <a:lumOff val="11765"/>
+                <a:alphaOff val="0"/>
+                <a:tint val="98000"/>
+                <a:lumMod val="114000"/>
+              </a:schemeClr>
+            </a:gs>
+            <a:gs pos="100000">
+              <a:schemeClr val="accent3">
+                <a:hueOff val="11249043"/>
+                <a:satOff val="2189"/>
+                <a:lumOff val="11765"/>
+                <a:alphaOff val="0"/>
+                <a:shade val="90000"/>
+                <a:lumMod val="84000"/>
+              </a:schemeClr>
+            </a:gs>
+          </a:gsLst>
+          <a:lin ang="5400000" scaled="0"/>
+        </a:gradFill>
+        <a:ln>
+          <a:noFill/>
+        </a:ln>
+        <a:effectLst>
+          <a:outerShdw blurRad="38100" dist="25400" dir="5400000" rotWithShape="0">
+            <a:srgbClr val="000000">
+              <a:alpha val="45000"/>
+            </a:srgbClr>
+          </a:outerShdw>
+        </a:effectLst>
+        <a:scene3d>
+          <a:camera prst="orthographicFront"/>
+          <a:lightRig rig="flat" dir="t"/>
+        </a:scene3d>
+        <a:sp3d prstMaterial="plastic">
+          <a:bevelT w="120900" h="88900"/>
+          <a:bevelB w="88900" h="31750" prst="angle"/>
+        </a:sp3d>
+      </dsp:spPr>
+      <dsp:style>
+        <a:lnRef idx="0">
+          <a:scrgbClr r="0" g="0" b="0"/>
+        </a:lnRef>
+        <a:fillRef idx="3">
+          <a:scrgbClr r="0" g="0" b="0"/>
+        </a:fillRef>
+        <a:effectRef idx="2">
+          <a:scrgbClr r="0" g="0" b="0"/>
+        </a:effectRef>
+        <a:fontRef idx="minor">
+          <a:schemeClr val="lt1"/>
+        </a:fontRef>
+      </dsp:style>
+      <dsp:txBody>
+        <a:bodyPr spcFirstLastPara="0" vert="horz" wrap="square" lIns="11430" tIns="11430" rIns="11430" bIns="11430" numCol="1" spcCol="1270" anchor="ctr" anchorCtr="0">
+          <a:noAutofit/>
+        </a:bodyPr>
+        <a:lstStyle/>
+        <a:p>
+          <a:pPr marL="0" lvl="0" indent="0" algn="ctr" defTabSz="400050">
+            <a:lnSpc>
+              <a:spcPct val="90000"/>
+            </a:lnSpc>
+            <a:spcBef>
+              <a:spcPct val="0"/>
+            </a:spcBef>
+            <a:spcAft>
+              <a:spcPct val="35000"/>
+            </a:spcAft>
+            <a:buNone/>
+          </a:pPr>
+          <a:r>
+            <a:rPr lang="en-US" altLang="zh-CN" sz="900" b="1" kern="1200" dirty="0"/>
+            <a:t>Components</a:t>
+          </a:r>
+          <a:endParaRPr lang="en-US" sz="900" b="1" kern="1200" dirty="0"/>
+        </a:p>
+      </dsp:txBody>
+      <dsp:txXfrm>
+        <a:off x="746072" y="727762"/>
+        <a:ext cx="805484" cy="791353"/>
+      </dsp:txXfrm>
+    </dsp:sp>
+  </dsp:spTree>
+</dsp:drawing>
+</file>
+
+<file path=ppt/diagrams/drawing8.xml><?xml version="1.0" encoding="utf-8"?>
+<dsp:drawing xmlns:dgm="http://schemas.openxmlformats.org/drawingml/2006/diagram" xmlns:dsp="http://schemas.microsoft.com/office/drawing/2008/diagram" xmlns:a="http://schemas.openxmlformats.org/drawingml/2006/main">
+  <dsp:spTree>
+    <dsp:nvGrpSpPr>
+      <dsp:cNvPr id="0" name=""/>
+      <dsp:cNvGrpSpPr/>
+    </dsp:nvGrpSpPr>
+    <dsp:grpSpPr/>
     <dsp:sp modelId="{3B3B9CF9-ACCC-4AAF-B159-A5ECCE9F91FA}">
       <dsp:nvSpPr>
         <dsp:cNvPr id="0" name=""/>
@@ -8998,7 +11621,7 @@
 </dsp:drawing>
 </file>
 
-<file path=ppt/diagrams/drawing7.xml><?xml version="1.0" encoding="utf-8"?>
+<file path=ppt/diagrams/drawing9.xml><?xml version="1.0" encoding="utf-8"?>
 <dsp:drawing xmlns:dgm="http://schemas.openxmlformats.org/drawingml/2006/diagram" xmlns:dsp="http://schemas.microsoft.com/office/drawing/2008/diagram" xmlns:a="http://schemas.openxmlformats.org/drawingml/2006/main">
   <dsp:spTree>
     <dsp:nvGrpSpPr>
@@ -15803,6 +18426,2616 @@
 </file>
 
 <file path=ppt/diagrams/layout6.xml><?xml version="1.0" encoding="utf-8"?>
+<dgm:layoutDef xmlns:dgm="http://schemas.openxmlformats.org/drawingml/2006/diagram" xmlns:a="http://schemas.openxmlformats.org/drawingml/2006/main" uniqueId="urn:microsoft.com/office/officeart/2005/8/layout/chart3">
+  <dgm:title val=""/>
+  <dgm:desc val=""/>
+  <dgm:catLst>
+    <dgm:cat type="relationship" pri="27000"/>
+    <dgm:cat type="cycle" pri="8000"/>
+  </dgm:catLst>
+  <dgm:sampData useDef="1">
+    <dgm:dataModel>
+      <dgm:ptLst/>
+      <dgm:bg/>
+      <dgm:whole/>
+    </dgm:dataModel>
+  </dgm:sampData>
+  <dgm:styleData useDef="1">
+    <dgm:dataModel>
+      <dgm:ptLst/>
+      <dgm:bg/>
+      <dgm:whole/>
+    </dgm:dataModel>
+  </dgm:styleData>
+  <dgm:clrData>
+    <dgm:dataModel>
+      <dgm:ptLst>
+        <dgm:pt modelId="0" type="doc"/>
+        <dgm:pt modelId="1"/>
+        <dgm:pt modelId="2"/>
+        <dgm:pt modelId="3"/>
+        <dgm:pt modelId="4"/>
+        <dgm:pt modelId="5"/>
+        <dgm:pt modelId="6"/>
+      </dgm:ptLst>
+      <dgm:cxnLst>
+        <dgm:cxn modelId="7" srcId="0" destId="1" srcOrd="0" destOrd="0"/>
+        <dgm:cxn modelId="8" srcId="0" destId="2" srcOrd="1" destOrd="0"/>
+        <dgm:cxn modelId="9" srcId="0" destId="3" srcOrd="2" destOrd="0"/>
+        <dgm:cxn modelId="10" srcId="0" destId="4" srcOrd="3" destOrd="0"/>
+        <dgm:cxn modelId="11" srcId="0" destId="5" srcOrd="4" destOrd="0"/>
+        <dgm:cxn modelId="12" srcId="0" destId="6" srcOrd="5" destOrd="0"/>
+      </dgm:cxnLst>
+      <dgm:bg/>
+      <dgm:whole/>
+    </dgm:dataModel>
+  </dgm:clrData>
+  <dgm:layoutNode name="compositeShape">
+    <dgm:varLst>
+      <dgm:chMax val="7"/>
+      <dgm:dir/>
+      <dgm:resizeHandles val="exact"/>
+    </dgm:varLst>
+    <dgm:alg type="composite">
+      <dgm:param type="horzAlign" val="ctr"/>
+      <dgm:param type="vertAlign" val="mid"/>
+      <dgm:param type="ar" val="1"/>
+    </dgm:alg>
+    <dgm:presOf/>
+    <dgm:shape xmlns:r="http://schemas.openxmlformats.org/officeDocument/2006/relationships" r:blip="">
+      <dgm:adjLst/>
+    </dgm:shape>
+    <dgm:choose name="Name0">
+      <dgm:if name="Name1" axis="ch" ptType="node" func="cnt" op="equ" val="1">
+        <dgm:constrLst>
+          <dgm:constr type="l" for="ch" forName="wedge1" refType="w" fact="0.08"/>
+          <dgm:constr type="t" for="ch" forName="wedge1" refType="w" fact="0.08"/>
+          <dgm:constr type="w" for="ch" forName="wedge1" refType="w" fact="0.84"/>
+          <dgm:constr type="h" for="ch" forName="wedge1" refType="h" fact="0.84"/>
+          <dgm:constr type="l" for="ch" forName="wedge1Tx" refType="w" fact="0.205"/>
+          <dgm:constr type="t" for="ch" forName="wedge1Tx" refType="h" fact="0.205"/>
+          <dgm:constr type="w" for="ch" forName="wedge1Tx" refType="w" fact="0.59"/>
+          <dgm:constr type="h" for="ch" forName="wedge1Tx" refType="h" fact="0.59"/>
+          <dgm:constr type="primFontSz" for="ch" ptType="node" op="equ"/>
+        </dgm:constrLst>
+      </dgm:if>
+      <dgm:if name="Name2" axis="ch" ptType="node" func="cnt" op="equ" val="2">
+        <dgm:constrLst>
+          <dgm:constr type="l" for="ch" forName="wedge1" refType="w" fact="0.1"/>
+          <dgm:constr type="t" for="ch" forName="wedge1" refType="w" fact="0.08"/>
+          <dgm:constr type="w" for="ch" forName="wedge1" refType="w" fact="0.84"/>
+          <dgm:constr type="h" for="ch" forName="wedge1" refType="h" fact="0.84"/>
+          <dgm:constr type="l" for="ch" forName="wedge1Tx" refType="w" fact="0.52"/>
+          <dgm:constr type="t" for="ch" forName="wedge1Tx" refType="h" fact="0.205"/>
+          <dgm:constr type="w" for="ch" forName="wedge1Tx" refType="w" fact="0.295"/>
+          <dgm:constr type="h" for="ch" forName="wedge1Tx" refType="h" fact="0.59"/>
+          <dgm:constr type="l" for="ch" forName="wedge2" refType="w" fact="0.08"/>
+          <dgm:constr type="t" for="ch" forName="wedge2" refType="w" fact="0.08"/>
+          <dgm:constr type="w" for="ch" forName="wedge2" refType="w" fact="0.84"/>
+          <dgm:constr type="h" for="ch" forName="wedge2" refType="h" fact="0.84"/>
+          <dgm:constr type="l" for="ch" forName="wedge2Tx" refType="w" fact="0.2"/>
+          <dgm:constr type="t" for="ch" forName="wedge2Tx" refType="h" fact="0.205"/>
+          <dgm:constr type="w" for="ch" forName="wedge2Tx" refType="w" fact="0.295"/>
+          <dgm:constr type="h" for="ch" forName="wedge2Tx" refType="h" fact="0.59"/>
+          <dgm:constr type="primFontSz" for="ch" ptType="node" op="equ"/>
+        </dgm:constrLst>
+      </dgm:if>
+      <dgm:if name="Name3" axis="ch" ptType="node" func="cnt" op="equ" val="3">
+        <dgm:choose name="Name4">
+          <dgm:if name="Name5" func="var" arg="dir" op="equ" val="norm">
+            <dgm:constrLst>
+              <dgm:constr type="l" for="ch" forName="wedge1" refType="w" fact="0.1233"/>
+              <dgm:constr type="t" for="ch" forName="wedge1" refType="w" fact="0.055"/>
+              <dgm:constr type="w" for="ch" forName="wedge1" refType="w" fact="0.84"/>
+              <dgm:constr type="h" for="ch" forName="wedge1" refType="h" fact="0.84"/>
+              <dgm:constr type="l" for="ch" forName="wedge1Tx" refType="w" fact="0.58"/>
+              <dgm:constr type="t" for="ch" forName="wedge1Tx" refType="h" fact="0.21"/>
+              <dgm:constr type="w" for="ch" forName="wedge1Tx" refType="w" fact="0.285"/>
+              <dgm:constr type="h" for="ch" forName="wedge1Tx" refType="h" fact="0.28"/>
+              <dgm:constr type="l" for="ch" forName="wedge2" refType="w" fact="0.08"/>
+              <dgm:constr type="t" for="ch" forName="wedge2" refType="w" fact="0.08"/>
+              <dgm:constr type="w" for="ch" forName="wedge2" refType="w" fact="0.84"/>
+              <dgm:constr type="h" for="ch" forName="wedge2" refType="h" fact="0.84"/>
+              <dgm:constr type="l" for="ch" forName="wedge2Tx" refType="w" fact="0.31"/>
+              <dgm:constr type="t" for="ch" forName="wedge2Tx" refType="h" fact="0.61"/>
+              <dgm:constr type="w" for="ch" forName="wedge2Tx" refType="w" fact="0.38"/>
+              <dgm:constr type="h" for="ch" forName="wedge2Tx" refType="h" fact="0.26"/>
+              <dgm:constr type="l" for="ch" forName="wedge3" refType="w" fact="0.08"/>
+              <dgm:constr type="t" for="ch" forName="wedge3" refType="w" fact="0.08"/>
+              <dgm:constr type="w" for="ch" forName="wedge3" refType="w" fact="0.84"/>
+              <dgm:constr type="h" for="ch" forName="wedge3" refType="h" fact="0.84"/>
+              <dgm:constr type="l" for="ch" forName="wedge3Tx" refType="w" fact="0.17"/>
+              <dgm:constr type="t" for="ch" forName="wedge3Tx" refType="h" fact="0.245"/>
+              <dgm:constr type="w" for="ch" forName="wedge3Tx" refType="w" fact="0.285"/>
+              <dgm:constr type="h" for="ch" forName="wedge3Tx" refType="h" fact="0.28"/>
+              <dgm:constr type="primFontSz" for="ch" ptType="node" op="equ"/>
+            </dgm:constrLst>
+          </dgm:if>
+          <dgm:else name="Name6">
+            <dgm:constrLst>
+              <dgm:constr type="l" for="ch" forName="wedge1" refType="w" fact="0.08"/>
+              <dgm:constr type="t" for="ch" forName="wedge1" refType="w" fact="0.08"/>
+              <dgm:constr type="w" for="ch" forName="wedge1" refType="w" fact="0.84"/>
+              <dgm:constr type="h" for="ch" forName="wedge1" refType="h" fact="0.84"/>
+              <dgm:constr type="l" for="ch" forName="wedge1Tx" refType="w" fact="0.545"/>
+              <dgm:constr type="t" for="ch" forName="wedge1Tx" refType="h" fact="0.245"/>
+              <dgm:constr type="w" for="ch" forName="wedge1Tx" refType="w" fact="0.285"/>
+              <dgm:constr type="h" for="ch" forName="wedge1Tx" refType="h" fact="0.28"/>
+              <dgm:constr type="l" for="ch" forName="wedge2" refType="w" fact="0.08"/>
+              <dgm:constr type="t" for="ch" forName="wedge2" refType="w" fact="0.08"/>
+              <dgm:constr type="w" for="ch" forName="wedge2" refType="w" fact="0.84"/>
+              <dgm:constr type="h" for="ch" forName="wedge2" refType="h" fact="0.84"/>
+              <dgm:constr type="l" for="ch" forName="wedge2Tx" refType="w" fact="0.31"/>
+              <dgm:constr type="t" for="ch" forName="wedge2Tx" refType="h" fact="0.61"/>
+              <dgm:constr type="w" for="ch" forName="wedge2Tx" refType="w" fact="0.38"/>
+              <dgm:constr type="h" for="ch" forName="wedge2Tx" refType="h" fact="0.26"/>
+              <dgm:constr type="l" for="ch" forName="wedge3" refType="w" fact="0.0367"/>
+              <dgm:constr type="t" for="ch" forName="wedge3" refType="w" fact="0.055"/>
+              <dgm:constr type="w" for="ch" forName="wedge3" refType="w" fact="0.84"/>
+              <dgm:constr type="h" for="ch" forName="wedge3" refType="h" fact="0.84"/>
+              <dgm:constr type="l" for="ch" forName="wedge3Tx" refType="w" fact="0.14"/>
+              <dgm:constr type="t" for="ch" forName="wedge3Tx" refType="h" fact="0.21"/>
+              <dgm:constr type="w" for="ch" forName="wedge3Tx" refType="w" fact="0.285"/>
+              <dgm:constr type="h" for="ch" forName="wedge3Tx" refType="h" fact="0.28"/>
+              <dgm:constr type="primFontSz" for="ch" ptType="node" op="equ"/>
+            </dgm:constrLst>
+          </dgm:else>
+        </dgm:choose>
+      </dgm:if>
+      <dgm:if name="Name7" axis="ch" ptType="node" func="cnt" op="equ" val="4">
+        <dgm:choose name="Name8">
+          <dgm:if name="Name9" func="var" arg="dir" op="equ" val="norm">
+            <dgm:constrLst>
+              <dgm:constr type="l" for="ch" forName="wedge1" refType="w" fact="0.1154"/>
+              <dgm:constr type="t" for="ch" forName="wedge1" refType="w" fact="0.0446"/>
+              <dgm:constr type="w" for="ch" forName="wedge1" refType="w" fact="0.84"/>
+              <dgm:constr type="h" for="ch" forName="wedge1" refType="h" fact="0.84"/>
+              <dgm:constr type="l" for="ch" forName="wedge1Tx" refType="w" fact="0.545"/>
+              <dgm:constr type="t" for="ch" forName="wedge1Tx" refType="h" fact="0.2"/>
+              <dgm:constr type="w" for="ch" forName="wedge1Tx" refType="w" fact="0.31"/>
+              <dgm:constr type="h" for="ch" forName="wedge1Tx" refType="h" fact="0.25"/>
+              <dgm:constr type="l" for="ch" forName="wedge2" refType="w" fact="0.08"/>
+              <dgm:constr type="t" for="ch" forName="wedge2" refType="w" fact="0.08"/>
+              <dgm:constr type="w" for="ch" forName="wedge2" refType="w" fact="0.84"/>
+              <dgm:constr type="h" for="ch" forName="wedge2" refType="h" fact="0.84"/>
+              <dgm:constr type="l" for="ch" forName="wedge2Tx" refType="w" fact="0.515"/>
+              <dgm:constr type="t" for="ch" forName="wedge2Tx" refType="h" fact="0.515"/>
+              <dgm:constr type="w" for="ch" forName="wedge2Tx" refType="w" fact="0.31"/>
+              <dgm:constr type="h" for="ch" forName="wedge2Tx" refType="h" fact="0.25"/>
+              <dgm:constr type="l" for="ch" forName="wedge3" refType="w" fact="0.08"/>
+              <dgm:constr type="t" for="ch" forName="wedge3" refType="w" fact="0.08"/>
+              <dgm:constr type="w" for="ch" forName="wedge3" refType="w" fact="0.84"/>
+              <dgm:constr type="h" for="ch" forName="wedge3" refType="h" fact="0.84"/>
+              <dgm:constr type="l" for="ch" forName="wedge3Tx" refType="w" fact="0.175"/>
+              <dgm:constr type="t" for="ch" forName="wedge3Tx" refType="h" fact="0.515"/>
+              <dgm:constr type="w" for="ch" forName="wedge3Tx" refType="w" fact="0.31"/>
+              <dgm:constr type="h" for="ch" forName="wedge3Tx" refType="h" fact="0.25"/>
+              <dgm:constr type="l" for="ch" forName="wedge4" refType="w" fact="0.08"/>
+              <dgm:constr type="t" for="ch" forName="wedge4" refType="h" fact="0.08"/>
+              <dgm:constr type="w" for="ch" forName="wedge4" refType="w" fact="0.84"/>
+              <dgm:constr type="h" for="ch" forName="wedge4" refType="h" fact="0.84"/>
+              <dgm:constr type="l" for="ch" forName="wedge4Tx" refType="w" fact="0.175"/>
+              <dgm:constr type="t" for="ch" forName="wedge4Tx" refType="h" fact="0.235"/>
+              <dgm:constr type="w" for="ch" forName="wedge4Tx" refType="w" fact="0.31"/>
+              <dgm:constr type="h" for="ch" forName="wedge4Tx" refType="h" fact="0.25"/>
+              <dgm:constr type="primFontSz" for="ch" ptType="node" op="equ"/>
+            </dgm:constrLst>
+          </dgm:if>
+          <dgm:else name="Name10">
+            <dgm:constrLst>
+              <dgm:constr type="l" for="ch" forName="wedge1" refType="w" fact="0.08"/>
+              <dgm:constr type="t" for="ch" forName="wedge1" refType="w" fact="0.08"/>
+              <dgm:constr type="w" for="ch" forName="wedge1" refType="w" fact="0.84"/>
+              <dgm:constr type="h" for="ch" forName="wedge1" refType="h" fact="0.84"/>
+              <dgm:constr type="l" for="ch" forName="wedge1Tx" refType="w" fact="0.515"/>
+              <dgm:constr type="t" for="ch" forName="wedge1Tx" refType="h" fact="0.235"/>
+              <dgm:constr type="w" for="ch" forName="wedge1Tx" refType="w" fact="0.31"/>
+              <dgm:constr type="h" for="ch" forName="wedge1Tx" refType="h" fact="0.25"/>
+              <dgm:constr type="l" for="ch" forName="wedge2" refType="w" fact="0.08"/>
+              <dgm:constr type="t" for="ch" forName="wedge2" refType="w" fact="0.08"/>
+              <dgm:constr type="w" for="ch" forName="wedge2" refType="w" fact="0.84"/>
+              <dgm:constr type="h" for="ch" forName="wedge2" refType="h" fact="0.84"/>
+              <dgm:constr type="l" for="ch" forName="wedge2Tx" refType="w" fact="0.515"/>
+              <dgm:constr type="t" for="ch" forName="wedge2Tx" refType="h" fact="0.515"/>
+              <dgm:constr type="w" for="ch" forName="wedge2Tx" refType="w" fact="0.31"/>
+              <dgm:constr type="h" for="ch" forName="wedge2Tx" refType="h" fact="0.25"/>
+              <dgm:constr type="l" for="ch" forName="wedge3" refType="w" fact="0.08"/>
+              <dgm:constr type="t" for="ch" forName="wedge3" refType="w" fact="0.08"/>
+              <dgm:constr type="w" for="ch" forName="wedge3" refType="w" fact="0.84"/>
+              <dgm:constr type="h" for="ch" forName="wedge3" refType="h" fact="0.84"/>
+              <dgm:constr type="l" for="ch" forName="wedge3Tx" refType="w" fact="0.175"/>
+              <dgm:constr type="t" for="ch" forName="wedge3Tx" refType="h" fact="0.515"/>
+              <dgm:constr type="w" for="ch" forName="wedge3Tx" refType="w" fact="0.31"/>
+              <dgm:constr type="h" for="ch" forName="wedge3Tx" refType="h" fact="0.25"/>
+              <dgm:constr type="l" for="ch" forName="wedge4" refType="w" fact="0.0446"/>
+              <dgm:constr type="t" for="ch" forName="wedge4" refType="h" fact="0.0446"/>
+              <dgm:constr type="w" for="ch" forName="wedge4" refType="w" fact="0.84"/>
+              <dgm:constr type="h" for="ch" forName="wedge4" refType="h" fact="0.84"/>
+              <dgm:constr type="l" for="ch" forName="wedge4Tx" refType="w" fact="0.145"/>
+              <dgm:constr type="t" for="ch" forName="wedge4Tx" refType="h" fact="0.2"/>
+              <dgm:constr type="w" for="ch" forName="wedge4Tx" refType="w" fact="0.31"/>
+              <dgm:constr type="h" for="ch" forName="wedge4Tx" refType="h" fact="0.25"/>
+              <dgm:constr type="primFontSz" for="ch" ptType="node" op="equ"/>
+            </dgm:constrLst>
+          </dgm:else>
+        </dgm:choose>
+      </dgm:if>
+      <dgm:if name="Name11" axis="ch" ptType="node" func="cnt" op="equ" val="5">
+        <dgm:choose name="Name12">
+          <dgm:if name="Name13" func="var" arg="dir" op="equ" val="norm">
+            <dgm:constrLst>
+              <dgm:constr type="l" for="ch" forName="wedge1" refType="w" fact="0.1094"/>
+              <dgm:constr type="t" for="ch" forName="wedge1" refType="w" fact="0.0395"/>
+              <dgm:constr type="w" for="ch" forName="wedge1" refType="w" fact="0.84"/>
+              <dgm:constr type="h" for="ch" forName="wedge1" refType="h" fact="0.84"/>
+              <dgm:constr type="l" for="ch" forName="wedge1Tx" refType="w" fact="0.54"/>
+              <dgm:constr type="t" for="ch" forName="wedge1Tx" refType="h" fact="0.165"/>
+              <dgm:constr type="w" for="ch" forName="wedge1Tx" refType="w" fact="0.285"/>
+              <dgm:constr type="h" for="ch" forName="wedge1Tx" refType="h" fact="0.195"/>
+              <dgm:constr type="l" for="ch" forName="wedge2" refType="w" fact="0.08"/>
+              <dgm:constr type="t" for="ch" forName="wedge2" refType="w" fact="0.08"/>
+              <dgm:constr type="w" for="ch" forName="wedge2" refType="w" fact="0.84"/>
+              <dgm:constr type="h" for="ch" forName="wedge2" refType="h" fact="0.84"/>
+              <dgm:constr type="l" for="ch" forName="wedge2Tx" refType="w" fact="0.629"/>
+              <dgm:constr type="t" for="ch" forName="wedge2Tx" refType="h" fact="0.46"/>
+              <dgm:constr type="w" for="ch" forName="wedge2Tx" refType="w" fact="0.25"/>
+              <dgm:constr type="h" for="ch" forName="wedge2Tx" refType="h" fact="0.211"/>
+              <dgm:constr type="l" for="ch" forName="wedge3" refType="w" fact="0.08"/>
+              <dgm:constr type="t" for="ch" forName="wedge3" refType="w" fact="0.08"/>
+              <dgm:constr type="w" for="ch" forName="wedge3" refType="w" fact="0.84"/>
+              <dgm:constr type="h" for="ch" forName="wedge3" refType="h" fact="0.84"/>
+              <dgm:constr type="l" for="ch" forName="wedge3Tx" refType="w" fact="0.35"/>
+              <dgm:constr type="t" for="ch" forName="wedge3Tx" refType="h" fact="0.71"/>
+              <dgm:constr type="w" for="ch" forName="wedge3Tx" refType="w" fact="0.3"/>
+              <dgm:constr type="h" for="ch" forName="wedge3Tx" refType="h" fact="0.18"/>
+              <dgm:constr type="l" for="ch" forName="wedge4" refType="w" fact="0.08"/>
+              <dgm:constr type="t" for="ch" forName="wedge4" refType="h" fact="0.08"/>
+              <dgm:constr type="w" for="ch" forName="wedge4" refType="w" fact="0.84"/>
+              <dgm:constr type="h" for="ch" forName="wedge4" refType="h" fact="0.84"/>
+              <dgm:constr type="l" for="ch" forName="wedge4Tx" refType="w" fact="0.12"/>
+              <dgm:constr type="t" for="ch" forName="wedge4Tx" refType="h" fact="0.46"/>
+              <dgm:constr type="w" for="ch" forName="wedge4Tx" refType="w" fact="0.25"/>
+              <dgm:constr type="h" for="ch" forName="wedge4Tx" refType="h" fact="0.211"/>
+              <dgm:constr type="l" for="ch" forName="wedge5" refType="w" fact="0.08"/>
+              <dgm:constr type="t" for="ch" forName="wedge5" refType="h" fact="0.08"/>
+              <dgm:constr type="w" for="ch" forName="wedge5" refType="w" fact="0.84"/>
+              <dgm:constr type="h" for="ch" forName="wedge5" refType="h" fact="0.84"/>
+              <dgm:constr type="l" for="ch" forName="wedge5Tx" refType="w" fact="0.2025"/>
+              <dgm:constr type="t" for="ch" forName="wedge5Tx" refType="h" fact="0.208"/>
+              <dgm:constr type="w" for="ch" forName="wedge5Tx" refType="w" fact="0.285"/>
+              <dgm:constr type="h" for="ch" forName="wedge5Tx" refType="h" fact="0.195"/>
+              <dgm:constr type="primFontSz" for="ch" ptType="node" op="equ"/>
+            </dgm:constrLst>
+          </dgm:if>
+          <dgm:else name="Name14">
+            <dgm:constrLst>
+              <dgm:constr type="l" for="ch" forName="wedge1" refType="w" fact="0.08"/>
+              <dgm:constr type="t" for="ch" forName="wedge1" refType="w" fact="0.08"/>
+              <dgm:constr type="w" for="ch" forName="wedge1" refType="w" fact="0.84"/>
+              <dgm:constr type="h" for="ch" forName="wedge1" refType="h" fact="0.84"/>
+              <dgm:constr type="l" for="ch" forName="wedge1Tx" refType="w" fact="0.51"/>
+              <dgm:constr type="t" for="ch" forName="wedge1Tx" refType="h" fact="0.208"/>
+              <dgm:constr type="w" for="ch" forName="wedge1Tx" refType="w" fact="0.285"/>
+              <dgm:constr type="h" for="ch" forName="wedge1Tx" refType="h" fact="0.195"/>
+              <dgm:constr type="l" for="ch" forName="wedge2" refType="w" fact="0.08"/>
+              <dgm:constr type="t" for="ch" forName="wedge2" refType="w" fact="0.08"/>
+              <dgm:constr type="w" for="ch" forName="wedge2" refType="w" fact="0.84"/>
+              <dgm:constr type="h" for="ch" forName="wedge2" refType="h" fact="0.84"/>
+              <dgm:constr type="l" for="ch" forName="wedge2Tx" refType="w" fact="0.629"/>
+              <dgm:constr type="t" for="ch" forName="wedge2Tx" refType="h" fact="0.46"/>
+              <dgm:constr type="w" for="ch" forName="wedge2Tx" refType="w" fact="0.25"/>
+              <dgm:constr type="h" for="ch" forName="wedge2Tx" refType="h" fact="0.211"/>
+              <dgm:constr type="l" for="ch" forName="wedge3" refType="w" fact="0.08"/>
+              <dgm:constr type="t" for="ch" forName="wedge3" refType="w" fact="0.08"/>
+              <dgm:constr type="w" for="ch" forName="wedge3" refType="w" fact="0.84"/>
+              <dgm:constr type="h" for="ch" forName="wedge3" refType="h" fact="0.84"/>
+              <dgm:constr type="l" for="ch" forName="wedge3Tx" refType="w" fact="0.35"/>
+              <dgm:constr type="t" for="ch" forName="wedge3Tx" refType="h" fact="0.71"/>
+              <dgm:constr type="w" for="ch" forName="wedge3Tx" refType="w" fact="0.3"/>
+              <dgm:constr type="h" for="ch" forName="wedge3Tx" refType="h" fact="0.18"/>
+              <dgm:constr type="l" for="ch" forName="wedge4" refType="w" fact="0.08"/>
+              <dgm:constr type="t" for="ch" forName="wedge4" refType="h" fact="0.08"/>
+              <dgm:constr type="w" for="ch" forName="wedge4" refType="w" fact="0.84"/>
+              <dgm:constr type="h" for="ch" forName="wedge4" refType="h" fact="0.84"/>
+              <dgm:constr type="l" for="ch" forName="wedge4Tx" refType="w" fact="0.12"/>
+              <dgm:constr type="t" for="ch" forName="wedge4Tx" refType="h" fact="0.46"/>
+              <dgm:constr type="w" for="ch" forName="wedge4Tx" refType="w" fact="0.25"/>
+              <dgm:constr type="h" for="ch" forName="wedge4Tx" refType="h" fact="0.211"/>
+              <dgm:constr type="l" for="ch" forName="wedge5" refType="w" fact="0.0506"/>
+              <dgm:constr type="t" for="ch" forName="wedge5" refType="h" fact="0.0395"/>
+              <dgm:constr type="w" for="ch" forName="wedge5" refType="w" fact="0.84"/>
+              <dgm:constr type="h" for="ch" forName="wedge5" refType="h" fact="0.84"/>
+              <dgm:constr type="l" for="ch" forName="wedge5Tx" refType="w" fact="0.18"/>
+              <dgm:constr type="t" for="ch" forName="wedge5Tx" refType="h" fact="0.165"/>
+              <dgm:constr type="w" for="ch" forName="wedge5Tx" refType="w" fact="0.285"/>
+              <dgm:constr type="h" for="ch" forName="wedge5Tx" refType="h" fact="0.195"/>
+              <dgm:constr type="primFontSz" for="ch" ptType="node" op="equ"/>
+            </dgm:constrLst>
+          </dgm:else>
+        </dgm:choose>
+      </dgm:if>
+      <dgm:if name="Name15" axis="ch" ptType="node" func="cnt" op="equ" val="6">
+        <dgm:choose name="Name16">
+          <dgm:if name="Name17" func="var" arg="dir" op="equ" val="norm">
+            <dgm:constrLst>
+              <dgm:constr type="l" for="ch" forName="wedge1" refType="w" fact="0.105"/>
+              <dgm:constr type="t" for="ch" forName="wedge1" refType="w" fact="0.0367"/>
+              <dgm:constr type="w" for="ch" forName="wedge1" refType="w" fact="0.84"/>
+              <dgm:constr type="h" for="ch" forName="wedge1" refType="h" fact="0.84"/>
+              <dgm:constr type="l" for="ch" forName="wedge1Tx" refType="w" fact="0.534"/>
+              <dgm:constr type="t" for="ch" forName="wedge1Tx" refType="h" fact="0.1267"/>
+              <dgm:constr type="w" for="ch" forName="wedge1Tx" refType="w" fact="0.245"/>
+              <dgm:constr type="h" for="ch" forName="wedge1Tx" refType="h" fact="0.18"/>
+              <dgm:constr type="l" for="ch" forName="wedge2" refType="w" fact="0.08"/>
+              <dgm:constr type="t" for="ch" forName="wedge2" refType="w" fact="0.08"/>
+              <dgm:constr type="w" for="ch" forName="wedge2" refType="w" fact="0.84"/>
+              <dgm:constr type="h" for="ch" forName="wedge2" refType="h" fact="0.84"/>
+              <dgm:constr type="l" for="ch" forName="wedge2Tx" refType="w" fact="0.655"/>
+              <dgm:constr type="t" for="ch" forName="wedge2Tx" refType="h" fact="0.415"/>
+              <dgm:constr type="w" for="ch" forName="wedge2Tx" refType="w" fact="0.254"/>
+              <dgm:constr type="h" for="ch" forName="wedge2Tx" refType="h" fact="0.17"/>
+              <dgm:constr type="l" for="ch" forName="wedge3" refType="w" fact="0.08"/>
+              <dgm:constr type="t" for="ch" forName="wedge3" refType="w" fact="0.08"/>
+              <dgm:constr type="w" for="ch" forName="wedge3" refType="w" fact="0.84"/>
+              <dgm:constr type="h" for="ch" forName="wedge3" refType="h" fact="0.84"/>
+              <dgm:constr type="l" for="ch" forName="wedge3Tx" refType="w" fact="0.509"/>
+              <dgm:constr type="t" for="ch" forName="wedge3Tx" refType="h" fact="0.65"/>
+              <dgm:constr type="w" for="ch" forName="wedge3Tx" refType="w" fact="0.245"/>
+              <dgm:constr type="h" for="ch" forName="wedge3Tx" refType="h" fact="0.18"/>
+              <dgm:constr type="l" for="ch" forName="wedge4" refType="w" fact="0.08"/>
+              <dgm:constr type="t" for="ch" forName="wedge4" refType="h" fact="0.08"/>
+              <dgm:constr type="w" for="ch" forName="wedge4" refType="w" fact="0.84"/>
+              <dgm:constr type="h" for="ch" forName="wedge4" refType="h" fact="0.84"/>
+              <dgm:constr type="l" for="ch" forName="wedge4Tx" refType="w" fact="0.246"/>
+              <dgm:constr type="t" for="ch" forName="wedge4Tx" refType="h" fact="0.65"/>
+              <dgm:constr type="w" for="ch" forName="wedge4Tx" refType="w" fact="0.245"/>
+              <dgm:constr type="h" for="ch" forName="wedge4Tx" refType="h" fact="0.18"/>
+              <dgm:constr type="l" for="ch" forName="wedge5" refType="w" fact="0.08"/>
+              <dgm:constr type="t" for="ch" forName="wedge5" refType="h" fact="0.08"/>
+              <dgm:constr type="w" for="ch" forName="wedge5" refType="w" fact="0.84"/>
+              <dgm:constr type="h" for="ch" forName="wedge5" refType="h" fact="0.84"/>
+              <dgm:constr type="l" for="ch" forName="wedge5Tx" refType="w" fact="0.093"/>
+              <dgm:constr type="t" for="ch" forName="wedge5Tx" refType="h" fact="0.415"/>
+              <dgm:constr type="w" for="ch" forName="wedge5Tx" refType="w" fact="0.254"/>
+              <dgm:constr type="h" for="ch" forName="wedge5Tx" refType="h" fact="0.17"/>
+              <dgm:constr type="l" for="ch" forName="wedge6" refType="w" fact="0.08"/>
+              <dgm:constr type="t" for="ch" forName="wedge6" refType="h" fact="0.08"/>
+              <dgm:constr type="w" for="ch" forName="wedge6" refType="w" fact="0.84"/>
+              <dgm:constr type="h" for="ch" forName="wedge6" refType="h" fact="0.84"/>
+              <dgm:constr type="l" for="ch" forName="wedge6Tx" refType="w" fact="0.246"/>
+              <dgm:constr type="t" for="ch" forName="wedge6Tx" refType="h" fact="0.17"/>
+              <dgm:constr type="w" for="ch" forName="wedge6Tx" refType="w" fact="0.245"/>
+              <dgm:constr type="h" for="ch" forName="wedge6Tx" refType="h" fact="0.18"/>
+              <dgm:constr type="primFontSz" for="ch" ptType="node" op="equ"/>
+            </dgm:constrLst>
+          </dgm:if>
+          <dgm:else name="Name18">
+            <dgm:constrLst>
+              <dgm:constr type="l" for="ch" forName="wedge1" refType="w" fact="0.08"/>
+              <dgm:constr type="t" for="ch" forName="wedge1" refType="w" fact="0.08"/>
+              <dgm:constr type="w" for="ch" forName="wedge1" refType="w" fact="0.84"/>
+              <dgm:constr type="h" for="ch" forName="wedge1" refType="h" fact="0.84"/>
+              <dgm:constr type="l" for="ch" forName="wedge1Tx" refType="w" fact="0.509"/>
+              <dgm:constr type="t" for="ch" forName="wedge1Tx" refType="h" fact="0.17"/>
+              <dgm:constr type="w" for="ch" forName="wedge1Tx" refType="w" fact="0.245"/>
+              <dgm:constr type="h" for="ch" forName="wedge1Tx" refType="h" fact="0.18"/>
+              <dgm:constr type="l" for="ch" forName="wedge2" refType="w" fact="0.08"/>
+              <dgm:constr type="t" for="ch" forName="wedge2" refType="w" fact="0.08"/>
+              <dgm:constr type="w" for="ch" forName="wedge2" refType="w" fact="0.84"/>
+              <dgm:constr type="h" for="ch" forName="wedge2" refType="h" fact="0.84"/>
+              <dgm:constr type="l" for="ch" forName="wedge2Tx" refType="w" fact="0.655"/>
+              <dgm:constr type="t" for="ch" forName="wedge2Tx" refType="h" fact="0.415"/>
+              <dgm:constr type="w" for="ch" forName="wedge2Tx" refType="w" fact="0.254"/>
+              <dgm:constr type="h" for="ch" forName="wedge2Tx" refType="h" fact="0.17"/>
+              <dgm:constr type="l" for="ch" forName="wedge3" refType="w" fact="0.08"/>
+              <dgm:constr type="t" for="ch" forName="wedge3" refType="w" fact="0.08"/>
+              <dgm:constr type="w" for="ch" forName="wedge3" refType="w" fact="0.84"/>
+              <dgm:constr type="h" for="ch" forName="wedge3" refType="h" fact="0.84"/>
+              <dgm:constr type="l" for="ch" forName="wedge3Tx" refType="w" fact="0.509"/>
+              <dgm:constr type="t" for="ch" forName="wedge3Tx" refType="h" fact="0.65"/>
+              <dgm:constr type="w" for="ch" forName="wedge3Tx" refType="w" fact="0.245"/>
+              <dgm:constr type="h" for="ch" forName="wedge3Tx" refType="h" fact="0.18"/>
+              <dgm:constr type="l" for="ch" forName="wedge4" refType="w" fact="0.08"/>
+              <dgm:constr type="t" for="ch" forName="wedge4" refType="h" fact="0.08"/>
+              <dgm:constr type="w" for="ch" forName="wedge4" refType="w" fact="0.84"/>
+              <dgm:constr type="h" for="ch" forName="wedge4" refType="h" fact="0.84"/>
+              <dgm:constr type="l" for="ch" forName="wedge4Tx" refType="w" fact="0.246"/>
+              <dgm:constr type="t" for="ch" forName="wedge4Tx" refType="h" fact="0.65"/>
+              <dgm:constr type="w" for="ch" forName="wedge4Tx" refType="w" fact="0.245"/>
+              <dgm:constr type="h" for="ch" forName="wedge4Tx" refType="h" fact="0.18"/>
+              <dgm:constr type="l" for="ch" forName="wedge5" refType="w" fact="0.08"/>
+              <dgm:constr type="t" for="ch" forName="wedge5" refType="h" fact="0.08"/>
+              <dgm:constr type="w" for="ch" forName="wedge5" refType="w" fact="0.84"/>
+              <dgm:constr type="h" for="ch" forName="wedge5" refType="h" fact="0.84"/>
+              <dgm:constr type="l" for="ch" forName="wedge5Tx" refType="w" fact="0.093"/>
+              <dgm:constr type="t" for="ch" forName="wedge5Tx" refType="h" fact="0.415"/>
+              <dgm:constr type="w" for="ch" forName="wedge5Tx" refType="w" fact="0.254"/>
+              <dgm:constr type="h" for="ch" forName="wedge5Tx" refType="h" fact="0.17"/>
+              <dgm:constr type="l" for="ch" forName="wedge6" refType="w" fact="0.055"/>
+              <dgm:constr type="t" for="ch" forName="wedge6" refType="h" fact="0.0367"/>
+              <dgm:constr type="w" for="ch" forName="wedge6" refType="w" fact="0.84"/>
+              <dgm:constr type="h" for="ch" forName="wedge6" refType="h" fact="0.84"/>
+              <dgm:constr type="l" for="ch" forName="wedge6Tx" refType="w" fact="0.221"/>
+              <dgm:constr type="t" for="ch" forName="wedge6Tx" refType="h" fact="0.1267"/>
+              <dgm:constr type="w" for="ch" forName="wedge6Tx" refType="w" fact="0.245"/>
+              <dgm:constr type="h" for="ch" forName="wedge6Tx" refType="h" fact="0.18"/>
+              <dgm:constr type="primFontSz" for="ch" ptType="node" op="equ"/>
+            </dgm:constrLst>
+          </dgm:else>
+        </dgm:choose>
+      </dgm:if>
+      <dgm:else name="Name19">
+        <dgm:choose name="Name20">
+          <dgm:if name="Name21" func="var" arg="dir" op="equ" val="norm">
+            <dgm:constrLst>
+              <dgm:constr type="l" for="ch" forName="wedge1" refType="w" fact="0.1017"/>
+              <dgm:constr type="t" for="ch" forName="wedge1" refType="w" fact="0.035"/>
+              <dgm:constr type="w" for="ch" forName="wedge1" refType="w" fact="0.84"/>
+              <dgm:constr type="h" for="ch" forName="wedge1" refType="h" fact="0.84"/>
+              <dgm:constr type="l" for="ch" forName="wedge1Tx" refType="w" fact="0.53"/>
+              <dgm:constr type="t" for="ch" forName="wedge1Tx" refType="h" fact="0.115"/>
+              <dgm:constr type="w" for="ch" forName="wedge1Tx" refType="w" fact="0.23"/>
+              <dgm:constr type="h" for="ch" forName="wedge1Tx" refType="h" fact="0.145"/>
+              <dgm:constr type="l" for="ch" forName="wedge2" refType="w" fact="0.08"/>
+              <dgm:constr type="t" for="ch" forName="wedge2" refType="w" fact="0.08"/>
+              <dgm:constr type="w" for="ch" forName="wedge2" refType="w" fact="0.84"/>
+              <dgm:constr type="h" for="ch" forName="wedge2" refType="h" fact="0.84"/>
+              <dgm:constr type="l" for="ch" forName="wedge2Tx" refType="w" fact="0.655"/>
+              <dgm:constr type="t" for="ch" forName="wedge2Tx" refType="h" fact="0.38"/>
+              <dgm:constr type="w" for="ch" forName="wedge2Tx" refType="w" fact="0.244"/>
+              <dgm:constr type="h" for="ch" forName="wedge2Tx" refType="h" fact="0.155"/>
+              <dgm:constr type="l" for="ch" forName="wedge3" refType="w" fact="0.08"/>
+              <dgm:constr type="t" for="ch" forName="wedge3" refType="w" fact="0.08"/>
+              <dgm:constr type="w" for="ch" forName="wedge3" refType="w" fact="0.84"/>
+              <dgm:constr type="h" for="ch" forName="wedge3" refType="h" fact="0.84"/>
+              <dgm:constr type="l" for="ch" forName="wedge3Tx" refType="w" fact="0.62"/>
+              <dgm:constr type="t" for="ch" forName="wedge3Tx" refType="h" fact="0.58"/>
+              <dgm:constr type="w" for="ch" forName="wedge3Tx" refType="w" fact="0.22"/>
+              <dgm:constr type="h" for="ch" forName="wedge3Tx" refType="h" fact="0.16"/>
+              <dgm:constr type="l" for="ch" forName="wedge4" refType="w" fact="0.08"/>
+              <dgm:constr type="t" for="ch" forName="wedge4" refType="h" fact="0.08"/>
+              <dgm:constr type="w" for="ch" forName="wedge4" refType="w" fact="0.84"/>
+              <dgm:constr type="h" for="ch" forName="wedge4" refType="h" fact="0.84"/>
+              <dgm:constr type="l" for="ch" forName="wedge4Tx" refType="w" fact="0.3875"/>
+              <dgm:constr type="t" for="ch" forName="wedge4Tx" refType="h" fact="0.74"/>
+              <dgm:constr type="w" for="ch" forName="wedge4Tx" refType="w" fact="0.225"/>
+              <dgm:constr type="h" for="ch" forName="wedge4Tx" refType="h" fact="0.16"/>
+              <dgm:constr type="l" for="ch" forName="wedge5" refType="w" fact="0.08"/>
+              <dgm:constr type="t" for="ch" forName="wedge5" refType="h" fact="0.08"/>
+              <dgm:constr type="w" for="ch" forName="wedge5" refType="w" fact="0.84"/>
+              <dgm:constr type="h" for="ch" forName="wedge5" refType="h" fact="0.84"/>
+              <dgm:constr type="l" for="ch" forName="wedge5Tx" refType="w" fact="0.16"/>
+              <dgm:constr type="t" for="ch" forName="wedge5Tx" refType="h" fact="0.58"/>
+              <dgm:constr type="w" for="ch" forName="wedge5Tx" refType="w" fact="0.22"/>
+              <dgm:constr type="h" for="ch" forName="wedge5Tx" refType="h" fact="0.16"/>
+              <dgm:constr type="l" for="ch" forName="wedge6" refType="w" fact="0.08"/>
+              <dgm:constr type="t" for="ch" forName="wedge6" refType="h" fact="0.08"/>
+              <dgm:constr type="w" for="ch" forName="wedge6" refType="w" fact="0.84"/>
+              <dgm:constr type="h" for="ch" forName="wedge6" refType="h" fact="0.84"/>
+              <dgm:constr type="l" for="ch" forName="wedge6Tx" refType="w" fact="0.101"/>
+              <dgm:constr type="t" for="ch" forName="wedge6Tx" refType="h" fact="0.38"/>
+              <dgm:constr type="w" for="ch" forName="wedge6Tx" refType="w" fact="0.244"/>
+              <dgm:constr type="h" for="ch" forName="wedge6Tx" refType="h" fact="0.155"/>
+              <dgm:constr type="l" for="ch" forName="wedge7" refType="w" fact="0.08"/>
+              <dgm:constr type="t" for="ch" forName="wedge7" refType="h" fact="0.08"/>
+              <dgm:constr type="w" for="ch" forName="wedge7" refType="w" fact="0.84"/>
+              <dgm:constr type="h" for="ch" forName="wedge7" refType="h" fact="0.84"/>
+              <dgm:constr type="l" for="ch" forName="wedge7Tx" refType="w" fact="0.262"/>
+              <dgm:constr type="t" for="ch" forName="wedge7Tx" refType="h" fact="0.16"/>
+              <dgm:constr type="w" for="ch" forName="wedge7Tx" refType="w" fact="0.23"/>
+              <dgm:constr type="h" for="ch" forName="wedge7Tx" refType="h" fact="0.145"/>
+              <dgm:constr type="primFontSz" for="ch" ptType="node" op="equ"/>
+            </dgm:constrLst>
+          </dgm:if>
+          <dgm:else name="Name22">
+            <dgm:constrLst>
+              <dgm:constr type="l" for="ch" forName="wedge1" refType="w" fact="0.08"/>
+              <dgm:constr type="t" for="ch" forName="wedge1" refType="w" fact="0.08"/>
+              <dgm:constr type="w" for="ch" forName="wedge1" refType="w" fact="0.84"/>
+              <dgm:constr type="h" for="ch" forName="wedge1" refType="h" fact="0.84"/>
+              <dgm:constr type="l" for="ch" forName="wedge1Tx" refType="w" fact="0.508"/>
+              <dgm:constr type="t" for="ch" forName="wedge1Tx" refType="h" fact="0.16"/>
+              <dgm:constr type="w" for="ch" forName="wedge1Tx" refType="w" fact="0.23"/>
+              <dgm:constr type="h" for="ch" forName="wedge1Tx" refType="h" fact="0.145"/>
+              <dgm:constr type="l" for="ch" forName="wedge2" refType="w" fact="0.08"/>
+              <dgm:constr type="t" for="ch" forName="wedge2" refType="w" fact="0.08"/>
+              <dgm:constr type="w" for="ch" forName="wedge2" refType="w" fact="0.84"/>
+              <dgm:constr type="h" for="ch" forName="wedge2" refType="h" fact="0.84"/>
+              <dgm:constr type="l" for="ch" forName="wedge2Tx" refType="w" fact="0.655"/>
+              <dgm:constr type="t" for="ch" forName="wedge2Tx" refType="h" fact="0.38"/>
+              <dgm:constr type="w" for="ch" forName="wedge2Tx" refType="w" fact="0.244"/>
+              <dgm:constr type="h" for="ch" forName="wedge2Tx" refType="h" fact="0.155"/>
+              <dgm:constr type="l" for="ch" forName="wedge3" refType="w" fact="0.08"/>
+              <dgm:constr type="t" for="ch" forName="wedge3" refType="w" fact="0.08"/>
+              <dgm:constr type="w" for="ch" forName="wedge3" refType="w" fact="0.84"/>
+              <dgm:constr type="h" for="ch" forName="wedge3" refType="h" fact="0.84"/>
+              <dgm:constr type="l" for="ch" forName="wedge3Tx" refType="w" fact="0.62"/>
+              <dgm:constr type="t" for="ch" forName="wedge3Tx" refType="h" fact="0.58"/>
+              <dgm:constr type="w" for="ch" forName="wedge3Tx" refType="w" fact="0.22"/>
+              <dgm:constr type="h" for="ch" forName="wedge3Tx" refType="h" fact="0.16"/>
+              <dgm:constr type="l" for="ch" forName="wedge4" refType="w" fact="0.08"/>
+              <dgm:constr type="t" for="ch" forName="wedge4" refType="h" fact="0.08"/>
+              <dgm:constr type="w" for="ch" forName="wedge4" refType="w" fact="0.84"/>
+              <dgm:constr type="h" for="ch" forName="wedge4" refType="h" fact="0.84"/>
+              <dgm:constr type="l" for="ch" forName="wedge4Tx" refType="w" fact="0.3875"/>
+              <dgm:constr type="t" for="ch" forName="wedge4Tx" refType="h" fact="0.74"/>
+              <dgm:constr type="w" for="ch" forName="wedge4Tx" refType="w" fact="0.225"/>
+              <dgm:constr type="h" for="ch" forName="wedge4Tx" refType="h" fact="0.16"/>
+              <dgm:constr type="l" for="ch" forName="wedge5" refType="w" fact="0.08"/>
+              <dgm:constr type="t" for="ch" forName="wedge5" refType="h" fact="0.08"/>
+              <dgm:constr type="w" for="ch" forName="wedge5" refType="w" fact="0.84"/>
+              <dgm:constr type="h" for="ch" forName="wedge5" refType="h" fact="0.84"/>
+              <dgm:constr type="l" for="ch" forName="wedge5Tx" refType="w" fact="0.16"/>
+              <dgm:constr type="t" for="ch" forName="wedge5Tx" refType="h" fact="0.58"/>
+              <dgm:constr type="w" for="ch" forName="wedge5Tx" refType="w" fact="0.22"/>
+              <dgm:constr type="h" for="ch" forName="wedge5Tx" refType="h" fact="0.16"/>
+              <dgm:constr type="l" for="ch" forName="wedge6" refType="w" fact="0.08"/>
+              <dgm:constr type="t" for="ch" forName="wedge6" refType="h" fact="0.08"/>
+              <dgm:constr type="w" for="ch" forName="wedge6" refType="w" fact="0.84"/>
+              <dgm:constr type="h" for="ch" forName="wedge6" refType="h" fact="0.84"/>
+              <dgm:constr type="l" for="ch" forName="wedge6Tx" refType="w" fact="0.101"/>
+              <dgm:constr type="t" for="ch" forName="wedge6Tx" refType="h" fact="0.38"/>
+              <dgm:constr type="w" for="ch" forName="wedge6Tx" refType="w" fact="0.244"/>
+              <dgm:constr type="h" for="ch" forName="wedge6Tx" refType="h" fact="0.155"/>
+              <dgm:constr type="l" for="ch" forName="wedge7" refType="w" fact="0.0583"/>
+              <dgm:constr type="t" for="ch" forName="wedge7" refType="h" fact="0.035"/>
+              <dgm:constr type="w" for="ch" forName="wedge7" refType="w" fact="0.84"/>
+              <dgm:constr type="h" for="ch" forName="wedge7" refType="h" fact="0.84"/>
+              <dgm:constr type="l" for="ch" forName="wedge7Tx" refType="w" fact="0.2403"/>
+              <dgm:constr type="t" for="ch" forName="wedge7Tx" refType="h" fact="0.115"/>
+              <dgm:constr type="w" for="ch" forName="wedge7Tx" refType="w" fact="0.23"/>
+              <dgm:constr type="h" for="ch" forName="wedge7Tx" refType="h" fact="0.145"/>
+              <dgm:constr type="primFontSz" for="ch" ptType="node" op="equ"/>
+            </dgm:constrLst>
+          </dgm:else>
+        </dgm:choose>
+      </dgm:else>
+    </dgm:choose>
+    <dgm:ruleLst/>
+    <dgm:choose name="Name23">
+      <dgm:if name="Name24" axis="ch" ptType="node" func="cnt" op="gte" val="1">
+        <dgm:layoutNode name="wedge1">
+          <dgm:alg type="sp"/>
+          <dgm:choose name="Name25">
+            <dgm:if name="Name26" axis="ch" ptType="node" func="cnt" op="equ" val="1">
+              <dgm:shape xmlns:r="http://schemas.openxmlformats.org/officeDocument/2006/relationships" type="ellipse" r:blip="">
+                <dgm:adjLst/>
+              </dgm:shape>
+            </dgm:if>
+            <dgm:if name="Name27" axis="ch" ptType="node" func="cnt" op="equ" val="2">
+              <dgm:shape xmlns:r="http://schemas.openxmlformats.org/officeDocument/2006/relationships" type="pie" r:blip="">
+                <dgm:adjLst>
+                  <dgm:adj idx="1" val="270"/>
+                  <dgm:adj idx="2" val="90"/>
+                </dgm:adjLst>
+              </dgm:shape>
+            </dgm:if>
+            <dgm:if name="Name28" axis="ch" ptType="node" func="cnt" op="equ" val="3">
+              <dgm:shape xmlns:r="http://schemas.openxmlformats.org/officeDocument/2006/relationships" type="pie" r:blip="">
+                <dgm:adjLst>
+                  <dgm:adj idx="1" val="270"/>
+                  <dgm:adj idx="2" val="30"/>
+                </dgm:adjLst>
+              </dgm:shape>
+            </dgm:if>
+            <dgm:if name="Name29" axis="ch" ptType="node" func="cnt" op="equ" val="4">
+              <dgm:shape xmlns:r="http://schemas.openxmlformats.org/officeDocument/2006/relationships" type="pie" r:blip="">
+                <dgm:adjLst>
+                  <dgm:adj idx="1" val="270"/>
+                  <dgm:adj idx="2" val="0"/>
+                </dgm:adjLst>
+              </dgm:shape>
+            </dgm:if>
+            <dgm:if name="Name30" axis="ch" ptType="node" func="cnt" op="equ" val="5">
+              <dgm:shape xmlns:r="http://schemas.openxmlformats.org/officeDocument/2006/relationships" type="pie" r:blip="">
+                <dgm:adjLst>
+                  <dgm:adj idx="1" val="270"/>
+                  <dgm:adj idx="2" val="342"/>
+                </dgm:adjLst>
+              </dgm:shape>
+            </dgm:if>
+            <dgm:if name="Name31" axis="ch" ptType="node" func="cnt" op="equ" val="6">
+              <dgm:shape xmlns:r="http://schemas.openxmlformats.org/officeDocument/2006/relationships" type="pie" r:blip="">
+                <dgm:adjLst>
+                  <dgm:adj idx="1" val="270"/>
+                  <dgm:adj idx="2" val="330"/>
+                </dgm:adjLst>
+              </dgm:shape>
+            </dgm:if>
+            <dgm:else name="Name32">
+              <dgm:shape xmlns:r="http://schemas.openxmlformats.org/officeDocument/2006/relationships" type="pie" r:blip="">
+                <dgm:adjLst>
+                  <dgm:adj idx="1" val="270"/>
+                  <dgm:adj idx="2" val="321.4286"/>
+                </dgm:adjLst>
+              </dgm:shape>
+            </dgm:else>
+          </dgm:choose>
+          <dgm:choose name="Name33">
+            <dgm:if name="Name34" func="var" arg="dir" op="equ" val="norm">
+              <dgm:presOf axis="ch desOrSelf" ptType="node node" st="1 1" cnt="1 0"/>
+            </dgm:if>
+            <dgm:else name="Name35">
+              <dgm:choose name="Name36">
+                <dgm:if name="Name37" axis="ch" ptType="node" func="cnt" op="equ" val="1">
+                  <dgm:presOf axis="ch desOrSelf" ptType="node node" st="1 1" cnt="1 0"/>
+                </dgm:if>
+                <dgm:if name="Name38" axis="ch" ptType="node" func="cnt" op="equ" val="2">
+                  <dgm:presOf axis="ch desOrSelf" ptType="node node" st="2 1" cnt="1 0"/>
+                </dgm:if>
+                <dgm:if name="Name39" axis="ch" ptType="node" func="cnt" op="equ" val="3">
+                  <dgm:presOf axis="ch desOrSelf" ptType="node node" st="3 1" cnt="1 0"/>
+                </dgm:if>
+                <dgm:if name="Name40" axis="ch" ptType="node" func="cnt" op="equ" val="4">
+                  <dgm:presOf axis="ch desOrSelf" ptType="node node" st="4 1" cnt="1 0"/>
+                </dgm:if>
+                <dgm:if name="Name41" axis="ch" ptType="node" func="cnt" op="equ" val="5">
+                  <dgm:presOf axis="ch desOrSelf" ptType="node node" st="5 1" cnt="1 0"/>
+                </dgm:if>
+                <dgm:if name="Name42" axis="ch" ptType="node" func="cnt" op="equ" val="6">
+                  <dgm:presOf axis="ch desOrSelf" ptType="node node" st="6 1" cnt="1 0"/>
+                </dgm:if>
+                <dgm:else name="Name43">
+                  <dgm:presOf axis="ch desOrSelf" ptType="node node" st="7 1" cnt="1 0"/>
+                </dgm:else>
+              </dgm:choose>
+            </dgm:else>
+          </dgm:choose>
+          <dgm:constrLst/>
+          <dgm:ruleLst/>
+        </dgm:layoutNode>
+        <dgm:layoutNode name="wedge1Tx" moveWith="wedge1">
+          <dgm:varLst>
+            <dgm:chMax val="0"/>
+            <dgm:chPref val="0"/>
+            <dgm:bulletEnabled val="1"/>
+          </dgm:varLst>
+          <dgm:alg type="tx"/>
+          <dgm:shape xmlns:r="http://schemas.openxmlformats.org/officeDocument/2006/relationships" type="rect" r:blip="" hideGeom="1">
+            <dgm:adjLst/>
+          </dgm:shape>
+          <dgm:choose name="Name44">
+            <dgm:if name="Name45" func="var" arg="dir" op="equ" val="norm">
+              <dgm:presOf axis="ch desOrSelf" ptType="node node" st="1 1" cnt="1 0"/>
+            </dgm:if>
+            <dgm:else name="Name46">
+              <dgm:choose name="Name47">
+                <dgm:if name="Name48" axis="ch" ptType="node" func="cnt" op="equ" val="1">
+                  <dgm:presOf axis="ch desOrSelf" ptType="node node" st="1 1" cnt="1 0"/>
+                </dgm:if>
+                <dgm:if name="Name49" axis="ch" ptType="node" func="cnt" op="equ" val="2">
+                  <dgm:presOf axis="ch desOrSelf" ptType="node node" st="2 1" cnt="1 0"/>
+                </dgm:if>
+                <dgm:if name="Name50" axis="ch" ptType="node" func="cnt" op="equ" val="3">
+                  <dgm:presOf axis="ch desOrSelf" ptType="node node" st="3 1" cnt="1 0"/>
+                </dgm:if>
+                <dgm:if name="Name51" axis="ch" ptType="node" func="cnt" op="equ" val="4">
+                  <dgm:presOf axis="ch desOrSelf" ptType="node node" st="4 1" cnt="1 0"/>
+                </dgm:if>
+                <dgm:if name="Name52" axis="ch" ptType="node" func="cnt" op="equ" val="5">
+                  <dgm:presOf axis="ch desOrSelf" ptType="node node" st="5 1" cnt="1 0"/>
+                </dgm:if>
+                <dgm:if name="Name53" axis="ch" ptType="node" func="cnt" op="equ" val="6">
+                  <dgm:presOf axis="ch desOrSelf" ptType="node node" st="6 1" cnt="1 0"/>
+                </dgm:if>
+                <dgm:else name="Name54">
+                  <dgm:presOf axis="ch desOrSelf" ptType="node node" st="7 1" cnt="1 0"/>
+                </dgm:else>
+              </dgm:choose>
+            </dgm:else>
+          </dgm:choose>
+          <dgm:constrLst>
+            <dgm:constr type="tMarg" refType="primFontSz" fact="0.1"/>
+            <dgm:constr type="bMarg" refType="primFontSz" fact="0.1"/>
+            <dgm:constr type="lMarg" refType="primFontSz" fact="0.1"/>
+            <dgm:constr type="rMarg" refType="primFontSz" fact="0.1"/>
+            <dgm:constr type="primFontSz" val="65"/>
+          </dgm:constrLst>
+          <dgm:ruleLst>
+            <dgm:rule type="primFontSz" val="5" fact="NaN" max="NaN"/>
+          </dgm:ruleLst>
+        </dgm:layoutNode>
+      </dgm:if>
+      <dgm:else name="Name55"/>
+    </dgm:choose>
+    <dgm:choose name="Name56">
+      <dgm:if name="Name57" axis="ch" ptType="node" func="cnt" op="gte" val="2">
+        <dgm:layoutNode name="wedge2">
+          <dgm:alg type="sp"/>
+          <dgm:choose name="Name58">
+            <dgm:if name="Name59" axis="ch" ptType="node" func="cnt" op="equ" val="2">
+              <dgm:shape xmlns:r="http://schemas.openxmlformats.org/officeDocument/2006/relationships" type="pie" r:blip="">
+                <dgm:adjLst>
+                  <dgm:adj idx="1" val="90"/>
+                  <dgm:adj idx="2" val="270"/>
+                </dgm:adjLst>
+              </dgm:shape>
+            </dgm:if>
+            <dgm:if name="Name60" axis="ch" ptType="node" func="cnt" op="equ" val="3">
+              <dgm:shape xmlns:r="http://schemas.openxmlformats.org/officeDocument/2006/relationships" type="pie" r:blip="">
+                <dgm:adjLst>
+                  <dgm:adj idx="1" val="30"/>
+                  <dgm:adj idx="2" val="150"/>
+                </dgm:adjLst>
+              </dgm:shape>
+            </dgm:if>
+            <dgm:if name="Name61" axis="ch" ptType="node" func="cnt" op="equ" val="4">
+              <dgm:shape xmlns:r="http://schemas.openxmlformats.org/officeDocument/2006/relationships" type="pie" r:blip="">
+                <dgm:adjLst>
+                  <dgm:adj idx="1" val="0"/>
+                  <dgm:adj idx="2" val="90"/>
+                </dgm:adjLst>
+              </dgm:shape>
+            </dgm:if>
+            <dgm:if name="Name62" axis="ch" ptType="node" func="cnt" op="equ" val="5">
+              <dgm:shape xmlns:r="http://schemas.openxmlformats.org/officeDocument/2006/relationships" type="pie" r:blip="">
+                <dgm:adjLst>
+                  <dgm:adj idx="1" val="342"/>
+                  <dgm:adj idx="2" val="54"/>
+                </dgm:adjLst>
+              </dgm:shape>
+            </dgm:if>
+            <dgm:if name="Name63" axis="ch" ptType="node" func="cnt" op="equ" val="6">
+              <dgm:shape xmlns:r="http://schemas.openxmlformats.org/officeDocument/2006/relationships" type="pie" r:blip="">
+                <dgm:adjLst>
+                  <dgm:adj idx="1" val="330"/>
+                  <dgm:adj idx="2" val="30"/>
+                </dgm:adjLst>
+              </dgm:shape>
+            </dgm:if>
+            <dgm:else name="Name64">
+              <dgm:shape xmlns:r="http://schemas.openxmlformats.org/officeDocument/2006/relationships" type="pie" r:blip="">
+                <dgm:adjLst>
+                  <dgm:adj idx="1" val="321.4286"/>
+                  <dgm:adj idx="2" val="12.85714"/>
+                </dgm:adjLst>
+              </dgm:shape>
+            </dgm:else>
+          </dgm:choose>
+          <dgm:choose name="Name65">
+            <dgm:if name="Name66" func="var" arg="dir" op="equ" val="norm">
+              <dgm:presOf axis="ch desOrSelf" ptType="node node" st="2 1" cnt="1 0"/>
+            </dgm:if>
+            <dgm:else name="Name67">
+              <dgm:choose name="Name68">
+                <dgm:if name="Name69" axis="ch" ptType="node" func="cnt" op="equ" val="2">
+                  <dgm:presOf axis="ch desOrSelf" ptType="node node" st="1 1" cnt="1 0"/>
+                </dgm:if>
+                <dgm:if name="Name70" axis="ch" ptType="node" func="cnt" op="equ" val="3">
+                  <dgm:presOf axis="ch desOrSelf" ptType="node node" st="2 1" cnt="1 0"/>
+                </dgm:if>
+                <dgm:if name="Name71" axis="ch" ptType="node" func="cnt" op="equ" val="4">
+                  <dgm:presOf axis="ch desOrSelf" ptType="node node" st="3 1" cnt="1 0"/>
+                </dgm:if>
+                <dgm:if name="Name72" axis="ch" ptType="node" func="cnt" op="equ" val="5">
+                  <dgm:presOf axis="ch desOrSelf" ptType="node node" st="4 1" cnt="1 0"/>
+                </dgm:if>
+                <dgm:if name="Name73" axis="ch" ptType="node" func="cnt" op="equ" val="6">
+                  <dgm:presOf axis="ch desOrSelf" ptType="node node" st="5 1" cnt="1 0"/>
+                </dgm:if>
+                <dgm:else name="Name74">
+                  <dgm:presOf axis="ch desOrSelf" ptType="node node" st="6 1" cnt="1 0"/>
+                </dgm:else>
+              </dgm:choose>
+            </dgm:else>
+          </dgm:choose>
+          <dgm:constrLst/>
+          <dgm:ruleLst/>
+        </dgm:layoutNode>
+        <dgm:layoutNode name="wedge2Tx" moveWith="wedge2">
+          <dgm:varLst>
+            <dgm:chMax val="0"/>
+            <dgm:chPref val="0"/>
+            <dgm:bulletEnabled val="1"/>
+          </dgm:varLst>
+          <dgm:alg type="tx"/>
+          <dgm:shape xmlns:r="http://schemas.openxmlformats.org/officeDocument/2006/relationships" type="rect" r:blip="" hideGeom="1">
+            <dgm:adjLst/>
+          </dgm:shape>
+          <dgm:choose name="Name75">
+            <dgm:if name="Name76" func="var" arg="dir" op="equ" val="norm">
+              <dgm:presOf axis="ch desOrSelf" ptType="node node" st="2 1" cnt="1 0"/>
+            </dgm:if>
+            <dgm:else name="Name77">
+              <dgm:choose name="Name78">
+                <dgm:if name="Name79" axis="ch" ptType="node" func="cnt" op="equ" val="2">
+                  <dgm:presOf axis="ch desOrSelf" ptType="node node" st="1 1" cnt="1 0"/>
+                </dgm:if>
+                <dgm:if name="Name80" axis="ch" ptType="node" func="cnt" op="equ" val="3">
+                  <dgm:presOf axis="ch desOrSelf" ptType="node node" st="2 1" cnt="1 0"/>
+                </dgm:if>
+                <dgm:if name="Name81" axis="ch" ptType="node" func="cnt" op="equ" val="4">
+                  <dgm:presOf axis="ch desOrSelf" ptType="node node" st="3 1" cnt="1 0"/>
+                </dgm:if>
+                <dgm:if name="Name82" axis="ch" ptType="node" func="cnt" op="equ" val="5">
+                  <dgm:presOf axis="ch desOrSelf" ptType="node node" st="4 1" cnt="1 0"/>
+                </dgm:if>
+                <dgm:if name="Name83" axis="ch" ptType="node" func="cnt" op="equ" val="6">
+                  <dgm:presOf axis="ch desOrSelf" ptType="node node" st="5 1" cnt="1 0"/>
+                </dgm:if>
+                <dgm:else name="Name84">
+                  <dgm:presOf axis="ch desOrSelf" ptType="node node" st="6 1" cnt="1 0"/>
+                </dgm:else>
+              </dgm:choose>
+            </dgm:else>
+          </dgm:choose>
+          <dgm:constrLst>
+            <dgm:constr type="tMarg" refType="primFontSz" fact="0.1"/>
+            <dgm:constr type="bMarg" refType="primFontSz" fact="0.1"/>
+            <dgm:constr type="lMarg" refType="primFontSz" fact="0.1"/>
+            <dgm:constr type="rMarg" refType="primFontSz" fact="0.1"/>
+            <dgm:constr type="primFontSz" val="65"/>
+          </dgm:constrLst>
+          <dgm:ruleLst>
+            <dgm:rule type="primFontSz" val="5" fact="NaN" max="NaN"/>
+          </dgm:ruleLst>
+        </dgm:layoutNode>
+      </dgm:if>
+      <dgm:else name="Name85"/>
+    </dgm:choose>
+    <dgm:choose name="Name86">
+      <dgm:if name="Name87" axis="ch" ptType="node" func="cnt" op="gte" val="3">
+        <dgm:layoutNode name="wedge3">
+          <dgm:alg type="sp"/>
+          <dgm:choose name="Name88">
+            <dgm:if name="Name89" axis="ch" ptType="node" func="cnt" op="equ" val="3">
+              <dgm:shape xmlns:r="http://schemas.openxmlformats.org/officeDocument/2006/relationships" type="pie" r:blip="">
+                <dgm:adjLst>
+                  <dgm:adj idx="1" val="150"/>
+                  <dgm:adj idx="2" val="270"/>
+                </dgm:adjLst>
+              </dgm:shape>
+            </dgm:if>
+            <dgm:if name="Name90" axis="ch" ptType="node" func="cnt" op="equ" val="4">
+              <dgm:shape xmlns:r="http://schemas.openxmlformats.org/officeDocument/2006/relationships" type="pie" r:blip="">
+                <dgm:adjLst>
+                  <dgm:adj idx="1" val="90"/>
+                  <dgm:adj idx="2" val="180"/>
+                </dgm:adjLst>
+              </dgm:shape>
+            </dgm:if>
+            <dgm:if name="Name91" axis="ch" ptType="node" func="cnt" op="equ" val="5">
+              <dgm:shape xmlns:r="http://schemas.openxmlformats.org/officeDocument/2006/relationships" type="pie" r:blip="">
+                <dgm:adjLst>
+                  <dgm:adj idx="1" val="54"/>
+                  <dgm:adj idx="2" val="126"/>
+                </dgm:adjLst>
+              </dgm:shape>
+            </dgm:if>
+            <dgm:if name="Name92" axis="ch" ptType="node" func="cnt" op="equ" val="6">
+              <dgm:shape xmlns:r="http://schemas.openxmlformats.org/officeDocument/2006/relationships" type="pie" r:blip="">
+                <dgm:adjLst>
+                  <dgm:adj idx="1" val="30"/>
+                  <dgm:adj idx="2" val="90"/>
+                </dgm:adjLst>
+              </dgm:shape>
+            </dgm:if>
+            <dgm:else name="Name93">
+              <dgm:shape xmlns:r="http://schemas.openxmlformats.org/officeDocument/2006/relationships" type="pie" r:blip="">
+                <dgm:adjLst>
+                  <dgm:adj idx="1" val="12.85714"/>
+                  <dgm:adj idx="2" val="64.28571"/>
+                </dgm:adjLst>
+              </dgm:shape>
+            </dgm:else>
+          </dgm:choose>
+          <dgm:choose name="Name94">
+            <dgm:if name="Name95" func="var" arg="dir" op="equ" val="norm">
+              <dgm:presOf axis="ch desOrSelf" ptType="node node" st="3 1" cnt="1 0"/>
+            </dgm:if>
+            <dgm:else name="Name96">
+              <dgm:choose name="Name97">
+                <dgm:if name="Name98" axis="ch" ptType="node" func="cnt" op="equ" val="3">
+                  <dgm:presOf axis="ch desOrSelf" ptType="node node" st="1 1" cnt="1 0"/>
+                </dgm:if>
+                <dgm:if name="Name99" axis="ch" ptType="node" func="cnt" op="equ" val="4">
+                  <dgm:presOf axis="ch desOrSelf" ptType="node node" st="2 1" cnt="1 0"/>
+                </dgm:if>
+                <dgm:if name="Name100" axis="ch" ptType="node" func="cnt" op="equ" val="5">
+                  <dgm:presOf axis="ch desOrSelf" ptType="node node" st="3 1" cnt="1 0"/>
+                </dgm:if>
+                <dgm:if name="Name101" axis="ch" ptType="node" func="cnt" op="equ" val="6">
+                  <dgm:presOf axis="ch desOrSelf" ptType="node node" st="4 1" cnt="1 0"/>
+                </dgm:if>
+                <dgm:else name="Name102">
+                  <dgm:presOf axis="ch desOrSelf" ptType="node node" st="5 1" cnt="1 0"/>
+                </dgm:else>
+              </dgm:choose>
+            </dgm:else>
+          </dgm:choose>
+          <dgm:constrLst/>
+          <dgm:ruleLst/>
+        </dgm:layoutNode>
+        <dgm:layoutNode name="wedge3Tx" moveWith="wedge3">
+          <dgm:varLst>
+            <dgm:chMax val="0"/>
+            <dgm:chPref val="0"/>
+            <dgm:bulletEnabled val="1"/>
+          </dgm:varLst>
+          <dgm:alg type="tx"/>
+          <dgm:shape xmlns:r="http://schemas.openxmlformats.org/officeDocument/2006/relationships" type="rect" r:blip="" hideGeom="1">
+            <dgm:adjLst/>
+          </dgm:shape>
+          <dgm:choose name="Name103">
+            <dgm:if name="Name104" func="var" arg="dir" op="equ" val="norm">
+              <dgm:presOf axis="ch desOrSelf" ptType="node node" st="3 1" cnt="1 0"/>
+            </dgm:if>
+            <dgm:else name="Name105">
+              <dgm:choose name="Name106">
+                <dgm:if name="Name107" axis="ch" ptType="node" func="cnt" op="equ" val="3">
+                  <dgm:presOf axis="ch desOrSelf" ptType="node node" st="1 1" cnt="1 0"/>
+                </dgm:if>
+                <dgm:if name="Name108" axis="ch" ptType="node" func="cnt" op="equ" val="4">
+                  <dgm:presOf axis="ch desOrSelf" ptType="node node" st="2 1" cnt="1 0"/>
+                </dgm:if>
+                <dgm:if name="Name109" axis="ch" ptType="node" func="cnt" op="equ" val="5">
+                  <dgm:presOf axis="ch desOrSelf" ptType="node node" st="3 1" cnt="1 0"/>
+                </dgm:if>
+                <dgm:if name="Name110" axis="ch" ptType="node" func="cnt" op="equ" val="6">
+                  <dgm:presOf axis="ch desOrSelf" ptType="node node" st="4 1" cnt="1 0"/>
+                </dgm:if>
+                <dgm:else name="Name111">
+                  <dgm:presOf axis="ch desOrSelf" ptType="node node" st="5 1" cnt="1 0"/>
+                </dgm:else>
+              </dgm:choose>
+            </dgm:else>
+          </dgm:choose>
+          <dgm:constrLst>
+            <dgm:constr type="tMarg" refType="primFontSz" fact="0.1"/>
+            <dgm:constr type="bMarg" refType="primFontSz" fact="0.1"/>
+            <dgm:constr type="lMarg" refType="primFontSz" fact="0.1"/>
+            <dgm:constr type="rMarg" refType="primFontSz" fact="0.1"/>
+            <dgm:constr type="primFontSz" val="65"/>
+          </dgm:constrLst>
+          <dgm:ruleLst>
+            <dgm:rule type="primFontSz" val="5" fact="NaN" max="NaN"/>
+          </dgm:ruleLst>
+        </dgm:layoutNode>
+      </dgm:if>
+      <dgm:else name="Name112"/>
+    </dgm:choose>
+    <dgm:choose name="Name113">
+      <dgm:if name="Name114" axis="ch" ptType="node" func="cnt" op="gte" val="4">
+        <dgm:layoutNode name="wedge4">
+          <dgm:alg type="sp"/>
+          <dgm:choose name="Name115">
+            <dgm:if name="Name116" axis="ch" ptType="node" func="cnt" op="equ" val="4">
+              <dgm:shape xmlns:r="http://schemas.openxmlformats.org/officeDocument/2006/relationships" type="pie" r:blip="">
+                <dgm:adjLst>
+                  <dgm:adj idx="1" val="180"/>
+                  <dgm:adj idx="2" val="270"/>
+                </dgm:adjLst>
+              </dgm:shape>
+            </dgm:if>
+            <dgm:if name="Name117" axis="ch" ptType="node" func="cnt" op="equ" val="5">
+              <dgm:shape xmlns:r="http://schemas.openxmlformats.org/officeDocument/2006/relationships" type="pie" r:blip="">
+                <dgm:adjLst>
+                  <dgm:adj idx="1" val="126"/>
+                  <dgm:adj idx="2" val="198"/>
+                </dgm:adjLst>
+              </dgm:shape>
+            </dgm:if>
+            <dgm:if name="Name118" axis="ch" ptType="node" func="cnt" op="equ" val="6">
+              <dgm:shape xmlns:r="http://schemas.openxmlformats.org/officeDocument/2006/relationships" type="pie" r:blip="">
+                <dgm:adjLst>
+                  <dgm:adj idx="1" val="90"/>
+                  <dgm:adj idx="2" val="150"/>
+                </dgm:adjLst>
+              </dgm:shape>
+            </dgm:if>
+            <dgm:else name="Name119">
+              <dgm:shape xmlns:r="http://schemas.openxmlformats.org/officeDocument/2006/relationships" type="pie" r:blip="">
+                <dgm:adjLst>
+                  <dgm:adj idx="1" val="64.2871"/>
+                  <dgm:adj idx="2" val="115.7143"/>
+                </dgm:adjLst>
+              </dgm:shape>
+            </dgm:else>
+          </dgm:choose>
+          <dgm:choose name="Name120">
+            <dgm:if name="Name121" func="var" arg="dir" op="equ" val="norm">
+              <dgm:presOf axis="ch desOrSelf" ptType="node node" st="4 1" cnt="1 0"/>
+            </dgm:if>
+            <dgm:else name="Name122">
+              <dgm:choose name="Name123">
+                <dgm:if name="Name124" axis="ch" ptType="node" func="cnt" op="equ" val="4">
+                  <dgm:presOf axis="ch desOrSelf" ptType="node node" st="1 1" cnt="1 0"/>
+                </dgm:if>
+                <dgm:if name="Name125" axis="ch" ptType="node" func="cnt" op="equ" val="5">
+                  <dgm:presOf axis="ch desOrSelf" ptType="node node" st="2 1" cnt="1 0"/>
+                </dgm:if>
+                <dgm:if name="Name126" axis="ch" ptType="node" func="cnt" op="equ" val="6">
+                  <dgm:presOf axis="ch desOrSelf" ptType="node node" st="3 1" cnt="1 0"/>
+                </dgm:if>
+                <dgm:else name="Name127">
+                  <dgm:presOf axis="ch desOrSelf" ptType="node node" st="4 1" cnt="1 0"/>
+                </dgm:else>
+              </dgm:choose>
+            </dgm:else>
+          </dgm:choose>
+          <dgm:constrLst/>
+          <dgm:ruleLst/>
+        </dgm:layoutNode>
+        <dgm:layoutNode name="wedge4Tx" moveWith="wedge4">
+          <dgm:varLst>
+            <dgm:chMax val="0"/>
+            <dgm:chPref val="0"/>
+            <dgm:bulletEnabled val="1"/>
+          </dgm:varLst>
+          <dgm:alg type="tx"/>
+          <dgm:shape xmlns:r="http://schemas.openxmlformats.org/officeDocument/2006/relationships" type="rect" r:blip="" hideGeom="1">
+            <dgm:adjLst/>
+          </dgm:shape>
+          <dgm:choose name="Name128">
+            <dgm:if name="Name129" func="var" arg="dir" op="equ" val="norm">
+              <dgm:presOf axis="ch desOrSelf" ptType="node node" st="4 1" cnt="1 0"/>
+            </dgm:if>
+            <dgm:else name="Name130">
+              <dgm:choose name="Name131">
+                <dgm:if name="Name132" axis="ch" ptType="node" func="cnt" op="equ" val="4">
+                  <dgm:presOf axis="ch desOrSelf" ptType="node node" st="1 1" cnt="1 0"/>
+                </dgm:if>
+                <dgm:if name="Name133" axis="ch" ptType="node" func="cnt" op="equ" val="5">
+                  <dgm:presOf axis="ch desOrSelf" ptType="node node" st="2 1" cnt="1 0"/>
+                </dgm:if>
+                <dgm:if name="Name134" axis="ch" ptType="node" func="cnt" op="equ" val="6">
+                  <dgm:presOf axis="ch desOrSelf" ptType="node node" st="3 1" cnt="1 0"/>
+                </dgm:if>
+                <dgm:else name="Name135">
+                  <dgm:presOf axis="ch desOrSelf" ptType="node node" st="4 1" cnt="1 0"/>
+                </dgm:else>
+              </dgm:choose>
+            </dgm:else>
+          </dgm:choose>
+          <dgm:constrLst>
+            <dgm:constr type="tMarg" refType="primFontSz" fact="0.1"/>
+            <dgm:constr type="bMarg" refType="primFontSz" fact="0.1"/>
+            <dgm:constr type="lMarg" refType="primFontSz" fact="0.1"/>
+            <dgm:constr type="rMarg" refType="primFontSz" fact="0.1"/>
+            <dgm:constr type="primFontSz" val="65"/>
+          </dgm:constrLst>
+          <dgm:ruleLst>
+            <dgm:rule type="primFontSz" val="5" fact="NaN" max="NaN"/>
+          </dgm:ruleLst>
+        </dgm:layoutNode>
+      </dgm:if>
+      <dgm:else name="Name136"/>
+    </dgm:choose>
+    <dgm:choose name="Name137">
+      <dgm:if name="Name138" axis="ch" ptType="node" func="cnt" op="gte" val="5">
+        <dgm:layoutNode name="wedge5">
+          <dgm:alg type="sp"/>
+          <dgm:choose name="Name139">
+            <dgm:if name="Name140" axis="ch" ptType="node" func="cnt" op="equ" val="5">
+              <dgm:shape xmlns:r="http://schemas.openxmlformats.org/officeDocument/2006/relationships" type="pie" r:blip="">
+                <dgm:adjLst>
+                  <dgm:adj idx="1" val="198"/>
+                  <dgm:adj idx="2" val="270"/>
+                </dgm:adjLst>
+              </dgm:shape>
+            </dgm:if>
+            <dgm:if name="Name141" axis="ch" ptType="node" func="cnt" op="equ" val="6">
+              <dgm:shape xmlns:r="http://schemas.openxmlformats.org/officeDocument/2006/relationships" type="pie" r:blip="">
+                <dgm:adjLst>
+                  <dgm:adj idx="1" val="150"/>
+                  <dgm:adj idx="2" val="210"/>
+                </dgm:adjLst>
+              </dgm:shape>
+            </dgm:if>
+            <dgm:else name="Name142">
+              <dgm:shape xmlns:r="http://schemas.openxmlformats.org/officeDocument/2006/relationships" type="pie" r:blip="">
+                <dgm:adjLst>
+                  <dgm:adj idx="1" val="115.7143"/>
+                  <dgm:adj idx="2" val="167.1429"/>
+                </dgm:adjLst>
+              </dgm:shape>
+            </dgm:else>
+          </dgm:choose>
+          <dgm:choose name="Name143">
+            <dgm:if name="Name144" func="var" arg="dir" op="equ" val="norm">
+              <dgm:presOf axis="ch desOrSelf" ptType="node node" st="5 1" cnt="1 0"/>
+            </dgm:if>
+            <dgm:else name="Name145">
+              <dgm:choose name="Name146">
+                <dgm:if name="Name147" axis="ch" ptType="node" func="cnt" op="equ" val="5">
+                  <dgm:presOf axis="ch desOrSelf" ptType="node node" st="1 1" cnt="1 0"/>
+                </dgm:if>
+                <dgm:if name="Name148" axis="ch" ptType="node" func="cnt" op="equ" val="6">
+                  <dgm:presOf axis="ch desOrSelf" ptType="node node" st="2 1" cnt="1 0"/>
+                </dgm:if>
+                <dgm:else name="Name149">
+                  <dgm:presOf axis="ch desOrSelf" ptType="node node" st="3 1" cnt="1 0"/>
+                </dgm:else>
+              </dgm:choose>
+            </dgm:else>
+          </dgm:choose>
+          <dgm:constrLst/>
+          <dgm:ruleLst/>
+        </dgm:layoutNode>
+        <dgm:layoutNode name="wedge5Tx" moveWith="wedge5">
+          <dgm:varLst>
+            <dgm:chMax val="0"/>
+            <dgm:chPref val="0"/>
+            <dgm:bulletEnabled val="1"/>
+          </dgm:varLst>
+          <dgm:alg type="tx"/>
+          <dgm:shape xmlns:r="http://schemas.openxmlformats.org/officeDocument/2006/relationships" type="rect" r:blip="" hideGeom="1">
+            <dgm:adjLst/>
+          </dgm:shape>
+          <dgm:choose name="Name150">
+            <dgm:if name="Name151" func="var" arg="dir" op="equ" val="norm">
+              <dgm:presOf axis="ch desOrSelf" ptType="node node" st="5 1" cnt="1 0"/>
+            </dgm:if>
+            <dgm:else name="Name152">
+              <dgm:choose name="Name153">
+                <dgm:if name="Name154" axis="ch" ptType="node" func="cnt" op="equ" val="5">
+                  <dgm:presOf axis="ch desOrSelf" ptType="node node" st="1 1" cnt="1 0"/>
+                </dgm:if>
+                <dgm:if name="Name155" axis="ch" ptType="node" func="cnt" op="equ" val="6">
+                  <dgm:presOf axis="ch desOrSelf" ptType="node node" st="2 1" cnt="1 0"/>
+                </dgm:if>
+                <dgm:else name="Name156">
+                  <dgm:presOf axis="ch desOrSelf" ptType="node node" st="3 1" cnt="1 0"/>
+                </dgm:else>
+              </dgm:choose>
+            </dgm:else>
+          </dgm:choose>
+          <dgm:constrLst>
+            <dgm:constr type="tMarg" refType="primFontSz" fact="0.1"/>
+            <dgm:constr type="bMarg" refType="primFontSz" fact="0.1"/>
+            <dgm:constr type="lMarg" refType="primFontSz" fact="0.1"/>
+            <dgm:constr type="rMarg" refType="primFontSz" fact="0.1"/>
+            <dgm:constr type="primFontSz" val="65"/>
+          </dgm:constrLst>
+          <dgm:ruleLst>
+            <dgm:rule type="primFontSz" val="5" fact="NaN" max="NaN"/>
+          </dgm:ruleLst>
+        </dgm:layoutNode>
+      </dgm:if>
+      <dgm:else name="Name157"/>
+    </dgm:choose>
+    <dgm:choose name="Name158">
+      <dgm:if name="Name159" axis="ch" ptType="node" func="cnt" op="gte" val="6">
+        <dgm:layoutNode name="wedge6">
+          <dgm:alg type="sp"/>
+          <dgm:choose name="Name160">
+            <dgm:if name="Name161" axis="ch" ptType="node" func="cnt" op="equ" val="6">
+              <dgm:shape xmlns:r="http://schemas.openxmlformats.org/officeDocument/2006/relationships" type="pie" r:blip="">
+                <dgm:adjLst>
+                  <dgm:adj idx="1" val="210"/>
+                  <dgm:adj idx="2" val="270"/>
+                </dgm:adjLst>
+              </dgm:shape>
+            </dgm:if>
+            <dgm:else name="Name162">
+              <dgm:shape xmlns:r="http://schemas.openxmlformats.org/officeDocument/2006/relationships" type="pie" r:blip="">
+                <dgm:adjLst>
+                  <dgm:adj idx="1" val="167.1429"/>
+                  <dgm:adj idx="2" val="218.5714"/>
+                </dgm:adjLst>
+              </dgm:shape>
+            </dgm:else>
+          </dgm:choose>
+          <dgm:choose name="Name163">
+            <dgm:if name="Name164" func="var" arg="dir" op="equ" val="norm">
+              <dgm:presOf axis="ch desOrSelf" ptType="node node" st="6 1" cnt="1 0"/>
+            </dgm:if>
+            <dgm:else name="Name165">
+              <dgm:choose name="Name166">
+                <dgm:if name="Name167" axis="ch" ptType="node" func="cnt" op="equ" val="6">
+                  <dgm:presOf axis="ch desOrSelf" ptType="node node" st="1 1" cnt="1 0"/>
+                </dgm:if>
+                <dgm:else name="Name168">
+                  <dgm:presOf axis="ch desOrSelf" ptType="node node" st="2 1" cnt="1 0"/>
+                </dgm:else>
+              </dgm:choose>
+            </dgm:else>
+          </dgm:choose>
+          <dgm:constrLst/>
+          <dgm:ruleLst/>
+        </dgm:layoutNode>
+        <dgm:layoutNode name="wedge6Tx" moveWith="wedge6">
+          <dgm:varLst>
+            <dgm:chMax val="0"/>
+            <dgm:chPref val="0"/>
+            <dgm:bulletEnabled val="1"/>
+          </dgm:varLst>
+          <dgm:alg type="tx"/>
+          <dgm:shape xmlns:r="http://schemas.openxmlformats.org/officeDocument/2006/relationships" type="rect" r:blip="" hideGeom="1">
+            <dgm:adjLst/>
+          </dgm:shape>
+          <dgm:choose name="Name169">
+            <dgm:if name="Name170" func="var" arg="dir" op="equ" val="norm">
+              <dgm:presOf axis="ch desOrSelf" ptType="node node" st="6 1" cnt="1 0"/>
+            </dgm:if>
+            <dgm:else name="Name171">
+              <dgm:choose name="Name172">
+                <dgm:if name="Name173" axis="ch" ptType="node" func="cnt" op="equ" val="6">
+                  <dgm:presOf axis="ch desOrSelf" ptType="node node" st="1 1" cnt="1 0"/>
+                </dgm:if>
+                <dgm:else name="Name174">
+                  <dgm:presOf axis="ch desOrSelf" ptType="node node" st="2 1" cnt="1 0"/>
+                </dgm:else>
+              </dgm:choose>
+            </dgm:else>
+          </dgm:choose>
+          <dgm:constrLst>
+            <dgm:constr type="tMarg" refType="primFontSz" fact="0.1"/>
+            <dgm:constr type="bMarg" refType="primFontSz" fact="0.1"/>
+            <dgm:constr type="lMarg" refType="primFontSz" fact="0.1"/>
+            <dgm:constr type="rMarg" refType="primFontSz" fact="0.1"/>
+            <dgm:constr type="primFontSz" val="65"/>
+          </dgm:constrLst>
+          <dgm:ruleLst>
+            <dgm:rule type="primFontSz" val="5" fact="NaN" max="NaN"/>
+          </dgm:ruleLst>
+        </dgm:layoutNode>
+      </dgm:if>
+      <dgm:else name="Name175"/>
+    </dgm:choose>
+    <dgm:choose name="Name176">
+      <dgm:if name="Name177" axis="ch" ptType="node" func="cnt" op="gte" val="7">
+        <dgm:layoutNode name="wedge7">
+          <dgm:alg type="sp"/>
+          <dgm:shape xmlns:r="http://schemas.openxmlformats.org/officeDocument/2006/relationships" type="pie" r:blip="">
+            <dgm:adjLst>
+              <dgm:adj idx="1" val="218.5714"/>
+              <dgm:adj idx="2" val="270"/>
+            </dgm:adjLst>
+          </dgm:shape>
+          <dgm:choose name="Name178">
+            <dgm:if name="Name179" func="var" arg="dir" op="equ" val="norm">
+              <dgm:presOf axis="ch desOrSelf" ptType="node node" st="7 1" cnt="1 0"/>
+            </dgm:if>
+            <dgm:else name="Name180">
+              <dgm:presOf axis="ch desOrSelf" ptType="node node" st="1 1" cnt="1 0"/>
+            </dgm:else>
+          </dgm:choose>
+          <dgm:constrLst/>
+          <dgm:ruleLst/>
+        </dgm:layoutNode>
+        <dgm:layoutNode name="wedge7Tx" moveWith="wedge7">
+          <dgm:varLst>
+            <dgm:chMax val="0"/>
+            <dgm:chPref val="0"/>
+            <dgm:bulletEnabled val="1"/>
+          </dgm:varLst>
+          <dgm:alg type="tx"/>
+          <dgm:shape xmlns:r="http://schemas.openxmlformats.org/officeDocument/2006/relationships" type="rect" r:blip="" hideGeom="1">
+            <dgm:adjLst/>
+          </dgm:shape>
+          <dgm:choose name="Name181">
+            <dgm:if name="Name182" func="var" arg="dir" op="equ" val="norm">
+              <dgm:presOf axis="ch desOrSelf" ptType="node node" st="7 1" cnt="1 0"/>
+            </dgm:if>
+            <dgm:else name="Name183">
+              <dgm:presOf axis="ch desOrSelf" ptType="node node" st="1 1" cnt="1 0"/>
+            </dgm:else>
+          </dgm:choose>
+          <dgm:constrLst>
+            <dgm:constr type="tMarg" refType="primFontSz" fact="0.1"/>
+            <dgm:constr type="bMarg" refType="primFontSz" fact="0.1"/>
+            <dgm:constr type="lMarg" refType="primFontSz" fact="0.1"/>
+            <dgm:constr type="rMarg" refType="primFontSz" fact="0.1"/>
+            <dgm:constr type="primFontSz" val="65"/>
+          </dgm:constrLst>
+          <dgm:ruleLst>
+            <dgm:rule type="primFontSz" val="5" fact="NaN" max="NaN"/>
+          </dgm:ruleLst>
+        </dgm:layoutNode>
+      </dgm:if>
+      <dgm:else name="Name184"/>
+    </dgm:choose>
+  </dgm:layoutNode>
+</dgm:layoutDef>
+</file>
+
+<file path=ppt/diagrams/layout7.xml><?xml version="1.0" encoding="utf-8"?>
+<dgm:layoutDef xmlns:dgm="http://schemas.openxmlformats.org/drawingml/2006/diagram" xmlns:a="http://schemas.openxmlformats.org/drawingml/2006/main" uniqueId="urn:microsoft.com/office/officeart/2005/8/layout/chart3">
+  <dgm:title val=""/>
+  <dgm:desc val=""/>
+  <dgm:catLst>
+    <dgm:cat type="relationship" pri="27000"/>
+    <dgm:cat type="cycle" pri="8000"/>
+  </dgm:catLst>
+  <dgm:sampData useDef="1">
+    <dgm:dataModel>
+      <dgm:ptLst/>
+      <dgm:bg/>
+      <dgm:whole/>
+    </dgm:dataModel>
+  </dgm:sampData>
+  <dgm:styleData useDef="1">
+    <dgm:dataModel>
+      <dgm:ptLst/>
+      <dgm:bg/>
+      <dgm:whole/>
+    </dgm:dataModel>
+  </dgm:styleData>
+  <dgm:clrData>
+    <dgm:dataModel>
+      <dgm:ptLst>
+        <dgm:pt modelId="0" type="doc"/>
+        <dgm:pt modelId="1"/>
+        <dgm:pt modelId="2"/>
+        <dgm:pt modelId="3"/>
+        <dgm:pt modelId="4"/>
+        <dgm:pt modelId="5"/>
+        <dgm:pt modelId="6"/>
+      </dgm:ptLst>
+      <dgm:cxnLst>
+        <dgm:cxn modelId="7" srcId="0" destId="1" srcOrd="0" destOrd="0"/>
+        <dgm:cxn modelId="8" srcId="0" destId="2" srcOrd="1" destOrd="0"/>
+        <dgm:cxn modelId="9" srcId="0" destId="3" srcOrd="2" destOrd="0"/>
+        <dgm:cxn modelId="10" srcId="0" destId="4" srcOrd="3" destOrd="0"/>
+        <dgm:cxn modelId="11" srcId="0" destId="5" srcOrd="4" destOrd="0"/>
+        <dgm:cxn modelId="12" srcId="0" destId="6" srcOrd="5" destOrd="0"/>
+      </dgm:cxnLst>
+      <dgm:bg/>
+      <dgm:whole/>
+    </dgm:dataModel>
+  </dgm:clrData>
+  <dgm:layoutNode name="compositeShape">
+    <dgm:varLst>
+      <dgm:chMax val="7"/>
+      <dgm:dir/>
+      <dgm:resizeHandles val="exact"/>
+    </dgm:varLst>
+    <dgm:alg type="composite">
+      <dgm:param type="horzAlign" val="ctr"/>
+      <dgm:param type="vertAlign" val="mid"/>
+      <dgm:param type="ar" val="1"/>
+    </dgm:alg>
+    <dgm:presOf/>
+    <dgm:shape xmlns:r="http://schemas.openxmlformats.org/officeDocument/2006/relationships" r:blip="">
+      <dgm:adjLst/>
+    </dgm:shape>
+    <dgm:choose name="Name0">
+      <dgm:if name="Name1" axis="ch" ptType="node" func="cnt" op="equ" val="1">
+        <dgm:constrLst>
+          <dgm:constr type="l" for="ch" forName="wedge1" refType="w" fact="0.08"/>
+          <dgm:constr type="t" for="ch" forName="wedge1" refType="w" fact="0.08"/>
+          <dgm:constr type="w" for="ch" forName="wedge1" refType="w" fact="0.84"/>
+          <dgm:constr type="h" for="ch" forName="wedge1" refType="h" fact="0.84"/>
+          <dgm:constr type="l" for="ch" forName="wedge1Tx" refType="w" fact="0.205"/>
+          <dgm:constr type="t" for="ch" forName="wedge1Tx" refType="h" fact="0.205"/>
+          <dgm:constr type="w" for="ch" forName="wedge1Tx" refType="w" fact="0.59"/>
+          <dgm:constr type="h" for="ch" forName="wedge1Tx" refType="h" fact="0.59"/>
+          <dgm:constr type="primFontSz" for="ch" ptType="node" op="equ"/>
+        </dgm:constrLst>
+      </dgm:if>
+      <dgm:if name="Name2" axis="ch" ptType="node" func="cnt" op="equ" val="2">
+        <dgm:constrLst>
+          <dgm:constr type="l" for="ch" forName="wedge1" refType="w" fact="0.1"/>
+          <dgm:constr type="t" for="ch" forName="wedge1" refType="w" fact="0.08"/>
+          <dgm:constr type="w" for="ch" forName="wedge1" refType="w" fact="0.84"/>
+          <dgm:constr type="h" for="ch" forName="wedge1" refType="h" fact="0.84"/>
+          <dgm:constr type="l" for="ch" forName="wedge1Tx" refType="w" fact="0.52"/>
+          <dgm:constr type="t" for="ch" forName="wedge1Tx" refType="h" fact="0.205"/>
+          <dgm:constr type="w" for="ch" forName="wedge1Tx" refType="w" fact="0.295"/>
+          <dgm:constr type="h" for="ch" forName="wedge1Tx" refType="h" fact="0.59"/>
+          <dgm:constr type="l" for="ch" forName="wedge2" refType="w" fact="0.08"/>
+          <dgm:constr type="t" for="ch" forName="wedge2" refType="w" fact="0.08"/>
+          <dgm:constr type="w" for="ch" forName="wedge2" refType="w" fact="0.84"/>
+          <dgm:constr type="h" for="ch" forName="wedge2" refType="h" fact="0.84"/>
+          <dgm:constr type="l" for="ch" forName="wedge2Tx" refType="w" fact="0.2"/>
+          <dgm:constr type="t" for="ch" forName="wedge2Tx" refType="h" fact="0.205"/>
+          <dgm:constr type="w" for="ch" forName="wedge2Tx" refType="w" fact="0.295"/>
+          <dgm:constr type="h" for="ch" forName="wedge2Tx" refType="h" fact="0.59"/>
+          <dgm:constr type="primFontSz" for="ch" ptType="node" op="equ"/>
+        </dgm:constrLst>
+      </dgm:if>
+      <dgm:if name="Name3" axis="ch" ptType="node" func="cnt" op="equ" val="3">
+        <dgm:choose name="Name4">
+          <dgm:if name="Name5" func="var" arg="dir" op="equ" val="norm">
+            <dgm:constrLst>
+              <dgm:constr type="l" for="ch" forName="wedge1" refType="w" fact="0.1233"/>
+              <dgm:constr type="t" for="ch" forName="wedge1" refType="w" fact="0.055"/>
+              <dgm:constr type="w" for="ch" forName="wedge1" refType="w" fact="0.84"/>
+              <dgm:constr type="h" for="ch" forName="wedge1" refType="h" fact="0.84"/>
+              <dgm:constr type="l" for="ch" forName="wedge1Tx" refType="w" fact="0.58"/>
+              <dgm:constr type="t" for="ch" forName="wedge1Tx" refType="h" fact="0.21"/>
+              <dgm:constr type="w" for="ch" forName="wedge1Tx" refType="w" fact="0.285"/>
+              <dgm:constr type="h" for="ch" forName="wedge1Tx" refType="h" fact="0.28"/>
+              <dgm:constr type="l" for="ch" forName="wedge2" refType="w" fact="0.08"/>
+              <dgm:constr type="t" for="ch" forName="wedge2" refType="w" fact="0.08"/>
+              <dgm:constr type="w" for="ch" forName="wedge2" refType="w" fact="0.84"/>
+              <dgm:constr type="h" for="ch" forName="wedge2" refType="h" fact="0.84"/>
+              <dgm:constr type="l" for="ch" forName="wedge2Tx" refType="w" fact="0.31"/>
+              <dgm:constr type="t" for="ch" forName="wedge2Tx" refType="h" fact="0.61"/>
+              <dgm:constr type="w" for="ch" forName="wedge2Tx" refType="w" fact="0.38"/>
+              <dgm:constr type="h" for="ch" forName="wedge2Tx" refType="h" fact="0.26"/>
+              <dgm:constr type="l" for="ch" forName="wedge3" refType="w" fact="0.08"/>
+              <dgm:constr type="t" for="ch" forName="wedge3" refType="w" fact="0.08"/>
+              <dgm:constr type="w" for="ch" forName="wedge3" refType="w" fact="0.84"/>
+              <dgm:constr type="h" for="ch" forName="wedge3" refType="h" fact="0.84"/>
+              <dgm:constr type="l" for="ch" forName="wedge3Tx" refType="w" fact="0.17"/>
+              <dgm:constr type="t" for="ch" forName="wedge3Tx" refType="h" fact="0.245"/>
+              <dgm:constr type="w" for="ch" forName="wedge3Tx" refType="w" fact="0.285"/>
+              <dgm:constr type="h" for="ch" forName="wedge3Tx" refType="h" fact="0.28"/>
+              <dgm:constr type="primFontSz" for="ch" ptType="node" op="equ"/>
+            </dgm:constrLst>
+          </dgm:if>
+          <dgm:else name="Name6">
+            <dgm:constrLst>
+              <dgm:constr type="l" for="ch" forName="wedge1" refType="w" fact="0.08"/>
+              <dgm:constr type="t" for="ch" forName="wedge1" refType="w" fact="0.08"/>
+              <dgm:constr type="w" for="ch" forName="wedge1" refType="w" fact="0.84"/>
+              <dgm:constr type="h" for="ch" forName="wedge1" refType="h" fact="0.84"/>
+              <dgm:constr type="l" for="ch" forName="wedge1Tx" refType="w" fact="0.545"/>
+              <dgm:constr type="t" for="ch" forName="wedge1Tx" refType="h" fact="0.245"/>
+              <dgm:constr type="w" for="ch" forName="wedge1Tx" refType="w" fact="0.285"/>
+              <dgm:constr type="h" for="ch" forName="wedge1Tx" refType="h" fact="0.28"/>
+              <dgm:constr type="l" for="ch" forName="wedge2" refType="w" fact="0.08"/>
+              <dgm:constr type="t" for="ch" forName="wedge2" refType="w" fact="0.08"/>
+              <dgm:constr type="w" for="ch" forName="wedge2" refType="w" fact="0.84"/>
+              <dgm:constr type="h" for="ch" forName="wedge2" refType="h" fact="0.84"/>
+              <dgm:constr type="l" for="ch" forName="wedge2Tx" refType="w" fact="0.31"/>
+              <dgm:constr type="t" for="ch" forName="wedge2Tx" refType="h" fact="0.61"/>
+              <dgm:constr type="w" for="ch" forName="wedge2Tx" refType="w" fact="0.38"/>
+              <dgm:constr type="h" for="ch" forName="wedge2Tx" refType="h" fact="0.26"/>
+              <dgm:constr type="l" for="ch" forName="wedge3" refType="w" fact="0.0367"/>
+              <dgm:constr type="t" for="ch" forName="wedge3" refType="w" fact="0.055"/>
+              <dgm:constr type="w" for="ch" forName="wedge3" refType="w" fact="0.84"/>
+              <dgm:constr type="h" for="ch" forName="wedge3" refType="h" fact="0.84"/>
+              <dgm:constr type="l" for="ch" forName="wedge3Tx" refType="w" fact="0.14"/>
+              <dgm:constr type="t" for="ch" forName="wedge3Tx" refType="h" fact="0.21"/>
+              <dgm:constr type="w" for="ch" forName="wedge3Tx" refType="w" fact="0.285"/>
+              <dgm:constr type="h" for="ch" forName="wedge3Tx" refType="h" fact="0.28"/>
+              <dgm:constr type="primFontSz" for="ch" ptType="node" op="equ"/>
+            </dgm:constrLst>
+          </dgm:else>
+        </dgm:choose>
+      </dgm:if>
+      <dgm:if name="Name7" axis="ch" ptType="node" func="cnt" op="equ" val="4">
+        <dgm:choose name="Name8">
+          <dgm:if name="Name9" func="var" arg="dir" op="equ" val="norm">
+            <dgm:constrLst>
+              <dgm:constr type="l" for="ch" forName="wedge1" refType="w" fact="0.1154"/>
+              <dgm:constr type="t" for="ch" forName="wedge1" refType="w" fact="0.0446"/>
+              <dgm:constr type="w" for="ch" forName="wedge1" refType="w" fact="0.84"/>
+              <dgm:constr type="h" for="ch" forName="wedge1" refType="h" fact="0.84"/>
+              <dgm:constr type="l" for="ch" forName="wedge1Tx" refType="w" fact="0.545"/>
+              <dgm:constr type="t" for="ch" forName="wedge1Tx" refType="h" fact="0.2"/>
+              <dgm:constr type="w" for="ch" forName="wedge1Tx" refType="w" fact="0.31"/>
+              <dgm:constr type="h" for="ch" forName="wedge1Tx" refType="h" fact="0.25"/>
+              <dgm:constr type="l" for="ch" forName="wedge2" refType="w" fact="0.08"/>
+              <dgm:constr type="t" for="ch" forName="wedge2" refType="w" fact="0.08"/>
+              <dgm:constr type="w" for="ch" forName="wedge2" refType="w" fact="0.84"/>
+              <dgm:constr type="h" for="ch" forName="wedge2" refType="h" fact="0.84"/>
+              <dgm:constr type="l" for="ch" forName="wedge2Tx" refType="w" fact="0.515"/>
+              <dgm:constr type="t" for="ch" forName="wedge2Tx" refType="h" fact="0.515"/>
+              <dgm:constr type="w" for="ch" forName="wedge2Tx" refType="w" fact="0.31"/>
+              <dgm:constr type="h" for="ch" forName="wedge2Tx" refType="h" fact="0.25"/>
+              <dgm:constr type="l" for="ch" forName="wedge3" refType="w" fact="0.08"/>
+              <dgm:constr type="t" for="ch" forName="wedge3" refType="w" fact="0.08"/>
+              <dgm:constr type="w" for="ch" forName="wedge3" refType="w" fact="0.84"/>
+              <dgm:constr type="h" for="ch" forName="wedge3" refType="h" fact="0.84"/>
+              <dgm:constr type="l" for="ch" forName="wedge3Tx" refType="w" fact="0.175"/>
+              <dgm:constr type="t" for="ch" forName="wedge3Tx" refType="h" fact="0.515"/>
+              <dgm:constr type="w" for="ch" forName="wedge3Tx" refType="w" fact="0.31"/>
+              <dgm:constr type="h" for="ch" forName="wedge3Tx" refType="h" fact="0.25"/>
+              <dgm:constr type="l" for="ch" forName="wedge4" refType="w" fact="0.08"/>
+              <dgm:constr type="t" for="ch" forName="wedge4" refType="h" fact="0.08"/>
+              <dgm:constr type="w" for="ch" forName="wedge4" refType="w" fact="0.84"/>
+              <dgm:constr type="h" for="ch" forName="wedge4" refType="h" fact="0.84"/>
+              <dgm:constr type="l" for="ch" forName="wedge4Tx" refType="w" fact="0.175"/>
+              <dgm:constr type="t" for="ch" forName="wedge4Tx" refType="h" fact="0.235"/>
+              <dgm:constr type="w" for="ch" forName="wedge4Tx" refType="w" fact="0.31"/>
+              <dgm:constr type="h" for="ch" forName="wedge4Tx" refType="h" fact="0.25"/>
+              <dgm:constr type="primFontSz" for="ch" ptType="node" op="equ"/>
+            </dgm:constrLst>
+          </dgm:if>
+          <dgm:else name="Name10">
+            <dgm:constrLst>
+              <dgm:constr type="l" for="ch" forName="wedge1" refType="w" fact="0.08"/>
+              <dgm:constr type="t" for="ch" forName="wedge1" refType="w" fact="0.08"/>
+              <dgm:constr type="w" for="ch" forName="wedge1" refType="w" fact="0.84"/>
+              <dgm:constr type="h" for="ch" forName="wedge1" refType="h" fact="0.84"/>
+              <dgm:constr type="l" for="ch" forName="wedge1Tx" refType="w" fact="0.515"/>
+              <dgm:constr type="t" for="ch" forName="wedge1Tx" refType="h" fact="0.235"/>
+              <dgm:constr type="w" for="ch" forName="wedge1Tx" refType="w" fact="0.31"/>
+              <dgm:constr type="h" for="ch" forName="wedge1Tx" refType="h" fact="0.25"/>
+              <dgm:constr type="l" for="ch" forName="wedge2" refType="w" fact="0.08"/>
+              <dgm:constr type="t" for="ch" forName="wedge2" refType="w" fact="0.08"/>
+              <dgm:constr type="w" for="ch" forName="wedge2" refType="w" fact="0.84"/>
+              <dgm:constr type="h" for="ch" forName="wedge2" refType="h" fact="0.84"/>
+              <dgm:constr type="l" for="ch" forName="wedge2Tx" refType="w" fact="0.515"/>
+              <dgm:constr type="t" for="ch" forName="wedge2Tx" refType="h" fact="0.515"/>
+              <dgm:constr type="w" for="ch" forName="wedge2Tx" refType="w" fact="0.31"/>
+              <dgm:constr type="h" for="ch" forName="wedge2Tx" refType="h" fact="0.25"/>
+              <dgm:constr type="l" for="ch" forName="wedge3" refType="w" fact="0.08"/>
+              <dgm:constr type="t" for="ch" forName="wedge3" refType="w" fact="0.08"/>
+              <dgm:constr type="w" for="ch" forName="wedge3" refType="w" fact="0.84"/>
+              <dgm:constr type="h" for="ch" forName="wedge3" refType="h" fact="0.84"/>
+              <dgm:constr type="l" for="ch" forName="wedge3Tx" refType="w" fact="0.175"/>
+              <dgm:constr type="t" for="ch" forName="wedge3Tx" refType="h" fact="0.515"/>
+              <dgm:constr type="w" for="ch" forName="wedge3Tx" refType="w" fact="0.31"/>
+              <dgm:constr type="h" for="ch" forName="wedge3Tx" refType="h" fact="0.25"/>
+              <dgm:constr type="l" for="ch" forName="wedge4" refType="w" fact="0.0446"/>
+              <dgm:constr type="t" for="ch" forName="wedge4" refType="h" fact="0.0446"/>
+              <dgm:constr type="w" for="ch" forName="wedge4" refType="w" fact="0.84"/>
+              <dgm:constr type="h" for="ch" forName="wedge4" refType="h" fact="0.84"/>
+              <dgm:constr type="l" for="ch" forName="wedge4Tx" refType="w" fact="0.145"/>
+              <dgm:constr type="t" for="ch" forName="wedge4Tx" refType="h" fact="0.2"/>
+              <dgm:constr type="w" for="ch" forName="wedge4Tx" refType="w" fact="0.31"/>
+              <dgm:constr type="h" for="ch" forName="wedge4Tx" refType="h" fact="0.25"/>
+              <dgm:constr type="primFontSz" for="ch" ptType="node" op="equ"/>
+            </dgm:constrLst>
+          </dgm:else>
+        </dgm:choose>
+      </dgm:if>
+      <dgm:if name="Name11" axis="ch" ptType="node" func="cnt" op="equ" val="5">
+        <dgm:choose name="Name12">
+          <dgm:if name="Name13" func="var" arg="dir" op="equ" val="norm">
+            <dgm:constrLst>
+              <dgm:constr type="l" for="ch" forName="wedge1" refType="w" fact="0.1094"/>
+              <dgm:constr type="t" for="ch" forName="wedge1" refType="w" fact="0.0395"/>
+              <dgm:constr type="w" for="ch" forName="wedge1" refType="w" fact="0.84"/>
+              <dgm:constr type="h" for="ch" forName="wedge1" refType="h" fact="0.84"/>
+              <dgm:constr type="l" for="ch" forName="wedge1Tx" refType="w" fact="0.54"/>
+              <dgm:constr type="t" for="ch" forName="wedge1Tx" refType="h" fact="0.165"/>
+              <dgm:constr type="w" for="ch" forName="wedge1Tx" refType="w" fact="0.285"/>
+              <dgm:constr type="h" for="ch" forName="wedge1Tx" refType="h" fact="0.195"/>
+              <dgm:constr type="l" for="ch" forName="wedge2" refType="w" fact="0.08"/>
+              <dgm:constr type="t" for="ch" forName="wedge2" refType="w" fact="0.08"/>
+              <dgm:constr type="w" for="ch" forName="wedge2" refType="w" fact="0.84"/>
+              <dgm:constr type="h" for="ch" forName="wedge2" refType="h" fact="0.84"/>
+              <dgm:constr type="l" for="ch" forName="wedge2Tx" refType="w" fact="0.629"/>
+              <dgm:constr type="t" for="ch" forName="wedge2Tx" refType="h" fact="0.46"/>
+              <dgm:constr type="w" for="ch" forName="wedge2Tx" refType="w" fact="0.25"/>
+              <dgm:constr type="h" for="ch" forName="wedge2Tx" refType="h" fact="0.211"/>
+              <dgm:constr type="l" for="ch" forName="wedge3" refType="w" fact="0.08"/>
+              <dgm:constr type="t" for="ch" forName="wedge3" refType="w" fact="0.08"/>
+              <dgm:constr type="w" for="ch" forName="wedge3" refType="w" fact="0.84"/>
+              <dgm:constr type="h" for="ch" forName="wedge3" refType="h" fact="0.84"/>
+              <dgm:constr type="l" for="ch" forName="wedge3Tx" refType="w" fact="0.35"/>
+              <dgm:constr type="t" for="ch" forName="wedge3Tx" refType="h" fact="0.71"/>
+              <dgm:constr type="w" for="ch" forName="wedge3Tx" refType="w" fact="0.3"/>
+              <dgm:constr type="h" for="ch" forName="wedge3Tx" refType="h" fact="0.18"/>
+              <dgm:constr type="l" for="ch" forName="wedge4" refType="w" fact="0.08"/>
+              <dgm:constr type="t" for="ch" forName="wedge4" refType="h" fact="0.08"/>
+              <dgm:constr type="w" for="ch" forName="wedge4" refType="w" fact="0.84"/>
+              <dgm:constr type="h" for="ch" forName="wedge4" refType="h" fact="0.84"/>
+              <dgm:constr type="l" for="ch" forName="wedge4Tx" refType="w" fact="0.12"/>
+              <dgm:constr type="t" for="ch" forName="wedge4Tx" refType="h" fact="0.46"/>
+              <dgm:constr type="w" for="ch" forName="wedge4Tx" refType="w" fact="0.25"/>
+              <dgm:constr type="h" for="ch" forName="wedge4Tx" refType="h" fact="0.211"/>
+              <dgm:constr type="l" for="ch" forName="wedge5" refType="w" fact="0.08"/>
+              <dgm:constr type="t" for="ch" forName="wedge5" refType="h" fact="0.08"/>
+              <dgm:constr type="w" for="ch" forName="wedge5" refType="w" fact="0.84"/>
+              <dgm:constr type="h" for="ch" forName="wedge5" refType="h" fact="0.84"/>
+              <dgm:constr type="l" for="ch" forName="wedge5Tx" refType="w" fact="0.2025"/>
+              <dgm:constr type="t" for="ch" forName="wedge5Tx" refType="h" fact="0.208"/>
+              <dgm:constr type="w" for="ch" forName="wedge5Tx" refType="w" fact="0.285"/>
+              <dgm:constr type="h" for="ch" forName="wedge5Tx" refType="h" fact="0.195"/>
+              <dgm:constr type="primFontSz" for="ch" ptType="node" op="equ"/>
+            </dgm:constrLst>
+          </dgm:if>
+          <dgm:else name="Name14">
+            <dgm:constrLst>
+              <dgm:constr type="l" for="ch" forName="wedge1" refType="w" fact="0.08"/>
+              <dgm:constr type="t" for="ch" forName="wedge1" refType="w" fact="0.08"/>
+              <dgm:constr type="w" for="ch" forName="wedge1" refType="w" fact="0.84"/>
+              <dgm:constr type="h" for="ch" forName="wedge1" refType="h" fact="0.84"/>
+              <dgm:constr type="l" for="ch" forName="wedge1Tx" refType="w" fact="0.51"/>
+              <dgm:constr type="t" for="ch" forName="wedge1Tx" refType="h" fact="0.208"/>
+              <dgm:constr type="w" for="ch" forName="wedge1Tx" refType="w" fact="0.285"/>
+              <dgm:constr type="h" for="ch" forName="wedge1Tx" refType="h" fact="0.195"/>
+              <dgm:constr type="l" for="ch" forName="wedge2" refType="w" fact="0.08"/>
+              <dgm:constr type="t" for="ch" forName="wedge2" refType="w" fact="0.08"/>
+              <dgm:constr type="w" for="ch" forName="wedge2" refType="w" fact="0.84"/>
+              <dgm:constr type="h" for="ch" forName="wedge2" refType="h" fact="0.84"/>
+              <dgm:constr type="l" for="ch" forName="wedge2Tx" refType="w" fact="0.629"/>
+              <dgm:constr type="t" for="ch" forName="wedge2Tx" refType="h" fact="0.46"/>
+              <dgm:constr type="w" for="ch" forName="wedge2Tx" refType="w" fact="0.25"/>
+              <dgm:constr type="h" for="ch" forName="wedge2Tx" refType="h" fact="0.211"/>
+              <dgm:constr type="l" for="ch" forName="wedge3" refType="w" fact="0.08"/>
+              <dgm:constr type="t" for="ch" forName="wedge3" refType="w" fact="0.08"/>
+              <dgm:constr type="w" for="ch" forName="wedge3" refType="w" fact="0.84"/>
+              <dgm:constr type="h" for="ch" forName="wedge3" refType="h" fact="0.84"/>
+              <dgm:constr type="l" for="ch" forName="wedge3Tx" refType="w" fact="0.35"/>
+              <dgm:constr type="t" for="ch" forName="wedge3Tx" refType="h" fact="0.71"/>
+              <dgm:constr type="w" for="ch" forName="wedge3Tx" refType="w" fact="0.3"/>
+              <dgm:constr type="h" for="ch" forName="wedge3Tx" refType="h" fact="0.18"/>
+              <dgm:constr type="l" for="ch" forName="wedge4" refType="w" fact="0.08"/>
+              <dgm:constr type="t" for="ch" forName="wedge4" refType="h" fact="0.08"/>
+              <dgm:constr type="w" for="ch" forName="wedge4" refType="w" fact="0.84"/>
+              <dgm:constr type="h" for="ch" forName="wedge4" refType="h" fact="0.84"/>
+              <dgm:constr type="l" for="ch" forName="wedge4Tx" refType="w" fact="0.12"/>
+              <dgm:constr type="t" for="ch" forName="wedge4Tx" refType="h" fact="0.46"/>
+              <dgm:constr type="w" for="ch" forName="wedge4Tx" refType="w" fact="0.25"/>
+              <dgm:constr type="h" for="ch" forName="wedge4Tx" refType="h" fact="0.211"/>
+              <dgm:constr type="l" for="ch" forName="wedge5" refType="w" fact="0.0506"/>
+              <dgm:constr type="t" for="ch" forName="wedge5" refType="h" fact="0.0395"/>
+              <dgm:constr type="w" for="ch" forName="wedge5" refType="w" fact="0.84"/>
+              <dgm:constr type="h" for="ch" forName="wedge5" refType="h" fact="0.84"/>
+              <dgm:constr type="l" for="ch" forName="wedge5Tx" refType="w" fact="0.18"/>
+              <dgm:constr type="t" for="ch" forName="wedge5Tx" refType="h" fact="0.165"/>
+              <dgm:constr type="w" for="ch" forName="wedge5Tx" refType="w" fact="0.285"/>
+              <dgm:constr type="h" for="ch" forName="wedge5Tx" refType="h" fact="0.195"/>
+              <dgm:constr type="primFontSz" for="ch" ptType="node" op="equ"/>
+            </dgm:constrLst>
+          </dgm:else>
+        </dgm:choose>
+      </dgm:if>
+      <dgm:if name="Name15" axis="ch" ptType="node" func="cnt" op="equ" val="6">
+        <dgm:choose name="Name16">
+          <dgm:if name="Name17" func="var" arg="dir" op="equ" val="norm">
+            <dgm:constrLst>
+              <dgm:constr type="l" for="ch" forName="wedge1" refType="w" fact="0.105"/>
+              <dgm:constr type="t" for="ch" forName="wedge1" refType="w" fact="0.0367"/>
+              <dgm:constr type="w" for="ch" forName="wedge1" refType="w" fact="0.84"/>
+              <dgm:constr type="h" for="ch" forName="wedge1" refType="h" fact="0.84"/>
+              <dgm:constr type="l" for="ch" forName="wedge1Tx" refType="w" fact="0.534"/>
+              <dgm:constr type="t" for="ch" forName="wedge1Tx" refType="h" fact="0.1267"/>
+              <dgm:constr type="w" for="ch" forName="wedge1Tx" refType="w" fact="0.245"/>
+              <dgm:constr type="h" for="ch" forName="wedge1Tx" refType="h" fact="0.18"/>
+              <dgm:constr type="l" for="ch" forName="wedge2" refType="w" fact="0.08"/>
+              <dgm:constr type="t" for="ch" forName="wedge2" refType="w" fact="0.08"/>
+              <dgm:constr type="w" for="ch" forName="wedge2" refType="w" fact="0.84"/>
+              <dgm:constr type="h" for="ch" forName="wedge2" refType="h" fact="0.84"/>
+              <dgm:constr type="l" for="ch" forName="wedge2Tx" refType="w" fact="0.655"/>
+              <dgm:constr type="t" for="ch" forName="wedge2Tx" refType="h" fact="0.415"/>
+              <dgm:constr type="w" for="ch" forName="wedge2Tx" refType="w" fact="0.254"/>
+              <dgm:constr type="h" for="ch" forName="wedge2Tx" refType="h" fact="0.17"/>
+              <dgm:constr type="l" for="ch" forName="wedge3" refType="w" fact="0.08"/>
+              <dgm:constr type="t" for="ch" forName="wedge3" refType="w" fact="0.08"/>
+              <dgm:constr type="w" for="ch" forName="wedge3" refType="w" fact="0.84"/>
+              <dgm:constr type="h" for="ch" forName="wedge3" refType="h" fact="0.84"/>
+              <dgm:constr type="l" for="ch" forName="wedge3Tx" refType="w" fact="0.509"/>
+              <dgm:constr type="t" for="ch" forName="wedge3Tx" refType="h" fact="0.65"/>
+              <dgm:constr type="w" for="ch" forName="wedge3Tx" refType="w" fact="0.245"/>
+              <dgm:constr type="h" for="ch" forName="wedge3Tx" refType="h" fact="0.18"/>
+              <dgm:constr type="l" for="ch" forName="wedge4" refType="w" fact="0.08"/>
+              <dgm:constr type="t" for="ch" forName="wedge4" refType="h" fact="0.08"/>
+              <dgm:constr type="w" for="ch" forName="wedge4" refType="w" fact="0.84"/>
+              <dgm:constr type="h" for="ch" forName="wedge4" refType="h" fact="0.84"/>
+              <dgm:constr type="l" for="ch" forName="wedge4Tx" refType="w" fact="0.246"/>
+              <dgm:constr type="t" for="ch" forName="wedge4Tx" refType="h" fact="0.65"/>
+              <dgm:constr type="w" for="ch" forName="wedge4Tx" refType="w" fact="0.245"/>
+              <dgm:constr type="h" for="ch" forName="wedge4Tx" refType="h" fact="0.18"/>
+              <dgm:constr type="l" for="ch" forName="wedge5" refType="w" fact="0.08"/>
+              <dgm:constr type="t" for="ch" forName="wedge5" refType="h" fact="0.08"/>
+              <dgm:constr type="w" for="ch" forName="wedge5" refType="w" fact="0.84"/>
+              <dgm:constr type="h" for="ch" forName="wedge5" refType="h" fact="0.84"/>
+              <dgm:constr type="l" for="ch" forName="wedge5Tx" refType="w" fact="0.093"/>
+              <dgm:constr type="t" for="ch" forName="wedge5Tx" refType="h" fact="0.415"/>
+              <dgm:constr type="w" for="ch" forName="wedge5Tx" refType="w" fact="0.254"/>
+              <dgm:constr type="h" for="ch" forName="wedge5Tx" refType="h" fact="0.17"/>
+              <dgm:constr type="l" for="ch" forName="wedge6" refType="w" fact="0.08"/>
+              <dgm:constr type="t" for="ch" forName="wedge6" refType="h" fact="0.08"/>
+              <dgm:constr type="w" for="ch" forName="wedge6" refType="w" fact="0.84"/>
+              <dgm:constr type="h" for="ch" forName="wedge6" refType="h" fact="0.84"/>
+              <dgm:constr type="l" for="ch" forName="wedge6Tx" refType="w" fact="0.246"/>
+              <dgm:constr type="t" for="ch" forName="wedge6Tx" refType="h" fact="0.17"/>
+              <dgm:constr type="w" for="ch" forName="wedge6Tx" refType="w" fact="0.245"/>
+              <dgm:constr type="h" for="ch" forName="wedge6Tx" refType="h" fact="0.18"/>
+              <dgm:constr type="primFontSz" for="ch" ptType="node" op="equ"/>
+            </dgm:constrLst>
+          </dgm:if>
+          <dgm:else name="Name18">
+            <dgm:constrLst>
+              <dgm:constr type="l" for="ch" forName="wedge1" refType="w" fact="0.08"/>
+              <dgm:constr type="t" for="ch" forName="wedge1" refType="w" fact="0.08"/>
+              <dgm:constr type="w" for="ch" forName="wedge1" refType="w" fact="0.84"/>
+              <dgm:constr type="h" for="ch" forName="wedge1" refType="h" fact="0.84"/>
+              <dgm:constr type="l" for="ch" forName="wedge1Tx" refType="w" fact="0.509"/>
+              <dgm:constr type="t" for="ch" forName="wedge1Tx" refType="h" fact="0.17"/>
+              <dgm:constr type="w" for="ch" forName="wedge1Tx" refType="w" fact="0.245"/>
+              <dgm:constr type="h" for="ch" forName="wedge1Tx" refType="h" fact="0.18"/>
+              <dgm:constr type="l" for="ch" forName="wedge2" refType="w" fact="0.08"/>
+              <dgm:constr type="t" for="ch" forName="wedge2" refType="w" fact="0.08"/>
+              <dgm:constr type="w" for="ch" forName="wedge2" refType="w" fact="0.84"/>
+              <dgm:constr type="h" for="ch" forName="wedge2" refType="h" fact="0.84"/>
+              <dgm:constr type="l" for="ch" forName="wedge2Tx" refType="w" fact="0.655"/>
+              <dgm:constr type="t" for="ch" forName="wedge2Tx" refType="h" fact="0.415"/>
+              <dgm:constr type="w" for="ch" forName="wedge2Tx" refType="w" fact="0.254"/>
+              <dgm:constr type="h" for="ch" forName="wedge2Tx" refType="h" fact="0.17"/>
+              <dgm:constr type="l" for="ch" forName="wedge3" refType="w" fact="0.08"/>
+              <dgm:constr type="t" for="ch" forName="wedge3" refType="w" fact="0.08"/>
+              <dgm:constr type="w" for="ch" forName="wedge3" refType="w" fact="0.84"/>
+              <dgm:constr type="h" for="ch" forName="wedge3" refType="h" fact="0.84"/>
+              <dgm:constr type="l" for="ch" forName="wedge3Tx" refType="w" fact="0.509"/>
+              <dgm:constr type="t" for="ch" forName="wedge3Tx" refType="h" fact="0.65"/>
+              <dgm:constr type="w" for="ch" forName="wedge3Tx" refType="w" fact="0.245"/>
+              <dgm:constr type="h" for="ch" forName="wedge3Tx" refType="h" fact="0.18"/>
+              <dgm:constr type="l" for="ch" forName="wedge4" refType="w" fact="0.08"/>
+              <dgm:constr type="t" for="ch" forName="wedge4" refType="h" fact="0.08"/>
+              <dgm:constr type="w" for="ch" forName="wedge4" refType="w" fact="0.84"/>
+              <dgm:constr type="h" for="ch" forName="wedge4" refType="h" fact="0.84"/>
+              <dgm:constr type="l" for="ch" forName="wedge4Tx" refType="w" fact="0.246"/>
+              <dgm:constr type="t" for="ch" forName="wedge4Tx" refType="h" fact="0.65"/>
+              <dgm:constr type="w" for="ch" forName="wedge4Tx" refType="w" fact="0.245"/>
+              <dgm:constr type="h" for="ch" forName="wedge4Tx" refType="h" fact="0.18"/>
+              <dgm:constr type="l" for="ch" forName="wedge5" refType="w" fact="0.08"/>
+              <dgm:constr type="t" for="ch" forName="wedge5" refType="h" fact="0.08"/>
+              <dgm:constr type="w" for="ch" forName="wedge5" refType="w" fact="0.84"/>
+              <dgm:constr type="h" for="ch" forName="wedge5" refType="h" fact="0.84"/>
+              <dgm:constr type="l" for="ch" forName="wedge5Tx" refType="w" fact="0.093"/>
+              <dgm:constr type="t" for="ch" forName="wedge5Tx" refType="h" fact="0.415"/>
+              <dgm:constr type="w" for="ch" forName="wedge5Tx" refType="w" fact="0.254"/>
+              <dgm:constr type="h" for="ch" forName="wedge5Tx" refType="h" fact="0.17"/>
+              <dgm:constr type="l" for="ch" forName="wedge6" refType="w" fact="0.055"/>
+              <dgm:constr type="t" for="ch" forName="wedge6" refType="h" fact="0.0367"/>
+              <dgm:constr type="w" for="ch" forName="wedge6" refType="w" fact="0.84"/>
+              <dgm:constr type="h" for="ch" forName="wedge6" refType="h" fact="0.84"/>
+              <dgm:constr type="l" for="ch" forName="wedge6Tx" refType="w" fact="0.221"/>
+              <dgm:constr type="t" for="ch" forName="wedge6Tx" refType="h" fact="0.1267"/>
+              <dgm:constr type="w" for="ch" forName="wedge6Tx" refType="w" fact="0.245"/>
+              <dgm:constr type="h" for="ch" forName="wedge6Tx" refType="h" fact="0.18"/>
+              <dgm:constr type="primFontSz" for="ch" ptType="node" op="equ"/>
+            </dgm:constrLst>
+          </dgm:else>
+        </dgm:choose>
+      </dgm:if>
+      <dgm:else name="Name19">
+        <dgm:choose name="Name20">
+          <dgm:if name="Name21" func="var" arg="dir" op="equ" val="norm">
+            <dgm:constrLst>
+              <dgm:constr type="l" for="ch" forName="wedge1" refType="w" fact="0.1017"/>
+              <dgm:constr type="t" for="ch" forName="wedge1" refType="w" fact="0.035"/>
+              <dgm:constr type="w" for="ch" forName="wedge1" refType="w" fact="0.84"/>
+              <dgm:constr type="h" for="ch" forName="wedge1" refType="h" fact="0.84"/>
+              <dgm:constr type="l" for="ch" forName="wedge1Tx" refType="w" fact="0.53"/>
+              <dgm:constr type="t" for="ch" forName="wedge1Tx" refType="h" fact="0.115"/>
+              <dgm:constr type="w" for="ch" forName="wedge1Tx" refType="w" fact="0.23"/>
+              <dgm:constr type="h" for="ch" forName="wedge1Tx" refType="h" fact="0.145"/>
+              <dgm:constr type="l" for="ch" forName="wedge2" refType="w" fact="0.08"/>
+              <dgm:constr type="t" for="ch" forName="wedge2" refType="w" fact="0.08"/>
+              <dgm:constr type="w" for="ch" forName="wedge2" refType="w" fact="0.84"/>
+              <dgm:constr type="h" for="ch" forName="wedge2" refType="h" fact="0.84"/>
+              <dgm:constr type="l" for="ch" forName="wedge2Tx" refType="w" fact="0.655"/>
+              <dgm:constr type="t" for="ch" forName="wedge2Tx" refType="h" fact="0.38"/>
+              <dgm:constr type="w" for="ch" forName="wedge2Tx" refType="w" fact="0.244"/>
+              <dgm:constr type="h" for="ch" forName="wedge2Tx" refType="h" fact="0.155"/>
+              <dgm:constr type="l" for="ch" forName="wedge3" refType="w" fact="0.08"/>
+              <dgm:constr type="t" for="ch" forName="wedge3" refType="w" fact="0.08"/>
+              <dgm:constr type="w" for="ch" forName="wedge3" refType="w" fact="0.84"/>
+              <dgm:constr type="h" for="ch" forName="wedge3" refType="h" fact="0.84"/>
+              <dgm:constr type="l" for="ch" forName="wedge3Tx" refType="w" fact="0.62"/>
+              <dgm:constr type="t" for="ch" forName="wedge3Tx" refType="h" fact="0.58"/>
+              <dgm:constr type="w" for="ch" forName="wedge3Tx" refType="w" fact="0.22"/>
+              <dgm:constr type="h" for="ch" forName="wedge3Tx" refType="h" fact="0.16"/>
+              <dgm:constr type="l" for="ch" forName="wedge4" refType="w" fact="0.08"/>
+              <dgm:constr type="t" for="ch" forName="wedge4" refType="h" fact="0.08"/>
+              <dgm:constr type="w" for="ch" forName="wedge4" refType="w" fact="0.84"/>
+              <dgm:constr type="h" for="ch" forName="wedge4" refType="h" fact="0.84"/>
+              <dgm:constr type="l" for="ch" forName="wedge4Tx" refType="w" fact="0.3875"/>
+              <dgm:constr type="t" for="ch" forName="wedge4Tx" refType="h" fact="0.74"/>
+              <dgm:constr type="w" for="ch" forName="wedge4Tx" refType="w" fact="0.225"/>
+              <dgm:constr type="h" for="ch" forName="wedge4Tx" refType="h" fact="0.16"/>
+              <dgm:constr type="l" for="ch" forName="wedge5" refType="w" fact="0.08"/>
+              <dgm:constr type="t" for="ch" forName="wedge5" refType="h" fact="0.08"/>
+              <dgm:constr type="w" for="ch" forName="wedge5" refType="w" fact="0.84"/>
+              <dgm:constr type="h" for="ch" forName="wedge5" refType="h" fact="0.84"/>
+              <dgm:constr type="l" for="ch" forName="wedge5Tx" refType="w" fact="0.16"/>
+              <dgm:constr type="t" for="ch" forName="wedge5Tx" refType="h" fact="0.58"/>
+              <dgm:constr type="w" for="ch" forName="wedge5Tx" refType="w" fact="0.22"/>
+              <dgm:constr type="h" for="ch" forName="wedge5Tx" refType="h" fact="0.16"/>
+              <dgm:constr type="l" for="ch" forName="wedge6" refType="w" fact="0.08"/>
+              <dgm:constr type="t" for="ch" forName="wedge6" refType="h" fact="0.08"/>
+              <dgm:constr type="w" for="ch" forName="wedge6" refType="w" fact="0.84"/>
+              <dgm:constr type="h" for="ch" forName="wedge6" refType="h" fact="0.84"/>
+              <dgm:constr type="l" for="ch" forName="wedge6Tx" refType="w" fact="0.101"/>
+              <dgm:constr type="t" for="ch" forName="wedge6Tx" refType="h" fact="0.38"/>
+              <dgm:constr type="w" for="ch" forName="wedge6Tx" refType="w" fact="0.244"/>
+              <dgm:constr type="h" for="ch" forName="wedge6Tx" refType="h" fact="0.155"/>
+              <dgm:constr type="l" for="ch" forName="wedge7" refType="w" fact="0.08"/>
+              <dgm:constr type="t" for="ch" forName="wedge7" refType="h" fact="0.08"/>
+              <dgm:constr type="w" for="ch" forName="wedge7" refType="w" fact="0.84"/>
+              <dgm:constr type="h" for="ch" forName="wedge7" refType="h" fact="0.84"/>
+              <dgm:constr type="l" for="ch" forName="wedge7Tx" refType="w" fact="0.262"/>
+              <dgm:constr type="t" for="ch" forName="wedge7Tx" refType="h" fact="0.16"/>
+              <dgm:constr type="w" for="ch" forName="wedge7Tx" refType="w" fact="0.23"/>
+              <dgm:constr type="h" for="ch" forName="wedge7Tx" refType="h" fact="0.145"/>
+              <dgm:constr type="primFontSz" for="ch" ptType="node" op="equ"/>
+            </dgm:constrLst>
+          </dgm:if>
+          <dgm:else name="Name22">
+            <dgm:constrLst>
+              <dgm:constr type="l" for="ch" forName="wedge1" refType="w" fact="0.08"/>
+              <dgm:constr type="t" for="ch" forName="wedge1" refType="w" fact="0.08"/>
+              <dgm:constr type="w" for="ch" forName="wedge1" refType="w" fact="0.84"/>
+              <dgm:constr type="h" for="ch" forName="wedge1" refType="h" fact="0.84"/>
+              <dgm:constr type="l" for="ch" forName="wedge1Tx" refType="w" fact="0.508"/>
+              <dgm:constr type="t" for="ch" forName="wedge1Tx" refType="h" fact="0.16"/>
+              <dgm:constr type="w" for="ch" forName="wedge1Tx" refType="w" fact="0.23"/>
+              <dgm:constr type="h" for="ch" forName="wedge1Tx" refType="h" fact="0.145"/>
+              <dgm:constr type="l" for="ch" forName="wedge2" refType="w" fact="0.08"/>
+              <dgm:constr type="t" for="ch" forName="wedge2" refType="w" fact="0.08"/>
+              <dgm:constr type="w" for="ch" forName="wedge2" refType="w" fact="0.84"/>
+              <dgm:constr type="h" for="ch" forName="wedge2" refType="h" fact="0.84"/>
+              <dgm:constr type="l" for="ch" forName="wedge2Tx" refType="w" fact="0.655"/>
+              <dgm:constr type="t" for="ch" forName="wedge2Tx" refType="h" fact="0.38"/>
+              <dgm:constr type="w" for="ch" forName="wedge2Tx" refType="w" fact="0.244"/>
+              <dgm:constr type="h" for="ch" forName="wedge2Tx" refType="h" fact="0.155"/>
+              <dgm:constr type="l" for="ch" forName="wedge3" refType="w" fact="0.08"/>
+              <dgm:constr type="t" for="ch" forName="wedge3" refType="w" fact="0.08"/>
+              <dgm:constr type="w" for="ch" forName="wedge3" refType="w" fact="0.84"/>
+              <dgm:constr type="h" for="ch" forName="wedge3" refType="h" fact="0.84"/>
+              <dgm:constr type="l" for="ch" forName="wedge3Tx" refType="w" fact="0.62"/>
+              <dgm:constr type="t" for="ch" forName="wedge3Tx" refType="h" fact="0.58"/>
+              <dgm:constr type="w" for="ch" forName="wedge3Tx" refType="w" fact="0.22"/>
+              <dgm:constr type="h" for="ch" forName="wedge3Tx" refType="h" fact="0.16"/>
+              <dgm:constr type="l" for="ch" forName="wedge4" refType="w" fact="0.08"/>
+              <dgm:constr type="t" for="ch" forName="wedge4" refType="h" fact="0.08"/>
+              <dgm:constr type="w" for="ch" forName="wedge4" refType="w" fact="0.84"/>
+              <dgm:constr type="h" for="ch" forName="wedge4" refType="h" fact="0.84"/>
+              <dgm:constr type="l" for="ch" forName="wedge4Tx" refType="w" fact="0.3875"/>
+              <dgm:constr type="t" for="ch" forName="wedge4Tx" refType="h" fact="0.74"/>
+              <dgm:constr type="w" for="ch" forName="wedge4Tx" refType="w" fact="0.225"/>
+              <dgm:constr type="h" for="ch" forName="wedge4Tx" refType="h" fact="0.16"/>
+              <dgm:constr type="l" for="ch" forName="wedge5" refType="w" fact="0.08"/>
+              <dgm:constr type="t" for="ch" forName="wedge5" refType="h" fact="0.08"/>
+              <dgm:constr type="w" for="ch" forName="wedge5" refType="w" fact="0.84"/>
+              <dgm:constr type="h" for="ch" forName="wedge5" refType="h" fact="0.84"/>
+              <dgm:constr type="l" for="ch" forName="wedge5Tx" refType="w" fact="0.16"/>
+              <dgm:constr type="t" for="ch" forName="wedge5Tx" refType="h" fact="0.58"/>
+              <dgm:constr type="w" for="ch" forName="wedge5Tx" refType="w" fact="0.22"/>
+              <dgm:constr type="h" for="ch" forName="wedge5Tx" refType="h" fact="0.16"/>
+              <dgm:constr type="l" for="ch" forName="wedge6" refType="w" fact="0.08"/>
+              <dgm:constr type="t" for="ch" forName="wedge6" refType="h" fact="0.08"/>
+              <dgm:constr type="w" for="ch" forName="wedge6" refType="w" fact="0.84"/>
+              <dgm:constr type="h" for="ch" forName="wedge6" refType="h" fact="0.84"/>
+              <dgm:constr type="l" for="ch" forName="wedge6Tx" refType="w" fact="0.101"/>
+              <dgm:constr type="t" for="ch" forName="wedge6Tx" refType="h" fact="0.38"/>
+              <dgm:constr type="w" for="ch" forName="wedge6Tx" refType="w" fact="0.244"/>
+              <dgm:constr type="h" for="ch" forName="wedge6Tx" refType="h" fact="0.155"/>
+              <dgm:constr type="l" for="ch" forName="wedge7" refType="w" fact="0.0583"/>
+              <dgm:constr type="t" for="ch" forName="wedge7" refType="h" fact="0.035"/>
+              <dgm:constr type="w" for="ch" forName="wedge7" refType="w" fact="0.84"/>
+              <dgm:constr type="h" for="ch" forName="wedge7" refType="h" fact="0.84"/>
+              <dgm:constr type="l" for="ch" forName="wedge7Tx" refType="w" fact="0.2403"/>
+              <dgm:constr type="t" for="ch" forName="wedge7Tx" refType="h" fact="0.115"/>
+              <dgm:constr type="w" for="ch" forName="wedge7Tx" refType="w" fact="0.23"/>
+              <dgm:constr type="h" for="ch" forName="wedge7Tx" refType="h" fact="0.145"/>
+              <dgm:constr type="primFontSz" for="ch" ptType="node" op="equ"/>
+            </dgm:constrLst>
+          </dgm:else>
+        </dgm:choose>
+      </dgm:else>
+    </dgm:choose>
+    <dgm:ruleLst/>
+    <dgm:choose name="Name23">
+      <dgm:if name="Name24" axis="ch" ptType="node" func="cnt" op="gte" val="1">
+        <dgm:layoutNode name="wedge1">
+          <dgm:alg type="sp"/>
+          <dgm:choose name="Name25">
+            <dgm:if name="Name26" axis="ch" ptType="node" func="cnt" op="equ" val="1">
+              <dgm:shape xmlns:r="http://schemas.openxmlformats.org/officeDocument/2006/relationships" type="ellipse" r:blip="">
+                <dgm:adjLst/>
+              </dgm:shape>
+            </dgm:if>
+            <dgm:if name="Name27" axis="ch" ptType="node" func="cnt" op="equ" val="2">
+              <dgm:shape xmlns:r="http://schemas.openxmlformats.org/officeDocument/2006/relationships" type="pie" r:blip="">
+                <dgm:adjLst>
+                  <dgm:adj idx="1" val="270"/>
+                  <dgm:adj idx="2" val="90"/>
+                </dgm:adjLst>
+              </dgm:shape>
+            </dgm:if>
+            <dgm:if name="Name28" axis="ch" ptType="node" func="cnt" op="equ" val="3">
+              <dgm:shape xmlns:r="http://schemas.openxmlformats.org/officeDocument/2006/relationships" type="pie" r:blip="">
+                <dgm:adjLst>
+                  <dgm:adj idx="1" val="270"/>
+                  <dgm:adj idx="2" val="30"/>
+                </dgm:adjLst>
+              </dgm:shape>
+            </dgm:if>
+            <dgm:if name="Name29" axis="ch" ptType="node" func="cnt" op="equ" val="4">
+              <dgm:shape xmlns:r="http://schemas.openxmlformats.org/officeDocument/2006/relationships" type="pie" r:blip="">
+                <dgm:adjLst>
+                  <dgm:adj idx="1" val="270"/>
+                  <dgm:adj idx="2" val="0"/>
+                </dgm:adjLst>
+              </dgm:shape>
+            </dgm:if>
+            <dgm:if name="Name30" axis="ch" ptType="node" func="cnt" op="equ" val="5">
+              <dgm:shape xmlns:r="http://schemas.openxmlformats.org/officeDocument/2006/relationships" type="pie" r:blip="">
+                <dgm:adjLst>
+                  <dgm:adj idx="1" val="270"/>
+                  <dgm:adj idx="2" val="342"/>
+                </dgm:adjLst>
+              </dgm:shape>
+            </dgm:if>
+            <dgm:if name="Name31" axis="ch" ptType="node" func="cnt" op="equ" val="6">
+              <dgm:shape xmlns:r="http://schemas.openxmlformats.org/officeDocument/2006/relationships" type="pie" r:blip="">
+                <dgm:adjLst>
+                  <dgm:adj idx="1" val="270"/>
+                  <dgm:adj idx="2" val="330"/>
+                </dgm:adjLst>
+              </dgm:shape>
+            </dgm:if>
+            <dgm:else name="Name32">
+              <dgm:shape xmlns:r="http://schemas.openxmlformats.org/officeDocument/2006/relationships" type="pie" r:blip="">
+                <dgm:adjLst>
+                  <dgm:adj idx="1" val="270"/>
+                  <dgm:adj idx="2" val="321.4286"/>
+                </dgm:adjLst>
+              </dgm:shape>
+            </dgm:else>
+          </dgm:choose>
+          <dgm:choose name="Name33">
+            <dgm:if name="Name34" func="var" arg="dir" op="equ" val="norm">
+              <dgm:presOf axis="ch desOrSelf" ptType="node node" st="1 1" cnt="1 0"/>
+            </dgm:if>
+            <dgm:else name="Name35">
+              <dgm:choose name="Name36">
+                <dgm:if name="Name37" axis="ch" ptType="node" func="cnt" op="equ" val="1">
+                  <dgm:presOf axis="ch desOrSelf" ptType="node node" st="1 1" cnt="1 0"/>
+                </dgm:if>
+                <dgm:if name="Name38" axis="ch" ptType="node" func="cnt" op="equ" val="2">
+                  <dgm:presOf axis="ch desOrSelf" ptType="node node" st="2 1" cnt="1 0"/>
+                </dgm:if>
+                <dgm:if name="Name39" axis="ch" ptType="node" func="cnt" op="equ" val="3">
+                  <dgm:presOf axis="ch desOrSelf" ptType="node node" st="3 1" cnt="1 0"/>
+                </dgm:if>
+                <dgm:if name="Name40" axis="ch" ptType="node" func="cnt" op="equ" val="4">
+                  <dgm:presOf axis="ch desOrSelf" ptType="node node" st="4 1" cnt="1 0"/>
+                </dgm:if>
+                <dgm:if name="Name41" axis="ch" ptType="node" func="cnt" op="equ" val="5">
+                  <dgm:presOf axis="ch desOrSelf" ptType="node node" st="5 1" cnt="1 0"/>
+                </dgm:if>
+                <dgm:if name="Name42" axis="ch" ptType="node" func="cnt" op="equ" val="6">
+                  <dgm:presOf axis="ch desOrSelf" ptType="node node" st="6 1" cnt="1 0"/>
+                </dgm:if>
+                <dgm:else name="Name43">
+                  <dgm:presOf axis="ch desOrSelf" ptType="node node" st="7 1" cnt="1 0"/>
+                </dgm:else>
+              </dgm:choose>
+            </dgm:else>
+          </dgm:choose>
+          <dgm:constrLst/>
+          <dgm:ruleLst/>
+        </dgm:layoutNode>
+        <dgm:layoutNode name="wedge1Tx" moveWith="wedge1">
+          <dgm:varLst>
+            <dgm:chMax val="0"/>
+            <dgm:chPref val="0"/>
+            <dgm:bulletEnabled val="1"/>
+          </dgm:varLst>
+          <dgm:alg type="tx"/>
+          <dgm:shape xmlns:r="http://schemas.openxmlformats.org/officeDocument/2006/relationships" type="rect" r:blip="" hideGeom="1">
+            <dgm:adjLst/>
+          </dgm:shape>
+          <dgm:choose name="Name44">
+            <dgm:if name="Name45" func="var" arg="dir" op="equ" val="norm">
+              <dgm:presOf axis="ch desOrSelf" ptType="node node" st="1 1" cnt="1 0"/>
+            </dgm:if>
+            <dgm:else name="Name46">
+              <dgm:choose name="Name47">
+                <dgm:if name="Name48" axis="ch" ptType="node" func="cnt" op="equ" val="1">
+                  <dgm:presOf axis="ch desOrSelf" ptType="node node" st="1 1" cnt="1 0"/>
+                </dgm:if>
+                <dgm:if name="Name49" axis="ch" ptType="node" func="cnt" op="equ" val="2">
+                  <dgm:presOf axis="ch desOrSelf" ptType="node node" st="2 1" cnt="1 0"/>
+                </dgm:if>
+                <dgm:if name="Name50" axis="ch" ptType="node" func="cnt" op="equ" val="3">
+                  <dgm:presOf axis="ch desOrSelf" ptType="node node" st="3 1" cnt="1 0"/>
+                </dgm:if>
+                <dgm:if name="Name51" axis="ch" ptType="node" func="cnt" op="equ" val="4">
+                  <dgm:presOf axis="ch desOrSelf" ptType="node node" st="4 1" cnt="1 0"/>
+                </dgm:if>
+                <dgm:if name="Name52" axis="ch" ptType="node" func="cnt" op="equ" val="5">
+                  <dgm:presOf axis="ch desOrSelf" ptType="node node" st="5 1" cnt="1 0"/>
+                </dgm:if>
+                <dgm:if name="Name53" axis="ch" ptType="node" func="cnt" op="equ" val="6">
+                  <dgm:presOf axis="ch desOrSelf" ptType="node node" st="6 1" cnt="1 0"/>
+                </dgm:if>
+                <dgm:else name="Name54">
+                  <dgm:presOf axis="ch desOrSelf" ptType="node node" st="7 1" cnt="1 0"/>
+                </dgm:else>
+              </dgm:choose>
+            </dgm:else>
+          </dgm:choose>
+          <dgm:constrLst>
+            <dgm:constr type="tMarg" refType="primFontSz" fact="0.1"/>
+            <dgm:constr type="bMarg" refType="primFontSz" fact="0.1"/>
+            <dgm:constr type="lMarg" refType="primFontSz" fact="0.1"/>
+            <dgm:constr type="rMarg" refType="primFontSz" fact="0.1"/>
+            <dgm:constr type="primFontSz" val="65"/>
+          </dgm:constrLst>
+          <dgm:ruleLst>
+            <dgm:rule type="primFontSz" val="5" fact="NaN" max="NaN"/>
+          </dgm:ruleLst>
+        </dgm:layoutNode>
+      </dgm:if>
+      <dgm:else name="Name55"/>
+    </dgm:choose>
+    <dgm:choose name="Name56">
+      <dgm:if name="Name57" axis="ch" ptType="node" func="cnt" op="gte" val="2">
+        <dgm:layoutNode name="wedge2">
+          <dgm:alg type="sp"/>
+          <dgm:choose name="Name58">
+            <dgm:if name="Name59" axis="ch" ptType="node" func="cnt" op="equ" val="2">
+              <dgm:shape xmlns:r="http://schemas.openxmlformats.org/officeDocument/2006/relationships" type="pie" r:blip="">
+                <dgm:adjLst>
+                  <dgm:adj idx="1" val="90"/>
+                  <dgm:adj idx="2" val="270"/>
+                </dgm:adjLst>
+              </dgm:shape>
+            </dgm:if>
+            <dgm:if name="Name60" axis="ch" ptType="node" func="cnt" op="equ" val="3">
+              <dgm:shape xmlns:r="http://schemas.openxmlformats.org/officeDocument/2006/relationships" type="pie" r:blip="">
+                <dgm:adjLst>
+                  <dgm:adj idx="1" val="30"/>
+                  <dgm:adj idx="2" val="150"/>
+                </dgm:adjLst>
+              </dgm:shape>
+            </dgm:if>
+            <dgm:if name="Name61" axis="ch" ptType="node" func="cnt" op="equ" val="4">
+              <dgm:shape xmlns:r="http://schemas.openxmlformats.org/officeDocument/2006/relationships" type="pie" r:blip="">
+                <dgm:adjLst>
+                  <dgm:adj idx="1" val="0"/>
+                  <dgm:adj idx="2" val="90"/>
+                </dgm:adjLst>
+              </dgm:shape>
+            </dgm:if>
+            <dgm:if name="Name62" axis="ch" ptType="node" func="cnt" op="equ" val="5">
+              <dgm:shape xmlns:r="http://schemas.openxmlformats.org/officeDocument/2006/relationships" type="pie" r:blip="">
+                <dgm:adjLst>
+                  <dgm:adj idx="1" val="342"/>
+                  <dgm:adj idx="2" val="54"/>
+                </dgm:adjLst>
+              </dgm:shape>
+            </dgm:if>
+            <dgm:if name="Name63" axis="ch" ptType="node" func="cnt" op="equ" val="6">
+              <dgm:shape xmlns:r="http://schemas.openxmlformats.org/officeDocument/2006/relationships" type="pie" r:blip="">
+                <dgm:adjLst>
+                  <dgm:adj idx="1" val="330"/>
+                  <dgm:adj idx="2" val="30"/>
+                </dgm:adjLst>
+              </dgm:shape>
+            </dgm:if>
+            <dgm:else name="Name64">
+              <dgm:shape xmlns:r="http://schemas.openxmlformats.org/officeDocument/2006/relationships" type="pie" r:blip="">
+                <dgm:adjLst>
+                  <dgm:adj idx="1" val="321.4286"/>
+                  <dgm:adj idx="2" val="12.85714"/>
+                </dgm:adjLst>
+              </dgm:shape>
+            </dgm:else>
+          </dgm:choose>
+          <dgm:choose name="Name65">
+            <dgm:if name="Name66" func="var" arg="dir" op="equ" val="norm">
+              <dgm:presOf axis="ch desOrSelf" ptType="node node" st="2 1" cnt="1 0"/>
+            </dgm:if>
+            <dgm:else name="Name67">
+              <dgm:choose name="Name68">
+                <dgm:if name="Name69" axis="ch" ptType="node" func="cnt" op="equ" val="2">
+                  <dgm:presOf axis="ch desOrSelf" ptType="node node" st="1 1" cnt="1 0"/>
+                </dgm:if>
+                <dgm:if name="Name70" axis="ch" ptType="node" func="cnt" op="equ" val="3">
+                  <dgm:presOf axis="ch desOrSelf" ptType="node node" st="2 1" cnt="1 0"/>
+                </dgm:if>
+                <dgm:if name="Name71" axis="ch" ptType="node" func="cnt" op="equ" val="4">
+                  <dgm:presOf axis="ch desOrSelf" ptType="node node" st="3 1" cnt="1 0"/>
+                </dgm:if>
+                <dgm:if name="Name72" axis="ch" ptType="node" func="cnt" op="equ" val="5">
+                  <dgm:presOf axis="ch desOrSelf" ptType="node node" st="4 1" cnt="1 0"/>
+                </dgm:if>
+                <dgm:if name="Name73" axis="ch" ptType="node" func="cnt" op="equ" val="6">
+                  <dgm:presOf axis="ch desOrSelf" ptType="node node" st="5 1" cnt="1 0"/>
+                </dgm:if>
+                <dgm:else name="Name74">
+                  <dgm:presOf axis="ch desOrSelf" ptType="node node" st="6 1" cnt="1 0"/>
+                </dgm:else>
+              </dgm:choose>
+            </dgm:else>
+          </dgm:choose>
+          <dgm:constrLst/>
+          <dgm:ruleLst/>
+        </dgm:layoutNode>
+        <dgm:layoutNode name="wedge2Tx" moveWith="wedge2">
+          <dgm:varLst>
+            <dgm:chMax val="0"/>
+            <dgm:chPref val="0"/>
+            <dgm:bulletEnabled val="1"/>
+          </dgm:varLst>
+          <dgm:alg type="tx"/>
+          <dgm:shape xmlns:r="http://schemas.openxmlformats.org/officeDocument/2006/relationships" type="rect" r:blip="" hideGeom="1">
+            <dgm:adjLst/>
+          </dgm:shape>
+          <dgm:choose name="Name75">
+            <dgm:if name="Name76" func="var" arg="dir" op="equ" val="norm">
+              <dgm:presOf axis="ch desOrSelf" ptType="node node" st="2 1" cnt="1 0"/>
+            </dgm:if>
+            <dgm:else name="Name77">
+              <dgm:choose name="Name78">
+                <dgm:if name="Name79" axis="ch" ptType="node" func="cnt" op="equ" val="2">
+                  <dgm:presOf axis="ch desOrSelf" ptType="node node" st="1 1" cnt="1 0"/>
+                </dgm:if>
+                <dgm:if name="Name80" axis="ch" ptType="node" func="cnt" op="equ" val="3">
+                  <dgm:presOf axis="ch desOrSelf" ptType="node node" st="2 1" cnt="1 0"/>
+                </dgm:if>
+                <dgm:if name="Name81" axis="ch" ptType="node" func="cnt" op="equ" val="4">
+                  <dgm:presOf axis="ch desOrSelf" ptType="node node" st="3 1" cnt="1 0"/>
+                </dgm:if>
+                <dgm:if name="Name82" axis="ch" ptType="node" func="cnt" op="equ" val="5">
+                  <dgm:presOf axis="ch desOrSelf" ptType="node node" st="4 1" cnt="1 0"/>
+                </dgm:if>
+                <dgm:if name="Name83" axis="ch" ptType="node" func="cnt" op="equ" val="6">
+                  <dgm:presOf axis="ch desOrSelf" ptType="node node" st="5 1" cnt="1 0"/>
+                </dgm:if>
+                <dgm:else name="Name84">
+                  <dgm:presOf axis="ch desOrSelf" ptType="node node" st="6 1" cnt="1 0"/>
+                </dgm:else>
+              </dgm:choose>
+            </dgm:else>
+          </dgm:choose>
+          <dgm:constrLst>
+            <dgm:constr type="tMarg" refType="primFontSz" fact="0.1"/>
+            <dgm:constr type="bMarg" refType="primFontSz" fact="0.1"/>
+            <dgm:constr type="lMarg" refType="primFontSz" fact="0.1"/>
+            <dgm:constr type="rMarg" refType="primFontSz" fact="0.1"/>
+            <dgm:constr type="primFontSz" val="65"/>
+          </dgm:constrLst>
+          <dgm:ruleLst>
+            <dgm:rule type="primFontSz" val="5" fact="NaN" max="NaN"/>
+          </dgm:ruleLst>
+        </dgm:layoutNode>
+      </dgm:if>
+      <dgm:else name="Name85"/>
+    </dgm:choose>
+    <dgm:choose name="Name86">
+      <dgm:if name="Name87" axis="ch" ptType="node" func="cnt" op="gte" val="3">
+        <dgm:layoutNode name="wedge3">
+          <dgm:alg type="sp"/>
+          <dgm:choose name="Name88">
+            <dgm:if name="Name89" axis="ch" ptType="node" func="cnt" op="equ" val="3">
+              <dgm:shape xmlns:r="http://schemas.openxmlformats.org/officeDocument/2006/relationships" type="pie" r:blip="">
+                <dgm:adjLst>
+                  <dgm:adj idx="1" val="150"/>
+                  <dgm:adj idx="2" val="270"/>
+                </dgm:adjLst>
+              </dgm:shape>
+            </dgm:if>
+            <dgm:if name="Name90" axis="ch" ptType="node" func="cnt" op="equ" val="4">
+              <dgm:shape xmlns:r="http://schemas.openxmlformats.org/officeDocument/2006/relationships" type="pie" r:blip="">
+                <dgm:adjLst>
+                  <dgm:adj idx="1" val="90"/>
+                  <dgm:adj idx="2" val="180"/>
+                </dgm:adjLst>
+              </dgm:shape>
+            </dgm:if>
+            <dgm:if name="Name91" axis="ch" ptType="node" func="cnt" op="equ" val="5">
+              <dgm:shape xmlns:r="http://schemas.openxmlformats.org/officeDocument/2006/relationships" type="pie" r:blip="">
+                <dgm:adjLst>
+                  <dgm:adj idx="1" val="54"/>
+                  <dgm:adj idx="2" val="126"/>
+                </dgm:adjLst>
+              </dgm:shape>
+            </dgm:if>
+            <dgm:if name="Name92" axis="ch" ptType="node" func="cnt" op="equ" val="6">
+              <dgm:shape xmlns:r="http://schemas.openxmlformats.org/officeDocument/2006/relationships" type="pie" r:blip="">
+                <dgm:adjLst>
+                  <dgm:adj idx="1" val="30"/>
+                  <dgm:adj idx="2" val="90"/>
+                </dgm:adjLst>
+              </dgm:shape>
+            </dgm:if>
+            <dgm:else name="Name93">
+              <dgm:shape xmlns:r="http://schemas.openxmlformats.org/officeDocument/2006/relationships" type="pie" r:blip="">
+                <dgm:adjLst>
+                  <dgm:adj idx="1" val="12.85714"/>
+                  <dgm:adj idx="2" val="64.28571"/>
+                </dgm:adjLst>
+              </dgm:shape>
+            </dgm:else>
+          </dgm:choose>
+          <dgm:choose name="Name94">
+            <dgm:if name="Name95" func="var" arg="dir" op="equ" val="norm">
+              <dgm:presOf axis="ch desOrSelf" ptType="node node" st="3 1" cnt="1 0"/>
+            </dgm:if>
+            <dgm:else name="Name96">
+              <dgm:choose name="Name97">
+                <dgm:if name="Name98" axis="ch" ptType="node" func="cnt" op="equ" val="3">
+                  <dgm:presOf axis="ch desOrSelf" ptType="node node" st="1 1" cnt="1 0"/>
+                </dgm:if>
+                <dgm:if name="Name99" axis="ch" ptType="node" func="cnt" op="equ" val="4">
+                  <dgm:presOf axis="ch desOrSelf" ptType="node node" st="2 1" cnt="1 0"/>
+                </dgm:if>
+                <dgm:if name="Name100" axis="ch" ptType="node" func="cnt" op="equ" val="5">
+                  <dgm:presOf axis="ch desOrSelf" ptType="node node" st="3 1" cnt="1 0"/>
+                </dgm:if>
+                <dgm:if name="Name101" axis="ch" ptType="node" func="cnt" op="equ" val="6">
+                  <dgm:presOf axis="ch desOrSelf" ptType="node node" st="4 1" cnt="1 0"/>
+                </dgm:if>
+                <dgm:else name="Name102">
+                  <dgm:presOf axis="ch desOrSelf" ptType="node node" st="5 1" cnt="1 0"/>
+                </dgm:else>
+              </dgm:choose>
+            </dgm:else>
+          </dgm:choose>
+          <dgm:constrLst/>
+          <dgm:ruleLst/>
+        </dgm:layoutNode>
+        <dgm:layoutNode name="wedge3Tx" moveWith="wedge3">
+          <dgm:varLst>
+            <dgm:chMax val="0"/>
+            <dgm:chPref val="0"/>
+            <dgm:bulletEnabled val="1"/>
+          </dgm:varLst>
+          <dgm:alg type="tx"/>
+          <dgm:shape xmlns:r="http://schemas.openxmlformats.org/officeDocument/2006/relationships" type="rect" r:blip="" hideGeom="1">
+            <dgm:adjLst/>
+          </dgm:shape>
+          <dgm:choose name="Name103">
+            <dgm:if name="Name104" func="var" arg="dir" op="equ" val="norm">
+              <dgm:presOf axis="ch desOrSelf" ptType="node node" st="3 1" cnt="1 0"/>
+            </dgm:if>
+            <dgm:else name="Name105">
+              <dgm:choose name="Name106">
+                <dgm:if name="Name107" axis="ch" ptType="node" func="cnt" op="equ" val="3">
+                  <dgm:presOf axis="ch desOrSelf" ptType="node node" st="1 1" cnt="1 0"/>
+                </dgm:if>
+                <dgm:if name="Name108" axis="ch" ptType="node" func="cnt" op="equ" val="4">
+                  <dgm:presOf axis="ch desOrSelf" ptType="node node" st="2 1" cnt="1 0"/>
+                </dgm:if>
+                <dgm:if name="Name109" axis="ch" ptType="node" func="cnt" op="equ" val="5">
+                  <dgm:presOf axis="ch desOrSelf" ptType="node node" st="3 1" cnt="1 0"/>
+                </dgm:if>
+                <dgm:if name="Name110" axis="ch" ptType="node" func="cnt" op="equ" val="6">
+                  <dgm:presOf axis="ch desOrSelf" ptType="node node" st="4 1" cnt="1 0"/>
+                </dgm:if>
+                <dgm:else name="Name111">
+                  <dgm:presOf axis="ch desOrSelf" ptType="node node" st="5 1" cnt="1 0"/>
+                </dgm:else>
+              </dgm:choose>
+            </dgm:else>
+          </dgm:choose>
+          <dgm:constrLst>
+            <dgm:constr type="tMarg" refType="primFontSz" fact="0.1"/>
+            <dgm:constr type="bMarg" refType="primFontSz" fact="0.1"/>
+            <dgm:constr type="lMarg" refType="primFontSz" fact="0.1"/>
+            <dgm:constr type="rMarg" refType="primFontSz" fact="0.1"/>
+            <dgm:constr type="primFontSz" val="65"/>
+          </dgm:constrLst>
+          <dgm:ruleLst>
+            <dgm:rule type="primFontSz" val="5" fact="NaN" max="NaN"/>
+          </dgm:ruleLst>
+        </dgm:layoutNode>
+      </dgm:if>
+      <dgm:else name="Name112"/>
+    </dgm:choose>
+    <dgm:choose name="Name113">
+      <dgm:if name="Name114" axis="ch" ptType="node" func="cnt" op="gte" val="4">
+        <dgm:layoutNode name="wedge4">
+          <dgm:alg type="sp"/>
+          <dgm:choose name="Name115">
+            <dgm:if name="Name116" axis="ch" ptType="node" func="cnt" op="equ" val="4">
+              <dgm:shape xmlns:r="http://schemas.openxmlformats.org/officeDocument/2006/relationships" type="pie" r:blip="">
+                <dgm:adjLst>
+                  <dgm:adj idx="1" val="180"/>
+                  <dgm:adj idx="2" val="270"/>
+                </dgm:adjLst>
+              </dgm:shape>
+            </dgm:if>
+            <dgm:if name="Name117" axis="ch" ptType="node" func="cnt" op="equ" val="5">
+              <dgm:shape xmlns:r="http://schemas.openxmlformats.org/officeDocument/2006/relationships" type="pie" r:blip="">
+                <dgm:adjLst>
+                  <dgm:adj idx="1" val="126"/>
+                  <dgm:adj idx="2" val="198"/>
+                </dgm:adjLst>
+              </dgm:shape>
+            </dgm:if>
+            <dgm:if name="Name118" axis="ch" ptType="node" func="cnt" op="equ" val="6">
+              <dgm:shape xmlns:r="http://schemas.openxmlformats.org/officeDocument/2006/relationships" type="pie" r:blip="">
+                <dgm:adjLst>
+                  <dgm:adj idx="1" val="90"/>
+                  <dgm:adj idx="2" val="150"/>
+                </dgm:adjLst>
+              </dgm:shape>
+            </dgm:if>
+            <dgm:else name="Name119">
+              <dgm:shape xmlns:r="http://schemas.openxmlformats.org/officeDocument/2006/relationships" type="pie" r:blip="">
+                <dgm:adjLst>
+                  <dgm:adj idx="1" val="64.2871"/>
+                  <dgm:adj idx="2" val="115.7143"/>
+                </dgm:adjLst>
+              </dgm:shape>
+            </dgm:else>
+          </dgm:choose>
+          <dgm:choose name="Name120">
+            <dgm:if name="Name121" func="var" arg="dir" op="equ" val="norm">
+              <dgm:presOf axis="ch desOrSelf" ptType="node node" st="4 1" cnt="1 0"/>
+            </dgm:if>
+            <dgm:else name="Name122">
+              <dgm:choose name="Name123">
+                <dgm:if name="Name124" axis="ch" ptType="node" func="cnt" op="equ" val="4">
+                  <dgm:presOf axis="ch desOrSelf" ptType="node node" st="1 1" cnt="1 0"/>
+                </dgm:if>
+                <dgm:if name="Name125" axis="ch" ptType="node" func="cnt" op="equ" val="5">
+                  <dgm:presOf axis="ch desOrSelf" ptType="node node" st="2 1" cnt="1 0"/>
+                </dgm:if>
+                <dgm:if name="Name126" axis="ch" ptType="node" func="cnt" op="equ" val="6">
+                  <dgm:presOf axis="ch desOrSelf" ptType="node node" st="3 1" cnt="1 0"/>
+                </dgm:if>
+                <dgm:else name="Name127">
+                  <dgm:presOf axis="ch desOrSelf" ptType="node node" st="4 1" cnt="1 0"/>
+                </dgm:else>
+              </dgm:choose>
+            </dgm:else>
+          </dgm:choose>
+          <dgm:constrLst/>
+          <dgm:ruleLst/>
+        </dgm:layoutNode>
+        <dgm:layoutNode name="wedge4Tx" moveWith="wedge4">
+          <dgm:varLst>
+            <dgm:chMax val="0"/>
+            <dgm:chPref val="0"/>
+            <dgm:bulletEnabled val="1"/>
+          </dgm:varLst>
+          <dgm:alg type="tx"/>
+          <dgm:shape xmlns:r="http://schemas.openxmlformats.org/officeDocument/2006/relationships" type="rect" r:blip="" hideGeom="1">
+            <dgm:adjLst/>
+          </dgm:shape>
+          <dgm:choose name="Name128">
+            <dgm:if name="Name129" func="var" arg="dir" op="equ" val="norm">
+              <dgm:presOf axis="ch desOrSelf" ptType="node node" st="4 1" cnt="1 0"/>
+            </dgm:if>
+            <dgm:else name="Name130">
+              <dgm:choose name="Name131">
+                <dgm:if name="Name132" axis="ch" ptType="node" func="cnt" op="equ" val="4">
+                  <dgm:presOf axis="ch desOrSelf" ptType="node node" st="1 1" cnt="1 0"/>
+                </dgm:if>
+                <dgm:if name="Name133" axis="ch" ptType="node" func="cnt" op="equ" val="5">
+                  <dgm:presOf axis="ch desOrSelf" ptType="node node" st="2 1" cnt="1 0"/>
+                </dgm:if>
+                <dgm:if name="Name134" axis="ch" ptType="node" func="cnt" op="equ" val="6">
+                  <dgm:presOf axis="ch desOrSelf" ptType="node node" st="3 1" cnt="1 0"/>
+                </dgm:if>
+                <dgm:else name="Name135">
+                  <dgm:presOf axis="ch desOrSelf" ptType="node node" st="4 1" cnt="1 0"/>
+                </dgm:else>
+              </dgm:choose>
+            </dgm:else>
+          </dgm:choose>
+          <dgm:constrLst>
+            <dgm:constr type="tMarg" refType="primFontSz" fact="0.1"/>
+            <dgm:constr type="bMarg" refType="primFontSz" fact="0.1"/>
+            <dgm:constr type="lMarg" refType="primFontSz" fact="0.1"/>
+            <dgm:constr type="rMarg" refType="primFontSz" fact="0.1"/>
+            <dgm:constr type="primFontSz" val="65"/>
+          </dgm:constrLst>
+          <dgm:ruleLst>
+            <dgm:rule type="primFontSz" val="5" fact="NaN" max="NaN"/>
+          </dgm:ruleLst>
+        </dgm:layoutNode>
+      </dgm:if>
+      <dgm:else name="Name136"/>
+    </dgm:choose>
+    <dgm:choose name="Name137">
+      <dgm:if name="Name138" axis="ch" ptType="node" func="cnt" op="gte" val="5">
+        <dgm:layoutNode name="wedge5">
+          <dgm:alg type="sp"/>
+          <dgm:choose name="Name139">
+            <dgm:if name="Name140" axis="ch" ptType="node" func="cnt" op="equ" val="5">
+              <dgm:shape xmlns:r="http://schemas.openxmlformats.org/officeDocument/2006/relationships" type="pie" r:blip="">
+                <dgm:adjLst>
+                  <dgm:adj idx="1" val="198"/>
+                  <dgm:adj idx="2" val="270"/>
+                </dgm:adjLst>
+              </dgm:shape>
+            </dgm:if>
+            <dgm:if name="Name141" axis="ch" ptType="node" func="cnt" op="equ" val="6">
+              <dgm:shape xmlns:r="http://schemas.openxmlformats.org/officeDocument/2006/relationships" type="pie" r:blip="">
+                <dgm:adjLst>
+                  <dgm:adj idx="1" val="150"/>
+                  <dgm:adj idx="2" val="210"/>
+                </dgm:adjLst>
+              </dgm:shape>
+            </dgm:if>
+            <dgm:else name="Name142">
+              <dgm:shape xmlns:r="http://schemas.openxmlformats.org/officeDocument/2006/relationships" type="pie" r:blip="">
+                <dgm:adjLst>
+                  <dgm:adj idx="1" val="115.7143"/>
+                  <dgm:adj idx="2" val="167.1429"/>
+                </dgm:adjLst>
+              </dgm:shape>
+            </dgm:else>
+          </dgm:choose>
+          <dgm:choose name="Name143">
+            <dgm:if name="Name144" func="var" arg="dir" op="equ" val="norm">
+              <dgm:presOf axis="ch desOrSelf" ptType="node node" st="5 1" cnt="1 0"/>
+            </dgm:if>
+            <dgm:else name="Name145">
+              <dgm:choose name="Name146">
+                <dgm:if name="Name147" axis="ch" ptType="node" func="cnt" op="equ" val="5">
+                  <dgm:presOf axis="ch desOrSelf" ptType="node node" st="1 1" cnt="1 0"/>
+                </dgm:if>
+                <dgm:if name="Name148" axis="ch" ptType="node" func="cnt" op="equ" val="6">
+                  <dgm:presOf axis="ch desOrSelf" ptType="node node" st="2 1" cnt="1 0"/>
+                </dgm:if>
+                <dgm:else name="Name149">
+                  <dgm:presOf axis="ch desOrSelf" ptType="node node" st="3 1" cnt="1 0"/>
+                </dgm:else>
+              </dgm:choose>
+            </dgm:else>
+          </dgm:choose>
+          <dgm:constrLst/>
+          <dgm:ruleLst/>
+        </dgm:layoutNode>
+        <dgm:layoutNode name="wedge5Tx" moveWith="wedge5">
+          <dgm:varLst>
+            <dgm:chMax val="0"/>
+            <dgm:chPref val="0"/>
+            <dgm:bulletEnabled val="1"/>
+          </dgm:varLst>
+          <dgm:alg type="tx"/>
+          <dgm:shape xmlns:r="http://schemas.openxmlformats.org/officeDocument/2006/relationships" type="rect" r:blip="" hideGeom="1">
+            <dgm:adjLst/>
+          </dgm:shape>
+          <dgm:choose name="Name150">
+            <dgm:if name="Name151" func="var" arg="dir" op="equ" val="norm">
+              <dgm:presOf axis="ch desOrSelf" ptType="node node" st="5 1" cnt="1 0"/>
+            </dgm:if>
+            <dgm:else name="Name152">
+              <dgm:choose name="Name153">
+                <dgm:if name="Name154" axis="ch" ptType="node" func="cnt" op="equ" val="5">
+                  <dgm:presOf axis="ch desOrSelf" ptType="node node" st="1 1" cnt="1 0"/>
+                </dgm:if>
+                <dgm:if name="Name155" axis="ch" ptType="node" func="cnt" op="equ" val="6">
+                  <dgm:presOf axis="ch desOrSelf" ptType="node node" st="2 1" cnt="1 0"/>
+                </dgm:if>
+                <dgm:else name="Name156">
+                  <dgm:presOf axis="ch desOrSelf" ptType="node node" st="3 1" cnt="1 0"/>
+                </dgm:else>
+              </dgm:choose>
+            </dgm:else>
+          </dgm:choose>
+          <dgm:constrLst>
+            <dgm:constr type="tMarg" refType="primFontSz" fact="0.1"/>
+            <dgm:constr type="bMarg" refType="primFontSz" fact="0.1"/>
+            <dgm:constr type="lMarg" refType="primFontSz" fact="0.1"/>
+            <dgm:constr type="rMarg" refType="primFontSz" fact="0.1"/>
+            <dgm:constr type="primFontSz" val="65"/>
+          </dgm:constrLst>
+          <dgm:ruleLst>
+            <dgm:rule type="primFontSz" val="5" fact="NaN" max="NaN"/>
+          </dgm:ruleLst>
+        </dgm:layoutNode>
+      </dgm:if>
+      <dgm:else name="Name157"/>
+    </dgm:choose>
+    <dgm:choose name="Name158">
+      <dgm:if name="Name159" axis="ch" ptType="node" func="cnt" op="gte" val="6">
+        <dgm:layoutNode name="wedge6">
+          <dgm:alg type="sp"/>
+          <dgm:choose name="Name160">
+            <dgm:if name="Name161" axis="ch" ptType="node" func="cnt" op="equ" val="6">
+              <dgm:shape xmlns:r="http://schemas.openxmlformats.org/officeDocument/2006/relationships" type="pie" r:blip="">
+                <dgm:adjLst>
+                  <dgm:adj idx="1" val="210"/>
+                  <dgm:adj idx="2" val="270"/>
+                </dgm:adjLst>
+              </dgm:shape>
+            </dgm:if>
+            <dgm:else name="Name162">
+              <dgm:shape xmlns:r="http://schemas.openxmlformats.org/officeDocument/2006/relationships" type="pie" r:blip="">
+                <dgm:adjLst>
+                  <dgm:adj idx="1" val="167.1429"/>
+                  <dgm:adj idx="2" val="218.5714"/>
+                </dgm:adjLst>
+              </dgm:shape>
+            </dgm:else>
+          </dgm:choose>
+          <dgm:choose name="Name163">
+            <dgm:if name="Name164" func="var" arg="dir" op="equ" val="norm">
+              <dgm:presOf axis="ch desOrSelf" ptType="node node" st="6 1" cnt="1 0"/>
+            </dgm:if>
+            <dgm:else name="Name165">
+              <dgm:choose name="Name166">
+                <dgm:if name="Name167" axis="ch" ptType="node" func="cnt" op="equ" val="6">
+                  <dgm:presOf axis="ch desOrSelf" ptType="node node" st="1 1" cnt="1 0"/>
+                </dgm:if>
+                <dgm:else name="Name168">
+                  <dgm:presOf axis="ch desOrSelf" ptType="node node" st="2 1" cnt="1 0"/>
+                </dgm:else>
+              </dgm:choose>
+            </dgm:else>
+          </dgm:choose>
+          <dgm:constrLst/>
+          <dgm:ruleLst/>
+        </dgm:layoutNode>
+        <dgm:layoutNode name="wedge6Tx" moveWith="wedge6">
+          <dgm:varLst>
+            <dgm:chMax val="0"/>
+            <dgm:chPref val="0"/>
+            <dgm:bulletEnabled val="1"/>
+          </dgm:varLst>
+          <dgm:alg type="tx"/>
+          <dgm:shape xmlns:r="http://schemas.openxmlformats.org/officeDocument/2006/relationships" type="rect" r:blip="" hideGeom="1">
+            <dgm:adjLst/>
+          </dgm:shape>
+          <dgm:choose name="Name169">
+            <dgm:if name="Name170" func="var" arg="dir" op="equ" val="norm">
+              <dgm:presOf axis="ch desOrSelf" ptType="node node" st="6 1" cnt="1 0"/>
+            </dgm:if>
+            <dgm:else name="Name171">
+              <dgm:choose name="Name172">
+                <dgm:if name="Name173" axis="ch" ptType="node" func="cnt" op="equ" val="6">
+                  <dgm:presOf axis="ch desOrSelf" ptType="node node" st="1 1" cnt="1 0"/>
+                </dgm:if>
+                <dgm:else name="Name174">
+                  <dgm:presOf axis="ch desOrSelf" ptType="node node" st="2 1" cnt="1 0"/>
+                </dgm:else>
+              </dgm:choose>
+            </dgm:else>
+          </dgm:choose>
+          <dgm:constrLst>
+            <dgm:constr type="tMarg" refType="primFontSz" fact="0.1"/>
+            <dgm:constr type="bMarg" refType="primFontSz" fact="0.1"/>
+            <dgm:constr type="lMarg" refType="primFontSz" fact="0.1"/>
+            <dgm:constr type="rMarg" refType="primFontSz" fact="0.1"/>
+            <dgm:constr type="primFontSz" val="65"/>
+          </dgm:constrLst>
+          <dgm:ruleLst>
+            <dgm:rule type="primFontSz" val="5" fact="NaN" max="NaN"/>
+          </dgm:ruleLst>
+        </dgm:layoutNode>
+      </dgm:if>
+      <dgm:else name="Name175"/>
+    </dgm:choose>
+    <dgm:choose name="Name176">
+      <dgm:if name="Name177" axis="ch" ptType="node" func="cnt" op="gte" val="7">
+        <dgm:layoutNode name="wedge7">
+          <dgm:alg type="sp"/>
+          <dgm:shape xmlns:r="http://schemas.openxmlformats.org/officeDocument/2006/relationships" type="pie" r:blip="">
+            <dgm:adjLst>
+              <dgm:adj idx="1" val="218.5714"/>
+              <dgm:adj idx="2" val="270"/>
+            </dgm:adjLst>
+          </dgm:shape>
+          <dgm:choose name="Name178">
+            <dgm:if name="Name179" func="var" arg="dir" op="equ" val="norm">
+              <dgm:presOf axis="ch desOrSelf" ptType="node node" st="7 1" cnt="1 0"/>
+            </dgm:if>
+            <dgm:else name="Name180">
+              <dgm:presOf axis="ch desOrSelf" ptType="node node" st="1 1" cnt="1 0"/>
+            </dgm:else>
+          </dgm:choose>
+          <dgm:constrLst/>
+          <dgm:ruleLst/>
+        </dgm:layoutNode>
+        <dgm:layoutNode name="wedge7Tx" moveWith="wedge7">
+          <dgm:varLst>
+            <dgm:chMax val="0"/>
+            <dgm:chPref val="0"/>
+            <dgm:bulletEnabled val="1"/>
+          </dgm:varLst>
+          <dgm:alg type="tx"/>
+          <dgm:shape xmlns:r="http://schemas.openxmlformats.org/officeDocument/2006/relationships" type="rect" r:blip="" hideGeom="1">
+            <dgm:adjLst/>
+          </dgm:shape>
+          <dgm:choose name="Name181">
+            <dgm:if name="Name182" func="var" arg="dir" op="equ" val="norm">
+              <dgm:presOf axis="ch desOrSelf" ptType="node node" st="7 1" cnt="1 0"/>
+            </dgm:if>
+            <dgm:else name="Name183">
+              <dgm:presOf axis="ch desOrSelf" ptType="node node" st="1 1" cnt="1 0"/>
+            </dgm:else>
+          </dgm:choose>
+          <dgm:constrLst>
+            <dgm:constr type="tMarg" refType="primFontSz" fact="0.1"/>
+            <dgm:constr type="bMarg" refType="primFontSz" fact="0.1"/>
+            <dgm:constr type="lMarg" refType="primFontSz" fact="0.1"/>
+            <dgm:constr type="rMarg" refType="primFontSz" fact="0.1"/>
+            <dgm:constr type="primFontSz" val="65"/>
+          </dgm:constrLst>
+          <dgm:ruleLst>
+            <dgm:rule type="primFontSz" val="5" fact="NaN" max="NaN"/>
+          </dgm:ruleLst>
+        </dgm:layoutNode>
+      </dgm:if>
+      <dgm:else name="Name184"/>
+    </dgm:choose>
+  </dgm:layoutNode>
+</dgm:layoutDef>
+</file>
+
+<file path=ppt/diagrams/layout8.xml><?xml version="1.0" encoding="utf-8"?>
 <dgm:layoutDef xmlns:dgm="http://schemas.openxmlformats.org/drawingml/2006/diagram" xmlns:a="http://schemas.openxmlformats.org/drawingml/2006/main" uniqueId="urn:microsoft.com/office/officeart/2005/8/layout/hChevron3">
   <dgm:title val=""/>
   <dgm:desc val=""/>
@@ -16074,7 +21307,7 @@
 </dgm:layoutDef>
 </file>
 
-<file path=ppt/diagrams/layout7.xml><?xml version="1.0" encoding="utf-8"?>
+<file path=ppt/diagrams/layout9.xml><?xml version="1.0" encoding="utf-8"?>
 <dgm:layoutDef xmlns:dgm="http://schemas.openxmlformats.org/drawingml/2006/diagram" xmlns:a="http://schemas.openxmlformats.org/drawingml/2006/main" uniqueId="urn:microsoft.com/office/officeart/2005/8/layout/hChevron3">
   <dgm:title val=""/>
   <dgm:desc val=""/>
@@ -21932,6 +27165,2240 @@
 </file>
 
 <file path=ppt/diagrams/quickStyle6.xml><?xml version="1.0" encoding="utf-8"?>
+<dgm:styleDef xmlns:dgm="http://schemas.openxmlformats.org/drawingml/2006/diagram" xmlns:a="http://schemas.openxmlformats.org/drawingml/2006/main" uniqueId="urn:microsoft.com/office/officeart/2005/8/quickstyle/3d1">
+  <dgm:title val=""/>
+  <dgm:desc val=""/>
+  <dgm:catLst>
+    <dgm:cat type="3D" pri="11100"/>
+  </dgm:catLst>
+  <dgm:scene3d>
+    <a:camera prst="orthographicFront"/>
+    <a:lightRig rig="threePt" dir="t"/>
+  </dgm:scene3d>
+  <dgm:styleLbl name="node0">
+    <dgm:scene3d>
+      <a:camera prst="orthographicFront"/>
+      <a:lightRig rig="flat" dir="t"/>
+    </dgm:scene3d>
+    <dgm:sp3d prstMaterial="plastic">
+      <a:bevelT w="120900" h="88900"/>
+      <a:bevelB w="88900" h="31750" prst="angle"/>
+    </dgm:sp3d>
+    <dgm:txPr/>
+    <dgm:style>
+      <a:lnRef idx="0">
+        <a:scrgbClr r="0" g="0" b="0"/>
+      </a:lnRef>
+      <a:fillRef idx="3">
+        <a:scrgbClr r="0" g="0" b="0"/>
+      </a:fillRef>
+      <a:effectRef idx="2">
+        <a:scrgbClr r="0" g="0" b="0"/>
+      </a:effectRef>
+      <a:fontRef idx="minor">
+        <a:schemeClr val="lt1"/>
+      </a:fontRef>
+    </dgm:style>
+  </dgm:styleLbl>
+  <dgm:styleLbl name="lnNode1">
+    <dgm:scene3d>
+      <a:camera prst="orthographicFront"/>
+      <a:lightRig rig="flat" dir="t"/>
+    </dgm:scene3d>
+    <dgm:sp3d prstMaterial="plastic">
+      <a:bevelT w="120900" h="88900"/>
+      <a:bevelB w="88900" h="31750" prst="angle"/>
+    </dgm:sp3d>
+    <dgm:txPr/>
+    <dgm:style>
+      <a:lnRef idx="0">
+        <a:scrgbClr r="0" g="0" b="0"/>
+      </a:lnRef>
+      <a:fillRef idx="3">
+        <a:scrgbClr r="0" g="0" b="0"/>
+      </a:fillRef>
+      <a:effectRef idx="1">
+        <a:scrgbClr r="0" g="0" b="0"/>
+      </a:effectRef>
+      <a:fontRef idx="minor">
+        <a:schemeClr val="lt1"/>
+      </a:fontRef>
+    </dgm:style>
+  </dgm:styleLbl>
+  <dgm:styleLbl name="vennNode1">
+    <dgm:scene3d>
+      <a:camera prst="orthographicFront"/>
+      <a:lightRig rig="flat" dir="t"/>
+    </dgm:scene3d>
+    <dgm:sp3d prstMaterial="plastic">
+      <a:bevelT w="120900" h="88900"/>
+      <a:bevelB w="88900" h="31750" prst="angle"/>
+    </dgm:sp3d>
+    <dgm:txPr/>
+    <dgm:style>
+      <a:lnRef idx="0">
+        <a:scrgbClr r="0" g="0" b="0"/>
+      </a:lnRef>
+      <a:fillRef idx="1">
+        <a:scrgbClr r="0" g="0" b="0"/>
+      </a:fillRef>
+      <a:effectRef idx="1">
+        <a:scrgbClr r="0" g="0" b="0"/>
+      </a:effectRef>
+      <a:fontRef idx="minor">
+        <a:schemeClr val="tx1"/>
+      </a:fontRef>
+    </dgm:style>
+  </dgm:styleLbl>
+  <dgm:styleLbl name="alignNode1">
+    <dgm:scene3d>
+      <a:camera prst="orthographicFront"/>
+      <a:lightRig rig="flat" dir="t"/>
+    </dgm:scene3d>
+    <dgm:sp3d prstMaterial="plastic">
+      <a:bevelT w="120900" h="88900"/>
+      <a:bevelB w="88900" h="31750" prst="angle"/>
+    </dgm:sp3d>
+    <dgm:txPr/>
+    <dgm:style>
+      <a:lnRef idx="1">
+        <a:scrgbClr r="0" g="0" b="0"/>
+      </a:lnRef>
+      <a:fillRef idx="3">
+        <a:scrgbClr r="0" g="0" b="0"/>
+      </a:fillRef>
+      <a:effectRef idx="2">
+        <a:scrgbClr r="0" g="0" b="0"/>
+      </a:effectRef>
+      <a:fontRef idx="minor">
+        <a:schemeClr val="lt1"/>
+      </a:fontRef>
+    </dgm:style>
+  </dgm:styleLbl>
+  <dgm:styleLbl name="node1">
+    <dgm:scene3d>
+      <a:camera prst="orthographicFront"/>
+      <a:lightRig rig="flat" dir="t"/>
+    </dgm:scene3d>
+    <dgm:sp3d prstMaterial="plastic">
+      <a:bevelT w="120900" h="88900"/>
+      <a:bevelB w="88900" h="31750" prst="angle"/>
+    </dgm:sp3d>
+    <dgm:txPr/>
+    <dgm:style>
+      <a:lnRef idx="0">
+        <a:scrgbClr r="0" g="0" b="0"/>
+      </a:lnRef>
+      <a:fillRef idx="3">
+        <a:scrgbClr r="0" g="0" b="0"/>
+      </a:fillRef>
+      <a:effectRef idx="2">
+        <a:scrgbClr r="0" g="0" b="0"/>
+      </a:effectRef>
+      <a:fontRef idx="minor">
+        <a:schemeClr val="lt1"/>
+      </a:fontRef>
+    </dgm:style>
+  </dgm:styleLbl>
+  <dgm:styleLbl name="node2">
+    <dgm:scene3d>
+      <a:camera prst="orthographicFront"/>
+      <a:lightRig rig="flat" dir="t"/>
+    </dgm:scene3d>
+    <dgm:sp3d prstMaterial="plastic">
+      <a:bevelT w="120900" h="88900"/>
+      <a:bevelB w="88900" h="31750" prst="angle"/>
+    </dgm:sp3d>
+    <dgm:txPr/>
+    <dgm:style>
+      <a:lnRef idx="0">
+        <a:scrgbClr r="0" g="0" b="0"/>
+      </a:lnRef>
+      <a:fillRef idx="3">
+        <a:scrgbClr r="0" g="0" b="0"/>
+      </a:fillRef>
+      <a:effectRef idx="1">
+        <a:scrgbClr r="0" g="0" b="0"/>
+      </a:effectRef>
+      <a:fontRef idx="minor">
+        <a:schemeClr val="lt1"/>
+      </a:fontRef>
+    </dgm:style>
+  </dgm:styleLbl>
+  <dgm:styleLbl name="node3">
+    <dgm:scene3d>
+      <a:camera prst="orthographicFront"/>
+      <a:lightRig rig="flat" dir="t"/>
+    </dgm:scene3d>
+    <dgm:sp3d prstMaterial="plastic">
+      <a:bevelT w="120900" h="88900"/>
+      <a:bevelB w="88900" h="31750" prst="angle"/>
+    </dgm:sp3d>
+    <dgm:txPr/>
+    <dgm:style>
+      <a:lnRef idx="0">
+        <a:scrgbClr r="0" g="0" b="0"/>
+      </a:lnRef>
+      <a:fillRef idx="3">
+        <a:scrgbClr r="0" g="0" b="0"/>
+      </a:fillRef>
+      <a:effectRef idx="1">
+        <a:scrgbClr r="0" g="0" b="0"/>
+      </a:effectRef>
+      <a:fontRef idx="minor">
+        <a:schemeClr val="lt1"/>
+      </a:fontRef>
+    </dgm:style>
+  </dgm:styleLbl>
+  <dgm:styleLbl name="node4">
+    <dgm:scene3d>
+      <a:camera prst="orthographicFront"/>
+      <a:lightRig rig="flat" dir="t"/>
+    </dgm:scene3d>
+    <dgm:sp3d prstMaterial="plastic">
+      <a:bevelT w="120900" h="88900"/>
+      <a:bevelB w="88900" h="31750" prst="angle"/>
+    </dgm:sp3d>
+    <dgm:txPr/>
+    <dgm:style>
+      <a:lnRef idx="0">
+        <a:scrgbClr r="0" g="0" b="0"/>
+      </a:lnRef>
+      <a:fillRef idx="3">
+        <a:scrgbClr r="0" g="0" b="0"/>
+      </a:fillRef>
+      <a:effectRef idx="1">
+        <a:scrgbClr r="0" g="0" b="0"/>
+      </a:effectRef>
+      <a:fontRef idx="minor">
+        <a:schemeClr val="lt1"/>
+      </a:fontRef>
+    </dgm:style>
+  </dgm:styleLbl>
+  <dgm:styleLbl name="fgImgPlace1">
+    <dgm:scene3d>
+      <a:camera prst="orthographicFront"/>
+      <a:lightRig rig="flat" dir="t"/>
+    </dgm:scene3d>
+    <dgm:sp3d z="127000" prstMaterial="plastic">
+      <a:bevelT w="88900" h="88900"/>
+      <a:bevelB w="88900" h="31750" prst="angle"/>
+    </dgm:sp3d>
+    <dgm:txPr/>
+    <dgm:style>
+      <a:lnRef idx="0">
+        <a:scrgbClr r="0" g="0" b="0"/>
+      </a:lnRef>
+      <a:fillRef idx="3">
+        <a:scrgbClr r="0" g="0" b="0"/>
+      </a:fillRef>
+      <a:effectRef idx="2">
+        <a:scrgbClr r="0" g="0" b="0"/>
+      </a:effectRef>
+      <a:fontRef idx="minor"/>
+    </dgm:style>
+  </dgm:styleLbl>
+  <dgm:styleLbl name="alignImgPlace1">
+    <dgm:scene3d>
+      <a:camera prst="orthographicFront"/>
+      <a:lightRig rig="flat" dir="t"/>
+    </dgm:scene3d>
+    <dgm:sp3d prstMaterial="plastic">
+      <a:bevelT w="88900" h="88900"/>
+      <a:bevelB w="88900" h="31750" prst="angle"/>
+    </dgm:sp3d>
+    <dgm:txPr/>
+    <dgm:style>
+      <a:lnRef idx="0">
+        <a:scrgbClr r="0" g="0" b="0"/>
+      </a:lnRef>
+      <a:fillRef idx="3">
+        <a:scrgbClr r="0" g="0" b="0"/>
+      </a:fillRef>
+      <a:effectRef idx="2">
+        <a:scrgbClr r="0" g="0" b="0"/>
+      </a:effectRef>
+      <a:fontRef idx="minor"/>
+    </dgm:style>
+  </dgm:styleLbl>
+  <dgm:styleLbl name="bgImgPlace1">
+    <dgm:scene3d>
+      <a:camera prst="orthographicFront"/>
+      <a:lightRig rig="flat" dir="t"/>
+    </dgm:scene3d>
+    <dgm:sp3d z="-190500" prstMaterial="plastic">
+      <a:bevelT w="88900" h="88900"/>
+      <a:bevelB w="88900" h="31750" prst="angle"/>
+    </dgm:sp3d>
+    <dgm:txPr/>
+    <dgm:style>
+      <a:lnRef idx="0">
+        <a:scrgbClr r="0" g="0" b="0"/>
+      </a:lnRef>
+      <a:fillRef idx="3">
+        <a:scrgbClr r="0" g="0" b="0"/>
+      </a:fillRef>
+      <a:effectRef idx="2">
+        <a:scrgbClr r="0" g="0" b="0"/>
+      </a:effectRef>
+      <a:fontRef idx="minor"/>
+    </dgm:style>
+  </dgm:styleLbl>
+  <dgm:styleLbl name="sibTrans2D1">
+    <dgm:scene3d>
+      <a:camera prst="orthographicFront"/>
+      <a:lightRig rig="flat" dir="t"/>
+    </dgm:scene3d>
+    <dgm:sp3d z="-80000" prstMaterial="plastic">
+      <a:bevelT w="50800" h="50800"/>
+      <a:bevelB w="25400" h="25400" prst="angle"/>
+    </dgm:sp3d>
+    <dgm:txPr/>
+    <dgm:style>
+      <a:lnRef idx="0">
+        <a:scrgbClr r="0" g="0" b="0"/>
+      </a:lnRef>
+      <a:fillRef idx="3">
+        <a:scrgbClr r="0" g="0" b="0"/>
+      </a:fillRef>
+      <a:effectRef idx="2">
+        <a:scrgbClr r="0" g="0" b="0"/>
+      </a:effectRef>
+      <a:fontRef idx="minor">
+        <a:schemeClr val="lt1"/>
+      </a:fontRef>
+    </dgm:style>
+  </dgm:styleLbl>
+  <dgm:styleLbl name="fgSibTrans2D1">
+    <dgm:scene3d>
+      <a:camera prst="orthographicFront"/>
+      <a:lightRig rig="flat" dir="t"/>
+    </dgm:scene3d>
+    <dgm:sp3d z="127000" prstMaterial="plastic">
+      <a:bevelT w="50800" h="50800"/>
+      <a:bevelB w="25400" h="25400" prst="angle"/>
+    </dgm:sp3d>
+    <dgm:txPr/>
+    <dgm:style>
+      <a:lnRef idx="0">
+        <a:scrgbClr r="0" g="0" b="0"/>
+      </a:lnRef>
+      <a:fillRef idx="3">
+        <a:scrgbClr r="0" g="0" b="0"/>
+      </a:fillRef>
+      <a:effectRef idx="2">
+        <a:scrgbClr r="0" g="0" b="0"/>
+      </a:effectRef>
+      <a:fontRef idx="minor">
+        <a:schemeClr val="lt1"/>
+      </a:fontRef>
+    </dgm:style>
+  </dgm:styleLbl>
+  <dgm:styleLbl name="bgSibTrans2D1">
+    <dgm:scene3d>
+      <a:camera prst="orthographicFront"/>
+      <a:lightRig rig="flat" dir="t"/>
+    </dgm:scene3d>
+    <dgm:sp3d z="-190500" prstMaterial="plastic">
+      <a:bevelT w="50800" h="50800"/>
+      <a:bevelB w="25400" h="25400" prst="angle"/>
+    </dgm:sp3d>
+    <dgm:txPr/>
+    <dgm:style>
+      <a:lnRef idx="0">
+        <a:scrgbClr r="0" g="0" b="0"/>
+      </a:lnRef>
+      <a:fillRef idx="3">
+        <a:scrgbClr r="0" g="0" b="0"/>
+      </a:fillRef>
+      <a:effectRef idx="2">
+        <a:scrgbClr r="0" g="0" b="0"/>
+      </a:effectRef>
+      <a:fontRef idx="minor">
+        <a:schemeClr val="lt1"/>
+      </a:fontRef>
+    </dgm:style>
+  </dgm:styleLbl>
+  <dgm:styleLbl name="sibTrans1D1">
+    <dgm:scene3d>
+      <a:camera prst="orthographicFront"/>
+      <a:lightRig rig="flat" dir="t"/>
+    </dgm:scene3d>
+    <dgm:sp3d z="-40000" prstMaterial="matte"/>
+    <dgm:txPr/>
+    <dgm:style>
+      <a:lnRef idx="1">
+        <a:scrgbClr r="0" g="0" b="0"/>
+      </a:lnRef>
+      <a:fillRef idx="0">
+        <a:scrgbClr r="0" g="0" b="0"/>
+      </a:fillRef>
+      <a:effectRef idx="0">
+        <a:scrgbClr r="0" g="0" b="0"/>
+      </a:effectRef>
+      <a:fontRef idx="minor"/>
+    </dgm:style>
+  </dgm:styleLbl>
+  <dgm:styleLbl name="callout">
+    <dgm:scene3d>
+      <a:camera prst="orthographicFront"/>
+      <a:lightRig rig="threePt" dir="t"/>
+    </dgm:scene3d>
+    <dgm:sp3d z="127000" prstMaterial="matte"/>
+    <dgm:txPr/>
+    <dgm:style>
+      <a:lnRef idx="2">
+        <a:scrgbClr r="0" g="0" b="0"/>
+      </a:lnRef>
+      <a:fillRef idx="1">
+        <a:scrgbClr r="0" g="0" b="0"/>
+      </a:fillRef>
+      <a:effectRef idx="0">
+        <a:scrgbClr r="0" g="0" b="0"/>
+      </a:effectRef>
+      <a:fontRef idx="minor"/>
+    </dgm:style>
+  </dgm:styleLbl>
+  <dgm:styleLbl name="asst0">
+    <dgm:scene3d>
+      <a:camera prst="orthographicFront"/>
+      <a:lightRig rig="flat" dir="t"/>
+    </dgm:scene3d>
+    <dgm:sp3d prstMaterial="plastic">
+      <a:bevelT w="120900" h="88900"/>
+      <a:bevelB w="88900" h="31750" prst="angle"/>
+    </dgm:sp3d>
+    <dgm:txPr/>
+    <dgm:style>
+      <a:lnRef idx="0">
+        <a:scrgbClr r="0" g="0" b="0"/>
+      </a:lnRef>
+      <a:fillRef idx="3">
+        <a:scrgbClr r="0" g="0" b="0"/>
+      </a:fillRef>
+      <a:effectRef idx="1">
+        <a:scrgbClr r="0" g="0" b="0"/>
+      </a:effectRef>
+      <a:fontRef idx="minor">
+        <a:schemeClr val="lt1"/>
+      </a:fontRef>
+    </dgm:style>
+  </dgm:styleLbl>
+  <dgm:styleLbl name="asst1">
+    <dgm:scene3d>
+      <a:camera prst="orthographicFront"/>
+      <a:lightRig rig="flat" dir="t"/>
+    </dgm:scene3d>
+    <dgm:sp3d prstMaterial="plastic">
+      <a:bevelT w="120900" h="88900"/>
+      <a:bevelB w="88900" h="31750" prst="angle"/>
+    </dgm:sp3d>
+    <dgm:txPr/>
+    <dgm:style>
+      <a:lnRef idx="0">
+        <a:scrgbClr r="0" g="0" b="0"/>
+      </a:lnRef>
+      <a:fillRef idx="3">
+        <a:scrgbClr r="0" g="0" b="0"/>
+      </a:fillRef>
+      <a:effectRef idx="1">
+        <a:scrgbClr r="0" g="0" b="0"/>
+      </a:effectRef>
+      <a:fontRef idx="minor">
+        <a:schemeClr val="lt1"/>
+      </a:fontRef>
+    </dgm:style>
+  </dgm:styleLbl>
+  <dgm:styleLbl name="asst2">
+    <dgm:scene3d>
+      <a:camera prst="orthographicFront"/>
+      <a:lightRig rig="flat" dir="t"/>
+    </dgm:scene3d>
+    <dgm:sp3d prstMaterial="plastic">
+      <a:bevelT w="120900" h="88900"/>
+      <a:bevelB w="88900" h="31750" prst="angle"/>
+    </dgm:sp3d>
+    <dgm:txPr/>
+    <dgm:style>
+      <a:lnRef idx="0">
+        <a:scrgbClr r="0" g="0" b="0"/>
+      </a:lnRef>
+      <a:fillRef idx="3">
+        <a:scrgbClr r="0" g="0" b="0"/>
+      </a:fillRef>
+      <a:effectRef idx="1">
+        <a:scrgbClr r="0" g="0" b="0"/>
+      </a:effectRef>
+      <a:fontRef idx="minor">
+        <a:schemeClr val="lt1"/>
+      </a:fontRef>
+    </dgm:style>
+  </dgm:styleLbl>
+  <dgm:styleLbl name="asst3">
+    <dgm:scene3d>
+      <a:camera prst="orthographicFront"/>
+      <a:lightRig rig="flat" dir="t"/>
+    </dgm:scene3d>
+    <dgm:sp3d prstMaterial="plastic">
+      <a:bevelT w="120900" h="88900"/>
+      <a:bevelB w="88900" h="31750" prst="angle"/>
+    </dgm:sp3d>
+    <dgm:txPr/>
+    <dgm:style>
+      <a:lnRef idx="0">
+        <a:scrgbClr r="0" g="0" b="0"/>
+      </a:lnRef>
+      <a:fillRef idx="3">
+        <a:scrgbClr r="0" g="0" b="0"/>
+      </a:fillRef>
+      <a:effectRef idx="1">
+        <a:scrgbClr r="0" g="0" b="0"/>
+      </a:effectRef>
+      <a:fontRef idx="minor">
+        <a:schemeClr val="lt1"/>
+      </a:fontRef>
+    </dgm:style>
+  </dgm:styleLbl>
+  <dgm:styleLbl name="parChTrans2D1">
+    <dgm:scene3d>
+      <a:camera prst="orthographicFront"/>
+      <a:lightRig rig="flat" dir="t"/>
+    </dgm:scene3d>
+    <dgm:sp3d z="-100000" prstMaterial="plastic">
+      <a:bevelT w="120900" h="88900"/>
+      <a:bevelB w="88900" h="31750" prst="angle"/>
+    </dgm:sp3d>
+    <dgm:txPr/>
+    <dgm:style>
+      <a:lnRef idx="0">
+        <a:scrgbClr r="0" g="0" b="0"/>
+      </a:lnRef>
+      <a:fillRef idx="3">
+        <a:scrgbClr r="0" g="0" b="0"/>
+      </a:fillRef>
+      <a:effectRef idx="1">
+        <a:scrgbClr r="0" g="0" b="0"/>
+      </a:effectRef>
+      <a:fontRef idx="minor">
+        <a:schemeClr val="lt1"/>
+      </a:fontRef>
+    </dgm:style>
+  </dgm:styleLbl>
+  <dgm:styleLbl name="parChTrans2D2">
+    <dgm:scene3d>
+      <a:camera prst="orthographicFront"/>
+      <a:lightRig rig="flat" dir="t"/>
+    </dgm:scene3d>
+    <dgm:sp3d z="-60000" prstMaterial="plastic">
+      <a:bevelT w="120900" h="88900"/>
+      <a:bevelB w="88900" h="31750" prst="angle"/>
+    </dgm:sp3d>
+    <dgm:txPr/>
+    <dgm:style>
+      <a:lnRef idx="0">
+        <a:scrgbClr r="0" g="0" b="0"/>
+      </a:lnRef>
+      <a:fillRef idx="3">
+        <a:scrgbClr r="0" g="0" b="0"/>
+      </a:fillRef>
+      <a:effectRef idx="1">
+        <a:scrgbClr r="0" g="0" b="0"/>
+      </a:effectRef>
+      <a:fontRef idx="minor">
+        <a:schemeClr val="lt1"/>
+      </a:fontRef>
+    </dgm:style>
+  </dgm:styleLbl>
+  <dgm:styleLbl name="parChTrans2D3">
+    <dgm:scene3d>
+      <a:camera prst="orthographicFront"/>
+      <a:lightRig rig="flat" dir="t"/>
+    </dgm:scene3d>
+    <dgm:sp3d z="-60000" prstMaterial="plastic">
+      <a:bevelT w="120900" h="88900"/>
+      <a:bevelB w="88900" h="31750" prst="angle"/>
+    </dgm:sp3d>
+    <dgm:txPr/>
+    <dgm:style>
+      <a:lnRef idx="0">
+        <a:scrgbClr r="0" g="0" b="0"/>
+      </a:lnRef>
+      <a:fillRef idx="3">
+        <a:scrgbClr r="0" g="0" b="0"/>
+      </a:fillRef>
+      <a:effectRef idx="1">
+        <a:scrgbClr r="0" g="0" b="0"/>
+      </a:effectRef>
+      <a:fontRef idx="minor">
+        <a:schemeClr val="lt1"/>
+      </a:fontRef>
+    </dgm:style>
+  </dgm:styleLbl>
+  <dgm:styleLbl name="parChTrans2D4">
+    <dgm:scene3d>
+      <a:camera prst="orthographicFront"/>
+      <a:lightRig rig="flat" dir="t"/>
+    </dgm:scene3d>
+    <dgm:sp3d z="-60000" prstMaterial="plastic">
+      <a:bevelT w="120900" h="88900"/>
+      <a:bevelB w="88900" h="31750" prst="angle"/>
+    </dgm:sp3d>
+    <dgm:txPr/>
+    <dgm:style>
+      <a:lnRef idx="0">
+        <a:scrgbClr r="0" g="0" b="0"/>
+      </a:lnRef>
+      <a:fillRef idx="3">
+        <a:scrgbClr r="0" g="0" b="0"/>
+      </a:fillRef>
+      <a:effectRef idx="1">
+        <a:scrgbClr r="0" g="0" b="0"/>
+      </a:effectRef>
+      <a:fontRef idx="minor">
+        <a:schemeClr val="lt1"/>
+      </a:fontRef>
+    </dgm:style>
+  </dgm:styleLbl>
+  <dgm:styleLbl name="parChTrans1D1">
+    <dgm:scene3d>
+      <a:camera prst="orthographicFront"/>
+      <a:lightRig rig="flat" dir="t"/>
+    </dgm:scene3d>
+    <dgm:sp3d prstMaterial="matte"/>
+    <dgm:txPr/>
+    <dgm:style>
+      <a:lnRef idx="2">
+        <a:scrgbClr r="0" g="0" b="0"/>
+      </a:lnRef>
+      <a:fillRef idx="0">
+        <a:scrgbClr r="0" g="0" b="0"/>
+      </a:fillRef>
+      <a:effectRef idx="0">
+        <a:scrgbClr r="0" g="0" b="0"/>
+      </a:effectRef>
+      <a:fontRef idx="minor"/>
+    </dgm:style>
+  </dgm:styleLbl>
+  <dgm:styleLbl name="parChTrans1D2">
+    <dgm:scene3d>
+      <a:camera prst="orthographicFront"/>
+      <a:lightRig rig="flat" dir="t"/>
+    </dgm:scene3d>
+    <dgm:sp3d prstMaterial="matte"/>
+    <dgm:txPr/>
+    <dgm:style>
+      <a:lnRef idx="2">
+        <a:scrgbClr r="0" g="0" b="0"/>
+      </a:lnRef>
+      <a:fillRef idx="0">
+        <a:scrgbClr r="0" g="0" b="0"/>
+      </a:fillRef>
+      <a:effectRef idx="0">
+        <a:scrgbClr r="0" g="0" b="0"/>
+      </a:effectRef>
+      <a:fontRef idx="minor"/>
+    </dgm:style>
+  </dgm:styleLbl>
+  <dgm:styleLbl name="parChTrans1D3">
+    <dgm:scene3d>
+      <a:camera prst="orthographicFront"/>
+      <a:lightRig rig="flat" dir="t"/>
+    </dgm:scene3d>
+    <dgm:sp3d prstMaterial="matte"/>
+    <dgm:txPr/>
+    <dgm:style>
+      <a:lnRef idx="2">
+        <a:scrgbClr r="0" g="0" b="0"/>
+      </a:lnRef>
+      <a:fillRef idx="0">
+        <a:scrgbClr r="0" g="0" b="0"/>
+      </a:fillRef>
+      <a:effectRef idx="0">
+        <a:scrgbClr r="0" g="0" b="0"/>
+      </a:effectRef>
+      <a:fontRef idx="minor"/>
+    </dgm:style>
+  </dgm:styleLbl>
+  <dgm:styleLbl name="parChTrans1D4">
+    <dgm:scene3d>
+      <a:camera prst="orthographicFront"/>
+      <a:lightRig rig="flat" dir="t"/>
+    </dgm:scene3d>
+    <dgm:sp3d prstMaterial="matte"/>
+    <dgm:txPr/>
+    <dgm:style>
+      <a:lnRef idx="2">
+        <a:scrgbClr r="0" g="0" b="0"/>
+      </a:lnRef>
+      <a:fillRef idx="0">
+        <a:scrgbClr r="0" g="0" b="0"/>
+      </a:fillRef>
+      <a:effectRef idx="0">
+        <a:scrgbClr r="0" g="0" b="0"/>
+      </a:effectRef>
+      <a:fontRef idx="minor"/>
+    </dgm:style>
+  </dgm:styleLbl>
+  <dgm:styleLbl name="fgAcc1">
+    <dgm:scene3d>
+      <a:camera prst="orthographicFront"/>
+      <a:lightRig rig="flat" dir="t"/>
+    </dgm:scene3d>
+    <dgm:sp3d z="190500" extrusionH="12700" prstMaterial="plastic">
+      <a:bevelT w="50800" h="50800"/>
+    </dgm:sp3d>
+    <dgm:txPr/>
+    <dgm:style>
+      <a:lnRef idx="1">
+        <a:scrgbClr r="0" g="0" b="0"/>
+      </a:lnRef>
+      <a:fillRef idx="1">
+        <a:scrgbClr r="0" g="0" b="0"/>
+      </a:fillRef>
+      <a:effectRef idx="2">
+        <a:scrgbClr r="0" g="0" b="0"/>
+      </a:effectRef>
+      <a:fontRef idx="minor"/>
+    </dgm:style>
+  </dgm:styleLbl>
+  <dgm:styleLbl name="conFgAcc1">
+    <dgm:scene3d>
+      <a:camera prst="orthographicFront"/>
+      <a:lightRig rig="flat" dir="t"/>
+    </dgm:scene3d>
+    <dgm:sp3d z="190500" extrusionH="12700" prstMaterial="plastic">
+      <a:bevelT w="50800" h="50800"/>
+    </dgm:sp3d>
+    <dgm:txPr/>
+    <dgm:style>
+      <a:lnRef idx="1">
+        <a:scrgbClr r="0" g="0" b="0"/>
+      </a:lnRef>
+      <a:fillRef idx="1">
+        <a:scrgbClr r="0" g="0" b="0"/>
+      </a:fillRef>
+      <a:effectRef idx="2">
+        <a:scrgbClr r="0" g="0" b="0"/>
+      </a:effectRef>
+      <a:fontRef idx="minor"/>
+    </dgm:style>
+  </dgm:styleLbl>
+  <dgm:styleLbl name="alignAcc1">
+    <dgm:scene3d>
+      <a:camera prst="orthographicFront"/>
+      <a:lightRig rig="flat" dir="t"/>
+    </dgm:scene3d>
+    <dgm:sp3d extrusionH="12700" prstMaterial="plastic">
+      <a:bevelT w="50800" h="50800"/>
+    </dgm:sp3d>
+    <dgm:txPr/>
+    <dgm:style>
+      <a:lnRef idx="1">
+        <a:scrgbClr r="0" g="0" b="0"/>
+      </a:lnRef>
+      <a:fillRef idx="1">
+        <a:scrgbClr r="0" g="0" b="0"/>
+      </a:fillRef>
+      <a:effectRef idx="2">
+        <a:scrgbClr r="0" g="0" b="0"/>
+      </a:effectRef>
+      <a:fontRef idx="minor"/>
+    </dgm:style>
+  </dgm:styleLbl>
+  <dgm:styleLbl name="trAlignAcc1">
+    <dgm:scene3d>
+      <a:camera prst="orthographicFront"/>
+      <a:lightRig rig="flat" dir="t"/>
+    </dgm:scene3d>
+    <dgm:sp3d extrusionH="12700" prstMaterial="plastic">
+      <a:bevelT w="50800" h="50800"/>
+    </dgm:sp3d>
+    <dgm:txPr/>
+    <dgm:style>
+      <a:lnRef idx="1">
+        <a:scrgbClr r="0" g="0" b="0"/>
+      </a:lnRef>
+      <a:fillRef idx="1">
+        <a:scrgbClr r="0" g="0" b="0"/>
+      </a:fillRef>
+      <a:effectRef idx="2">
+        <a:scrgbClr r="0" g="0" b="0"/>
+      </a:effectRef>
+      <a:fontRef idx="minor"/>
+    </dgm:style>
+  </dgm:styleLbl>
+  <dgm:styleLbl name="bgAcc1">
+    <dgm:scene3d>
+      <a:camera prst="orthographicFront"/>
+      <a:lightRig rig="flat" dir="t"/>
+    </dgm:scene3d>
+    <dgm:sp3d z="-190500" extrusionH="12700" prstMaterial="plastic">
+      <a:bevelT w="50800" h="50800"/>
+    </dgm:sp3d>
+    <dgm:txPr/>
+    <dgm:style>
+      <a:lnRef idx="1">
+        <a:scrgbClr r="0" g="0" b="0"/>
+      </a:lnRef>
+      <a:fillRef idx="1">
+        <a:scrgbClr r="0" g="0" b="0"/>
+      </a:fillRef>
+      <a:effectRef idx="2">
+        <a:scrgbClr r="0" g="0" b="0"/>
+      </a:effectRef>
+      <a:fontRef idx="minor"/>
+    </dgm:style>
+  </dgm:styleLbl>
+  <dgm:styleLbl name="solidFgAcc1">
+    <dgm:scene3d>
+      <a:camera prst="orthographicFront"/>
+      <a:lightRig rig="flat" dir="t"/>
+    </dgm:scene3d>
+    <dgm:sp3d z="190500" extrusionH="12700" prstMaterial="plastic">
+      <a:bevelT w="50800" h="50800"/>
+    </dgm:sp3d>
+    <dgm:txPr/>
+    <dgm:style>
+      <a:lnRef idx="1">
+        <a:scrgbClr r="0" g="0" b="0"/>
+      </a:lnRef>
+      <a:fillRef idx="1">
+        <a:scrgbClr r="0" g="0" b="0"/>
+      </a:fillRef>
+      <a:effectRef idx="2">
+        <a:scrgbClr r="0" g="0" b="0"/>
+      </a:effectRef>
+      <a:fontRef idx="minor"/>
+    </dgm:style>
+  </dgm:styleLbl>
+  <dgm:styleLbl name="solidAlignAcc1">
+    <dgm:scene3d>
+      <a:camera prst="orthographicFront"/>
+      <a:lightRig rig="flat" dir="t"/>
+    </dgm:scene3d>
+    <dgm:sp3d extrusionH="12700" prstMaterial="plastic">
+      <a:bevelT w="50800" h="50800"/>
+    </dgm:sp3d>
+    <dgm:txPr/>
+    <dgm:style>
+      <a:lnRef idx="1">
+        <a:scrgbClr r="0" g="0" b="0"/>
+      </a:lnRef>
+      <a:fillRef idx="1">
+        <a:scrgbClr r="0" g="0" b="0"/>
+      </a:fillRef>
+      <a:effectRef idx="2">
+        <a:scrgbClr r="0" g="0" b="0"/>
+      </a:effectRef>
+      <a:fontRef idx="minor"/>
+    </dgm:style>
+  </dgm:styleLbl>
+  <dgm:styleLbl name="solidBgAcc1">
+    <dgm:scene3d>
+      <a:camera prst="orthographicFront"/>
+      <a:lightRig rig="flat" dir="t"/>
+    </dgm:scene3d>
+    <dgm:sp3d z="-190500" extrusionH="12700" prstMaterial="plastic">
+      <a:bevelT w="50800" h="50800"/>
+    </dgm:sp3d>
+    <dgm:txPr/>
+    <dgm:style>
+      <a:lnRef idx="1">
+        <a:scrgbClr r="0" g="0" b="0"/>
+      </a:lnRef>
+      <a:fillRef idx="1">
+        <a:scrgbClr r="0" g="0" b="0"/>
+      </a:fillRef>
+      <a:effectRef idx="2">
+        <a:scrgbClr r="0" g="0" b="0"/>
+      </a:effectRef>
+      <a:fontRef idx="minor"/>
+    </dgm:style>
+  </dgm:styleLbl>
+  <dgm:styleLbl name="fgAccFollowNode1">
+    <dgm:scene3d>
+      <a:camera prst="orthographicFront"/>
+      <a:lightRig rig="flat" dir="t"/>
+    </dgm:scene3d>
+    <dgm:sp3d z="190500" extrusionH="12700" prstMaterial="plastic">
+      <a:bevelT w="50800" h="50800"/>
+    </dgm:sp3d>
+    <dgm:txPr/>
+    <dgm:style>
+      <a:lnRef idx="1">
+        <a:scrgbClr r="0" g="0" b="0"/>
+      </a:lnRef>
+      <a:fillRef idx="1">
+        <a:scrgbClr r="0" g="0" b="0"/>
+      </a:fillRef>
+      <a:effectRef idx="2">
+        <a:scrgbClr r="0" g="0" b="0"/>
+      </a:effectRef>
+      <a:fontRef idx="minor"/>
+    </dgm:style>
+  </dgm:styleLbl>
+  <dgm:styleLbl name="alignAccFollowNode1">
+    <dgm:scene3d>
+      <a:camera prst="orthographicFront"/>
+      <a:lightRig rig="flat" dir="t"/>
+    </dgm:scene3d>
+    <dgm:sp3d extrusionH="12700" prstMaterial="plastic">
+      <a:bevelT w="50800" h="50800"/>
+    </dgm:sp3d>
+    <dgm:txPr/>
+    <dgm:style>
+      <a:lnRef idx="1">
+        <a:scrgbClr r="0" g="0" b="0"/>
+      </a:lnRef>
+      <a:fillRef idx="1">
+        <a:scrgbClr r="0" g="0" b="0"/>
+      </a:fillRef>
+      <a:effectRef idx="2">
+        <a:scrgbClr r="0" g="0" b="0"/>
+      </a:effectRef>
+      <a:fontRef idx="minor"/>
+    </dgm:style>
+  </dgm:styleLbl>
+  <dgm:styleLbl name="bgAccFollowNode1">
+    <dgm:scene3d>
+      <a:camera prst="orthographicFront"/>
+      <a:lightRig rig="flat" dir="t"/>
+    </dgm:scene3d>
+    <dgm:sp3d z="-190500" extrusionH="12700" prstMaterial="plastic">
+      <a:bevelT w="50800" h="50800"/>
+    </dgm:sp3d>
+    <dgm:txPr/>
+    <dgm:style>
+      <a:lnRef idx="1">
+        <a:scrgbClr r="0" g="0" b="0"/>
+      </a:lnRef>
+      <a:fillRef idx="1">
+        <a:scrgbClr r="0" g="0" b="0"/>
+      </a:fillRef>
+      <a:effectRef idx="2">
+        <a:scrgbClr r="0" g="0" b="0"/>
+      </a:effectRef>
+      <a:fontRef idx="minor"/>
+    </dgm:style>
+  </dgm:styleLbl>
+  <dgm:styleLbl name="fgAcc0">
+    <dgm:scene3d>
+      <a:camera prst="orthographicFront"/>
+      <a:lightRig rig="flat" dir="t"/>
+    </dgm:scene3d>
+    <dgm:sp3d z="190500" extrusionH="12700" prstMaterial="plastic">
+      <a:bevelT w="50800" h="50800"/>
+    </dgm:sp3d>
+    <dgm:txPr/>
+    <dgm:style>
+      <a:lnRef idx="1">
+        <a:scrgbClr r="0" g="0" b="0"/>
+      </a:lnRef>
+      <a:fillRef idx="1">
+        <a:scrgbClr r="0" g="0" b="0"/>
+      </a:fillRef>
+      <a:effectRef idx="2">
+        <a:scrgbClr r="0" g="0" b="0"/>
+      </a:effectRef>
+      <a:fontRef idx="minor"/>
+    </dgm:style>
+  </dgm:styleLbl>
+  <dgm:styleLbl name="fgAcc2">
+    <dgm:scene3d>
+      <a:camera prst="orthographicFront"/>
+      <a:lightRig rig="flat" dir="t"/>
+    </dgm:scene3d>
+    <dgm:sp3d z="190500" extrusionH="12700" prstMaterial="plastic">
+      <a:bevelT w="50800" h="50800"/>
+    </dgm:sp3d>
+    <dgm:txPr/>
+    <dgm:style>
+      <a:lnRef idx="1">
+        <a:scrgbClr r="0" g="0" b="0"/>
+      </a:lnRef>
+      <a:fillRef idx="1">
+        <a:scrgbClr r="0" g="0" b="0"/>
+      </a:fillRef>
+      <a:effectRef idx="2">
+        <a:scrgbClr r="0" g="0" b="0"/>
+      </a:effectRef>
+      <a:fontRef idx="minor"/>
+    </dgm:style>
+  </dgm:styleLbl>
+  <dgm:styleLbl name="fgAcc3">
+    <dgm:scene3d>
+      <a:camera prst="orthographicFront"/>
+      <a:lightRig rig="flat" dir="t"/>
+    </dgm:scene3d>
+    <dgm:sp3d z="190500" extrusionH="12700" prstMaterial="plastic">
+      <a:bevelT w="50800" h="50800"/>
+    </dgm:sp3d>
+    <dgm:txPr/>
+    <dgm:style>
+      <a:lnRef idx="1">
+        <a:scrgbClr r="0" g="0" b="0"/>
+      </a:lnRef>
+      <a:fillRef idx="1">
+        <a:scrgbClr r="0" g="0" b="0"/>
+      </a:fillRef>
+      <a:effectRef idx="2">
+        <a:scrgbClr r="0" g="0" b="0"/>
+      </a:effectRef>
+      <a:fontRef idx="minor"/>
+    </dgm:style>
+  </dgm:styleLbl>
+  <dgm:styleLbl name="fgAcc4">
+    <dgm:scene3d>
+      <a:camera prst="orthographicFront"/>
+      <a:lightRig rig="flat" dir="t"/>
+    </dgm:scene3d>
+    <dgm:sp3d z="190500" extrusionH="12700" prstMaterial="plastic">
+      <a:bevelT w="50800" h="50800"/>
+    </dgm:sp3d>
+    <dgm:txPr/>
+    <dgm:style>
+      <a:lnRef idx="1">
+        <a:scrgbClr r="0" g="0" b="0"/>
+      </a:lnRef>
+      <a:fillRef idx="1">
+        <a:scrgbClr r="0" g="0" b="0"/>
+      </a:fillRef>
+      <a:effectRef idx="2">
+        <a:scrgbClr r="0" g="0" b="0"/>
+      </a:effectRef>
+      <a:fontRef idx="minor"/>
+    </dgm:style>
+  </dgm:styleLbl>
+  <dgm:styleLbl name="bgShp">
+    <dgm:scene3d>
+      <a:camera prst="orthographicFront"/>
+      <a:lightRig rig="flat" dir="t"/>
+    </dgm:scene3d>
+    <dgm:sp3d z="-190500" extrusionH="12700" prstMaterial="plastic">
+      <a:bevelT w="50800" h="50800"/>
+    </dgm:sp3d>
+    <dgm:txPr/>
+    <dgm:style>
+      <a:lnRef idx="0">
+        <a:scrgbClr r="0" g="0" b="0"/>
+      </a:lnRef>
+      <a:fillRef idx="3">
+        <a:scrgbClr r="0" g="0" b="0"/>
+      </a:fillRef>
+      <a:effectRef idx="0">
+        <a:scrgbClr r="0" g="0" b="0"/>
+      </a:effectRef>
+      <a:fontRef idx="minor"/>
+    </dgm:style>
+  </dgm:styleLbl>
+  <dgm:styleLbl name="dkBgShp">
+    <dgm:scene3d>
+      <a:camera prst="orthographicFront"/>
+      <a:lightRig rig="flat" dir="t"/>
+    </dgm:scene3d>
+    <dgm:sp3d z="-190500" extrusionH="12700" prstMaterial="plastic">
+      <a:bevelT w="50800" h="50800"/>
+    </dgm:sp3d>
+    <dgm:txPr/>
+    <dgm:style>
+      <a:lnRef idx="0">
+        <a:scrgbClr r="0" g="0" b="0"/>
+      </a:lnRef>
+      <a:fillRef idx="2">
+        <a:scrgbClr r="0" g="0" b="0"/>
+      </a:fillRef>
+      <a:effectRef idx="0">
+        <a:scrgbClr r="0" g="0" b="0"/>
+      </a:effectRef>
+      <a:fontRef idx="minor"/>
+    </dgm:style>
+  </dgm:styleLbl>
+  <dgm:styleLbl name="trBgShp">
+    <dgm:scene3d>
+      <a:camera prst="orthographicFront"/>
+      <a:lightRig rig="flat" dir="t"/>
+    </dgm:scene3d>
+    <dgm:sp3d z="-190500" extrusionH="12700" prstMaterial="matte"/>
+    <dgm:txPr/>
+    <dgm:style>
+      <a:lnRef idx="0">
+        <a:scrgbClr r="0" g="0" b="0"/>
+      </a:lnRef>
+      <a:fillRef idx="1">
+        <a:scrgbClr r="0" g="0" b="0"/>
+      </a:fillRef>
+      <a:effectRef idx="0">
+        <a:scrgbClr r="0" g="0" b="0"/>
+      </a:effectRef>
+      <a:fontRef idx="minor"/>
+    </dgm:style>
+  </dgm:styleLbl>
+  <dgm:styleLbl name="fgShp">
+    <dgm:scene3d>
+      <a:camera prst="orthographicFront"/>
+      <a:lightRig rig="flat" dir="t"/>
+    </dgm:scene3d>
+    <dgm:sp3d z="190500" prstMaterial="plastic">
+      <a:bevelT w="120900" h="88900"/>
+      <a:bevelB w="88900" h="31750" prst="angle"/>
+    </dgm:sp3d>
+    <dgm:txPr/>
+    <dgm:style>
+      <a:lnRef idx="0">
+        <a:scrgbClr r="0" g="0" b="0"/>
+      </a:lnRef>
+      <a:fillRef idx="1">
+        <a:scrgbClr r="0" g="0" b="0"/>
+      </a:fillRef>
+      <a:effectRef idx="3">
+        <a:scrgbClr r="0" g="0" b="0"/>
+      </a:effectRef>
+      <a:fontRef idx="minor">
+        <a:schemeClr val="lt1"/>
+      </a:fontRef>
+    </dgm:style>
+  </dgm:styleLbl>
+  <dgm:styleLbl name="revTx">
+    <dgm:scene3d>
+      <a:camera prst="orthographicFront"/>
+      <a:lightRig rig="threePt" dir="t"/>
+    </dgm:scene3d>
+    <dgm:sp3d/>
+    <dgm:txPr/>
+    <dgm:style>
+      <a:lnRef idx="0">
+        <a:scrgbClr r="0" g="0" b="0"/>
+      </a:lnRef>
+      <a:fillRef idx="0">
+        <a:scrgbClr r="0" g="0" b="0"/>
+      </a:fillRef>
+      <a:effectRef idx="0">
+        <a:scrgbClr r="0" g="0" b="0"/>
+      </a:effectRef>
+      <a:fontRef idx="minor"/>
+    </dgm:style>
+  </dgm:styleLbl>
+</dgm:styleDef>
+</file>
+
+<file path=ppt/diagrams/quickStyle7.xml><?xml version="1.0" encoding="utf-8"?>
+<dgm:styleDef xmlns:dgm="http://schemas.openxmlformats.org/drawingml/2006/diagram" xmlns:a="http://schemas.openxmlformats.org/drawingml/2006/main" uniqueId="urn:microsoft.com/office/officeart/2005/8/quickstyle/3d1">
+  <dgm:title val=""/>
+  <dgm:desc val=""/>
+  <dgm:catLst>
+    <dgm:cat type="3D" pri="11100"/>
+  </dgm:catLst>
+  <dgm:scene3d>
+    <a:camera prst="orthographicFront"/>
+    <a:lightRig rig="threePt" dir="t"/>
+  </dgm:scene3d>
+  <dgm:styleLbl name="node0">
+    <dgm:scene3d>
+      <a:camera prst="orthographicFront"/>
+      <a:lightRig rig="flat" dir="t"/>
+    </dgm:scene3d>
+    <dgm:sp3d prstMaterial="plastic">
+      <a:bevelT w="120900" h="88900"/>
+      <a:bevelB w="88900" h="31750" prst="angle"/>
+    </dgm:sp3d>
+    <dgm:txPr/>
+    <dgm:style>
+      <a:lnRef idx="0">
+        <a:scrgbClr r="0" g="0" b="0"/>
+      </a:lnRef>
+      <a:fillRef idx="3">
+        <a:scrgbClr r="0" g="0" b="0"/>
+      </a:fillRef>
+      <a:effectRef idx="2">
+        <a:scrgbClr r="0" g="0" b="0"/>
+      </a:effectRef>
+      <a:fontRef idx="minor">
+        <a:schemeClr val="lt1"/>
+      </a:fontRef>
+    </dgm:style>
+  </dgm:styleLbl>
+  <dgm:styleLbl name="lnNode1">
+    <dgm:scene3d>
+      <a:camera prst="orthographicFront"/>
+      <a:lightRig rig="flat" dir="t"/>
+    </dgm:scene3d>
+    <dgm:sp3d prstMaterial="plastic">
+      <a:bevelT w="120900" h="88900"/>
+      <a:bevelB w="88900" h="31750" prst="angle"/>
+    </dgm:sp3d>
+    <dgm:txPr/>
+    <dgm:style>
+      <a:lnRef idx="0">
+        <a:scrgbClr r="0" g="0" b="0"/>
+      </a:lnRef>
+      <a:fillRef idx="3">
+        <a:scrgbClr r="0" g="0" b="0"/>
+      </a:fillRef>
+      <a:effectRef idx="1">
+        <a:scrgbClr r="0" g="0" b="0"/>
+      </a:effectRef>
+      <a:fontRef idx="minor">
+        <a:schemeClr val="lt1"/>
+      </a:fontRef>
+    </dgm:style>
+  </dgm:styleLbl>
+  <dgm:styleLbl name="vennNode1">
+    <dgm:scene3d>
+      <a:camera prst="orthographicFront"/>
+      <a:lightRig rig="flat" dir="t"/>
+    </dgm:scene3d>
+    <dgm:sp3d prstMaterial="plastic">
+      <a:bevelT w="120900" h="88900"/>
+      <a:bevelB w="88900" h="31750" prst="angle"/>
+    </dgm:sp3d>
+    <dgm:txPr/>
+    <dgm:style>
+      <a:lnRef idx="0">
+        <a:scrgbClr r="0" g="0" b="0"/>
+      </a:lnRef>
+      <a:fillRef idx="1">
+        <a:scrgbClr r="0" g="0" b="0"/>
+      </a:fillRef>
+      <a:effectRef idx="1">
+        <a:scrgbClr r="0" g="0" b="0"/>
+      </a:effectRef>
+      <a:fontRef idx="minor">
+        <a:schemeClr val="tx1"/>
+      </a:fontRef>
+    </dgm:style>
+  </dgm:styleLbl>
+  <dgm:styleLbl name="alignNode1">
+    <dgm:scene3d>
+      <a:camera prst="orthographicFront"/>
+      <a:lightRig rig="flat" dir="t"/>
+    </dgm:scene3d>
+    <dgm:sp3d prstMaterial="plastic">
+      <a:bevelT w="120900" h="88900"/>
+      <a:bevelB w="88900" h="31750" prst="angle"/>
+    </dgm:sp3d>
+    <dgm:txPr/>
+    <dgm:style>
+      <a:lnRef idx="1">
+        <a:scrgbClr r="0" g="0" b="0"/>
+      </a:lnRef>
+      <a:fillRef idx="3">
+        <a:scrgbClr r="0" g="0" b="0"/>
+      </a:fillRef>
+      <a:effectRef idx="2">
+        <a:scrgbClr r="0" g="0" b="0"/>
+      </a:effectRef>
+      <a:fontRef idx="minor">
+        <a:schemeClr val="lt1"/>
+      </a:fontRef>
+    </dgm:style>
+  </dgm:styleLbl>
+  <dgm:styleLbl name="node1">
+    <dgm:scene3d>
+      <a:camera prst="orthographicFront"/>
+      <a:lightRig rig="flat" dir="t"/>
+    </dgm:scene3d>
+    <dgm:sp3d prstMaterial="plastic">
+      <a:bevelT w="120900" h="88900"/>
+      <a:bevelB w="88900" h="31750" prst="angle"/>
+    </dgm:sp3d>
+    <dgm:txPr/>
+    <dgm:style>
+      <a:lnRef idx="0">
+        <a:scrgbClr r="0" g="0" b="0"/>
+      </a:lnRef>
+      <a:fillRef idx="3">
+        <a:scrgbClr r="0" g="0" b="0"/>
+      </a:fillRef>
+      <a:effectRef idx="2">
+        <a:scrgbClr r="0" g="0" b="0"/>
+      </a:effectRef>
+      <a:fontRef idx="minor">
+        <a:schemeClr val="lt1"/>
+      </a:fontRef>
+    </dgm:style>
+  </dgm:styleLbl>
+  <dgm:styleLbl name="node2">
+    <dgm:scene3d>
+      <a:camera prst="orthographicFront"/>
+      <a:lightRig rig="flat" dir="t"/>
+    </dgm:scene3d>
+    <dgm:sp3d prstMaterial="plastic">
+      <a:bevelT w="120900" h="88900"/>
+      <a:bevelB w="88900" h="31750" prst="angle"/>
+    </dgm:sp3d>
+    <dgm:txPr/>
+    <dgm:style>
+      <a:lnRef idx="0">
+        <a:scrgbClr r="0" g="0" b="0"/>
+      </a:lnRef>
+      <a:fillRef idx="3">
+        <a:scrgbClr r="0" g="0" b="0"/>
+      </a:fillRef>
+      <a:effectRef idx="1">
+        <a:scrgbClr r="0" g="0" b="0"/>
+      </a:effectRef>
+      <a:fontRef idx="minor">
+        <a:schemeClr val="lt1"/>
+      </a:fontRef>
+    </dgm:style>
+  </dgm:styleLbl>
+  <dgm:styleLbl name="node3">
+    <dgm:scene3d>
+      <a:camera prst="orthographicFront"/>
+      <a:lightRig rig="flat" dir="t"/>
+    </dgm:scene3d>
+    <dgm:sp3d prstMaterial="plastic">
+      <a:bevelT w="120900" h="88900"/>
+      <a:bevelB w="88900" h="31750" prst="angle"/>
+    </dgm:sp3d>
+    <dgm:txPr/>
+    <dgm:style>
+      <a:lnRef idx="0">
+        <a:scrgbClr r="0" g="0" b="0"/>
+      </a:lnRef>
+      <a:fillRef idx="3">
+        <a:scrgbClr r="0" g="0" b="0"/>
+      </a:fillRef>
+      <a:effectRef idx="1">
+        <a:scrgbClr r="0" g="0" b="0"/>
+      </a:effectRef>
+      <a:fontRef idx="minor">
+        <a:schemeClr val="lt1"/>
+      </a:fontRef>
+    </dgm:style>
+  </dgm:styleLbl>
+  <dgm:styleLbl name="node4">
+    <dgm:scene3d>
+      <a:camera prst="orthographicFront"/>
+      <a:lightRig rig="flat" dir="t"/>
+    </dgm:scene3d>
+    <dgm:sp3d prstMaterial="plastic">
+      <a:bevelT w="120900" h="88900"/>
+      <a:bevelB w="88900" h="31750" prst="angle"/>
+    </dgm:sp3d>
+    <dgm:txPr/>
+    <dgm:style>
+      <a:lnRef idx="0">
+        <a:scrgbClr r="0" g="0" b="0"/>
+      </a:lnRef>
+      <a:fillRef idx="3">
+        <a:scrgbClr r="0" g="0" b="0"/>
+      </a:fillRef>
+      <a:effectRef idx="1">
+        <a:scrgbClr r="0" g="0" b="0"/>
+      </a:effectRef>
+      <a:fontRef idx="minor">
+        <a:schemeClr val="lt1"/>
+      </a:fontRef>
+    </dgm:style>
+  </dgm:styleLbl>
+  <dgm:styleLbl name="fgImgPlace1">
+    <dgm:scene3d>
+      <a:camera prst="orthographicFront"/>
+      <a:lightRig rig="flat" dir="t"/>
+    </dgm:scene3d>
+    <dgm:sp3d z="127000" prstMaterial="plastic">
+      <a:bevelT w="88900" h="88900"/>
+      <a:bevelB w="88900" h="31750" prst="angle"/>
+    </dgm:sp3d>
+    <dgm:txPr/>
+    <dgm:style>
+      <a:lnRef idx="0">
+        <a:scrgbClr r="0" g="0" b="0"/>
+      </a:lnRef>
+      <a:fillRef idx="3">
+        <a:scrgbClr r="0" g="0" b="0"/>
+      </a:fillRef>
+      <a:effectRef idx="2">
+        <a:scrgbClr r="0" g="0" b="0"/>
+      </a:effectRef>
+      <a:fontRef idx="minor"/>
+    </dgm:style>
+  </dgm:styleLbl>
+  <dgm:styleLbl name="alignImgPlace1">
+    <dgm:scene3d>
+      <a:camera prst="orthographicFront"/>
+      <a:lightRig rig="flat" dir="t"/>
+    </dgm:scene3d>
+    <dgm:sp3d prstMaterial="plastic">
+      <a:bevelT w="88900" h="88900"/>
+      <a:bevelB w="88900" h="31750" prst="angle"/>
+    </dgm:sp3d>
+    <dgm:txPr/>
+    <dgm:style>
+      <a:lnRef idx="0">
+        <a:scrgbClr r="0" g="0" b="0"/>
+      </a:lnRef>
+      <a:fillRef idx="3">
+        <a:scrgbClr r="0" g="0" b="0"/>
+      </a:fillRef>
+      <a:effectRef idx="2">
+        <a:scrgbClr r="0" g="0" b="0"/>
+      </a:effectRef>
+      <a:fontRef idx="minor"/>
+    </dgm:style>
+  </dgm:styleLbl>
+  <dgm:styleLbl name="bgImgPlace1">
+    <dgm:scene3d>
+      <a:camera prst="orthographicFront"/>
+      <a:lightRig rig="flat" dir="t"/>
+    </dgm:scene3d>
+    <dgm:sp3d z="-190500" prstMaterial="plastic">
+      <a:bevelT w="88900" h="88900"/>
+      <a:bevelB w="88900" h="31750" prst="angle"/>
+    </dgm:sp3d>
+    <dgm:txPr/>
+    <dgm:style>
+      <a:lnRef idx="0">
+        <a:scrgbClr r="0" g="0" b="0"/>
+      </a:lnRef>
+      <a:fillRef idx="3">
+        <a:scrgbClr r="0" g="0" b="0"/>
+      </a:fillRef>
+      <a:effectRef idx="2">
+        <a:scrgbClr r="0" g="0" b="0"/>
+      </a:effectRef>
+      <a:fontRef idx="minor"/>
+    </dgm:style>
+  </dgm:styleLbl>
+  <dgm:styleLbl name="sibTrans2D1">
+    <dgm:scene3d>
+      <a:camera prst="orthographicFront"/>
+      <a:lightRig rig="flat" dir="t"/>
+    </dgm:scene3d>
+    <dgm:sp3d z="-80000" prstMaterial="plastic">
+      <a:bevelT w="50800" h="50800"/>
+      <a:bevelB w="25400" h="25400" prst="angle"/>
+    </dgm:sp3d>
+    <dgm:txPr/>
+    <dgm:style>
+      <a:lnRef idx="0">
+        <a:scrgbClr r="0" g="0" b="0"/>
+      </a:lnRef>
+      <a:fillRef idx="3">
+        <a:scrgbClr r="0" g="0" b="0"/>
+      </a:fillRef>
+      <a:effectRef idx="2">
+        <a:scrgbClr r="0" g="0" b="0"/>
+      </a:effectRef>
+      <a:fontRef idx="minor">
+        <a:schemeClr val="lt1"/>
+      </a:fontRef>
+    </dgm:style>
+  </dgm:styleLbl>
+  <dgm:styleLbl name="fgSibTrans2D1">
+    <dgm:scene3d>
+      <a:camera prst="orthographicFront"/>
+      <a:lightRig rig="flat" dir="t"/>
+    </dgm:scene3d>
+    <dgm:sp3d z="127000" prstMaterial="plastic">
+      <a:bevelT w="50800" h="50800"/>
+      <a:bevelB w="25400" h="25400" prst="angle"/>
+    </dgm:sp3d>
+    <dgm:txPr/>
+    <dgm:style>
+      <a:lnRef idx="0">
+        <a:scrgbClr r="0" g="0" b="0"/>
+      </a:lnRef>
+      <a:fillRef idx="3">
+        <a:scrgbClr r="0" g="0" b="0"/>
+      </a:fillRef>
+      <a:effectRef idx="2">
+        <a:scrgbClr r="0" g="0" b="0"/>
+      </a:effectRef>
+      <a:fontRef idx="minor">
+        <a:schemeClr val="lt1"/>
+      </a:fontRef>
+    </dgm:style>
+  </dgm:styleLbl>
+  <dgm:styleLbl name="bgSibTrans2D1">
+    <dgm:scene3d>
+      <a:camera prst="orthographicFront"/>
+      <a:lightRig rig="flat" dir="t"/>
+    </dgm:scene3d>
+    <dgm:sp3d z="-190500" prstMaterial="plastic">
+      <a:bevelT w="50800" h="50800"/>
+      <a:bevelB w="25400" h="25400" prst="angle"/>
+    </dgm:sp3d>
+    <dgm:txPr/>
+    <dgm:style>
+      <a:lnRef idx="0">
+        <a:scrgbClr r="0" g="0" b="0"/>
+      </a:lnRef>
+      <a:fillRef idx="3">
+        <a:scrgbClr r="0" g="0" b="0"/>
+      </a:fillRef>
+      <a:effectRef idx="2">
+        <a:scrgbClr r="0" g="0" b="0"/>
+      </a:effectRef>
+      <a:fontRef idx="minor">
+        <a:schemeClr val="lt1"/>
+      </a:fontRef>
+    </dgm:style>
+  </dgm:styleLbl>
+  <dgm:styleLbl name="sibTrans1D1">
+    <dgm:scene3d>
+      <a:camera prst="orthographicFront"/>
+      <a:lightRig rig="flat" dir="t"/>
+    </dgm:scene3d>
+    <dgm:sp3d z="-40000" prstMaterial="matte"/>
+    <dgm:txPr/>
+    <dgm:style>
+      <a:lnRef idx="1">
+        <a:scrgbClr r="0" g="0" b="0"/>
+      </a:lnRef>
+      <a:fillRef idx="0">
+        <a:scrgbClr r="0" g="0" b="0"/>
+      </a:fillRef>
+      <a:effectRef idx="0">
+        <a:scrgbClr r="0" g="0" b="0"/>
+      </a:effectRef>
+      <a:fontRef idx="minor"/>
+    </dgm:style>
+  </dgm:styleLbl>
+  <dgm:styleLbl name="callout">
+    <dgm:scene3d>
+      <a:camera prst="orthographicFront"/>
+      <a:lightRig rig="threePt" dir="t"/>
+    </dgm:scene3d>
+    <dgm:sp3d z="127000" prstMaterial="matte"/>
+    <dgm:txPr/>
+    <dgm:style>
+      <a:lnRef idx="2">
+        <a:scrgbClr r="0" g="0" b="0"/>
+      </a:lnRef>
+      <a:fillRef idx="1">
+        <a:scrgbClr r="0" g="0" b="0"/>
+      </a:fillRef>
+      <a:effectRef idx="0">
+        <a:scrgbClr r="0" g="0" b="0"/>
+      </a:effectRef>
+      <a:fontRef idx="minor"/>
+    </dgm:style>
+  </dgm:styleLbl>
+  <dgm:styleLbl name="asst0">
+    <dgm:scene3d>
+      <a:camera prst="orthographicFront"/>
+      <a:lightRig rig="flat" dir="t"/>
+    </dgm:scene3d>
+    <dgm:sp3d prstMaterial="plastic">
+      <a:bevelT w="120900" h="88900"/>
+      <a:bevelB w="88900" h="31750" prst="angle"/>
+    </dgm:sp3d>
+    <dgm:txPr/>
+    <dgm:style>
+      <a:lnRef idx="0">
+        <a:scrgbClr r="0" g="0" b="0"/>
+      </a:lnRef>
+      <a:fillRef idx="3">
+        <a:scrgbClr r="0" g="0" b="0"/>
+      </a:fillRef>
+      <a:effectRef idx="1">
+        <a:scrgbClr r="0" g="0" b="0"/>
+      </a:effectRef>
+      <a:fontRef idx="minor">
+        <a:schemeClr val="lt1"/>
+      </a:fontRef>
+    </dgm:style>
+  </dgm:styleLbl>
+  <dgm:styleLbl name="asst1">
+    <dgm:scene3d>
+      <a:camera prst="orthographicFront"/>
+      <a:lightRig rig="flat" dir="t"/>
+    </dgm:scene3d>
+    <dgm:sp3d prstMaterial="plastic">
+      <a:bevelT w="120900" h="88900"/>
+      <a:bevelB w="88900" h="31750" prst="angle"/>
+    </dgm:sp3d>
+    <dgm:txPr/>
+    <dgm:style>
+      <a:lnRef idx="0">
+        <a:scrgbClr r="0" g="0" b="0"/>
+      </a:lnRef>
+      <a:fillRef idx="3">
+        <a:scrgbClr r="0" g="0" b="0"/>
+      </a:fillRef>
+      <a:effectRef idx="1">
+        <a:scrgbClr r="0" g="0" b="0"/>
+      </a:effectRef>
+      <a:fontRef idx="minor">
+        <a:schemeClr val="lt1"/>
+      </a:fontRef>
+    </dgm:style>
+  </dgm:styleLbl>
+  <dgm:styleLbl name="asst2">
+    <dgm:scene3d>
+      <a:camera prst="orthographicFront"/>
+      <a:lightRig rig="flat" dir="t"/>
+    </dgm:scene3d>
+    <dgm:sp3d prstMaterial="plastic">
+      <a:bevelT w="120900" h="88900"/>
+      <a:bevelB w="88900" h="31750" prst="angle"/>
+    </dgm:sp3d>
+    <dgm:txPr/>
+    <dgm:style>
+      <a:lnRef idx="0">
+        <a:scrgbClr r="0" g="0" b="0"/>
+      </a:lnRef>
+      <a:fillRef idx="3">
+        <a:scrgbClr r="0" g="0" b="0"/>
+      </a:fillRef>
+      <a:effectRef idx="1">
+        <a:scrgbClr r="0" g="0" b="0"/>
+      </a:effectRef>
+      <a:fontRef idx="minor">
+        <a:schemeClr val="lt1"/>
+      </a:fontRef>
+    </dgm:style>
+  </dgm:styleLbl>
+  <dgm:styleLbl name="asst3">
+    <dgm:scene3d>
+      <a:camera prst="orthographicFront"/>
+      <a:lightRig rig="flat" dir="t"/>
+    </dgm:scene3d>
+    <dgm:sp3d prstMaterial="plastic">
+      <a:bevelT w="120900" h="88900"/>
+      <a:bevelB w="88900" h="31750" prst="angle"/>
+    </dgm:sp3d>
+    <dgm:txPr/>
+    <dgm:style>
+      <a:lnRef idx="0">
+        <a:scrgbClr r="0" g="0" b="0"/>
+      </a:lnRef>
+      <a:fillRef idx="3">
+        <a:scrgbClr r="0" g="0" b="0"/>
+      </a:fillRef>
+      <a:effectRef idx="1">
+        <a:scrgbClr r="0" g="0" b="0"/>
+      </a:effectRef>
+      <a:fontRef idx="minor">
+        <a:schemeClr val="lt1"/>
+      </a:fontRef>
+    </dgm:style>
+  </dgm:styleLbl>
+  <dgm:styleLbl name="parChTrans2D1">
+    <dgm:scene3d>
+      <a:camera prst="orthographicFront"/>
+      <a:lightRig rig="flat" dir="t"/>
+    </dgm:scene3d>
+    <dgm:sp3d z="-100000" prstMaterial="plastic">
+      <a:bevelT w="120900" h="88900"/>
+      <a:bevelB w="88900" h="31750" prst="angle"/>
+    </dgm:sp3d>
+    <dgm:txPr/>
+    <dgm:style>
+      <a:lnRef idx="0">
+        <a:scrgbClr r="0" g="0" b="0"/>
+      </a:lnRef>
+      <a:fillRef idx="3">
+        <a:scrgbClr r="0" g="0" b="0"/>
+      </a:fillRef>
+      <a:effectRef idx="1">
+        <a:scrgbClr r="0" g="0" b="0"/>
+      </a:effectRef>
+      <a:fontRef idx="minor">
+        <a:schemeClr val="lt1"/>
+      </a:fontRef>
+    </dgm:style>
+  </dgm:styleLbl>
+  <dgm:styleLbl name="parChTrans2D2">
+    <dgm:scene3d>
+      <a:camera prst="orthographicFront"/>
+      <a:lightRig rig="flat" dir="t"/>
+    </dgm:scene3d>
+    <dgm:sp3d z="-60000" prstMaterial="plastic">
+      <a:bevelT w="120900" h="88900"/>
+      <a:bevelB w="88900" h="31750" prst="angle"/>
+    </dgm:sp3d>
+    <dgm:txPr/>
+    <dgm:style>
+      <a:lnRef idx="0">
+        <a:scrgbClr r="0" g="0" b="0"/>
+      </a:lnRef>
+      <a:fillRef idx="3">
+        <a:scrgbClr r="0" g="0" b="0"/>
+      </a:fillRef>
+      <a:effectRef idx="1">
+        <a:scrgbClr r="0" g="0" b="0"/>
+      </a:effectRef>
+      <a:fontRef idx="minor">
+        <a:schemeClr val="lt1"/>
+      </a:fontRef>
+    </dgm:style>
+  </dgm:styleLbl>
+  <dgm:styleLbl name="parChTrans2D3">
+    <dgm:scene3d>
+      <a:camera prst="orthographicFront"/>
+      <a:lightRig rig="flat" dir="t"/>
+    </dgm:scene3d>
+    <dgm:sp3d z="-60000" prstMaterial="plastic">
+      <a:bevelT w="120900" h="88900"/>
+      <a:bevelB w="88900" h="31750" prst="angle"/>
+    </dgm:sp3d>
+    <dgm:txPr/>
+    <dgm:style>
+      <a:lnRef idx="0">
+        <a:scrgbClr r="0" g="0" b="0"/>
+      </a:lnRef>
+      <a:fillRef idx="3">
+        <a:scrgbClr r="0" g="0" b="0"/>
+      </a:fillRef>
+      <a:effectRef idx="1">
+        <a:scrgbClr r="0" g="0" b="0"/>
+      </a:effectRef>
+      <a:fontRef idx="minor">
+        <a:schemeClr val="lt1"/>
+      </a:fontRef>
+    </dgm:style>
+  </dgm:styleLbl>
+  <dgm:styleLbl name="parChTrans2D4">
+    <dgm:scene3d>
+      <a:camera prst="orthographicFront"/>
+      <a:lightRig rig="flat" dir="t"/>
+    </dgm:scene3d>
+    <dgm:sp3d z="-60000" prstMaterial="plastic">
+      <a:bevelT w="120900" h="88900"/>
+      <a:bevelB w="88900" h="31750" prst="angle"/>
+    </dgm:sp3d>
+    <dgm:txPr/>
+    <dgm:style>
+      <a:lnRef idx="0">
+        <a:scrgbClr r="0" g="0" b="0"/>
+      </a:lnRef>
+      <a:fillRef idx="3">
+        <a:scrgbClr r="0" g="0" b="0"/>
+      </a:fillRef>
+      <a:effectRef idx="1">
+        <a:scrgbClr r="0" g="0" b="0"/>
+      </a:effectRef>
+      <a:fontRef idx="minor">
+        <a:schemeClr val="lt1"/>
+      </a:fontRef>
+    </dgm:style>
+  </dgm:styleLbl>
+  <dgm:styleLbl name="parChTrans1D1">
+    <dgm:scene3d>
+      <a:camera prst="orthographicFront"/>
+      <a:lightRig rig="flat" dir="t"/>
+    </dgm:scene3d>
+    <dgm:sp3d prstMaterial="matte"/>
+    <dgm:txPr/>
+    <dgm:style>
+      <a:lnRef idx="2">
+        <a:scrgbClr r="0" g="0" b="0"/>
+      </a:lnRef>
+      <a:fillRef idx="0">
+        <a:scrgbClr r="0" g="0" b="0"/>
+      </a:fillRef>
+      <a:effectRef idx="0">
+        <a:scrgbClr r="0" g="0" b="0"/>
+      </a:effectRef>
+      <a:fontRef idx="minor"/>
+    </dgm:style>
+  </dgm:styleLbl>
+  <dgm:styleLbl name="parChTrans1D2">
+    <dgm:scene3d>
+      <a:camera prst="orthographicFront"/>
+      <a:lightRig rig="flat" dir="t"/>
+    </dgm:scene3d>
+    <dgm:sp3d prstMaterial="matte"/>
+    <dgm:txPr/>
+    <dgm:style>
+      <a:lnRef idx="2">
+        <a:scrgbClr r="0" g="0" b="0"/>
+      </a:lnRef>
+      <a:fillRef idx="0">
+        <a:scrgbClr r="0" g="0" b="0"/>
+      </a:fillRef>
+      <a:effectRef idx="0">
+        <a:scrgbClr r="0" g="0" b="0"/>
+      </a:effectRef>
+      <a:fontRef idx="minor"/>
+    </dgm:style>
+  </dgm:styleLbl>
+  <dgm:styleLbl name="parChTrans1D3">
+    <dgm:scene3d>
+      <a:camera prst="orthographicFront"/>
+      <a:lightRig rig="flat" dir="t"/>
+    </dgm:scene3d>
+    <dgm:sp3d prstMaterial="matte"/>
+    <dgm:txPr/>
+    <dgm:style>
+      <a:lnRef idx="2">
+        <a:scrgbClr r="0" g="0" b="0"/>
+      </a:lnRef>
+      <a:fillRef idx="0">
+        <a:scrgbClr r="0" g="0" b="0"/>
+      </a:fillRef>
+      <a:effectRef idx="0">
+        <a:scrgbClr r="0" g="0" b="0"/>
+      </a:effectRef>
+      <a:fontRef idx="minor"/>
+    </dgm:style>
+  </dgm:styleLbl>
+  <dgm:styleLbl name="parChTrans1D4">
+    <dgm:scene3d>
+      <a:camera prst="orthographicFront"/>
+      <a:lightRig rig="flat" dir="t"/>
+    </dgm:scene3d>
+    <dgm:sp3d prstMaterial="matte"/>
+    <dgm:txPr/>
+    <dgm:style>
+      <a:lnRef idx="2">
+        <a:scrgbClr r="0" g="0" b="0"/>
+      </a:lnRef>
+      <a:fillRef idx="0">
+        <a:scrgbClr r="0" g="0" b="0"/>
+      </a:fillRef>
+      <a:effectRef idx="0">
+        <a:scrgbClr r="0" g="0" b="0"/>
+      </a:effectRef>
+      <a:fontRef idx="minor"/>
+    </dgm:style>
+  </dgm:styleLbl>
+  <dgm:styleLbl name="fgAcc1">
+    <dgm:scene3d>
+      <a:camera prst="orthographicFront"/>
+      <a:lightRig rig="flat" dir="t"/>
+    </dgm:scene3d>
+    <dgm:sp3d z="190500" extrusionH="12700" prstMaterial="plastic">
+      <a:bevelT w="50800" h="50800"/>
+    </dgm:sp3d>
+    <dgm:txPr/>
+    <dgm:style>
+      <a:lnRef idx="1">
+        <a:scrgbClr r="0" g="0" b="0"/>
+      </a:lnRef>
+      <a:fillRef idx="1">
+        <a:scrgbClr r="0" g="0" b="0"/>
+      </a:fillRef>
+      <a:effectRef idx="2">
+        <a:scrgbClr r="0" g="0" b="0"/>
+      </a:effectRef>
+      <a:fontRef idx="minor"/>
+    </dgm:style>
+  </dgm:styleLbl>
+  <dgm:styleLbl name="conFgAcc1">
+    <dgm:scene3d>
+      <a:camera prst="orthographicFront"/>
+      <a:lightRig rig="flat" dir="t"/>
+    </dgm:scene3d>
+    <dgm:sp3d z="190500" extrusionH="12700" prstMaterial="plastic">
+      <a:bevelT w="50800" h="50800"/>
+    </dgm:sp3d>
+    <dgm:txPr/>
+    <dgm:style>
+      <a:lnRef idx="1">
+        <a:scrgbClr r="0" g="0" b="0"/>
+      </a:lnRef>
+      <a:fillRef idx="1">
+        <a:scrgbClr r="0" g="0" b="0"/>
+      </a:fillRef>
+      <a:effectRef idx="2">
+        <a:scrgbClr r="0" g="0" b="0"/>
+      </a:effectRef>
+      <a:fontRef idx="minor"/>
+    </dgm:style>
+  </dgm:styleLbl>
+  <dgm:styleLbl name="alignAcc1">
+    <dgm:scene3d>
+      <a:camera prst="orthographicFront"/>
+      <a:lightRig rig="flat" dir="t"/>
+    </dgm:scene3d>
+    <dgm:sp3d extrusionH="12700" prstMaterial="plastic">
+      <a:bevelT w="50800" h="50800"/>
+    </dgm:sp3d>
+    <dgm:txPr/>
+    <dgm:style>
+      <a:lnRef idx="1">
+        <a:scrgbClr r="0" g="0" b="0"/>
+      </a:lnRef>
+      <a:fillRef idx="1">
+        <a:scrgbClr r="0" g="0" b="0"/>
+      </a:fillRef>
+      <a:effectRef idx="2">
+        <a:scrgbClr r="0" g="0" b="0"/>
+      </a:effectRef>
+      <a:fontRef idx="minor"/>
+    </dgm:style>
+  </dgm:styleLbl>
+  <dgm:styleLbl name="trAlignAcc1">
+    <dgm:scene3d>
+      <a:camera prst="orthographicFront"/>
+      <a:lightRig rig="flat" dir="t"/>
+    </dgm:scene3d>
+    <dgm:sp3d extrusionH="12700" prstMaterial="plastic">
+      <a:bevelT w="50800" h="50800"/>
+    </dgm:sp3d>
+    <dgm:txPr/>
+    <dgm:style>
+      <a:lnRef idx="1">
+        <a:scrgbClr r="0" g="0" b="0"/>
+      </a:lnRef>
+      <a:fillRef idx="1">
+        <a:scrgbClr r="0" g="0" b="0"/>
+      </a:fillRef>
+      <a:effectRef idx="2">
+        <a:scrgbClr r="0" g="0" b="0"/>
+      </a:effectRef>
+      <a:fontRef idx="minor"/>
+    </dgm:style>
+  </dgm:styleLbl>
+  <dgm:styleLbl name="bgAcc1">
+    <dgm:scene3d>
+      <a:camera prst="orthographicFront"/>
+      <a:lightRig rig="flat" dir="t"/>
+    </dgm:scene3d>
+    <dgm:sp3d z="-190500" extrusionH="12700" prstMaterial="plastic">
+      <a:bevelT w="50800" h="50800"/>
+    </dgm:sp3d>
+    <dgm:txPr/>
+    <dgm:style>
+      <a:lnRef idx="1">
+        <a:scrgbClr r="0" g="0" b="0"/>
+      </a:lnRef>
+      <a:fillRef idx="1">
+        <a:scrgbClr r="0" g="0" b="0"/>
+      </a:fillRef>
+      <a:effectRef idx="2">
+        <a:scrgbClr r="0" g="0" b="0"/>
+      </a:effectRef>
+      <a:fontRef idx="minor"/>
+    </dgm:style>
+  </dgm:styleLbl>
+  <dgm:styleLbl name="solidFgAcc1">
+    <dgm:scene3d>
+      <a:camera prst="orthographicFront"/>
+      <a:lightRig rig="flat" dir="t"/>
+    </dgm:scene3d>
+    <dgm:sp3d z="190500" extrusionH="12700" prstMaterial="plastic">
+      <a:bevelT w="50800" h="50800"/>
+    </dgm:sp3d>
+    <dgm:txPr/>
+    <dgm:style>
+      <a:lnRef idx="1">
+        <a:scrgbClr r="0" g="0" b="0"/>
+      </a:lnRef>
+      <a:fillRef idx="1">
+        <a:scrgbClr r="0" g="0" b="0"/>
+      </a:fillRef>
+      <a:effectRef idx="2">
+        <a:scrgbClr r="0" g="0" b="0"/>
+      </a:effectRef>
+      <a:fontRef idx="minor"/>
+    </dgm:style>
+  </dgm:styleLbl>
+  <dgm:styleLbl name="solidAlignAcc1">
+    <dgm:scene3d>
+      <a:camera prst="orthographicFront"/>
+      <a:lightRig rig="flat" dir="t"/>
+    </dgm:scene3d>
+    <dgm:sp3d extrusionH="12700" prstMaterial="plastic">
+      <a:bevelT w="50800" h="50800"/>
+    </dgm:sp3d>
+    <dgm:txPr/>
+    <dgm:style>
+      <a:lnRef idx="1">
+        <a:scrgbClr r="0" g="0" b="0"/>
+      </a:lnRef>
+      <a:fillRef idx="1">
+        <a:scrgbClr r="0" g="0" b="0"/>
+      </a:fillRef>
+      <a:effectRef idx="2">
+        <a:scrgbClr r="0" g="0" b="0"/>
+      </a:effectRef>
+      <a:fontRef idx="minor"/>
+    </dgm:style>
+  </dgm:styleLbl>
+  <dgm:styleLbl name="solidBgAcc1">
+    <dgm:scene3d>
+      <a:camera prst="orthographicFront"/>
+      <a:lightRig rig="flat" dir="t"/>
+    </dgm:scene3d>
+    <dgm:sp3d z="-190500" extrusionH="12700" prstMaterial="plastic">
+      <a:bevelT w="50800" h="50800"/>
+    </dgm:sp3d>
+    <dgm:txPr/>
+    <dgm:style>
+      <a:lnRef idx="1">
+        <a:scrgbClr r="0" g="0" b="0"/>
+      </a:lnRef>
+      <a:fillRef idx="1">
+        <a:scrgbClr r="0" g="0" b="0"/>
+      </a:fillRef>
+      <a:effectRef idx="2">
+        <a:scrgbClr r="0" g="0" b="0"/>
+      </a:effectRef>
+      <a:fontRef idx="minor"/>
+    </dgm:style>
+  </dgm:styleLbl>
+  <dgm:styleLbl name="fgAccFollowNode1">
+    <dgm:scene3d>
+      <a:camera prst="orthographicFront"/>
+      <a:lightRig rig="flat" dir="t"/>
+    </dgm:scene3d>
+    <dgm:sp3d z="190500" extrusionH="12700" prstMaterial="plastic">
+      <a:bevelT w="50800" h="50800"/>
+    </dgm:sp3d>
+    <dgm:txPr/>
+    <dgm:style>
+      <a:lnRef idx="1">
+        <a:scrgbClr r="0" g="0" b="0"/>
+      </a:lnRef>
+      <a:fillRef idx="1">
+        <a:scrgbClr r="0" g="0" b="0"/>
+      </a:fillRef>
+      <a:effectRef idx="2">
+        <a:scrgbClr r="0" g="0" b="0"/>
+      </a:effectRef>
+      <a:fontRef idx="minor"/>
+    </dgm:style>
+  </dgm:styleLbl>
+  <dgm:styleLbl name="alignAccFollowNode1">
+    <dgm:scene3d>
+      <a:camera prst="orthographicFront"/>
+      <a:lightRig rig="flat" dir="t"/>
+    </dgm:scene3d>
+    <dgm:sp3d extrusionH="12700" prstMaterial="plastic">
+      <a:bevelT w="50800" h="50800"/>
+    </dgm:sp3d>
+    <dgm:txPr/>
+    <dgm:style>
+      <a:lnRef idx="1">
+        <a:scrgbClr r="0" g="0" b="0"/>
+      </a:lnRef>
+      <a:fillRef idx="1">
+        <a:scrgbClr r="0" g="0" b="0"/>
+      </a:fillRef>
+      <a:effectRef idx="2">
+        <a:scrgbClr r="0" g="0" b="0"/>
+      </a:effectRef>
+      <a:fontRef idx="minor"/>
+    </dgm:style>
+  </dgm:styleLbl>
+  <dgm:styleLbl name="bgAccFollowNode1">
+    <dgm:scene3d>
+      <a:camera prst="orthographicFront"/>
+      <a:lightRig rig="flat" dir="t"/>
+    </dgm:scene3d>
+    <dgm:sp3d z="-190500" extrusionH="12700" prstMaterial="plastic">
+      <a:bevelT w="50800" h="50800"/>
+    </dgm:sp3d>
+    <dgm:txPr/>
+    <dgm:style>
+      <a:lnRef idx="1">
+        <a:scrgbClr r="0" g="0" b="0"/>
+      </a:lnRef>
+      <a:fillRef idx="1">
+        <a:scrgbClr r="0" g="0" b="0"/>
+      </a:fillRef>
+      <a:effectRef idx="2">
+        <a:scrgbClr r="0" g="0" b="0"/>
+      </a:effectRef>
+      <a:fontRef idx="minor"/>
+    </dgm:style>
+  </dgm:styleLbl>
+  <dgm:styleLbl name="fgAcc0">
+    <dgm:scene3d>
+      <a:camera prst="orthographicFront"/>
+      <a:lightRig rig="flat" dir="t"/>
+    </dgm:scene3d>
+    <dgm:sp3d z="190500" extrusionH="12700" prstMaterial="plastic">
+      <a:bevelT w="50800" h="50800"/>
+    </dgm:sp3d>
+    <dgm:txPr/>
+    <dgm:style>
+      <a:lnRef idx="1">
+        <a:scrgbClr r="0" g="0" b="0"/>
+      </a:lnRef>
+      <a:fillRef idx="1">
+        <a:scrgbClr r="0" g="0" b="0"/>
+      </a:fillRef>
+      <a:effectRef idx="2">
+        <a:scrgbClr r="0" g="0" b="0"/>
+      </a:effectRef>
+      <a:fontRef idx="minor"/>
+    </dgm:style>
+  </dgm:styleLbl>
+  <dgm:styleLbl name="fgAcc2">
+    <dgm:scene3d>
+      <a:camera prst="orthographicFront"/>
+      <a:lightRig rig="flat" dir="t"/>
+    </dgm:scene3d>
+    <dgm:sp3d z="190500" extrusionH="12700" prstMaterial="plastic">
+      <a:bevelT w="50800" h="50800"/>
+    </dgm:sp3d>
+    <dgm:txPr/>
+    <dgm:style>
+      <a:lnRef idx="1">
+        <a:scrgbClr r="0" g="0" b="0"/>
+      </a:lnRef>
+      <a:fillRef idx="1">
+        <a:scrgbClr r="0" g="0" b="0"/>
+      </a:fillRef>
+      <a:effectRef idx="2">
+        <a:scrgbClr r="0" g="0" b="0"/>
+      </a:effectRef>
+      <a:fontRef idx="minor"/>
+    </dgm:style>
+  </dgm:styleLbl>
+  <dgm:styleLbl name="fgAcc3">
+    <dgm:scene3d>
+      <a:camera prst="orthographicFront"/>
+      <a:lightRig rig="flat" dir="t"/>
+    </dgm:scene3d>
+    <dgm:sp3d z="190500" extrusionH="12700" prstMaterial="plastic">
+      <a:bevelT w="50800" h="50800"/>
+    </dgm:sp3d>
+    <dgm:txPr/>
+    <dgm:style>
+      <a:lnRef idx="1">
+        <a:scrgbClr r="0" g="0" b="0"/>
+      </a:lnRef>
+      <a:fillRef idx="1">
+        <a:scrgbClr r="0" g="0" b="0"/>
+      </a:fillRef>
+      <a:effectRef idx="2">
+        <a:scrgbClr r="0" g="0" b="0"/>
+      </a:effectRef>
+      <a:fontRef idx="minor"/>
+    </dgm:style>
+  </dgm:styleLbl>
+  <dgm:styleLbl name="fgAcc4">
+    <dgm:scene3d>
+      <a:camera prst="orthographicFront"/>
+      <a:lightRig rig="flat" dir="t"/>
+    </dgm:scene3d>
+    <dgm:sp3d z="190500" extrusionH="12700" prstMaterial="plastic">
+      <a:bevelT w="50800" h="50800"/>
+    </dgm:sp3d>
+    <dgm:txPr/>
+    <dgm:style>
+      <a:lnRef idx="1">
+        <a:scrgbClr r="0" g="0" b="0"/>
+      </a:lnRef>
+      <a:fillRef idx="1">
+        <a:scrgbClr r="0" g="0" b="0"/>
+      </a:fillRef>
+      <a:effectRef idx="2">
+        <a:scrgbClr r="0" g="0" b="0"/>
+      </a:effectRef>
+      <a:fontRef idx="minor"/>
+    </dgm:style>
+  </dgm:styleLbl>
+  <dgm:styleLbl name="bgShp">
+    <dgm:scene3d>
+      <a:camera prst="orthographicFront"/>
+      <a:lightRig rig="flat" dir="t"/>
+    </dgm:scene3d>
+    <dgm:sp3d z="-190500" extrusionH="12700" prstMaterial="plastic">
+      <a:bevelT w="50800" h="50800"/>
+    </dgm:sp3d>
+    <dgm:txPr/>
+    <dgm:style>
+      <a:lnRef idx="0">
+        <a:scrgbClr r="0" g="0" b="0"/>
+      </a:lnRef>
+      <a:fillRef idx="3">
+        <a:scrgbClr r="0" g="0" b="0"/>
+      </a:fillRef>
+      <a:effectRef idx="0">
+        <a:scrgbClr r="0" g="0" b="0"/>
+      </a:effectRef>
+      <a:fontRef idx="minor"/>
+    </dgm:style>
+  </dgm:styleLbl>
+  <dgm:styleLbl name="dkBgShp">
+    <dgm:scene3d>
+      <a:camera prst="orthographicFront"/>
+      <a:lightRig rig="flat" dir="t"/>
+    </dgm:scene3d>
+    <dgm:sp3d z="-190500" extrusionH="12700" prstMaterial="plastic">
+      <a:bevelT w="50800" h="50800"/>
+    </dgm:sp3d>
+    <dgm:txPr/>
+    <dgm:style>
+      <a:lnRef idx="0">
+        <a:scrgbClr r="0" g="0" b="0"/>
+      </a:lnRef>
+      <a:fillRef idx="2">
+        <a:scrgbClr r="0" g="0" b="0"/>
+      </a:fillRef>
+      <a:effectRef idx="0">
+        <a:scrgbClr r="0" g="0" b="0"/>
+      </a:effectRef>
+      <a:fontRef idx="minor"/>
+    </dgm:style>
+  </dgm:styleLbl>
+  <dgm:styleLbl name="trBgShp">
+    <dgm:scene3d>
+      <a:camera prst="orthographicFront"/>
+      <a:lightRig rig="flat" dir="t"/>
+    </dgm:scene3d>
+    <dgm:sp3d z="-190500" extrusionH="12700" prstMaterial="matte"/>
+    <dgm:txPr/>
+    <dgm:style>
+      <a:lnRef idx="0">
+        <a:scrgbClr r="0" g="0" b="0"/>
+      </a:lnRef>
+      <a:fillRef idx="1">
+        <a:scrgbClr r="0" g="0" b="0"/>
+      </a:fillRef>
+      <a:effectRef idx="0">
+        <a:scrgbClr r="0" g="0" b="0"/>
+      </a:effectRef>
+      <a:fontRef idx="minor"/>
+    </dgm:style>
+  </dgm:styleLbl>
+  <dgm:styleLbl name="fgShp">
+    <dgm:scene3d>
+      <a:camera prst="orthographicFront"/>
+      <a:lightRig rig="flat" dir="t"/>
+    </dgm:scene3d>
+    <dgm:sp3d z="190500" prstMaterial="plastic">
+      <a:bevelT w="120900" h="88900"/>
+      <a:bevelB w="88900" h="31750" prst="angle"/>
+    </dgm:sp3d>
+    <dgm:txPr/>
+    <dgm:style>
+      <a:lnRef idx="0">
+        <a:scrgbClr r="0" g="0" b="0"/>
+      </a:lnRef>
+      <a:fillRef idx="1">
+        <a:scrgbClr r="0" g="0" b="0"/>
+      </a:fillRef>
+      <a:effectRef idx="3">
+        <a:scrgbClr r="0" g="0" b="0"/>
+      </a:effectRef>
+      <a:fontRef idx="minor">
+        <a:schemeClr val="lt1"/>
+      </a:fontRef>
+    </dgm:style>
+  </dgm:styleLbl>
+  <dgm:styleLbl name="revTx">
+    <dgm:scene3d>
+      <a:camera prst="orthographicFront"/>
+      <a:lightRig rig="threePt" dir="t"/>
+    </dgm:scene3d>
+    <dgm:sp3d/>
+    <dgm:txPr/>
+    <dgm:style>
+      <a:lnRef idx="0">
+        <a:scrgbClr r="0" g="0" b="0"/>
+      </a:lnRef>
+      <a:fillRef idx="0">
+        <a:scrgbClr r="0" g="0" b="0"/>
+      </a:fillRef>
+      <a:effectRef idx="0">
+        <a:scrgbClr r="0" g="0" b="0"/>
+      </a:effectRef>
+      <a:fontRef idx="minor"/>
+    </dgm:style>
+  </dgm:styleLbl>
+</dgm:styleDef>
+</file>
+
+<file path=ppt/diagrams/quickStyle8.xml><?xml version="1.0" encoding="utf-8"?>
 <dgm:styleDef xmlns:dgm="http://schemas.openxmlformats.org/drawingml/2006/diagram" xmlns:a="http://schemas.openxmlformats.org/drawingml/2006/main" uniqueId="urn:microsoft.com/office/officeart/2005/8/quickstyle/simple1">
   <dgm:title val=""/>
   <dgm:desc val=""/>
@@ -22965,7 +30432,7 @@
 </dgm:styleDef>
 </file>
 
-<file path=ppt/diagrams/quickStyle7.xml><?xml version="1.0" encoding="utf-8"?>
+<file path=ppt/diagrams/quickStyle9.xml><?xml version="1.0" encoding="utf-8"?>
 <dgm:styleDef xmlns:dgm="http://schemas.openxmlformats.org/drawingml/2006/diagram" xmlns:a="http://schemas.openxmlformats.org/drawingml/2006/main" uniqueId="urn:microsoft.com/office/officeart/2005/8/quickstyle/simple1">
   <dgm:title val=""/>
   <dgm:desc val=""/>
@@ -24953,6 +32420,114 @@
         <p:cNvPr id="1" name="">
           <a:extLst>
             <a:ext uri="{FF2B5EF4-FFF2-40B4-BE49-F238E27FC236}">
+              <a16:creationId xmlns:a16="http://schemas.microsoft.com/office/drawing/2014/main" id="{824DE561-139D-5D31-61B0-CEB51CE3F256}"/>
+            </a:ext>
+          </a:extLst>
+        </p:cNvPr>
+        <p:cNvGrpSpPr/>
+        <p:nvPr/>
+      </p:nvGrpSpPr>
+      <p:grpSpPr>
+        <a:xfrm>
+          <a:off x="0" y="0"/>
+          <a:ext cx="0" cy="0"/>
+          <a:chOff x="0" y="0"/>
+          <a:chExt cx="0" cy="0"/>
+        </a:xfrm>
+      </p:grpSpPr>
+      <p:sp>
+        <p:nvSpPr>
+          <p:cNvPr id="2" name="Slide Image Placeholder 1">
+            <a:extLst>
+              <a:ext uri="{FF2B5EF4-FFF2-40B4-BE49-F238E27FC236}">
+                <a16:creationId xmlns:a16="http://schemas.microsoft.com/office/drawing/2014/main" id="{0E687132-166B-03F8-09D6-15C5A5EC1A09}"/>
+              </a:ext>
+            </a:extLst>
+          </p:cNvPr>
+          <p:cNvSpPr>
+            <a:spLocks noGrp="1" noRot="1" noChangeAspect="1"/>
+          </p:cNvSpPr>
+          <p:nvPr>
+            <p:ph type="sldImg"/>
+          </p:nvPr>
+        </p:nvSpPr>
+        <p:spPr/>
+      </p:sp>
+      <p:sp>
+        <p:nvSpPr>
+          <p:cNvPr id="3" name="Notes Placeholder 2">
+            <a:extLst>
+              <a:ext uri="{FF2B5EF4-FFF2-40B4-BE49-F238E27FC236}">
+                <a16:creationId xmlns:a16="http://schemas.microsoft.com/office/drawing/2014/main" id="{E4773048-E494-15D6-07D2-86074E689AFB}"/>
+              </a:ext>
+            </a:extLst>
+          </p:cNvPr>
+          <p:cNvSpPr>
+            <a:spLocks noGrp="1"/>
+          </p:cNvSpPr>
+          <p:nvPr>
+            <p:ph type="body" idx="1"/>
+          </p:nvPr>
+        </p:nvSpPr>
+        <p:spPr/>
+        <p:txBody>
+          <a:bodyPr/>
+          <a:lstStyle/>
+          <a:p>
+            <a:endParaRPr lang="en-US" dirty="0"/>
+          </a:p>
+        </p:txBody>
+      </p:sp>
+      <p:sp>
+        <p:nvSpPr>
+          <p:cNvPr id="4" name="Slide Number Placeholder 3">
+            <a:extLst>
+              <a:ext uri="{FF2B5EF4-FFF2-40B4-BE49-F238E27FC236}">
+                <a16:creationId xmlns:a16="http://schemas.microsoft.com/office/drawing/2014/main" id="{5E8C2CCD-ACDC-1553-B482-92F19E194C8F}"/>
+              </a:ext>
+            </a:extLst>
+          </p:cNvPr>
+          <p:cNvSpPr>
+            <a:spLocks noGrp="1"/>
+          </p:cNvSpPr>
+          <p:nvPr>
+            <p:ph type="sldNum" sz="quarter" idx="5"/>
+          </p:nvPr>
+        </p:nvSpPr>
+        <p:spPr/>
+        <p:txBody>
+          <a:bodyPr/>
+          <a:lstStyle/>
+          <a:p>
+            <a:fld id="{EE000EEB-8338-48D7-8EE8-EE0082EF7602}" type="slidenum">
+              <a:rPr lang="en-US" smtClean="0"/>
+              <a:t>13</a:t>
+            </a:fld>
+            <a:endParaRPr lang="en-US" dirty="0"/>
+          </a:p>
+        </p:txBody>
+      </p:sp>
+    </p:spTree>
+    <p:extLst>
+      <p:ext uri="{BB962C8B-B14F-4D97-AF65-F5344CB8AC3E}">
+        <p14:creationId xmlns:p14="http://schemas.microsoft.com/office/powerpoint/2010/main" val="2123451985"/>
+      </p:ext>
+    </p:extLst>
+  </p:cSld>
+  <p:clrMapOvr>
+    <a:masterClrMapping/>
+  </p:clrMapOvr>
+</p:notes>
+</file>
+
+<file path=ppt/notesSlides/notesSlide14.xml><?xml version="1.0" encoding="utf-8"?>
+<p:notes xmlns:a="http://schemas.openxmlformats.org/drawingml/2006/main" xmlns:r="http://schemas.openxmlformats.org/officeDocument/2006/relationships" xmlns:p="http://schemas.openxmlformats.org/presentationml/2006/main">
+  <p:cSld>
+    <p:spTree>
+      <p:nvGrpSpPr>
+        <p:cNvPr id="1" name="">
+          <a:extLst>
+            <a:ext uri="{FF2B5EF4-FFF2-40B4-BE49-F238E27FC236}">
               <a16:creationId xmlns:a16="http://schemas.microsoft.com/office/drawing/2014/main" id="{902F9C6C-B079-7AB8-CEAA-E4BF73F9CA7C}"/>
             </a:ext>
           </a:extLst>
@@ -25034,7 +32609,7 @@
           <a:p>
             <a:fld id="{EE000EEB-8338-48D7-8EE8-EE0082EF7602}" type="slidenum">
               <a:rPr lang="en-US" smtClean="0"/>
-              <a:t>13</a:t>
+              <a:t>14</a:t>
             </a:fld>
             <a:endParaRPr lang="en-US" dirty="0"/>
           </a:p>
@@ -25053,7 +32628,7 @@
 </p:notes>
 </file>
 
-<file path=ppt/notesSlides/notesSlide14.xml><?xml version="1.0" encoding="utf-8"?>
+<file path=ppt/notesSlides/notesSlide15.xml><?xml version="1.0" encoding="utf-8"?>
 <p:notes xmlns:a="http://schemas.openxmlformats.org/drawingml/2006/main" xmlns:r="http://schemas.openxmlformats.org/officeDocument/2006/relationships" xmlns:p="http://schemas.openxmlformats.org/presentationml/2006/main">
   <p:cSld>
     <p:spTree>
@@ -25142,7 +32717,7 @@
           <a:p>
             <a:fld id="{EE000EEB-8338-48D7-8EE8-EE0082EF7602}" type="slidenum">
               <a:rPr lang="en-US" smtClean="0"/>
-              <a:t>14</a:t>
+              <a:t>15</a:t>
             </a:fld>
             <a:endParaRPr lang="en-US" dirty="0"/>
           </a:p>
@@ -25161,7 +32736,7 @@
 </p:notes>
 </file>
 
-<file path=ppt/notesSlides/notesSlide15.xml><?xml version="1.0" encoding="utf-8"?>
+<file path=ppt/notesSlides/notesSlide16.xml><?xml version="1.0" encoding="utf-8"?>
 <p:notes xmlns:a="http://schemas.openxmlformats.org/drawingml/2006/main" xmlns:r="http://schemas.openxmlformats.org/officeDocument/2006/relationships" xmlns:p="http://schemas.openxmlformats.org/presentationml/2006/main">
   <p:cSld>
     <p:spTree>
@@ -25250,7 +32825,7 @@
           <a:p>
             <a:fld id="{EE000EEB-8338-48D7-8EE8-EE0082EF7602}" type="slidenum">
               <a:rPr lang="en-US" smtClean="0"/>
-              <a:t>15</a:t>
+              <a:t>16</a:t>
             </a:fld>
             <a:endParaRPr lang="en-US" dirty="0"/>
           </a:p>
@@ -25269,7 +32844,7 @@
 </p:notes>
 </file>
 
-<file path=ppt/notesSlides/notesSlide16.xml><?xml version="1.0" encoding="utf-8"?>
+<file path=ppt/notesSlides/notesSlide17.xml><?xml version="1.0" encoding="utf-8"?>
 <p:notes xmlns:a="http://schemas.openxmlformats.org/drawingml/2006/main" xmlns:r="http://schemas.openxmlformats.org/officeDocument/2006/relationships" xmlns:p="http://schemas.openxmlformats.org/presentationml/2006/main">
   <p:cSld>
     <p:spTree>
@@ -25358,7 +32933,7 @@
           <a:p>
             <a:fld id="{EE000EEB-8338-48D7-8EE8-EE0082EF7602}" type="slidenum">
               <a:rPr lang="en-US" smtClean="0"/>
-              <a:t>16</a:t>
+              <a:t>17</a:t>
             </a:fld>
             <a:endParaRPr lang="en-US" dirty="0"/>
           </a:p>
@@ -25377,7 +32952,7 @@
 </p:notes>
 </file>
 
-<file path=ppt/notesSlides/notesSlide17.xml><?xml version="1.0" encoding="utf-8"?>
+<file path=ppt/notesSlides/notesSlide18.xml><?xml version="1.0" encoding="utf-8"?>
 <p:notes xmlns:a="http://schemas.openxmlformats.org/drawingml/2006/main" xmlns:r="http://schemas.openxmlformats.org/officeDocument/2006/relationships" xmlns:p="http://schemas.openxmlformats.org/presentationml/2006/main">
   <p:cSld>
     <p:spTree>
@@ -25466,7 +33041,7 @@
           <a:p>
             <a:fld id="{EE000EEB-8338-48D7-8EE8-EE0082EF7602}" type="slidenum">
               <a:rPr lang="en-US" smtClean="0"/>
-              <a:t>17</a:t>
+              <a:t>18</a:t>
             </a:fld>
             <a:endParaRPr lang="en-US" dirty="0"/>
           </a:p>
@@ -34233,19 +41808,25 @@
         </p:nvSpPr>
         <p:spPr>
           <a:xfrm>
-            <a:off x="6698088" y="3909848"/>
-            <a:ext cx="5207153" cy="1986456"/>
+            <a:off x="7107841" y="2113581"/>
+            <a:ext cx="4968545" cy="2242662"/>
           </a:xfrm>
         </p:spPr>
         <p:txBody>
           <a:bodyPr>
-            <a:normAutofit lnSpcReduction="10000"/>
+            <a:normAutofit fontScale="77500" lnSpcReduction="20000"/>
           </a:bodyPr>
           <a:lstStyle/>
           <a:p>
             <a:r>
               <a:rPr lang="en-US" altLang="zh-CN" sz="4400" b="1" dirty="0"/>
-              <a:t>Adding Interactivity with State</a:t>
+              <a:t>7. Adding Interactivity with State</a:t>
+            </a:r>
+          </a:p>
+          <a:p>
+            <a:r>
+              <a:rPr lang="en-US" sz="3800" b="1" dirty="0"/>
+              <a:t>7.1 Listening and Handling Events</a:t>
             </a:r>
             <a:endParaRPr lang="en-US" sz="4400" b="1" dirty="0"/>
           </a:p>
@@ -34296,6 +41877,109 @@
       </p:pic>
       <p:sp>
         <p:nvSpPr>
+          <p:cNvPr id="10" name="TextBox 9">
+            <a:extLst>
+              <a:ext uri="{FF2B5EF4-FFF2-40B4-BE49-F238E27FC236}">
+                <a16:creationId xmlns:a16="http://schemas.microsoft.com/office/drawing/2014/main" id="{914C659B-8BF6-4139-3DF8-2DFABCE2869A}"/>
+              </a:ext>
+            </a:extLst>
+          </p:cNvPr>
+          <p:cNvSpPr txBox="1"/>
+          <p:nvPr/>
+        </p:nvSpPr>
+        <p:spPr>
+          <a:xfrm>
+            <a:off x="123014" y="6189114"/>
+            <a:ext cx="2706045" cy="523220"/>
+          </a:xfrm>
+          <a:prstGeom prst="rect">
+            <a:avLst/>
+          </a:prstGeom>
+        </p:spPr>
+        <p:style>
+          <a:lnRef idx="0">
+            <a:schemeClr val="accent4"/>
+          </a:lnRef>
+          <a:fillRef idx="3">
+            <a:schemeClr val="accent4"/>
+          </a:fillRef>
+          <a:effectRef idx="3">
+            <a:schemeClr val="accent4"/>
+          </a:effectRef>
+          <a:fontRef idx="minor">
+            <a:schemeClr val="lt1"/>
+          </a:fontRef>
+        </p:style>
+        <p:txBody>
+          <a:bodyPr wrap="square" rtlCol="0" anchor="ctr">
+            <a:spAutoFit/>
+          </a:bodyPr>
+          <a:lstStyle/>
+          <a:p>
+            <a:pPr algn="ctr"/>
+            <a:r>
+              <a:rPr lang="en-US" sz="2800" dirty="0"/>
+              <a:t>Learn Next.js</a:t>
+            </a:r>
+          </a:p>
+        </p:txBody>
+      </p:sp>
+      <p:pic>
+        <p:nvPicPr>
+          <p:cNvPr id="8" name="Picture 7" descr="A diagram of a software application&#10;&#10;AI-generated content may be incorrect.">
+            <a:extLst>
+              <a:ext uri="{FF2B5EF4-FFF2-40B4-BE49-F238E27FC236}">
+                <a16:creationId xmlns:a16="http://schemas.microsoft.com/office/drawing/2014/main" id="{BBA2AB25-E214-9734-81A1-67AEB0C0012A}"/>
+              </a:ext>
+            </a:extLst>
+          </p:cNvPr>
+          <p:cNvPicPr>
+            <a:picLocks noChangeAspect="1"/>
+          </p:cNvPicPr>
+          <p:nvPr/>
+        </p:nvPicPr>
+        <p:blipFill>
+          <a:blip r:embed="rId5"/>
+          <a:stretch>
+            <a:fillRect/>
+          </a:stretch>
+        </p:blipFill>
+        <p:spPr>
+          <a:xfrm>
+            <a:off x="123014" y="1871194"/>
+            <a:ext cx="6731423" cy="4457687"/>
+          </a:xfrm>
+          <a:prstGeom prst="roundRect">
+            <a:avLst>
+              <a:gd name="adj" fmla="val 16667"/>
+            </a:avLst>
+          </a:prstGeom>
+          <a:ln>
+            <a:noFill/>
+          </a:ln>
+          <a:effectLst>
+            <a:outerShdw blurRad="152400" dist="12000" dir="900000" sy="98000" kx="110000" ky="200000" algn="tl" rotWithShape="0">
+              <a:srgbClr val="000000">
+                <a:alpha val="30000"/>
+              </a:srgbClr>
+            </a:outerShdw>
+          </a:effectLst>
+          <a:scene3d>
+            <a:camera prst="perspectiveRelaxed">
+              <a:rot lat="19800000" lon="1200000" rev="20820000"/>
+            </a:camera>
+            <a:lightRig rig="threePt" dir="t"/>
+          </a:scene3d>
+          <a:sp3d contourW="6350" prstMaterial="matte">
+            <a:bevelT w="101600" h="101600"/>
+            <a:contourClr>
+              <a:srgbClr val="969696"/>
+            </a:contourClr>
+          </a:sp3d>
+        </p:spPr>
+      </p:pic>
+      <p:sp>
+        <p:nvSpPr>
           <p:cNvPr id="7" name="Subtitle 2">
             <a:extLst>
               <a:ext uri="{FF2B5EF4-FFF2-40B4-BE49-F238E27FC236}">
@@ -34310,7 +41994,7 @@
         </p:nvSpPr>
         <p:spPr>
           <a:xfrm>
-            <a:off x="6755257" y="2199289"/>
+            <a:off x="4875382" y="2413790"/>
             <a:ext cx="2102069" cy="1447801"/>
           </a:xfrm>
           <a:prstGeom prst="rect">
@@ -34546,12 +42230,192 @@
           </a:p>
         </p:txBody>
       </p:sp>
+      <p:graphicFrame>
+        <p:nvGraphicFramePr>
+          <p:cNvPr id="11" name="Diagram 10">
+            <a:extLst>
+              <a:ext uri="{FF2B5EF4-FFF2-40B4-BE49-F238E27FC236}">
+                <a16:creationId xmlns:a16="http://schemas.microsoft.com/office/drawing/2014/main" id="{2CCB3F84-31B7-9BC9-81D0-D133E9E7F455}"/>
+              </a:ext>
+            </a:extLst>
+          </p:cNvPr>
+          <p:cNvGraphicFramePr/>
+          <p:nvPr>
+            <p:extLst>
+              <p:ext uri="{D42A27DB-BD31-4B8C-83A1-F6EECF244321}">
+                <p14:modId xmlns:p14="http://schemas.microsoft.com/office/powerpoint/2010/main" val="1322487350"/>
+              </p:ext>
+            </p:extLst>
+          </p:nvPr>
+        </p:nvGraphicFramePr>
+        <p:xfrm>
+          <a:off x="6773753" y="4034046"/>
+          <a:ext cx="3479855" cy="2826262"/>
+        </p:xfrm>
+        <a:graphic>
+          <a:graphicData uri="http://schemas.openxmlformats.org/drawingml/2006/diagram">
+            <dgm:relIds xmlns:dgm="http://schemas.openxmlformats.org/drawingml/2006/diagram" xmlns:r="http://schemas.openxmlformats.org/officeDocument/2006/relationships" r:dm="rId6" r:lo="rId7" r:qs="rId8" r:cs="rId9"/>
+          </a:graphicData>
+        </a:graphic>
+      </p:graphicFrame>
+    </p:spTree>
+    <p:extLst>
+      <p:ext uri="{BB962C8B-B14F-4D97-AF65-F5344CB8AC3E}">
+        <p14:creationId xmlns:p14="http://schemas.microsoft.com/office/powerpoint/2010/main" val="1691132564"/>
+      </p:ext>
+    </p:extLst>
+  </p:cSld>
+  <p:clrMapOvr>
+    <a:masterClrMapping/>
+  </p:clrMapOvr>
+</p:sld>
+</file>
+
+<file path=ppt/slides/slide13.xml><?xml version="1.0" encoding="utf-8"?>
+<p:sld xmlns:a="http://schemas.openxmlformats.org/drawingml/2006/main" xmlns:r="http://schemas.openxmlformats.org/officeDocument/2006/relationships" xmlns:p="http://schemas.openxmlformats.org/presentationml/2006/main">
+  <p:cSld>
+    <p:spTree>
+      <p:nvGrpSpPr>
+        <p:cNvPr id="1" name="">
+          <a:extLst>
+            <a:ext uri="{FF2B5EF4-FFF2-40B4-BE49-F238E27FC236}">
+              <a16:creationId xmlns:a16="http://schemas.microsoft.com/office/drawing/2014/main" id="{5B213E58-464C-D030-8EA4-B880BB8CC33E}"/>
+            </a:ext>
+          </a:extLst>
+        </p:cNvPr>
+        <p:cNvGrpSpPr/>
+        <p:nvPr/>
+      </p:nvGrpSpPr>
+      <p:grpSpPr>
+        <a:xfrm>
+          <a:off x="0" y="0"/>
+          <a:ext cx="0" cy="0"/>
+          <a:chOff x="0" y="0"/>
+          <a:chExt cx="0" cy="0"/>
+        </a:xfrm>
+      </p:grpSpPr>
       <p:pic>
         <p:nvPicPr>
-          <p:cNvPr id="9" name="Picture 8" descr="A blue and orange text box&#10;&#10;AI-generated content may be incorrect.">
+          <p:cNvPr id="5" name="Picture 4" descr="chain links">
             <a:extLst>
               <a:ext uri="{FF2B5EF4-FFF2-40B4-BE49-F238E27FC236}">
-                <a16:creationId xmlns:a16="http://schemas.microsoft.com/office/drawing/2014/main" id="{95C4CEFD-6244-CFF2-6B4A-1B3199A3EC29}"/>
+                <a16:creationId xmlns:a16="http://schemas.microsoft.com/office/drawing/2014/main" id="{273C3E42-EFE2-2E7A-13AB-EAB18280DCC9}"/>
+              </a:ext>
+            </a:extLst>
+          </p:cNvPr>
+          <p:cNvPicPr>
+            <a:picLocks noChangeAspect="1"/>
+          </p:cNvPicPr>
+          <p:nvPr/>
+        </p:nvPicPr>
+        <p:blipFill rotWithShape="1">
+          <a:blip r:embed="rId3">
+            <a:duotone>
+              <a:prstClr val="black"/>
+              <a:schemeClr val="accent5">
+                <a:tint val="45000"/>
+                <a:satMod val="400000"/>
+              </a:schemeClr>
+            </a:duotone>
+            <a:alphaModFix amt="25000"/>
+          </a:blip>
+          <a:srcRect t="23391" r="9091"/>
+          <a:stretch/>
+        </p:blipFill>
+        <p:spPr>
+          <a:xfrm>
+            <a:off x="0" y="10"/>
+            <a:ext cx="12191980" cy="6857990"/>
+          </a:xfrm>
+          <a:prstGeom prst="rect">
+            <a:avLst/>
+          </a:prstGeom>
+        </p:spPr>
+      </p:pic>
+      <p:sp>
+        <p:nvSpPr>
+          <p:cNvPr id="2" name="Title 1">
+            <a:extLst>
+              <a:ext uri="{FF2B5EF4-FFF2-40B4-BE49-F238E27FC236}">
+                <a16:creationId xmlns:a16="http://schemas.microsoft.com/office/drawing/2014/main" id="{28131808-B156-B66D-E931-ED40FE538943}"/>
+              </a:ext>
+            </a:extLst>
+          </p:cNvPr>
+          <p:cNvSpPr>
+            <a:spLocks noGrp="1"/>
+          </p:cNvSpPr>
+          <p:nvPr>
+            <p:ph type="ctrTitle"/>
+          </p:nvPr>
+        </p:nvSpPr>
+        <p:spPr>
+          <a:xfrm>
+            <a:off x="4474323" y="961696"/>
+            <a:ext cx="7602064" cy="1266497"/>
+          </a:xfrm>
+        </p:spPr>
+        <p:txBody>
+          <a:bodyPr anchor="ctr">
+            <a:normAutofit/>
+          </a:bodyPr>
+          <a:lstStyle/>
+          <a:p>
+            <a:r>
+              <a:rPr lang="en-US" sz="6000" b="1" dirty="0"/>
+              <a:t>REACT Foundations</a:t>
+            </a:r>
+            <a:endParaRPr lang="ru-RU" sz="6000" b="1" dirty="0"/>
+          </a:p>
+        </p:txBody>
+      </p:sp>
+      <p:sp>
+        <p:nvSpPr>
+          <p:cNvPr id="3" name="Subtitle 2">
+            <a:extLst>
+              <a:ext uri="{FF2B5EF4-FFF2-40B4-BE49-F238E27FC236}">
+                <a16:creationId xmlns:a16="http://schemas.microsoft.com/office/drawing/2014/main" id="{0C46A110-E090-EE7C-508B-A584433CD8D3}"/>
+              </a:ext>
+            </a:extLst>
+          </p:cNvPr>
+          <p:cNvSpPr>
+            <a:spLocks noGrp="1"/>
+          </p:cNvSpPr>
+          <p:nvPr>
+            <p:ph type="subTitle" idx="1"/>
+          </p:nvPr>
+        </p:nvSpPr>
+        <p:spPr>
+          <a:xfrm>
+            <a:off x="7107841" y="2113581"/>
+            <a:ext cx="4968545" cy="2242662"/>
+          </a:xfrm>
+        </p:spPr>
+        <p:txBody>
+          <a:bodyPr>
+            <a:normAutofit fontScale="92500" lnSpcReduction="20000"/>
+          </a:bodyPr>
+          <a:lstStyle/>
+          <a:p>
+            <a:r>
+              <a:rPr lang="en-US" altLang="zh-CN" sz="4400" b="1" dirty="0"/>
+              <a:t>7. Adding Interactivity with State</a:t>
+            </a:r>
+          </a:p>
+          <a:p>
+            <a:r>
+              <a:rPr lang="en-US" sz="3800" b="1" dirty="0"/>
+              <a:t>7.2 State and Hooks</a:t>
+            </a:r>
+            <a:endParaRPr lang="en-US" sz="4400" b="1" dirty="0"/>
+          </a:p>
+        </p:txBody>
+      </p:sp>
+      <p:pic>
+        <p:nvPicPr>
+          <p:cNvPr id="6" name="Picture 5" descr="A group of cubes with a symbol in center&#10;&#10;AI-generated content may be incorrect.">
+            <a:extLst>
+              <a:ext uri="{FF2B5EF4-FFF2-40B4-BE49-F238E27FC236}">
+                <a16:creationId xmlns:a16="http://schemas.microsoft.com/office/drawing/2014/main" id="{6633855F-4B74-875E-28E6-594A008517FD}"/>
               </a:ext>
             </a:extLst>
           </p:cNvPr>
@@ -34561,43 +42425,32 @@
           <p:nvPr/>
         </p:nvPicPr>
         <p:blipFill>
-          <a:blip r:embed="rId5"/>
+          <a:blip r:embed="rId4"/>
           <a:stretch>
             <a:fillRect/>
           </a:stretch>
         </p:blipFill>
         <p:spPr>
           <a:xfrm>
-            <a:off x="630376" y="1684961"/>
-            <a:ext cx="5952119" cy="4880225"/>
+            <a:off x="115614" y="126986"/>
+            <a:ext cx="3965294" cy="3520104"/>
           </a:xfrm>
           <a:prstGeom prst="roundRect">
             <a:avLst>
-              <a:gd name="adj" fmla="val 16667"/>
+              <a:gd name="adj" fmla="val 8594"/>
             </a:avLst>
           </a:prstGeom>
+          <a:solidFill>
+            <a:srgbClr val="FFFFFF">
+              <a:shade val="85000"/>
+            </a:srgbClr>
+          </a:solidFill>
           <a:ln>
             <a:noFill/>
           </a:ln>
           <a:effectLst>
-            <a:outerShdw blurRad="152400" dist="12000" dir="900000" sy="98000" kx="110000" ky="200000" algn="tl" rotWithShape="0">
-              <a:srgbClr val="000000">
-                <a:alpha val="30000"/>
-              </a:srgbClr>
-            </a:outerShdw>
+            <a:reflection blurRad="12700" stA="38000" endPos="28000" dist="5000" dir="5400000" sy="-100000" algn="bl" rotWithShape="0"/>
           </a:effectLst>
-          <a:scene3d>
-            <a:camera prst="perspectiveRelaxed">
-              <a:rot lat="19800000" lon="1200000" rev="20820000"/>
-            </a:camera>
-            <a:lightRig rig="threePt" dir="t"/>
-          </a:scene3d>
-          <a:sp3d contourW="6350" prstMaterial="matte">
-            <a:bevelT w="101600" h="101600"/>
-            <a:contourClr>
-              <a:srgbClr val="969696"/>
-            </a:contourClr>
-          </a:sp3d>
         </p:spPr>
       </p:pic>
       <p:sp>
@@ -34605,7 +42458,7 @@
           <p:cNvPr id="10" name="TextBox 9">
             <a:extLst>
               <a:ext uri="{FF2B5EF4-FFF2-40B4-BE49-F238E27FC236}">
-                <a16:creationId xmlns:a16="http://schemas.microsoft.com/office/drawing/2014/main" id="{914C659B-8BF6-4139-3DF8-2DFABCE2869A}"/>
+                <a16:creationId xmlns:a16="http://schemas.microsoft.com/office/drawing/2014/main" id="{6E4F833D-C48C-35F0-DFD9-1A34EADB4DC7}"/>
               </a:ext>
             </a:extLst>
           </p:cNvPr>
@@ -34649,10 +42502,338 @@
           </a:p>
         </p:txBody>
       </p:sp>
+      <p:graphicFrame>
+        <p:nvGraphicFramePr>
+          <p:cNvPr id="11" name="Diagram 10">
+            <a:extLst>
+              <a:ext uri="{FF2B5EF4-FFF2-40B4-BE49-F238E27FC236}">
+                <a16:creationId xmlns:a16="http://schemas.microsoft.com/office/drawing/2014/main" id="{7E140893-933C-76FC-0340-BAC1273F4EEB}"/>
+              </a:ext>
+            </a:extLst>
+          </p:cNvPr>
+          <p:cNvGraphicFramePr/>
+          <p:nvPr/>
+        </p:nvGraphicFramePr>
+        <p:xfrm>
+          <a:off x="6773753" y="4034046"/>
+          <a:ext cx="3479855" cy="2826262"/>
+        </p:xfrm>
+        <a:graphic>
+          <a:graphicData uri="http://schemas.openxmlformats.org/drawingml/2006/diagram">
+            <dgm:relIds xmlns:dgm="http://schemas.openxmlformats.org/drawingml/2006/diagram" xmlns:r="http://schemas.openxmlformats.org/officeDocument/2006/relationships" r:dm="rId5" r:lo="rId6" r:qs="rId7" r:cs="rId8"/>
+          </a:graphicData>
+        </a:graphic>
+      </p:graphicFrame>
+      <p:pic>
+        <p:nvPicPr>
+          <p:cNvPr id="9" name="Picture 8" descr="A diagram of a program&#10;&#10;AI-generated content may be incorrect.">
+            <a:extLst>
+              <a:ext uri="{FF2B5EF4-FFF2-40B4-BE49-F238E27FC236}">
+                <a16:creationId xmlns:a16="http://schemas.microsoft.com/office/drawing/2014/main" id="{E5FEF984-D3F8-09D1-5C6A-54EAB209C3B5}"/>
+              </a:ext>
+            </a:extLst>
+          </p:cNvPr>
+          <p:cNvPicPr>
+            <a:picLocks noChangeAspect="1"/>
+          </p:cNvPicPr>
+          <p:nvPr/>
+        </p:nvPicPr>
+        <p:blipFill>
+          <a:blip r:embed="rId10"/>
+          <a:stretch>
+            <a:fillRect/>
+          </a:stretch>
+        </p:blipFill>
+        <p:spPr>
+          <a:xfrm>
+            <a:off x="271891" y="1797269"/>
+            <a:ext cx="6668906" cy="4541886"/>
+          </a:xfrm>
+          <a:prstGeom prst="roundRect">
+            <a:avLst>
+              <a:gd name="adj" fmla="val 16667"/>
+            </a:avLst>
+          </a:prstGeom>
+          <a:ln>
+            <a:noFill/>
+          </a:ln>
+          <a:effectLst>
+            <a:outerShdw blurRad="152400" dist="12000" dir="900000" sy="98000" kx="110000" ky="200000" algn="tl" rotWithShape="0">
+              <a:srgbClr val="000000">
+                <a:alpha val="30000"/>
+              </a:srgbClr>
+            </a:outerShdw>
+          </a:effectLst>
+          <a:scene3d>
+            <a:camera prst="perspectiveRelaxed">
+              <a:rot lat="19800000" lon="1200000" rev="20820000"/>
+            </a:camera>
+            <a:lightRig rig="threePt" dir="t"/>
+          </a:scene3d>
+          <a:sp3d contourW="6350" prstMaterial="matte">
+            <a:bevelT w="101600" h="101600"/>
+            <a:contourClr>
+              <a:srgbClr val="969696"/>
+            </a:contourClr>
+          </a:sp3d>
+        </p:spPr>
+      </p:pic>
+      <p:sp>
+        <p:nvSpPr>
+          <p:cNvPr id="7" name="Subtitle 2">
+            <a:extLst>
+              <a:ext uri="{FF2B5EF4-FFF2-40B4-BE49-F238E27FC236}">
+                <a16:creationId xmlns:a16="http://schemas.microsoft.com/office/drawing/2014/main" id="{754B7572-9340-9A82-98FD-EFB691E0451D}"/>
+              </a:ext>
+            </a:extLst>
+          </p:cNvPr>
+          <p:cNvSpPr txBox="1">
+            <a:spLocks/>
+          </p:cNvSpPr>
+          <p:nvPr/>
+        </p:nvSpPr>
+        <p:spPr>
+          <a:xfrm>
+            <a:off x="4875382" y="2413790"/>
+            <a:ext cx="2102069" cy="1447801"/>
+          </a:xfrm>
+          <a:prstGeom prst="rect">
+            <a:avLst/>
+          </a:prstGeom>
+        </p:spPr>
+        <p:txBody>
+          <a:bodyPr vert="horz" lIns="91440" tIns="45720" rIns="91440" bIns="45720" rtlCol="0" anchor="ctr">
+            <a:normAutofit fontScale="92500" lnSpcReduction="20000"/>
+          </a:bodyPr>
+          <a:lstStyle>
+            <a:lvl1pPr marL="0" indent="0" algn="l" defTabSz="457200" rtl="0" eaLnBrk="1" latinLnBrk="0" hangingPunct="1">
+              <a:spcBef>
+                <a:spcPts val="1000"/>
+              </a:spcBef>
+              <a:spcAft>
+                <a:spcPts val="0"/>
+              </a:spcAft>
+              <a:buClr>
+                <a:schemeClr val="accent1"/>
+              </a:buClr>
+              <a:buSzPct val="80000"/>
+              <a:buFont typeface="Wingdings 3" charset="2"/>
+              <a:buNone/>
+              <a:defRPr sz="2000" b="0" i="0" kern="1200" cap="all">
+                <a:solidFill>
+                  <a:schemeClr val="accent1"/>
+                </a:solidFill>
+                <a:latin typeface="+mj-lt"/>
+                <a:ea typeface="+mj-ea"/>
+                <a:cs typeface="+mj-cs"/>
+              </a:defRPr>
+            </a:lvl1pPr>
+            <a:lvl2pPr marL="457200" indent="0" algn="ctr" defTabSz="457200" rtl="0" eaLnBrk="1" latinLnBrk="0" hangingPunct="1">
+              <a:spcBef>
+                <a:spcPts val="1000"/>
+              </a:spcBef>
+              <a:spcAft>
+                <a:spcPts val="0"/>
+              </a:spcAft>
+              <a:buClr>
+                <a:schemeClr val="accent1"/>
+              </a:buClr>
+              <a:buSzPct val="80000"/>
+              <a:buFont typeface="Wingdings 3" charset="2"/>
+              <a:buNone/>
+              <a:defRPr sz="1800" b="0" i="0" kern="1200">
+                <a:solidFill>
+                  <a:schemeClr val="tx1">
+                    <a:tint val="75000"/>
+                  </a:schemeClr>
+                </a:solidFill>
+                <a:latin typeface="+mj-lt"/>
+                <a:ea typeface="+mj-ea"/>
+                <a:cs typeface="+mj-cs"/>
+              </a:defRPr>
+            </a:lvl2pPr>
+            <a:lvl3pPr marL="914400" indent="0" algn="ctr" defTabSz="457200" rtl="0" eaLnBrk="1" latinLnBrk="0" hangingPunct="1">
+              <a:spcBef>
+                <a:spcPts val="1000"/>
+              </a:spcBef>
+              <a:spcAft>
+                <a:spcPts val="0"/>
+              </a:spcAft>
+              <a:buClr>
+                <a:schemeClr val="accent1"/>
+              </a:buClr>
+              <a:buSzPct val="80000"/>
+              <a:buFont typeface="Wingdings 3" charset="2"/>
+              <a:buNone/>
+              <a:defRPr sz="1600" b="0" i="0" kern="1200">
+                <a:solidFill>
+                  <a:schemeClr val="tx1">
+                    <a:tint val="75000"/>
+                  </a:schemeClr>
+                </a:solidFill>
+                <a:latin typeface="+mj-lt"/>
+                <a:ea typeface="+mj-ea"/>
+                <a:cs typeface="+mj-cs"/>
+              </a:defRPr>
+            </a:lvl3pPr>
+            <a:lvl4pPr marL="1371600" indent="0" algn="ctr" defTabSz="457200" rtl="0" eaLnBrk="1" latinLnBrk="0" hangingPunct="1">
+              <a:spcBef>
+                <a:spcPts val="1000"/>
+              </a:spcBef>
+              <a:spcAft>
+                <a:spcPts val="0"/>
+              </a:spcAft>
+              <a:buClr>
+                <a:schemeClr val="accent1"/>
+              </a:buClr>
+              <a:buSzPct val="80000"/>
+              <a:buFont typeface="Wingdings 3" charset="2"/>
+              <a:buNone/>
+              <a:defRPr sz="1400" b="0" i="0" kern="1200">
+                <a:solidFill>
+                  <a:schemeClr val="tx1">
+                    <a:tint val="75000"/>
+                  </a:schemeClr>
+                </a:solidFill>
+                <a:latin typeface="+mj-lt"/>
+                <a:ea typeface="+mj-ea"/>
+                <a:cs typeface="+mj-cs"/>
+              </a:defRPr>
+            </a:lvl4pPr>
+            <a:lvl5pPr marL="1828800" indent="0" algn="ctr" defTabSz="457200" rtl="0" eaLnBrk="1" latinLnBrk="0" hangingPunct="1">
+              <a:spcBef>
+                <a:spcPts val="1000"/>
+              </a:spcBef>
+              <a:spcAft>
+                <a:spcPts val="0"/>
+              </a:spcAft>
+              <a:buClr>
+                <a:schemeClr val="accent1"/>
+              </a:buClr>
+              <a:buSzPct val="80000"/>
+              <a:buFont typeface="Wingdings 3" charset="2"/>
+              <a:buNone/>
+              <a:defRPr sz="1400" b="0" i="0" kern="1200">
+                <a:solidFill>
+                  <a:schemeClr val="tx1">
+                    <a:tint val="75000"/>
+                  </a:schemeClr>
+                </a:solidFill>
+                <a:latin typeface="+mj-lt"/>
+                <a:ea typeface="+mj-ea"/>
+                <a:cs typeface="+mj-cs"/>
+              </a:defRPr>
+            </a:lvl5pPr>
+            <a:lvl6pPr marL="2286000" indent="0" algn="ctr" defTabSz="457200" rtl="0" eaLnBrk="1" latinLnBrk="0" hangingPunct="1">
+              <a:spcBef>
+                <a:spcPts val="1000"/>
+              </a:spcBef>
+              <a:spcAft>
+                <a:spcPts val="0"/>
+              </a:spcAft>
+              <a:buClr>
+                <a:schemeClr val="accent1"/>
+              </a:buClr>
+              <a:buSzPct val="80000"/>
+              <a:buFont typeface="Wingdings 3" charset="2"/>
+              <a:buNone/>
+              <a:defRPr sz="1400" b="0" i="0" kern="1200">
+                <a:solidFill>
+                  <a:schemeClr val="tx1">
+                    <a:tint val="75000"/>
+                  </a:schemeClr>
+                </a:solidFill>
+                <a:latin typeface="+mj-lt"/>
+                <a:ea typeface="+mj-ea"/>
+                <a:cs typeface="+mj-cs"/>
+              </a:defRPr>
+            </a:lvl6pPr>
+            <a:lvl7pPr marL="2743200" indent="0" algn="ctr" defTabSz="457200" rtl="0" eaLnBrk="1" latinLnBrk="0" hangingPunct="1">
+              <a:spcBef>
+                <a:spcPts val="1000"/>
+              </a:spcBef>
+              <a:spcAft>
+                <a:spcPts val="0"/>
+              </a:spcAft>
+              <a:buClr>
+                <a:schemeClr val="accent1"/>
+              </a:buClr>
+              <a:buSzPct val="80000"/>
+              <a:buFont typeface="Wingdings 3" charset="2"/>
+              <a:buNone/>
+              <a:defRPr sz="1400" b="0" i="0" kern="1200">
+                <a:solidFill>
+                  <a:schemeClr val="tx1">
+                    <a:tint val="75000"/>
+                  </a:schemeClr>
+                </a:solidFill>
+                <a:latin typeface="+mj-lt"/>
+                <a:ea typeface="+mj-ea"/>
+                <a:cs typeface="+mj-cs"/>
+              </a:defRPr>
+            </a:lvl7pPr>
+            <a:lvl8pPr marL="3200400" indent="0" algn="ctr" defTabSz="457200" rtl="0" eaLnBrk="1" latinLnBrk="0" hangingPunct="1">
+              <a:spcBef>
+                <a:spcPts val="1000"/>
+              </a:spcBef>
+              <a:spcAft>
+                <a:spcPts val="0"/>
+              </a:spcAft>
+              <a:buClr>
+                <a:schemeClr val="accent1"/>
+              </a:buClr>
+              <a:buSzPct val="80000"/>
+              <a:buFont typeface="Wingdings 3" charset="2"/>
+              <a:buNone/>
+              <a:defRPr sz="1400" b="0" i="0" kern="1200">
+                <a:solidFill>
+                  <a:schemeClr val="tx1">
+                    <a:tint val="75000"/>
+                  </a:schemeClr>
+                </a:solidFill>
+                <a:latin typeface="+mj-lt"/>
+                <a:ea typeface="+mj-ea"/>
+                <a:cs typeface="+mj-cs"/>
+              </a:defRPr>
+            </a:lvl8pPr>
+            <a:lvl9pPr marL="3657600" indent="0" algn="ctr" defTabSz="457200" rtl="0" eaLnBrk="1" latinLnBrk="0" hangingPunct="1">
+              <a:spcBef>
+                <a:spcPts val="1000"/>
+              </a:spcBef>
+              <a:spcAft>
+                <a:spcPts val="0"/>
+              </a:spcAft>
+              <a:buClr>
+                <a:schemeClr val="accent1"/>
+              </a:buClr>
+              <a:buSzPct val="80000"/>
+              <a:buFont typeface="Wingdings 3" charset="2"/>
+              <a:buNone/>
+              <a:defRPr sz="1400" b="0" i="0" kern="1200">
+                <a:solidFill>
+                  <a:schemeClr val="tx1">
+                    <a:tint val="75000"/>
+                  </a:schemeClr>
+                </a:solidFill>
+                <a:latin typeface="+mj-lt"/>
+                <a:ea typeface="+mj-ea"/>
+                <a:cs typeface="+mj-cs"/>
+              </a:defRPr>
+            </a:lvl9pPr>
+          </a:lstStyle>
+          <a:p>
+            <a:pPr algn="ctr"/>
+            <a:r>
+              <a:rPr lang="en-US" sz="11500" b="1" dirty="0"/>
+              <a:t>12</a:t>
+            </a:r>
+          </a:p>
+        </p:txBody>
+      </p:sp>
     </p:spTree>
     <p:extLst>
       <p:ext uri="{BB962C8B-B14F-4D97-AF65-F5344CB8AC3E}">
-        <p14:creationId xmlns:p14="http://schemas.microsoft.com/office/powerpoint/2010/main" val="1691132564"/>
+        <p14:creationId xmlns:p14="http://schemas.microsoft.com/office/powerpoint/2010/main" val="1318616895"/>
       </p:ext>
     </p:extLst>
   </p:cSld>
@@ -34662,7 +42843,7 @@
 </p:sld>
 </file>
 
-<file path=ppt/slides/slide13.xml><?xml version="1.0" encoding="utf-8"?>
+<file path=ppt/slides/slide14.xml><?xml version="1.0" encoding="utf-8"?>
 <p:sld xmlns:a="http://schemas.openxmlformats.org/drawingml/2006/main" xmlns:r="http://schemas.openxmlformats.org/officeDocument/2006/relationships" xmlns:p="http://schemas.openxmlformats.org/presentationml/2006/main">
   <p:cSld>
     <p:spTree>
@@ -35206,7 +43387,7 @@
 </p:sld>
 </file>
 
-<file path=ppt/slides/slide14.xml><?xml version="1.0" encoding="utf-8"?>
+<file path=ppt/slides/slide15.xml><?xml version="1.0" encoding="utf-8"?>
 <p:sld xmlns:a="http://schemas.openxmlformats.org/drawingml/2006/main" xmlns:r="http://schemas.openxmlformats.org/officeDocument/2006/relationships" xmlns:p="http://schemas.openxmlformats.org/presentationml/2006/main">
   <p:cSld>
     <p:spTree>
@@ -35750,7 +43931,7 @@
 </p:sld>
 </file>
 
-<file path=ppt/slides/slide15.xml><?xml version="1.0" encoding="utf-8"?>
+<file path=ppt/slides/slide16.xml><?xml version="1.0" encoding="utf-8"?>
 <p:sld xmlns:a="http://schemas.openxmlformats.org/drawingml/2006/main" xmlns:r="http://schemas.openxmlformats.org/officeDocument/2006/relationships" xmlns:p="http://schemas.openxmlformats.org/presentationml/2006/main">
   <p:cSld>
     <p:spTree>
@@ -36172,10 +44353,9 @@
           <a:p>
             <a:pPr algn="ctr"/>
             <a:r>
-              <a:rPr lang="en-US" sz="11500" b="1"/>
+              <a:rPr lang="en-US" sz="11500" b="1" dirty="0"/>
               <a:t>14</a:t>
             </a:r>
-            <a:endParaRPr lang="en-US" sz="11500" b="1" dirty="0"/>
           </a:p>
         </p:txBody>
       </p:sp>
@@ -36295,7 +44475,7 @@
 </p:sld>
 </file>
 
-<file path=ppt/slides/slide16.xml><?xml version="1.0" encoding="utf-8"?>
+<file path=ppt/slides/slide17.xml><?xml version="1.0" encoding="utf-8"?>
 <p:sld xmlns:a="http://schemas.openxmlformats.org/drawingml/2006/main" xmlns:r="http://schemas.openxmlformats.org/officeDocument/2006/relationships" xmlns:p="http://schemas.openxmlformats.org/presentationml/2006/main">
   <p:cSld>
     <p:spTree>
@@ -36517,7 +44697,7 @@
 </p:sld>
 </file>
 
-<file path=ppt/slides/slide17.xml><?xml version="1.0" encoding="utf-8"?>
+<file path=ppt/slides/slide18.xml><?xml version="1.0" encoding="utf-8"?>
 <p:sld xmlns:a="http://schemas.openxmlformats.org/drawingml/2006/main" xmlns:r="http://schemas.openxmlformats.org/officeDocument/2006/relationships" xmlns:p="http://schemas.openxmlformats.org/presentationml/2006/main">
   <p:cSld>
     <p:spTree>

--- a/learn_nextjs/1_React-Foundation/React_Foundations.pptx
+++ b/learn_nextjs/1_React-Foundation/React_Foundations.pptx
@@ -43266,7 +43266,7 @@
             <a:pPr algn="ctr"/>
             <a:r>
               <a:rPr lang="en-US" sz="11500" b="1" dirty="0"/>
-              <a:t>12</a:t>
+              <a:t>13</a:t>
             </a:r>
           </a:p>
         </p:txBody>
@@ -43810,7 +43810,7 @@
             <a:pPr algn="ctr"/>
             <a:r>
               <a:rPr lang="en-US" sz="11500" b="1" dirty="0"/>
-              <a:t>13</a:t>
+              <a:t>14</a:t>
             </a:r>
           </a:p>
         </p:txBody>
@@ -44354,7 +44354,7 @@
             <a:pPr algn="ctr"/>
             <a:r>
               <a:rPr lang="en-US" sz="11500" b="1" dirty="0"/>
-              <a:t>14</a:t>
+              <a:t>15</a:t>
             </a:r>
           </a:p>
         </p:txBody>

--- a/learn_nextjs/1_React-Foundation/React_Foundations.pptx
+++ b/learn_nextjs/1_React-Foundation/React_Foundations.pptx
@@ -31560,7 +31560,7 @@
           <a:p>
             <a:fld id="{F6E59275-AFE1-4999-B78A-D0D76B9F2B0B}" type="datetimeFigureOut">
               <a:rPr lang="en-US" smtClean="0"/>
-              <a:t>1/17/2026</a:t>
+              <a:t>1/19/2026</a:t>
             </a:fld>
             <a:endParaRPr lang="en-US" dirty="0"/>
           </a:p>
@@ -31737,7 +31737,7 @@
           <a:p>
             <a:fld id="{B3EADD7A-FE61-48EE-BE0E-8546E5401374}" type="datetimeFigureOut">
               <a:rPr lang="en-US" smtClean="0"/>
-              <a:t>1/17/2026</a:t>
+              <a:t>1/19/2026</a:t>
             </a:fld>
             <a:endParaRPr lang="en-US" dirty="0"/>
           </a:p>
@@ -34107,7 +34107,7 @@
           <a:p>
             <a:fld id="{4AAD347D-5ACD-4C99-B74B-A9C85AD731AF}" type="datetimeFigureOut">
               <a:rPr lang="en-US" dirty="0"/>
-              <a:t>1/17/2026</a:t>
+              <a:t>1/19/2026</a:t>
             </a:fld>
             <a:endParaRPr lang="en-US" dirty="0"/>
           </a:p>
@@ -34377,7 +34377,7 @@
           <a:p>
             <a:fld id="{4509A250-FF31-4206-8172-F9D3106AACB1}" type="datetimeFigureOut">
               <a:rPr lang="en-US" dirty="0"/>
-              <a:t>1/17/2026</a:t>
+              <a:t>1/19/2026</a:t>
             </a:fld>
             <a:endParaRPr lang="en-US" dirty="0"/>
           </a:p>
@@ -34566,7 +34566,7 @@
           <a:p>
             <a:fld id="{4509A250-FF31-4206-8172-F9D3106AACB1}" type="datetimeFigureOut">
               <a:rPr lang="en-US" dirty="0"/>
-              <a:t>1/17/2026</a:t>
+              <a:t>1/19/2026</a:t>
             </a:fld>
             <a:endParaRPr lang="en-US" dirty="0"/>
           </a:p>
@@ -34829,7 +34829,7 @@
           <a:p>
             <a:fld id="{4509A250-FF31-4206-8172-F9D3106AACB1}" type="datetimeFigureOut">
               <a:rPr lang="en-US" dirty="0"/>
-              <a:t>1/17/2026</a:t>
+              <a:t>1/19/2026</a:t>
             </a:fld>
             <a:endParaRPr lang="en-US" dirty="0"/>
           </a:p>
@@ -35156,7 +35156,7 @@
           <a:p>
             <a:fld id="{4509A250-FF31-4206-8172-F9D3106AACB1}" type="datetimeFigureOut">
               <a:rPr lang="en-US" dirty="0"/>
-              <a:t>1/17/2026</a:t>
+              <a:t>1/19/2026</a:t>
             </a:fld>
             <a:endParaRPr lang="en-US" dirty="0"/>
           </a:p>
@@ -35761,7 +35761,7 @@
           <a:p>
             <a:fld id="{4509A250-FF31-4206-8172-F9D3106AACB1}" type="datetimeFigureOut">
               <a:rPr lang="en-US" dirty="0"/>
-              <a:t>1/17/2026</a:t>
+              <a:t>1/19/2026</a:t>
             </a:fld>
             <a:endParaRPr lang="en-US" dirty="0"/>
           </a:p>
@@ -36603,7 +36603,7 @@
           <a:p>
             <a:fld id="{4509A250-FF31-4206-8172-F9D3106AACB1}" type="datetimeFigureOut">
               <a:rPr lang="en-US" dirty="0"/>
-              <a:t>1/17/2026</a:t>
+              <a:t>1/19/2026</a:t>
             </a:fld>
             <a:endParaRPr lang="en-US" dirty="0"/>
           </a:p>
@@ -36768,7 +36768,7 @@
           <a:p>
             <a:fld id="{4509A250-FF31-4206-8172-F9D3106AACB1}" type="datetimeFigureOut">
               <a:rPr lang="en-US" dirty="0"/>
-              <a:t>1/17/2026</a:t>
+              <a:t>1/19/2026</a:t>
             </a:fld>
             <a:endParaRPr lang="en-US" dirty="0"/>
           </a:p>
@@ -36943,7 +36943,7 @@
           <a:p>
             <a:fld id="{4509A250-FF31-4206-8172-F9D3106AACB1}" type="datetimeFigureOut">
               <a:rPr lang="en-US" dirty="0"/>
-              <a:t>1/17/2026</a:t>
+              <a:t>1/19/2026</a:t>
             </a:fld>
             <a:endParaRPr lang="en-US" dirty="0"/>
           </a:p>
@@ -37108,7 +37108,7 @@
           <a:p>
             <a:fld id="{4509A250-FF31-4206-8172-F9D3106AACB1}" type="datetimeFigureOut">
               <a:rPr lang="en-US" dirty="0"/>
-              <a:t>1/17/2026</a:t>
+              <a:t>1/19/2026</a:t>
             </a:fld>
             <a:endParaRPr lang="en-US" dirty="0"/>
           </a:p>
@@ -37347,7 +37347,7 @@
           <a:p>
             <a:fld id="{4509A250-FF31-4206-8172-F9D3106AACB1}" type="datetimeFigureOut">
               <a:rPr lang="en-US" dirty="0"/>
-              <a:t>1/17/2026</a:t>
+              <a:t>1/19/2026</a:t>
             </a:fld>
             <a:endParaRPr lang="en-US" dirty="0"/>
           </a:p>
@@ -37634,7 +37634,7 @@
           <a:p>
             <a:fld id="{4509A250-FF31-4206-8172-F9D3106AACB1}" type="datetimeFigureOut">
               <a:rPr lang="en-US" dirty="0"/>
-              <a:t>1/17/2026</a:t>
+              <a:t>1/19/2026</a:t>
             </a:fld>
             <a:endParaRPr lang="en-US" dirty="0"/>
           </a:p>
@@ -38067,7 +38067,7 @@
           <a:p>
             <a:fld id="{4509A250-FF31-4206-8172-F9D3106AACB1}" type="datetimeFigureOut">
               <a:rPr lang="en-US" dirty="0"/>
-              <a:t>1/17/2026</a:t>
+              <a:t>1/19/2026</a:t>
             </a:fld>
             <a:endParaRPr lang="en-US" dirty="0"/>
           </a:p>
@@ -38180,7 +38180,7 @@
           <a:p>
             <a:fld id="{4509A250-FF31-4206-8172-F9D3106AACB1}" type="datetimeFigureOut">
               <a:rPr lang="en-US" dirty="0"/>
-              <a:t>1/17/2026</a:t>
+              <a:t>1/19/2026</a:t>
             </a:fld>
             <a:endParaRPr lang="en-US" dirty="0"/>
           </a:p>
@@ -38270,7 +38270,7 @@
           <a:p>
             <a:fld id="{4509A250-FF31-4206-8172-F9D3106AACB1}" type="datetimeFigureOut">
               <a:rPr lang="en-US" dirty="0"/>
-              <a:t>1/17/2026</a:t>
+              <a:t>1/19/2026</a:t>
             </a:fld>
             <a:endParaRPr lang="en-US" dirty="0"/>
           </a:p>
@@ -38544,7 +38544,7 @@
           <a:p>
             <a:fld id="{4509A250-FF31-4206-8172-F9D3106AACB1}" type="datetimeFigureOut">
               <a:rPr lang="en-US" dirty="0"/>
-              <a:t>1/17/2026</a:t>
+              <a:t>1/19/2026</a:t>
             </a:fld>
             <a:endParaRPr lang="en-US" dirty="0"/>
           </a:p>
@@ -38814,7 +38814,7 @@
           <a:p>
             <a:fld id="{4509A250-FF31-4206-8172-F9D3106AACB1}" type="datetimeFigureOut">
               <a:rPr lang="en-US" dirty="0"/>
-              <a:t>1/17/2026</a:t>
+              <a:t>1/19/2026</a:t>
             </a:fld>
             <a:endParaRPr lang="en-US" dirty="0"/>
           </a:p>
@@ -39252,7 +39252,7 @@
           <a:p>
             <a:fld id="{4509A250-FF31-4206-8172-F9D3106AACB1}" type="datetimeFigureOut">
               <a:rPr lang="en-US" dirty="0"/>
-              <a:t>1/17/2026</a:t>
+              <a:t>1/19/2026</a:t>
             </a:fld>
             <a:endParaRPr lang="en-US" dirty="0"/>
           </a:p>
@@ -42958,7 +42958,7 @@
         </p:nvSpPr>
         <p:spPr>
           <a:xfrm>
-            <a:off x="6698088" y="3909848"/>
+            <a:off x="6698088" y="3596459"/>
             <a:ext cx="5207153" cy="1266497"/>
           </a:xfrm>
         </p:spPr>
@@ -43374,6 +43374,49 @@
           </a:p>
         </p:txBody>
       </p:sp>
+      <p:pic>
+        <p:nvPicPr>
+          <p:cNvPr id="8" name="Picture 7" descr="A black text with a cross&#10;&#10;AI-generated content may be incorrect.">
+            <a:extLst>
+              <a:ext uri="{FF2B5EF4-FFF2-40B4-BE49-F238E27FC236}">
+                <a16:creationId xmlns:a16="http://schemas.microsoft.com/office/drawing/2014/main" id="{881D8AE1-298E-9F33-4676-640EEC6A7F5C}"/>
+              </a:ext>
+            </a:extLst>
+          </p:cNvPr>
+          <p:cNvPicPr>
+            <a:picLocks noChangeAspect="1"/>
+          </p:cNvPicPr>
+          <p:nvPr/>
+        </p:nvPicPr>
+        <p:blipFill>
+          <a:blip r:embed="rId6"/>
+          <a:stretch>
+            <a:fillRect/>
+          </a:stretch>
+        </p:blipFill>
+        <p:spPr>
+          <a:xfrm>
+            <a:off x="8796555" y="4543096"/>
+            <a:ext cx="3112979" cy="1805005"/>
+          </a:xfrm>
+          <a:prstGeom prst="roundRect">
+            <a:avLst>
+              <a:gd name="adj" fmla="val 8594"/>
+            </a:avLst>
+          </a:prstGeom>
+          <a:solidFill>
+            <a:srgbClr val="FFFFFF">
+              <a:shade val="85000"/>
+            </a:srgbClr>
+          </a:solidFill>
+          <a:ln>
+            <a:noFill/>
+          </a:ln>
+          <a:effectLst>
+            <a:reflection blurRad="12700" stA="38000" endPos="28000" dist="5000" dir="5400000" sy="-100000" algn="bl" rotWithShape="0"/>
+          </a:effectLst>
+        </p:spPr>
+      </p:pic>
     </p:spTree>
     <p:extLst>
       <p:ext uri="{BB962C8B-B14F-4D97-AF65-F5344CB8AC3E}">
@@ -50252,6 +50295,24 @@
 </file>
 
 <file path=customXml/item1.xml><?xml version="1.0" encoding="utf-8"?>
+<p:properties xmlns:p="http://schemas.microsoft.com/office/2006/metadata/properties" xmlns:xsi="http://www.w3.org/2001/XMLSchema-instance" xmlns:pc="http://schemas.microsoft.com/office/infopath/2007/PartnerControls">
+  <documentManagement>
+    <Status xmlns="71af3243-3dd4-4a8d-8c0d-dd76da1f02a5">Not started</Status>
+    <MediaServiceKeyPoints xmlns="71af3243-3dd4-4a8d-8c0d-dd76da1f02a5" xsi:nil="true"/>
+  </documentManagement>
+</p:properties>
+</file>
+
+<file path=customXml/item2.xml><?xml version="1.0" encoding="utf-8"?>
+<?mso-contentType ?>
+<FormTemplates xmlns="http://schemas.microsoft.com/sharepoint/v3/contenttype/forms">
+  <Display>DocumentLibraryForm</Display>
+  <Edit>DocumentLibraryForm</Edit>
+  <New>DocumentLibraryForm</New>
+</FormTemplates>
+</file>
+
+<file path=customXml/item3.xml><?xml version="1.0" encoding="utf-8"?>
 <ct:contentTypeSchema xmlns:ct="http://schemas.microsoft.com/office/2006/metadata/contentType" xmlns:ma="http://schemas.microsoft.com/office/2006/metadata/properties/metaAttributes" ct:_="" ma:_="" ma:contentTypeName="Document" ma:contentTypeID="0x01010079F111ED35F8CC479449609E8A0923A6" ma:contentTypeVersion="12" ma:contentTypeDescription="Create a new document." ma:contentTypeScope="" ma:versionID="93813dd7ca6ad654711aa0ab317e03a3">
   <xsd:schema xmlns:xsd="http://www.w3.org/2001/XMLSchema" xmlns:xs="http://www.w3.org/2001/XMLSchema" xmlns:p="http://schemas.microsoft.com/office/2006/metadata/properties" xmlns:ns2="71af3243-3dd4-4a8d-8c0d-dd76da1f02a5" xmlns:ns3="16c05727-aa75-4e4a-9b5f-8a80a1165891" targetNamespace="http://schemas.microsoft.com/office/2006/metadata/properties" ma:root="true" ma:fieldsID="f11dc0ce689dd3925e84e4e35398c6e7" ns2:_="" ns3:_="">
     <xsd:import namespace="71af3243-3dd4-4a8d-8c0d-dd76da1f02a5"/>
@@ -50472,25 +50533,25 @@
 </ct:contentTypeSchema>
 </file>
 
-<file path=customXml/item2.xml><?xml version="1.0" encoding="utf-8"?>
-<?mso-contentType ?>
-<FormTemplates xmlns="http://schemas.microsoft.com/sharepoint/v3/contenttype/forms">
-  <Display>DocumentLibraryForm</Display>
-  <Edit>DocumentLibraryForm</Edit>
-  <New>DocumentLibraryForm</New>
-</FormTemplates>
+<file path=customXml/itemProps1.xml><?xml version="1.0" encoding="utf-8"?>
+<ds:datastoreItem xmlns:ds="http://schemas.openxmlformats.org/officeDocument/2006/customXml" ds:itemID="{048C88F1-1664-415F-AFCE-F6CF45809817}">
+  <ds:schemaRefs>
+    <ds:schemaRef ds:uri="http://schemas.microsoft.com/office/2006/metadata/properties"/>
+    <ds:schemaRef ds:uri="http://schemas.microsoft.com/office/infopath/2007/PartnerControls"/>
+    <ds:schemaRef ds:uri="71af3243-3dd4-4a8d-8c0d-dd76da1f02a5"/>
+  </ds:schemaRefs>
+</ds:datastoreItem>
 </file>
 
-<file path=customXml/item3.xml><?xml version="1.0" encoding="utf-8"?>
-<p:properties xmlns:p="http://schemas.microsoft.com/office/2006/metadata/properties" xmlns:xsi="http://www.w3.org/2001/XMLSchema-instance" xmlns:pc="http://schemas.microsoft.com/office/infopath/2007/PartnerControls">
-  <documentManagement>
-    <Status xmlns="71af3243-3dd4-4a8d-8c0d-dd76da1f02a5">Not started</Status>
-    <MediaServiceKeyPoints xmlns="71af3243-3dd4-4a8d-8c0d-dd76da1f02a5" xsi:nil="true"/>
-  </documentManagement>
-</p:properties>
+<file path=customXml/itemProps2.xml><?xml version="1.0" encoding="utf-8"?>
+<ds:datastoreItem xmlns:ds="http://schemas.openxmlformats.org/officeDocument/2006/customXml" ds:itemID="{0D16958A-754B-4396-9457-FD7A427A37DD}">
+  <ds:schemaRefs>
+    <ds:schemaRef ds:uri="http://schemas.microsoft.com/sharepoint/v3/contenttype/forms"/>
+  </ds:schemaRefs>
+</ds:datastoreItem>
 </file>
 
-<file path=customXml/itemProps1.xml><?xml version="1.0" encoding="utf-8"?>
+<file path=customXml/itemProps3.xml><?xml version="1.0" encoding="utf-8"?>
 <ds:datastoreItem xmlns:ds="http://schemas.openxmlformats.org/officeDocument/2006/customXml" ds:itemID="{CC30393A-FEC6-4A44-9E4A-6EA49F1F7DC0}">
   <ds:schemaRefs>
     <ds:schemaRef ds:uri="http://schemas.microsoft.com/office/2006/metadata/contentType"/>
@@ -50507,22 +50568,4 @@
     <ds:schemaRef ds:uri="http://schemas.microsoft.com/internal/obd"/>
   </ds:schemaRefs>
 </ds:datastoreItem>
-</file>
-
-<file path=customXml/itemProps2.xml><?xml version="1.0" encoding="utf-8"?>
-<ds:datastoreItem xmlns:ds="http://schemas.openxmlformats.org/officeDocument/2006/customXml" ds:itemID="{0D16958A-754B-4396-9457-FD7A427A37DD}">
-  <ds:schemaRefs>
-    <ds:schemaRef ds:uri="http://schemas.microsoft.com/sharepoint/v3/contenttype/forms"/>
-  </ds:schemaRefs>
-</ds:datastoreItem>
-</file>
-
-<file path=customXml/itemProps3.xml><?xml version="1.0" encoding="utf-8"?>
-<ds:datastoreItem xmlns:ds="http://schemas.openxmlformats.org/officeDocument/2006/customXml" ds:itemID="{048C88F1-1664-415F-AFCE-F6CF45809817}">
-  <ds:schemaRefs>
-    <ds:schemaRef ds:uri="http://schemas.microsoft.com/office/2006/metadata/properties"/>
-    <ds:schemaRef ds:uri="http://schemas.microsoft.com/office/infopath/2007/PartnerControls"/>
-    <ds:schemaRef ds:uri="71af3243-3dd4-4a8d-8c0d-dd76da1f02a5"/>
-  </ds:schemaRefs>
-</ds:datastoreItem>
 </file>
--- a/learn_nextjs/1_React-Foundation/React_Foundations.pptx
+++ b/learn_nextjs/1_React-Foundation/React_Foundations.pptx
@@ -5,10 +5,10 @@
     <p:sldMasterId id="2147483648" r:id="rId4"/>
   </p:sldMasterIdLst>
   <p:notesMasterIdLst>
-    <p:notesMasterId r:id="rId23"/>
+    <p:notesMasterId r:id="rId24"/>
   </p:notesMasterIdLst>
   <p:handoutMasterIdLst>
-    <p:handoutMasterId r:id="rId24"/>
+    <p:handoutMasterId r:id="rId25"/>
   </p:handoutMasterIdLst>
   <p:sldIdLst>
     <p:sldId id="256" r:id="rId5"/>
@@ -26,9 +26,10 @@
     <p:sldId id="274" r:id="rId17"/>
     <p:sldId id="264" r:id="rId18"/>
     <p:sldId id="265" r:id="rId19"/>
-    <p:sldId id="266" r:id="rId20"/>
-    <p:sldId id="267" r:id="rId21"/>
-    <p:sldId id="270" r:id="rId22"/>
+    <p:sldId id="275" r:id="rId20"/>
+    <p:sldId id="266" r:id="rId21"/>
+    <p:sldId id="267" r:id="rId22"/>
+    <p:sldId id="270" r:id="rId23"/>
   </p:sldIdLst>
   <p:sldSz cx="12192000" cy="6858000"/>
   <p:notesSz cx="6858000" cy="9144000"/>
@@ -32744,6 +32745,114 @@
         <p:cNvPr id="1" name="">
           <a:extLst>
             <a:ext uri="{FF2B5EF4-FFF2-40B4-BE49-F238E27FC236}">
+              <a16:creationId xmlns:a16="http://schemas.microsoft.com/office/drawing/2014/main" id="{F85643C3-8927-DF7F-9721-B06116D36C0D}"/>
+            </a:ext>
+          </a:extLst>
+        </p:cNvPr>
+        <p:cNvGrpSpPr/>
+        <p:nvPr/>
+      </p:nvGrpSpPr>
+      <p:grpSpPr>
+        <a:xfrm>
+          <a:off x="0" y="0"/>
+          <a:ext cx="0" cy="0"/>
+          <a:chOff x="0" y="0"/>
+          <a:chExt cx="0" cy="0"/>
+        </a:xfrm>
+      </p:grpSpPr>
+      <p:sp>
+        <p:nvSpPr>
+          <p:cNvPr id="2" name="Slide Image Placeholder 1">
+            <a:extLst>
+              <a:ext uri="{FF2B5EF4-FFF2-40B4-BE49-F238E27FC236}">
+                <a16:creationId xmlns:a16="http://schemas.microsoft.com/office/drawing/2014/main" id="{51546516-43ED-C0FB-FC54-5C8E8C0CBDA9}"/>
+              </a:ext>
+            </a:extLst>
+          </p:cNvPr>
+          <p:cNvSpPr>
+            <a:spLocks noGrp="1" noRot="1" noChangeAspect="1"/>
+          </p:cNvSpPr>
+          <p:nvPr>
+            <p:ph type="sldImg"/>
+          </p:nvPr>
+        </p:nvSpPr>
+        <p:spPr/>
+      </p:sp>
+      <p:sp>
+        <p:nvSpPr>
+          <p:cNvPr id="3" name="Notes Placeholder 2">
+            <a:extLst>
+              <a:ext uri="{FF2B5EF4-FFF2-40B4-BE49-F238E27FC236}">
+                <a16:creationId xmlns:a16="http://schemas.microsoft.com/office/drawing/2014/main" id="{1AFF3273-D0A0-1376-922C-D9A2E3EF7E3E}"/>
+              </a:ext>
+            </a:extLst>
+          </p:cNvPr>
+          <p:cNvSpPr>
+            <a:spLocks noGrp="1"/>
+          </p:cNvSpPr>
+          <p:nvPr>
+            <p:ph type="body" idx="1"/>
+          </p:nvPr>
+        </p:nvSpPr>
+        <p:spPr/>
+        <p:txBody>
+          <a:bodyPr/>
+          <a:lstStyle/>
+          <a:p>
+            <a:endParaRPr lang="en-US" dirty="0"/>
+          </a:p>
+        </p:txBody>
+      </p:sp>
+      <p:sp>
+        <p:nvSpPr>
+          <p:cNvPr id="4" name="Slide Number Placeholder 3">
+            <a:extLst>
+              <a:ext uri="{FF2B5EF4-FFF2-40B4-BE49-F238E27FC236}">
+                <a16:creationId xmlns:a16="http://schemas.microsoft.com/office/drawing/2014/main" id="{C859F83E-92A3-4A29-CF59-728BD04D95A0}"/>
+              </a:ext>
+            </a:extLst>
+          </p:cNvPr>
+          <p:cNvSpPr>
+            <a:spLocks noGrp="1"/>
+          </p:cNvSpPr>
+          <p:nvPr>
+            <p:ph type="sldNum" sz="quarter" idx="5"/>
+          </p:nvPr>
+        </p:nvSpPr>
+        <p:spPr/>
+        <p:txBody>
+          <a:bodyPr/>
+          <a:lstStyle/>
+          <a:p>
+            <a:fld id="{EE000EEB-8338-48D7-8EE8-EE0082EF7602}" type="slidenum">
+              <a:rPr lang="en-US" smtClean="0"/>
+              <a:t>16</a:t>
+            </a:fld>
+            <a:endParaRPr lang="en-US" dirty="0"/>
+          </a:p>
+        </p:txBody>
+      </p:sp>
+    </p:spTree>
+    <p:extLst>
+      <p:ext uri="{BB962C8B-B14F-4D97-AF65-F5344CB8AC3E}">
+        <p14:creationId xmlns:p14="http://schemas.microsoft.com/office/powerpoint/2010/main" val="1514584747"/>
+      </p:ext>
+    </p:extLst>
+  </p:cSld>
+  <p:clrMapOvr>
+    <a:masterClrMapping/>
+  </p:clrMapOvr>
+</p:notes>
+</file>
+
+<file path=ppt/notesSlides/notesSlide17.xml><?xml version="1.0" encoding="utf-8"?>
+<p:notes xmlns:a="http://schemas.openxmlformats.org/drawingml/2006/main" xmlns:r="http://schemas.openxmlformats.org/officeDocument/2006/relationships" xmlns:p="http://schemas.openxmlformats.org/presentationml/2006/main">
+  <p:cSld>
+    <p:spTree>
+      <p:nvGrpSpPr>
+        <p:cNvPr id="1" name="">
+          <a:extLst>
+            <a:ext uri="{FF2B5EF4-FFF2-40B4-BE49-F238E27FC236}">
               <a16:creationId xmlns:a16="http://schemas.microsoft.com/office/drawing/2014/main" id="{0EE32FD1-D8C5-A304-F941-019FEB5BA5B6}"/>
             </a:ext>
           </a:extLst>
@@ -32825,7 +32934,7 @@
           <a:p>
             <a:fld id="{EE000EEB-8338-48D7-8EE8-EE0082EF7602}" type="slidenum">
               <a:rPr lang="en-US" smtClean="0"/>
-              <a:t>16</a:t>
+              <a:t>17</a:t>
             </a:fld>
             <a:endParaRPr lang="en-US" dirty="0"/>
           </a:p>
@@ -32844,7 +32953,7 @@
 </p:notes>
 </file>
 
-<file path=ppt/notesSlides/notesSlide17.xml><?xml version="1.0" encoding="utf-8"?>
+<file path=ppt/notesSlides/notesSlide18.xml><?xml version="1.0" encoding="utf-8"?>
 <p:notes xmlns:a="http://schemas.openxmlformats.org/drawingml/2006/main" xmlns:r="http://schemas.openxmlformats.org/officeDocument/2006/relationships" xmlns:p="http://schemas.openxmlformats.org/presentationml/2006/main">
   <p:cSld>
     <p:spTree>
@@ -32933,7 +33042,7 @@
           <a:p>
             <a:fld id="{EE000EEB-8338-48D7-8EE8-EE0082EF7602}" type="slidenum">
               <a:rPr lang="en-US" smtClean="0"/>
-              <a:t>17</a:t>
+              <a:t>18</a:t>
             </a:fld>
             <a:endParaRPr lang="en-US" dirty="0"/>
           </a:p>
@@ -32952,7 +33061,7 @@
 </p:notes>
 </file>
 
-<file path=ppt/notesSlides/notesSlide18.xml><?xml version="1.0" encoding="utf-8"?>
+<file path=ppt/notesSlides/notesSlide19.xml><?xml version="1.0" encoding="utf-8"?>
 <p:notes xmlns:a="http://schemas.openxmlformats.org/drawingml/2006/main" xmlns:r="http://schemas.openxmlformats.org/officeDocument/2006/relationships" xmlns:p="http://schemas.openxmlformats.org/presentationml/2006/main">
   <p:cSld>
     <p:spTree>
@@ -33041,7 +33150,7 @@
           <a:p>
             <a:fld id="{EE000EEB-8338-48D7-8EE8-EE0082EF7602}" type="slidenum">
               <a:rPr lang="en-US" smtClean="0"/>
-              <a:t>18</a:t>
+              <a:t>19</a:t>
             </a:fld>
             <a:endParaRPr lang="en-US" dirty="0"/>
           </a:p>
@@ -43545,21 +43654,20 @@
         </p:nvSpPr>
         <p:spPr>
           <a:xfrm>
-            <a:off x="6698088" y="3909848"/>
-            <a:ext cx="5207153" cy="1266497"/>
+            <a:off x="7360981" y="3002882"/>
+            <a:ext cx="4521770" cy="1931975"/>
           </a:xfrm>
         </p:spPr>
         <p:txBody>
           <a:bodyPr>
-            <a:normAutofit fontScale="92500"/>
+            <a:normAutofit/>
           </a:bodyPr>
           <a:lstStyle/>
           <a:p>
             <a:r>
               <a:rPr lang="en-US" altLang="zh-CN" sz="4400" b="1" dirty="0"/>
-              <a:t>Installing Next.js</a:t>
+              <a:t>9. Installing Next.js – 9.1</a:t>
             </a:r>
-            <a:endParaRPr lang="en-US" sz="4400" b="1" dirty="0"/>
           </a:p>
         </p:txBody>
       </p:sp>
@@ -43608,6 +43716,109 @@
       </p:pic>
       <p:sp>
         <p:nvSpPr>
+          <p:cNvPr id="10" name="TextBox 9">
+            <a:extLst>
+              <a:ext uri="{FF2B5EF4-FFF2-40B4-BE49-F238E27FC236}">
+                <a16:creationId xmlns:a16="http://schemas.microsoft.com/office/drawing/2014/main" id="{72C59635-C706-E5A2-11C0-5D5395221714}"/>
+              </a:ext>
+            </a:extLst>
+          </p:cNvPr>
+          <p:cNvSpPr txBox="1"/>
+          <p:nvPr/>
+        </p:nvSpPr>
+        <p:spPr>
+          <a:xfrm>
+            <a:off x="123014" y="6189114"/>
+            <a:ext cx="2706045" cy="523220"/>
+          </a:xfrm>
+          <a:prstGeom prst="rect">
+            <a:avLst/>
+          </a:prstGeom>
+        </p:spPr>
+        <p:style>
+          <a:lnRef idx="0">
+            <a:schemeClr val="accent4"/>
+          </a:lnRef>
+          <a:fillRef idx="3">
+            <a:schemeClr val="accent4"/>
+          </a:fillRef>
+          <a:effectRef idx="3">
+            <a:schemeClr val="accent4"/>
+          </a:effectRef>
+          <a:fontRef idx="minor">
+            <a:schemeClr val="lt1"/>
+          </a:fontRef>
+        </p:style>
+        <p:txBody>
+          <a:bodyPr wrap="square" rtlCol="0" anchor="ctr">
+            <a:spAutoFit/>
+          </a:bodyPr>
+          <a:lstStyle/>
+          <a:p>
+            <a:pPr algn="ctr"/>
+            <a:r>
+              <a:rPr lang="en-US" sz="2800" dirty="0"/>
+              <a:t>Learn Next.js</a:t>
+            </a:r>
+          </a:p>
+        </p:txBody>
+      </p:sp>
+      <p:pic>
+        <p:nvPicPr>
+          <p:cNvPr id="8" name="Picture 7" descr="A diagram of a software development process&#10;&#10;AI-generated content may be incorrect.">
+            <a:extLst>
+              <a:ext uri="{FF2B5EF4-FFF2-40B4-BE49-F238E27FC236}">
+                <a16:creationId xmlns:a16="http://schemas.microsoft.com/office/drawing/2014/main" id="{F9A9B332-1FD1-17EA-B5CE-F9F1789C4A35}"/>
+              </a:ext>
+            </a:extLst>
+          </p:cNvPr>
+          <p:cNvPicPr>
+            <a:picLocks noChangeAspect="1"/>
+          </p:cNvPicPr>
+          <p:nvPr/>
+        </p:nvPicPr>
+        <p:blipFill>
+          <a:blip r:embed="rId5"/>
+          <a:stretch>
+            <a:fillRect/>
+          </a:stretch>
+        </p:blipFill>
+        <p:spPr>
+          <a:xfrm>
+            <a:off x="322790" y="1681655"/>
+            <a:ext cx="6831015" cy="4628912"/>
+          </a:xfrm>
+          <a:prstGeom prst="roundRect">
+            <a:avLst>
+              <a:gd name="adj" fmla="val 16667"/>
+            </a:avLst>
+          </a:prstGeom>
+          <a:ln>
+            <a:noFill/>
+          </a:ln>
+          <a:effectLst>
+            <a:outerShdw blurRad="152400" dist="12000" dir="900000" sy="98000" kx="110000" ky="200000" algn="tl" rotWithShape="0">
+              <a:srgbClr val="000000">
+                <a:alpha val="30000"/>
+              </a:srgbClr>
+            </a:outerShdw>
+          </a:effectLst>
+          <a:scene3d>
+            <a:camera prst="perspectiveRelaxed">
+              <a:rot lat="19800000" lon="1200000" rev="20820000"/>
+            </a:camera>
+            <a:lightRig rig="threePt" dir="t"/>
+          </a:scene3d>
+          <a:sp3d contourW="6350" prstMaterial="matte">
+            <a:bevelT w="101600" h="101600"/>
+            <a:contourClr>
+              <a:srgbClr val="969696"/>
+            </a:contourClr>
+          </a:sp3d>
+        </p:spPr>
+      </p:pic>
+      <p:sp>
+        <p:nvSpPr>
           <p:cNvPr id="7" name="Subtitle 2">
             <a:extLst>
               <a:ext uri="{FF2B5EF4-FFF2-40B4-BE49-F238E27FC236}">
@@ -43622,7 +43833,7 @@
         </p:nvSpPr>
         <p:spPr>
           <a:xfrm>
-            <a:off x="6755257" y="2199289"/>
+            <a:off x="5051736" y="2335061"/>
             <a:ext cx="2102069" cy="1447801"/>
           </a:xfrm>
           <a:prstGeom prst="rect">
@@ -43858,12 +44069,164 @@
           </a:p>
         </p:txBody>
       </p:sp>
+    </p:spTree>
+    <p:extLst>
+      <p:ext uri="{BB962C8B-B14F-4D97-AF65-F5344CB8AC3E}">
+        <p14:creationId xmlns:p14="http://schemas.microsoft.com/office/powerpoint/2010/main" val="4264989196"/>
+      </p:ext>
+    </p:extLst>
+  </p:cSld>
+  <p:clrMapOvr>
+    <a:masterClrMapping/>
+  </p:clrMapOvr>
+</p:sld>
+</file>
+
+<file path=ppt/slides/slide16.xml><?xml version="1.0" encoding="utf-8"?>
+<p:sld xmlns:a="http://schemas.openxmlformats.org/drawingml/2006/main" xmlns:r="http://schemas.openxmlformats.org/officeDocument/2006/relationships" xmlns:p="http://schemas.openxmlformats.org/presentationml/2006/main">
+  <p:cSld>
+    <p:spTree>
+      <p:nvGrpSpPr>
+        <p:cNvPr id="1" name="">
+          <a:extLst>
+            <a:ext uri="{FF2B5EF4-FFF2-40B4-BE49-F238E27FC236}">
+              <a16:creationId xmlns:a16="http://schemas.microsoft.com/office/drawing/2014/main" id="{8347281A-9AAE-5A6B-A08C-D3457455B6B0}"/>
+            </a:ext>
+          </a:extLst>
+        </p:cNvPr>
+        <p:cNvGrpSpPr/>
+        <p:nvPr/>
+      </p:nvGrpSpPr>
+      <p:grpSpPr>
+        <a:xfrm>
+          <a:off x="0" y="0"/>
+          <a:ext cx="0" cy="0"/>
+          <a:chOff x="0" y="0"/>
+          <a:chExt cx="0" cy="0"/>
+        </a:xfrm>
+      </p:grpSpPr>
       <p:pic>
         <p:nvPicPr>
-          <p:cNvPr id="9" name="Picture 8" descr="A diagram of a program&#10;&#10;AI-generated content may be incorrect.">
+          <p:cNvPr id="5" name="Picture 4" descr="chain links">
             <a:extLst>
               <a:ext uri="{FF2B5EF4-FFF2-40B4-BE49-F238E27FC236}">
-                <a16:creationId xmlns:a16="http://schemas.microsoft.com/office/drawing/2014/main" id="{F754BA4B-CCB8-8621-5569-789A9EE04B73}"/>
+                <a16:creationId xmlns:a16="http://schemas.microsoft.com/office/drawing/2014/main" id="{94CA728F-1AE7-58D7-4B59-FAD0CFA073EE}"/>
+              </a:ext>
+            </a:extLst>
+          </p:cNvPr>
+          <p:cNvPicPr>
+            <a:picLocks noChangeAspect="1"/>
+          </p:cNvPicPr>
+          <p:nvPr/>
+        </p:nvPicPr>
+        <p:blipFill rotWithShape="1">
+          <a:blip r:embed="rId3">
+            <a:duotone>
+              <a:prstClr val="black"/>
+              <a:schemeClr val="accent5">
+                <a:tint val="45000"/>
+                <a:satMod val="400000"/>
+              </a:schemeClr>
+            </a:duotone>
+            <a:alphaModFix amt="25000"/>
+          </a:blip>
+          <a:srcRect t="23391" r="9091"/>
+          <a:stretch/>
+        </p:blipFill>
+        <p:spPr>
+          <a:xfrm>
+            <a:off x="0" y="10"/>
+            <a:ext cx="12191980" cy="6857990"/>
+          </a:xfrm>
+          <a:prstGeom prst="rect">
+            <a:avLst/>
+          </a:prstGeom>
+        </p:spPr>
+      </p:pic>
+      <p:sp>
+        <p:nvSpPr>
+          <p:cNvPr id="2" name="Title 1">
+            <a:extLst>
+              <a:ext uri="{FF2B5EF4-FFF2-40B4-BE49-F238E27FC236}">
+                <a16:creationId xmlns:a16="http://schemas.microsoft.com/office/drawing/2014/main" id="{5393B5B6-1081-2C3B-BA7A-019E62DC61E2}"/>
+              </a:ext>
+            </a:extLst>
+          </p:cNvPr>
+          <p:cNvSpPr>
+            <a:spLocks noGrp="1"/>
+          </p:cNvSpPr>
+          <p:nvPr>
+            <p:ph type="ctrTitle"/>
+          </p:nvPr>
+        </p:nvSpPr>
+        <p:spPr>
+          <a:xfrm>
+            <a:off x="4474323" y="961696"/>
+            <a:ext cx="7602064" cy="1266497"/>
+          </a:xfrm>
+        </p:spPr>
+        <p:txBody>
+          <a:bodyPr anchor="ctr">
+            <a:normAutofit/>
+          </a:bodyPr>
+          <a:lstStyle/>
+          <a:p>
+            <a:r>
+              <a:rPr lang="en-US" sz="6000" b="1" dirty="0"/>
+              <a:t>REACT Foundations</a:t>
+            </a:r>
+            <a:endParaRPr lang="ru-RU" sz="6000" b="1" dirty="0"/>
+          </a:p>
+        </p:txBody>
+      </p:sp>
+      <p:sp>
+        <p:nvSpPr>
+          <p:cNvPr id="3" name="Subtitle 2">
+            <a:extLst>
+              <a:ext uri="{FF2B5EF4-FFF2-40B4-BE49-F238E27FC236}">
+                <a16:creationId xmlns:a16="http://schemas.microsoft.com/office/drawing/2014/main" id="{CFCA44D4-0616-0F28-3FAB-853D798F3E04}"/>
+              </a:ext>
+            </a:extLst>
+          </p:cNvPr>
+          <p:cNvSpPr>
+            <a:spLocks noGrp="1"/>
+          </p:cNvSpPr>
+          <p:nvPr>
+            <p:ph type="subTitle" idx="1"/>
+          </p:nvPr>
+        </p:nvSpPr>
+        <p:spPr>
+          <a:xfrm>
+            <a:off x="7360981" y="3002882"/>
+            <a:ext cx="4521770" cy="3186232"/>
+          </a:xfrm>
+        </p:spPr>
+        <p:txBody>
+          <a:bodyPr>
+            <a:normAutofit fontScale="92500" lnSpcReduction="10000"/>
+          </a:bodyPr>
+          <a:lstStyle/>
+          <a:p>
+            <a:r>
+              <a:rPr lang="en-US" altLang="zh-CN" sz="4400" b="1" dirty="0"/>
+              <a:t>9. Installing Next.js</a:t>
+            </a:r>
+          </a:p>
+          <a:p>
+            <a:r>
+              <a:rPr lang="en-US" altLang="zh-CN" sz="4100" b="1" dirty="0"/>
+              <a:t>– 9.2 Creating first Page and Run it</a:t>
+            </a:r>
+            <a:endParaRPr lang="en-US" altLang="zh-CN" sz="4400" b="1" dirty="0"/>
+          </a:p>
+        </p:txBody>
+      </p:sp>
+      <p:pic>
+        <p:nvPicPr>
+          <p:cNvPr id="6" name="Picture 5" descr="A group of cubes with a symbol in center&#10;&#10;AI-generated content may be incorrect.">
+            <a:extLst>
+              <a:ext uri="{FF2B5EF4-FFF2-40B4-BE49-F238E27FC236}">
+                <a16:creationId xmlns:a16="http://schemas.microsoft.com/office/drawing/2014/main" id="{26642BA9-5CAD-8381-9BFC-DA982F33F3B9}"/>
               </a:ext>
             </a:extLst>
           </p:cNvPr>
@@ -43873,43 +44236,32 @@
           <p:nvPr/>
         </p:nvPicPr>
         <p:blipFill>
-          <a:blip r:embed="rId5"/>
+          <a:blip r:embed="rId4"/>
           <a:stretch>
             <a:fillRect/>
           </a:stretch>
         </p:blipFill>
         <p:spPr>
           <a:xfrm>
-            <a:off x="440945" y="1594944"/>
-            <a:ext cx="6190501" cy="4980131"/>
+            <a:off x="115614" y="126986"/>
+            <a:ext cx="3965294" cy="3520104"/>
           </a:xfrm>
           <a:prstGeom prst="roundRect">
             <a:avLst>
-              <a:gd name="adj" fmla="val 16667"/>
+              <a:gd name="adj" fmla="val 8594"/>
             </a:avLst>
           </a:prstGeom>
+          <a:solidFill>
+            <a:srgbClr val="FFFFFF">
+              <a:shade val="85000"/>
+            </a:srgbClr>
+          </a:solidFill>
           <a:ln>
             <a:noFill/>
           </a:ln>
           <a:effectLst>
-            <a:outerShdw blurRad="152400" dist="12000" dir="900000" sy="98000" kx="110000" ky="200000" algn="tl" rotWithShape="0">
-              <a:srgbClr val="000000">
-                <a:alpha val="30000"/>
-              </a:srgbClr>
-            </a:outerShdw>
+            <a:reflection blurRad="12700" stA="38000" endPos="28000" dist="5000" dir="5400000" sy="-100000" algn="bl" rotWithShape="0"/>
           </a:effectLst>
-          <a:scene3d>
-            <a:camera prst="perspectiveRelaxed">
-              <a:rot lat="19800000" lon="1200000" rev="20820000"/>
-            </a:camera>
-            <a:lightRig rig="threePt" dir="t"/>
-          </a:scene3d>
-          <a:sp3d contourW="6350" prstMaterial="matte">
-            <a:bevelT w="101600" h="101600"/>
-            <a:contourClr>
-              <a:srgbClr val="969696"/>
-            </a:contourClr>
-          </a:sp3d>
         </p:spPr>
       </p:pic>
       <p:sp>
@@ -43917,7 +44269,7 @@
           <p:cNvPr id="10" name="TextBox 9">
             <a:extLst>
               <a:ext uri="{FF2B5EF4-FFF2-40B4-BE49-F238E27FC236}">
-                <a16:creationId xmlns:a16="http://schemas.microsoft.com/office/drawing/2014/main" id="{72C59635-C706-E5A2-11C0-5D5395221714}"/>
+                <a16:creationId xmlns:a16="http://schemas.microsoft.com/office/drawing/2014/main" id="{7CB09E3C-18AA-845B-2A23-CBCCEC37D529}"/>
               </a:ext>
             </a:extLst>
           </p:cNvPr>
@@ -43961,10 +44313,316 @@
           </a:p>
         </p:txBody>
       </p:sp>
+      <p:pic>
+        <p:nvPicPr>
+          <p:cNvPr id="9" name="Picture 8" descr="A diagram of a software development process&#10;&#10;AI-generated content may be incorrect.">
+            <a:extLst>
+              <a:ext uri="{FF2B5EF4-FFF2-40B4-BE49-F238E27FC236}">
+                <a16:creationId xmlns:a16="http://schemas.microsoft.com/office/drawing/2014/main" id="{E4227B6A-1ED0-1E69-B4B5-9052D80B624C}"/>
+              </a:ext>
+            </a:extLst>
+          </p:cNvPr>
+          <p:cNvPicPr>
+            <a:picLocks noChangeAspect="1"/>
+          </p:cNvPicPr>
+          <p:nvPr/>
+        </p:nvPicPr>
+        <p:blipFill>
+          <a:blip r:embed="rId5"/>
+          <a:stretch>
+            <a:fillRect/>
+          </a:stretch>
+        </p:blipFill>
+        <p:spPr>
+          <a:xfrm>
+            <a:off x="184020" y="1569729"/>
+            <a:ext cx="7061368" cy="4798279"/>
+          </a:xfrm>
+          <a:prstGeom prst="roundRect">
+            <a:avLst>
+              <a:gd name="adj" fmla="val 16667"/>
+            </a:avLst>
+          </a:prstGeom>
+          <a:ln>
+            <a:noFill/>
+          </a:ln>
+          <a:effectLst>
+            <a:outerShdw blurRad="152400" dist="12000" dir="900000" sy="98000" kx="110000" ky="200000" algn="tl" rotWithShape="0">
+              <a:srgbClr val="000000">
+                <a:alpha val="30000"/>
+              </a:srgbClr>
+            </a:outerShdw>
+          </a:effectLst>
+          <a:scene3d>
+            <a:camera prst="perspectiveRelaxed">
+              <a:rot lat="19800000" lon="1200000" rev="20820000"/>
+            </a:camera>
+            <a:lightRig rig="threePt" dir="t"/>
+          </a:scene3d>
+          <a:sp3d contourW="6350" prstMaterial="matte">
+            <a:bevelT w="101600" h="101600"/>
+            <a:contourClr>
+              <a:srgbClr val="969696"/>
+            </a:contourClr>
+          </a:sp3d>
+        </p:spPr>
+      </p:pic>
+      <p:sp>
+        <p:nvSpPr>
+          <p:cNvPr id="7" name="Subtitle 2">
+            <a:extLst>
+              <a:ext uri="{FF2B5EF4-FFF2-40B4-BE49-F238E27FC236}">
+                <a16:creationId xmlns:a16="http://schemas.microsoft.com/office/drawing/2014/main" id="{5165F319-1308-B2C7-7CC4-1E7CE051A711}"/>
+              </a:ext>
+            </a:extLst>
+          </p:cNvPr>
+          <p:cNvSpPr txBox="1">
+            <a:spLocks/>
+          </p:cNvSpPr>
+          <p:nvPr/>
+        </p:nvSpPr>
+        <p:spPr>
+          <a:xfrm>
+            <a:off x="5051736" y="2335061"/>
+            <a:ext cx="2102069" cy="1447801"/>
+          </a:xfrm>
+          <a:prstGeom prst="rect">
+            <a:avLst/>
+          </a:prstGeom>
+        </p:spPr>
+        <p:txBody>
+          <a:bodyPr vert="horz" lIns="91440" tIns="45720" rIns="91440" bIns="45720" rtlCol="0" anchor="ctr">
+            <a:normAutofit fontScale="92500" lnSpcReduction="20000"/>
+          </a:bodyPr>
+          <a:lstStyle>
+            <a:lvl1pPr marL="0" indent="0" algn="l" defTabSz="457200" rtl="0" eaLnBrk="1" latinLnBrk="0" hangingPunct="1">
+              <a:spcBef>
+                <a:spcPts val="1000"/>
+              </a:spcBef>
+              <a:spcAft>
+                <a:spcPts val="0"/>
+              </a:spcAft>
+              <a:buClr>
+                <a:schemeClr val="accent1"/>
+              </a:buClr>
+              <a:buSzPct val="80000"/>
+              <a:buFont typeface="Wingdings 3" charset="2"/>
+              <a:buNone/>
+              <a:defRPr sz="2000" b="0" i="0" kern="1200" cap="all">
+                <a:solidFill>
+                  <a:schemeClr val="accent1"/>
+                </a:solidFill>
+                <a:latin typeface="+mj-lt"/>
+                <a:ea typeface="+mj-ea"/>
+                <a:cs typeface="+mj-cs"/>
+              </a:defRPr>
+            </a:lvl1pPr>
+            <a:lvl2pPr marL="457200" indent="0" algn="ctr" defTabSz="457200" rtl="0" eaLnBrk="1" latinLnBrk="0" hangingPunct="1">
+              <a:spcBef>
+                <a:spcPts val="1000"/>
+              </a:spcBef>
+              <a:spcAft>
+                <a:spcPts val="0"/>
+              </a:spcAft>
+              <a:buClr>
+                <a:schemeClr val="accent1"/>
+              </a:buClr>
+              <a:buSzPct val="80000"/>
+              <a:buFont typeface="Wingdings 3" charset="2"/>
+              <a:buNone/>
+              <a:defRPr sz="1800" b="0" i="0" kern="1200">
+                <a:solidFill>
+                  <a:schemeClr val="tx1">
+                    <a:tint val="75000"/>
+                  </a:schemeClr>
+                </a:solidFill>
+                <a:latin typeface="+mj-lt"/>
+                <a:ea typeface="+mj-ea"/>
+                <a:cs typeface="+mj-cs"/>
+              </a:defRPr>
+            </a:lvl2pPr>
+            <a:lvl3pPr marL="914400" indent="0" algn="ctr" defTabSz="457200" rtl="0" eaLnBrk="1" latinLnBrk="0" hangingPunct="1">
+              <a:spcBef>
+                <a:spcPts val="1000"/>
+              </a:spcBef>
+              <a:spcAft>
+                <a:spcPts val="0"/>
+              </a:spcAft>
+              <a:buClr>
+                <a:schemeClr val="accent1"/>
+              </a:buClr>
+              <a:buSzPct val="80000"/>
+              <a:buFont typeface="Wingdings 3" charset="2"/>
+              <a:buNone/>
+              <a:defRPr sz="1600" b="0" i="0" kern="1200">
+                <a:solidFill>
+                  <a:schemeClr val="tx1">
+                    <a:tint val="75000"/>
+                  </a:schemeClr>
+                </a:solidFill>
+                <a:latin typeface="+mj-lt"/>
+                <a:ea typeface="+mj-ea"/>
+                <a:cs typeface="+mj-cs"/>
+              </a:defRPr>
+            </a:lvl3pPr>
+            <a:lvl4pPr marL="1371600" indent="0" algn="ctr" defTabSz="457200" rtl="0" eaLnBrk="1" latinLnBrk="0" hangingPunct="1">
+              <a:spcBef>
+                <a:spcPts val="1000"/>
+              </a:spcBef>
+              <a:spcAft>
+                <a:spcPts val="0"/>
+              </a:spcAft>
+              <a:buClr>
+                <a:schemeClr val="accent1"/>
+              </a:buClr>
+              <a:buSzPct val="80000"/>
+              <a:buFont typeface="Wingdings 3" charset="2"/>
+              <a:buNone/>
+              <a:defRPr sz="1400" b="0" i="0" kern="1200">
+                <a:solidFill>
+                  <a:schemeClr val="tx1">
+                    <a:tint val="75000"/>
+                  </a:schemeClr>
+                </a:solidFill>
+                <a:latin typeface="+mj-lt"/>
+                <a:ea typeface="+mj-ea"/>
+                <a:cs typeface="+mj-cs"/>
+              </a:defRPr>
+            </a:lvl4pPr>
+            <a:lvl5pPr marL="1828800" indent="0" algn="ctr" defTabSz="457200" rtl="0" eaLnBrk="1" latinLnBrk="0" hangingPunct="1">
+              <a:spcBef>
+                <a:spcPts val="1000"/>
+              </a:spcBef>
+              <a:spcAft>
+                <a:spcPts val="0"/>
+              </a:spcAft>
+              <a:buClr>
+                <a:schemeClr val="accent1"/>
+              </a:buClr>
+              <a:buSzPct val="80000"/>
+              <a:buFont typeface="Wingdings 3" charset="2"/>
+              <a:buNone/>
+              <a:defRPr sz="1400" b="0" i="0" kern="1200">
+                <a:solidFill>
+                  <a:schemeClr val="tx1">
+                    <a:tint val="75000"/>
+                  </a:schemeClr>
+                </a:solidFill>
+                <a:latin typeface="+mj-lt"/>
+                <a:ea typeface="+mj-ea"/>
+                <a:cs typeface="+mj-cs"/>
+              </a:defRPr>
+            </a:lvl5pPr>
+            <a:lvl6pPr marL="2286000" indent="0" algn="ctr" defTabSz="457200" rtl="0" eaLnBrk="1" latinLnBrk="0" hangingPunct="1">
+              <a:spcBef>
+                <a:spcPts val="1000"/>
+              </a:spcBef>
+              <a:spcAft>
+                <a:spcPts val="0"/>
+              </a:spcAft>
+              <a:buClr>
+                <a:schemeClr val="accent1"/>
+              </a:buClr>
+              <a:buSzPct val="80000"/>
+              <a:buFont typeface="Wingdings 3" charset="2"/>
+              <a:buNone/>
+              <a:defRPr sz="1400" b="0" i="0" kern="1200">
+                <a:solidFill>
+                  <a:schemeClr val="tx1">
+                    <a:tint val="75000"/>
+                  </a:schemeClr>
+                </a:solidFill>
+                <a:latin typeface="+mj-lt"/>
+                <a:ea typeface="+mj-ea"/>
+                <a:cs typeface="+mj-cs"/>
+              </a:defRPr>
+            </a:lvl6pPr>
+            <a:lvl7pPr marL="2743200" indent="0" algn="ctr" defTabSz="457200" rtl="0" eaLnBrk="1" latinLnBrk="0" hangingPunct="1">
+              <a:spcBef>
+                <a:spcPts val="1000"/>
+              </a:spcBef>
+              <a:spcAft>
+                <a:spcPts val="0"/>
+              </a:spcAft>
+              <a:buClr>
+                <a:schemeClr val="accent1"/>
+              </a:buClr>
+              <a:buSzPct val="80000"/>
+              <a:buFont typeface="Wingdings 3" charset="2"/>
+              <a:buNone/>
+              <a:defRPr sz="1400" b="0" i="0" kern="1200">
+                <a:solidFill>
+                  <a:schemeClr val="tx1">
+                    <a:tint val="75000"/>
+                  </a:schemeClr>
+                </a:solidFill>
+                <a:latin typeface="+mj-lt"/>
+                <a:ea typeface="+mj-ea"/>
+                <a:cs typeface="+mj-cs"/>
+              </a:defRPr>
+            </a:lvl7pPr>
+            <a:lvl8pPr marL="3200400" indent="0" algn="ctr" defTabSz="457200" rtl="0" eaLnBrk="1" latinLnBrk="0" hangingPunct="1">
+              <a:spcBef>
+                <a:spcPts val="1000"/>
+              </a:spcBef>
+              <a:spcAft>
+                <a:spcPts val="0"/>
+              </a:spcAft>
+              <a:buClr>
+                <a:schemeClr val="accent1"/>
+              </a:buClr>
+              <a:buSzPct val="80000"/>
+              <a:buFont typeface="Wingdings 3" charset="2"/>
+              <a:buNone/>
+              <a:defRPr sz="1400" b="0" i="0" kern="1200">
+                <a:solidFill>
+                  <a:schemeClr val="tx1">
+                    <a:tint val="75000"/>
+                  </a:schemeClr>
+                </a:solidFill>
+                <a:latin typeface="+mj-lt"/>
+                <a:ea typeface="+mj-ea"/>
+                <a:cs typeface="+mj-cs"/>
+              </a:defRPr>
+            </a:lvl8pPr>
+            <a:lvl9pPr marL="3657600" indent="0" algn="ctr" defTabSz="457200" rtl="0" eaLnBrk="1" latinLnBrk="0" hangingPunct="1">
+              <a:spcBef>
+                <a:spcPts val="1000"/>
+              </a:spcBef>
+              <a:spcAft>
+                <a:spcPts val="0"/>
+              </a:spcAft>
+              <a:buClr>
+                <a:schemeClr val="accent1"/>
+              </a:buClr>
+              <a:buSzPct val="80000"/>
+              <a:buFont typeface="Wingdings 3" charset="2"/>
+              <a:buNone/>
+              <a:defRPr sz="1400" b="0" i="0" kern="1200">
+                <a:solidFill>
+                  <a:schemeClr val="tx1">
+                    <a:tint val="75000"/>
+                  </a:schemeClr>
+                </a:solidFill>
+                <a:latin typeface="+mj-lt"/>
+                <a:ea typeface="+mj-ea"/>
+                <a:cs typeface="+mj-cs"/>
+              </a:defRPr>
+            </a:lvl9pPr>
+          </a:lstStyle>
+          <a:p>
+            <a:pPr algn="ctr"/>
+            <a:r>
+              <a:rPr lang="en-US" sz="11500" b="1" dirty="0"/>
+              <a:t>15</a:t>
+            </a:r>
+          </a:p>
+        </p:txBody>
+      </p:sp>
     </p:spTree>
     <p:extLst>
       <p:ext uri="{BB962C8B-B14F-4D97-AF65-F5344CB8AC3E}">
-        <p14:creationId xmlns:p14="http://schemas.microsoft.com/office/powerpoint/2010/main" val="4264989196"/>
+        <p14:creationId xmlns:p14="http://schemas.microsoft.com/office/powerpoint/2010/main" val="3836041264"/>
       </p:ext>
     </p:extLst>
   </p:cSld>
@@ -43974,7 +44632,7 @@
 </p:sld>
 </file>
 
-<file path=ppt/slides/slide16.xml><?xml version="1.0" encoding="utf-8"?>
+<file path=ppt/slides/slide17.xml><?xml version="1.0" encoding="utf-8"?>
 <p:sld xmlns:a="http://schemas.openxmlformats.org/drawingml/2006/main" xmlns:r="http://schemas.openxmlformats.org/officeDocument/2006/relationships" xmlns:p="http://schemas.openxmlformats.org/presentationml/2006/main">
   <p:cSld>
     <p:spTree>
@@ -44397,7 +45055,7 @@
             <a:pPr algn="ctr"/>
             <a:r>
               <a:rPr lang="en-US" sz="11500" b="1" dirty="0"/>
-              <a:t>15</a:t>
+              <a:t>16</a:t>
             </a:r>
           </a:p>
         </p:txBody>
@@ -44518,7 +45176,7 @@
 </p:sld>
 </file>
 
-<file path=ppt/slides/slide17.xml><?xml version="1.0" encoding="utf-8"?>
+<file path=ppt/slides/slide18.xml><?xml version="1.0" encoding="utf-8"?>
 <p:sld xmlns:a="http://schemas.openxmlformats.org/drawingml/2006/main" xmlns:r="http://schemas.openxmlformats.org/officeDocument/2006/relationships" xmlns:p="http://schemas.openxmlformats.org/presentationml/2006/main">
   <p:cSld>
     <p:spTree>
@@ -44740,7 +45398,7 @@
 </p:sld>
 </file>
 
-<file path=ppt/slides/slide18.xml><?xml version="1.0" encoding="utf-8"?>
+<file path=ppt/slides/slide19.xml><?xml version="1.0" encoding="utf-8"?>
 <p:sld xmlns:a="http://schemas.openxmlformats.org/drawingml/2006/main" xmlns:r="http://schemas.openxmlformats.org/officeDocument/2006/relationships" xmlns:p="http://schemas.openxmlformats.org/presentationml/2006/main">
   <p:cSld>
     <p:spTree>

--- a/learn_nextjs/1_React-Foundation/React_Foundations.pptx
+++ b/learn_nextjs/1_React-Foundation/React_Foundations.pptx
@@ -5,10 +5,10 @@
     <p:sldMasterId id="2147483648" r:id="rId4"/>
   </p:sldMasterIdLst>
   <p:notesMasterIdLst>
-    <p:notesMasterId r:id="rId24"/>
+    <p:notesMasterId r:id="rId25"/>
   </p:notesMasterIdLst>
   <p:handoutMasterIdLst>
-    <p:handoutMasterId r:id="rId25"/>
+    <p:handoutMasterId r:id="rId26"/>
   </p:handoutMasterIdLst>
   <p:sldIdLst>
     <p:sldId id="256" r:id="rId5"/>
@@ -28,8 +28,9 @@
     <p:sldId id="265" r:id="rId19"/>
     <p:sldId id="275" r:id="rId20"/>
     <p:sldId id="266" r:id="rId21"/>
-    <p:sldId id="267" r:id="rId22"/>
-    <p:sldId id="270" r:id="rId23"/>
+    <p:sldId id="276" r:id="rId22"/>
+    <p:sldId id="267" r:id="rId23"/>
+    <p:sldId id="270" r:id="rId24"/>
   </p:sldIdLst>
   <p:sldSz cx="12192000" cy="6858000"/>
   <p:notesSz cx="6858000" cy="9144000"/>
@@ -899,6 +900,753 @@
     <dgm:fillClrLst meth="repeat">
       <a:schemeClr val="accent3">
         <a:tint val="40000"/>
+      </a:schemeClr>
+    </dgm:fillClrLst>
+    <dgm:linClrLst meth="repeat">
+      <a:schemeClr val="lt1"/>
+    </dgm:linClrLst>
+    <dgm:effectClrLst/>
+    <dgm:txLinClrLst/>
+    <dgm:txFillClrLst meth="repeat">
+      <a:schemeClr val="dk1"/>
+    </dgm:txFillClrLst>
+    <dgm:txEffectClrLst/>
+  </dgm:styleLbl>
+  <dgm:styleLbl name="revTx">
+    <dgm:fillClrLst meth="repeat">
+      <a:schemeClr val="lt1">
+        <a:alpha val="0"/>
+      </a:schemeClr>
+    </dgm:fillClrLst>
+    <dgm:linClrLst meth="repeat">
+      <a:schemeClr val="dk1">
+        <a:alpha val="0"/>
+      </a:schemeClr>
+    </dgm:linClrLst>
+    <dgm:effectClrLst/>
+    <dgm:txLinClrLst/>
+    <dgm:txFillClrLst meth="repeat">
+      <a:schemeClr val="tx1"/>
+    </dgm:txFillClrLst>
+    <dgm:txEffectClrLst/>
+  </dgm:styleLbl>
+</dgm:colorsDef>
+</file>
+
+<file path=ppt/diagrams/colors10.xml><?xml version="1.0" encoding="utf-8"?>
+<dgm:colorsDef xmlns:dgm="http://schemas.openxmlformats.org/drawingml/2006/diagram" xmlns:a="http://schemas.openxmlformats.org/drawingml/2006/main" uniqueId="urn:microsoft.com/office/officeart/2005/8/colors/accent1_2">
+  <dgm:title val=""/>
+  <dgm:desc val=""/>
+  <dgm:catLst>
+    <dgm:cat type="accent1" pri="11200"/>
+  </dgm:catLst>
+  <dgm:styleLbl name="node0">
+    <dgm:fillClrLst meth="repeat">
+      <a:schemeClr val="accent1"/>
+    </dgm:fillClrLst>
+    <dgm:linClrLst meth="repeat">
+      <a:schemeClr val="lt1"/>
+    </dgm:linClrLst>
+    <dgm:effectClrLst/>
+    <dgm:txLinClrLst/>
+    <dgm:txFillClrLst/>
+    <dgm:txEffectClrLst/>
+  </dgm:styleLbl>
+  <dgm:styleLbl name="alignNode1">
+    <dgm:fillClrLst meth="repeat">
+      <a:schemeClr val="accent1"/>
+    </dgm:fillClrLst>
+    <dgm:linClrLst meth="repeat">
+      <a:schemeClr val="accent1"/>
+    </dgm:linClrLst>
+    <dgm:effectClrLst/>
+    <dgm:txLinClrLst/>
+    <dgm:txFillClrLst/>
+    <dgm:txEffectClrLst/>
+  </dgm:styleLbl>
+  <dgm:styleLbl name="node1">
+    <dgm:fillClrLst meth="repeat">
+      <a:schemeClr val="accent1"/>
+    </dgm:fillClrLst>
+    <dgm:linClrLst meth="repeat">
+      <a:schemeClr val="lt1"/>
+    </dgm:linClrLst>
+    <dgm:effectClrLst/>
+    <dgm:txLinClrLst/>
+    <dgm:txFillClrLst/>
+    <dgm:txEffectClrLst/>
+  </dgm:styleLbl>
+  <dgm:styleLbl name="lnNode1">
+    <dgm:fillClrLst meth="repeat">
+      <a:schemeClr val="accent1"/>
+    </dgm:fillClrLst>
+    <dgm:linClrLst meth="repeat">
+      <a:schemeClr val="lt1"/>
+    </dgm:linClrLst>
+    <dgm:effectClrLst/>
+    <dgm:txLinClrLst/>
+    <dgm:txFillClrLst/>
+    <dgm:txEffectClrLst/>
+  </dgm:styleLbl>
+  <dgm:styleLbl name="vennNode1">
+    <dgm:fillClrLst meth="repeat">
+      <a:schemeClr val="accent1">
+        <a:alpha val="50000"/>
+      </a:schemeClr>
+    </dgm:fillClrLst>
+    <dgm:linClrLst meth="repeat">
+      <a:schemeClr val="lt1"/>
+    </dgm:linClrLst>
+    <dgm:effectClrLst/>
+    <dgm:txLinClrLst/>
+    <dgm:txFillClrLst/>
+    <dgm:txEffectClrLst/>
+  </dgm:styleLbl>
+  <dgm:styleLbl name="node2">
+    <dgm:fillClrLst meth="repeat">
+      <a:schemeClr val="accent1"/>
+    </dgm:fillClrLst>
+    <dgm:linClrLst meth="repeat">
+      <a:schemeClr val="lt1"/>
+    </dgm:linClrLst>
+    <dgm:effectClrLst/>
+    <dgm:txLinClrLst/>
+    <dgm:txFillClrLst/>
+    <dgm:txEffectClrLst/>
+  </dgm:styleLbl>
+  <dgm:styleLbl name="node3">
+    <dgm:fillClrLst meth="repeat">
+      <a:schemeClr val="accent1"/>
+    </dgm:fillClrLst>
+    <dgm:linClrLst meth="repeat">
+      <a:schemeClr val="lt1"/>
+    </dgm:linClrLst>
+    <dgm:effectClrLst/>
+    <dgm:txLinClrLst/>
+    <dgm:txFillClrLst/>
+    <dgm:txEffectClrLst/>
+  </dgm:styleLbl>
+  <dgm:styleLbl name="node4">
+    <dgm:fillClrLst meth="repeat">
+      <a:schemeClr val="accent1"/>
+    </dgm:fillClrLst>
+    <dgm:linClrLst meth="repeat">
+      <a:schemeClr val="lt1"/>
+    </dgm:linClrLst>
+    <dgm:effectClrLst/>
+    <dgm:txLinClrLst/>
+    <dgm:txFillClrLst/>
+    <dgm:txEffectClrLst/>
+  </dgm:styleLbl>
+  <dgm:styleLbl name="fgImgPlace1">
+    <dgm:fillClrLst meth="repeat">
+      <a:schemeClr val="accent1">
+        <a:tint val="50000"/>
+      </a:schemeClr>
+    </dgm:fillClrLst>
+    <dgm:linClrLst meth="repeat">
+      <a:schemeClr val="lt1"/>
+    </dgm:linClrLst>
+    <dgm:effectClrLst/>
+    <dgm:txLinClrLst/>
+    <dgm:txFillClrLst meth="repeat">
+      <a:schemeClr val="lt1"/>
+    </dgm:txFillClrLst>
+    <dgm:txEffectClrLst/>
+  </dgm:styleLbl>
+  <dgm:styleLbl name="alignImgPlace1">
+    <dgm:fillClrLst meth="repeat">
+      <a:schemeClr val="accent1">
+        <a:tint val="50000"/>
+      </a:schemeClr>
+    </dgm:fillClrLst>
+    <dgm:linClrLst meth="repeat">
+      <a:schemeClr val="lt1"/>
+    </dgm:linClrLst>
+    <dgm:effectClrLst/>
+    <dgm:txLinClrLst/>
+    <dgm:txFillClrLst meth="repeat">
+      <a:schemeClr val="lt1"/>
+    </dgm:txFillClrLst>
+    <dgm:txEffectClrLst/>
+  </dgm:styleLbl>
+  <dgm:styleLbl name="bgImgPlace1">
+    <dgm:fillClrLst meth="repeat">
+      <a:schemeClr val="accent1">
+        <a:tint val="50000"/>
+      </a:schemeClr>
+    </dgm:fillClrLst>
+    <dgm:linClrLst meth="repeat">
+      <a:schemeClr val="lt1"/>
+    </dgm:linClrLst>
+    <dgm:effectClrLst/>
+    <dgm:txLinClrLst/>
+    <dgm:txFillClrLst meth="repeat">
+      <a:schemeClr val="lt1"/>
+    </dgm:txFillClrLst>
+    <dgm:txEffectClrLst/>
+  </dgm:styleLbl>
+  <dgm:styleLbl name="sibTrans2D1">
+    <dgm:fillClrLst meth="repeat">
+      <a:schemeClr val="accent1">
+        <a:tint val="60000"/>
+      </a:schemeClr>
+    </dgm:fillClrLst>
+    <dgm:linClrLst meth="repeat">
+      <a:schemeClr val="accent1">
+        <a:tint val="60000"/>
+      </a:schemeClr>
+    </dgm:linClrLst>
+    <dgm:effectClrLst/>
+    <dgm:txLinClrLst/>
+    <dgm:txFillClrLst/>
+    <dgm:txEffectClrLst/>
+  </dgm:styleLbl>
+  <dgm:styleLbl name="fgSibTrans2D1">
+    <dgm:fillClrLst meth="repeat">
+      <a:schemeClr val="accent1">
+        <a:tint val="60000"/>
+      </a:schemeClr>
+    </dgm:fillClrLst>
+    <dgm:linClrLst meth="repeat">
+      <a:schemeClr val="accent1">
+        <a:tint val="60000"/>
+      </a:schemeClr>
+    </dgm:linClrLst>
+    <dgm:effectClrLst/>
+    <dgm:txLinClrLst/>
+    <dgm:txFillClrLst/>
+    <dgm:txEffectClrLst/>
+  </dgm:styleLbl>
+  <dgm:styleLbl name="bgSibTrans2D1">
+    <dgm:fillClrLst meth="repeat">
+      <a:schemeClr val="accent1">
+        <a:tint val="60000"/>
+      </a:schemeClr>
+    </dgm:fillClrLst>
+    <dgm:linClrLst meth="repeat">
+      <a:schemeClr val="accent1">
+        <a:tint val="60000"/>
+      </a:schemeClr>
+    </dgm:linClrLst>
+    <dgm:effectClrLst/>
+    <dgm:txLinClrLst/>
+    <dgm:txFillClrLst/>
+    <dgm:txEffectClrLst/>
+  </dgm:styleLbl>
+  <dgm:styleLbl name="sibTrans1D1">
+    <dgm:fillClrLst meth="repeat">
+      <a:schemeClr val="accent1"/>
+    </dgm:fillClrLst>
+    <dgm:linClrLst meth="repeat">
+      <a:schemeClr val="accent1"/>
+    </dgm:linClrLst>
+    <dgm:effectClrLst/>
+    <dgm:txLinClrLst/>
+    <dgm:txFillClrLst meth="repeat">
+      <a:schemeClr val="tx1"/>
+    </dgm:txFillClrLst>
+    <dgm:txEffectClrLst/>
+  </dgm:styleLbl>
+  <dgm:styleLbl name="callout">
+    <dgm:fillClrLst meth="repeat">
+      <a:schemeClr val="accent1"/>
+    </dgm:fillClrLst>
+    <dgm:linClrLst meth="repeat">
+      <a:schemeClr val="accent1">
+        <a:tint val="50000"/>
+      </a:schemeClr>
+    </dgm:linClrLst>
+    <dgm:effectClrLst/>
+    <dgm:txLinClrLst/>
+    <dgm:txFillClrLst meth="repeat">
+      <a:schemeClr val="tx1"/>
+    </dgm:txFillClrLst>
+    <dgm:txEffectClrLst/>
+  </dgm:styleLbl>
+  <dgm:styleLbl name="asst0">
+    <dgm:fillClrLst meth="repeat">
+      <a:schemeClr val="accent1"/>
+    </dgm:fillClrLst>
+    <dgm:linClrLst meth="repeat">
+      <a:schemeClr val="lt1"/>
+    </dgm:linClrLst>
+    <dgm:effectClrLst/>
+    <dgm:txLinClrLst/>
+    <dgm:txFillClrLst/>
+    <dgm:txEffectClrLst/>
+  </dgm:styleLbl>
+  <dgm:styleLbl name="asst1">
+    <dgm:fillClrLst meth="repeat">
+      <a:schemeClr val="accent1"/>
+    </dgm:fillClrLst>
+    <dgm:linClrLst meth="repeat">
+      <a:schemeClr val="lt1"/>
+    </dgm:linClrLst>
+    <dgm:effectClrLst/>
+    <dgm:txLinClrLst/>
+    <dgm:txFillClrLst/>
+    <dgm:txEffectClrLst/>
+  </dgm:styleLbl>
+  <dgm:styleLbl name="asst2">
+    <dgm:fillClrLst meth="repeat">
+      <a:schemeClr val="accent1"/>
+    </dgm:fillClrLst>
+    <dgm:linClrLst meth="repeat">
+      <a:schemeClr val="lt1"/>
+    </dgm:linClrLst>
+    <dgm:effectClrLst/>
+    <dgm:txLinClrLst/>
+    <dgm:txFillClrLst/>
+    <dgm:txEffectClrLst/>
+  </dgm:styleLbl>
+  <dgm:styleLbl name="asst3">
+    <dgm:fillClrLst meth="repeat">
+      <a:schemeClr val="accent1"/>
+    </dgm:fillClrLst>
+    <dgm:linClrLst meth="repeat">
+      <a:schemeClr val="lt1"/>
+    </dgm:linClrLst>
+    <dgm:effectClrLst/>
+    <dgm:txLinClrLst/>
+    <dgm:txFillClrLst/>
+    <dgm:txEffectClrLst/>
+  </dgm:styleLbl>
+  <dgm:styleLbl name="asst4">
+    <dgm:fillClrLst meth="repeat">
+      <a:schemeClr val="accent1"/>
+    </dgm:fillClrLst>
+    <dgm:linClrLst meth="repeat">
+      <a:schemeClr val="lt1"/>
+    </dgm:linClrLst>
+    <dgm:effectClrLst/>
+    <dgm:txLinClrLst/>
+    <dgm:txFillClrLst/>
+    <dgm:txEffectClrLst/>
+  </dgm:styleLbl>
+  <dgm:styleLbl name="parChTrans2D1">
+    <dgm:fillClrLst meth="repeat">
+      <a:schemeClr val="accent1">
+        <a:tint val="60000"/>
+      </a:schemeClr>
+    </dgm:fillClrLst>
+    <dgm:linClrLst meth="repeat">
+      <a:schemeClr val="accent1">
+        <a:tint val="60000"/>
+      </a:schemeClr>
+    </dgm:linClrLst>
+    <dgm:effectClrLst/>
+    <dgm:txLinClrLst/>
+    <dgm:txFillClrLst meth="repeat">
+      <a:schemeClr val="lt1"/>
+    </dgm:txFillClrLst>
+    <dgm:txEffectClrLst/>
+  </dgm:styleLbl>
+  <dgm:styleLbl name="parChTrans2D2">
+    <dgm:fillClrLst meth="repeat">
+      <a:schemeClr val="accent1"/>
+    </dgm:fillClrLst>
+    <dgm:linClrLst meth="repeat">
+      <a:schemeClr val="accent1"/>
+    </dgm:linClrLst>
+    <dgm:effectClrLst/>
+    <dgm:txLinClrLst/>
+    <dgm:txFillClrLst meth="repeat">
+      <a:schemeClr val="lt1"/>
+    </dgm:txFillClrLst>
+    <dgm:txEffectClrLst/>
+  </dgm:styleLbl>
+  <dgm:styleLbl name="parChTrans2D3">
+    <dgm:fillClrLst meth="repeat">
+      <a:schemeClr val="accent1"/>
+    </dgm:fillClrLst>
+    <dgm:linClrLst meth="repeat">
+      <a:schemeClr val="accent1"/>
+    </dgm:linClrLst>
+    <dgm:effectClrLst/>
+    <dgm:txLinClrLst/>
+    <dgm:txFillClrLst meth="repeat">
+      <a:schemeClr val="lt1"/>
+    </dgm:txFillClrLst>
+    <dgm:txEffectClrLst/>
+  </dgm:styleLbl>
+  <dgm:styleLbl name="parChTrans2D4">
+    <dgm:fillClrLst meth="repeat">
+      <a:schemeClr val="accent1"/>
+    </dgm:fillClrLst>
+    <dgm:linClrLst meth="repeat">
+      <a:schemeClr val="accent1"/>
+    </dgm:linClrLst>
+    <dgm:effectClrLst/>
+    <dgm:txLinClrLst/>
+    <dgm:txFillClrLst meth="repeat">
+      <a:schemeClr val="lt1"/>
+    </dgm:txFillClrLst>
+    <dgm:txEffectClrLst/>
+  </dgm:styleLbl>
+  <dgm:styleLbl name="parChTrans1D1">
+    <dgm:fillClrLst meth="repeat">
+      <a:schemeClr val="accent1"/>
+    </dgm:fillClrLst>
+    <dgm:linClrLst meth="repeat">
+      <a:schemeClr val="accent1">
+        <a:shade val="60000"/>
+      </a:schemeClr>
+    </dgm:linClrLst>
+    <dgm:effectClrLst/>
+    <dgm:txLinClrLst/>
+    <dgm:txFillClrLst meth="repeat">
+      <a:schemeClr val="tx1"/>
+    </dgm:txFillClrLst>
+    <dgm:txEffectClrLst/>
+  </dgm:styleLbl>
+  <dgm:styleLbl name="parChTrans1D2">
+    <dgm:fillClrLst meth="repeat">
+      <a:schemeClr val="accent1"/>
+    </dgm:fillClrLst>
+    <dgm:linClrLst meth="repeat">
+      <a:schemeClr val="accent1">
+        <a:shade val="60000"/>
+      </a:schemeClr>
+    </dgm:linClrLst>
+    <dgm:effectClrLst/>
+    <dgm:txLinClrLst/>
+    <dgm:txFillClrLst meth="repeat">
+      <a:schemeClr val="tx1"/>
+    </dgm:txFillClrLst>
+    <dgm:txEffectClrLst/>
+  </dgm:styleLbl>
+  <dgm:styleLbl name="parChTrans1D3">
+    <dgm:fillClrLst meth="repeat">
+      <a:schemeClr val="accent1"/>
+    </dgm:fillClrLst>
+    <dgm:linClrLst meth="repeat">
+      <a:schemeClr val="accent1">
+        <a:shade val="80000"/>
+      </a:schemeClr>
+    </dgm:linClrLst>
+    <dgm:effectClrLst/>
+    <dgm:txLinClrLst/>
+    <dgm:txFillClrLst meth="repeat">
+      <a:schemeClr val="tx1"/>
+    </dgm:txFillClrLst>
+    <dgm:txEffectClrLst/>
+  </dgm:styleLbl>
+  <dgm:styleLbl name="parChTrans1D4">
+    <dgm:fillClrLst meth="repeat">
+      <a:schemeClr val="accent1"/>
+    </dgm:fillClrLst>
+    <dgm:linClrLst meth="repeat">
+      <a:schemeClr val="accent1">
+        <a:shade val="80000"/>
+      </a:schemeClr>
+    </dgm:linClrLst>
+    <dgm:effectClrLst/>
+    <dgm:txLinClrLst/>
+    <dgm:txFillClrLst meth="repeat">
+      <a:schemeClr val="tx1"/>
+    </dgm:txFillClrLst>
+    <dgm:txEffectClrLst/>
+  </dgm:styleLbl>
+  <dgm:styleLbl name="fgAcc1">
+    <dgm:fillClrLst meth="repeat">
+      <a:schemeClr val="lt1">
+        <a:alpha val="90000"/>
+      </a:schemeClr>
+    </dgm:fillClrLst>
+    <dgm:linClrLst meth="repeat">
+      <a:schemeClr val="accent1"/>
+    </dgm:linClrLst>
+    <dgm:effectClrLst/>
+    <dgm:txLinClrLst/>
+    <dgm:txFillClrLst meth="repeat">
+      <a:schemeClr val="dk1"/>
+    </dgm:txFillClrLst>
+    <dgm:txEffectClrLst/>
+  </dgm:styleLbl>
+  <dgm:styleLbl name="conFgAcc1">
+    <dgm:fillClrLst meth="repeat">
+      <a:schemeClr val="lt1">
+        <a:alpha val="90000"/>
+      </a:schemeClr>
+    </dgm:fillClrLst>
+    <dgm:linClrLst meth="repeat">
+      <a:schemeClr val="accent1"/>
+    </dgm:linClrLst>
+    <dgm:effectClrLst/>
+    <dgm:txLinClrLst/>
+    <dgm:txFillClrLst meth="repeat">
+      <a:schemeClr val="dk1"/>
+    </dgm:txFillClrLst>
+    <dgm:txEffectClrLst/>
+  </dgm:styleLbl>
+  <dgm:styleLbl name="alignAcc1">
+    <dgm:fillClrLst meth="repeat">
+      <a:schemeClr val="lt1">
+        <a:alpha val="90000"/>
+      </a:schemeClr>
+    </dgm:fillClrLst>
+    <dgm:linClrLst meth="repeat">
+      <a:schemeClr val="accent1"/>
+    </dgm:linClrLst>
+    <dgm:effectClrLst/>
+    <dgm:txLinClrLst/>
+    <dgm:txFillClrLst meth="repeat">
+      <a:schemeClr val="dk1"/>
+    </dgm:txFillClrLst>
+    <dgm:txEffectClrLst/>
+  </dgm:styleLbl>
+  <dgm:styleLbl name="trAlignAcc1">
+    <dgm:fillClrLst meth="repeat">
+      <a:schemeClr val="lt1">
+        <a:alpha val="40000"/>
+      </a:schemeClr>
+    </dgm:fillClrLst>
+    <dgm:linClrLst meth="repeat">
+      <a:schemeClr val="accent1"/>
+    </dgm:linClrLst>
+    <dgm:effectClrLst/>
+    <dgm:txLinClrLst/>
+    <dgm:txFillClrLst meth="repeat">
+      <a:schemeClr val="dk1"/>
+    </dgm:txFillClrLst>
+    <dgm:txEffectClrLst/>
+  </dgm:styleLbl>
+  <dgm:styleLbl name="bgAcc1">
+    <dgm:fillClrLst meth="repeat">
+      <a:schemeClr val="lt1">
+        <a:alpha val="90000"/>
+      </a:schemeClr>
+    </dgm:fillClrLst>
+    <dgm:linClrLst meth="repeat">
+      <a:schemeClr val="accent1"/>
+    </dgm:linClrLst>
+    <dgm:effectClrLst/>
+    <dgm:txLinClrLst/>
+    <dgm:txFillClrLst meth="repeat">
+      <a:schemeClr val="dk1"/>
+    </dgm:txFillClrLst>
+    <dgm:txEffectClrLst/>
+  </dgm:styleLbl>
+  <dgm:styleLbl name="solidFgAcc1">
+    <dgm:fillClrLst meth="repeat">
+      <a:schemeClr val="lt1"/>
+    </dgm:fillClrLst>
+    <dgm:linClrLst meth="repeat">
+      <a:schemeClr val="accent1"/>
+    </dgm:linClrLst>
+    <dgm:effectClrLst/>
+    <dgm:txLinClrLst/>
+    <dgm:txFillClrLst meth="repeat">
+      <a:schemeClr val="dk1"/>
+    </dgm:txFillClrLst>
+    <dgm:txEffectClrLst/>
+  </dgm:styleLbl>
+  <dgm:styleLbl name="solidAlignAcc1">
+    <dgm:fillClrLst meth="repeat">
+      <a:schemeClr val="lt1"/>
+    </dgm:fillClrLst>
+    <dgm:linClrLst meth="repeat">
+      <a:schemeClr val="accent1"/>
+    </dgm:linClrLst>
+    <dgm:effectClrLst/>
+    <dgm:txLinClrLst/>
+    <dgm:txFillClrLst meth="repeat">
+      <a:schemeClr val="dk1"/>
+    </dgm:txFillClrLst>
+    <dgm:txEffectClrLst/>
+  </dgm:styleLbl>
+  <dgm:styleLbl name="solidBgAcc1">
+    <dgm:fillClrLst meth="repeat">
+      <a:schemeClr val="lt1"/>
+    </dgm:fillClrLst>
+    <dgm:linClrLst meth="repeat">
+      <a:schemeClr val="accent1"/>
+    </dgm:linClrLst>
+    <dgm:effectClrLst/>
+    <dgm:txLinClrLst/>
+    <dgm:txFillClrLst meth="repeat">
+      <a:schemeClr val="dk1"/>
+    </dgm:txFillClrLst>
+    <dgm:txEffectClrLst/>
+  </dgm:styleLbl>
+  <dgm:styleLbl name="fgAccFollowNode1">
+    <dgm:fillClrLst meth="repeat">
+      <a:schemeClr val="accent1">
+        <a:alpha val="90000"/>
+        <a:tint val="40000"/>
+      </a:schemeClr>
+    </dgm:fillClrLst>
+    <dgm:linClrLst meth="repeat">
+      <a:schemeClr val="accent1">
+        <a:alpha val="90000"/>
+        <a:tint val="40000"/>
+      </a:schemeClr>
+    </dgm:linClrLst>
+    <dgm:effectClrLst/>
+    <dgm:txLinClrLst/>
+    <dgm:txFillClrLst meth="repeat">
+      <a:schemeClr val="dk1"/>
+    </dgm:txFillClrLst>
+    <dgm:txEffectClrLst/>
+  </dgm:styleLbl>
+  <dgm:styleLbl name="alignAccFollowNode1">
+    <dgm:fillClrLst meth="repeat">
+      <a:schemeClr val="accent1">
+        <a:alpha val="90000"/>
+        <a:tint val="40000"/>
+      </a:schemeClr>
+    </dgm:fillClrLst>
+    <dgm:linClrLst meth="repeat">
+      <a:schemeClr val="accent1">
+        <a:alpha val="90000"/>
+        <a:tint val="40000"/>
+      </a:schemeClr>
+    </dgm:linClrLst>
+    <dgm:effectClrLst/>
+    <dgm:txLinClrLst/>
+    <dgm:txFillClrLst meth="repeat">
+      <a:schemeClr val="dk1"/>
+    </dgm:txFillClrLst>
+    <dgm:txEffectClrLst/>
+  </dgm:styleLbl>
+  <dgm:styleLbl name="bgAccFollowNode1">
+    <dgm:fillClrLst meth="repeat">
+      <a:schemeClr val="accent1">
+        <a:alpha val="90000"/>
+        <a:tint val="40000"/>
+      </a:schemeClr>
+    </dgm:fillClrLst>
+    <dgm:linClrLst meth="repeat">
+      <a:schemeClr val="accent1">
+        <a:alpha val="90000"/>
+        <a:tint val="40000"/>
+      </a:schemeClr>
+    </dgm:linClrLst>
+    <dgm:effectClrLst/>
+    <dgm:txLinClrLst/>
+    <dgm:txFillClrLst meth="repeat">
+      <a:schemeClr val="dk1"/>
+    </dgm:txFillClrLst>
+    <dgm:txEffectClrLst/>
+  </dgm:styleLbl>
+  <dgm:styleLbl name="fgAcc0">
+    <dgm:fillClrLst meth="repeat">
+      <a:schemeClr val="lt1">
+        <a:alpha val="90000"/>
+      </a:schemeClr>
+    </dgm:fillClrLst>
+    <dgm:linClrLst meth="repeat">
+      <a:schemeClr val="accent1"/>
+    </dgm:linClrLst>
+    <dgm:effectClrLst/>
+    <dgm:txLinClrLst/>
+    <dgm:txFillClrLst meth="repeat">
+      <a:schemeClr val="dk1"/>
+    </dgm:txFillClrLst>
+    <dgm:txEffectClrLst/>
+  </dgm:styleLbl>
+  <dgm:styleLbl name="fgAcc2">
+    <dgm:fillClrLst meth="repeat">
+      <a:schemeClr val="lt1">
+        <a:alpha val="90000"/>
+      </a:schemeClr>
+    </dgm:fillClrLst>
+    <dgm:linClrLst meth="repeat">
+      <a:schemeClr val="accent1"/>
+    </dgm:linClrLst>
+    <dgm:effectClrLst/>
+    <dgm:txLinClrLst/>
+    <dgm:txFillClrLst meth="repeat">
+      <a:schemeClr val="dk1"/>
+    </dgm:txFillClrLst>
+    <dgm:txEffectClrLst/>
+  </dgm:styleLbl>
+  <dgm:styleLbl name="fgAcc3">
+    <dgm:fillClrLst meth="repeat">
+      <a:schemeClr val="lt1">
+        <a:alpha val="90000"/>
+      </a:schemeClr>
+    </dgm:fillClrLst>
+    <dgm:linClrLst meth="repeat">
+      <a:schemeClr val="accent1"/>
+    </dgm:linClrLst>
+    <dgm:effectClrLst/>
+    <dgm:txLinClrLst/>
+    <dgm:txFillClrLst meth="repeat">
+      <a:schemeClr val="dk1"/>
+    </dgm:txFillClrLst>
+    <dgm:txEffectClrLst/>
+  </dgm:styleLbl>
+  <dgm:styleLbl name="fgAcc4">
+    <dgm:fillClrLst meth="repeat">
+      <a:schemeClr val="lt1">
+        <a:alpha val="90000"/>
+      </a:schemeClr>
+    </dgm:fillClrLst>
+    <dgm:linClrLst meth="repeat">
+      <a:schemeClr val="accent1"/>
+    </dgm:linClrLst>
+    <dgm:effectClrLst/>
+    <dgm:txLinClrLst/>
+    <dgm:txFillClrLst meth="repeat">
+      <a:schemeClr val="dk1"/>
+    </dgm:txFillClrLst>
+    <dgm:txEffectClrLst/>
+  </dgm:styleLbl>
+  <dgm:styleLbl name="bgShp">
+    <dgm:fillClrLst meth="repeat">
+      <a:schemeClr val="accent1">
+        <a:tint val="40000"/>
+      </a:schemeClr>
+    </dgm:fillClrLst>
+    <dgm:linClrLst meth="repeat">
+      <a:schemeClr val="accent1"/>
+    </dgm:linClrLst>
+    <dgm:effectClrLst/>
+    <dgm:txLinClrLst/>
+    <dgm:txFillClrLst meth="repeat">
+      <a:schemeClr val="dk1"/>
+    </dgm:txFillClrLst>
+    <dgm:txEffectClrLst/>
+  </dgm:styleLbl>
+  <dgm:styleLbl name="dkBgShp">
+    <dgm:fillClrLst meth="repeat">
+      <a:schemeClr val="accent1">
+        <a:shade val="80000"/>
+      </a:schemeClr>
+    </dgm:fillClrLst>
+    <dgm:linClrLst meth="repeat">
+      <a:schemeClr val="accent1"/>
+    </dgm:linClrLst>
+    <dgm:effectClrLst/>
+    <dgm:txLinClrLst/>
+    <dgm:txFillClrLst meth="repeat">
+      <a:schemeClr val="lt1"/>
+    </dgm:txFillClrLst>
+    <dgm:txEffectClrLst/>
+  </dgm:styleLbl>
+  <dgm:styleLbl name="trBgShp">
+    <dgm:fillClrLst meth="repeat">
+      <a:schemeClr val="accent1">
+        <a:tint val="50000"/>
+        <a:alpha val="40000"/>
+      </a:schemeClr>
+    </dgm:fillClrLst>
+    <dgm:linClrLst meth="repeat">
+      <a:schemeClr val="accent1"/>
+    </dgm:linClrLst>
+    <dgm:effectClrLst/>
+    <dgm:txLinClrLst/>
+    <dgm:txFillClrLst meth="repeat">
+      <a:schemeClr val="lt1"/>
+    </dgm:txFillClrLst>
+    <dgm:txEffectClrLst/>
+  </dgm:styleLbl>
+  <dgm:styleLbl name="fgShp">
+    <dgm:fillClrLst meth="repeat">
+      <a:schemeClr val="accent1">
+        <a:tint val="60000"/>
       </a:schemeClr>
     </dgm:fillClrLst>
     <dgm:linClrLst meth="repeat">
@@ -7314,6 +8062,277 @@
   </dgm:cxnLst>
   <dgm:bg/>
   <dgm:whole/>
+  <dgm:extLst>
+    <a:ext uri="http://schemas.microsoft.com/office/drawing/2008/diagram">
+      <dsp:dataModelExt xmlns:dsp="http://schemas.microsoft.com/office/drawing/2008/diagram" relId="rId9" minVer="http://schemas.openxmlformats.org/drawingml/2006/diagram"/>
+    </a:ext>
+  </dgm:extLst>
+</dgm:dataModel>
+</file>
+
+<file path=ppt/diagrams/data10.xml><?xml version="1.0" encoding="utf-8"?>
+<dgm:dataModel xmlns:dgm="http://schemas.openxmlformats.org/drawingml/2006/diagram" xmlns:a="http://schemas.openxmlformats.org/drawingml/2006/main">
+  <dgm:ptLst>
+    <dgm:pt modelId="{1BAF38FA-668C-42FF-833B-8125D0660C5A}" type="doc">
+      <dgm:prSet loTypeId="urn:microsoft.com/office/officeart/2005/8/layout/hChevron3" loCatId="process" qsTypeId="urn:microsoft.com/office/officeart/2005/8/quickstyle/simple1" qsCatId="simple" csTypeId="urn:microsoft.com/office/officeart/2005/8/colors/accent1_2" csCatId="accent1" phldr="1"/>
+      <dgm:spPr/>
+      <dgm:t>
+        <a:bodyPr/>
+        <a:lstStyle/>
+        <a:p>
+          <a:endParaRPr lang="en-US"/>
+        </a:p>
+      </dgm:t>
+    </dgm:pt>
+    <dgm:pt modelId="{02F2DEB5-04B2-43B0-AE1F-484092092F8C}">
+      <dgm:prSet phldrT="[Text]" phldr="0"/>
+      <dgm:spPr>
+        <a:ln>
+          <a:solidFill>
+            <a:schemeClr val="accent1"/>
+          </a:solidFill>
+        </a:ln>
+      </dgm:spPr>
+      <dgm:t>
+        <a:bodyPr/>
+        <a:lstStyle/>
+        <a:p>
+          <a:endParaRPr lang="en-US"/>
+        </a:p>
+      </dgm:t>
+    </dgm:pt>
+    <dgm:pt modelId="{086CFFA7-5016-4BB1-BF31-ADB78F91B03E}" type="parTrans" cxnId="{CFE9B22D-431F-42D5-A9DD-A34070B50E6D}">
+      <dgm:prSet/>
+      <dgm:spPr/>
+      <dgm:t>
+        <a:bodyPr/>
+        <a:lstStyle/>
+        <a:p>
+          <a:endParaRPr lang="en-US"/>
+        </a:p>
+      </dgm:t>
+    </dgm:pt>
+    <dgm:pt modelId="{98B402DD-A062-43D3-B135-4A9AE401840E}" type="sibTrans" cxnId="{CFE9B22D-431F-42D5-A9DD-A34070B50E6D}">
+      <dgm:prSet/>
+      <dgm:spPr/>
+      <dgm:t>
+        <a:bodyPr/>
+        <a:lstStyle/>
+        <a:p>
+          <a:endParaRPr lang="en-US"/>
+        </a:p>
+      </dgm:t>
+    </dgm:pt>
+    <dgm:pt modelId="{3F8A6D25-EC33-4E79-9F36-36771A974919}">
+      <dgm:prSet phldrT="[Text]" phldr="0"/>
+      <dgm:spPr>
+        <a:solidFill>
+          <a:schemeClr val="tx1">
+            <a:lumMod val="95000"/>
+          </a:schemeClr>
+        </a:solidFill>
+        <a:ln>
+          <a:solidFill>
+            <a:schemeClr val="accent1"/>
+          </a:solidFill>
+        </a:ln>
+      </dgm:spPr>
+      <dgm:t>
+        <a:bodyPr/>
+        <a:lstStyle/>
+        <a:p>
+          <a:endParaRPr lang="en-US" dirty="0"/>
+        </a:p>
+      </dgm:t>
+    </dgm:pt>
+    <dgm:pt modelId="{2214299D-707F-429C-A23D-9EE2F39CF74A}" type="parTrans" cxnId="{0C42CAF2-971C-4068-B645-A373CE11E869}">
+      <dgm:prSet/>
+      <dgm:spPr/>
+      <dgm:t>
+        <a:bodyPr/>
+        <a:lstStyle/>
+        <a:p>
+          <a:endParaRPr lang="en-US"/>
+        </a:p>
+      </dgm:t>
+    </dgm:pt>
+    <dgm:pt modelId="{F5C31149-F876-40A6-9FD4-9FC1A73D7103}" type="sibTrans" cxnId="{0C42CAF2-971C-4068-B645-A373CE11E869}">
+      <dgm:prSet/>
+      <dgm:spPr/>
+      <dgm:t>
+        <a:bodyPr/>
+        <a:lstStyle/>
+        <a:p>
+          <a:endParaRPr lang="en-US"/>
+        </a:p>
+      </dgm:t>
+    </dgm:pt>
+    <dgm:pt modelId="{2A8D39A9-50C8-4D4F-B033-79DECE006E66}">
+      <dgm:prSet phldrT="[Text]" phldr="0"/>
+      <dgm:spPr>
+        <a:solidFill>
+          <a:schemeClr val="tx1">
+            <a:lumMod val="95000"/>
+          </a:schemeClr>
+        </a:solidFill>
+        <a:ln>
+          <a:solidFill>
+            <a:schemeClr val="accent1"/>
+          </a:solidFill>
+        </a:ln>
+      </dgm:spPr>
+      <dgm:t>
+        <a:bodyPr/>
+        <a:lstStyle/>
+        <a:p>
+          <a:endParaRPr lang="en-US" dirty="0"/>
+        </a:p>
+      </dgm:t>
+    </dgm:pt>
+    <dgm:pt modelId="{315C08A7-84C9-4B75-B41E-C170BAF53261}" type="parTrans" cxnId="{2667F885-9801-44B0-94AB-28C9292F3E74}">
+      <dgm:prSet/>
+      <dgm:spPr/>
+      <dgm:t>
+        <a:bodyPr/>
+        <a:lstStyle/>
+        <a:p>
+          <a:endParaRPr lang="en-US"/>
+        </a:p>
+      </dgm:t>
+    </dgm:pt>
+    <dgm:pt modelId="{55984B9E-0D3F-4FAD-8385-14CE83ECD63D}" type="sibTrans" cxnId="{2667F885-9801-44B0-94AB-28C9292F3E74}">
+      <dgm:prSet/>
+      <dgm:spPr/>
+      <dgm:t>
+        <a:bodyPr/>
+        <a:lstStyle/>
+        <a:p>
+          <a:endParaRPr lang="en-US"/>
+        </a:p>
+      </dgm:t>
+    </dgm:pt>
+    <dgm:pt modelId="{6D71B52B-3920-4F69-82CF-D2F6B276680D}">
+      <dgm:prSet phldrT="[Text]" phldr="0"/>
+      <dgm:spPr>
+        <a:solidFill>
+          <a:schemeClr val="tx1">
+            <a:lumMod val="95000"/>
+          </a:schemeClr>
+        </a:solidFill>
+        <a:ln>
+          <a:solidFill>
+            <a:schemeClr val="accent1"/>
+          </a:solidFill>
+        </a:ln>
+      </dgm:spPr>
+      <dgm:t>
+        <a:bodyPr/>
+        <a:lstStyle/>
+        <a:p>
+          <a:endParaRPr lang="en-US" dirty="0"/>
+        </a:p>
+      </dgm:t>
+    </dgm:pt>
+    <dgm:pt modelId="{D523D338-016A-4C79-9BD8-F4C65FDC3E4A}" type="parTrans" cxnId="{92E5502B-D54D-4966-9E24-506A6D560BD2}">
+      <dgm:prSet/>
+      <dgm:spPr/>
+      <dgm:t>
+        <a:bodyPr/>
+        <a:lstStyle/>
+        <a:p>
+          <a:endParaRPr lang="en-US"/>
+        </a:p>
+      </dgm:t>
+    </dgm:pt>
+    <dgm:pt modelId="{CD4D0C60-FE61-48F8-A8F6-566EF2190D5C}" type="sibTrans" cxnId="{92E5502B-D54D-4966-9E24-506A6D560BD2}">
+      <dgm:prSet/>
+      <dgm:spPr/>
+      <dgm:t>
+        <a:bodyPr/>
+        <a:lstStyle/>
+        <a:p>
+          <a:endParaRPr lang="en-US"/>
+        </a:p>
+      </dgm:t>
+    </dgm:pt>
+    <dgm:pt modelId="{CDD65885-70A5-408A-AD16-60B5296FD84F}" type="pres">
+      <dgm:prSet presAssocID="{1BAF38FA-668C-42FF-833B-8125D0660C5A}" presName="Name0" presStyleCnt="0">
+        <dgm:presLayoutVars>
+          <dgm:dir/>
+          <dgm:resizeHandles val="exact"/>
+        </dgm:presLayoutVars>
+      </dgm:prSet>
+      <dgm:spPr/>
+    </dgm:pt>
+    <dgm:pt modelId="{3B3B9CF9-ACCC-4AAF-B159-A5ECCE9F91FA}" type="pres">
+      <dgm:prSet presAssocID="{02F2DEB5-04B2-43B0-AE1F-484092092F8C}" presName="parTxOnly" presStyleLbl="node1" presStyleIdx="0" presStyleCnt="4">
+        <dgm:presLayoutVars>
+          <dgm:bulletEnabled val="1"/>
+        </dgm:presLayoutVars>
+      </dgm:prSet>
+      <dgm:spPr/>
+    </dgm:pt>
+    <dgm:pt modelId="{5EA737B2-FAEA-4E29-B7AB-D4AF56C6722A}" type="pres">
+      <dgm:prSet presAssocID="{98B402DD-A062-43D3-B135-4A9AE401840E}" presName="parSpace" presStyleCnt="0"/>
+      <dgm:spPr/>
+    </dgm:pt>
+    <dgm:pt modelId="{927287C2-A3D7-40DA-9CC5-879018D16C6C}" type="pres">
+      <dgm:prSet presAssocID="{3F8A6D25-EC33-4E79-9F36-36771A974919}" presName="parTxOnly" presStyleLbl="node1" presStyleIdx="1" presStyleCnt="4">
+        <dgm:presLayoutVars>
+          <dgm:bulletEnabled val="1"/>
+        </dgm:presLayoutVars>
+      </dgm:prSet>
+      <dgm:spPr/>
+    </dgm:pt>
+    <dgm:pt modelId="{D7399875-5945-4082-A56B-0967B2FF1CAA}" type="pres">
+      <dgm:prSet presAssocID="{F5C31149-F876-40A6-9FD4-9FC1A73D7103}" presName="parSpace" presStyleCnt="0"/>
+      <dgm:spPr/>
+    </dgm:pt>
+    <dgm:pt modelId="{0FFC9F85-D342-4563-A0C2-89C6B83FD375}" type="pres">
+      <dgm:prSet presAssocID="{2A8D39A9-50C8-4D4F-B033-79DECE006E66}" presName="parTxOnly" presStyleLbl="node1" presStyleIdx="2" presStyleCnt="4">
+        <dgm:presLayoutVars>
+          <dgm:bulletEnabled val="1"/>
+        </dgm:presLayoutVars>
+      </dgm:prSet>
+      <dgm:spPr/>
+    </dgm:pt>
+    <dgm:pt modelId="{00AD2CC1-E211-4CFF-A9B2-67FC64D14459}" type="pres">
+      <dgm:prSet presAssocID="{55984B9E-0D3F-4FAD-8385-14CE83ECD63D}" presName="parSpace" presStyleCnt="0"/>
+      <dgm:spPr/>
+    </dgm:pt>
+    <dgm:pt modelId="{903FC15E-8A12-4ACF-90BF-441209C11D87}" type="pres">
+      <dgm:prSet presAssocID="{6D71B52B-3920-4F69-82CF-D2F6B276680D}" presName="parTxOnly" presStyleLbl="node1" presStyleIdx="3" presStyleCnt="4">
+        <dgm:presLayoutVars>
+          <dgm:bulletEnabled val="1"/>
+        </dgm:presLayoutVars>
+      </dgm:prSet>
+      <dgm:spPr/>
+    </dgm:pt>
+  </dgm:ptLst>
+  <dgm:cxnLst>
+    <dgm:cxn modelId="{347BB41C-FC86-4550-A2CB-D58B80B9751F}" type="presOf" srcId="{2A8D39A9-50C8-4D4F-B033-79DECE006E66}" destId="{0FFC9F85-D342-4563-A0C2-89C6B83FD375}" srcOrd="0" destOrd="0" presId="urn:microsoft.com/office/officeart/2005/8/layout/hChevron3"/>
+    <dgm:cxn modelId="{92E5502B-D54D-4966-9E24-506A6D560BD2}" srcId="{1BAF38FA-668C-42FF-833B-8125D0660C5A}" destId="{6D71B52B-3920-4F69-82CF-D2F6B276680D}" srcOrd="3" destOrd="0" parTransId="{D523D338-016A-4C79-9BD8-F4C65FDC3E4A}" sibTransId="{CD4D0C60-FE61-48F8-A8F6-566EF2190D5C}"/>
+    <dgm:cxn modelId="{CFE9B22D-431F-42D5-A9DD-A34070B50E6D}" srcId="{1BAF38FA-668C-42FF-833B-8125D0660C5A}" destId="{02F2DEB5-04B2-43B0-AE1F-484092092F8C}" srcOrd="0" destOrd="0" parTransId="{086CFFA7-5016-4BB1-BF31-ADB78F91B03E}" sibTransId="{98B402DD-A062-43D3-B135-4A9AE401840E}"/>
+    <dgm:cxn modelId="{7E7A1337-859F-4F61-9A78-82F7E8764017}" type="presOf" srcId="{3F8A6D25-EC33-4E79-9F36-36771A974919}" destId="{927287C2-A3D7-40DA-9CC5-879018D16C6C}" srcOrd="0" destOrd="0" presId="urn:microsoft.com/office/officeart/2005/8/layout/hChevron3"/>
+    <dgm:cxn modelId="{C8B7E64E-D047-4A1C-842A-C4653D06E0DB}" type="presOf" srcId="{1BAF38FA-668C-42FF-833B-8125D0660C5A}" destId="{CDD65885-70A5-408A-AD16-60B5296FD84F}" srcOrd="0" destOrd="0" presId="urn:microsoft.com/office/officeart/2005/8/layout/hChevron3"/>
+    <dgm:cxn modelId="{69FDE357-9944-440F-9DEB-FDD0AD8A9BFE}" type="presOf" srcId="{6D71B52B-3920-4F69-82CF-D2F6B276680D}" destId="{903FC15E-8A12-4ACF-90BF-441209C11D87}" srcOrd="0" destOrd="0" presId="urn:microsoft.com/office/officeart/2005/8/layout/hChevron3"/>
+    <dgm:cxn modelId="{2667F885-9801-44B0-94AB-28C9292F3E74}" srcId="{1BAF38FA-668C-42FF-833B-8125D0660C5A}" destId="{2A8D39A9-50C8-4D4F-B033-79DECE006E66}" srcOrd="2" destOrd="0" parTransId="{315C08A7-84C9-4B75-B41E-C170BAF53261}" sibTransId="{55984B9E-0D3F-4FAD-8385-14CE83ECD63D}"/>
+    <dgm:cxn modelId="{0C42CAF2-971C-4068-B645-A373CE11E869}" srcId="{1BAF38FA-668C-42FF-833B-8125D0660C5A}" destId="{3F8A6D25-EC33-4E79-9F36-36771A974919}" srcOrd="1" destOrd="0" parTransId="{2214299D-707F-429C-A23D-9EE2F39CF74A}" sibTransId="{F5C31149-F876-40A6-9FD4-9FC1A73D7103}"/>
+    <dgm:cxn modelId="{3020AFFF-29FB-4253-9067-BC7D344E83A9}" type="presOf" srcId="{02F2DEB5-04B2-43B0-AE1F-484092092F8C}" destId="{3B3B9CF9-ACCC-4AAF-B159-A5ECCE9F91FA}" srcOrd="0" destOrd="0" presId="urn:microsoft.com/office/officeart/2005/8/layout/hChevron3"/>
+    <dgm:cxn modelId="{E191ADB3-48DE-4471-9D7B-B06436C72291}" type="presParOf" srcId="{CDD65885-70A5-408A-AD16-60B5296FD84F}" destId="{3B3B9CF9-ACCC-4AAF-B159-A5ECCE9F91FA}" srcOrd="0" destOrd="0" presId="urn:microsoft.com/office/officeart/2005/8/layout/hChevron3"/>
+    <dgm:cxn modelId="{F6ECF3E2-766C-40B1-9FEF-D2B9A3751F52}" type="presParOf" srcId="{CDD65885-70A5-408A-AD16-60B5296FD84F}" destId="{5EA737B2-FAEA-4E29-B7AB-D4AF56C6722A}" srcOrd="1" destOrd="0" presId="urn:microsoft.com/office/officeart/2005/8/layout/hChevron3"/>
+    <dgm:cxn modelId="{5F4A39DD-EE71-415A-B0B3-627A8BABEDC4}" type="presParOf" srcId="{CDD65885-70A5-408A-AD16-60B5296FD84F}" destId="{927287C2-A3D7-40DA-9CC5-879018D16C6C}" srcOrd="2" destOrd="0" presId="urn:microsoft.com/office/officeart/2005/8/layout/hChevron3"/>
+    <dgm:cxn modelId="{4E7C4957-7013-4E83-83C2-B10253353E78}" type="presParOf" srcId="{CDD65885-70A5-408A-AD16-60B5296FD84F}" destId="{D7399875-5945-4082-A56B-0967B2FF1CAA}" srcOrd="3" destOrd="0" presId="urn:microsoft.com/office/officeart/2005/8/layout/hChevron3"/>
+    <dgm:cxn modelId="{FB86EB6A-5434-47EA-AB12-3A0CDAB33EE4}" type="presParOf" srcId="{CDD65885-70A5-408A-AD16-60B5296FD84F}" destId="{0FFC9F85-D342-4563-A0C2-89C6B83FD375}" srcOrd="4" destOrd="0" presId="urn:microsoft.com/office/officeart/2005/8/layout/hChevron3"/>
+    <dgm:cxn modelId="{78C80DD3-464A-4A52-99A1-54586C54E2F3}" type="presParOf" srcId="{CDD65885-70A5-408A-AD16-60B5296FD84F}" destId="{00AD2CC1-E211-4CFF-A9B2-67FC64D14459}" srcOrd="5" destOrd="0" presId="urn:microsoft.com/office/officeart/2005/8/layout/hChevron3"/>
+    <dgm:cxn modelId="{6ACBF150-7D73-4DED-A989-4E37B02A320F}" type="presParOf" srcId="{CDD65885-70A5-408A-AD16-60B5296FD84F}" destId="{903FC15E-8A12-4ACF-90BF-441209C11D87}" srcOrd="6" destOrd="0" presId="urn:microsoft.com/office/officeart/2005/8/layout/hChevron3"/>
+  </dgm:cxnLst>
+  <dgm:bg/>
+  <dgm:whole>
+    <a:ln>
+      <a:noFill/>
+    </a:ln>
+  </dgm:whole>
   <dgm:extLst>
     <a:ext uri="http://schemas.microsoft.com/office/drawing/2008/diagram">
       <dsp:dataModelExt xmlns:dsp="http://schemas.microsoft.com/office/drawing/2008/diagram" relId="rId9" minVer="http://schemas.openxmlformats.org/drawingml/2006/diagram"/>
@@ -8553,6 +9572,348 @@
 <dgm:dataModel xmlns:dgm="http://schemas.openxmlformats.org/drawingml/2006/diagram" xmlns:a="http://schemas.openxmlformats.org/drawingml/2006/main">
   <dgm:ptLst>
     <dgm:pt modelId="{1BAF38FA-668C-42FF-833B-8125D0660C5A}" type="doc">
+      <dgm:prSet loTypeId="urn:microsoft.com/office/officeart/2005/8/layout/hChevron3" loCatId="process" qsTypeId="urn:microsoft.com/office/officeart/2005/8/quickstyle/3d2" qsCatId="3D" csTypeId="urn:microsoft.com/office/officeart/2005/8/colors/accent1_2" csCatId="accent1" phldr="1"/>
+      <dgm:spPr/>
+      <dgm:t>
+        <a:bodyPr/>
+        <a:lstStyle/>
+        <a:p>
+          <a:endParaRPr lang="en-US"/>
+        </a:p>
+      </dgm:t>
+    </dgm:pt>
+    <dgm:pt modelId="{02F2DEB5-04B2-43B0-AE1F-484092092F8C}">
+      <dgm:prSet phldrT="[Text]" phldr="0" custT="1"/>
+      <dgm:spPr/>
+      <dgm:t>
+        <a:bodyPr/>
+        <a:lstStyle/>
+        <a:p>
+          <a:r>
+            <a:rPr lang="en-US" sz="3200" b="1">
+              <a:solidFill>
+                <a:srgbClr val="00B050"/>
+              </a:solidFill>
+              <a:effectLst/>
+            </a:rPr>
+            <a:t>React Foundations</a:t>
+          </a:r>
+          <a:endParaRPr lang="en-US" sz="3200" b="1" dirty="0">
+            <a:solidFill>
+              <a:srgbClr val="00B050"/>
+            </a:solidFill>
+            <a:effectLst/>
+          </a:endParaRPr>
+        </a:p>
+      </dgm:t>
+    </dgm:pt>
+    <dgm:pt modelId="{086CFFA7-5016-4BB1-BF31-ADB78F91B03E}" type="parTrans" cxnId="{CFE9B22D-431F-42D5-A9DD-A34070B50E6D}">
+      <dgm:prSet/>
+      <dgm:spPr/>
+      <dgm:t>
+        <a:bodyPr/>
+        <a:lstStyle/>
+        <a:p>
+          <a:endParaRPr lang="en-US" sz="1600" b="1">
+            <a:solidFill>
+              <a:srgbClr val="00B050"/>
+            </a:solidFill>
+            <a:effectLst/>
+          </a:endParaRPr>
+        </a:p>
+      </dgm:t>
+    </dgm:pt>
+    <dgm:pt modelId="{98B402DD-A062-43D3-B135-4A9AE401840E}" type="sibTrans" cxnId="{CFE9B22D-431F-42D5-A9DD-A34070B50E6D}">
+      <dgm:prSet/>
+      <dgm:spPr/>
+      <dgm:t>
+        <a:bodyPr/>
+        <a:lstStyle/>
+        <a:p>
+          <a:endParaRPr lang="en-US" sz="1600" b="1">
+            <a:solidFill>
+              <a:srgbClr val="00B050"/>
+            </a:solidFill>
+            <a:effectLst/>
+          </a:endParaRPr>
+        </a:p>
+      </dgm:t>
+    </dgm:pt>
+    <dgm:pt modelId="{3F8A6D25-EC33-4E79-9F36-36771A974919}">
+      <dgm:prSet phldrT="[Text]" phldr="0" custT="1"/>
+      <dgm:spPr>
+        <a:solidFill>
+          <a:schemeClr val="tx1">
+            <a:lumMod val="85000"/>
+          </a:schemeClr>
+        </a:solidFill>
+      </dgm:spPr>
+      <dgm:t>
+        <a:bodyPr/>
+        <a:lstStyle/>
+        <a:p>
+          <a:r>
+            <a:rPr lang="en-US" sz="3200" b="1">
+              <a:solidFill>
+                <a:srgbClr val="00B050"/>
+              </a:solidFill>
+              <a:effectLst/>
+            </a:rPr>
+            <a:t>App Router</a:t>
+          </a:r>
+          <a:endParaRPr lang="en-US" sz="3200" b="1" dirty="0">
+            <a:solidFill>
+              <a:srgbClr val="00B050"/>
+            </a:solidFill>
+            <a:effectLst/>
+          </a:endParaRPr>
+        </a:p>
+      </dgm:t>
+    </dgm:pt>
+    <dgm:pt modelId="{2214299D-707F-429C-A23D-9EE2F39CF74A}" type="parTrans" cxnId="{0C42CAF2-971C-4068-B645-A373CE11E869}">
+      <dgm:prSet/>
+      <dgm:spPr/>
+      <dgm:t>
+        <a:bodyPr/>
+        <a:lstStyle/>
+        <a:p>
+          <a:endParaRPr lang="en-US" sz="1600" b="1">
+            <a:solidFill>
+              <a:srgbClr val="00B050"/>
+            </a:solidFill>
+            <a:effectLst/>
+          </a:endParaRPr>
+        </a:p>
+      </dgm:t>
+    </dgm:pt>
+    <dgm:pt modelId="{F5C31149-F876-40A6-9FD4-9FC1A73D7103}" type="sibTrans" cxnId="{0C42CAF2-971C-4068-B645-A373CE11E869}">
+      <dgm:prSet/>
+      <dgm:spPr/>
+      <dgm:t>
+        <a:bodyPr/>
+        <a:lstStyle/>
+        <a:p>
+          <a:endParaRPr lang="en-US" sz="1600" b="1">
+            <a:solidFill>
+              <a:srgbClr val="00B050"/>
+            </a:solidFill>
+            <a:effectLst/>
+          </a:endParaRPr>
+        </a:p>
+      </dgm:t>
+    </dgm:pt>
+    <dgm:pt modelId="{2A8D39A9-50C8-4D4F-B033-79DECE006E66}">
+      <dgm:prSet phldrT="[Text]" phldr="0" custT="1"/>
+      <dgm:spPr>
+        <a:solidFill>
+          <a:schemeClr val="tx1">
+            <a:lumMod val="85000"/>
+          </a:schemeClr>
+        </a:solidFill>
+      </dgm:spPr>
+      <dgm:t>
+        <a:bodyPr/>
+        <a:lstStyle/>
+        <a:p>
+          <a:r>
+            <a:rPr lang="en-US" sz="3200" b="1">
+              <a:solidFill>
+                <a:srgbClr val="00B050"/>
+              </a:solidFill>
+              <a:effectLst/>
+            </a:rPr>
+            <a:t>Pages Router</a:t>
+          </a:r>
+          <a:endParaRPr lang="en-US" sz="3200" b="1" dirty="0">
+            <a:solidFill>
+              <a:srgbClr val="00B050"/>
+            </a:solidFill>
+            <a:effectLst/>
+          </a:endParaRPr>
+        </a:p>
+      </dgm:t>
+    </dgm:pt>
+    <dgm:pt modelId="{315C08A7-84C9-4B75-B41E-C170BAF53261}" type="parTrans" cxnId="{2667F885-9801-44B0-94AB-28C9292F3E74}">
+      <dgm:prSet/>
+      <dgm:spPr/>
+      <dgm:t>
+        <a:bodyPr/>
+        <a:lstStyle/>
+        <a:p>
+          <a:endParaRPr lang="en-US" sz="1600" b="1">
+            <a:solidFill>
+              <a:srgbClr val="00B050"/>
+            </a:solidFill>
+            <a:effectLst/>
+          </a:endParaRPr>
+        </a:p>
+      </dgm:t>
+    </dgm:pt>
+    <dgm:pt modelId="{55984B9E-0D3F-4FAD-8385-14CE83ECD63D}" type="sibTrans" cxnId="{2667F885-9801-44B0-94AB-28C9292F3E74}">
+      <dgm:prSet/>
+      <dgm:spPr/>
+      <dgm:t>
+        <a:bodyPr/>
+        <a:lstStyle/>
+        <a:p>
+          <a:endParaRPr lang="en-US" sz="1600" b="1">
+            <a:solidFill>
+              <a:srgbClr val="00B050"/>
+            </a:solidFill>
+            <a:effectLst/>
+          </a:endParaRPr>
+        </a:p>
+      </dgm:t>
+    </dgm:pt>
+    <dgm:pt modelId="{6D71B52B-3920-4F69-82CF-D2F6B276680D}">
+      <dgm:prSet phldrT="[Text]" phldr="0" custT="1"/>
+      <dgm:spPr>
+        <a:solidFill>
+          <a:schemeClr val="tx1">
+            <a:lumMod val="85000"/>
+          </a:schemeClr>
+        </a:solidFill>
+      </dgm:spPr>
+      <dgm:t>
+        <a:bodyPr/>
+        <a:lstStyle/>
+        <a:p>
+          <a:r>
+            <a:rPr lang="en-US" sz="3200" b="1">
+              <a:solidFill>
+                <a:srgbClr val="00B050"/>
+              </a:solidFill>
+              <a:effectLst/>
+            </a:rPr>
+            <a:t>SEO</a:t>
+          </a:r>
+          <a:endParaRPr lang="en-US" sz="3200" b="1" dirty="0">
+            <a:solidFill>
+              <a:srgbClr val="00B050"/>
+            </a:solidFill>
+            <a:effectLst/>
+          </a:endParaRPr>
+        </a:p>
+      </dgm:t>
+    </dgm:pt>
+    <dgm:pt modelId="{D523D338-016A-4C79-9BD8-F4C65FDC3E4A}" type="parTrans" cxnId="{92E5502B-D54D-4966-9E24-506A6D560BD2}">
+      <dgm:prSet/>
+      <dgm:spPr/>
+      <dgm:t>
+        <a:bodyPr/>
+        <a:lstStyle/>
+        <a:p>
+          <a:endParaRPr lang="en-US" sz="1600" b="1">
+            <a:solidFill>
+              <a:srgbClr val="00B050"/>
+            </a:solidFill>
+            <a:effectLst/>
+          </a:endParaRPr>
+        </a:p>
+      </dgm:t>
+    </dgm:pt>
+    <dgm:pt modelId="{CD4D0C60-FE61-48F8-A8F6-566EF2190D5C}" type="sibTrans" cxnId="{92E5502B-D54D-4966-9E24-506A6D560BD2}">
+      <dgm:prSet/>
+      <dgm:spPr/>
+      <dgm:t>
+        <a:bodyPr/>
+        <a:lstStyle/>
+        <a:p>
+          <a:endParaRPr lang="en-US" sz="1600" b="1">
+            <a:solidFill>
+              <a:srgbClr val="00B050"/>
+            </a:solidFill>
+            <a:effectLst/>
+          </a:endParaRPr>
+        </a:p>
+      </dgm:t>
+    </dgm:pt>
+    <dgm:pt modelId="{CDD65885-70A5-408A-AD16-60B5296FD84F}" type="pres">
+      <dgm:prSet presAssocID="{1BAF38FA-668C-42FF-833B-8125D0660C5A}" presName="Name0" presStyleCnt="0">
+        <dgm:presLayoutVars>
+          <dgm:dir/>
+          <dgm:resizeHandles val="exact"/>
+        </dgm:presLayoutVars>
+      </dgm:prSet>
+      <dgm:spPr/>
+    </dgm:pt>
+    <dgm:pt modelId="{3B3B9CF9-ACCC-4AAF-B159-A5ECCE9F91FA}" type="pres">
+      <dgm:prSet presAssocID="{02F2DEB5-04B2-43B0-AE1F-484092092F8C}" presName="parTxOnly" presStyleLbl="node1" presStyleIdx="0" presStyleCnt="4">
+        <dgm:presLayoutVars>
+          <dgm:bulletEnabled val="1"/>
+        </dgm:presLayoutVars>
+      </dgm:prSet>
+      <dgm:spPr/>
+    </dgm:pt>
+    <dgm:pt modelId="{5EA737B2-FAEA-4E29-B7AB-D4AF56C6722A}" type="pres">
+      <dgm:prSet presAssocID="{98B402DD-A062-43D3-B135-4A9AE401840E}" presName="parSpace" presStyleCnt="0"/>
+      <dgm:spPr/>
+    </dgm:pt>
+    <dgm:pt modelId="{927287C2-A3D7-40DA-9CC5-879018D16C6C}" type="pres">
+      <dgm:prSet presAssocID="{3F8A6D25-EC33-4E79-9F36-36771A974919}" presName="parTxOnly" presStyleLbl="node1" presStyleIdx="1" presStyleCnt="4">
+        <dgm:presLayoutVars>
+          <dgm:bulletEnabled val="1"/>
+        </dgm:presLayoutVars>
+      </dgm:prSet>
+      <dgm:spPr/>
+    </dgm:pt>
+    <dgm:pt modelId="{D7399875-5945-4082-A56B-0967B2FF1CAA}" type="pres">
+      <dgm:prSet presAssocID="{F5C31149-F876-40A6-9FD4-9FC1A73D7103}" presName="parSpace" presStyleCnt="0"/>
+      <dgm:spPr/>
+    </dgm:pt>
+    <dgm:pt modelId="{0FFC9F85-D342-4563-A0C2-89C6B83FD375}" type="pres">
+      <dgm:prSet presAssocID="{2A8D39A9-50C8-4D4F-B033-79DECE006E66}" presName="parTxOnly" presStyleLbl="node1" presStyleIdx="2" presStyleCnt="4">
+        <dgm:presLayoutVars>
+          <dgm:bulletEnabled val="1"/>
+        </dgm:presLayoutVars>
+      </dgm:prSet>
+      <dgm:spPr/>
+    </dgm:pt>
+    <dgm:pt modelId="{00AD2CC1-E211-4CFF-A9B2-67FC64D14459}" type="pres">
+      <dgm:prSet presAssocID="{55984B9E-0D3F-4FAD-8385-14CE83ECD63D}" presName="parSpace" presStyleCnt="0"/>
+      <dgm:spPr/>
+    </dgm:pt>
+    <dgm:pt modelId="{903FC15E-8A12-4ACF-90BF-441209C11D87}" type="pres">
+      <dgm:prSet presAssocID="{6D71B52B-3920-4F69-82CF-D2F6B276680D}" presName="parTxOnly" presStyleLbl="node1" presStyleIdx="3" presStyleCnt="4">
+        <dgm:presLayoutVars>
+          <dgm:bulletEnabled val="1"/>
+        </dgm:presLayoutVars>
+      </dgm:prSet>
+      <dgm:spPr/>
+    </dgm:pt>
+  </dgm:ptLst>
+  <dgm:cxnLst>
+    <dgm:cxn modelId="{347BB41C-FC86-4550-A2CB-D58B80B9751F}" type="presOf" srcId="{2A8D39A9-50C8-4D4F-B033-79DECE006E66}" destId="{0FFC9F85-D342-4563-A0C2-89C6B83FD375}" srcOrd="0" destOrd="0" presId="urn:microsoft.com/office/officeart/2005/8/layout/hChevron3"/>
+    <dgm:cxn modelId="{92E5502B-D54D-4966-9E24-506A6D560BD2}" srcId="{1BAF38FA-668C-42FF-833B-8125D0660C5A}" destId="{6D71B52B-3920-4F69-82CF-D2F6B276680D}" srcOrd="3" destOrd="0" parTransId="{D523D338-016A-4C79-9BD8-F4C65FDC3E4A}" sibTransId="{CD4D0C60-FE61-48F8-A8F6-566EF2190D5C}"/>
+    <dgm:cxn modelId="{CFE9B22D-431F-42D5-A9DD-A34070B50E6D}" srcId="{1BAF38FA-668C-42FF-833B-8125D0660C5A}" destId="{02F2DEB5-04B2-43B0-AE1F-484092092F8C}" srcOrd="0" destOrd="0" parTransId="{086CFFA7-5016-4BB1-BF31-ADB78F91B03E}" sibTransId="{98B402DD-A062-43D3-B135-4A9AE401840E}"/>
+    <dgm:cxn modelId="{7E7A1337-859F-4F61-9A78-82F7E8764017}" type="presOf" srcId="{3F8A6D25-EC33-4E79-9F36-36771A974919}" destId="{927287C2-A3D7-40DA-9CC5-879018D16C6C}" srcOrd="0" destOrd="0" presId="urn:microsoft.com/office/officeart/2005/8/layout/hChevron3"/>
+    <dgm:cxn modelId="{C8B7E64E-D047-4A1C-842A-C4653D06E0DB}" type="presOf" srcId="{1BAF38FA-668C-42FF-833B-8125D0660C5A}" destId="{CDD65885-70A5-408A-AD16-60B5296FD84F}" srcOrd="0" destOrd="0" presId="urn:microsoft.com/office/officeart/2005/8/layout/hChevron3"/>
+    <dgm:cxn modelId="{69FDE357-9944-440F-9DEB-FDD0AD8A9BFE}" type="presOf" srcId="{6D71B52B-3920-4F69-82CF-D2F6B276680D}" destId="{903FC15E-8A12-4ACF-90BF-441209C11D87}" srcOrd="0" destOrd="0" presId="urn:microsoft.com/office/officeart/2005/8/layout/hChevron3"/>
+    <dgm:cxn modelId="{2667F885-9801-44B0-94AB-28C9292F3E74}" srcId="{1BAF38FA-668C-42FF-833B-8125D0660C5A}" destId="{2A8D39A9-50C8-4D4F-B033-79DECE006E66}" srcOrd="2" destOrd="0" parTransId="{315C08A7-84C9-4B75-B41E-C170BAF53261}" sibTransId="{55984B9E-0D3F-4FAD-8385-14CE83ECD63D}"/>
+    <dgm:cxn modelId="{0C42CAF2-971C-4068-B645-A373CE11E869}" srcId="{1BAF38FA-668C-42FF-833B-8125D0660C5A}" destId="{3F8A6D25-EC33-4E79-9F36-36771A974919}" srcOrd="1" destOrd="0" parTransId="{2214299D-707F-429C-A23D-9EE2F39CF74A}" sibTransId="{F5C31149-F876-40A6-9FD4-9FC1A73D7103}"/>
+    <dgm:cxn modelId="{3020AFFF-29FB-4253-9067-BC7D344E83A9}" type="presOf" srcId="{02F2DEB5-04B2-43B0-AE1F-484092092F8C}" destId="{3B3B9CF9-ACCC-4AAF-B159-A5ECCE9F91FA}" srcOrd="0" destOrd="0" presId="urn:microsoft.com/office/officeart/2005/8/layout/hChevron3"/>
+    <dgm:cxn modelId="{E191ADB3-48DE-4471-9D7B-B06436C72291}" type="presParOf" srcId="{CDD65885-70A5-408A-AD16-60B5296FD84F}" destId="{3B3B9CF9-ACCC-4AAF-B159-A5ECCE9F91FA}" srcOrd="0" destOrd="0" presId="urn:microsoft.com/office/officeart/2005/8/layout/hChevron3"/>
+    <dgm:cxn modelId="{F6ECF3E2-766C-40B1-9FEF-D2B9A3751F52}" type="presParOf" srcId="{CDD65885-70A5-408A-AD16-60B5296FD84F}" destId="{5EA737B2-FAEA-4E29-B7AB-D4AF56C6722A}" srcOrd="1" destOrd="0" presId="urn:microsoft.com/office/officeart/2005/8/layout/hChevron3"/>
+    <dgm:cxn modelId="{5F4A39DD-EE71-415A-B0B3-627A8BABEDC4}" type="presParOf" srcId="{CDD65885-70A5-408A-AD16-60B5296FD84F}" destId="{927287C2-A3D7-40DA-9CC5-879018D16C6C}" srcOrd="2" destOrd="0" presId="urn:microsoft.com/office/officeart/2005/8/layout/hChevron3"/>
+    <dgm:cxn modelId="{4E7C4957-7013-4E83-83C2-B10253353E78}" type="presParOf" srcId="{CDD65885-70A5-408A-AD16-60B5296FD84F}" destId="{D7399875-5945-4082-A56B-0967B2FF1CAA}" srcOrd="3" destOrd="0" presId="urn:microsoft.com/office/officeart/2005/8/layout/hChevron3"/>
+    <dgm:cxn modelId="{FB86EB6A-5434-47EA-AB12-3A0CDAB33EE4}" type="presParOf" srcId="{CDD65885-70A5-408A-AD16-60B5296FD84F}" destId="{0FFC9F85-D342-4563-A0C2-89C6B83FD375}" srcOrd="4" destOrd="0" presId="urn:microsoft.com/office/officeart/2005/8/layout/hChevron3"/>
+    <dgm:cxn modelId="{78C80DD3-464A-4A52-99A1-54586C54E2F3}" type="presParOf" srcId="{CDD65885-70A5-408A-AD16-60B5296FD84F}" destId="{00AD2CC1-E211-4CFF-A9B2-67FC64D14459}" srcOrd="5" destOrd="0" presId="urn:microsoft.com/office/officeart/2005/8/layout/hChevron3"/>
+    <dgm:cxn modelId="{6ACBF150-7D73-4DED-A989-4E37B02A320F}" type="presParOf" srcId="{CDD65885-70A5-408A-AD16-60B5296FD84F}" destId="{903FC15E-8A12-4ACF-90BF-441209C11D87}" srcOrd="6" destOrd="0" presId="urn:microsoft.com/office/officeart/2005/8/layout/hChevron3"/>
+  </dgm:cxnLst>
+  <dgm:bg/>
+  <dgm:whole/>
+  <dgm:extLst>
+    <a:ext uri="http://schemas.microsoft.com/office/drawing/2008/diagram">
+      <dsp:dataModelExt xmlns:dsp="http://schemas.microsoft.com/office/drawing/2008/diagram" relId="rId9" minVer="http://schemas.openxmlformats.org/drawingml/2006/diagram"/>
+    </a:ext>
+  </dgm:extLst>
+</dgm:dataModel>
+</file>
+
+<file path=ppt/diagrams/data9.xml><?xml version="1.0" encoding="utf-8"?>
+<dgm:dataModel xmlns:dgm="http://schemas.openxmlformats.org/drawingml/2006/diagram" xmlns:a="http://schemas.openxmlformats.org/drawingml/2006/main">
+  <dgm:ptLst>
+    <dgm:pt modelId="{1BAF38FA-668C-42FF-833B-8125D0660C5A}" type="doc">
       <dgm:prSet loTypeId="urn:microsoft.com/office/officeart/2005/8/layout/hChevron3" loCatId="process" qsTypeId="urn:microsoft.com/office/officeart/2005/8/quickstyle/simple1" qsCatId="simple" csTypeId="urn:microsoft.com/office/officeart/2005/8/colors/accent1_2" csCatId="accent1" phldr="1"/>
       <dgm:spPr/>
       <dgm:t>
@@ -8790,277 +10151,6 @@
   <dgm:extLst>
     <a:ext uri="http://schemas.microsoft.com/office/drawing/2008/diagram">
       <dsp:dataModelExt xmlns:dsp="http://schemas.microsoft.com/office/drawing/2008/diagram" relId="rId10" minVer="http://schemas.openxmlformats.org/drawingml/2006/diagram"/>
-    </a:ext>
-  </dgm:extLst>
-</dgm:dataModel>
-</file>
-
-<file path=ppt/diagrams/data9.xml><?xml version="1.0" encoding="utf-8"?>
-<dgm:dataModel xmlns:dgm="http://schemas.openxmlformats.org/drawingml/2006/diagram" xmlns:a="http://schemas.openxmlformats.org/drawingml/2006/main">
-  <dgm:ptLst>
-    <dgm:pt modelId="{1BAF38FA-668C-42FF-833B-8125D0660C5A}" type="doc">
-      <dgm:prSet loTypeId="urn:microsoft.com/office/officeart/2005/8/layout/hChevron3" loCatId="process" qsTypeId="urn:microsoft.com/office/officeart/2005/8/quickstyle/simple1" qsCatId="simple" csTypeId="urn:microsoft.com/office/officeart/2005/8/colors/accent1_2" csCatId="accent1" phldr="1"/>
-      <dgm:spPr/>
-      <dgm:t>
-        <a:bodyPr/>
-        <a:lstStyle/>
-        <a:p>
-          <a:endParaRPr lang="en-US"/>
-        </a:p>
-      </dgm:t>
-    </dgm:pt>
-    <dgm:pt modelId="{02F2DEB5-04B2-43B0-AE1F-484092092F8C}">
-      <dgm:prSet phldrT="[Text]" phldr="0"/>
-      <dgm:spPr>
-        <a:ln>
-          <a:solidFill>
-            <a:schemeClr val="accent1"/>
-          </a:solidFill>
-        </a:ln>
-      </dgm:spPr>
-      <dgm:t>
-        <a:bodyPr/>
-        <a:lstStyle/>
-        <a:p>
-          <a:endParaRPr lang="en-US"/>
-        </a:p>
-      </dgm:t>
-    </dgm:pt>
-    <dgm:pt modelId="{086CFFA7-5016-4BB1-BF31-ADB78F91B03E}" type="parTrans" cxnId="{CFE9B22D-431F-42D5-A9DD-A34070B50E6D}">
-      <dgm:prSet/>
-      <dgm:spPr/>
-      <dgm:t>
-        <a:bodyPr/>
-        <a:lstStyle/>
-        <a:p>
-          <a:endParaRPr lang="en-US"/>
-        </a:p>
-      </dgm:t>
-    </dgm:pt>
-    <dgm:pt modelId="{98B402DD-A062-43D3-B135-4A9AE401840E}" type="sibTrans" cxnId="{CFE9B22D-431F-42D5-A9DD-A34070B50E6D}">
-      <dgm:prSet/>
-      <dgm:spPr/>
-      <dgm:t>
-        <a:bodyPr/>
-        <a:lstStyle/>
-        <a:p>
-          <a:endParaRPr lang="en-US"/>
-        </a:p>
-      </dgm:t>
-    </dgm:pt>
-    <dgm:pt modelId="{3F8A6D25-EC33-4E79-9F36-36771A974919}">
-      <dgm:prSet phldrT="[Text]" phldr="0"/>
-      <dgm:spPr>
-        <a:solidFill>
-          <a:schemeClr val="tx1">
-            <a:lumMod val="95000"/>
-          </a:schemeClr>
-        </a:solidFill>
-        <a:ln>
-          <a:solidFill>
-            <a:schemeClr val="accent1"/>
-          </a:solidFill>
-        </a:ln>
-      </dgm:spPr>
-      <dgm:t>
-        <a:bodyPr/>
-        <a:lstStyle/>
-        <a:p>
-          <a:endParaRPr lang="en-US" dirty="0"/>
-        </a:p>
-      </dgm:t>
-    </dgm:pt>
-    <dgm:pt modelId="{2214299D-707F-429C-A23D-9EE2F39CF74A}" type="parTrans" cxnId="{0C42CAF2-971C-4068-B645-A373CE11E869}">
-      <dgm:prSet/>
-      <dgm:spPr/>
-      <dgm:t>
-        <a:bodyPr/>
-        <a:lstStyle/>
-        <a:p>
-          <a:endParaRPr lang="en-US"/>
-        </a:p>
-      </dgm:t>
-    </dgm:pt>
-    <dgm:pt modelId="{F5C31149-F876-40A6-9FD4-9FC1A73D7103}" type="sibTrans" cxnId="{0C42CAF2-971C-4068-B645-A373CE11E869}">
-      <dgm:prSet/>
-      <dgm:spPr/>
-      <dgm:t>
-        <a:bodyPr/>
-        <a:lstStyle/>
-        <a:p>
-          <a:endParaRPr lang="en-US"/>
-        </a:p>
-      </dgm:t>
-    </dgm:pt>
-    <dgm:pt modelId="{2A8D39A9-50C8-4D4F-B033-79DECE006E66}">
-      <dgm:prSet phldrT="[Text]" phldr="0"/>
-      <dgm:spPr>
-        <a:solidFill>
-          <a:schemeClr val="tx1">
-            <a:lumMod val="95000"/>
-          </a:schemeClr>
-        </a:solidFill>
-        <a:ln>
-          <a:solidFill>
-            <a:schemeClr val="accent1"/>
-          </a:solidFill>
-        </a:ln>
-      </dgm:spPr>
-      <dgm:t>
-        <a:bodyPr/>
-        <a:lstStyle/>
-        <a:p>
-          <a:endParaRPr lang="en-US" dirty="0"/>
-        </a:p>
-      </dgm:t>
-    </dgm:pt>
-    <dgm:pt modelId="{315C08A7-84C9-4B75-B41E-C170BAF53261}" type="parTrans" cxnId="{2667F885-9801-44B0-94AB-28C9292F3E74}">
-      <dgm:prSet/>
-      <dgm:spPr/>
-      <dgm:t>
-        <a:bodyPr/>
-        <a:lstStyle/>
-        <a:p>
-          <a:endParaRPr lang="en-US"/>
-        </a:p>
-      </dgm:t>
-    </dgm:pt>
-    <dgm:pt modelId="{55984B9E-0D3F-4FAD-8385-14CE83ECD63D}" type="sibTrans" cxnId="{2667F885-9801-44B0-94AB-28C9292F3E74}">
-      <dgm:prSet/>
-      <dgm:spPr/>
-      <dgm:t>
-        <a:bodyPr/>
-        <a:lstStyle/>
-        <a:p>
-          <a:endParaRPr lang="en-US"/>
-        </a:p>
-      </dgm:t>
-    </dgm:pt>
-    <dgm:pt modelId="{6D71B52B-3920-4F69-82CF-D2F6B276680D}">
-      <dgm:prSet phldrT="[Text]" phldr="0"/>
-      <dgm:spPr>
-        <a:solidFill>
-          <a:schemeClr val="tx1">
-            <a:lumMod val="95000"/>
-          </a:schemeClr>
-        </a:solidFill>
-        <a:ln>
-          <a:solidFill>
-            <a:schemeClr val="accent1"/>
-          </a:solidFill>
-        </a:ln>
-      </dgm:spPr>
-      <dgm:t>
-        <a:bodyPr/>
-        <a:lstStyle/>
-        <a:p>
-          <a:endParaRPr lang="en-US" dirty="0"/>
-        </a:p>
-      </dgm:t>
-    </dgm:pt>
-    <dgm:pt modelId="{D523D338-016A-4C79-9BD8-F4C65FDC3E4A}" type="parTrans" cxnId="{92E5502B-D54D-4966-9E24-506A6D560BD2}">
-      <dgm:prSet/>
-      <dgm:spPr/>
-      <dgm:t>
-        <a:bodyPr/>
-        <a:lstStyle/>
-        <a:p>
-          <a:endParaRPr lang="en-US"/>
-        </a:p>
-      </dgm:t>
-    </dgm:pt>
-    <dgm:pt modelId="{CD4D0C60-FE61-48F8-A8F6-566EF2190D5C}" type="sibTrans" cxnId="{92E5502B-D54D-4966-9E24-506A6D560BD2}">
-      <dgm:prSet/>
-      <dgm:spPr/>
-      <dgm:t>
-        <a:bodyPr/>
-        <a:lstStyle/>
-        <a:p>
-          <a:endParaRPr lang="en-US"/>
-        </a:p>
-      </dgm:t>
-    </dgm:pt>
-    <dgm:pt modelId="{CDD65885-70A5-408A-AD16-60B5296FD84F}" type="pres">
-      <dgm:prSet presAssocID="{1BAF38FA-668C-42FF-833B-8125D0660C5A}" presName="Name0" presStyleCnt="0">
-        <dgm:presLayoutVars>
-          <dgm:dir/>
-          <dgm:resizeHandles val="exact"/>
-        </dgm:presLayoutVars>
-      </dgm:prSet>
-      <dgm:spPr/>
-    </dgm:pt>
-    <dgm:pt modelId="{3B3B9CF9-ACCC-4AAF-B159-A5ECCE9F91FA}" type="pres">
-      <dgm:prSet presAssocID="{02F2DEB5-04B2-43B0-AE1F-484092092F8C}" presName="parTxOnly" presStyleLbl="node1" presStyleIdx="0" presStyleCnt="4">
-        <dgm:presLayoutVars>
-          <dgm:bulletEnabled val="1"/>
-        </dgm:presLayoutVars>
-      </dgm:prSet>
-      <dgm:spPr/>
-    </dgm:pt>
-    <dgm:pt modelId="{5EA737B2-FAEA-4E29-B7AB-D4AF56C6722A}" type="pres">
-      <dgm:prSet presAssocID="{98B402DD-A062-43D3-B135-4A9AE401840E}" presName="parSpace" presStyleCnt="0"/>
-      <dgm:spPr/>
-    </dgm:pt>
-    <dgm:pt modelId="{927287C2-A3D7-40DA-9CC5-879018D16C6C}" type="pres">
-      <dgm:prSet presAssocID="{3F8A6D25-EC33-4E79-9F36-36771A974919}" presName="parTxOnly" presStyleLbl="node1" presStyleIdx="1" presStyleCnt="4">
-        <dgm:presLayoutVars>
-          <dgm:bulletEnabled val="1"/>
-        </dgm:presLayoutVars>
-      </dgm:prSet>
-      <dgm:spPr/>
-    </dgm:pt>
-    <dgm:pt modelId="{D7399875-5945-4082-A56B-0967B2FF1CAA}" type="pres">
-      <dgm:prSet presAssocID="{F5C31149-F876-40A6-9FD4-9FC1A73D7103}" presName="parSpace" presStyleCnt="0"/>
-      <dgm:spPr/>
-    </dgm:pt>
-    <dgm:pt modelId="{0FFC9F85-D342-4563-A0C2-89C6B83FD375}" type="pres">
-      <dgm:prSet presAssocID="{2A8D39A9-50C8-4D4F-B033-79DECE006E66}" presName="parTxOnly" presStyleLbl="node1" presStyleIdx="2" presStyleCnt="4">
-        <dgm:presLayoutVars>
-          <dgm:bulletEnabled val="1"/>
-        </dgm:presLayoutVars>
-      </dgm:prSet>
-      <dgm:spPr/>
-    </dgm:pt>
-    <dgm:pt modelId="{00AD2CC1-E211-4CFF-A9B2-67FC64D14459}" type="pres">
-      <dgm:prSet presAssocID="{55984B9E-0D3F-4FAD-8385-14CE83ECD63D}" presName="parSpace" presStyleCnt="0"/>
-      <dgm:spPr/>
-    </dgm:pt>
-    <dgm:pt modelId="{903FC15E-8A12-4ACF-90BF-441209C11D87}" type="pres">
-      <dgm:prSet presAssocID="{6D71B52B-3920-4F69-82CF-D2F6B276680D}" presName="parTxOnly" presStyleLbl="node1" presStyleIdx="3" presStyleCnt="4">
-        <dgm:presLayoutVars>
-          <dgm:bulletEnabled val="1"/>
-        </dgm:presLayoutVars>
-      </dgm:prSet>
-      <dgm:spPr/>
-    </dgm:pt>
-  </dgm:ptLst>
-  <dgm:cxnLst>
-    <dgm:cxn modelId="{347BB41C-FC86-4550-A2CB-D58B80B9751F}" type="presOf" srcId="{2A8D39A9-50C8-4D4F-B033-79DECE006E66}" destId="{0FFC9F85-D342-4563-A0C2-89C6B83FD375}" srcOrd="0" destOrd="0" presId="urn:microsoft.com/office/officeart/2005/8/layout/hChevron3"/>
-    <dgm:cxn modelId="{92E5502B-D54D-4966-9E24-506A6D560BD2}" srcId="{1BAF38FA-668C-42FF-833B-8125D0660C5A}" destId="{6D71B52B-3920-4F69-82CF-D2F6B276680D}" srcOrd="3" destOrd="0" parTransId="{D523D338-016A-4C79-9BD8-F4C65FDC3E4A}" sibTransId="{CD4D0C60-FE61-48F8-A8F6-566EF2190D5C}"/>
-    <dgm:cxn modelId="{CFE9B22D-431F-42D5-A9DD-A34070B50E6D}" srcId="{1BAF38FA-668C-42FF-833B-8125D0660C5A}" destId="{02F2DEB5-04B2-43B0-AE1F-484092092F8C}" srcOrd="0" destOrd="0" parTransId="{086CFFA7-5016-4BB1-BF31-ADB78F91B03E}" sibTransId="{98B402DD-A062-43D3-B135-4A9AE401840E}"/>
-    <dgm:cxn modelId="{7E7A1337-859F-4F61-9A78-82F7E8764017}" type="presOf" srcId="{3F8A6D25-EC33-4E79-9F36-36771A974919}" destId="{927287C2-A3D7-40DA-9CC5-879018D16C6C}" srcOrd="0" destOrd="0" presId="urn:microsoft.com/office/officeart/2005/8/layout/hChevron3"/>
-    <dgm:cxn modelId="{C8B7E64E-D047-4A1C-842A-C4653D06E0DB}" type="presOf" srcId="{1BAF38FA-668C-42FF-833B-8125D0660C5A}" destId="{CDD65885-70A5-408A-AD16-60B5296FD84F}" srcOrd="0" destOrd="0" presId="urn:microsoft.com/office/officeart/2005/8/layout/hChevron3"/>
-    <dgm:cxn modelId="{69FDE357-9944-440F-9DEB-FDD0AD8A9BFE}" type="presOf" srcId="{6D71B52B-3920-4F69-82CF-D2F6B276680D}" destId="{903FC15E-8A12-4ACF-90BF-441209C11D87}" srcOrd="0" destOrd="0" presId="urn:microsoft.com/office/officeart/2005/8/layout/hChevron3"/>
-    <dgm:cxn modelId="{2667F885-9801-44B0-94AB-28C9292F3E74}" srcId="{1BAF38FA-668C-42FF-833B-8125D0660C5A}" destId="{2A8D39A9-50C8-4D4F-B033-79DECE006E66}" srcOrd="2" destOrd="0" parTransId="{315C08A7-84C9-4B75-B41E-C170BAF53261}" sibTransId="{55984B9E-0D3F-4FAD-8385-14CE83ECD63D}"/>
-    <dgm:cxn modelId="{0C42CAF2-971C-4068-B645-A373CE11E869}" srcId="{1BAF38FA-668C-42FF-833B-8125D0660C5A}" destId="{3F8A6D25-EC33-4E79-9F36-36771A974919}" srcOrd="1" destOrd="0" parTransId="{2214299D-707F-429C-A23D-9EE2F39CF74A}" sibTransId="{F5C31149-F876-40A6-9FD4-9FC1A73D7103}"/>
-    <dgm:cxn modelId="{3020AFFF-29FB-4253-9067-BC7D344E83A9}" type="presOf" srcId="{02F2DEB5-04B2-43B0-AE1F-484092092F8C}" destId="{3B3B9CF9-ACCC-4AAF-B159-A5ECCE9F91FA}" srcOrd="0" destOrd="0" presId="urn:microsoft.com/office/officeart/2005/8/layout/hChevron3"/>
-    <dgm:cxn modelId="{E191ADB3-48DE-4471-9D7B-B06436C72291}" type="presParOf" srcId="{CDD65885-70A5-408A-AD16-60B5296FD84F}" destId="{3B3B9CF9-ACCC-4AAF-B159-A5ECCE9F91FA}" srcOrd="0" destOrd="0" presId="urn:microsoft.com/office/officeart/2005/8/layout/hChevron3"/>
-    <dgm:cxn modelId="{F6ECF3E2-766C-40B1-9FEF-D2B9A3751F52}" type="presParOf" srcId="{CDD65885-70A5-408A-AD16-60B5296FD84F}" destId="{5EA737B2-FAEA-4E29-B7AB-D4AF56C6722A}" srcOrd="1" destOrd="0" presId="urn:microsoft.com/office/officeart/2005/8/layout/hChevron3"/>
-    <dgm:cxn modelId="{5F4A39DD-EE71-415A-B0B3-627A8BABEDC4}" type="presParOf" srcId="{CDD65885-70A5-408A-AD16-60B5296FD84F}" destId="{927287C2-A3D7-40DA-9CC5-879018D16C6C}" srcOrd="2" destOrd="0" presId="urn:microsoft.com/office/officeart/2005/8/layout/hChevron3"/>
-    <dgm:cxn modelId="{4E7C4957-7013-4E83-83C2-B10253353E78}" type="presParOf" srcId="{CDD65885-70A5-408A-AD16-60B5296FD84F}" destId="{D7399875-5945-4082-A56B-0967B2FF1CAA}" srcOrd="3" destOrd="0" presId="urn:microsoft.com/office/officeart/2005/8/layout/hChevron3"/>
-    <dgm:cxn modelId="{FB86EB6A-5434-47EA-AB12-3A0CDAB33EE4}" type="presParOf" srcId="{CDD65885-70A5-408A-AD16-60B5296FD84F}" destId="{0FFC9F85-D342-4563-A0C2-89C6B83FD375}" srcOrd="4" destOrd="0" presId="urn:microsoft.com/office/officeart/2005/8/layout/hChevron3"/>
-    <dgm:cxn modelId="{78C80DD3-464A-4A52-99A1-54586C54E2F3}" type="presParOf" srcId="{CDD65885-70A5-408A-AD16-60B5296FD84F}" destId="{00AD2CC1-E211-4CFF-A9B2-67FC64D14459}" srcOrd="5" destOrd="0" presId="urn:microsoft.com/office/officeart/2005/8/layout/hChevron3"/>
-    <dgm:cxn modelId="{6ACBF150-7D73-4DED-A989-4E37B02A320F}" type="presParOf" srcId="{CDD65885-70A5-408A-AD16-60B5296FD84F}" destId="{903FC15E-8A12-4ACF-90BF-441209C11D87}" srcOrd="6" destOrd="0" presId="urn:microsoft.com/office/officeart/2005/8/layout/hChevron3"/>
-  </dgm:cxnLst>
-  <dgm:bg/>
-  <dgm:whole>
-    <a:ln>
-      <a:noFill/>
-    </a:ln>
-  </dgm:whole>
-  <dgm:extLst>
-    <a:ext uri="http://schemas.microsoft.com/office/drawing/2008/diagram">
-      <dsp:dataModelExt xmlns:dsp="http://schemas.microsoft.com/office/drawing/2008/diagram" relId="rId9" minVer="http://schemas.openxmlformats.org/drawingml/2006/diagram"/>
     </a:ext>
   </dgm:extLst>
 </dgm:dataModel>
@@ -9382,6 +10472,285 @@
       <dsp:txXfrm>
         <a:off x="673093" y="927033"/>
         <a:ext cx="1026037" cy="1008036"/>
+      </dsp:txXfrm>
+    </dsp:sp>
+  </dsp:spTree>
+</dsp:drawing>
+</file>
+
+<file path=ppt/diagrams/drawing10.xml><?xml version="1.0" encoding="utf-8"?>
+<dsp:drawing xmlns:dgm="http://schemas.openxmlformats.org/drawingml/2006/diagram" xmlns:dsp="http://schemas.microsoft.com/office/drawing/2008/diagram" xmlns:a="http://schemas.openxmlformats.org/drawingml/2006/main">
+  <dsp:spTree>
+    <dsp:nvGrpSpPr>
+      <dsp:cNvPr id="0" name=""/>
+      <dsp:cNvGrpSpPr/>
+    </dsp:nvGrpSpPr>
+    <dsp:grpSpPr/>
+    <dsp:sp modelId="{3B3B9CF9-ACCC-4AAF-B159-A5ECCE9F91FA}">
+      <dsp:nvSpPr>
+        <dsp:cNvPr id="0" name=""/>
+        <dsp:cNvSpPr/>
+      </dsp:nvSpPr>
+      <dsp:spPr>
+        <a:xfrm>
+          <a:off x="2381" y="226207"/>
+          <a:ext cx="2389187" cy="955675"/>
+        </a:xfrm>
+        <a:prstGeom prst="homePlate">
+          <a:avLst/>
+        </a:prstGeom>
+        <a:solidFill>
+          <a:schemeClr val="accent1">
+            <a:hueOff val="0"/>
+            <a:satOff val="0"/>
+            <a:lumOff val="0"/>
+            <a:alphaOff val="0"/>
+          </a:schemeClr>
+        </a:solidFill>
+        <a:ln w="19050" cap="rnd" cmpd="sng" algn="ctr">
+          <a:solidFill>
+            <a:schemeClr val="accent1"/>
+          </a:solidFill>
+          <a:prstDash val="solid"/>
+        </a:ln>
+        <a:effectLst/>
+      </dsp:spPr>
+      <dsp:style>
+        <a:lnRef idx="2">
+          <a:scrgbClr r="0" g="0" b="0"/>
+        </a:lnRef>
+        <a:fillRef idx="1">
+          <a:scrgbClr r="0" g="0" b="0"/>
+        </a:fillRef>
+        <a:effectRef idx="0">
+          <a:scrgbClr r="0" g="0" b="0"/>
+        </a:effectRef>
+        <a:fontRef idx="minor">
+          <a:schemeClr val="lt1"/>
+        </a:fontRef>
+      </dsp:style>
+      <dsp:txBody>
+        <a:bodyPr spcFirstLastPara="0" vert="horz" wrap="square" lIns="261366" tIns="130683" rIns="65342" bIns="130683" numCol="1" spcCol="1270" anchor="ctr" anchorCtr="0">
+          <a:noAutofit/>
+        </a:bodyPr>
+        <a:lstStyle/>
+        <a:p>
+          <a:pPr marL="0" lvl="0" indent="0" algn="ctr" defTabSz="2178050">
+            <a:lnSpc>
+              <a:spcPct val="90000"/>
+            </a:lnSpc>
+            <a:spcBef>
+              <a:spcPct val="0"/>
+            </a:spcBef>
+            <a:spcAft>
+              <a:spcPct val="35000"/>
+            </a:spcAft>
+            <a:buNone/>
+          </a:pPr>
+          <a:endParaRPr lang="en-US" sz="4900" kern="1200"/>
+        </a:p>
+      </dsp:txBody>
+      <dsp:txXfrm>
+        <a:off x="2381" y="226207"/>
+        <a:ext cx="2150268" cy="955675"/>
+      </dsp:txXfrm>
+    </dsp:sp>
+    <dsp:sp modelId="{927287C2-A3D7-40DA-9CC5-879018D16C6C}">
+      <dsp:nvSpPr>
+        <dsp:cNvPr id="0" name=""/>
+        <dsp:cNvSpPr/>
+      </dsp:nvSpPr>
+      <dsp:spPr>
+        <a:xfrm>
+          <a:off x="1913731" y="226207"/>
+          <a:ext cx="2389187" cy="955675"/>
+        </a:xfrm>
+        <a:prstGeom prst="chevron">
+          <a:avLst/>
+        </a:prstGeom>
+        <a:solidFill>
+          <a:schemeClr val="tx1">
+            <a:lumMod val="95000"/>
+          </a:schemeClr>
+        </a:solidFill>
+        <a:ln w="19050" cap="rnd" cmpd="sng" algn="ctr">
+          <a:solidFill>
+            <a:schemeClr val="accent1"/>
+          </a:solidFill>
+          <a:prstDash val="solid"/>
+        </a:ln>
+        <a:effectLst/>
+      </dsp:spPr>
+      <dsp:style>
+        <a:lnRef idx="2">
+          <a:scrgbClr r="0" g="0" b="0"/>
+        </a:lnRef>
+        <a:fillRef idx="1">
+          <a:scrgbClr r="0" g="0" b="0"/>
+        </a:fillRef>
+        <a:effectRef idx="0">
+          <a:scrgbClr r="0" g="0" b="0"/>
+        </a:effectRef>
+        <a:fontRef idx="minor">
+          <a:schemeClr val="lt1"/>
+        </a:fontRef>
+      </dsp:style>
+      <dsp:txBody>
+        <a:bodyPr spcFirstLastPara="0" vert="horz" wrap="square" lIns="196025" tIns="130683" rIns="65342" bIns="130683" numCol="1" spcCol="1270" anchor="ctr" anchorCtr="0">
+          <a:noAutofit/>
+        </a:bodyPr>
+        <a:lstStyle/>
+        <a:p>
+          <a:pPr marL="0" lvl="0" indent="0" algn="ctr" defTabSz="2178050">
+            <a:lnSpc>
+              <a:spcPct val="90000"/>
+            </a:lnSpc>
+            <a:spcBef>
+              <a:spcPct val="0"/>
+            </a:spcBef>
+            <a:spcAft>
+              <a:spcPct val="35000"/>
+            </a:spcAft>
+            <a:buNone/>
+          </a:pPr>
+          <a:endParaRPr lang="en-US" sz="4900" kern="1200" dirty="0"/>
+        </a:p>
+      </dsp:txBody>
+      <dsp:txXfrm>
+        <a:off x="2391569" y="226207"/>
+        <a:ext cx="1433512" cy="955675"/>
+      </dsp:txXfrm>
+    </dsp:sp>
+    <dsp:sp modelId="{0FFC9F85-D342-4563-A0C2-89C6B83FD375}">
+      <dsp:nvSpPr>
+        <dsp:cNvPr id="0" name=""/>
+        <dsp:cNvSpPr/>
+      </dsp:nvSpPr>
+      <dsp:spPr>
+        <a:xfrm>
+          <a:off x="3825081" y="226207"/>
+          <a:ext cx="2389187" cy="955675"/>
+        </a:xfrm>
+        <a:prstGeom prst="chevron">
+          <a:avLst/>
+        </a:prstGeom>
+        <a:solidFill>
+          <a:schemeClr val="tx1">
+            <a:lumMod val="95000"/>
+          </a:schemeClr>
+        </a:solidFill>
+        <a:ln w="19050" cap="rnd" cmpd="sng" algn="ctr">
+          <a:solidFill>
+            <a:schemeClr val="accent1"/>
+          </a:solidFill>
+          <a:prstDash val="solid"/>
+        </a:ln>
+        <a:effectLst/>
+      </dsp:spPr>
+      <dsp:style>
+        <a:lnRef idx="2">
+          <a:scrgbClr r="0" g="0" b="0"/>
+        </a:lnRef>
+        <a:fillRef idx="1">
+          <a:scrgbClr r="0" g="0" b="0"/>
+        </a:fillRef>
+        <a:effectRef idx="0">
+          <a:scrgbClr r="0" g="0" b="0"/>
+        </a:effectRef>
+        <a:fontRef idx="minor">
+          <a:schemeClr val="lt1"/>
+        </a:fontRef>
+      </dsp:style>
+      <dsp:txBody>
+        <a:bodyPr spcFirstLastPara="0" vert="horz" wrap="square" lIns="196025" tIns="130683" rIns="65342" bIns="130683" numCol="1" spcCol="1270" anchor="ctr" anchorCtr="0">
+          <a:noAutofit/>
+        </a:bodyPr>
+        <a:lstStyle/>
+        <a:p>
+          <a:pPr marL="0" lvl="0" indent="0" algn="ctr" defTabSz="2178050">
+            <a:lnSpc>
+              <a:spcPct val="90000"/>
+            </a:lnSpc>
+            <a:spcBef>
+              <a:spcPct val="0"/>
+            </a:spcBef>
+            <a:spcAft>
+              <a:spcPct val="35000"/>
+            </a:spcAft>
+            <a:buNone/>
+          </a:pPr>
+          <a:endParaRPr lang="en-US" sz="4900" kern="1200" dirty="0"/>
+        </a:p>
+      </dsp:txBody>
+      <dsp:txXfrm>
+        <a:off x="4302919" y="226207"/>
+        <a:ext cx="1433512" cy="955675"/>
+      </dsp:txXfrm>
+    </dsp:sp>
+    <dsp:sp modelId="{903FC15E-8A12-4ACF-90BF-441209C11D87}">
+      <dsp:nvSpPr>
+        <dsp:cNvPr id="0" name=""/>
+        <dsp:cNvSpPr/>
+      </dsp:nvSpPr>
+      <dsp:spPr>
+        <a:xfrm>
+          <a:off x="5736431" y="226207"/>
+          <a:ext cx="2389187" cy="955675"/>
+        </a:xfrm>
+        <a:prstGeom prst="chevron">
+          <a:avLst/>
+        </a:prstGeom>
+        <a:solidFill>
+          <a:schemeClr val="tx1">
+            <a:lumMod val="95000"/>
+          </a:schemeClr>
+        </a:solidFill>
+        <a:ln w="19050" cap="rnd" cmpd="sng" algn="ctr">
+          <a:solidFill>
+            <a:schemeClr val="accent1"/>
+          </a:solidFill>
+          <a:prstDash val="solid"/>
+        </a:ln>
+        <a:effectLst/>
+      </dsp:spPr>
+      <dsp:style>
+        <a:lnRef idx="2">
+          <a:scrgbClr r="0" g="0" b="0"/>
+        </a:lnRef>
+        <a:fillRef idx="1">
+          <a:scrgbClr r="0" g="0" b="0"/>
+        </a:fillRef>
+        <a:effectRef idx="0">
+          <a:scrgbClr r="0" g="0" b="0"/>
+        </a:effectRef>
+        <a:fontRef idx="minor">
+          <a:schemeClr val="lt1"/>
+        </a:fontRef>
+      </dsp:style>
+      <dsp:txBody>
+        <a:bodyPr spcFirstLastPara="0" vert="horz" wrap="square" lIns="196025" tIns="130683" rIns="65342" bIns="130683" numCol="1" spcCol="1270" anchor="ctr" anchorCtr="0">
+          <a:noAutofit/>
+        </a:bodyPr>
+        <a:lstStyle/>
+        <a:p>
+          <a:pPr marL="0" lvl="0" indent="0" algn="ctr" defTabSz="2178050">
+            <a:lnSpc>
+              <a:spcPct val="90000"/>
+            </a:lnSpc>
+            <a:spcBef>
+              <a:spcPct val="0"/>
+            </a:spcBef>
+            <a:spcAft>
+              <a:spcPct val="35000"/>
+            </a:spcAft>
+            <a:buNone/>
+          </a:pPr>
+          <a:endParaRPr lang="en-US" sz="4900" kern="1200" dirty="0"/>
+        </a:p>
+      </dsp:txBody>
+      <dsp:txXfrm>
+        <a:off x="6214269" y="226207"/>
+        <a:ext cx="1433512" cy="955675"/>
       </dsp:txXfrm>
     </dsp:sp>
   </dsp:spTree>
@@ -11338,6 +12707,406 @@
       </dsp:nvSpPr>
       <dsp:spPr>
         <a:xfrm>
+          <a:off x="3218" y="431693"/>
+          <a:ext cx="3229188" cy="1291675"/>
+        </a:xfrm>
+        <a:prstGeom prst="homePlate">
+          <a:avLst/>
+        </a:prstGeom>
+        <a:gradFill rotWithShape="0">
+          <a:gsLst>
+            <a:gs pos="0">
+              <a:schemeClr val="accent1">
+                <a:hueOff val="0"/>
+                <a:satOff val="0"/>
+                <a:lumOff val="0"/>
+                <a:alphaOff val="0"/>
+                <a:tint val="98000"/>
+                <a:lumMod val="114000"/>
+              </a:schemeClr>
+            </a:gs>
+            <a:gs pos="100000">
+              <a:schemeClr val="accent1">
+                <a:hueOff val="0"/>
+                <a:satOff val="0"/>
+                <a:lumOff val="0"/>
+                <a:alphaOff val="0"/>
+                <a:shade val="90000"/>
+                <a:lumMod val="84000"/>
+              </a:schemeClr>
+            </a:gs>
+          </a:gsLst>
+          <a:lin ang="5400000" scaled="0"/>
+        </a:gradFill>
+        <a:ln>
+          <a:noFill/>
+        </a:ln>
+        <a:effectLst>
+          <a:outerShdw blurRad="38100" dist="25400" dir="5400000" rotWithShape="0">
+            <a:srgbClr val="000000">
+              <a:alpha val="45000"/>
+            </a:srgbClr>
+          </a:outerShdw>
+        </a:effectLst>
+        <a:scene3d>
+          <a:camera prst="orthographicFront"/>
+          <a:lightRig rig="threePt" dir="t">
+            <a:rot lat="0" lon="0" rev="7500000"/>
+          </a:lightRig>
+        </a:scene3d>
+        <a:sp3d prstMaterial="plastic">
+          <a:bevelT w="127000" h="25400" prst="relaxedInset"/>
+        </a:sp3d>
+      </dsp:spPr>
+      <dsp:style>
+        <a:lnRef idx="0">
+          <a:scrgbClr r="0" g="0" b="0"/>
+        </a:lnRef>
+        <a:fillRef idx="3">
+          <a:scrgbClr r="0" g="0" b="0"/>
+        </a:fillRef>
+        <a:effectRef idx="2">
+          <a:scrgbClr r="0" g="0" b="0"/>
+        </a:effectRef>
+        <a:fontRef idx="minor">
+          <a:schemeClr val="lt1"/>
+        </a:fontRef>
+      </dsp:style>
+      <dsp:txBody>
+        <a:bodyPr spcFirstLastPara="0" vert="horz" wrap="square" lIns="170688" tIns="85344" rIns="42672" bIns="85344" numCol="1" spcCol="1270" anchor="ctr" anchorCtr="0">
+          <a:noAutofit/>
+        </a:bodyPr>
+        <a:lstStyle/>
+        <a:p>
+          <a:pPr marL="0" lvl="0" indent="0" algn="ctr" defTabSz="1422400">
+            <a:lnSpc>
+              <a:spcPct val="90000"/>
+            </a:lnSpc>
+            <a:spcBef>
+              <a:spcPct val="0"/>
+            </a:spcBef>
+            <a:spcAft>
+              <a:spcPct val="35000"/>
+            </a:spcAft>
+            <a:buNone/>
+          </a:pPr>
+          <a:r>
+            <a:rPr lang="en-US" sz="3200" b="1" kern="1200">
+              <a:solidFill>
+                <a:srgbClr val="00B050"/>
+              </a:solidFill>
+              <a:effectLst/>
+            </a:rPr>
+            <a:t>React Foundations</a:t>
+          </a:r>
+          <a:endParaRPr lang="en-US" sz="3200" b="1" kern="1200" dirty="0">
+            <a:solidFill>
+              <a:srgbClr val="00B050"/>
+            </a:solidFill>
+            <a:effectLst/>
+          </a:endParaRPr>
+        </a:p>
+      </dsp:txBody>
+      <dsp:txXfrm>
+        <a:off x="3218" y="431693"/>
+        <a:ext cx="2906269" cy="1291675"/>
+      </dsp:txXfrm>
+    </dsp:sp>
+    <dsp:sp modelId="{927287C2-A3D7-40DA-9CC5-879018D16C6C}">
+      <dsp:nvSpPr>
+        <dsp:cNvPr id="0" name=""/>
+        <dsp:cNvSpPr/>
+      </dsp:nvSpPr>
+      <dsp:spPr>
+        <a:xfrm>
+          <a:off x="2586569" y="431693"/>
+          <a:ext cx="3229188" cy="1291675"/>
+        </a:xfrm>
+        <a:prstGeom prst="chevron">
+          <a:avLst/>
+        </a:prstGeom>
+        <a:solidFill>
+          <a:schemeClr val="tx1">
+            <a:lumMod val="85000"/>
+          </a:schemeClr>
+        </a:solidFill>
+        <a:ln>
+          <a:noFill/>
+        </a:ln>
+        <a:effectLst>
+          <a:outerShdw blurRad="38100" dist="25400" dir="5400000" rotWithShape="0">
+            <a:srgbClr val="000000">
+              <a:alpha val="45000"/>
+            </a:srgbClr>
+          </a:outerShdw>
+        </a:effectLst>
+        <a:scene3d>
+          <a:camera prst="orthographicFront"/>
+          <a:lightRig rig="threePt" dir="t">
+            <a:rot lat="0" lon="0" rev="7500000"/>
+          </a:lightRig>
+        </a:scene3d>
+        <a:sp3d prstMaterial="plastic">
+          <a:bevelT w="127000" h="25400" prst="relaxedInset"/>
+        </a:sp3d>
+      </dsp:spPr>
+      <dsp:style>
+        <a:lnRef idx="0">
+          <a:scrgbClr r="0" g="0" b="0"/>
+        </a:lnRef>
+        <a:fillRef idx="3">
+          <a:scrgbClr r="0" g="0" b="0"/>
+        </a:fillRef>
+        <a:effectRef idx="2">
+          <a:scrgbClr r="0" g="0" b="0"/>
+        </a:effectRef>
+        <a:fontRef idx="minor">
+          <a:schemeClr val="lt1"/>
+        </a:fontRef>
+      </dsp:style>
+      <dsp:txBody>
+        <a:bodyPr spcFirstLastPara="0" vert="horz" wrap="square" lIns="128016" tIns="85344" rIns="42672" bIns="85344" numCol="1" spcCol="1270" anchor="ctr" anchorCtr="0">
+          <a:noAutofit/>
+        </a:bodyPr>
+        <a:lstStyle/>
+        <a:p>
+          <a:pPr marL="0" lvl="0" indent="0" algn="ctr" defTabSz="1422400">
+            <a:lnSpc>
+              <a:spcPct val="90000"/>
+            </a:lnSpc>
+            <a:spcBef>
+              <a:spcPct val="0"/>
+            </a:spcBef>
+            <a:spcAft>
+              <a:spcPct val="35000"/>
+            </a:spcAft>
+            <a:buNone/>
+          </a:pPr>
+          <a:r>
+            <a:rPr lang="en-US" sz="3200" b="1" kern="1200">
+              <a:solidFill>
+                <a:srgbClr val="00B050"/>
+              </a:solidFill>
+              <a:effectLst/>
+            </a:rPr>
+            <a:t>App Router</a:t>
+          </a:r>
+          <a:endParaRPr lang="en-US" sz="3200" b="1" kern="1200" dirty="0">
+            <a:solidFill>
+              <a:srgbClr val="00B050"/>
+            </a:solidFill>
+            <a:effectLst/>
+          </a:endParaRPr>
+        </a:p>
+      </dsp:txBody>
+      <dsp:txXfrm>
+        <a:off x="3232407" y="431693"/>
+        <a:ext cx="1937513" cy="1291675"/>
+      </dsp:txXfrm>
+    </dsp:sp>
+    <dsp:sp modelId="{0FFC9F85-D342-4563-A0C2-89C6B83FD375}">
+      <dsp:nvSpPr>
+        <dsp:cNvPr id="0" name=""/>
+        <dsp:cNvSpPr/>
+      </dsp:nvSpPr>
+      <dsp:spPr>
+        <a:xfrm>
+          <a:off x="5169919" y="431693"/>
+          <a:ext cx="3229188" cy="1291675"/>
+        </a:xfrm>
+        <a:prstGeom prst="chevron">
+          <a:avLst/>
+        </a:prstGeom>
+        <a:solidFill>
+          <a:schemeClr val="tx1">
+            <a:lumMod val="85000"/>
+          </a:schemeClr>
+        </a:solidFill>
+        <a:ln>
+          <a:noFill/>
+        </a:ln>
+        <a:effectLst>
+          <a:outerShdw blurRad="38100" dist="25400" dir="5400000" rotWithShape="0">
+            <a:srgbClr val="000000">
+              <a:alpha val="45000"/>
+            </a:srgbClr>
+          </a:outerShdw>
+        </a:effectLst>
+        <a:scene3d>
+          <a:camera prst="orthographicFront"/>
+          <a:lightRig rig="threePt" dir="t">
+            <a:rot lat="0" lon="0" rev="7500000"/>
+          </a:lightRig>
+        </a:scene3d>
+        <a:sp3d prstMaterial="plastic">
+          <a:bevelT w="127000" h="25400" prst="relaxedInset"/>
+        </a:sp3d>
+      </dsp:spPr>
+      <dsp:style>
+        <a:lnRef idx="0">
+          <a:scrgbClr r="0" g="0" b="0"/>
+        </a:lnRef>
+        <a:fillRef idx="3">
+          <a:scrgbClr r="0" g="0" b="0"/>
+        </a:fillRef>
+        <a:effectRef idx="2">
+          <a:scrgbClr r="0" g="0" b="0"/>
+        </a:effectRef>
+        <a:fontRef idx="minor">
+          <a:schemeClr val="lt1"/>
+        </a:fontRef>
+      </dsp:style>
+      <dsp:txBody>
+        <a:bodyPr spcFirstLastPara="0" vert="horz" wrap="square" lIns="128016" tIns="85344" rIns="42672" bIns="85344" numCol="1" spcCol="1270" anchor="ctr" anchorCtr="0">
+          <a:noAutofit/>
+        </a:bodyPr>
+        <a:lstStyle/>
+        <a:p>
+          <a:pPr marL="0" lvl="0" indent="0" algn="ctr" defTabSz="1422400">
+            <a:lnSpc>
+              <a:spcPct val="90000"/>
+            </a:lnSpc>
+            <a:spcBef>
+              <a:spcPct val="0"/>
+            </a:spcBef>
+            <a:spcAft>
+              <a:spcPct val="35000"/>
+            </a:spcAft>
+            <a:buNone/>
+          </a:pPr>
+          <a:r>
+            <a:rPr lang="en-US" sz="3200" b="1" kern="1200">
+              <a:solidFill>
+                <a:srgbClr val="00B050"/>
+              </a:solidFill>
+              <a:effectLst/>
+            </a:rPr>
+            <a:t>Pages Router</a:t>
+          </a:r>
+          <a:endParaRPr lang="en-US" sz="3200" b="1" kern="1200" dirty="0">
+            <a:solidFill>
+              <a:srgbClr val="00B050"/>
+            </a:solidFill>
+            <a:effectLst/>
+          </a:endParaRPr>
+        </a:p>
+      </dsp:txBody>
+      <dsp:txXfrm>
+        <a:off x="5815757" y="431693"/>
+        <a:ext cx="1937513" cy="1291675"/>
+      </dsp:txXfrm>
+    </dsp:sp>
+    <dsp:sp modelId="{903FC15E-8A12-4ACF-90BF-441209C11D87}">
+      <dsp:nvSpPr>
+        <dsp:cNvPr id="0" name=""/>
+        <dsp:cNvSpPr/>
+      </dsp:nvSpPr>
+      <dsp:spPr>
+        <a:xfrm>
+          <a:off x="7753270" y="431693"/>
+          <a:ext cx="3229188" cy="1291675"/>
+        </a:xfrm>
+        <a:prstGeom prst="chevron">
+          <a:avLst/>
+        </a:prstGeom>
+        <a:solidFill>
+          <a:schemeClr val="tx1">
+            <a:lumMod val="85000"/>
+          </a:schemeClr>
+        </a:solidFill>
+        <a:ln>
+          <a:noFill/>
+        </a:ln>
+        <a:effectLst>
+          <a:outerShdw blurRad="38100" dist="25400" dir="5400000" rotWithShape="0">
+            <a:srgbClr val="000000">
+              <a:alpha val="45000"/>
+            </a:srgbClr>
+          </a:outerShdw>
+        </a:effectLst>
+        <a:scene3d>
+          <a:camera prst="orthographicFront"/>
+          <a:lightRig rig="threePt" dir="t">
+            <a:rot lat="0" lon="0" rev="7500000"/>
+          </a:lightRig>
+        </a:scene3d>
+        <a:sp3d prstMaterial="plastic">
+          <a:bevelT w="127000" h="25400" prst="relaxedInset"/>
+        </a:sp3d>
+      </dsp:spPr>
+      <dsp:style>
+        <a:lnRef idx="0">
+          <a:scrgbClr r="0" g="0" b="0"/>
+        </a:lnRef>
+        <a:fillRef idx="3">
+          <a:scrgbClr r="0" g="0" b="0"/>
+        </a:fillRef>
+        <a:effectRef idx="2">
+          <a:scrgbClr r="0" g="0" b="0"/>
+        </a:effectRef>
+        <a:fontRef idx="minor">
+          <a:schemeClr val="lt1"/>
+        </a:fontRef>
+      </dsp:style>
+      <dsp:txBody>
+        <a:bodyPr spcFirstLastPara="0" vert="horz" wrap="square" lIns="128016" tIns="85344" rIns="42672" bIns="85344" numCol="1" spcCol="1270" anchor="ctr" anchorCtr="0">
+          <a:noAutofit/>
+        </a:bodyPr>
+        <a:lstStyle/>
+        <a:p>
+          <a:pPr marL="0" lvl="0" indent="0" algn="ctr" defTabSz="1422400">
+            <a:lnSpc>
+              <a:spcPct val="90000"/>
+            </a:lnSpc>
+            <a:spcBef>
+              <a:spcPct val="0"/>
+            </a:spcBef>
+            <a:spcAft>
+              <a:spcPct val="35000"/>
+            </a:spcAft>
+            <a:buNone/>
+          </a:pPr>
+          <a:r>
+            <a:rPr lang="en-US" sz="3200" b="1" kern="1200">
+              <a:solidFill>
+                <a:srgbClr val="00B050"/>
+              </a:solidFill>
+              <a:effectLst/>
+            </a:rPr>
+            <a:t>SEO</a:t>
+          </a:r>
+          <a:endParaRPr lang="en-US" sz="3200" b="1" kern="1200" dirty="0">
+            <a:solidFill>
+              <a:srgbClr val="00B050"/>
+            </a:solidFill>
+            <a:effectLst/>
+          </a:endParaRPr>
+        </a:p>
+      </dsp:txBody>
+      <dsp:txXfrm>
+        <a:off x="8399108" y="431693"/>
+        <a:ext cx="1937513" cy="1291675"/>
+      </dsp:txXfrm>
+    </dsp:sp>
+  </dsp:spTree>
+</dsp:drawing>
+</file>
+
+<file path=ppt/diagrams/drawing9.xml><?xml version="1.0" encoding="utf-8"?>
+<dsp:drawing xmlns:dgm="http://schemas.openxmlformats.org/drawingml/2006/diagram" xmlns:dsp="http://schemas.microsoft.com/office/drawing/2008/diagram" xmlns:a="http://schemas.openxmlformats.org/drawingml/2006/main">
+  <dsp:spTree>
+    <dsp:nvGrpSpPr>
+      <dsp:cNvPr id="0" name=""/>
+      <dsp:cNvGrpSpPr/>
+    </dsp:nvGrpSpPr>
+    <dsp:grpSpPr/>
+    <dsp:sp modelId="{3B3B9CF9-ACCC-4AAF-B159-A5ECCE9F91FA}">
+      <dsp:nvSpPr>
+        <dsp:cNvPr id="0" name=""/>
+        <dsp:cNvSpPr/>
+      </dsp:nvSpPr>
+      <dsp:spPr>
+        <a:xfrm>
           <a:off x="2381" y="226207"/>
           <a:ext cx="2389187" cy="955675"/>
         </a:xfrm>
@@ -11573,285 +13342,6 @@
               <a:lumOff val="0"/>
               <a:alphaOff val="0"/>
             </a:schemeClr>
-          </a:solidFill>
-          <a:prstDash val="solid"/>
-        </a:ln>
-        <a:effectLst/>
-      </dsp:spPr>
-      <dsp:style>
-        <a:lnRef idx="2">
-          <a:scrgbClr r="0" g="0" b="0"/>
-        </a:lnRef>
-        <a:fillRef idx="1">
-          <a:scrgbClr r="0" g="0" b="0"/>
-        </a:fillRef>
-        <a:effectRef idx="0">
-          <a:scrgbClr r="0" g="0" b="0"/>
-        </a:effectRef>
-        <a:fontRef idx="minor">
-          <a:schemeClr val="lt1"/>
-        </a:fontRef>
-      </dsp:style>
-      <dsp:txBody>
-        <a:bodyPr spcFirstLastPara="0" vert="horz" wrap="square" lIns="196025" tIns="130683" rIns="65342" bIns="130683" numCol="1" spcCol="1270" anchor="ctr" anchorCtr="0">
-          <a:noAutofit/>
-        </a:bodyPr>
-        <a:lstStyle/>
-        <a:p>
-          <a:pPr marL="0" lvl="0" indent="0" algn="ctr" defTabSz="2178050">
-            <a:lnSpc>
-              <a:spcPct val="90000"/>
-            </a:lnSpc>
-            <a:spcBef>
-              <a:spcPct val="0"/>
-            </a:spcBef>
-            <a:spcAft>
-              <a:spcPct val="35000"/>
-            </a:spcAft>
-            <a:buNone/>
-          </a:pPr>
-          <a:endParaRPr lang="en-US" sz="4900" kern="1200" dirty="0"/>
-        </a:p>
-      </dsp:txBody>
-      <dsp:txXfrm>
-        <a:off x="6214269" y="226207"/>
-        <a:ext cx="1433512" cy="955675"/>
-      </dsp:txXfrm>
-    </dsp:sp>
-  </dsp:spTree>
-</dsp:drawing>
-</file>
-
-<file path=ppt/diagrams/drawing9.xml><?xml version="1.0" encoding="utf-8"?>
-<dsp:drawing xmlns:dgm="http://schemas.openxmlformats.org/drawingml/2006/diagram" xmlns:dsp="http://schemas.microsoft.com/office/drawing/2008/diagram" xmlns:a="http://schemas.openxmlformats.org/drawingml/2006/main">
-  <dsp:spTree>
-    <dsp:nvGrpSpPr>
-      <dsp:cNvPr id="0" name=""/>
-      <dsp:cNvGrpSpPr/>
-    </dsp:nvGrpSpPr>
-    <dsp:grpSpPr/>
-    <dsp:sp modelId="{3B3B9CF9-ACCC-4AAF-B159-A5ECCE9F91FA}">
-      <dsp:nvSpPr>
-        <dsp:cNvPr id="0" name=""/>
-        <dsp:cNvSpPr/>
-      </dsp:nvSpPr>
-      <dsp:spPr>
-        <a:xfrm>
-          <a:off x="2381" y="226207"/>
-          <a:ext cx="2389187" cy="955675"/>
-        </a:xfrm>
-        <a:prstGeom prst="homePlate">
-          <a:avLst/>
-        </a:prstGeom>
-        <a:solidFill>
-          <a:schemeClr val="accent1">
-            <a:hueOff val="0"/>
-            <a:satOff val="0"/>
-            <a:lumOff val="0"/>
-            <a:alphaOff val="0"/>
-          </a:schemeClr>
-        </a:solidFill>
-        <a:ln w="19050" cap="rnd" cmpd="sng" algn="ctr">
-          <a:solidFill>
-            <a:schemeClr val="accent1"/>
-          </a:solidFill>
-          <a:prstDash val="solid"/>
-        </a:ln>
-        <a:effectLst/>
-      </dsp:spPr>
-      <dsp:style>
-        <a:lnRef idx="2">
-          <a:scrgbClr r="0" g="0" b="0"/>
-        </a:lnRef>
-        <a:fillRef idx="1">
-          <a:scrgbClr r="0" g="0" b="0"/>
-        </a:fillRef>
-        <a:effectRef idx="0">
-          <a:scrgbClr r="0" g="0" b="0"/>
-        </a:effectRef>
-        <a:fontRef idx="minor">
-          <a:schemeClr val="lt1"/>
-        </a:fontRef>
-      </dsp:style>
-      <dsp:txBody>
-        <a:bodyPr spcFirstLastPara="0" vert="horz" wrap="square" lIns="261366" tIns="130683" rIns="65342" bIns="130683" numCol="1" spcCol="1270" anchor="ctr" anchorCtr="0">
-          <a:noAutofit/>
-        </a:bodyPr>
-        <a:lstStyle/>
-        <a:p>
-          <a:pPr marL="0" lvl="0" indent="0" algn="ctr" defTabSz="2178050">
-            <a:lnSpc>
-              <a:spcPct val="90000"/>
-            </a:lnSpc>
-            <a:spcBef>
-              <a:spcPct val="0"/>
-            </a:spcBef>
-            <a:spcAft>
-              <a:spcPct val="35000"/>
-            </a:spcAft>
-            <a:buNone/>
-          </a:pPr>
-          <a:endParaRPr lang="en-US" sz="4900" kern="1200"/>
-        </a:p>
-      </dsp:txBody>
-      <dsp:txXfrm>
-        <a:off x="2381" y="226207"/>
-        <a:ext cx="2150268" cy="955675"/>
-      </dsp:txXfrm>
-    </dsp:sp>
-    <dsp:sp modelId="{927287C2-A3D7-40DA-9CC5-879018D16C6C}">
-      <dsp:nvSpPr>
-        <dsp:cNvPr id="0" name=""/>
-        <dsp:cNvSpPr/>
-      </dsp:nvSpPr>
-      <dsp:spPr>
-        <a:xfrm>
-          <a:off x="1913731" y="226207"/>
-          <a:ext cx="2389187" cy="955675"/>
-        </a:xfrm>
-        <a:prstGeom prst="chevron">
-          <a:avLst/>
-        </a:prstGeom>
-        <a:solidFill>
-          <a:schemeClr val="tx1">
-            <a:lumMod val="95000"/>
-          </a:schemeClr>
-        </a:solidFill>
-        <a:ln w="19050" cap="rnd" cmpd="sng" algn="ctr">
-          <a:solidFill>
-            <a:schemeClr val="accent1"/>
-          </a:solidFill>
-          <a:prstDash val="solid"/>
-        </a:ln>
-        <a:effectLst/>
-      </dsp:spPr>
-      <dsp:style>
-        <a:lnRef idx="2">
-          <a:scrgbClr r="0" g="0" b="0"/>
-        </a:lnRef>
-        <a:fillRef idx="1">
-          <a:scrgbClr r="0" g="0" b="0"/>
-        </a:fillRef>
-        <a:effectRef idx="0">
-          <a:scrgbClr r="0" g="0" b="0"/>
-        </a:effectRef>
-        <a:fontRef idx="minor">
-          <a:schemeClr val="lt1"/>
-        </a:fontRef>
-      </dsp:style>
-      <dsp:txBody>
-        <a:bodyPr spcFirstLastPara="0" vert="horz" wrap="square" lIns="196025" tIns="130683" rIns="65342" bIns="130683" numCol="1" spcCol="1270" anchor="ctr" anchorCtr="0">
-          <a:noAutofit/>
-        </a:bodyPr>
-        <a:lstStyle/>
-        <a:p>
-          <a:pPr marL="0" lvl="0" indent="0" algn="ctr" defTabSz="2178050">
-            <a:lnSpc>
-              <a:spcPct val="90000"/>
-            </a:lnSpc>
-            <a:spcBef>
-              <a:spcPct val="0"/>
-            </a:spcBef>
-            <a:spcAft>
-              <a:spcPct val="35000"/>
-            </a:spcAft>
-            <a:buNone/>
-          </a:pPr>
-          <a:endParaRPr lang="en-US" sz="4900" kern="1200" dirty="0"/>
-        </a:p>
-      </dsp:txBody>
-      <dsp:txXfrm>
-        <a:off x="2391569" y="226207"/>
-        <a:ext cx="1433512" cy="955675"/>
-      </dsp:txXfrm>
-    </dsp:sp>
-    <dsp:sp modelId="{0FFC9F85-D342-4563-A0C2-89C6B83FD375}">
-      <dsp:nvSpPr>
-        <dsp:cNvPr id="0" name=""/>
-        <dsp:cNvSpPr/>
-      </dsp:nvSpPr>
-      <dsp:spPr>
-        <a:xfrm>
-          <a:off x="3825081" y="226207"/>
-          <a:ext cx="2389187" cy="955675"/>
-        </a:xfrm>
-        <a:prstGeom prst="chevron">
-          <a:avLst/>
-        </a:prstGeom>
-        <a:solidFill>
-          <a:schemeClr val="tx1">
-            <a:lumMod val="95000"/>
-          </a:schemeClr>
-        </a:solidFill>
-        <a:ln w="19050" cap="rnd" cmpd="sng" algn="ctr">
-          <a:solidFill>
-            <a:schemeClr val="accent1"/>
-          </a:solidFill>
-          <a:prstDash val="solid"/>
-        </a:ln>
-        <a:effectLst/>
-      </dsp:spPr>
-      <dsp:style>
-        <a:lnRef idx="2">
-          <a:scrgbClr r="0" g="0" b="0"/>
-        </a:lnRef>
-        <a:fillRef idx="1">
-          <a:scrgbClr r="0" g="0" b="0"/>
-        </a:fillRef>
-        <a:effectRef idx="0">
-          <a:scrgbClr r="0" g="0" b="0"/>
-        </a:effectRef>
-        <a:fontRef idx="minor">
-          <a:schemeClr val="lt1"/>
-        </a:fontRef>
-      </dsp:style>
-      <dsp:txBody>
-        <a:bodyPr spcFirstLastPara="0" vert="horz" wrap="square" lIns="196025" tIns="130683" rIns="65342" bIns="130683" numCol="1" spcCol="1270" anchor="ctr" anchorCtr="0">
-          <a:noAutofit/>
-        </a:bodyPr>
-        <a:lstStyle/>
-        <a:p>
-          <a:pPr marL="0" lvl="0" indent="0" algn="ctr" defTabSz="2178050">
-            <a:lnSpc>
-              <a:spcPct val="90000"/>
-            </a:lnSpc>
-            <a:spcBef>
-              <a:spcPct val="0"/>
-            </a:spcBef>
-            <a:spcAft>
-              <a:spcPct val="35000"/>
-            </a:spcAft>
-            <a:buNone/>
-          </a:pPr>
-          <a:endParaRPr lang="en-US" sz="4900" kern="1200" dirty="0"/>
-        </a:p>
-      </dsp:txBody>
-      <dsp:txXfrm>
-        <a:off x="4302919" y="226207"/>
-        <a:ext cx="1433512" cy="955675"/>
-      </dsp:txXfrm>
-    </dsp:sp>
-    <dsp:sp modelId="{903FC15E-8A12-4ACF-90BF-441209C11D87}">
-      <dsp:nvSpPr>
-        <dsp:cNvPr id="0" name=""/>
-        <dsp:cNvSpPr/>
-      </dsp:nvSpPr>
-      <dsp:spPr>
-        <a:xfrm>
-          <a:off x="5736431" y="226207"/>
-          <a:ext cx="2389187" cy="955675"/>
-        </a:xfrm>
-        <a:prstGeom prst="chevron">
-          <a:avLst/>
-        </a:prstGeom>
-        <a:solidFill>
-          <a:schemeClr val="tx1">
-            <a:lumMod val="95000"/>
-          </a:schemeClr>
-        </a:solidFill>
-        <a:ln w="19050" cap="rnd" cmpd="sng" algn="ctr">
-          <a:solidFill>
-            <a:schemeClr val="accent1"/>
           </a:solidFill>
           <a:prstDash val="solid"/>
         </a:ln>
@@ -13201,6 +14691,278 @@
         </dgm:layoutNode>
       </dgm:if>
       <dgm:else name="Name184"/>
+    </dgm:choose>
+  </dgm:layoutNode>
+</dgm:layoutDef>
+</file>
+
+<file path=ppt/diagrams/layout10.xml><?xml version="1.0" encoding="utf-8"?>
+<dgm:layoutDef xmlns:dgm="http://schemas.openxmlformats.org/drawingml/2006/diagram" xmlns:a="http://schemas.openxmlformats.org/drawingml/2006/main" uniqueId="urn:microsoft.com/office/officeart/2005/8/layout/hChevron3">
+  <dgm:title val=""/>
+  <dgm:desc val=""/>
+  <dgm:catLst>
+    <dgm:cat type="process" pri="10000"/>
+  </dgm:catLst>
+  <dgm:sampData useDef="1">
+    <dgm:dataModel>
+      <dgm:ptLst/>
+      <dgm:bg/>
+      <dgm:whole/>
+    </dgm:dataModel>
+  </dgm:sampData>
+  <dgm:styleData>
+    <dgm:dataModel>
+      <dgm:ptLst>
+        <dgm:pt modelId="0" type="doc"/>
+        <dgm:pt modelId="1"/>
+        <dgm:pt modelId="2"/>
+      </dgm:ptLst>
+      <dgm:cxnLst>
+        <dgm:cxn modelId="3" srcId="0" destId="1" srcOrd="0" destOrd="0"/>
+        <dgm:cxn modelId="4" srcId="0" destId="2" srcOrd="1" destOrd="0"/>
+      </dgm:cxnLst>
+      <dgm:bg/>
+      <dgm:whole/>
+    </dgm:dataModel>
+  </dgm:styleData>
+  <dgm:clrData>
+    <dgm:dataModel>
+      <dgm:ptLst>
+        <dgm:pt modelId="0" type="doc"/>
+        <dgm:pt modelId="1"/>
+        <dgm:pt modelId="2"/>
+        <dgm:pt modelId="3"/>
+        <dgm:pt modelId="4"/>
+      </dgm:ptLst>
+      <dgm:cxnLst>
+        <dgm:cxn modelId="5" srcId="0" destId="1" srcOrd="0" destOrd="0"/>
+        <dgm:cxn modelId="6" srcId="0" destId="2" srcOrd="1" destOrd="0"/>
+        <dgm:cxn modelId="7" srcId="0" destId="3" srcOrd="2" destOrd="0"/>
+        <dgm:cxn modelId="8" srcId="0" destId="4" srcOrd="3" destOrd="0"/>
+      </dgm:cxnLst>
+      <dgm:bg/>
+      <dgm:whole/>
+    </dgm:dataModel>
+  </dgm:clrData>
+  <dgm:layoutNode name="Name0">
+    <dgm:varLst>
+      <dgm:dir/>
+      <dgm:resizeHandles val="exact"/>
+    </dgm:varLst>
+    <dgm:choose name="Name1">
+      <dgm:if name="Name2" func="var" arg="dir" op="equ" val="norm">
+        <dgm:alg type="lin"/>
+      </dgm:if>
+      <dgm:else name="Name3">
+        <dgm:alg type="lin">
+          <dgm:param type="linDir" val="fromR"/>
+        </dgm:alg>
+      </dgm:else>
+    </dgm:choose>
+    <dgm:shape xmlns:r="http://schemas.openxmlformats.org/officeDocument/2006/relationships" r:blip="">
+      <dgm:adjLst/>
+    </dgm:shape>
+    <dgm:presOf/>
+    <dgm:choose name="Name4">
+      <dgm:if name="Name5" axis="root des" func="maxDepth" op="gte" val="2">
+        <dgm:constrLst>
+          <dgm:constr type="w" for="ch" forName="parAndChTx" refType="w"/>
+          <dgm:constr type="primFontSz" for="ch" ptType="node" op="equ"/>
+          <dgm:constr type="w" for="ch" forName="parAndChSpace" refType="w" refFor="ch" refForName="parAndChTx" fact="-0.2"/>
+          <dgm:constr type="w" for="ch" ptType="sibTrans" op="equ"/>
+        </dgm:constrLst>
+        <dgm:ruleLst/>
+        <dgm:forEach name="Name6" axis="ch" ptType="node">
+          <dgm:layoutNode name="parAndChTx">
+            <dgm:varLst>
+              <dgm:bulletEnabled val="1"/>
+            </dgm:varLst>
+            <dgm:alg type="tx"/>
+            <dgm:choose name="Name7">
+              <dgm:if name="Name8" func="var" arg="dir" op="equ" val="norm">
+                <dgm:choose name="Name9">
+                  <dgm:if name="Name10" axis="self" ptType="node" func="pos" op="equ" val="1">
+                    <dgm:shape xmlns:r="http://schemas.openxmlformats.org/officeDocument/2006/relationships" type="homePlate" r:blip="">
+                      <dgm:adjLst>
+                        <dgm:adj idx="1" val="0.25"/>
+                      </dgm:adjLst>
+                    </dgm:shape>
+                    <dgm:presOf axis="desOrSelf" ptType="node"/>
+                    <dgm:constrLst>
+                      <dgm:constr type="h" refType="w" op="equ" fact="0.8"/>
+                      <dgm:constr type="primFontSz" val="65"/>
+                      <dgm:constr type="tMarg" refType="primFontSz" fact="0.2"/>
+                      <dgm:constr type="bMarg" refType="primFontSz" fact="0.2"/>
+                      <dgm:constr type="lMarg" refType="w" fact="0.1"/>
+                      <dgm:constr type="rMarg" refType="w" fact="0.4"/>
+                    </dgm:constrLst>
+                  </dgm:if>
+                  <dgm:else name="Name11">
+                    <dgm:shape xmlns:r="http://schemas.openxmlformats.org/officeDocument/2006/relationships" type="chevron" r:blip="">
+                      <dgm:adjLst>
+                        <dgm:adj idx="1" val="0.25"/>
+                      </dgm:adjLst>
+                    </dgm:shape>
+                    <dgm:presOf axis="desOrSelf" ptType="node"/>
+                    <dgm:constrLst>
+                      <dgm:constr type="h" refType="w" op="equ" fact="0.8"/>
+                      <dgm:constr type="primFontSz" val="65"/>
+                      <dgm:constr type="tMarg" refType="primFontSz" fact="0.2"/>
+                      <dgm:constr type="bMarg" refType="primFontSz" fact="0.2"/>
+                      <dgm:constr type="lMarg" refType="w" fact="0.1"/>
+                      <dgm:constr type="rMarg" refType="w" fact="0.1"/>
+                    </dgm:constrLst>
+                  </dgm:else>
+                </dgm:choose>
+              </dgm:if>
+              <dgm:else name="Name12">
+                <dgm:choose name="Name13">
+                  <dgm:if name="Name14" axis="self" ptType="node" func="pos" op="equ" val="1">
+                    <dgm:shape xmlns:r="http://schemas.openxmlformats.org/officeDocument/2006/relationships" rot="180" type="homePlate" r:blip="">
+                      <dgm:adjLst>
+                        <dgm:adj idx="1" val="0.25"/>
+                      </dgm:adjLst>
+                    </dgm:shape>
+                    <dgm:presOf axis="desOrSelf" ptType="node"/>
+                    <dgm:constrLst>
+                      <dgm:constr type="h" refType="w" op="equ" fact="0.8"/>
+                      <dgm:constr type="primFontSz" val="65"/>
+                      <dgm:constr type="tMarg" refType="primFontSz" fact="0.2"/>
+                      <dgm:constr type="bMarg" refType="primFontSz" fact="0.2"/>
+                      <dgm:constr type="lMarg" refType="w" fact="0.4"/>
+                      <dgm:constr type="rMarg" refType="w" fact="0.1"/>
+                    </dgm:constrLst>
+                  </dgm:if>
+                  <dgm:else name="Name15">
+                    <dgm:shape xmlns:r="http://schemas.openxmlformats.org/officeDocument/2006/relationships" rot="180" type="chevron" r:blip="">
+                      <dgm:adjLst>
+                        <dgm:adj idx="1" val="0.25"/>
+                      </dgm:adjLst>
+                    </dgm:shape>
+                    <dgm:presOf axis="desOrSelf" ptType="node"/>
+                    <dgm:constrLst>
+                      <dgm:constr type="h" refType="w" op="equ" fact="0.8"/>
+                      <dgm:constr type="primFontSz" val="65"/>
+                      <dgm:constr type="tMarg" refType="primFontSz" fact="0.2"/>
+                      <dgm:constr type="bMarg" refType="primFontSz" fact="0.2"/>
+                      <dgm:constr type="lMarg" refType="w" fact="0.1"/>
+                      <dgm:constr type="rMarg" refType="w" fact="0.1"/>
+                    </dgm:constrLst>
+                  </dgm:else>
+                </dgm:choose>
+              </dgm:else>
+            </dgm:choose>
+            <dgm:ruleLst>
+              <dgm:rule type="primFontSz" val="5" fact="NaN" max="NaN"/>
+            </dgm:ruleLst>
+          </dgm:layoutNode>
+          <dgm:forEach name="Name16" axis="followSib" ptType="sibTrans" cnt="1">
+            <dgm:layoutNode name="parAndChSpace">
+              <dgm:alg type="sp"/>
+              <dgm:shape xmlns:r="http://schemas.openxmlformats.org/officeDocument/2006/relationships" r:blip="">
+                <dgm:adjLst/>
+              </dgm:shape>
+              <dgm:presOf/>
+              <dgm:constrLst/>
+              <dgm:ruleLst/>
+            </dgm:layoutNode>
+          </dgm:forEach>
+        </dgm:forEach>
+      </dgm:if>
+      <dgm:else name="Name17">
+        <dgm:constrLst>
+          <dgm:constr type="w" for="ch" forName="parTxOnly" refType="w"/>
+          <dgm:constr type="primFontSz" for="ch" ptType="node" op="equ"/>
+          <dgm:constr type="w" for="ch" forName="parSpace" refType="w" refFor="ch" refForName="parTxOnly" fact="-0.2"/>
+          <dgm:constr type="w" for="ch" ptType="sibTrans" op="equ"/>
+        </dgm:constrLst>
+        <dgm:ruleLst/>
+        <dgm:forEach name="Name18" axis="ch" ptType="node">
+          <dgm:layoutNode name="parTxOnly">
+            <dgm:varLst>
+              <dgm:bulletEnabled val="1"/>
+            </dgm:varLst>
+            <dgm:alg type="tx"/>
+            <dgm:presOf axis="desOrSelf" ptType="node"/>
+            <dgm:choose name="Name19">
+              <dgm:if name="Name20" func="var" arg="dir" op="equ" val="norm">
+                <dgm:choose name="Name21">
+                  <dgm:if name="Name22" axis="self" ptType="node" func="pos" op="equ" val="1">
+                    <dgm:shape xmlns:r="http://schemas.openxmlformats.org/officeDocument/2006/relationships" type="homePlate" r:blip="">
+                      <dgm:adjLst/>
+                    </dgm:shape>
+                    <dgm:constrLst>
+                      <dgm:constr type="h" refType="w" op="equ" fact="0.4"/>
+                      <dgm:constr type="primFontSz" val="65"/>
+                      <dgm:constr type="tMarg" refType="primFontSz" fact="0.21"/>
+                      <dgm:constr type="bMarg" refType="primFontSz" fact="0.21"/>
+                      <dgm:constr type="lMarg" refType="primFontSz" fact="0.42"/>
+                      <dgm:constr type="rMarg" refType="primFontSz" fact="0.105"/>
+                    </dgm:constrLst>
+                  </dgm:if>
+                  <dgm:else name="Name23">
+                    <dgm:shape xmlns:r="http://schemas.openxmlformats.org/officeDocument/2006/relationships" type="chevron" r:blip="">
+                      <dgm:adjLst/>
+                    </dgm:shape>
+                    <dgm:constrLst>
+                      <dgm:constr type="h" refType="w" op="equ" fact="0.4"/>
+                      <dgm:constr type="primFontSz" val="65"/>
+                      <dgm:constr type="tMarg" refType="primFontSz" fact="0.21"/>
+                      <dgm:constr type="bMarg" refType="primFontSz" fact="0.21"/>
+                      <dgm:constr type="lMarg" refType="primFontSz" fact="0.315"/>
+                      <dgm:constr type="rMarg" refType="primFontSz" fact="0.105"/>
+                    </dgm:constrLst>
+                  </dgm:else>
+                </dgm:choose>
+              </dgm:if>
+              <dgm:else name="Name24">
+                <dgm:choose name="Name25">
+                  <dgm:if name="Name26" axis="self" ptType="node" func="pos" op="equ" val="1">
+                    <dgm:shape xmlns:r="http://schemas.openxmlformats.org/officeDocument/2006/relationships" rot="180" type="homePlate" r:blip="">
+                      <dgm:adjLst/>
+                    </dgm:shape>
+                    <dgm:constrLst>
+                      <dgm:constr type="h" refType="w" op="equ" fact="0.4"/>
+                      <dgm:constr type="primFontSz" val="65"/>
+                      <dgm:constr type="tMarg" refType="primFontSz" fact="0.21"/>
+                      <dgm:constr type="bMarg" refType="primFontSz" fact="0.21"/>
+                      <dgm:constr type="lMarg" refType="primFontSz" fact="0.105"/>
+                      <dgm:constr type="rMarg" refType="primFontSz" fact="0.42"/>
+                    </dgm:constrLst>
+                  </dgm:if>
+                  <dgm:else name="Name27">
+                    <dgm:shape xmlns:r="http://schemas.openxmlformats.org/officeDocument/2006/relationships" rot="180" type="chevron" r:blip="">
+                      <dgm:adjLst/>
+                    </dgm:shape>
+                    <dgm:constrLst>
+                      <dgm:constr type="h" refType="w" op="equ" fact="0.4"/>
+                      <dgm:constr type="primFontSz" val="65"/>
+                      <dgm:constr type="tMarg" refType="primFontSz" fact="0.21"/>
+                      <dgm:constr type="bMarg" refType="primFontSz" fact="0.21"/>
+                      <dgm:constr type="lMarg" refType="primFontSz" fact="0.105"/>
+                      <dgm:constr type="rMarg" refType="primFontSz" fact="0.315"/>
+                    </dgm:constrLst>
+                  </dgm:else>
+                </dgm:choose>
+              </dgm:else>
+            </dgm:choose>
+            <dgm:ruleLst>
+              <dgm:rule type="primFontSz" val="5" fact="NaN" max="NaN"/>
+            </dgm:ruleLst>
+          </dgm:layoutNode>
+          <dgm:forEach name="Name28" axis="followSib" ptType="sibTrans" cnt="1">
+            <dgm:layoutNode name="parSpace">
+              <dgm:alg type="sp"/>
+              <dgm:shape xmlns:r="http://schemas.openxmlformats.org/officeDocument/2006/relationships" r:blip="">
+                <dgm:adjLst/>
+              </dgm:shape>
+              <dgm:presOf/>
+              <dgm:constrLst/>
+              <dgm:ruleLst/>
+            </dgm:layoutNode>
+          </dgm:forEach>
+        </dgm:forEach>
+      </dgm:else>
     </dgm:choose>
   </dgm:layoutNode>
 </dgm:layoutDef>
@@ -22697,6 +24459,1040 @@
 </dgm:styleDef>
 </file>
 
+<file path=ppt/diagrams/quickStyle10.xml><?xml version="1.0" encoding="utf-8"?>
+<dgm:styleDef xmlns:dgm="http://schemas.openxmlformats.org/drawingml/2006/diagram" xmlns:a="http://schemas.openxmlformats.org/drawingml/2006/main" uniqueId="urn:microsoft.com/office/officeart/2005/8/quickstyle/simple1">
+  <dgm:title val=""/>
+  <dgm:desc val=""/>
+  <dgm:catLst>
+    <dgm:cat type="simple" pri="10100"/>
+  </dgm:catLst>
+  <dgm:scene3d>
+    <a:camera prst="orthographicFront"/>
+    <a:lightRig rig="threePt" dir="t"/>
+  </dgm:scene3d>
+  <dgm:styleLbl name="node0">
+    <dgm:scene3d>
+      <a:camera prst="orthographicFront"/>
+      <a:lightRig rig="threePt" dir="t"/>
+    </dgm:scene3d>
+    <dgm:sp3d/>
+    <dgm:txPr/>
+    <dgm:style>
+      <a:lnRef idx="2">
+        <a:scrgbClr r="0" g="0" b="0"/>
+      </a:lnRef>
+      <a:fillRef idx="1">
+        <a:scrgbClr r="0" g="0" b="0"/>
+      </a:fillRef>
+      <a:effectRef idx="0">
+        <a:scrgbClr r="0" g="0" b="0"/>
+      </a:effectRef>
+      <a:fontRef idx="minor">
+        <a:schemeClr val="lt1"/>
+      </a:fontRef>
+    </dgm:style>
+  </dgm:styleLbl>
+  <dgm:styleLbl name="lnNode1">
+    <dgm:scene3d>
+      <a:camera prst="orthographicFront"/>
+      <a:lightRig rig="threePt" dir="t"/>
+    </dgm:scene3d>
+    <dgm:sp3d/>
+    <dgm:txPr/>
+    <dgm:style>
+      <a:lnRef idx="2">
+        <a:scrgbClr r="0" g="0" b="0"/>
+      </a:lnRef>
+      <a:fillRef idx="1">
+        <a:scrgbClr r="0" g="0" b="0"/>
+      </a:fillRef>
+      <a:effectRef idx="0">
+        <a:scrgbClr r="0" g="0" b="0"/>
+      </a:effectRef>
+      <a:fontRef idx="minor">
+        <a:schemeClr val="lt1"/>
+      </a:fontRef>
+    </dgm:style>
+  </dgm:styleLbl>
+  <dgm:styleLbl name="vennNode1">
+    <dgm:scene3d>
+      <a:camera prst="orthographicFront"/>
+      <a:lightRig rig="threePt" dir="t"/>
+    </dgm:scene3d>
+    <dgm:sp3d/>
+    <dgm:txPr/>
+    <dgm:style>
+      <a:lnRef idx="2">
+        <a:scrgbClr r="0" g="0" b="0"/>
+      </a:lnRef>
+      <a:fillRef idx="1">
+        <a:scrgbClr r="0" g="0" b="0"/>
+      </a:fillRef>
+      <a:effectRef idx="0">
+        <a:scrgbClr r="0" g="0" b="0"/>
+      </a:effectRef>
+      <a:fontRef idx="minor">
+        <a:schemeClr val="tx1"/>
+      </a:fontRef>
+    </dgm:style>
+  </dgm:styleLbl>
+  <dgm:styleLbl name="alignNode1">
+    <dgm:scene3d>
+      <a:camera prst="orthographicFront"/>
+      <a:lightRig rig="threePt" dir="t"/>
+    </dgm:scene3d>
+    <dgm:sp3d/>
+    <dgm:txPr/>
+    <dgm:style>
+      <a:lnRef idx="2">
+        <a:scrgbClr r="0" g="0" b="0"/>
+      </a:lnRef>
+      <a:fillRef idx="1">
+        <a:scrgbClr r="0" g="0" b="0"/>
+      </a:fillRef>
+      <a:effectRef idx="0">
+        <a:scrgbClr r="0" g="0" b="0"/>
+      </a:effectRef>
+      <a:fontRef idx="minor">
+        <a:schemeClr val="lt1"/>
+      </a:fontRef>
+    </dgm:style>
+  </dgm:styleLbl>
+  <dgm:styleLbl name="node1">
+    <dgm:scene3d>
+      <a:camera prst="orthographicFront"/>
+      <a:lightRig rig="threePt" dir="t"/>
+    </dgm:scene3d>
+    <dgm:sp3d/>
+    <dgm:txPr/>
+    <dgm:style>
+      <a:lnRef idx="2">
+        <a:scrgbClr r="0" g="0" b="0"/>
+      </a:lnRef>
+      <a:fillRef idx="1">
+        <a:scrgbClr r="0" g="0" b="0"/>
+      </a:fillRef>
+      <a:effectRef idx="0">
+        <a:scrgbClr r="0" g="0" b="0"/>
+      </a:effectRef>
+      <a:fontRef idx="minor">
+        <a:schemeClr val="lt1"/>
+      </a:fontRef>
+    </dgm:style>
+  </dgm:styleLbl>
+  <dgm:styleLbl name="node2">
+    <dgm:scene3d>
+      <a:camera prst="orthographicFront"/>
+      <a:lightRig rig="threePt" dir="t"/>
+    </dgm:scene3d>
+    <dgm:sp3d/>
+    <dgm:txPr/>
+    <dgm:style>
+      <a:lnRef idx="2">
+        <a:scrgbClr r="0" g="0" b="0"/>
+      </a:lnRef>
+      <a:fillRef idx="1">
+        <a:scrgbClr r="0" g="0" b="0"/>
+      </a:fillRef>
+      <a:effectRef idx="0">
+        <a:scrgbClr r="0" g="0" b="0"/>
+      </a:effectRef>
+      <a:fontRef idx="minor">
+        <a:schemeClr val="lt1"/>
+      </a:fontRef>
+    </dgm:style>
+  </dgm:styleLbl>
+  <dgm:styleLbl name="node3">
+    <dgm:scene3d>
+      <a:camera prst="orthographicFront"/>
+      <a:lightRig rig="threePt" dir="t"/>
+    </dgm:scene3d>
+    <dgm:sp3d/>
+    <dgm:txPr/>
+    <dgm:style>
+      <a:lnRef idx="2">
+        <a:scrgbClr r="0" g="0" b="0"/>
+      </a:lnRef>
+      <a:fillRef idx="1">
+        <a:scrgbClr r="0" g="0" b="0"/>
+      </a:fillRef>
+      <a:effectRef idx="0">
+        <a:scrgbClr r="0" g="0" b="0"/>
+      </a:effectRef>
+      <a:fontRef idx="minor">
+        <a:schemeClr val="lt1"/>
+      </a:fontRef>
+    </dgm:style>
+  </dgm:styleLbl>
+  <dgm:styleLbl name="node4">
+    <dgm:scene3d>
+      <a:camera prst="orthographicFront"/>
+      <a:lightRig rig="threePt" dir="t"/>
+    </dgm:scene3d>
+    <dgm:sp3d/>
+    <dgm:txPr/>
+    <dgm:style>
+      <a:lnRef idx="2">
+        <a:scrgbClr r="0" g="0" b="0"/>
+      </a:lnRef>
+      <a:fillRef idx="1">
+        <a:scrgbClr r="0" g="0" b="0"/>
+      </a:fillRef>
+      <a:effectRef idx="0">
+        <a:scrgbClr r="0" g="0" b="0"/>
+      </a:effectRef>
+      <a:fontRef idx="minor">
+        <a:schemeClr val="lt1"/>
+      </a:fontRef>
+    </dgm:style>
+  </dgm:styleLbl>
+  <dgm:styleLbl name="fgImgPlace1">
+    <dgm:scene3d>
+      <a:camera prst="orthographicFront"/>
+      <a:lightRig rig="threePt" dir="t"/>
+    </dgm:scene3d>
+    <dgm:sp3d/>
+    <dgm:txPr/>
+    <dgm:style>
+      <a:lnRef idx="2">
+        <a:scrgbClr r="0" g="0" b="0"/>
+      </a:lnRef>
+      <a:fillRef idx="1">
+        <a:scrgbClr r="0" g="0" b="0"/>
+      </a:fillRef>
+      <a:effectRef idx="0">
+        <a:scrgbClr r="0" g="0" b="0"/>
+      </a:effectRef>
+      <a:fontRef idx="minor"/>
+    </dgm:style>
+  </dgm:styleLbl>
+  <dgm:styleLbl name="alignImgPlace1">
+    <dgm:scene3d>
+      <a:camera prst="orthographicFront"/>
+      <a:lightRig rig="threePt" dir="t"/>
+    </dgm:scene3d>
+    <dgm:sp3d/>
+    <dgm:txPr/>
+    <dgm:style>
+      <a:lnRef idx="2">
+        <a:scrgbClr r="0" g="0" b="0"/>
+      </a:lnRef>
+      <a:fillRef idx="1">
+        <a:scrgbClr r="0" g="0" b="0"/>
+      </a:fillRef>
+      <a:effectRef idx="0">
+        <a:scrgbClr r="0" g="0" b="0"/>
+      </a:effectRef>
+      <a:fontRef idx="minor"/>
+    </dgm:style>
+  </dgm:styleLbl>
+  <dgm:styleLbl name="bgImgPlace1">
+    <dgm:scene3d>
+      <a:camera prst="orthographicFront"/>
+      <a:lightRig rig="threePt" dir="t"/>
+    </dgm:scene3d>
+    <dgm:sp3d/>
+    <dgm:txPr/>
+    <dgm:style>
+      <a:lnRef idx="2">
+        <a:scrgbClr r="0" g="0" b="0"/>
+      </a:lnRef>
+      <a:fillRef idx="1">
+        <a:scrgbClr r="0" g="0" b="0"/>
+      </a:fillRef>
+      <a:effectRef idx="0">
+        <a:scrgbClr r="0" g="0" b="0"/>
+      </a:effectRef>
+      <a:fontRef idx="minor"/>
+    </dgm:style>
+  </dgm:styleLbl>
+  <dgm:styleLbl name="sibTrans2D1">
+    <dgm:scene3d>
+      <a:camera prst="orthographicFront"/>
+      <a:lightRig rig="threePt" dir="t"/>
+    </dgm:scene3d>
+    <dgm:sp3d/>
+    <dgm:txPr/>
+    <dgm:style>
+      <a:lnRef idx="0">
+        <a:scrgbClr r="0" g="0" b="0"/>
+      </a:lnRef>
+      <a:fillRef idx="1">
+        <a:scrgbClr r="0" g="0" b="0"/>
+      </a:fillRef>
+      <a:effectRef idx="0">
+        <a:scrgbClr r="0" g="0" b="0"/>
+      </a:effectRef>
+      <a:fontRef idx="minor">
+        <a:schemeClr val="lt1"/>
+      </a:fontRef>
+    </dgm:style>
+  </dgm:styleLbl>
+  <dgm:styleLbl name="fgSibTrans2D1">
+    <dgm:scene3d>
+      <a:camera prst="orthographicFront"/>
+      <a:lightRig rig="threePt" dir="t"/>
+    </dgm:scene3d>
+    <dgm:sp3d/>
+    <dgm:txPr/>
+    <dgm:style>
+      <a:lnRef idx="0">
+        <a:scrgbClr r="0" g="0" b="0"/>
+      </a:lnRef>
+      <a:fillRef idx="1">
+        <a:scrgbClr r="0" g="0" b="0"/>
+      </a:fillRef>
+      <a:effectRef idx="0">
+        <a:scrgbClr r="0" g="0" b="0"/>
+      </a:effectRef>
+      <a:fontRef idx="minor">
+        <a:schemeClr val="lt1"/>
+      </a:fontRef>
+    </dgm:style>
+  </dgm:styleLbl>
+  <dgm:styleLbl name="bgSibTrans2D1">
+    <dgm:scene3d>
+      <a:camera prst="orthographicFront"/>
+      <a:lightRig rig="threePt" dir="t"/>
+    </dgm:scene3d>
+    <dgm:sp3d/>
+    <dgm:txPr/>
+    <dgm:style>
+      <a:lnRef idx="0">
+        <a:scrgbClr r="0" g="0" b="0"/>
+      </a:lnRef>
+      <a:fillRef idx="1">
+        <a:scrgbClr r="0" g="0" b="0"/>
+      </a:fillRef>
+      <a:effectRef idx="0">
+        <a:scrgbClr r="0" g="0" b="0"/>
+      </a:effectRef>
+      <a:fontRef idx="minor">
+        <a:schemeClr val="lt1"/>
+      </a:fontRef>
+    </dgm:style>
+  </dgm:styleLbl>
+  <dgm:styleLbl name="sibTrans1D1">
+    <dgm:scene3d>
+      <a:camera prst="orthographicFront"/>
+      <a:lightRig rig="threePt" dir="t"/>
+    </dgm:scene3d>
+    <dgm:sp3d/>
+    <dgm:txPr/>
+    <dgm:style>
+      <a:lnRef idx="1">
+        <a:scrgbClr r="0" g="0" b="0"/>
+      </a:lnRef>
+      <a:fillRef idx="0">
+        <a:scrgbClr r="0" g="0" b="0"/>
+      </a:fillRef>
+      <a:effectRef idx="0">
+        <a:scrgbClr r="0" g="0" b="0"/>
+      </a:effectRef>
+      <a:fontRef idx="minor"/>
+    </dgm:style>
+  </dgm:styleLbl>
+  <dgm:styleLbl name="callout">
+    <dgm:scene3d>
+      <a:camera prst="orthographicFront"/>
+      <a:lightRig rig="threePt" dir="t"/>
+    </dgm:scene3d>
+    <dgm:sp3d/>
+    <dgm:txPr/>
+    <dgm:style>
+      <a:lnRef idx="2">
+        <a:scrgbClr r="0" g="0" b="0"/>
+      </a:lnRef>
+      <a:fillRef idx="1">
+        <a:scrgbClr r="0" g="0" b="0"/>
+      </a:fillRef>
+      <a:effectRef idx="0">
+        <a:scrgbClr r="0" g="0" b="0"/>
+      </a:effectRef>
+      <a:fontRef idx="minor"/>
+    </dgm:style>
+  </dgm:styleLbl>
+  <dgm:styleLbl name="asst0">
+    <dgm:scene3d>
+      <a:camera prst="orthographicFront"/>
+      <a:lightRig rig="threePt" dir="t"/>
+    </dgm:scene3d>
+    <dgm:sp3d/>
+    <dgm:txPr/>
+    <dgm:style>
+      <a:lnRef idx="2">
+        <a:scrgbClr r="0" g="0" b="0"/>
+      </a:lnRef>
+      <a:fillRef idx="1">
+        <a:scrgbClr r="0" g="0" b="0"/>
+      </a:fillRef>
+      <a:effectRef idx="0">
+        <a:scrgbClr r="0" g="0" b="0"/>
+      </a:effectRef>
+      <a:fontRef idx="minor">
+        <a:schemeClr val="lt1"/>
+      </a:fontRef>
+    </dgm:style>
+  </dgm:styleLbl>
+  <dgm:styleLbl name="asst1">
+    <dgm:scene3d>
+      <a:camera prst="orthographicFront"/>
+      <a:lightRig rig="threePt" dir="t"/>
+    </dgm:scene3d>
+    <dgm:sp3d/>
+    <dgm:txPr/>
+    <dgm:style>
+      <a:lnRef idx="2">
+        <a:scrgbClr r="0" g="0" b="0"/>
+      </a:lnRef>
+      <a:fillRef idx="1">
+        <a:scrgbClr r="0" g="0" b="0"/>
+      </a:fillRef>
+      <a:effectRef idx="0">
+        <a:scrgbClr r="0" g="0" b="0"/>
+      </a:effectRef>
+      <a:fontRef idx="minor">
+        <a:schemeClr val="lt1"/>
+      </a:fontRef>
+    </dgm:style>
+  </dgm:styleLbl>
+  <dgm:styleLbl name="asst2">
+    <dgm:scene3d>
+      <a:camera prst="orthographicFront"/>
+      <a:lightRig rig="threePt" dir="t"/>
+    </dgm:scene3d>
+    <dgm:sp3d/>
+    <dgm:txPr/>
+    <dgm:style>
+      <a:lnRef idx="2">
+        <a:scrgbClr r="0" g="0" b="0"/>
+      </a:lnRef>
+      <a:fillRef idx="1">
+        <a:scrgbClr r="0" g="0" b="0"/>
+      </a:fillRef>
+      <a:effectRef idx="0">
+        <a:scrgbClr r="0" g="0" b="0"/>
+      </a:effectRef>
+      <a:fontRef idx="minor">
+        <a:schemeClr val="lt1"/>
+      </a:fontRef>
+    </dgm:style>
+  </dgm:styleLbl>
+  <dgm:styleLbl name="asst3">
+    <dgm:scene3d>
+      <a:camera prst="orthographicFront"/>
+      <a:lightRig rig="threePt" dir="t"/>
+    </dgm:scene3d>
+    <dgm:sp3d/>
+    <dgm:txPr/>
+    <dgm:style>
+      <a:lnRef idx="2">
+        <a:scrgbClr r="0" g="0" b="0"/>
+      </a:lnRef>
+      <a:fillRef idx="1">
+        <a:scrgbClr r="0" g="0" b="0"/>
+      </a:fillRef>
+      <a:effectRef idx="0">
+        <a:scrgbClr r="0" g="0" b="0"/>
+      </a:effectRef>
+      <a:fontRef idx="minor">
+        <a:schemeClr val="lt1"/>
+      </a:fontRef>
+    </dgm:style>
+  </dgm:styleLbl>
+  <dgm:styleLbl name="asst4">
+    <dgm:scene3d>
+      <a:camera prst="orthographicFront"/>
+      <a:lightRig rig="threePt" dir="t"/>
+    </dgm:scene3d>
+    <dgm:sp3d/>
+    <dgm:txPr/>
+    <dgm:style>
+      <a:lnRef idx="2">
+        <a:scrgbClr r="0" g="0" b="0"/>
+      </a:lnRef>
+      <a:fillRef idx="1">
+        <a:scrgbClr r="0" g="0" b="0"/>
+      </a:fillRef>
+      <a:effectRef idx="0">
+        <a:scrgbClr r="0" g="0" b="0"/>
+      </a:effectRef>
+      <a:fontRef idx="minor">
+        <a:schemeClr val="lt1"/>
+      </a:fontRef>
+    </dgm:style>
+  </dgm:styleLbl>
+  <dgm:styleLbl name="parChTrans2D1">
+    <dgm:scene3d>
+      <a:camera prst="orthographicFront"/>
+      <a:lightRig rig="threePt" dir="t"/>
+    </dgm:scene3d>
+    <dgm:sp3d/>
+    <dgm:txPr/>
+    <dgm:style>
+      <a:lnRef idx="2">
+        <a:scrgbClr r="0" g="0" b="0"/>
+      </a:lnRef>
+      <a:fillRef idx="1">
+        <a:scrgbClr r="0" g="0" b="0"/>
+      </a:fillRef>
+      <a:effectRef idx="0">
+        <a:scrgbClr r="0" g="0" b="0"/>
+      </a:effectRef>
+      <a:fontRef idx="minor">
+        <a:schemeClr val="lt1"/>
+      </a:fontRef>
+    </dgm:style>
+  </dgm:styleLbl>
+  <dgm:styleLbl name="parChTrans2D2">
+    <dgm:scene3d>
+      <a:camera prst="orthographicFront"/>
+      <a:lightRig rig="threePt" dir="t"/>
+    </dgm:scene3d>
+    <dgm:sp3d/>
+    <dgm:txPr/>
+    <dgm:style>
+      <a:lnRef idx="2">
+        <a:scrgbClr r="0" g="0" b="0"/>
+      </a:lnRef>
+      <a:fillRef idx="1">
+        <a:scrgbClr r="0" g="0" b="0"/>
+      </a:fillRef>
+      <a:effectRef idx="0">
+        <a:scrgbClr r="0" g="0" b="0"/>
+      </a:effectRef>
+      <a:fontRef idx="minor">
+        <a:schemeClr val="lt1"/>
+      </a:fontRef>
+    </dgm:style>
+  </dgm:styleLbl>
+  <dgm:styleLbl name="parChTrans2D3">
+    <dgm:scene3d>
+      <a:camera prst="orthographicFront"/>
+      <a:lightRig rig="threePt" dir="t"/>
+    </dgm:scene3d>
+    <dgm:sp3d/>
+    <dgm:txPr/>
+    <dgm:style>
+      <a:lnRef idx="2">
+        <a:scrgbClr r="0" g="0" b="0"/>
+      </a:lnRef>
+      <a:fillRef idx="1">
+        <a:scrgbClr r="0" g="0" b="0"/>
+      </a:fillRef>
+      <a:effectRef idx="0">
+        <a:scrgbClr r="0" g="0" b="0"/>
+      </a:effectRef>
+      <a:fontRef idx="minor">
+        <a:schemeClr val="lt1"/>
+      </a:fontRef>
+    </dgm:style>
+  </dgm:styleLbl>
+  <dgm:styleLbl name="parChTrans2D4">
+    <dgm:scene3d>
+      <a:camera prst="orthographicFront"/>
+      <a:lightRig rig="threePt" dir="t"/>
+    </dgm:scene3d>
+    <dgm:sp3d/>
+    <dgm:txPr/>
+    <dgm:style>
+      <a:lnRef idx="2">
+        <a:scrgbClr r="0" g="0" b="0"/>
+      </a:lnRef>
+      <a:fillRef idx="1">
+        <a:scrgbClr r="0" g="0" b="0"/>
+      </a:fillRef>
+      <a:effectRef idx="0">
+        <a:scrgbClr r="0" g="0" b="0"/>
+      </a:effectRef>
+      <a:fontRef idx="minor">
+        <a:schemeClr val="lt1"/>
+      </a:fontRef>
+    </dgm:style>
+  </dgm:styleLbl>
+  <dgm:styleLbl name="parChTrans1D1">
+    <dgm:scene3d>
+      <a:camera prst="orthographicFront"/>
+      <a:lightRig rig="threePt" dir="t"/>
+    </dgm:scene3d>
+    <dgm:sp3d/>
+    <dgm:txPr/>
+    <dgm:style>
+      <a:lnRef idx="2">
+        <a:scrgbClr r="0" g="0" b="0"/>
+      </a:lnRef>
+      <a:fillRef idx="0">
+        <a:scrgbClr r="0" g="0" b="0"/>
+      </a:fillRef>
+      <a:effectRef idx="0">
+        <a:scrgbClr r="0" g="0" b="0"/>
+      </a:effectRef>
+      <a:fontRef idx="minor"/>
+    </dgm:style>
+  </dgm:styleLbl>
+  <dgm:styleLbl name="parChTrans1D2">
+    <dgm:scene3d>
+      <a:camera prst="orthographicFront"/>
+      <a:lightRig rig="threePt" dir="t"/>
+    </dgm:scene3d>
+    <dgm:sp3d/>
+    <dgm:txPr/>
+    <dgm:style>
+      <a:lnRef idx="2">
+        <a:scrgbClr r="0" g="0" b="0"/>
+      </a:lnRef>
+      <a:fillRef idx="0">
+        <a:scrgbClr r="0" g="0" b="0"/>
+      </a:fillRef>
+      <a:effectRef idx="0">
+        <a:scrgbClr r="0" g="0" b="0"/>
+      </a:effectRef>
+      <a:fontRef idx="minor"/>
+    </dgm:style>
+  </dgm:styleLbl>
+  <dgm:styleLbl name="parChTrans1D3">
+    <dgm:scene3d>
+      <a:camera prst="orthographicFront"/>
+      <a:lightRig rig="threePt" dir="t"/>
+    </dgm:scene3d>
+    <dgm:sp3d/>
+    <dgm:txPr/>
+    <dgm:style>
+      <a:lnRef idx="2">
+        <a:scrgbClr r="0" g="0" b="0"/>
+      </a:lnRef>
+      <a:fillRef idx="0">
+        <a:scrgbClr r="0" g="0" b="0"/>
+      </a:fillRef>
+      <a:effectRef idx="0">
+        <a:scrgbClr r="0" g="0" b="0"/>
+      </a:effectRef>
+      <a:fontRef idx="minor"/>
+    </dgm:style>
+  </dgm:styleLbl>
+  <dgm:styleLbl name="parChTrans1D4">
+    <dgm:scene3d>
+      <a:camera prst="orthographicFront"/>
+      <a:lightRig rig="threePt" dir="t"/>
+    </dgm:scene3d>
+    <dgm:sp3d/>
+    <dgm:txPr/>
+    <dgm:style>
+      <a:lnRef idx="2">
+        <a:scrgbClr r="0" g="0" b="0"/>
+      </a:lnRef>
+      <a:fillRef idx="0">
+        <a:scrgbClr r="0" g="0" b="0"/>
+      </a:fillRef>
+      <a:effectRef idx="0">
+        <a:scrgbClr r="0" g="0" b="0"/>
+      </a:effectRef>
+      <a:fontRef idx="minor"/>
+    </dgm:style>
+  </dgm:styleLbl>
+  <dgm:styleLbl name="fgAcc1">
+    <dgm:scene3d>
+      <a:camera prst="orthographicFront"/>
+      <a:lightRig rig="threePt" dir="t"/>
+    </dgm:scene3d>
+    <dgm:sp3d/>
+    <dgm:txPr/>
+    <dgm:style>
+      <a:lnRef idx="2">
+        <a:scrgbClr r="0" g="0" b="0"/>
+      </a:lnRef>
+      <a:fillRef idx="1">
+        <a:scrgbClr r="0" g="0" b="0"/>
+      </a:fillRef>
+      <a:effectRef idx="0">
+        <a:scrgbClr r="0" g="0" b="0"/>
+      </a:effectRef>
+      <a:fontRef idx="minor"/>
+    </dgm:style>
+  </dgm:styleLbl>
+  <dgm:styleLbl name="conFgAcc1">
+    <dgm:scene3d>
+      <a:camera prst="orthographicFront"/>
+      <a:lightRig rig="threePt" dir="t"/>
+    </dgm:scene3d>
+    <dgm:sp3d/>
+    <dgm:txPr/>
+    <dgm:style>
+      <a:lnRef idx="2">
+        <a:scrgbClr r="0" g="0" b="0"/>
+      </a:lnRef>
+      <a:fillRef idx="1">
+        <a:scrgbClr r="0" g="0" b="0"/>
+      </a:fillRef>
+      <a:effectRef idx="0">
+        <a:scrgbClr r="0" g="0" b="0"/>
+      </a:effectRef>
+      <a:fontRef idx="minor"/>
+    </dgm:style>
+  </dgm:styleLbl>
+  <dgm:styleLbl name="alignAcc1">
+    <dgm:scene3d>
+      <a:camera prst="orthographicFront"/>
+      <a:lightRig rig="threePt" dir="t"/>
+    </dgm:scene3d>
+    <dgm:sp3d/>
+    <dgm:txPr/>
+    <dgm:style>
+      <a:lnRef idx="2">
+        <a:scrgbClr r="0" g="0" b="0"/>
+      </a:lnRef>
+      <a:fillRef idx="1">
+        <a:scrgbClr r="0" g="0" b="0"/>
+      </a:fillRef>
+      <a:effectRef idx="0">
+        <a:scrgbClr r="0" g="0" b="0"/>
+      </a:effectRef>
+      <a:fontRef idx="minor"/>
+    </dgm:style>
+  </dgm:styleLbl>
+  <dgm:styleLbl name="trAlignAcc1">
+    <dgm:scene3d>
+      <a:camera prst="orthographicFront"/>
+      <a:lightRig rig="threePt" dir="t"/>
+    </dgm:scene3d>
+    <dgm:sp3d/>
+    <dgm:txPr/>
+    <dgm:style>
+      <a:lnRef idx="1">
+        <a:scrgbClr r="0" g="0" b="0"/>
+      </a:lnRef>
+      <a:fillRef idx="1">
+        <a:scrgbClr r="0" g="0" b="0"/>
+      </a:fillRef>
+      <a:effectRef idx="0">
+        <a:scrgbClr r="0" g="0" b="0"/>
+      </a:effectRef>
+      <a:fontRef idx="minor"/>
+    </dgm:style>
+  </dgm:styleLbl>
+  <dgm:styleLbl name="bgAcc1">
+    <dgm:scene3d>
+      <a:camera prst="orthographicFront"/>
+      <a:lightRig rig="threePt" dir="t"/>
+    </dgm:scene3d>
+    <dgm:sp3d/>
+    <dgm:txPr/>
+    <dgm:style>
+      <a:lnRef idx="2">
+        <a:scrgbClr r="0" g="0" b="0"/>
+      </a:lnRef>
+      <a:fillRef idx="1">
+        <a:scrgbClr r="0" g="0" b="0"/>
+      </a:fillRef>
+      <a:effectRef idx="0">
+        <a:scrgbClr r="0" g="0" b="0"/>
+      </a:effectRef>
+      <a:fontRef idx="minor"/>
+    </dgm:style>
+  </dgm:styleLbl>
+  <dgm:styleLbl name="solidFgAcc1">
+    <dgm:scene3d>
+      <a:camera prst="orthographicFront"/>
+      <a:lightRig rig="threePt" dir="t"/>
+    </dgm:scene3d>
+    <dgm:sp3d/>
+    <dgm:txPr/>
+    <dgm:style>
+      <a:lnRef idx="2">
+        <a:scrgbClr r="0" g="0" b="0"/>
+      </a:lnRef>
+      <a:fillRef idx="1">
+        <a:scrgbClr r="0" g="0" b="0"/>
+      </a:fillRef>
+      <a:effectRef idx="0">
+        <a:scrgbClr r="0" g="0" b="0"/>
+      </a:effectRef>
+      <a:fontRef idx="minor"/>
+    </dgm:style>
+  </dgm:styleLbl>
+  <dgm:styleLbl name="solidAlignAcc1">
+    <dgm:scene3d>
+      <a:camera prst="orthographicFront"/>
+      <a:lightRig rig="threePt" dir="t"/>
+    </dgm:scene3d>
+    <dgm:sp3d/>
+    <dgm:txPr/>
+    <dgm:style>
+      <a:lnRef idx="2">
+        <a:scrgbClr r="0" g="0" b="0"/>
+      </a:lnRef>
+      <a:fillRef idx="1">
+        <a:scrgbClr r="0" g="0" b="0"/>
+      </a:fillRef>
+      <a:effectRef idx="0">
+        <a:scrgbClr r="0" g="0" b="0"/>
+      </a:effectRef>
+      <a:fontRef idx="minor"/>
+    </dgm:style>
+  </dgm:styleLbl>
+  <dgm:styleLbl name="solidBgAcc1">
+    <dgm:scene3d>
+      <a:camera prst="orthographicFront"/>
+      <a:lightRig rig="threePt" dir="t"/>
+    </dgm:scene3d>
+    <dgm:sp3d/>
+    <dgm:txPr/>
+    <dgm:style>
+      <a:lnRef idx="2">
+        <a:scrgbClr r="0" g="0" b="0"/>
+      </a:lnRef>
+      <a:fillRef idx="1">
+        <a:scrgbClr r="0" g="0" b="0"/>
+      </a:fillRef>
+      <a:effectRef idx="0">
+        <a:scrgbClr r="0" g="0" b="0"/>
+      </a:effectRef>
+      <a:fontRef idx="minor"/>
+    </dgm:style>
+  </dgm:styleLbl>
+  <dgm:styleLbl name="fgAccFollowNode1">
+    <dgm:scene3d>
+      <a:camera prst="orthographicFront"/>
+      <a:lightRig rig="threePt" dir="t"/>
+    </dgm:scene3d>
+    <dgm:sp3d/>
+    <dgm:txPr/>
+    <dgm:style>
+      <a:lnRef idx="2">
+        <a:scrgbClr r="0" g="0" b="0"/>
+      </a:lnRef>
+      <a:fillRef idx="1">
+        <a:scrgbClr r="0" g="0" b="0"/>
+      </a:fillRef>
+      <a:effectRef idx="0">
+        <a:scrgbClr r="0" g="0" b="0"/>
+      </a:effectRef>
+      <a:fontRef idx="minor"/>
+    </dgm:style>
+  </dgm:styleLbl>
+  <dgm:styleLbl name="alignAccFollowNode1">
+    <dgm:scene3d>
+      <a:camera prst="orthographicFront"/>
+      <a:lightRig rig="threePt" dir="t"/>
+    </dgm:scene3d>
+    <dgm:sp3d/>
+    <dgm:txPr/>
+    <dgm:style>
+      <a:lnRef idx="2">
+        <a:scrgbClr r="0" g="0" b="0"/>
+      </a:lnRef>
+      <a:fillRef idx="1">
+        <a:scrgbClr r="0" g="0" b="0"/>
+      </a:fillRef>
+      <a:effectRef idx="0">
+        <a:scrgbClr r="0" g="0" b="0"/>
+      </a:effectRef>
+      <a:fontRef idx="minor"/>
+    </dgm:style>
+  </dgm:styleLbl>
+  <dgm:styleLbl name="bgAccFollowNode1">
+    <dgm:scene3d>
+      <a:camera prst="orthographicFront"/>
+      <a:lightRig rig="threePt" dir="t"/>
+    </dgm:scene3d>
+    <dgm:sp3d/>
+    <dgm:txPr/>
+    <dgm:style>
+      <a:lnRef idx="2">
+        <a:scrgbClr r="0" g="0" b="0"/>
+      </a:lnRef>
+      <a:fillRef idx="1">
+        <a:scrgbClr r="0" g="0" b="0"/>
+      </a:fillRef>
+      <a:effectRef idx="0">
+        <a:scrgbClr r="0" g="0" b="0"/>
+      </a:effectRef>
+      <a:fontRef idx="minor"/>
+    </dgm:style>
+  </dgm:styleLbl>
+  <dgm:styleLbl name="fgAcc0">
+    <dgm:scene3d>
+      <a:camera prst="orthographicFront"/>
+      <a:lightRig rig="threePt" dir="t"/>
+    </dgm:scene3d>
+    <dgm:sp3d/>
+    <dgm:txPr/>
+    <dgm:style>
+      <a:lnRef idx="2">
+        <a:scrgbClr r="0" g="0" b="0"/>
+      </a:lnRef>
+      <a:fillRef idx="1">
+        <a:scrgbClr r="0" g="0" b="0"/>
+      </a:fillRef>
+      <a:effectRef idx="0">
+        <a:scrgbClr r="0" g="0" b="0"/>
+      </a:effectRef>
+      <a:fontRef idx="minor"/>
+    </dgm:style>
+  </dgm:styleLbl>
+  <dgm:styleLbl name="fgAcc2">
+    <dgm:scene3d>
+      <a:camera prst="orthographicFront"/>
+      <a:lightRig rig="threePt" dir="t"/>
+    </dgm:scene3d>
+    <dgm:sp3d/>
+    <dgm:txPr/>
+    <dgm:style>
+      <a:lnRef idx="2">
+        <a:scrgbClr r="0" g="0" b="0"/>
+      </a:lnRef>
+      <a:fillRef idx="1">
+        <a:scrgbClr r="0" g="0" b="0"/>
+      </a:fillRef>
+      <a:effectRef idx="0">
+        <a:scrgbClr r="0" g="0" b="0"/>
+      </a:effectRef>
+      <a:fontRef idx="minor"/>
+    </dgm:style>
+  </dgm:styleLbl>
+  <dgm:styleLbl name="fgAcc3">
+    <dgm:scene3d>
+      <a:camera prst="orthographicFront"/>
+      <a:lightRig rig="threePt" dir="t"/>
+    </dgm:scene3d>
+    <dgm:sp3d/>
+    <dgm:txPr/>
+    <dgm:style>
+      <a:lnRef idx="2">
+        <a:scrgbClr r="0" g="0" b="0"/>
+      </a:lnRef>
+      <a:fillRef idx="1">
+        <a:scrgbClr r="0" g="0" b="0"/>
+      </a:fillRef>
+      <a:effectRef idx="0">
+        <a:scrgbClr r="0" g="0" b="0"/>
+      </a:effectRef>
+      <a:fontRef idx="minor"/>
+    </dgm:style>
+  </dgm:styleLbl>
+  <dgm:styleLbl name="fgAcc4">
+    <dgm:scene3d>
+      <a:camera prst="orthographicFront"/>
+      <a:lightRig rig="threePt" dir="t"/>
+    </dgm:scene3d>
+    <dgm:sp3d/>
+    <dgm:txPr/>
+    <dgm:style>
+      <a:lnRef idx="2">
+        <a:scrgbClr r="0" g="0" b="0"/>
+      </a:lnRef>
+      <a:fillRef idx="1">
+        <a:scrgbClr r="0" g="0" b="0"/>
+      </a:fillRef>
+      <a:effectRef idx="0">
+        <a:scrgbClr r="0" g="0" b="0"/>
+      </a:effectRef>
+      <a:fontRef idx="minor"/>
+    </dgm:style>
+  </dgm:styleLbl>
+  <dgm:styleLbl name="bgShp">
+    <dgm:scene3d>
+      <a:camera prst="orthographicFront"/>
+      <a:lightRig rig="threePt" dir="t"/>
+    </dgm:scene3d>
+    <dgm:sp3d/>
+    <dgm:txPr/>
+    <dgm:style>
+      <a:lnRef idx="0">
+        <a:scrgbClr r="0" g="0" b="0"/>
+      </a:lnRef>
+      <a:fillRef idx="1">
+        <a:scrgbClr r="0" g="0" b="0"/>
+      </a:fillRef>
+      <a:effectRef idx="0">
+        <a:scrgbClr r="0" g="0" b="0"/>
+      </a:effectRef>
+      <a:fontRef idx="minor"/>
+    </dgm:style>
+  </dgm:styleLbl>
+  <dgm:styleLbl name="dkBgShp">
+    <dgm:scene3d>
+      <a:camera prst="orthographicFront"/>
+      <a:lightRig rig="threePt" dir="t"/>
+    </dgm:scene3d>
+    <dgm:sp3d/>
+    <dgm:txPr/>
+    <dgm:style>
+      <a:lnRef idx="0">
+        <a:scrgbClr r="0" g="0" b="0"/>
+      </a:lnRef>
+      <a:fillRef idx="1">
+        <a:scrgbClr r="0" g="0" b="0"/>
+      </a:fillRef>
+      <a:effectRef idx="0">
+        <a:scrgbClr r="0" g="0" b="0"/>
+      </a:effectRef>
+      <a:fontRef idx="minor"/>
+    </dgm:style>
+  </dgm:styleLbl>
+  <dgm:styleLbl name="trBgShp">
+    <dgm:scene3d>
+      <a:camera prst="orthographicFront"/>
+      <a:lightRig rig="threePt" dir="t"/>
+    </dgm:scene3d>
+    <dgm:sp3d/>
+    <dgm:txPr/>
+    <dgm:style>
+      <a:lnRef idx="0">
+        <a:scrgbClr r="0" g="0" b="0"/>
+      </a:lnRef>
+      <a:fillRef idx="1">
+        <a:scrgbClr r="0" g="0" b="0"/>
+      </a:fillRef>
+      <a:effectRef idx="0">
+        <a:scrgbClr r="0" g="0" b="0"/>
+      </a:effectRef>
+      <a:fontRef idx="minor"/>
+    </dgm:style>
+  </dgm:styleLbl>
+  <dgm:styleLbl name="fgShp">
+    <dgm:scene3d>
+      <a:camera prst="orthographicFront"/>
+      <a:lightRig rig="threePt" dir="t"/>
+    </dgm:scene3d>
+    <dgm:sp3d/>
+    <dgm:txPr/>
+    <dgm:style>
+      <a:lnRef idx="2">
+        <a:scrgbClr r="0" g="0" b="0"/>
+      </a:lnRef>
+      <a:fillRef idx="1">
+        <a:scrgbClr r="0" g="0" b="0"/>
+      </a:fillRef>
+      <a:effectRef idx="0">
+        <a:scrgbClr r="0" g="0" b="0"/>
+      </a:effectRef>
+      <a:fontRef idx="minor"/>
+    </dgm:style>
+  </dgm:styleLbl>
+  <dgm:styleLbl name="revTx">
+    <dgm:scene3d>
+      <a:camera prst="orthographicFront"/>
+      <a:lightRig rig="threePt" dir="t"/>
+    </dgm:scene3d>
+    <dgm:sp3d/>
+    <dgm:txPr/>
+    <dgm:style>
+      <a:lnRef idx="0">
+        <a:scrgbClr r="0" g="0" b="0"/>
+      </a:lnRef>
+      <a:fillRef idx="0">
+        <a:scrgbClr r="0" g="0" b="0"/>
+      </a:fillRef>
+      <a:effectRef idx="0">
+        <a:scrgbClr r="0" g="0" b="0"/>
+      </a:effectRef>
+      <a:fontRef idx="minor"/>
+    </dgm:style>
+  </dgm:styleLbl>
+</dgm:styleDef>
+</file>
+
 <file path=ppt/diagrams/quickStyle2.xml><?xml version="1.0" encoding="utf-8"?>
 <dgm:styleDef xmlns:dgm="http://schemas.openxmlformats.org/drawingml/2006/diagram" xmlns:a="http://schemas.openxmlformats.org/drawingml/2006/main" uniqueId="urn:microsoft.com/office/officeart/2005/8/quickstyle/3d1">
   <dgm:title val=""/>
@@ -29400,11 +32196,11 @@
 </file>
 
 <file path=ppt/diagrams/quickStyle8.xml><?xml version="1.0" encoding="utf-8"?>
-<dgm:styleDef xmlns:dgm="http://schemas.openxmlformats.org/drawingml/2006/diagram" xmlns:a="http://schemas.openxmlformats.org/drawingml/2006/main" uniqueId="urn:microsoft.com/office/officeart/2005/8/quickstyle/simple1">
+<dgm:styleDef xmlns:dgm="http://schemas.openxmlformats.org/drawingml/2006/diagram" xmlns:a="http://schemas.openxmlformats.org/drawingml/2006/main" uniqueId="urn:microsoft.com/office/officeart/2005/8/quickstyle/3d2">
   <dgm:title val=""/>
   <dgm:desc val=""/>
   <dgm:catLst>
-    <dgm:cat type="simple" pri="10100"/>
+    <dgm:cat type="3D" pri="11200"/>
   </dgm:catLst>
   <dgm:scene3d>
     <a:camera prst="orthographicFront"/>
@@ -29413,18 +32209,22 @@
   <dgm:styleLbl name="node0">
     <dgm:scene3d>
       <a:camera prst="orthographicFront"/>
-      <a:lightRig rig="threePt" dir="t"/>
+      <a:lightRig rig="threePt" dir="t">
+        <a:rot lat="0" lon="0" rev="7500000"/>
+      </a:lightRig>
     </dgm:scene3d>
-    <dgm:sp3d/>
+    <dgm:sp3d prstMaterial="plastic">
+      <a:bevelT w="127000" h="25400" prst="relaxedInset"/>
+    </dgm:sp3d>
     <dgm:txPr/>
     <dgm:style>
-      <a:lnRef idx="2">
+      <a:lnRef idx="0">
         <a:scrgbClr r="0" g="0" b="0"/>
       </a:lnRef>
-      <a:fillRef idx="1">
+      <a:fillRef idx="3">
         <a:scrgbClr r="0" g="0" b="0"/>
       </a:fillRef>
-      <a:effectRef idx="0">
+      <a:effectRef idx="2">
         <a:scrgbClr r="0" g="0" b="0"/>
       </a:effectRef>
       <a:fontRef idx="minor">
@@ -29435,18 +32235,22 @@
   <dgm:styleLbl name="lnNode1">
     <dgm:scene3d>
       <a:camera prst="orthographicFront"/>
-      <a:lightRig rig="threePt" dir="t"/>
+      <a:lightRig rig="threePt" dir="t">
+        <a:rot lat="0" lon="0" rev="7500000"/>
+      </a:lightRig>
     </dgm:scene3d>
-    <dgm:sp3d/>
+    <dgm:sp3d prstMaterial="plastic">
+      <a:bevelT w="127000" h="25400" prst="relaxedInset"/>
+    </dgm:sp3d>
     <dgm:txPr/>
     <dgm:style>
-      <a:lnRef idx="2">
+      <a:lnRef idx="1">
         <a:scrgbClr r="0" g="0" b="0"/>
       </a:lnRef>
-      <a:fillRef idx="1">
+      <a:fillRef idx="3">
         <a:scrgbClr r="0" g="0" b="0"/>
       </a:fillRef>
-      <a:effectRef idx="0">
+      <a:effectRef idx="2">
         <a:scrgbClr r="0" g="0" b="0"/>
       </a:effectRef>
       <a:fontRef idx="minor">
@@ -29457,18 +32261,22 @@
   <dgm:styleLbl name="vennNode1">
     <dgm:scene3d>
       <a:camera prst="orthographicFront"/>
-      <a:lightRig rig="threePt" dir="t"/>
+      <a:lightRig rig="threePt" dir="t">
+        <a:rot lat="0" lon="0" rev="7500000"/>
+      </a:lightRig>
     </dgm:scene3d>
-    <dgm:sp3d/>
+    <dgm:sp3d prstMaterial="plastic">
+      <a:bevelT w="127000" h="25400" prst="relaxedInset"/>
+    </dgm:sp3d>
     <dgm:txPr/>
     <dgm:style>
-      <a:lnRef idx="2">
+      <a:lnRef idx="0">
         <a:scrgbClr r="0" g="0" b="0"/>
       </a:lnRef>
-      <a:fillRef idx="1">
+      <a:fillRef idx="3">
         <a:scrgbClr r="0" g="0" b="0"/>
       </a:fillRef>
-      <a:effectRef idx="0">
+      <a:effectRef idx="2">
         <a:scrgbClr r="0" g="0" b="0"/>
       </a:effectRef>
       <a:fontRef idx="minor">
@@ -29476,21 +32284,25 @@
       </a:fontRef>
     </dgm:style>
   </dgm:styleLbl>
-  <dgm:styleLbl name="alignNode1">
+  <dgm:styleLbl name="alingNode1">
     <dgm:scene3d>
       <a:camera prst="orthographicFront"/>
-      <a:lightRig rig="threePt" dir="t"/>
+      <a:lightRig rig="threePt" dir="t">
+        <a:rot lat="0" lon="0" rev="7500000"/>
+      </a:lightRig>
     </dgm:scene3d>
-    <dgm:sp3d/>
+    <dgm:sp3d prstMaterial="plastic">
+      <a:bevelT w="127000" h="25400" prst="relaxedInset"/>
+    </dgm:sp3d>
     <dgm:txPr/>
     <dgm:style>
-      <a:lnRef idx="2">
+      <a:lnRef idx="0">
         <a:scrgbClr r="0" g="0" b="0"/>
       </a:lnRef>
-      <a:fillRef idx="1">
+      <a:fillRef idx="3">
         <a:scrgbClr r="0" g="0" b="0"/>
       </a:fillRef>
-      <a:effectRef idx="0">
+      <a:effectRef idx="2">
         <a:scrgbClr r="0" g="0" b="0"/>
       </a:effectRef>
       <a:fontRef idx="minor">
@@ -29501,18 +32313,22 @@
   <dgm:styleLbl name="node1">
     <dgm:scene3d>
       <a:camera prst="orthographicFront"/>
-      <a:lightRig rig="threePt" dir="t"/>
+      <a:lightRig rig="threePt" dir="t">
+        <a:rot lat="0" lon="0" rev="7500000"/>
+      </a:lightRig>
     </dgm:scene3d>
-    <dgm:sp3d/>
+    <dgm:sp3d prstMaterial="plastic">
+      <a:bevelT w="127000" h="25400" prst="relaxedInset"/>
+    </dgm:sp3d>
     <dgm:txPr/>
     <dgm:style>
-      <a:lnRef idx="2">
+      <a:lnRef idx="0">
         <a:scrgbClr r="0" g="0" b="0"/>
       </a:lnRef>
-      <a:fillRef idx="1">
+      <a:fillRef idx="3">
         <a:scrgbClr r="0" g="0" b="0"/>
       </a:fillRef>
-      <a:effectRef idx="0">
+      <a:effectRef idx="2">
         <a:scrgbClr r="0" g="0" b="0"/>
       </a:effectRef>
       <a:fontRef idx="minor">
@@ -29523,18 +32339,22 @@
   <dgm:styleLbl name="node2">
     <dgm:scene3d>
       <a:camera prst="orthographicFront"/>
-      <a:lightRig rig="threePt" dir="t"/>
+      <a:lightRig rig="threePt" dir="t">
+        <a:rot lat="0" lon="0" rev="7500000"/>
+      </a:lightRig>
     </dgm:scene3d>
-    <dgm:sp3d/>
+    <dgm:sp3d prstMaterial="plastic">
+      <a:bevelT w="127000" h="25400" prst="relaxedInset"/>
+    </dgm:sp3d>
     <dgm:txPr/>
     <dgm:style>
-      <a:lnRef idx="2">
+      <a:lnRef idx="0">
         <a:scrgbClr r="0" g="0" b="0"/>
       </a:lnRef>
-      <a:fillRef idx="1">
+      <a:fillRef idx="3">
         <a:scrgbClr r="0" g="0" b="0"/>
       </a:fillRef>
-      <a:effectRef idx="0">
+      <a:effectRef idx="2">
         <a:scrgbClr r="0" g="0" b="0"/>
       </a:effectRef>
       <a:fontRef idx="minor">
@@ -29545,18 +32365,22 @@
   <dgm:styleLbl name="node3">
     <dgm:scene3d>
       <a:camera prst="orthographicFront"/>
-      <a:lightRig rig="threePt" dir="t"/>
+      <a:lightRig rig="threePt" dir="t">
+        <a:rot lat="0" lon="0" rev="7500000"/>
+      </a:lightRig>
     </dgm:scene3d>
-    <dgm:sp3d/>
+    <dgm:sp3d prstMaterial="plastic">
+      <a:bevelT w="127000" h="25400" prst="relaxedInset"/>
+    </dgm:sp3d>
     <dgm:txPr/>
     <dgm:style>
-      <a:lnRef idx="2">
+      <a:lnRef idx="0">
         <a:scrgbClr r="0" g="0" b="0"/>
       </a:lnRef>
-      <a:fillRef idx="1">
+      <a:fillRef idx="3">
         <a:scrgbClr r="0" g="0" b="0"/>
       </a:fillRef>
-      <a:effectRef idx="0">
+      <a:effectRef idx="2">
         <a:scrgbClr r="0" g="0" b="0"/>
       </a:effectRef>
       <a:fontRef idx="minor">
@@ -29567,18 +32391,22 @@
   <dgm:styleLbl name="node4">
     <dgm:scene3d>
       <a:camera prst="orthographicFront"/>
-      <a:lightRig rig="threePt" dir="t"/>
+      <a:lightRig rig="threePt" dir="t">
+        <a:rot lat="0" lon="0" rev="7500000"/>
+      </a:lightRig>
     </dgm:scene3d>
-    <dgm:sp3d/>
+    <dgm:sp3d prstMaterial="plastic">
+      <a:bevelT w="127000" h="25400" prst="relaxedInset"/>
+    </dgm:sp3d>
     <dgm:txPr/>
     <dgm:style>
-      <a:lnRef idx="2">
+      <a:lnRef idx="0">
         <a:scrgbClr r="0" g="0" b="0"/>
       </a:lnRef>
-      <a:fillRef idx="1">
+      <a:fillRef idx="3">
         <a:scrgbClr r="0" g="0" b="0"/>
       </a:fillRef>
-      <a:effectRef idx="0">
+      <a:effectRef idx="2">
         <a:scrgbClr r="0" g="0" b="0"/>
       </a:effectRef>
       <a:fontRef idx="minor">
@@ -29589,12 +32417,19 @@
   <dgm:styleLbl name="fgImgPlace1">
     <dgm:scene3d>
       <a:camera prst="orthographicFront"/>
-      <a:lightRig rig="threePt" dir="t"/>
+      <a:lightRig rig="threePt" dir="t">
+        <a:rot lat="0" lon="0" rev="7500000"/>
+      </a:lightRig>
     </dgm:scene3d>
-    <dgm:sp3d/>
+    <dgm:sp3d z="152400" extrusionH="63500" prstMaterial="matte">
+      <a:bevelT w="50800" h="19050" prst="relaxedInset"/>
+      <a:contourClr>
+        <a:schemeClr val="bg1"/>
+      </a:contourClr>
+    </dgm:sp3d>
     <dgm:txPr/>
     <dgm:style>
-      <a:lnRef idx="2">
+      <a:lnRef idx="0">
         <a:scrgbClr r="0" g="0" b="0"/>
       </a:lnRef>
       <a:fillRef idx="1">
@@ -29609,12 +32444,18 @@
   <dgm:styleLbl name="alignImgPlace1">
     <dgm:scene3d>
       <a:camera prst="orthographicFront"/>
-      <a:lightRig rig="threePt" dir="t"/>
+      <a:lightRig rig="threePt" dir="t">
+        <a:rot lat="0" lon="0" rev="7500000"/>
+      </a:lightRig>
     </dgm:scene3d>
-    <dgm:sp3d/>
+    <dgm:sp3d z="254000" extrusionH="63500" contourW="12700" prstMaterial="matte">
+      <a:contourClr>
+        <a:schemeClr val="lt1"/>
+      </a:contourClr>
+    </dgm:sp3d>
     <dgm:txPr/>
     <dgm:style>
-      <a:lnRef idx="2">
+      <a:lnRef idx="0">
         <a:scrgbClr r="0" g="0" b="0"/>
       </a:lnRef>
       <a:fillRef idx="1">
@@ -29629,12 +32470,18 @@
   <dgm:styleLbl name="bgImgPlace1">
     <dgm:scene3d>
       <a:camera prst="orthographicFront"/>
-      <a:lightRig rig="threePt" dir="t"/>
+      <a:lightRig rig="threePt" dir="t">
+        <a:rot lat="0" lon="0" rev="7500000"/>
+      </a:lightRig>
     </dgm:scene3d>
-    <dgm:sp3d/>
+    <dgm:sp3d z="-152400" extrusionH="63500" contourW="12700" prstMaterial="matte">
+      <a:contourClr>
+        <a:schemeClr val="lt1"/>
+      </a:contourClr>
+    </dgm:sp3d>
     <dgm:txPr/>
     <dgm:style>
-      <a:lnRef idx="2">
+      <a:lnRef idx="0">
         <a:scrgbClr r="0" g="0" b="0"/>
       </a:lnRef>
       <a:fillRef idx="1">
@@ -29649,9 +32496,16 @@
   <dgm:styleLbl name="sibTrans2D1">
     <dgm:scene3d>
       <a:camera prst="orthographicFront"/>
-      <a:lightRig rig="threePt" dir="t"/>
+      <a:lightRig rig="threePt" dir="t">
+        <a:rot lat="0" lon="0" rev="7500000"/>
+      </a:lightRig>
     </dgm:scene3d>
-    <dgm:sp3d/>
+    <dgm:sp3d z="-70000" extrusionH="63500" prstMaterial="matte">
+      <a:bevelT w="25400" h="6350" prst="relaxedInset"/>
+      <a:contourClr>
+        <a:schemeClr val="bg1"/>
+      </a:contourClr>
+    </dgm:sp3d>
     <dgm:txPr/>
     <dgm:style>
       <a:lnRef idx="0">
@@ -29660,7 +32514,7 @@
       <a:fillRef idx="1">
         <a:scrgbClr r="0" g="0" b="0"/>
       </a:fillRef>
-      <a:effectRef idx="0">
+      <a:effectRef idx="2">
         <a:scrgbClr r="0" g="0" b="0"/>
       </a:effectRef>
       <a:fontRef idx="minor">
@@ -29671,9 +32525,16 @@
   <dgm:styleLbl name="fgSibTrans2D1">
     <dgm:scene3d>
       <a:camera prst="orthographicFront"/>
-      <a:lightRig rig="threePt" dir="t"/>
+      <a:lightRig rig="threePt" dir="t">
+        <a:rot lat="0" lon="0" rev="7500000"/>
+      </a:lightRig>
     </dgm:scene3d>
-    <dgm:sp3d/>
+    <dgm:sp3d z="152400" extrusionH="63500" prstMaterial="matte">
+      <a:bevelT w="25400" h="6350" prst="relaxedInset"/>
+      <a:contourClr>
+        <a:schemeClr val="bg1"/>
+      </a:contourClr>
+    </dgm:sp3d>
     <dgm:txPr/>
     <dgm:style>
       <a:lnRef idx="0">
@@ -29682,7 +32543,7 @@
       <a:fillRef idx="1">
         <a:scrgbClr r="0" g="0" b="0"/>
       </a:fillRef>
-      <a:effectRef idx="0">
+      <a:effectRef idx="2">
         <a:scrgbClr r="0" g="0" b="0"/>
       </a:effectRef>
       <a:fontRef idx="minor">
@@ -29693,9 +32554,16 @@
   <dgm:styleLbl name="bgSibTrans2D1">
     <dgm:scene3d>
       <a:camera prst="orthographicFront"/>
-      <a:lightRig rig="threePt" dir="t"/>
+      <a:lightRig rig="threePt" dir="t">
+        <a:rot lat="0" lon="0" rev="7500000"/>
+      </a:lightRig>
     </dgm:scene3d>
-    <dgm:sp3d/>
+    <dgm:sp3d z="-152400" extrusionH="63500" prstMaterial="matte">
+      <a:bevelT w="25400" h="6350" prst="relaxedInset"/>
+      <a:contourClr>
+        <a:schemeClr val="bg1"/>
+      </a:contourClr>
+    </dgm:sp3d>
     <dgm:txPr/>
     <dgm:style>
       <a:lnRef idx="0">
@@ -29704,7 +32572,7 @@
       <a:fillRef idx="1">
         <a:scrgbClr r="0" g="0" b="0"/>
       </a:fillRef>
-      <a:effectRef idx="0">
+      <a:effectRef idx="2">
         <a:scrgbClr r="0" g="0" b="0"/>
       </a:effectRef>
       <a:fontRef idx="minor">
@@ -29715,9 +32583,11 @@
   <dgm:styleLbl name="sibTrans1D1">
     <dgm:scene3d>
       <a:camera prst="orthographicFront"/>
-      <a:lightRig rig="threePt" dir="t"/>
+      <a:lightRig rig="threePt" dir="t">
+        <a:rot lat="0" lon="0" rev="7500000"/>
+      </a:lightRig>
     </dgm:scene3d>
-    <dgm:sp3d/>
+    <dgm:sp3d z="-40000" prstMaterial="matte"/>
     <dgm:txPr/>
     <dgm:style>
       <a:lnRef idx="1">
@@ -29735,9 +32605,11 @@
   <dgm:styleLbl name="callout">
     <dgm:scene3d>
       <a:camera prst="orthographicFront"/>
-      <a:lightRig rig="threePt" dir="t"/>
+      <a:lightRig rig="threePt" dir="t">
+        <a:rot lat="0" lon="0" rev="7500000"/>
+      </a:lightRig>
     </dgm:scene3d>
-    <dgm:sp3d/>
+    <dgm:sp3d z="127000" prstMaterial="matte"/>
     <dgm:txPr/>
     <dgm:style>
       <a:lnRef idx="2">
@@ -29755,18 +32627,22 @@
   <dgm:styleLbl name="asst0">
     <dgm:scene3d>
       <a:camera prst="orthographicFront"/>
-      <a:lightRig rig="threePt" dir="t"/>
+      <a:lightRig rig="threePt" dir="t">
+        <a:rot lat="0" lon="0" rev="7500000"/>
+      </a:lightRig>
     </dgm:scene3d>
-    <dgm:sp3d/>
+    <dgm:sp3d prstMaterial="plastic">
+      <a:bevelT w="127000" h="25400" prst="relaxedInset"/>
+    </dgm:sp3d>
     <dgm:txPr/>
     <dgm:style>
-      <a:lnRef idx="2">
+      <a:lnRef idx="0">
         <a:scrgbClr r="0" g="0" b="0"/>
       </a:lnRef>
-      <a:fillRef idx="1">
+      <a:fillRef idx="3">
         <a:scrgbClr r="0" g="0" b="0"/>
       </a:fillRef>
-      <a:effectRef idx="0">
+      <a:effectRef idx="2">
         <a:scrgbClr r="0" g="0" b="0"/>
       </a:effectRef>
       <a:fontRef idx="minor">
@@ -29777,18 +32653,22 @@
   <dgm:styleLbl name="asst1">
     <dgm:scene3d>
       <a:camera prst="orthographicFront"/>
-      <a:lightRig rig="threePt" dir="t"/>
+      <a:lightRig rig="threePt" dir="t">
+        <a:rot lat="0" lon="0" rev="7500000"/>
+      </a:lightRig>
     </dgm:scene3d>
-    <dgm:sp3d/>
+    <dgm:sp3d prstMaterial="plastic">
+      <a:bevelT w="127000" h="25400" prst="relaxedInset"/>
+    </dgm:sp3d>
     <dgm:txPr/>
     <dgm:style>
-      <a:lnRef idx="2">
+      <a:lnRef idx="0">
         <a:scrgbClr r="0" g="0" b="0"/>
       </a:lnRef>
-      <a:fillRef idx="1">
+      <a:fillRef idx="3">
         <a:scrgbClr r="0" g="0" b="0"/>
       </a:fillRef>
-      <a:effectRef idx="0">
+      <a:effectRef idx="2">
         <a:scrgbClr r="0" g="0" b="0"/>
       </a:effectRef>
       <a:fontRef idx="minor">
@@ -29799,18 +32679,22 @@
   <dgm:styleLbl name="asst2">
     <dgm:scene3d>
       <a:camera prst="orthographicFront"/>
-      <a:lightRig rig="threePt" dir="t"/>
+      <a:lightRig rig="threePt" dir="t">
+        <a:rot lat="0" lon="0" rev="7500000"/>
+      </a:lightRig>
     </dgm:scene3d>
-    <dgm:sp3d/>
+    <dgm:sp3d prstMaterial="plastic">
+      <a:bevelT w="127000" h="25400" prst="relaxedInset"/>
+    </dgm:sp3d>
     <dgm:txPr/>
     <dgm:style>
-      <a:lnRef idx="2">
+      <a:lnRef idx="0">
         <a:scrgbClr r="0" g="0" b="0"/>
       </a:lnRef>
-      <a:fillRef idx="1">
+      <a:fillRef idx="3">
         <a:scrgbClr r="0" g="0" b="0"/>
       </a:fillRef>
-      <a:effectRef idx="0">
+      <a:effectRef idx="2">
         <a:scrgbClr r="0" g="0" b="0"/>
       </a:effectRef>
       <a:fontRef idx="minor">
@@ -29821,18 +32705,22 @@
   <dgm:styleLbl name="asst3">
     <dgm:scene3d>
       <a:camera prst="orthographicFront"/>
-      <a:lightRig rig="threePt" dir="t"/>
+      <a:lightRig rig="threePt" dir="t">
+        <a:rot lat="0" lon="0" rev="7500000"/>
+      </a:lightRig>
     </dgm:scene3d>
-    <dgm:sp3d/>
+    <dgm:sp3d prstMaterial="plastic">
+      <a:bevelT w="127000" h="25400" prst="relaxedInset"/>
+    </dgm:sp3d>
     <dgm:txPr/>
     <dgm:style>
-      <a:lnRef idx="2">
+      <a:lnRef idx="0">
         <a:scrgbClr r="0" g="0" b="0"/>
       </a:lnRef>
-      <a:fillRef idx="1">
+      <a:fillRef idx="3">
         <a:scrgbClr r="0" g="0" b="0"/>
       </a:fillRef>
-      <a:effectRef idx="0">
+      <a:effectRef idx="2">
         <a:scrgbClr r="0" g="0" b="0"/>
       </a:effectRef>
       <a:fontRef idx="minor">
@@ -29840,21 +32728,28 @@
       </a:fontRef>
     </dgm:style>
   </dgm:styleLbl>
-  <dgm:styleLbl name="asst4">
+  <dgm:styleLbl name="parChTrans2D1">
     <dgm:scene3d>
       <a:camera prst="orthographicFront"/>
-      <a:lightRig rig="threePt" dir="t"/>
+      <a:lightRig rig="threePt" dir="t">
+        <a:rot lat="0" lon="0" rev="7500000"/>
+      </a:lightRig>
     </dgm:scene3d>
-    <dgm:sp3d/>
+    <dgm:sp3d extrusionH="63500" prstMaterial="matte">
+      <a:bevelT w="50800" h="19050" prst="relaxedInset"/>
+      <a:contourClr>
+        <a:schemeClr val="bg1"/>
+      </a:contourClr>
+    </dgm:sp3d>
     <dgm:txPr/>
     <dgm:style>
-      <a:lnRef idx="2">
+      <a:lnRef idx="0">
         <a:scrgbClr r="0" g="0" b="0"/>
       </a:lnRef>
       <a:fillRef idx="1">
         <a:scrgbClr r="0" g="0" b="0"/>
       </a:fillRef>
-      <a:effectRef idx="0">
+      <a:effectRef idx="2">
         <a:scrgbClr r="0" g="0" b="0"/>
       </a:effectRef>
       <a:fontRef idx="minor">
@@ -29862,15 +32757,22 @@
       </a:fontRef>
     </dgm:style>
   </dgm:styleLbl>
-  <dgm:styleLbl name="parChTrans2D1">
+  <dgm:styleLbl name="parChTrans2D2">
     <dgm:scene3d>
       <a:camera prst="orthographicFront"/>
-      <a:lightRig rig="threePt" dir="t"/>
+      <a:lightRig rig="threePt" dir="t">
+        <a:rot lat="0" lon="0" rev="7500000"/>
+      </a:lightRig>
     </dgm:scene3d>
-    <dgm:sp3d/>
+    <dgm:sp3d extrusionH="63500" prstMaterial="matte">
+      <a:bevelT w="50800" h="19050" prst="relaxedInset"/>
+      <a:contourClr>
+        <a:schemeClr val="bg1"/>
+      </a:contourClr>
+    </dgm:sp3d>
     <dgm:txPr/>
     <dgm:style>
-      <a:lnRef idx="2">
+      <a:lnRef idx="0">
         <a:scrgbClr r="0" g="0" b="0"/>
       </a:lnRef>
       <a:fillRef idx="1">
@@ -29884,21 +32786,25 @@
       </a:fontRef>
     </dgm:style>
   </dgm:styleLbl>
-  <dgm:styleLbl name="parChTrans2D2">
+  <dgm:styleLbl name="parChTrans2D3">
     <dgm:scene3d>
       <a:camera prst="orthographicFront"/>
-      <a:lightRig rig="threePt" dir="t"/>
+      <a:lightRig rig="threePt" dir="t">
+        <a:rot lat="0" lon="0" rev="7500000"/>
+      </a:lightRig>
     </dgm:scene3d>
-    <dgm:sp3d/>
+    <dgm:sp3d z="60000" prstMaterial="flat">
+      <a:bevelT w="120900" h="88900"/>
+    </dgm:sp3d>
     <dgm:txPr/>
     <dgm:style>
-      <a:lnRef idx="2">
+      <a:lnRef idx="0">
         <a:scrgbClr r="0" g="0" b="0"/>
       </a:lnRef>
-      <a:fillRef idx="1">
+      <a:fillRef idx="3">
         <a:scrgbClr r="0" g="0" b="0"/>
       </a:fillRef>
-      <a:effectRef idx="0">
+      <a:effectRef idx="1">
         <a:scrgbClr r="0" g="0" b="0"/>
       </a:effectRef>
       <a:fontRef idx="minor">
@@ -29906,21 +32812,25 @@
       </a:fontRef>
     </dgm:style>
   </dgm:styleLbl>
-  <dgm:styleLbl name="parChTrans2D3">
+  <dgm:styleLbl name="parChTrans2D4">
     <dgm:scene3d>
       <a:camera prst="orthographicFront"/>
-      <a:lightRig rig="threePt" dir="t"/>
+      <a:lightRig rig="threePt" dir="t">
+        <a:rot lat="0" lon="0" rev="7500000"/>
+      </a:lightRig>
     </dgm:scene3d>
-    <dgm:sp3d/>
+    <dgm:sp3d z="60000" prstMaterial="flat">
+      <a:bevelT w="120900" h="88900"/>
+    </dgm:sp3d>
     <dgm:txPr/>
     <dgm:style>
-      <a:lnRef idx="2">
+      <a:lnRef idx="0">
         <a:scrgbClr r="0" g="0" b="0"/>
       </a:lnRef>
-      <a:fillRef idx="1">
+      <a:fillRef idx="3">
         <a:scrgbClr r="0" g="0" b="0"/>
       </a:fillRef>
-      <a:effectRef idx="0">
+      <a:effectRef idx="1">
         <a:scrgbClr r="0" g="0" b="0"/>
       </a:effectRef>
       <a:fontRef idx="minor">
@@ -29928,21 +32838,194 @@
       </a:fontRef>
     </dgm:style>
   </dgm:styleLbl>
-  <dgm:styleLbl name="parChTrans2D4">
+  <dgm:styleLbl name="parChTrans1D1">
     <dgm:scene3d>
       <a:camera prst="orthographicFront"/>
-      <a:lightRig rig="threePt" dir="t"/>
+      <a:lightRig rig="threePt" dir="t">
+        <a:rot lat="0" lon="0" rev="7500000"/>
+      </a:lightRig>
     </dgm:scene3d>
-    <dgm:sp3d/>
+    <dgm:sp3d z="-40000" prstMaterial="matte"/>
     <dgm:txPr/>
     <dgm:style>
       <a:lnRef idx="2">
         <a:scrgbClr r="0" g="0" b="0"/>
       </a:lnRef>
-      <a:fillRef idx="1">
+      <a:fillRef idx="0">
         <a:scrgbClr r="0" g="0" b="0"/>
       </a:fillRef>
       <a:effectRef idx="0">
+        <a:scrgbClr r="0" g="0" b="0"/>
+      </a:effectRef>
+      <a:fontRef idx="minor"/>
+    </dgm:style>
+  </dgm:styleLbl>
+  <dgm:styleLbl name="parChTrans1D2">
+    <dgm:scene3d>
+      <a:camera prst="orthographicFront"/>
+      <a:lightRig rig="threePt" dir="t">
+        <a:rot lat="0" lon="0" rev="7500000"/>
+      </a:lightRig>
+    </dgm:scene3d>
+    <dgm:sp3d z="-40000" prstMaterial="matte"/>
+    <dgm:txPr/>
+    <dgm:style>
+      <a:lnRef idx="2">
+        <a:scrgbClr r="0" g="0" b="0"/>
+      </a:lnRef>
+      <a:fillRef idx="0">
+        <a:scrgbClr r="0" g="0" b="0"/>
+      </a:fillRef>
+      <a:effectRef idx="0">
+        <a:scrgbClr r="0" g="0" b="0"/>
+      </a:effectRef>
+      <a:fontRef idx="minor"/>
+    </dgm:style>
+  </dgm:styleLbl>
+  <dgm:styleLbl name="parChTrans1D3">
+    <dgm:scene3d>
+      <a:camera prst="orthographicFront"/>
+      <a:lightRig rig="threePt" dir="t">
+        <a:rot lat="0" lon="0" rev="7500000"/>
+      </a:lightRig>
+    </dgm:scene3d>
+    <dgm:sp3d z="-40000" prstMaterial="matte"/>
+    <dgm:txPr/>
+    <dgm:style>
+      <a:lnRef idx="2">
+        <a:scrgbClr r="0" g="0" b="0"/>
+      </a:lnRef>
+      <a:fillRef idx="0">
+        <a:scrgbClr r="0" g="0" b="0"/>
+      </a:fillRef>
+      <a:effectRef idx="0">
+        <a:scrgbClr r="0" g="0" b="0"/>
+      </a:effectRef>
+      <a:fontRef idx="minor"/>
+    </dgm:style>
+  </dgm:styleLbl>
+  <dgm:styleLbl name="parChTrans1D4">
+    <dgm:scene3d>
+      <a:camera prst="orthographicFront"/>
+      <a:lightRig rig="threePt" dir="t">
+        <a:rot lat="0" lon="0" rev="7500000"/>
+      </a:lightRig>
+    </dgm:scene3d>
+    <dgm:sp3d z="-40000" prstMaterial="matte"/>
+    <dgm:txPr/>
+    <dgm:style>
+      <a:lnRef idx="2">
+        <a:scrgbClr r="0" g="0" b="0"/>
+      </a:lnRef>
+      <a:fillRef idx="0">
+        <a:scrgbClr r="0" g="0" b="0"/>
+      </a:fillRef>
+      <a:effectRef idx="0">
+        <a:scrgbClr r="0" g="0" b="0"/>
+      </a:effectRef>
+      <a:fontRef idx="minor"/>
+    </dgm:style>
+  </dgm:styleLbl>
+  <dgm:styleLbl name="fgAcc1">
+    <dgm:scene3d>
+      <a:camera prst="orthographicFront"/>
+      <a:lightRig rig="threePt" dir="t">
+        <a:rot lat="0" lon="0" rev="7500000"/>
+      </a:lightRig>
+    </dgm:scene3d>
+    <dgm:sp3d z="152400" extrusionH="63500" prstMaterial="dkEdge">
+      <a:bevelT w="135400" h="16350" prst="relaxedInset"/>
+      <a:contourClr>
+        <a:schemeClr val="bg1"/>
+      </a:contourClr>
+    </dgm:sp3d>
+    <dgm:txPr/>
+    <dgm:style>
+      <a:lnRef idx="1">
+        <a:scrgbClr r="0" g="0" b="0"/>
+      </a:lnRef>
+      <a:fillRef idx="1">
+        <a:scrgbClr r="0" g="0" b="0"/>
+      </a:fillRef>
+      <a:effectRef idx="2">
+        <a:scrgbClr r="0" g="0" b="0"/>
+      </a:effectRef>
+      <a:fontRef idx="minor"/>
+    </dgm:style>
+  </dgm:styleLbl>
+  <dgm:styleLbl name="conFgAcc1">
+    <dgm:scene3d>
+      <a:camera prst="orthographicFront"/>
+      <a:lightRig rig="threePt" dir="t">
+        <a:rot lat="0" lon="0" rev="7500000"/>
+      </a:lightRig>
+    </dgm:scene3d>
+    <dgm:sp3d z="152400" extrusionH="63500" prstMaterial="dkEdge">
+      <a:bevelT w="135400" h="16350" prst="relaxedInset"/>
+      <a:contourClr>
+        <a:schemeClr val="bg1"/>
+      </a:contourClr>
+    </dgm:sp3d>
+    <dgm:txPr/>
+    <dgm:style>
+      <a:lnRef idx="1">
+        <a:scrgbClr r="0" g="0" b="0"/>
+      </a:lnRef>
+      <a:fillRef idx="1">
+        <a:scrgbClr r="0" g="0" b="0"/>
+      </a:fillRef>
+      <a:effectRef idx="2">
+        <a:scrgbClr r="0" g="0" b="0"/>
+      </a:effectRef>
+      <a:fontRef idx="minor"/>
+    </dgm:style>
+  </dgm:styleLbl>
+  <dgm:styleLbl name="alignAcc1">
+    <dgm:scene3d>
+      <a:camera prst="orthographicFront"/>
+      <a:lightRig rig="threePt" dir="t">
+        <a:rot lat="0" lon="0" rev="7500000"/>
+      </a:lightRig>
+    </dgm:scene3d>
+    <dgm:sp3d extrusionH="190500" prstMaterial="dkEdge">
+      <a:bevelT w="135400" h="16350" prst="relaxedInset"/>
+      <a:contourClr>
+        <a:schemeClr val="bg1"/>
+      </a:contourClr>
+    </dgm:sp3d>
+    <dgm:txPr/>
+    <dgm:style>
+      <a:lnRef idx="1">
+        <a:scrgbClr r="0" g="0" b="0"/>
+      </a:lnRef>
+      <a:fillRef idx="1">
+        <a:scrgbClr r="0" g="0" b="0"/>
+      </a:fillRef>
+      <a:effectRef idx="2">
+        <a:scrgbClr r="0" g="0" b="0"/>
+      </a:effectRef>
+      <a:fontRef idx="minor"/>
+    </dgm:style>
+  </dgm:styleLbl>
+  <dgm:styleLbl name="trAlignAcc1">
+    <dgm:scene3d>
+      <a:camera prst="orthographicFront"/>
+      <a:lightRig rig="threePt" dir="t">
+        <a:rot lat="0" lon="0" rev="7500000"/>
+      </a:lightRig>
+    </dgm:scene3d>
+    <dgm:sp3d prstMaterial="plastic">
+      <a:bevelT w="127000" h="35400"/>
+    </dgm:sp3d>
+    <dgm:txPr/>
+    <dgm:style>
+      <a:lnRef idx="1">
+        <a:scrgbClr r="0" g="0" b="0"/>
+      </a:lnRef>
+      <a:fillRef idx="1">
+        <a:scrgbClr r="0" g="0" b="0"/>
+      </a:fillRef>
+      <a:effectRef idx="2">
         <a:scrgbClr r="0" g="0" b="0"/>
       </a:effectRef>
       <a:fontRef idx="minor">
@@ -29950,18 +33033,25 @@
       </a:fontRef>
     </dgm:style>
   </dgm:styleLbl>
-  <dgm:styleLbl name="parChTrans1D1">
+  <dgm:styleLbl name="bgAcc1">
     <dgm:scene3d>
       <a:camera prst="orthographicFront"/>
-      <a:lightRig rig="threePt" dir="t"/>
+      <a:lightRig rig="threePt" dir="t">
+        <a:rot lat="0" lon="0" rev="7500000"/>
+      </a:lightRig>
     </dgm:scene3d>
-    <dgm:sp3d/>
+    <dgm:sp3d z="-152400" extrusionH="63500" prstMaterial="dkEdge">
+      <a:bevelT w="124450" h="16350" prst="relaxedInset"/>
+      <a:contourClr>
+        <a:schemeClr val="bg1"/>
+      </a:contourClr>
+    </dgm:sp3d>
     <dgm:txPr/>
     <dgm:style>
-      <a:lnRef idx="2">
+      <a:lnRef idx="1">
         <a:scrgbClr r="0" g="0" b="0"/>
       </a:lnRef>
-      <a:fillRef idx="0">
+      <a:fillRef idx="1">
         <a:scrgbClr r="0" g="0" b="0"/>
       </a:fillRef>
       <a:effectRef idx="0">
@@ -29970,58 +33060,79 @@
       <a:fontRef idx="minor"/>
     </dgm:style>
   </dgm:styleLbl>
-  <dgm:styleLbl name="parChTrans1D2">
+  <dgm:styleLbl name="solidFgAcc1">
     <dgm:scene3d>
       <a:camera prst="orthographicFront"/>
-      <a:lightRig rig="threePt" dir="t"/>
+      <a:lightRig rig="threePt" dir="t">
+        <a:rot lat="0" lon="0" rev="7500000"/>
+      </a:lightRig>
     </dgm:scene3d>
-    <dgm:sp3d/>
+    <dgm:sp3d z="152400" extrusionH="63500" prstMaterial="dkEdge">
+      <a:bevelT w="120800" h="19050" prst="relaxedInset"/>
+      <a:contourClr>
+        <a:schemeClr val="bg1"/>
+      </a:contourClr>
+    </dgm:sp3d>
     <dgm:txPr/>
     <dgm:style>
-      <a:lnRef idx="2">
+      <a:lnRef idx="1">
         <a:scrgbClr r="0" g="0" b="0"/>
       </a:lnRef>
-      <a:fillRef idx="0">
+      <a:fillRef idx="1">
         <a:scrgbClr r="0" g="0" b="0"/>
       </a:fillRef>
-      <a:effectRef idx="0">
+      <a:effectRef idx="2">
         <a:scrgbClr r="0" g="0" b="0"/>
       </a:effectRef>
       <a:fontRef idx="minor"/>
     </dgm:style>
   </dgm:styleLbl>
-  <dgm:styleLbl name="parChTrans1D3">
+  <dgm:styleLbl name="solidAlignAcc1">
     <dgm:scene3d>
       <a:camera prst="orthographicFront"/>
-      <a:lightRig rig="threePt" dir="t"/>
+      <a:lightRig rig="threePt" dir="t">
+        <a:rot lat="0" lon="0" rev="7500000"/>
+      </a:lightRig>
     </dgm:scene3d>
-    <dgm:sp3d/>
+    <dgm:sp3d extrusionH="190500" prstMaterial="dkEdge">
+      <a:bevelT w="120650" h="38100" prst="relaxedInset"/>
+      <a:contourClr>
+        <a:schemeClr val="bg1"/>
+      </a:contourClr>
+    </dgm:sp3d>
     <dgm:txPr/>
     <dgm:style>
-      <a:lnRef idx="2">
+      <a:lnRef idx="1">
         <a:scrgbClr r="0" g="0" b="0"/>
       </a:lnRef>
-      <a:fillRef idx="0">
+      <a:fillRef idx="1">
         <a:scrgbClr r="0" g="0" b="0"/>
       </a:fillRef>
-      <a:effectRef idx="0">
+      <a:effectRef idx="2">
         <a:scrgbClr r="0" g="0" b="0"/>
       </a:effectRef>
       <a:fontRef idx="minor"/>
     </dgm:style>
   </dgm:styleLbl>
-  <dgm:styleLbl name="parChTrans1D4">
+  <dgm:styleLbl name="solidBgAcc1">
     <dgm:scene3d>
       <a:camera prst="orthographicFront"/>
-      <a:lightRig rig="threePt" dir="t"/>
+      <a:lightRig rig="threePt" dir="t">
+        <a:rot lat="0" lon="0" rev="7500000"/>
+      </a:lightRig>
     </dgm:scene3d>
-    <dgm:sp3d/>
+    <dgm:sp3d z="-152400" extrusionH="63500" prstMaterial="dkEdge">
+      <a:bevelT w="144450" h="36350" prst="relaxedInset"/>
+      <a:contourClr>
+        <a:schemeClr val="bg1"/>
+      </a:contourClr>
+    </dgm:sp3d>
     <dgm:txPr/>
     <dgm:style>
-      <a:lnRef idx="2">
+      <a:lnRef idx="1">
         <a:scrgbClr r="0" g="0" b="0"/>
       </a:lnRef>
-      <a:fillRef idx="0">
+      <a:fillRef idx="1">
         <a:scrgbClr r="0" g="0" b="0"/>
       </a:fillRef>
       <a:effectRef idx="0">
@@ -30030,15 +33141,22 @@
       <a:fontRef idx="minor"/>
     </dgm:style>
   </dgm:styleLbl>
-  <dgm:styleLbl name="fgAcc1">
+  <dgm:styleLbl name="fgAccFollowNode1">
     <dgm:scene3d>
       <a:camera prst="orthographicFront"/>
-      <a:lightRig rig="threePt" dir="t"/>
+      <a:lightRig rig="threePt" dir="t">
+        <a:rot lat="0" lon="0" rev="7500000"/>
+      </a:lightRig>
     </dgm:scene3d>
-    <dgm:sp3d/>
+    <dgm:sp3d z="152400" extrusionH="63500" prstMaterial="dkEdge">
+      <a:bevelT w="125400" h="36350" prst="relaxedInset"/>
+      <a:contourClr>
+        <a:schemeClr val="bg1"/>
+      </a:contourClr>
+    </dgm:sp3d>
     <dgm:txPr/>
     <dgm:style>
-      <a:lnRef idx="2">
+      <a:lnRef idx="1">
         <a:scrgbClr r="0" g="0" b="0"/>
       </a:lnRef>
       <a:fillRef idx="1">
@@ -30050,52 +33168,74 @@
       <a:fontRef idx="minor"/>
     </dgm:style>
   </dgm:styleLbl>
-  <dgm:styleLbl name="conFgAcc1">
+  <dgm:styleLbl name="alignAccFollowNode1">
     <dgm:scene3d>
       <a:camera prst="orthographicFront"/>
-      <a:lightRig rig="threePt" dir="t"/>
+      <a:lightRig rig="threePt" dir="t">
+        <a:rot lat="0" lon="0" rev="7500000"/>
+      </a:lightRig>
     </dgm:scene3d>
-    <dgm:sp3d/>
+    <dgm:sp3d extrusionH="190500" prstMaterial="dkEdge">
+      <a:bevelT w="120650" h="38100" prst="relaxedInset"/>
+      <a:bevelB w="120650" h="57150" prst="relaxedInset"/>
+      <a:contourClr>
+        <a:schemeClr val="bg1"/>
+      </a:contourClr>
+    </dgm:sp3d>
     <dgm:txPr/>
     <dgm:style>
-      <a:lnRef idx="2">
+      <a:lnRef idx="1">
         <a:scrgbClr r="0" g="0" b="0"/>
       </a:lnRef>
       <a:fillRef idx="1">
         <a:scrgbClr r="0" g="0" b="0"/>
       </a:fillRef>
-      <a:effectRef idx="0">
+      <a:effectRef idx="2">
         <a:scrgbClr r="0" g="0" b="0"/>
       </a:effectRef>
       <a:fontRef idx="minor"/>
     </dgm:style>
   </dgm:styleLbl>
-  <dgm:styleLbl name="alignAcc1">
+  <dgm:styleLbl name="bgAccFollowNode1">
     <dgm:scene3d>
       <a:camera prst="orthographicFront"/>
-      <a:lightRig rig="threePt" dir="t"/>
+      <a:lightRig rig="threePt" dir="t">
+        <a:rot lat="0" lon="0" rev="7500000"/>
+      </a:lightRig>
     </dgm:scene3d>
-    <dgm:sp3d/>
+    <dgm:sp3d z="-152400" extrusionH="63500" prstMaterial="dkEdge">
+      <a:bevelT w="144450" h="36350" prst="relaxedInset"/>
+      <a:contourClr>
+        <a:schemeClr val="bg1"/>
+      </a:contourClr>
+    </dgm:sp3d>
     <dgm:txPr/>
     <dgm:style>
-      <a:lnRef idx="2">
+      <a:lnRef idx="1">
         <a:scrgbClr r="0" g="0" b="0"/>
       </a:lnRef>
       <a:fillRef idx="1">
         <a:scrgbClr r="0" g="0" b="0"/>
       </a:fillRef>
-      <a:effectRef idx="0">
+      <a:effectRef idx="2">
         <a:scrgbClr r="0" g="0" b="0"/>
       </a:effectRef>
       <a:fontRef idx="minor"/>
     </dgm:style>
   </dgm:styleLbl>
-  <dgm:styleLbl name="trAlignAcc1">
+  <dgm:styleLbl name="fgAcc0">
     <dgm:scene3d>
       <a:camera prst="orthographicFront"/>
-      <a:lightRig rig="threePt" dir="t"/>
+      <a:lightRig rig="threePt" dir="t">
+        <a:rot lat="0" lon="0" rev="7500000"/>
+      </a:lightRig>
     </dgm:scene3d>
-    <dgm:sp3d/>
+    <dgm:sp3d z="152400" extrusionH="63500" prstMaterial="dkEdge">
+      <a:bevelT w="125400" h="36350" prst="relaxedInset"/>
+      <a:contourClr>
+        <a:schemeClr val="bg1"/>
+      </a:contourClr>
+    </dgm:sp3d>
     <dgm:txPr/>
     <dgm:style>
       <a:lnRef idx="1">
@@ -30104,84 +33244,112 @@
       <a:fillRef idx="1">
         <a:scrgbClr r="0" g="0" b="0"/>
       </a:fillRef>
-      <a:effectRef idx="0">
+      <a:effectRef idx="2">
         <a:scrgbClr r="0" g="0" b="0"/>
       </a:effectRef>
       <a:fontRef idx="minor"/>
     </dgm:style>
   </dgm:styleLbl>
-  <dgm:styleLbl name="bgAcc1">
+  <dgm:styleLbl name="fgAcc2">
     <dgm:scene3d>
       <a:camera prst="orthographicFront"/>
-      <a:lightRig rig="threePt" dir="t"/>
+      <a:lightRig rig="threePt" dir="t">
+        <a:rot lat="0" lon="0" rev="7500000"/>
+      </a:lightRig>
     </dgm:scene3d>
-    <dgm:sp3d/>
+    <dgm:sp3d z="152400" extrusionH="63500" prstMaterial="dkEdge">
+      <a:bevelT w="125400" h="36350" prst="relaxedInset"/>
+      <a:contourClr>
+        <a:schemeClr val="bg1"/>
+      </a:contourClr>
+    </dgm:sp3d>
     <dgm:txPr/>
     <dgm:style>
-      <a:lnRef idx="2">
+      <a:lnRef idx="1">
         <a:scrgbClr r="0" g="0" b="0"/>
       </a:lnRef>
       <a:fillRef idx="1">
         <a:scrgbClr r="0" g="0" b="0"/>
       </a:fillRef>
-      <a:effectRef idx="0">
+      <a:effectRef idx="2">
         <a:scrgbClr r="0" g="0" b="0"/>
       </a:effectRef>
       <a:fontRef idx="minor"/>
     </dgm:style>
   </dgm:styleLbl>
-  <dgm:styleLbl name="solidFgAcc1">
+  <dgm:styleLbl name="fgAcc3">
     <dgm:scene3d>
       <a:camera prst="orthographicFront"/>
-      <a:lightRig rig="threePt" dir="t"/>
+      <a:lightRig rig="threePt" dir="t">
+        <a:rot lat="0" lon="0" rev="7500000"/>
+      </a:lightRig>
     </dgm:scene3d>
-    <dgm:sp3d/>
+    <dgm:sp3d z="152400" extrusionH="63500" prstMaterial="dkEdge">
+      <a:bevelT w="125400" h="36350" prst="relaxedInset"/>
+      <a:contourClr>
+        <a:schemeClr val="bg1"/>
+      </a:contourClr>
+    </dgm:sp3d>
     <dgm:txPr/>
     <dgm:style>
-      <a:lnRef idx="2">
+      <a:lnRef idx="1">
         <a:scrgbClr r="0" g="0" b="0"/>
       </a:lnRef>
       <a:fillRef idx="1">
         <a:scrgbClr r="0" g="0" b="0"/>
       </a:fillRef>
-      <a:effectRef idx="0">
+      <a:effectRef idx="2">
         <a:scrgbClr r="0" g="0" b="0"/>
       </a:effectRef>
       <a:fontRef idx="minor"/>
     </dgm:style>
   </dgm:styleLbl>
-  <dgm:styleLbl name="solidAlignAcc1">
+  <dgm:styleLbl name="fgAcc4">
     <dgm:scene3d>
       <a:camera prst="orthographicFront"/>
-      <a:lightRig rig="threePt" dir="t"/>
+      <a:lightRig rig="threePt" dir="t">
+        <a:rot lat="0" lon="0" rev="7500000"/>
+      </a:lightRig>
     </dgm:scene3d>
-    <dgm:sp3d/>
+    <dgm:sp3d z="152400" extrusionH="63500" prstMaterial="dkEdge">
+      <a:bevelT w="125400" h="36350" prst="relaxedInset"/>
+      <a:contourClr>
+        <a:schemeClr val="bg1"/>
+      </a:contourClr>
+    </dgm:sp3d>
     <dgm:txPr/>
     <dgm:style>
-      <a:lnRef idx="2">
+      <a:lnRef idx="1">
         <a:scrgbClr r="0" g="0" b="0"/>
       </a:lnRef>
       <a:fillRef idx="1">
         <a:scrgbClr r="0" g="0" b="0"/>
       </a:fillRef>
-      <a:effectRef idx="0">
+      <a:effectRef idx="2">
         <a:scrgbClr r="0" g="0" b="0"/>
       </a:effectRef>
       <a:fontRef idx="minor"/>
     </dgm:style>
   </dgm:styleLbl>
-  <dgm:styleLbl name="solidBgAcc1">
+  <dgm:styleLbl name="bgShp">
     <dgm:scene3d>
       <a:camera prst="orthographicFront"/>
-      <a:lightRig rig="threePt" dir="t"/>
+      <a:lightRig rig="threePt" dir="t">
+        <a:rot lat="0" lon="0" rev="7500000"/>
+      </a:lightRig>
     </dgm:scene3d>
-    <dgm:sp3d/>
+    <dgm:sp3d z="-152400" extrusionH="63500" prstMaterial="matte">
+      <a:bevelT w="144450" h="6350" prst="relaxedInset"/>
+      <a:contourClr>
+        <a:schemeClr val="bg1"/>
+      </a:contourClr>
+    </dgm:sp3d>
     <dgm:txPr/>
     <dgm:style>
-      <a:lnRef idx="2">
+      <a:lnRef idx="0">
         <a:scrgbClr r="0" g="0" b="0"/>
       </a:lnRef>
-      <a:fillRef idx="1">
+      <a:fillRef idx="3">
         <a:scrgbClr r="0" g="0" b="0"/>
       </a:fillRef>
       <a:effectRef idx="0">
@@ -30190,152 +33358,17 @@
       <a:fontRef idx="minor"/>
     </dgm:style>
   </dgm:styleLbl>
-  <dgm:styleLbl name="fgAccFollowNode1">
+  <dgm:styleLbl name="dkBgShp">
     <dgm:scene3d>
       <a:camera prst="orthographicFront"/>
-      <a:lightRig rig="threePt" dir="t"/>
+      <a:lightRig rig="threePt" dir="t">
+        <a:rot lat="0" lon="0" rev="7500000"/>
+      </a:lightRig>
     </dgm:scene3d>
-    <dgm:sp3d/>
-    <dgm:txPr/>
-    <dgm:style>
-      <a:lnRef idx="2">
-        <a:scrgbClr r="0" g="0" b="0"/>
-      </a:lnRef>
-      <a:fillRef idx="1">
-        <a:scrgbClr r="0" g="0" b="0"/>
-      </a:fillRef>
-      <a:effectRef idx="0">
-        <a:scrgbClr r="0" g="0" b="0"/>
-      </a:effectRef>
-      <a:fontRef idx="minor"/>
-    </dgm:style>
-  </dgm:styleLbl>
-  <dgm:styleLbl name="alignAccFollowNode1">
-    <dgm:scene3d>
-      <a:camera prst="orthographicFront"/>
-      <a:lightRig rig="threePt" dir="t"/>
-    </dgm:scene3d>
-    <dgm:sp3d/>
-    <dgm:txPr/>
-    <dgm:style>
-      <a:lnRef idx="2">
-        <a:scrgbClr r="0" g="0" b="0"/>
-      </a:lnRef>
-      <a:fillRef idx="1">
-        <a:scrgbClr r="0" g="0" b="0"/>
-      </a:fillRef>
-      <a:effectRef idx="0">
-        <a:scrgbClr r="0" g="0" b="0"/>
-      </a:effectRef>
-      <a:fontRef idx="minor"/>
-    </dgm:style>
-  </dgm:styleLbl>
-  <dgm:styleLbl name="bgAccFollowNode1">
-    <dgm:scene3d>
-      <a:camera prst="orthographicFront"/>
-      <a:lightRig rig="threePt" dir="t"/>
-    </dgm:scene3d>
-    <dgm:sp3d/>
-    <dgm:txPr/>
-    <dgm:style>
-      <a:lnRef idx="2">
-        <a:scrgbClr r="0" g="0" b="0"/>
-      </a:lnRef>
-      <a:fillRef idx="1">
-        <a:scrgbClr r="0" g="0" b="0"/>
-      </a:fillRef>
-      <a:effectRef idx="0">
-        <a:scrgbClr r="0" g="0" b="0"/>
-      </a:effectRef>
-      <a:fontRef idx="minor"/>
-    </dgm:style>
-  </dgm:styleLbl>
-  <dgm:styleLbl name="fgAcc0">
-    <dgm:scene3d>
-      <a:camera prst="orthographicFront"/>
-      <a:lightRig rig="threePt" dir="t"/>
-    </dgm:scene3d>
-    <dgm:sp3d/>
-    <dgm:txPr/>
-    <dgm:style>
-      <a:lnRef idx="2">
-        <a:scrgbClr r="0" g="0" b="0"/>
-      </a:lnRef>
-      <a:fillRef idx="1">
-        <a:scrgbClr r="0" g="0" b="0"/>
-      </a:fillRef>
-      <a:effectRef idx="0">
-        <a:scrgbClr r="0" g="0" b="0"/>
-      </a:effectRef>
-      <a:fontRef idx="minor"/>
-    </dgm:style>
-  </dgm:styleLbl>
-  <dgm:styleLbl name="fgAcc2">
-    <dgm:scene3d>
-      <a:camera prst="orthographicFront"/>
-      <a:lightRig rig="threePt" dir="t"/>
-    </dgm:scene3d>
-    <dgm:sp3d/>
-    <dgm:txPr/>
-    <dgm:style>
-      <a:lnRef idx="2">
-        <a:scrgbClr r="0" g="0" b="0"/>
-      </a:lnRef>
-      <a:fillRef idx="1">
-        <a:scrgbClr r="0" g="0" b="0"/>
-      </a:fillRef>
-      <a:effectRef idx="0">
-        <a:scrgbClr r="0" g="0" b="0"/>
-      </a:effectRef>
-      <a:fontRef idx="minor"/>
-    </dgm:style>
-  </dgm:styleLbl>
-  <dgm:styleLbl name="fgAcc3">
-    <dgm:scene3d>
-      <a:camera prst="orthographicFront"/>
-      <a:lightRig rig="threePt" dir="t"/>
-    </dgm:scene3d>
-    <dgm:sp3d/>
-    <dgm:txPr/>
-    <dgm:style>
-      <a:lnRef idx="2">
-        <a:scrgbClr r="0" g="0" b="0"/>
-      </a:lnRef>
-      <a:fillRef idx="1">
-        <a:scrgbClr r="0" g="0" b="0"/>
-      </a:fillRef>
-      <a:effectRef idx="0">
-        <a:scrgbClr r="0" g="0" b="0"/>
-      </a:effectRef>
-      <a:fontRef idx="minor"/>
-    </dgm:style>
-  </dgm:styleLbl>
-  <dgm:styleLbl name="fgAcc4">
-    <dgm:scene3d>
-      <a:camera prst="orthographicFront"/>
-      <a:lightRig rig="threePt" dir="t"/>
-    </dgm:scene3d>
-    <dgm:sp3d/>
-    <dgm:txPr/>
-    <dgm:style>
-      <a:lnRef idx="2">
-        <a:scrgbClr r="0" g="0" b="0"/>
-      </a:lnRef>
-      <a:fillRef idx="1">
-        <a:scrgbClr r="0" g="0" b="0"/>
-      </a:fillRef>
-      <a:effectRef idx="0">
-        <a:scrgbClr r="0" g="0" b="0"/>
-      </a:effectRef>
-      <a:fontRef idx="minor"/>
-    </dgm:style>
-  </dgm:styleLbl>
-  <dgm:styleLbl name="bgShp">
-    <dgm:scene3d>
-      <a:camera prst="orthographicFront"/>
-      <a:lightRig rig="threePt" dir="t"/>
-    </dgm:scene3d>
-    <dgm:sp3d/>
+    <dgm:sp3d prstMaterial="plastic">
+      <a:bevelT w="127000" h="25400" prst="relaxedInset"/>
+      <a:bevelB w="88900" h="121750" prst="angle"/>
+    </dgm:sp3d>
     <dgm:txPr/>
     <dgm:style>
       <a:lnRef idx="0">
@@ -30344,30 +33377,12 @@
       <a:fillRef idx="1">
         <a:scrgbClr r="0" g="0" b="0"/>
       </a:fillRef>
-      <a:effectRef idx="0">
+      <a:effectRef idx="2">
         <a:scrgbClr r="0" g="0" b="0"/>
       </a:effectRef>
-      <a:fontRef idx="minor"/>
-    </dgm:style>
-  </dgm:styleLbl>
-  <dgm:styleLbl name="dkBgShp">
-    <dgm:scene3d>
-      <a:camera prst="orthographicFront"/>
-      <a:lightRig rig="threePt" dir="t"/>
-    </dgm:scene3d>
-    <dgm:sp3d/>
-    <dgm:txPr/>
-    <dgm:style>
-      <a:lnRef idx="0">
-        <a:scrgbClr r="0" g="0" b="0"/>
-      </a:lnRef>
-      <a:fillRef idx="1">
-        <a:scrgbClr r="0" g="0" b="0"/>
-      </a:fillRef>
-      <a:effectRef idx="0">
-        <a:scrgbClr r="0" g="0" b="0"/>
-      </a:effectRef>
-      <a:fontRef idx="minor"/>
+      <a:fontRef idx="minor">
+        <a:schemeClr val="lt1"/>
+      </a:fontRef>
     </dgm:style>
   </dgm:styleLbl>
   <dgm:styleLbl name="trBgShp">
@@ -30375,7 +33390,7 @@
       <a:camera prst="orthographicFront"/>
       <a:lightRig rig="threePt" dir="t"/>
     </dgm:scene3d>
-    <dgm:sp3d/>
+    <dgm:sp3d z="-152400" prstMaterial="matte"/>
     <dgm:txPr/>
     <dgm:style>
       <a:lnRef idx="0">
@@ -30393,21 +33408,30 @@
   <dgm:styleLbl name="fgShp">
     <dgm:scene3d>
       <a:camera prst="orthographicFront"/>
-      <a:lightRig rig="threePt" dir="t"/>
+      <a:lightRig rig="threePt" dir="t">
+        <a:rot lat="0" lon="0" rev="7500000"/>
+      </a:lightRig>
     </dgm:scene3d>
-    <dgm:sp3d/>
+    <dgm:sp3d z="152400" extrusionH="63500" prstMaterial="matte">
+      <a:bevelT w="50800" h="19050" prst="relaxedInset"/>
+      <a:contourClr>
+        <a:schemeClr val="bg1"/>
+      </a:contourClr>
+    </dgm:sp3d>
     <dgm:txPr/>
     <dgm:style>
-      <a:lnRef idx="2">
+      <a:lnRef idx="0">
         <a:scrgbClr r="0" g="0" b="0"/>
       </a:lnRef>
       <a:fillRef idx="1">
         <a:scrgbClr r="0" g="0" b="0"/>
       </a:fillRef>
-      <a:effectRef idx="0">
+      <a:effectRef idx="2">
         <a:scrgbClr r="0" g="0" b="0"/>
       </a:effectRef>
-      <a:fontRef idx="minor"/>
+      <a:fontRef idx="minor">
+        <a:schemeClr val="lt1"/>
+      </a:fontRef>
     </dgm:style>
   </dgm:styleLbl>
   <dgm:styleLbl name="revTx">
@@ -31561,7 +34585,7 @@
           <a:p>
             <a:fld id="{F6E59275-AFE1-4999-B78A-D0D76B9F2B0B}" type="datetimeFigureOut">
               <a:rPr lang="en-US" smtClean="0"/>
-              <a:t>1/19/2026</a:t>
+              <a:t>1/21/2026</a:t>
             </a:fld>
             <a:endParaRPr lang="en-US" dirty="0"/>
           </a:p>
@@ -31738,7 +34762,7 @@
           <a:p>
             <a:fld id="{B3EADD7A-FE61-48EE-BE0E-8546E5401374}" type="datetimeFigureOut">
               <a:rPr lang="en-US" smtClean="0"/>
-              <a:t>1/19/2026</a:t>
+              <a:t>1/20/2026</a:t>
             </a:fld>
             <a:endParaRPr lang="en-US" dirty="0"/>
           </a:p>
@@ -32961,6 +35985,114 @@
         <p:cNvPr id="1" name="">
           <a:extLst>
             <a:ext uri="{FF2B5EF4-FFF2-40B4-BE49-F238E27FC236}">
+              <a16:creationId xmlns:a16="http://schemas.microsoft.com/office/drawing/2014/main" id="{4EAC7126-4785-6F23-806A-94F4FA0E0FC3}"/>
+            </a:ext>
+          </a:extLst>
+        </p:cNvPr>
+        <p:cNvGrpSpPr/>
+        <p:nvPr/>
+      </p:nvGrpSpPr>
+      <p:grpSpPr>
+        <a:xfrm>
+          <a:off x="0" y="0"/>
+          <a:ext cx="0" cy="0"/>
+          <a:chOff x="0" y="0"/>
+          <a:chExt cx="0" cy="0"/>
+        </a:xfrm>
+      </p:grpSpPr>
+      <p:sp>
+        <p:nvSpPr>
+          <p:cNvPr id="2" name="Slide Image Placeholder 1">
+            <a:extLst>
+              <a:ext uri="{FF2B5EF4-FFF2-40B4-BE49-F238E27FC236}">
+                <a16:creationId xmlns:a16="http://schemas.microsoft.com/office/drawing/2014/main" id="{BFA150D2-105A-2F82-0ECB-F19BD7BEA00F}"/>
+              </a:ext>
+            </a:extLst>
+          </p:cNvPr>
+          <p:cNvSpPr>
+            <a:spLocks noGrp="1" noRot="1" noChangeAspect="1"/>
+          </p:cNvSpPr>
+          <p:nvPr>
+            <p:ph type="sldImg"/>
+          </p:nvPr>
+        </p:nvSpPr>
+        <p:spPr/>
+      </p:sp>
+      <p:sp>
+        <p:nvSpPr>
+          <p:cNvPr id="3" name="Notes Placeholder 2">
+            <a:extLst>
+              <a:ext uri="{FF2B5EF4-FFF2-40B4-BE49-F238E27FC236}">
+                <a16:creationId xmlns:a16="http://schemas.microsoft.com/office/drawing/2014/main" id="{588D1BEE-D27E-E195-D315-77C949C297E1}"/>
+              </a:ext>
+            </a:extLst>
+          </p:cNvPr>
+          <p:cNvSpPr>
+            <a:spLocks noGrp="1"/>
+          </p:cNvSpPr>
+          <p:nvPr>
+            <p:ph type="body" idx="1"/>
+          </p:nvPr>
+        </p:nvSpPr>
+        <p:spPr/>
+        <p:txBody>
+          <a:bodyPr/>
+          <a:lstStyle/>
+          <a:p>
+            <a:endParaRPr lang="en-US" dirty="0"/>
+          </a:p>
+        </p:txBody>
+      </p:sp>
+      <p:sp>
+        <p:nvSpPr>
+          <p:cNvPr id="4" name="Slide Number Placeholder 3">
+            <a:extLst>
+              <a:ext uri="{FF2B5EF4-FFF2-40B4-BE49-F238E27FC236}">
+                <a16:creationId xmlns:a16="http://schemas.microsoft.com/office/drawing/2014/main" id="{2D139FE7-EB62-CD28-CCC1-F88018C3681A}"/>
+              </a:ext>
+            </a:extLst>
+          </p:cNvPr>
+          <p:cNvSpPr>
+            <a:spLocks noGrp="1"/>
+          </p:cNvSpPr>
+          <p:nvPr>
+            <p:ph type="sldNum" sz="quarter" idx="5"/>
+          </p:nvPr>
+        </p:nvSpPr>
+        <p:spPr/>
+        <p:txBody>
+          <a:bodyPr/>
+          <a:lstStyle/>
+          <a:p>
+            <a:fld id="{EE000EEB-8338-48D7-8EE8-EE0082EF7602}" type="slidenum">
+              <a:rPr lang="en-US" smtClean="0"/>
+              <a:t>18</a:t>
+            </a:fld>
+            <a:endParaRPr lang="en-US" dirty="0"/>
+          </a:p>
+        </p:txBody>
+      </p:sp>
+    </p:spTree>
+    <p:extLst>
+      <p:ext uri="{BB962C8B-B14F-4D97-AF65-F5344CB8AC3E}">
+        <p14:creationId xmlns:p14="http://schemas.microsoft.com/office/powerpoint/2010/main" val="1215950728"/>
+      </p:ext>
+    </p:extLst>
+  </p:cSld>
+  <p:clrMapOvr>
+    <a:masterClrMapping/>
+  </p:clrMapOvr>
+</p:notes>
+</file>
+
+<file path=ppt/notesSlides/notesSlide19.xml><?xml version="1.0" encoding="utf-8"?>
+<p:notes xmlns:a="http://schemas.openxmlformats.org/drawingml/2006/main" xmlns:r="http://schemas.openxmlformats.org/officeDocument/2006/relationships" xmlns:p="http://schemas.openxmlformats.org/presentationml/2006/main">
+  <p:cSld>
+    <p:spTree>
+      <p:nvGrpSpPr>
+        <p:cNvPr id="1" name="">
+          <a:extLst>
+            <a:ext uri="{FF2B5EF4-FFF2-40B4-BE49-F238E27FC236}">
               <a16:creationId xmlns:a16="http://schemas.microsoft.com/office/drawing/2014/main" id="{679D7CAA-255D-E62A-C0C0-768D07808A16}"/>
             </a:ext>
           </a:extLst>
@@ -33042,7 +36174,7 @@
           <a:p>
             <a:fld id="{EE000EEB-8338-48D7-8EE8-EE0082EF7602}" type="slidenum">
               <a:rPr lang="en-US" smtClean="0"/>
-              <a:t>18</a:t>
+              <a:t>19</a:t>
             </a:fld>
             <a:endParaRPr lang="en-US" dirty="0"/>
           </a:p>
@@ -33052,114 +36184,6 @@
     <p:extLst>
       <p:ext uri="{BB962C8B-B14F-4D97-AF65-F5344CB8AC3E}">
         <p14:creationId xmlns:p14="http://schemas.microsoft.com/office/powerpoint/2010/main" val="1894597885"/>
-      </p:ext>
-    </p:extLst>
-  </p:cSld>
-  <p:clrMapOvr>
-    <a:masterClrMapping/>
-  </p:clrMapOvr>
-</p:notes>
-</file>
-
-<file path=ppt/notesSlides/notesSlide19.xml><?xml version="1.0" encoding="utf-8"?>
-<p:notes xmlns:a="http://schemas.openxmlformats.org/drawingml/2006/main" xmlns:r="http://schemas.openxmlformats.org/officeDocument/2006/relationships" xmlns:p="http://schemas.openxmlformats.org/presentationml/2006/main">
-  <p:cSld>
-    <p:spTree>
-      <p:nvGrpSpPr>
-        <p:cNvPr id="1" name="">
-          <a:extLst>
-            <a:ext uri="{FF2B5EF4-FFF2-40B4-BE49-F238E27FC236}">
-              <a16:creationId xmlns:a16="http://schemas.microsoft.com/office/drawing/2014/main" id="{451F58EE-9F16-565C-5074-55CD7D9CF36C}"/>
-            </a:ext>
-          </a:extLst>
-        </p:cNvPr>
-        <p:cNvGrpSpPr/>
-        <p:nvPr/>
-      </p:nvGrpSpPr>
-      <p:grpSpPr>
-        <a:xfrm>
-          <a:off x="0" y="0"/>
-          <a:ext cx="0" cy="0"/>
-          <a:chOff x="0" y="0"/>
-          <a:chExt cx="0" cy="0"/>
-        </a:xfrm>
-      </p:grpSpPr>
-      <p:sp>
-        <p:nvSpPr>
-          <p:cNvPr id="2" name="Slide Image Placeholder 1">
-            <a:extLst>
-              <a:ext uri="{FF2B5EF4-FFF2-40B4-BE49-F238E27FC236}">
-                <a16:creationId xmlns:a16="http://schemas.microsoft.com/office/drawing/2014/main" id="{A984ED33-2BA9-6CC1-6F71-B1599E260BEE}"/>
-              </a:ext>
-            </a:extLst>
-          </p:cNvPr>
-          <p:cNvSpPr>
-            <a:spLocks noGrp="1" noRot="1" noChangeAspect="1"/>
-          </p:cNvSpPr>
-          <p:nvPr>
-            <p:ph type="sldImg"/>
-          </p:nvPr>
-        </p:nvSpPr>
-        <p:spPr/>
-      </p:sp>
-      <p:sp>
-        <p:nvSpPr>
-          <p:cNvPr id="3" name="Notes Placeholder 2">
-            <a:extLst>
-              <a:ext uri="{FF2B5EF4-FFF2-40B4-BE49-F238E27FC236}">
-                <a16:creationId xmlns:a16="http://schemas.microsoft.com/office/drawing/2014/main" id="{0FF23E64-76D7-AACB-7684-CF099B8CE35E}"/>
-              </a:ext>
-            </a:extLst>
-          </p:cNvPr>
-          <p:cNvSpPr>
-            <a:spLocks noGrp="1"/>
-          </p:cNvSpPr>
-          <p:nvPr>
-            <p:ph type="body" idx="1"/>
-          </p:nvPr>
-        </p:nvSpPr>
-        <p:spPr/>
-        <p:txBody>
-          <a:bodyPr/>
-          <a:lstStyle/>
-          <a:p>
-            <a:endParaRPr lang="en-US" dirty="0"/>
-          </a:p>
-        </p:txBody>
-      </p:sp>
-      <p:sp>
-        <p:nvSpPr>
-          <p:cNvPr id="4" name="Slide Number Placeholder 3">
-            <a:extLst>
-              <a:ext uri="{FF2B5EF4-FFF2-40B4-BE49-F238E27FC236}">
-                <a16:creationId xmlns:a16="http://schemas.microsoft.com/office/drawing/2014/main" id="{BF5A1AE1-5887-CCE4-C29A-7D236991820C}"/>
-              </a:ext>
-            </a:extLst>
-          </p:cNvPr>
-          <p:cNvSpPr>
-            <a:spLocks noGrp="1"/>
-          </p:cNvSpPr>
-          <p:nvPr>
-            <p:ph type="sldNum" sz="quarter" idx="5"/>
-          </p:nvPr>
-        </p:nvSpPr>
-        <p:spPr/>
-        <p:txBody>
-          <a:bodyPr/>
-          <a:lstStyle/>
-          <a:p>
-            <a:fld id="{EE000EEB-8338-48D7-8EE8-EE0082EF7602}" type="slidenum">
-              <a:rPr lang="en-US" smtClean="0"/>
-              <a:t>19</a:t>
-            </a:fld>
-            <a:endParaRPr lang="en-US" dirty="0"/>
-          </a:p>
-        </p:txBody>
-      </p:sp>
-    </p:spTree>
-    <p:extLst>
-      <p:ext uri="{BB962C8B-B14F-4D97-AF65-F5344CB8AC3E}">
-        <p14:creationId xmlns:p14="http://schemas.microsoft.com/office/powerpoint/2010/main" val="2206855608"/>
       </p:ext>
     </p:extLst>
   </p:cSld>
@@ -33268,6 +36292,114 @@
     <p:extLst>
       <p:ext uri="{BB962C8B-B14F-4D97-AF65-F5344CB8AC3E}">
         <p14:creationId xmlns:p14="http://schemas.microsoft.com/office/powerpoint/2010/main" val="1232110598"/>
+      </p:ext>
+    </p:extLst>
+  </p:cSld>
+  <p:clrMapOvr>
+    <a:masterClrMapping/>
+  </p:clrMapOvr>
+</p:notes>
+</file>
+
+<file path=ppt/notesSlides/notesSlide20.xml><?xml version="1.0" encoding="utf-8"?>
+<p:notes xmlns:a="http://schemas.openxmlformats.org/drawingml/2006/main" xmlns:r="http://schemas.openxmlformats.org/officeDocument/2006/relationships" xmlns:p="http://schemas.openxmlformats.org/presentationml/2006/main">
+  <p:cSld>
+    <p:spTree>
+      <p:nvGrpSpPr>
+        <p:cNvPr id="1" name="">
+          <a:extLst>
+            <a:ext uri="{FF2B5EF4-FFF2-40B4-BE49-F238E27FC236}">
+              <a16:creationId xmlns:a16="http://schemas.microsoft.com/office/drawing/2014/main" id="{451F58EE-9F16-565C-5074-55CD7D9CF36C}"/>
+            </a:ext>
+          </a:extLst>
+        </p:cNvPr>
+        <p:cNvGrpSpPr/>
+        <p:nvPr/>
+      </p:nvGrpSpPr>
+      <p:grpSpPr>
+        <a:xfrm>
+          <a:off x="0" y="0"/>
+          <a:ext cx="0" cy="0"/>
+          <a:chOff x="0" y="0"/>
+          <a:chExt cx="0" cy="0"/>
+        </a:xfrm>
+      </p:grpSpPr>
+      <p:sp>
+        <p:nvSpPr>
+          <p:cNvPr id="2" name="Slide Image Placeholder 1">
+            <a:extLst>
+              <a:ext uri="{FF2B5EF4-FFF2-40B4-BE49-F238E27FC236}">
+                <a16:creationId xmlns:a16="http://schemas.microsoft.com/office/drawing/2014/main" id="{A984ED33-2BA9-6CC1-6F71-B1599E260BEE}"/>
+              </a:ext>
+            </a:extLst>
+          </p:cNvPr>
+          <p:cNvSpPr>
+            <a:spLocks noGrp="1" noRot="1" noChangeAspect="1"/>
+          </p:cNvSpPr>
+          <p:nvPr>
+            <p:ph type="sldImg"/>
+          </p:nvPr>
+        </p:nvSpPr>
+        <p:spPr/>
+      </p:sp>
+      <p:sp>
+        <p:nvSpPr>
+          <p:cNvPr id="3" name="Notes Placeholder 2">
+            <a:extLst>
+              <a:ext uri="{FF2B5EF4-FFF2-40B4-BE49-F238E27FC236}">
+                <a16:creationId xmlns:a16="http://schemas.microsoft.com/office/drawing/2014/main" id="{0FF23E64-76D7-AACB-7684-CF099B8CE35E}"/>
+              </a:ext>
+            </a:extLst>
+          </p:cNvPr>
+          <p:cNvSpPr>
+            <a:spLocks noGrp="1"/>
+          </p:cNvSpPr>
+          <p:nvPr>
+            <p:ph type="body" idx="1"/>
+          </p:nvPr>
+        </p:nvSpPr>
+        <p:spPr/>
+        <p:txBody>
+          <a:bodyPr/>
+          <a:lstStyle/>
+          <a:p>
+            <a:endParaRPr lang="en-US" dirty="0"/>
+          </a:p>
+        </p:txBody>
+      </p:sp>
+      <p:sp>
+        <p:nvSpPr>
+          <p:cNvPr id="4" name="Slide Number Placeholder 3">
+            <a:extLst>
+              <a:ext uri="{FF2B5EF4-FFF2-40B4-BE49-F238E27FC236}">
+                <a16:creationId xmlns:a16="http://schemas.microsoft.com/office/drawing/2014/main" id="{BF5A1AE1-5887-CCE4-C29A-7D236991820C}"/>
+              </a:ext>
+            </a:extLst>
+          </p:cNvPr>
+          <p:cNvSpPr>
+            <a:spLocks noGrp="1"/>
+          </p:cNvSpPr>
+          <p:nvPr>
+            <p:ph type="sldNum" sz="quarter" idx="5"/>
+          </p:nvPr>
+        </p:nvSpPr>
+        <p:spPr/>
+        <p:txBody>
+          <a:bodyPr/>
+          <a:lstStyle/>
+          <a:p>
+            <a:fld id="{EE000EEB-8338-48D7-8EE8-EE0082EF7602}" type="slidenum">
+              <a:rPr lang="en-US" smtClean="0"/>
+              <a:t>20</a:t>
+            </a:fld>
+            <a:endParaRPr lang="en-US" dirty="0"/>
+          </a:p>
+        </p:txBody>
+      </p:sp>
+    </p:spTree>
+    <p:extLst>
+      <p:ext uri="{BB962C8B-B14F-4D97-AF65-F5344CB8AC3E}">
+        <p14:creationId xmlns:p14="http://schemas.microsoft.com/office/powerpoint/2010/main" val="2206855608"/>
       </p:ext>
     </p:extLst>
   </p:cSld>
@@ -34216,7 +37348,7 @@
           <a:p>
             <a:fld id="{4AAD347D-5ACD-4C99-B74B-A9C85AD731AF}" type="datetimeFigureOut">
               <a:rPr lang="en-US" dirty="0"/>
-              <a:t>1/19/2026</a:t>
+              <a:t>1/20/2026</a:t>
             </a:fld>
             <a:endParaRPr lang="en-US" dirty="0"/>
           </a:p>
@@ -34486,7 +37618,7 @@
           <a:p>
             <a:fld id="{4509A250-FF31-4206-8172-F9D3106AACB1}" type="datetimeFigureOut">
               <a:rPr lang="en-US" dirty="0"/>
-              <a:t>1/19/2026</a:t>
+              <a:t>1/20/2026</a:t>
             </a:fld>
             <a:endParaRPr lang="en-US" dirty="0"/>
           </a:p>
@@ -34675,7 +37807,7 @@
           <a:p>
             <a:fld id="{4509A250-FF31-4206-8172-F9D3106AACB1}" type="datetimeFigureOut">
               <a:rPr lang="en-US" dirty="0"/>
-              <a:t>1/19/2026</a:t>
+              <a:t>1/20/2026</a:t>
             </a:fld>
             <a:endParaRPr lang="en-US" dirty="0"/>
           </a:p>
@@ -34938,7 +38070,7 @@
           <a:p>
             <a:fld id="{4509A250-FF31-4206-8172-F9D3106AACB1}" type="datetimeFigureOut">
               <a:rPr lang="en-US" dirty="0"/>
-              <a:t>1/19/2026</a:t>
+              <a:t>1/20/2026</a:t>
             </a:fld>
             <a:endParaRPr lang="en-US" dirty="0"/>
           </a:p>
@@ -35265,7 +38397,7 @@
           <a:p>
             <a:fld id="{4509A250-FF31-4206-8172-F9D3106AACB1}" type="datetimeFigureOut">
               <a:rPr lang="en-US" dirty="0"/>
-              <a:t>1/19/2026</a:t>
+              <a:t>1/20/2026</a:t>
             </a:fld>
             <a:endParaRPr lang="en-US" dirty="0"/>
           </a:p>
@@ -35870,7 +39002,7 @@
           <a:p>
             <a:fld id="{4509A250-FF31-4206-8172-F9D3106AACB1}" type="datetimeFigureOut">
               <a:rPr lang="en-US" dirty="0"/>
-              <a:t>1/19/2026</a:t>
+              <a:t>1/20/2026</a:t>
             </a:fld>
             <a:endParaRPr lang="en-US" dirty="0"/>
           </a:p>
@@ -36712,7 +39844,7 @@
           <a:p>
             <a:fld id="{4509A250-FF31-4206-8172-F9D3106AACB1}" type="datetimeFigureOut">
               <a:rPr lang="en-US" dirty="0"/>
-              <a:t>1/19/2026</a:t>
+              <a:t>1/20/2026</a:t>
             </a:fld>
             <a:endParaRPr lang="en-US" dirty="0"/>
           </a:p>
@@ -36877,7 +40009,7 @@
           <a:p>
             <a:fld id="{4509A250-FF31-4206-8172-F9D3106AACB1}" type="datetimeFigureOut">
               <a:rPr lang="en-US" dirty="0"/>
-              <a:t>1/19/2026</a:t>
+              <a:t>1/20/2026</a:t>
             </a:fld>
             <a:endParaRPr lang="en-US" dirty="0"/>
           </a:p>
@@ -37052,7 +40184,7 @@
           <a:p>
             <a:fld id="{4509A250-FF31-4206-8172-F9D3106AACB1}" type="datetimeFigureOut">
               <a:rPr lang="en-US" dirty="0"/>
-              <a:t>1/19/2026</a:t>
+              <a:t>1/20/2026</a:t>
             </a:fld>
             <a:endParaRPr lang="en-US" dirty="0"/>
           </a:p>
@@ -37217,7 +40349,7 @@
           <a:p>
             <a:fld id="{4509A250-FF31-4206-8172-F9D3106AACB1}" type="datetimeFigureOut">
               <a:rPr lang="en-US" dirty="0"/>
-              <a:t>1/19/2026</a:t>
+              <a:t>1/20/2026</a:t>
             </a:fld>
             <a:endParaRPr lang="en-US" dirty="0"/>
           </a:p>
@@ -37456,7 +40588,7 @@
           <a:p>
             <a:fld id="{4509A250-FF31-4206-8172-F9D3106AACB1}" type="datetimeFigureOut">
               <a:rPr lang="en-US" dirty="0"/>
-              <a:t>1/19/2026</a:t>
+              <a:t>1/20/2026</a:t>
             </a:fld>
             <a:endParaRPr lang="en-US" dirty="0"/>
           </a:p>
@@ -37743,7 +40875,7 @@
           <a:p>
             <a:fld id="{4509A250-FF31-4206-8172-F9D3106AACB1}" type="datetimeFigureOut">
               <a:rPr lang="en-US" dirty="0"/>
-              <a:t>1/19/2026</a:t>
+              <a:t>1/20/2026</a:t>
             </a:fld>
             <a:endParaRPr lang="en-US" dirty="0"/>
           </a:p>
@@ -38176,7 +41308,7 @@
           <a:p>
             <a:fld id="{4509A250-FF31-4206-8172-F9D3106AACB1}" type="datetimeFigureOut">
               <a:rPr lang="en-US" dirty="0"/>
-              <a:t>1/19/2026</a:t>
+              <a:t>1/20/2026</a:t>
             </a:fld>
             <a:endParaRPr lang="en-US" dirty="0"/>
           </a:p>
@@ -38289,7 +41421,7 @@
           <a:p>
             <a:fld id="{4509A250-FF31-4206-8172-F9D3106AACB1}" type="datetimeFigureOut">
               <a:rPr lang="en-US" dirty="0"/>
-              <a:t>1/19/2026</a:t>
+              <a:t>1/20/2026</a:t>
             </a:fld>
             <a:endParaRPr lang="en-US" dirty="0"/>
           </a:p>
@@ -38379,7 +41511,7 @@
           <a:p>
             <a:fld id="{4509A250-FF31-4206-8172-F9D3106AACB1}" type="datetimeFigureOut">
               <a:rPr lang="en-US" dirty="0"/>
-              <a:t>1/19/2026</a:t>
+              <a:t>1/20/2026</a:t>
             </a:fld>
             <a:endParaRPr lang="en-US" dirty="0"/>
           </a:p>
@@ -38653,7 +41785,7 @@
           <a:p>
             <a:fld id="{4509A250-FF31-4206-8172-F9D3106AACB1}" type="datetimeFigureOut">
               <a:rPr lang="en-US" dirty="0"/>
-              <a:t>1/19/2026</a:t>
+              <a:t>1/20/2026</a:t>
             </a:fld>
             <a:endParaRPr lang="en-US" dirty="0"/>
           </a:p>
@@ -38923,7 +42055,7 @@
           <a:p>
             <a:fld id="{4509A250-FF31-4206-8172-F9D3106AACB1}" type="datetimeFigureOut">
               <a:rPr lang="en-US" dirty="0"/>
-              <a:t>1/19/2026</a:t>
+              <a:t>1/20/2026</a:t>
             </a:fld>
             <a:endParaRPr lang="en-US" dirty="0"/>
           </a:p>
@@ -39361,7 +42493,7 @@
           <a:p>
             <a:fld id="{4509A250-FF31-4206-8172-F9D3106AACB1}" type="datetimeFigureOut">
               <a:rPr lang="en-US" dirty="0"/>
-              <a:t>1/19/2026</a:t>
+              <a:t>1/20/2026</a:t>
             </a:fld>
             <a:endParaRPr lang="en-US" dirty="0"/>
           </a:p>
@@ -45184,6 +48316,180 @@
         <p:cNvPr id="1" name="">
           <a:extLst>
             <a:ext uri="{FF2B5EF4-FFF2-40B4-BE49-F238E27FC236}">
+              <a16:creationId xmlns:a16="http://schemas.microsoft.com/office/drawing/2014/main" id="{0CC0224E-FBBF-DCF2-BCE0-F89D770B9121}"/>
+            </a:ext>
+          </a:extLst>
+        </p:cNvPr>
+        <p:cNvGrpSpPr/>
+        <p:nvPr/>
+      </p:nvGrpSpPr>
+      <p:grpSpPr>
+        <a:xfrm>
+          <a:off x="0" y="0"/>
+          <a:ext cx="0" cy="0"/>
+          <a:chOff x="0" y="0"/>
+          <a:chExt cx="0" cy="0"/>
+        </a:xfrm>
+      </p:grpSpPr>
+      <p:pic>
+        <p:nvPicPr>
+          <p:cNvPr id="5" name="Picture 4" descr="chain links">
+            <a:extLst>
+              <a:ext uri="{FF2B5EF4-FFF2-40B4-BE49-F238E27FC236}">
+                <a16:creationId xmlns:a16="http://schemas.microsoft.com/office/drawing/2014/main" id="{DD2F1915-0578-BFD3-9A84-EC539FE67EA3}"/>
+              </a:ext>
+            </a:extLst>
+          </p:cNvPr>
+          <p:cNvPicPr>
+            <a:picLocks noChangeAspect="1"/>
+          </p:cNvPicPr>
+          <p:nvPr/>
+        </p:nvPicPr>
+        <p:blipFill rotWithShape="1">
+          <a:blip r:embed="rId3">
+            <a:duotone>
+              <a:prstClr val="black"/>
+              <a:schemeClr val="accent5">
+                <a:tint val="45000"/>
+                <a:satMod val="400000"/>
+              </a:schemeClr>
+            </a:duotone>
+            <a:alphaModFix amt="25000"/>
+          </a:blip>
+          <a:srcRect t="23391" r="9091"/>
+          <a:stretch/>
+        </p:blipFill>
+        <p:spPr>
+          <a:xfrm>
+            <a:off x="0" y="10"/>
+            <a:ext cx="12191980" cy="6857990"/>
+          </a:xfrm>
+          <a:prstGeom prst="rect">
+            <a:avLst/>
+          </a:prstGeom>
+        </p:spPr>
+      </p:pic>
+      <p:pic>
+        <p:nvPicPr>
+          <p:cNvPr id="11" name="Picture 10" descr="A white circle with a blue circle with a blue circle with a blue circle with a white circle with a blue circle with a blue circle with a white circle with a blue circle with a blue circle&#10;&#10;AI-generated content may be incorrect.">
+            <a:extLst>
+              <a:ext uri="{FF2B5EF4-FFF2-40B4-BE49-F238E27FC236}">
+                <a16:creationId xmlns:a16="http://schemas.microsoft.com/office/drawing/2014/main" id="{0F598311-938F-38BB-7988-5E42EF16CBD5}"/>
+              </a:ext>
+            </a:extLst>
+          </p:cNvPr>
+          <p:cNvPicPr>
+            <a:picLocks noChangeAspect="1"/>
+          </p:cNvPicPr>
+          <p:nvPr/>
+        </p:nvPicPr>
+        <p:blipFill>
+          <a:blip r:embed="rId4"/>
+          <a:stretch>
+            <a:fillRect/>
+          </a:stretch>
+        </p:blipFill>
+        <p:spPr>
+          <a:xfrm>
+            <a:off x="3661894" y="1055718"/>
+            <a:ext cx="5675290" cy="3424467"/>
+          </a:xfrm>
+          <a:prstGeom prst="rect">
+            <a:avLst/>
+          </a:prstGeom>
+          <a:ln>
+            <a:noFill/>
+          </a:ln>
+          <a:effectLst>
+            <a:softEdge rad="112500"/>
+          </a:effectLst>
+        </p:spPr>
+      </p:pic>
+      <p:sp>
+        <p:nvSpPr>
+          <p:cNvPr id="2" name="Title 1">
+            <a:extLst>
+              <a:ext uri="{FF2B5EF4-FFF2-40B4-BE49-F238E27FC236}">
+                <a16:creationId xmlns:a16="http://schemas.microsoft.com/office/drawing/2014/main" id="{33C9C9B5-0B44-AD56-606E-CF46AAE42647}"/>
+              </a:ext>
+            </a:extLst>
+          </p:cNvPr>
+          <p:cNvSpPr>
+            <a:spLocks noGrp="1"/>
+          </p:cNvSpPr>
+          <p:nvPr>
+            <p:ph type="ctrTitle"/>
+          </p:nvPr>
+        </p:nvSpPr>
+        <p:spPr>
+          <a:xfrm>
+            <a:off x="344498" y="575330"/>
+            <a:ext cx="7602064" cy="1266497"/>
+          </a:xfrm>
+        </p:spPr>
+        <p:txBody>
+          <a:bodyPr anchor="ctr">
+            <a:normAutofit/>
+          </a:bodyPr>
+          <a:lstStyle/>
+          <a:p>
+            <a:r>
+              <a:rPr lang="en-US" altLang="zh-CN" sz="6000" b="1" dirty="0"/>
+              <a:t>Learn Next.js</a:t>
+            </a:r>
+            <a:endParaRPr lang="ru-RU" sz="6000" b="1" dirty="0"/>
+          </a:p>
+        </p:txBody>
+      </p:sp>
+      <p:graphicFrame>
+        <p:nvGraphicFramePr>
+          <p:cNvPr id="12" name="Diagram 11">
+            <a:extLst>
+              <a:ext uri="{FF2B5EF4-FFF2-40B4-BE49-F238E27FC236}">
+                <a16:creationId xmlns:a16="http://schemas.microsoft.com/office/drawing/2014/main" id="{0BA4EC0A-CB15-D8BB-A5A0-B712501C96D3}"/>
+              </a:ext>
+            </a:extLst>
+          </p:cNvPr>
+          <p:cNvGraphicFramePr/>
+          <p:nvPr>
+            <p:extLst>
+              <p:ext uri="{D42A27DB-BD31-4B8C-83A1-F6EECF244321}">
+                <p14:modId xmlns:p14="http://schemas.microsoft.com/office/powerpoint/2010/main" val="3974774323"/>
+              </p:ext>
+            </p:extLst>
+          </p:nvPr>
+        </p:nvGraphicFramePr>
+        <p:xfrm>
+          <a:off x="652530" y="4211392"/>
+          <a:ext cx="10985677" cy="2155063"/>
+        </p:xfrm>
+        <a:graphic>
+          <a:graphicData uri="http://schemas.openxmlformats.org/drawingml/2006/diagram">
+            <dgm:relIds xmlns:dgm="http://schemas.openxmlformats.org/drawingml/2006/diagram" xmlns:r="http://schemas.openxmlformats.org/officeDocument/2006/relationships" r:dm="rId5" r:lo="rId6" r:qs="rId7" r:cs="rId8"/>
+          </a:graphicData>
+        </a:graphic>
+      </p:graphicFrame>
+    </p:spTree>
+    <p:extLst>
+      <p:ext uri="{BB962C8B-B14F-4D97-AF65-F5344CB8AC3E}">
+        <p14:creationId xmlns:p14="http://schemas.microsoft.com/office/powerpoint/2010/main" val="3303699240"/>
+      </p:ext>
+    </p:extLst>
+  </p:cSld>
+  <p:clrMapOvr>
+    <a:masterClrMapping/>
+  </p:clrMapOvr>
+</p:sld>
+</file>
+
+<file path=ppt/slides/slide19.xml><?xml version="1.0" encoding="utf-8"?>
+<p:sld xmlns:a="http://schemas.openxmlformats.org/drawingml/2006/main" xmlns:r="http://schemas.openxmlformats.org/officeDocument/2006/relationships" xmlns:p="http://schemas.openxmlformats.org/presentationml/2006/main">
+  <p:cSld>
+    <p:spTree>
+      <p:nvGrpSpPr>
+        <p:cNvPr id="1" name="">
+          <a:extLst>
+            <a:ext uri="{FF2B5EF4-FFF2-40B4-BE49-F238E27FC236}">
               <a16:creationId xmlns:a16="http://schemas.microsoft.com/office/drawing/2014/main" id="{9B24D132-4399-ACE9-4569-0B69A8DCF612}"/>
             </a:ext>
           </a:extLst>
@@ -45389,228 +48695,6 @@
     <p:extLst>
       <p:ext uri="{BB962C8B-B14F-4D97-AF65-F5344CB8AC3E}">
         <p14:creationId xmlns:p14="http://schemas.microsoft.com/office/powerpoint/2010/main" val="64341790"/>
-      </p:ext>
-    </p:extLst>
-  </p:cSld>
-  <p:clrMapOvr>
-    <a:masterClrMapping/>
-  </p:clrMapOvr>
-</p:sld>
-</file>
-
-<file path=ppt/slides/slide19.xml><?xml version="1.0" encoding="utf-8"?>
-<p:sld xmlns:a="http://schemas.openxmlformats.org/drawingml/2006/main" xmlns:r="http://schemas.openxmlformats.org/officeDocument/2006/relationships" xmlns:p="http://schemas.openxmlformats.org/presentationml/2006/main">
-  <p:cSld>
-    <p:spTree>
-      <p:nvGrpSpPr>
-        <p:cNvPr id="1" name="">
-          <a:extLst>
-            <a:ext uri="{FF2B5EF4-FFF2-40B4-BE49-F238E27FC236}">
-              <a16:creationId xmlns:a16="http://schemas.microsoft.com/office/drawing/2014/main" id="{92F165AF-FB62-51DB-6D92-389FDFF88DA7}"/>
-            </a:ext>
-          </a:extLst>
-        </p:cNvPr>
-        <p:cNvGrpSpPr/>
-        <p:nvPr/>
-      </p:nvGrpSpPr>
-      <p:grpSpPr>
-        <a:xfrm>
-          <a:off x="0" y="0"/>
-          <a:ext cx="0" cy="0"/>
-          <a:chOff x="0" y="0"/>
-          <a:chExt cx="0" cy="0"/>
-        </a:xfrm>
-      </p:grpSpPr>
-      <p:pic>
-        <p:nvPicPr>
-          <p:cNvPr id="5" name="Picture 4" descr="chain links">
-            <a:extLst>
-              <a:ext uri="{FF2B5EF4-FFF2-40B4-BE49-F238E27FC236}">
-                <a16:creationId xmlns:a16="http://schemas.microsoft.com/office/drawing/2014/main" id="{50C3019B-9A59-E401-0A90-6F64498924F6}"/>
-              </a:ext>
-            </a:extLst>
-          </p:cNvPr>
-          <p:cNvPicPr>
-            <a:picLocks noChangeAspect="1"/>
-          </p:cNvPicPr>
-          <p:nvPr/>
-        </p:nvPicPr>
-        <p:blipFill rotWithShape="1">
-          <a:blip r:embed="rId3">
-            <a:duotone>
-              <a:prstClr val="black"/>
-              <a:schemeClr val="accent5">
-                <a:tint val="45000"/>
-                <a:satMod val="400000"/>
-              </a:schemeClr>
-            </a:duotone>
-            <a:alphaModFix amt="25000"/>
-          </a:blip>
-          <a:srcRect t="23391" r="9091"/>
-          <a:stretch/>
-        </p:blipFill>
-        <p:spPr>
-          <a:xfrm>
-            <a:off x="0" y="10"/>
-            <a:ext cx="12191980" cy="6857990"/>
-          </a:xfrm>
-          <a:prstGeom prst="rect">
-            <a:avLst/>
-          </a:prstGeom>
-        </p:spPr>
-      </p:pic>
-      <p:pic>
-        <p:nvPicPr>
-          <p:cNvPr id="14" name="Picture 13" descr="A group of cubes with a symbol and a blue light&#10;&#10;AI-generated content may be incorrect.">
-            <a:extLst>
-              <a:ext uri="{FF2B5EF4-FFF2-40B4-BE49-F238E27FC236}">
-                <a16:creationId xmlns:a16="http://schemas.microsoft.com/office/drawing/2014/main" id="{9EA4EC37-781B-0F3A-7A2C-3F764A65F378}"/>
-              </a:ext>
-            </a:extLst>
-          </p:cNvPr>
-          <p:cNvPicPr>
-            <a:picLocks noChangeAspect="1"/>
-          </p:cNvPicPr>
-          <p:nvPr/>
-        </p:nvPicPr>
-        <p:blipFill>
-          <a:blip r:embed="rId4"/>
-          <a:stretch>
-            <a:fillRect/>
-          </a:stretch>
-        </p:blipFill>
-        <p:spPr>
-          <a:xfrm>
-            <a:off x="765928" y="0"/>
-            <a:ext cx="10660144" cy="6858000"/>
-          </a:xfrm>
-          <a:prstGeom prst="rect">
-            <a:avLst/>
-          </a:prstGeom>
-        </p:spPr>
-      </p:pic>
-      <p:graphicFrame>
-        <p:nvGraphicFramePr>
-          <p:cNvPr id="17" name="Diagram 16">
-            <a:extLst>
-              <a:ext uri="{FF2B5EF4-FFF2-40B4-BE49-F238E27FC236}">
-                <a16:creationId xmlns:a16="http://schemas.microsoft.com/office/drawing/2014/main" id="{250F498F-D597-91DE-4C9A-E03DE2BFD6D1}"/>
-              </a:ext>
-            </a:extLst>
-          </p:cNvPr>
-          <p:cNvGraphicFramePr/>
-          <p:nvPr>
-            <p:extLst>
-              <p:ext uri="{D42A27DB-BD31-4B8C-83A1-F6EECF244321}">
-                <p14:modId xmlns:p14="http://schemas.microsoft.com/office/powerpoint/2010/main" val="967940008"/>
-              </p:ext>
-            </p:extLst>
-          </p:nvPr>
-        </p:nvGraphicFramePr>
-        <p:xfrm>
-          <a:off x="2220891" y="4632111"/>
-          <a:ext cx="8128000" cy="1408090"/>
-        </p:xfrm>
-        <a:graphic>
-          <a:graphicData uri="http://schemas.openxmlformats.org/drawingml/2006/diagram">
-            <dgm:relIds xmlns:dgm="http://schemas.openxmlformats.org/drawingml/2006/diagram" xmlns:r="http://schemas.openxmlformats.org/officeDocument/2006/relationships" r:dm="rId5" r:lo="rId6" r:qs="rId7" r:cs="rId8"/>
-          </a:graphicData>
-        </a:graphic>
-      </p:graphicFrame>
-      <p:pic>
-        <p:nvPicPr>
-          <p:cNvPr id="19" name="Picture 18" descr="A blue circle with a black background&#10;&#10;AI-generated content may be incorrect.">
-            <a:extLst>
-              <a:ext uri="{FF2B5EF4-FFF2-40B4-BE49-F238E27FC236}">
-                <a16:creationId xmlns:a16="http://schemas.microsoft.com/office/drawing/2014/main" id="{A6B6E7A8-3E48-E4C9-3A9A-A0EFB6D831CB}"/>
-              </a:ext>
-            </a:extLst>
-          </p:cNvPr>
-          <p:cNvPicPr>
-            <a:picLocks noChangeAspect="1"/>
-          </p:cNvPicPr>
-          <p:nvPr/>
-        </p:nvPicPr>
-        <p:blipFill>
-          <a:blip r:embed="rId10"/>
-          <a:stretch>
-            <a:fillRect/>
-          </a:stretch>
-        </p:blipFill>
-        <p:spPr>
-          <a:xfrm>
-            <a:off x="2769171" y="4926207"/>
-            <a:ext cx="858165" cy="776435"/>
-          </a:xfrm>
-          <a:prstGeom prst="roundRect">
-            <a:avLst>
-              <a:gd name="adj" fmla="val 16667"/>
-            </a:avLst>
-          </a:prstGeom>
-          <a:ln>
-            <a:noFill/>
-          </a:ln>
-          <a:effectLst>
-            <a:outerShdw blurRad="152400" dist="12000" dir="900000" sy="98000" kx="110000" ky="200000" algn="tl" rotWithShape="0">
-              <a:srgbClr val="000000">
-                <a:alpha val="30000"/>
-              </a:srgbClr>
-            </a:outerShdw>
-          </a:effectLst>
-          <a:scene3d>
-            <a:camera prst="perspectiveRelaxed">
-              <a:rot lat="19800000" lon="1200000" rev="20820000"/>
-            </a:camera>
-            <a:lightRig rig="threePt" dir="t"/>
-          </a:scene3d>
-          <a:sp3d contourW="6350" prstMaterial="matte">
-            <a:bevelT w="101600" h="101600"/>
-            <a:contourClr>
-              <a:srgbClr val="969696"/>
-            </a:contourClr>
-          </a:sp3d>
-        </p:spPr>
-      </p:pic>
-      <p:pic>
-        <p:nvPicPr>
-          <p:cNvPr id="3" name="Picture 2" descr="A white circle with a blue circle with a blue circle with a blue circle with a white circle with a blue circle with a blue circle with a white circle with a blue circle with a blue circle&#10;&#10;AI-generated content may be incorrect.">
-            <a:extLst>
-              <a:ext uri="{FF2B5EF4-FFF2-40B4-BE49-F238E27FC236}">
-                <a16:creationId xmlns:a16="http://schemas.microsoft.com/office/drawing/2014/main" id="{BDF53D22-B47B-92BE-1E15-906174A828D6}"/>
-              </a:ext>
-            </a:extLst>
-          </p:cNvPr>
-          <p:cNvPicPr>
-            <a:picLocks noChangeAspect="1"/>
-          </p:cNvPicPr>
-          <p:nvPr/>
-        </p:nvPicPr>
-        <p:blipFill>
-          <a:blip r:embed="rId11"/>
-          <a:stretch>
-            <a:fillRect/>
-          </a:stretch>
-        </p:blipFill>
-        <p:spPr>
-          <a:xfrm>
-            <a:off x="2827177" y="270455"/>
-            <a:ext cx="6915427" cy="4172765"/>
-          </a:xfrm>
-          <a:prstGeom prst="rect">
-            <a:avLst/>
-          </a:prstGeom>
-          <a:ln>
-            <a:noFill/>
-          </a:ln>
-          <a:effectLst>
-            <a:softEdge rad="112500"/>
-          </a:effectLst>
-        </p:spPr>
-      </p:pic>
-    </p:spTree>
-    <p:extLst>
-      <p:ext uri="{BB962C8B-B14F-4D97-AF65-F5344CB8AC3E}">
-        <p14:creationId xmlns:p14="http://schemas.microsoft.com/office/powerpoint/2010/main" val="2895230973"/>
       </p:ext>
     </p:extLst>
   </p:cSld>
@@ -46155,6 +49239,228 @@
     <p:extLst>
       <p:ext uri="{BB962C8B-B14F-4D97-AF65-F5344CB8AC3E}">
         <p14:creationId xmlns:p14="http://schemas.microsoft.com/office/powerpoint/2010/main" val="1953970769"/>
+      </p:ext>
+    </p:extLst>
+  </p:cSld>
+  <p:clrMapOvr>
+    <a:masterClrMapping/>
+  </p:clrMapOvr>
+</p:sld>
+</file>
+
+<file path=ppt/slides/slide20.xml><?xml version="1.0" encoding="utf-8"?>
+<p:sld xmlns:a="http://schemas.openxmlformats.org/drawingml/2006/main" xmlns:r="http://schemas.openxmlformats.org/officeDocument/2006/relationships" xmlns:p="http://schemas.openxmlformats.org/presentationml/2006/main">
+  <p:cSld>
+    <p:spTree>
+      <p:nvGrpSpPr>
+        <p:cNvPr id="1" name="">
+          <a:extLst>
+            <a:ext uri="{FF2B5EF4-FFF2-40B4-BE49-F238E27FC236}">
+              <a16:creationId xmlns:a16="http://schemas.microsoft.com/office/drawing/2014/main" id="{92F165AF-FB62-51DB-6D92-389FDFF88DA7}"/>
+            </a:ext>
+          </a:extLst>
+        </p:cNvPr>
+        <p:cNvGrpSpPr/>
+        <p:nvPr/>
+      </p:nvGrpSpPr>
+      <p:grpSpPr>
+        <a:xfrm>
+          <a:off x="0" y="0"/>
+          <a:ext cx="0" cy="0"/>
+          <a:chOff x="0" y="0"/>
+          <a:chExt cx="0" cy="0"/>
+        </a:xfrm>
+      </p:grpSpPr>
+      <p:pic>
+        <p:nvPicPr>
+          <p:cNvPr id="5" name="Picture 4" descr="chain links">
+            <a:extLst>
+              <a:ext uri="{FF2B5EF4-FFF2-40B4-BE49-F238E27FC236}">
+                <a16:creationId xmlns:a16="http://schemas.microsoft.com/office/drawing/2014/main" id="{50C3019B-9A59-E401-0A90-6F64498924F6}"/>
+              </a:ext>
+            </a:extLst>
+          </p:cNvPr>
+          <p:cNvPicPr>
+            <a:picLocks noChangeAspect="1"/>
+          </p:cNvPicPr>
+          <p:nvPr/>
+        </p:nvPicPr>
+        <p:blipFill rotWithShape="1">
+          <a:blip r:embed="rId3">
+            <a:duotone>
+              <a:prstClr val="black"/>
+              <a:schemeClr val="accent5">
+                <a:tint val="45000"/>
+                <a:satMod val="400000"/>
+              </a:schemeClr>
+            </a:duotone>
+            <a:alphaModFix amt="25000"/>
+          </a:blip>
+          <a:srcRect t="23391" r="9091"/>
+          <a:stretch/>
+        </p:blipFill>
+        <p:spPr>
+          <a:xfrm>
+            <a:off x="0" y="10"/>
+            <a:ext cx="12191980" cy="6857990"/>
+          </a:xfrm>
+          <a:prstGeom prst="rect">
+            <a:avLst/>
+          </a:prstGeom>
+        </p:spPr>
+      </p:pic>
+      <p:pic>
+        <p:nvPicPr>
+          <p:cNvPr id="14" name="Picture 13" descr="A group of cubes with a symbol and a blue light&#10;&#10;AI-generated content may be incorrect.">
+            <a:extLst>
+              <a:ext uri="{FF2B5EF4-FFF2-40B4-BE49-F238E27FC236}">
+                <a16:creationId xmlns:a16="http://schemas.microsoft.com/office/drawing/2014/main" id="{9EA4EC37-781B-0F3A-7A2C-3F764A65F378}"/>
+              </a:ext>
+            </a:extLst>
+          </p:cNvPr>
+          <p:cNvPicPr>
+            <a:picLocks noChangeAspect="1"/>
+          </p:cNvPicPr>
+          <p:nvPr/>
+        </p:nvPicPr>
+        <p:blipFill>
+          <a:blip r:embed="rId4"/>
+          <a:stretch>
+            <a:fillRect/>
+          </a:stretch>
+        </p:blipFill>
+        <p:spPr>
+          <a:xfrm>
+            <a:off x="765928" y="0"/>
+            <a:ext cx="10660144" cy="6858000"/>
+          </a:xfrm>
+          <a:prstGeom prst="rect">
+            <a:avLst/>
+          </a:prstGeom>
+        </p:spPr>
+      </p:pic>
+      <p:graphicFrame>
+        <p:nvGraphicFramePr>
+          <p:cNvPr id="17" name="Diagram 16">
+            <a:extLst>
+              <a:ext uri="{FF2B5EF4-FFF2-40B4-BE49-F238E27FC236}">
+                <a16:creationId xmlns:a16="http://schemas.microsoft.com/office/drawing/2014/main" id="{250F498F-D597-91DE-4C9A-E03DE2BFD6D1}"/>
+              </a:ext>
+            </a:extLst>
+          </p:cNvPr>
+          <p:cNvGraphicFramePr/>
+          <p:nvPr>
+            <p:extLst>
+              <p:ext uri="{D42A27DB-BD31-4B8C-83A1-F6EECF244321}">
+                <p14:modId xmlns:p14="http://schemas.microsoft.com/office/powerpoint/2010/main" val="967940008"/>
+              </p:ext>
+            </p:extLst>
+          </p:nvPr>
+        </p:nvGraphicFramePr>
+        <p:xfrm>
+          <a:off x="2220891" y="4632111"/>
+          <a:ext cx="8128000" cy="1408090"/>
+        </p:xfrm>
+        <a:graphic>
+          <a:graphicData uri="http://schemas.openxmlformats.org/drawingml/2006/diagram">
+            <dgm:relIds xmlns:dgm="http://schemas.openxmlformats.org/drawingml/2006/diagram" xmlns:r="http://schemas.openxmlformats.org/officeDocument/2006/relationships" r:dm="rId5" r:lo="rId6" r:qs="rId7" r:cs="rId8"/>
+          </a:graphicData>
+        </a:graphic>
+      </p:graphicFrame>
+      <p:pic>
+        <p:nvPicPr>
+          <p:cNvPr id="19" name="Picture 18" descr="A blue circle with a black background&#10;&#10;AI-generated content may be incorrect.">
+            <a:extLst>
+              <a:ext uri="{FF2B5EF4-FFF2-40B4-BE49-F238E27FC236}">
+                <a16:creationId xmlns:a16="http://schemas.microsoft.com/office/drawing/2014/main" id="{A6B6E7A8-3E48-E4C9-3A9A-A0EFB6D831CB}"/>
+              </a:ext>
+            </a:extLst>
+          </p:cNvPr>
+          <p:cNvPicPr>
+            <a:picLocks noChangeAspect="1"/>
+          </p:cNvPicPr>
+          <p:nvPr/>
+        </p:nvPicPr>
+        <p:blipFill>
+          <a:blip r:embed="rId10"/>
+          <a:stretch>
+            <a:fillRect/>
+          </a:stretch>
+        </p:blipFill>
+        <p:spPr>
+          <a:xfrm>
+            <a:off x="2769171" y="4926207"/>
+            <a:ext cx="858165" cy="776435"/>
+          </a:xfrm>
+          <a:prstGeom prst="roundRect">
+            <a:avLst>
+              <a:gd name="adj" fmla="val 16667"/>
+            </a:avLst>
+          </a:prstGeom>
+          <a:ln>
+            <a:noFill/>
+          </a:ln>
+          <a:effectLst>
+            <a:outerShdw blurRad="152400" dist="12000" dir="900000" sy="98000" kx="110000" ky="200000" algn="tl" rotWithShape="0">
+              <a:srgbClr val="000000">
+                <a:alpha val="30000"/>
+              </a:srgbClr>
+            </a:outerShdw>
+          </a:effectLst>
+          <a:scene3d>
+            <a:camera prst="perspectiveRelaxed">
+              <a:rot lat="19800000" lon="1200000" rev="20820000"/>
+            </a:camera>
+            <a:lightRig rig="threePt" dir="t"/>
+          </a:scene3d>
+          <a:sp3d contourW="6350" prstMaterial="matte">
+            <a:bevelT w="101600" h="101600"/>
+            <a:contourClr>
+              <a:srgbClr val="969696"/>
+            </a:contourClr>
+          </a:sp3d>
+        </p:spPr>
+      </p:pic>
+      <p:pic>
+        <p:nvPicPr>
+          <p:cNvPr id="3" name="Picture 2" descr="A white circle with a blue circle with a blue circle with a blue circle with a white circle with a blue circle with a blue circle with a white circle with a blue circle with a blue circle&#10;&#10;AI-generated content may be incorrect.">
+            <a:extLst>
+              <a:ext uri="{FF2B5EF4-FFF2-40B4-BE49-F238E27FC236}">
+                <a16:creationId xmlns:a16="http://schemas.microsoft.com/office/drawing/2014/main" id="{BDF53D22-B47B-92BE-1E15-906174A828D6}"/>
+              </a:ext>
+            </a:extLst>
+          </p:cNvPr>
+          <p:cNvPicPr>
+            <a:picLocks noChangeAspect="1"/>
+          </p:cNvPicPr>
+          <p:nvPr/>
+        </p:nvPicPr>
+        <p:blipFill>
+          <a:blip r:embed="rId11"/>
+          <a:stretch>
+            <a:fillRect/>
+          </a:stretch>
+        </p:blipFill>
+        <p:spPr>
+          <a:xfrm>
+            <a:off x="2827177" y="270455"/>
+            <a:ext cx="6915427" cy="4172765"/>
+          </a:xfrm>
+          <a:prstGeom prst="rect">
+            <a:avLst/>
+          </a:prstGeom>
+          <a:ln>
+            <a:noFill/>
+          </a:ln>
+          <a:effectLst>
+            <a:softEdge rad="112500"/>
+          </a:effectLst>
+        </p:spPr>
+      </p:pic>
+    </p:spTree>
+    <p:extLst>
+      <p:ext uri="{BB962C8B-B14F-4D97-AF65-F5344CB8AC3E}">
+        <p14:creationId xmlns:p14="http://schemas.microsoft.com/office/powerpoint/2010/main" val="2895230973"/>
       </p:ext>
     </p:extLst>
   </p:cSld>
@@ -50962,15 +54268,6 @@
 </file>
 
 <file path=customXml/item2.xml><?xml version="1.0" encoding="utf-8"?>
-<?mso-contentType ?>
-<FormTemplates xmlns="http://schemas.microsoft.com/sharepoint/v3/contenttype/forms">
-  <Display>DocumentLibraryForm</Display>
-  <Edit>DocumentLibraryForm</Edit>
-  <New>DocumentLibraryForm</New>
-</FormTemplates>
-</file>
-
-<file path=customXml/item3.xml><?xml version="1.0" encoding="utf-8"?>
 <ct:contentTypeSchema xmlns:ct="http://schemas.microsoft.com/office/2006/metadata/contentType" xmlns:ma="http://schemas.microsoft.com/office/2006/metadata/properties/metaAttributes" ct:_="" ma:_="" ma:contentTypeName="Document" ma:contentTypeID="0x01010079F111ED35F8CC479449609E8A0923A6" ma:contentTypeVersion="12" ma:contentTypeDescription="Create a new document." ma:contentTypeScope="" ma:versionID="93813dd7ca6ad654711aa0ab317e03a3">
   <xsd:schema xmlns:xsd="http://www.w3.org/2001/XMLSchema" xmlns:xs="http://www.w3.org/2001/XMLSchema" xmlns:p="http://schemas.microsoft.com/office/2006/metadata/properties" xmlns:ns2="71af3243-3dd4-4a8d-8c0d-dd76da1f02a5" xmlns:ns3="16c05727-aa75-4e4a-9b5f-8a80a1165891" targetNamespace="http://schemas.microsoft.com/office/2006/metadata/properties" ma:root="true" ma:fieldsID="f11dc0ce689dd3925e84e4e35398c6e7" ns2:_="" ns3:_="">
     <xsd:import namespace="71af3243-3dd4-4a8d-8c0d-dd76da1f02a5"/>
@@ -51191,6 +54488,15 @@
 </ct:contentTypeSchema>
 </file>
 
+<file path=customXml/item3.xml><?xml version="1.0" encoding="utf-8"?>
+<?mso-contentType ?>
+<FormTemplates xmlns="http://schemas.microsoft.com/sharepoint/v3/contenttype/forms">
+  <Display>DocumentLibraryForm</Display>
+  <Edit>DocumentLibraryForm</Edit>
+  <New>DocumentLibraryForm</New>
+</FormTemplates>
+</file>
+
 <file path=customXml/itemProps1.xml><?xml version="1.0" encoding="utf-8"?>
 <ds:datastoreItem xmlns:ds="http://schemas.openxmlformats.org/officeDocument/2006/customXml" ds:itemID="{048C88F1-1664-415F-AFCE-F6CF45809817}">
   <ds:schemaRefs>
@@ -51202,14 +54508,6 @@
 </file>
 
 <file path=customXml/itemProps2.xml><?xml version="1.0" encoding="utf-8"?>
-<ds:datastoreItem xmlns:ds="http://schemas.openxmlformats.org/officeDocument/2006/customXml" ds:itemID="{0D16958A-754B-4396-9457-FD7A427A37DD}">
-  <ds:schemaRefs>
-    <ds:schemaRef ds:uri="http://schemas.microsoft.com/sharepoint/v3/contenttype/forms"/>
-  </ds:schemaRefs>
-</ds:datastoreItem>
-</file>
-
-<file path=customXml/itemProps3.xml><?xml version="1.0" encoding="utf-8"?>
 <ds:datastoreItem xmlns:ds="http://schemas.openxmlformats.org/officeDocument/2006/customXml" ds:itemID="{CC30393A-FEC6-4A44-9E4A-6EA49F1F7DC0}">
   <ds:schemaRefs>
     <ds:schemaRef ds:uri="http://schemas.microsoft.com/office/2006/metadata/contentType"/>
@@ -51226,4 +54524,12 @@
     <ds:schemaRef ds:uri="http://schemas.microsoft.com/internal/obd"/>
   </ds:schemaRefs>
 </ds:datastoreItem>
+</file>
+
+<file path=customXml/itemProps3.xml><?xml version="1.0" encoding="utf-8"?>
+<ds:datastoreItem xmlns:ds="http://schemas.openxmlformats.org/officeDocument/2006/customXml" ds:itemID="{0D16958A-754B-4396-9457-FD7A427A37DD}">
+  <ds:schemaRefs>
+    <ds:schemaRef ds:uri="http://schemas.microsoft.com/sharepoint/v3/contenttype/forms"/>
+  </ds:schemaRefs>
+</ds:datastoreItem>
 </file>